--- a/sk_valuation_project/output/SK_Funding_v3_editable.pptx
+++ b/sk_valuation_project/output/SK_Funding_v3_editable.pptx
@@ -2439,7 +2439,7 @@
                           <a:ea typeface="IBM Plex Sans KR" pitchFamily="34" charset="-122"/>
                           <a:cs typeface="IBM Plex Sans KR" pitchFamily="34" charset="-120"/>
                         </a:rPr>
-                        <a:t>ex-AMPC EBITDA</a:t>
+                        <a:t>개조 ex-AMPC EBITDA</a:t>
                       </a:r>
                       <a:endParaRPr lang="en-US" sz="950" dirty="0">
                         <a:latin typeface="IBM Plex Sans KR" charset="0"/>
@@ -2508,6 +2508,144 @@
                           <a:cs typeface="IBM Plex Mono" pitchFamily="34" charset="-120"/>
                         </a:rPr>
                         <a:t>9% (목표)</a:t>
+                      </a:r>
+                      <a:endParaRPr lang="en-US" sz="950" dirty="0">
+                        <a:latin typeface="IBM Plex Mono" charset="0"/>
+                        <a:ea typeface="IBM Plex Mono" charset="0"/>
+                        <a:cs typeface="IBM Plex Mono" charset="0"/>
+                      </a:endParaRPr>
+                    </a:p>
+                  </a:txBody>
+                  <a:tcPr marL="101600" marR="101600" marT="25400" marB="25400" anchor="ctr">
+                    <a:lnL w="6350" cap="flat" cmpd="sng" algn="ctr">
+                      <a:solidFill>
+                        <a:srgbClr val="ECE6DC"/>
+                      </a:solidFill>
+                      <a:prstDash val="solid"/>
+                      <a:round/>
+                      <a:headEnd type="none" w="med" len="med"/>
+                      <a:tailEnd type="none" w="med" len="med"/>
+                    </a:lnL>
+                    <a:lnR w="6350" cap="flat" cmpd="sng" algn="ctr">
+                      <a:solidFill>
+                        <a:srgbClr val="ECE6DC"/>
+                      </a:solidFill>
+                      <a:prstDash val="solid"/>
+                      <a:round/>
+                      <a:headEnd type="none" w="med" len="med"/>
+                      <a:tailEnd type="none" w="med" len="med"/>
+                    </a:lnR>
+                    <a:lnT w="6350" cap="flat" cmpd="sng" algn="ctr">
+                      <a:solidFill>
+                        <a:srgbClr val="ECE6DC"/>
+                      </a:solidFill>
+                      <a:prstDash val="solid"/>
+                      <a:round/>
+                      <a:headEnd type="none" w="med" len="med"/>
+                      <a:tailEnd type="none" w="med" len="med"/>
+                    </a:lnT>
+                    <a:lnB w="6350" cap="flat" cmpd="sng" algn="ctr">
+                      <a:solidFill>
+                        <a:srgbClr val="ECE6DC"/>
+                      </a:solidFill>
+                      <a:prstDash val="solid"/>
+                      <a:round/>
+                      <a:headEnd type="none" w="med" len="med"/>
+                      <a:tailEnd type="none" w="med" len="med"/>
+                    </a:lnB>
+                    <a:solidFill>
+                      <a:srgbClr val="FFFFFF"/>
+                    </a:solidFill>
+                  </a:tcPr>
+                </a:tc>
+              </a:tr>
+              <a:tr h="333756">
+                <a:tc>
+                  <a:txBody>
+                    <a:bodyPr/>
+                    <a:lstStyle/>
+                    <a:p>
+                      <a:pPr indent="0" marL="0">
+                        <a:buNone/>
+                      </a:pPr>
+                      <a:r>
+                        <a:rPr lang="en-US" sz="950" dirty="0">
+                          <a:solidFill>
+                            <a:srgbClr val="6F6960"/>
+                          </a:solidFill>
+                          <a:latin typeface="IBM Plex Sans KR" pitchFamily="34" charset="0"/>
+                          <a:ea typeface="IBM Plex Sans KR" pitchFamily="34" charset="-122"/>
+                          <a:cs typeface="IBM Plex Sans KR" pitchFamily="34" charset="-120"/>
+                        </a:rPr>
+                        <a:t>기저 EBITDA (pre-SOP) ★</a:t>
+                      </a:r>
+                      <a:endParaRPr lang="en-US" sz="950" dirty="0">
+                        <a:latin typeface="IBM Plex Sans KR" charset="0"/>
+                        <a:ea typeface="IBM Plex Sans KR" charset="0"/>
+                        <a:cs typeface="IBM Plex Sans KR" charset="0"/>
+                      </a:endParaRPr>
+                    </a:p>
+                  </a:txBody>
+                  <a:tcPr marL="101600" marR="101600" marT="25400" marB="25400" anchor="ctr">
+                    <a:lnL w="6350" cap="flat" cmpd="sng" algn="ctr">
+                      <a:solidFill>
+                        <a:srgbClr val="ECE6DC"/>
+                      </a:solidFill>
+                      <a:prstDash val="solid"/>
+                      <a:round/>
+                      <a:headEnd type="none" w="med" len="med"/>
+                      <a:tailEnd type="none" w="med" len="med"/>
+                    </a:lnL>
+                    <a:lnR w="6350" cap="flat" cmpd="sng" algn="ctr">
+                      <a:solidFill>
+                        <a:srgbClr val="ECE6DC"/>
+                      </a:solidFill>
+                      <a:prstDash val="solid"/>
+                      <a:round/>
+                      <a:headEnd type="none" w="med" len="med"/>
+                      <a:tailEnd type="none" w="med" len="med"/>
+                    </a:lnR>
+                    <a:lnT w="6350" cap="flat" cmpd="sng" algn="ctr">
+                      <a:solidFill>
+                        <a:srgbClr val="ECE6DC"/>
+                      </a:solidFill>
+                      <a:prstDash val="solid"/>
+                      <a:round/>
+                      <a:headEnd type="none" w="med" len="med"/>
+                      <a:tailEnd type="none" w="med" len="med"/>
+                    </a:lnT>
+                    <a:lnB w="6350" cap="flat" cmpd="sng" algn="ctr">
+                      <a:solidFill>
+                        <a:srgbClr val="ECE6DC"/>
+                      </a:solidFill>
+                      <a:prstDash val="solid"/>
+                      <a:round/>
+                      <a:headEnd type="none" w="med" len="med"/>
+                      <a:tailEnd type="none" w="med" len="med"/>
+                    </a:lnB>
+                    <a:solidFill>
+                      <a:srgbClr val="FFFFFF"/>
+                    </a:solidFill>
+                  </a:tcPr>
+                </a:tc>
+                <a:tc>
+                  <a:txBody>
+                    <a:bodyPr/>
+                    <a:lstStyle/>
+                    <a:p>
+                      <a:pPr algn="r" indent="0" marL="0">
+                        <a:buNone/>
+                      </a:pPr>
+                      <a:r>
+                        <a:rPr lang="en-US" sz="950" b="1" dirty="0">
+                          <a:solidFill>
+                            <a:srgbClr val="1E7A4D"/>
+                          </a:solidFill>
+                          <a:latin typeface="IBM Plex Mono" pitchFamily="34" charset="0"/>
+                          <a:ea typeface="IBM Plex Mono" pitchFamily="34" charset="-122"/>
+                          <a:cs typeface="IBM Plex Mono" pitchFamily="34" charset="-120"/>
+                        </a:rPr>
+                        <a:t>$0.2bn (2026~)</a:t>
                       </a:r>
                       <a:endParaRPr lang="en-US" sz="950" dirty="0">
                         <a:latin typeface="IBM Plex Mono" charset="0"/>
@@ -2716,7 +2854,7 @@
           </p:nvPr>
         </p:nvGraphicFramePr>
         <p:xfrm>
-          <a:off x="566928" y="3913632"/>
+          <a:off x="566928" y="4407408"/>
           <a:ext cx="5074920" cy="914400"/>
         </p:xfrm>
         <a:graphic>
@@ -2836,7 +2974,7 @@
           </p:nvPr>
         </p:nvGraphicFramePr>
         <p:xfrm>
-          <a:off x="566928" y="4297680"/>
+          <a:off x="566928" y="4791456"/>
           <a:ext cx="5074920" cy="914400"/>
         </p:xfrm>
         <a:graphic>
@@ -4048,7 +4186,7 @@
                 <a:ea typeface="IBM Plex Sans KR" pitchFamily="34" charset="-122"/>
                 <a:cs typeface="IBM Plex Sans KR" pitchFamily="34" charset="-120"/>
               </a:rPr>
-              <a:t>ex-AMPC EBITDA 9% → 지분 수익률(FCFE) 충족</a:t>
+              <a:t>SKBA pre-SOP 기저 $0.2bn(2026~) · run-rate ex-AMPC $442mm 유지</a:t>
             </a:r>
             <a:endParaRPr lang="en-US" sz="1050" dirty="0"/>
           </a:p>
@@ -4126,7 +4264,7 @@
                 <a:ea typeface="IBM Plex Sans KR" pitchFamily="34" charset="-122"/>
                 <a:cs typeface="IBM Plex Sans KR" pitchFamily="34" charset="-120"/>
               </a:rPr>
-              <a:t>DCF EV ≈ $3.6bn (밴드 $3.0~4.0bn)</a:t>
+              <a:t>DCF EV ≈ $4.0bn (기저 조기현금 반영·밴드 $3.5~4.5bn)</a:t>
             </a:r>
             <a:endParaRPr lang="en-US" sz="1050" dirty="0"/>
           </a:p>
@@ -4381,7 +4519,7 @@
                 <a:ea typeface="IBM Plex Sans KR" pitchFamily="34" charset="-122"/>
                 <a:cs typeface="IBM Plex Sans KR" pitchFamily="34" charset="-120"/>
               </a:rPr>
-              <a:t>기존 차입</a:t>
+              <a:t>run-rate EBITDA</a:t>
             </a:r>
             <a:endParaRPr lang="en-US" sz="1000" dirty="0"/>
           </a:p>
@@ -4414,13 +4552,13 @@
             <a:r>
               <a:rPr lang="en-US" sz="2600" b="1" dirty="0">
                 <a:solidFill>
-                  <a:srgbClr val="1B1714"/>
+                  <a:srgbClr val="1E7A4D"/>
                 </a:solidFill>
                 <a:latin typeface="Space Grotesk" pitchFamily="34" charset="0"/>
                 <a:ea typeface="Space Grotesk" pitchFamily="34" charset="-122"/>
                 <a:cs typeface="Space Grotesk" pitchFamily="34" charset="-120"/>
               </a:rPr>
-              <a:t>9.0</a:t>
+              <a:t>442</a:t>
             </a:r>
             <a:pPr indent="0" marL="0">
               <a:buNone/>
@@ -4428,13 +4566,13 @@
             <a:r>
               <a:rPr lang="en-US" sz="1200" b="1" dirty="0">
                 <a:solidFill>
-                  <a:srgbClr val="1B1714"/>
+                  <a:srgbClr val="1E7A4D"/>
                 </a:solidFill>
                 <a:latin typeface="Space Grotesk" pitchFamily="34" charset="0"/>
                 <a:ea typeface="Space Grotesk" pitchFamily="34" charset="-122"/>
                 <a:cs typeface="Space Grotesk" pitchFamily="34" charset="-120"/>
               </a:rPr>
-              <a:t>bn</a:t>
+              <a:t>$mm</a:t>
             </a:r>
             <a:endParaRPr lang="en-US" sz="2600" dirty="0"/>
           </a:p>
@@ -4572,7 +4710,7 @@
           <a:noFill/>
           <a:ln w="25400">
             <a:solidFill>
-              <a:srgbClr val="1B1714"/>
+              <a:srgbClr val="C1121F"/>
             </a:solidFill>
             <a:prstDash val="solid"/>
           </a:ln>
@@ -4611,7 +4749,7 @@
                 <a:ea typeface="IBM Plex Sans KR" pitchFamily="34" charset="-122"/>
                 <a:cs typeface="IBM Plex Sans KR" pitchFamily="34" charset="-120"/>
               </a:rPr>
-              <a:t>ASP</a:t>
+              <a:t>DCF EV</a:t>
             </a:r>
             <a:endParaRPr lang="en-US" sz="1000" dirty="0"/>
           </a:p>
@@ -4644,13 +4782,13 @@
             <a:r>
               <a:rPr lang="en-US" sz="2600" b="1" dirty="0">
                 <a:solidFill>
-                  <a:srgbClr val="1B1714"/>
+                  <a:srgbClr val="C1121F"/>
                 </a:solidFill>
                 <a:latin typeface="Space Grotesk" pitchFamily="34" charset="0"/>
                 <a:ea typeface="Space Grotesk" pitchFamily="34" charset="-122"/>
                 <a:cs typeface="Space Grotesk" pitchFamily="34" charset="-120"/>
               </a:rPr>
-              <a:t>155</a:t>
+              <a:t>4.0</a:t>
             </a:r>
             <a:pPr indent="0" marL="0">
               <a:buNone/>
@@ -4658,13 +4796,13 @@
             <a:r>
               <a:rPr lang="en-US" sz="1200" b="1" dirty="0">
                 <a:solidFill>
-                  <a:srgbClr val="1B1714"/>
+                  <a:srgbClr val="C1121F"/>
                 </a:solidFill>
                 <a:latin typeface="Space Grotesk" pitchFamily="34" charset="0"/>
                 <a:ea typeface="Space Grotesk" pitchFamily="34" charset="-122"/>
                 <a:cs typeface="Space Grotesk" pitchFamily="34" charset="-120"/>
               </a:rPr>
-              <a:t>$/kWh</a:t>
+              <a:t>bn</a:t>
             </a:r>
             <a:endParaRPr lang="en-US" sz="2600" dirty="0"/>
           </a:p>
@@ -6665,7 +6803,7 @@
                 <a:ea typeface="IBM Plex Mono" pitchFamily="34" charset="-122"/>
                 <a:cs typeface="IBM Plex Mono" pitchFamily="34" charset="-120"/>
               </a:rPr>
-              <a:t>VALUATION — REQUIRED THRESHOLD</a:t>
+              <a:t>VALUATION — FUNDING SCENARIOS</a:t>
             </a:r>
             <a:endParaRPr lang="en-US" sz="900" dirty="0"/>
           </a:p>
@@ -6743,7 +6881,7 @@
                 <a:ea typeface="Noto Serif KR" pitchFamily="34" charset="-122"/>
                 <a:cs typeface="Noto Serif KR" pitchFamily="34" charset="-120"/>
               </a:rPr>
-              <a:t>지분 성립 조건 — 역산</a:t>
+              <a:t>지분 성립 조건 — 조달 시나리오</a:t>
             </a:r>
             <a:endParaRPr lang="en-US" sz="2600" dirty="0"/>
           </a:p>
@@ -6782,7 +6920,7 @@
                 <a:ea typeface="IBM Plex Sans KR" pitchFamily="34" charset="-122"/>
                 <a:cs typeface="IBM Plex Sans KR" pitchFamily="34" charset="-120"/>
               </a:rPr>
-              <a:t>20% 희석 한도 기준</a:t>
+              <a:t>희석·그랜트 레버 → implied 멀티플</a:t>
             </a:r>
             <a:endParaRPr lang="en-US" sz="950" dirty="0"/>
           </a:p>
@@ -6820,7 +6958,7 @@
         <p:spPr>
           <a:xfrm>
             <a:off x="566928" y="1627632"/>
-            <a:ext cx="3840480" cy="219456"/>
+            <a:ext cx="3200400" cy="219456"/>
           </a:xfrm>
           <a:prstGeom prst="rect">
             <a:avLst/>
@@ -6858,8 +6996,8 @@
         </p:nvSpPr>
         <p:spPr>
           <a:xfrm>
-            <a:off x="566928" y="1920240"/>
-            <a:ext cx="2011680" cy="384048"/>
+            <a:off x="566928" y="1901952"/>
+            <a:ext cx="1828800" cy="329184"/>
           </a:xfrm>
           <a:prstGeom prst="rect">
             <a:avLst/>
@@ -6875,7 +7013,7 @@
               <a:buNone/>
             </a:pPr>
             <a:r>
-              <a:rPr lang="en-US" sz="1000" dirty="0">
+              <a:rPr lang="en-US" sz="950" dirty="0">
                 <a:solidFill>
                   <a:srgbClr val="6F6960"/>
                 </a:solidFill>
@@ -6885,7 +7023,7 @@
               </a:rPr>
               <a:t>DC블록 ASP</a:t>
             </a:r>
-            <a:endParaRPr lang="en-US" sz="1000" dirty="0"/>
+            <a:endParaRPr lang="en-US" sz="950" dirty="0"/>
           </a:p>
         </p:txBody>
       </p:sp>
@@ -6897,8 +7035,8 @@
         </p:nvSpPr>
         <p:spPr>
           <a:xfrm>
-            <a:off x="2487168" y="1920240"/>
-            <a:ext cx="1920240" cy="384048"/>
+            <a:off x="2121408" y="1901952"/>
+            <a:ext cx="1645920" cy="329184"/>
           </a:xfrm>
           <a:prstGeom prst="rect">
             <a:avLst/>
@@ -6914,7 +7052,7 @@
               <a:buNone/>
             </a:pPr>
             <a:r>
-              <a:rPr lang="en-US" sz="1050" b="1" dirty="0">
+              <a:rPr lang="en-US" sz="1000" b="1" dirty="0">
                 <a:solidFill>
                   <a:srgbClr val="1B1714"/>
                 </a:solidFill>
@@ -6922,9 +7060,9 @@
                 <a:ea typeface="IBM Plex Mono" pitchFamily="34" charset="-122"/>
                 <a:cs typeface="IBM Plex Mono" pitchFamily="34" charset="-120"/>
               </a:rPr>
-              <a:t>$155 /kWh</a:t>
-            </a:r>
-            <a:endParaRPr lang="en-US" sz="1050" dirty="0"/>
+              <a:t>$155/kWh</a:t>
+            </a:r>
+            <a:endParaRPr lang="en-US" sz="1000" dirty="0"/>
           </a:p>
         </p:txBody>
       </p:sp>
@@ -6936,8 +7074,8 @@
         </p:nvSpPr>
         <p:spPr>
           <a:xfrm>
-            <a:off x="566928" y="2322576"/>
-            <a:ext cx="3840480" cy="0"/>
+            <a:off x="566928" y="2240280"/>
+            <a:ext cx="3200400" cy="0"/>
           </a:xfrm>
           <a:prstGeom prst="line">
             <a:avLst/>
@@ -6959,8 +7097,8 @@
         </p:nvSpPr>
         <p:spPr>
           <a:xfrm>
-            <a:off x="566928" y="2354580"/>
-            <a:ext cx="2011680" cy="384048"/>
+            <a:off x="566928" y="2267712"/>
+            <a:ext cx="1828800" cy="329184"/>
           </a:xfrm>
           <a:prstGeom prst="rect">
             <a:avLst/>
@@ -6976,7 +7114,7 @@
               <a:buNone/>
             </a:pPr>
             <a:r>
-              <a:rPr lang="en-US" sz="1000" dirty="0">
+              <a:rPr lang="en-US" sz="950" dirty="0">
                 <a:solidFill>
                   <a:srgbClr val="6F6960"/>
                 </a:solidFill>
@@ -6986,7 +7124,7 @@
               </a:rPr>
               <a:t>공급 셀 (개조 후)</a:t>
             </a:r>
-            <a:endParaRPr lang="en-US" sz="1000" dirty="0"/>
+            <a:endParaRPr lang="en-US" sz="950" dirty="0"/>
           </a:p>
         </p:txBody>
       </p:sp>
@@ -6998,8 +7136,8 @@
         </p:nvSpPr>
         <p:spPr>
           <a:xfrm>
-            <a:off x="2487168" y="2354580"/>
-            <a:ext cx="1920240" cy="384048"/>
+            <a:off x="2121408" y="2267712"/>
+            <a:ext cx="1645920" cy="329184"/>
           </a:xfrm>
           <a:prstGeom prst="rect">
             <a:avLst/>
@@ -7015,7 +7153,7 @@
               <a:buNone/>
             </a:pPr>
             <a:r>
-              <a:rPr lang="en-US" sz="1050" b="1" dirty="0">
+              <a:rPr lang="en-US" sz="1000" b="1" dirty="0">
                 <a:solidFill>
                   <a:srgbClr val="1B1714"/>
                 </a:solidFill>
@@ -7023,9 +7161,9 @@
                 <a:ea typeface="IBM Plex Mono" pitchFamily="34" charset="-122"/>
                 <a:cs typeface="IBM Plex Mono" pitchFamily="34" charset="-120"/>
               </a:rPr>
-              <a:t>파우치 + 각형</a:t>
-            </a:r>
-            <a:endParaRPr lang="en-US" sz="1050" dirty="0"/>
+              <a:t>파우치+각형</a:t>
+            </a:r>
+            <a:endParaRPr lang="en-US" sz="1000" dirty="0"/>
           </a:p>
         </p:txBody>
       </p:sp>
@@ -7037,8 +7175,8 @@
         </p:nvSpPr>
         <p:spPr>
           <a:xfrm>
-            <a:off x="566928" y="2756916"/>
-            <a:ext cx="3840480" cy="0"/>
+            <a:off x="566928" y="2606040"/>
+            <a:ext cx="3200400" cy="0"/>
           </a:xfrm>
           <a:prstGeom prst="line">
             <a:avLst/>
@@ -7060,8 +7198,8 @@
         </p:nvSpPr>
         <p:spPr>
           <a:xfrm>
-            <a:off x="566928" y="2788920"/>
-            <a:ext cx="2011680" cy="384048"/>
+            <a:off x="566928" y="2633472"/>
+            <a:ext cx="1828800" cy="329184"/>
           </a:xfrm>
           <a:prstGeom prst="rect">
             <a:avLst/>
@@ -7077,7 +7215,7 @@
               <a:buNone/>
             </a:pPr>
             <a:r>
-              <a:rPr lang="en-US" sz="1000" dirty="0">
+              <a:rPr lang="en-US" sz="950" dirty="0">
                 <a:solidFill>
                   <a:srgbClr val="6F6960"/>
                 </a:solidFill>
@@ -7085,9 +7223,9 @@
                 <a:ea typeface="IBM Plex Sans KR" pitchFamily="34" charset="-122"/>
                 <a:cs typeface="IBM Plex Sans KR" pitchFamily="34" charset="-120"/>
               </a:rPr>
-              <a:t>신규 조달</a:t>
-            </a:r>
-            <a:endParaRPr lang="en-US" sz="1000" dirty="0"/>
+              <a:t>SKBA 기저 EBITDA ★</a:t>
+            </a:r>
+            <a:endParaRPr lang="en-US" sz="950" dirty="0"/>
           </a:p>
         </p:txBody>
       </p:sp>
@@ -7099,8 +7237,8 @@
         </p:nvSpPr>
         <p:spPr>
           <a:xfrm>
-            <a:off x="2487168" y="2788920"/>
-            <a:ext cx="1920240" cy="384048"/>
+            <a:off x="2121408" y="2633472"/>
+            <a:ext cx="1645920" cy="329184"/>
           </a:xfrm>
           <a:prstGeom prst="rect">
             <a:avLst/>
@@ -7116,17 +7254,17 @@
               <a:buNone/>
             </a:pPr>
             <a:r>
-              <a:rPr lang="en-US" sz="1050" b="1" dirty="0">
-                <a:solidFill>
-                  <a:srgbClr val="1B1714"/>
+              <a:rPr lang="en-US" sz="1000" b="1" dirty="0">
+                <a:solidFill>
+                  <a:srgbClr val="1E7A4D"/>
                 </a:solidFill>
                 <a:latin typeface="IBM Plex Mono" pitchFamily="34" charset="0"/>
                 <a:ea typeface="IBM Plex Mono" pitchFamily="34" charset="-122"/>
                 <a:cs typeface="IBM Plex Mono" pitchFamily="34" charset="-120"/>
               </a:rPr>
-              <a:t>$1.4bn (10/30/60)</a:t>
-            </a:r>
-            <a:endParaRPr lang="en-US" sz="1050" dirty="0"/>
+              <a:t>$0.2bn pre-SOP</a:t>
+            </a:r>
+            <a:endParaRPr lang="en-US" sz="1000" dirty="0"/>
           </a:p>
         </p:txBody>
       </p:sp>
@@ -7138,8 +7276,8 @@
         </p:nvSpPr>
         <p:spPr>
           <a:xfrm>
-            <a:off x="566928" y="3191256"/>
-            <a:ext cx="3840480" cy="0"/>
+            <a:off x="566928" y="2971800"/>
+            <a:ext cx="3200400" cy="0"/>
           </a:xfrm>
           <a:prstGeom prst="line">
             <a:avLst/>
@@ -7161,8 +7299,8 @@
         </p:nvSpPr>
         <p:spPr>
           <a:xfrm>
-            <a:off x="566928" y="3223260"/>
-            <a:ext cx="2011680" cy="384048"/>
+            <a:off x="566928" y="2999232"/>
+            <a:ext cx="1828800" cy="329184"/>
           </a:xfrm>
           <a:prstGeom prst="rect">
             <a:avLst/>
@@ -7178,7 +7316,7 @@
               <a:buNone/>
             </a:pPr>
             <a:r>
-              <a:rPr lang="en-US" sz="1000" dirty="0">
+              <a:rPr lang="en-US" sz="950" dirty="0">
                 <a:solidFill>
                   <a:srgbClr val="6F6960"/>
                 </a:solidFill>
@@ -7186,9 +7324,9 @@
                 <a:ea typeface="IBM Plex Sans KR" pitchFamily="34" charset="-122"/>
                 <a:cs typeface="IBM Plex Sans KR" pitchFamily="34" charset="-120"/>
               </a:rPr>
-              <a:t>외부 지분 (30%)</a:t>
-            </a:r>
-            <a:endParaRPr lang="en-US" sz="1000" dirty="0"/>
+              <a:t>run-rate ex-AMPC</a:t>
+            </a:r>
+            <a:endParaRPr lang="en-US" sz="950" dirty="0"/>
           </a:p>
         </p:txBody>
       </p:sp>
@@ -7200,8 +7338,8 @@
         </p:nvSpPr>
         <p:spPr>
           <a:xfrm>
-            <a:off x="2487168" y="3223260"/>
-            <a:ext cx="1920240" cy="384048"/>
+            <a:off x="2121408" y="2999232"/>
+            <a:ext cx="1645920" cy="329184"/>
           </a:xfrm>
           <a:prstGeom prst="rect">
             <a:avLst/>
@@ -7217,7 +7355,7 @@
               <a:buNone/>
             </a:pPr>
             <a:r>
-              <a:rPr lang="en-US" sz="1050" b="1" dirty="0">
+              <a:rPr lang="en-US" sz="1000" b="1" dirty="0">
                 <a:solidFill>
                   <a:srgbClr val="1B1714"/>
                 </a:solidFill>
@@ -7225,9 +7363,9 @@
                 <a:ea typeface="IBM Plex Mono" pitchFamily="34" charset="-122"/>
                 <a:cs typeface="IBM Plex Mono" pitchFamily="34" charset="-120"/>
               </a:rPr>
-              <a:t>$0.43bn</a:t>
-            </a:r>
-            <a:endParaRPr lang="en-US" sz="1050" dirty="0"/>
+              <a:t>$442mm</a:t>
+            </a:r>
+            <a:endParaRPr lang="en-US" sz="1000" dirty="0"/>
           </a:p>
         </p:txBody>
       </p:sp>
@@ -7239,8 +7377,8 @@
         </p:nvSpPr>
         <p:spPr>
           <a:xfrm>
-            <a:off x="566928" y="3625596"/>
-            <a:ext cx="3840480" cy="0"/>
+            <a:off x="566928" y="3337560"/>
+            <a:ext cx="3200400" cy="0"/>
           </a:xfrm>
           <a:prstGeom prst="line">
             <a:avLst/>
@@ -7262,8 +7400,8 @@
         </p:nvSpPr>
         <p:spPr>
           <a:xfrm>
-            <a:off x="566928" y="3657600"/>
-            <a:ext cx="2011680" cy="384048"/>
+            <a:off x="566928" y="3364992"/>
+            <a:ext cx="1828800" cy="329184"/>
           </a:xfrm>
           <a:prstGeom prst="rect">
             <a:avLst/>
@@ -7279,7 +7417,7 @@
               <a:buNone/>
             </a:pPr>
             <a:r>
-              <a:rPr lang="en-US" sz="1000" dirty="0">
+              <a:rPr lang="en-US" sz="950" dirty="0">
                 <a:solidFill>
                   <a:srgbClr val="6F6960"/>
                 </a:solidFill>
@@ -7287,9 +7425,9 @@
                 <a:ea typeface="IBM Plex Sans KR" pitchFamily="34" charset="-122"/>
                 <a:cs typeface="IBM Plex Sans KR" pitchFamily="34" charset="-120"/>
               </a:rPr>
-              <a:t>순차입금 (BA/OT)</a:t>
-            </a:r>
-            <a:endParaRPr lang="en-US" sz="1000" dirty="0"/>
+              <a:t>신규 조달</a:t>
+            </a:r>
+            <a:endParaRPr lang="en-US" sz="950" dirty="0"/>
           </a:p>
         </p:txBody>
       </p:sp>
@@ -7301,8 +7439,8 @@
         </p:nvSpPr>
         <p:spPr>
           <a:xfrm>
-            <a:off x="2487168" y="3657600"/>
-            <a:ext cx="1920240" cy="384048"/>
+            <a:off x="2121408" y="3364992"/>
+            <a:ext cx="1645920" cy="329184"/>
           </a:xfrm>
           <a:prstGeom prst="rect">
             <a:avLst/>
@@ -7318,7 +7456,7 @@
               <a:buNone/>
             </a:pPr>
             <a:r>
-              <a:rPr lang="en-US" sz="1050" b="1" dirty="0">
+              <a:rPr lang="en-US" sz="1000" b="1" dirty="0">
                 <a:solidFill>
                   <a:srgbClr val="1B1714"/>
                 </a:solidFill>
@@ -7326,9 +7464,9 @@
                 <a:ea typeface="IBM Plex Mono" pitchFamily="34" charset="-122"/>
                 <a:cs typeface="IBM Plex Mono" pitchFamily="34" charset="-120"/>
               </a:rPr>
-              <a:t>$6.4bn (BA3.7+OT2.6)</a:t>
-            </a:r>
-            <a:endParaRPr lang="en-US" sz="1050" dirty="0"/>
+              <a:t>$1.42bn</a:t>
+            </a:r>
+            <a:endParaRPr lang="en-US" sz="1000" dirty="0"/>
           </a:p>
         </p:txBody>
       </p:sp>
@@ -7340,8 +7478,8 @@
         </p:nvSpPr>
         <p:spPr>
           <a:xfrm>
-            <a:off x="566928" y="4059936"/>
-            <a:ext cx="3840480" cy="0"/>
+            <a:off x="566928" y="3703320"/>
+            <a:ext cx="3200400" cy="0"/>
           </a:xfrm>
           <a:prstGeom prst="line">
             <a:avLst/>
@@ -7363,8 +7501,8 @@
         </p:nvSpPr>
         <p:spPr>
           <a:xfrm>
-            <a:off x="566928" y="4091940"/>
-            <a:ext cx="2011680" cy="384048"/>
+            <a:off x="566928" y="3730752"/>
+            <a:ext cx="1828800" cy="329184"/>
           </a:xfrm>
           <a:prstGeom prst="rect">
             <a:avLst/>
@@ -7380,7 +7518,7 @@
               <a:buNone/>
             </a:pPr>
             <a:r>
-              <a:rPr lang="en-US" sz="1000" dirty="0">
+              <a:rPr lang="en-US" sz="950" dirty="0">
                 <a:solidFill>
                   <a:srgbClr val="6F6960"/>
                 </a:solidFill>
@@ -7388,9 +7526,9 @@
                 <a:ea typeface="IBM Plex Sans KR" pitchFamily="34" charset="-122"/>
                 <a:cs typeface="IBM Plex Sans KR" pitchFamily="34" charset="-120"/>
               </a:rPr>
-              <a:t>EBITDA ex-AMPC (9%)</a:t>
-            </a:r>
-            <a:endParaRPr lang="en-US" sz="1000" dirty="0"/>
+              <a:t>순차입금 (BA/OT)</a:t>
+            </a:r>
+            <a:endParaRPr lang="en-US" sz="950" dirty="0"/>
           </a:p>
         </p:txBody>
       </p:sp>
@@ -7402,8 +7540,8 @@
         </p:nvSpPr>
         <p:spPr>
           <a:xfrm>
-            <a:off x="2487168" y="4091940"/>
-            <a:ext cx="1920240" cy="384048"/>
+            <a:off x="2121408" y="3730752"/>
+            <a:ext cx="1645920" cy="329184"/>
           </a:xfrm>
           <a:prstGeom prst="rect">
             <a:avLst/>
@@ -7419,7 +7557,7 @@
               <a:buNone/>
             </a:pPr>
             <a:r>
-              <a:rPr lang="en-US" sz="1050" b="1" dirty="0">
+              <a:rPr lang="en-US" sz="1000" b="1" dirty="0">
                 <a:solidFill>
                   <a:srgbClr val="1B1714"/>
                 </a:solidFill>
@@ -7427,9 +7565,9 @@
                 <a:ea typeface="IBM Plex Mono" pitchFamily="34" charset="-122"/>
                 <a:cs typeface="IBM Plex Mono" pitchFamily="34" charset="-120"/>
               </a:rPr>
-              <a:t>$441mm run-rate</a:t>
-            </a:r>
-            <a:endParaRPr lang="en-US" sz="1050" dirty="0"/>
+              <a:t>$6.4bn</a:t>
+            </a:r>
+            <a:endParaRPr lang="en-US" sz="1000" dirty="0"/>
           </a:p>
         </p:txBody>
       </p:sp>
@@ -7441,8 +7579,8 @@
         </p:nvSpPr>
         <p:spPr>
           <a:xfrm>
-            <a:off x="566928" y="4494276"/>
-            <a:ext cx="3840480" cy="0"/>
+            <a:off x="566928" y="4069080"/>
+            <a:ext cx="3200400" cy="0"/>
           </a:xfrm>
           <a:prstGeom prst="line">
             <a:avLst/>
@@ -7464,8 +7602,8 @@
         </p:nvSpPr>
         <p:spPr>
           <a:xfrm>
-            <a:off x="566928" y="4526280"/>
-            <a:ext cx="2011680" cy="384048"/>
+            <a:off x="566928" y="4096512"/>
+            <a:ext cx="1828800" cy="329184"/>
           </a:xfrm>
           <a:prstGeom prst="rect">
             <a:avLst/>
@@ -7481,7 +7619,7 @@
               <a:buNone/>
             </a:pPr>
             <a:r>
-              <a:rPr lang="en-US" sz="1000" dirty="0">
+              <a:rPr lang="en-US" sz="950" dirty="0">
                 <a:solidFill>
                   <a:srgbClr val="6F6960"/>
                 </a:solidFill>
@@ -7491,7 +7629,7 @@
               </a:rPr>
               <a:t>peer EV/EBITDA</a:t>
             </a:r>
-            <a:endParaRPr lang="en-US" sz="1000" dirty="0"/>
+            <a:endParaRPr lang="en-US" sz="950" dirty="0"/>
           </a:p>
         </p:txBody>
       </p:sp>
@@ -7503,8 +7641,8 @@
         </p:nvSpPr>
         <p:spPr>
           <a:xfrm>
-            <a:off x="2487168" y="4526280"/>
-            <a:ext cx="1920240" cy="384048"/>
+            <a:off x="2121408" y="4096512"/>
+            <a:ext cx="1645920" cy="329184"/>
           </a:xfrm>
           <a:prstGeom prst="rect">
             <a:avLst/>
@@ -7520,7 +7658,7 @@
               <a:buNone/>
             </a:pPr>
             <a:r>
-              <a:rPr lang="en-US" sz="1050" b="1" dirty="0">
+              <a:rPr lang="en-US" sz="1000" b="1" dirty="0">
                 <a:solidFill>
                   <a:srgbClr val="1B1714"/>
                 </a:solidFill>
@@ -7530,7 +7668,7 @@
               </a:rPr>
               <a:t>8~13x</a:t>
             </a:r>
-            <a:endParaRPr lang="en-US" sz="1050" dirty="0"/>
+            <a:endParaRPr lang="en-US" sz="1000" dirty="0"/>
           </a:p>
         </p:txBody>
       </p:sp>
@@ -7542,8 +7680,8 @@
         </p:nvSpPr>
         <p:spPr>
           <a:xfrm>
-            <a:off x="566928" y="4928616"/>
-            <a:ext cx="3840480" cy="0"/>
+            <a:off x="566928" y="4434840"/>
+            <a:ext cx="3200400" cy="0"/>
           </a:xfrm>
           <a:prstGeom prst="line">
             <a:avLst/>
@@ -7559,14 +7697,36 @@
       </p:sp>
       <p:sp>
         <p:nvSpPr>
-          <p:cNvPr id="29" name="Text 27"/>
-          <p:cNvSpPr/>
-          <p:nvPr/>
-        </p:nvSpPr>
-        <p:spPr>
-          <a:xfrm>
-            <a:off x="4864608" y="1627632"/>
-            <a:ext cx="5257800" cy="219456"/>
+          <p:cNvPr id="29" name="Shape 27"/>
+          <p:cNvSpPr/>
+          <p:nvPr/>
+        </p:nvSpPr>
+        <p:spPr>
+          <a:xfrm>
+            <a:off x="566928" y="4517136"/>
+            <a:ext cx="3200400" cy="1170432"/>
+          </a:xfrm>
+          <a:prstGeom prst="roundRect">
+            <a:avLst>
+              <a:gd name="adj" fmla="val 4688"/>
+            </a:avLst>
+          </a:prstGeom>
+          <a:solidFill>
+            <a:srgbClr val="211C18"/>
+          </a:solidFill>
+          <a:ln/>
+        </p:spPr>
+      </p:sp>
+      <p:sp>
+        <p:nvSpPr>
+          <p:cNvPr id="30" name="Text 28"/>
+          <p:cNvSpPr/>
+          <p:nvPr/>
+        </p:nvSpPr>
+        <p:spPr>
+          <a:xfrm>
+            <a:off x="768096" y="4608576"/>
+            <a:ext cx="2834640" cy="219456"/>
           </a:xfrm>
           <a:prstGeom prst="rect">
             <a:avLst/>
@@ -7582,42 +7742,2329 @@
               <a:buNone/>
             </a:pPr>
             <a:r>
-              <a:rPr lang="en-US" sz="850" spc="150" kern="0" dirty="0">
-                <a:solidFill>
-                  <a:srgbClr val="9A847C"/>
+              <a:rPr lang="en-US" sz="800" spc="100" kern="0" dirty="0">
+                <a:solidFill>
+                  <a:srgbClr val="D8CFC2"/>
                 </a:solidFill>
                 <a:latin typeface="IBM Plex Mono" pitchFamily="34" charset="0"/>
                 <a:ea typeface="IBM Plex Mono" pitchFamily="34" charset="-122"/>
                 <a:cs typeface="IBM Plex Mono" pitchFamily="34" charset="-120"/>
               </a:rPr>
-              <a:t>역산 — 20% 희석 한도를 지키려면 · THE BAR</a:t>
+              <a:t>역산 논리 · THE MECHANISM</a:t>
+            </a:r>
+            <a:endParaRPr lang="en-US" sz="800" dirty="0"/>
+          </a:p>
+        </p:txBody>
+      </p:sp>
+      <p:sp>
+        <p:nvSpPr>
+          <p:cNvPr id="31" name="Text 29"/>
+          <p:cNvSpPr/>
+          <p:nvPr/>
+        </p:nvSpPr>
+        <p:spPr>
+          <a:xfrm>
+            <a:off x="768096" y="4846320"/>
+            <a:ext cx="2834640" cy="786384"/>
+          </a:xfrm>
+          <a:prstGeom prst="rect">
+            <a:avLst/>
+          </a:prstGeom>
+          <a:noFill/>
+          <a:ln/>
+        </p:spPr>
+        <p:txBody>
+          <a:bodyPr wrap="square" lIns="0" tIns="0" rIns="0" bIns="0" rtlCol="0" anchor="t"/>
+          <a:lstStyle/>
+          <a:p>
+            <a:pPr indent="0" marL="0">
+              <a:lnSpc>
+                <a:spcPct val="125000"/>
+              </a:lnSpc>
+              <a:buNone/>
+            </a:pPr>
+            <a:r>
+              <a:rPr lang="en-US" sz="950" b="1" dirty="0">
+                <a:solidFill>
+                  <a:srgbClr val="FF8E84"/>
+                </a:solidFill>
+                <a:latin typeface="IBM Plex Sans KR" pitchFamily="34" charset="0"/>
+                <a:ea typeface="IBM Plex Sans KR" pitchFamily="34" charset="-122"/>
+                <a:cs typeface="IBM Plex Sans KR" pitchFamily="34" charset="-120"/>
+              </a:rPr>
+              <a:t>최소지분</a:t>
+            </a:r>
+            <a:pPr indent="0" marL="0">
+              <a:lnSpc>
+                <a:spcPct val="125000"/>
+              </a:lnSpc>
+              <a:buNone/>
+            </a:pPr>
+            <a:r>
+              <a:rPr lang="en-US" sz="950" dirty="0">
+                <a:solidFill>
+                  <a:srgbClr val="D8CFC2"/>
+                </a:solidFill>
+                <a:latin typeface="IBM Plex Sans KR" pitchFamily="34" charset="0"/>
+                <a:ea typeface="IBM Plex Sans KR" pitchFamily="34" charset="-122"/>
+                <a:cs typeface="IBM Plex Sans KR" pitchFamily="34" charset="-120"/>
+              </a:rPr>
+              <a:t> = 외부지분 ÷ 희석캡
+</a:t>
+            </a:r>
+            <a:pPr indent="0" marL="0">
+              <a:lnSpc>
+                <a:spcPct val="125000"/>
+              </a:lnSpc>
+              <a:buNone/>
+            </a:pPr>
+            <a:r>
+              <a:rPr lang="en-US" sz="950" b="1" dirty="0">
+                <a:solidFill>
+                  <a:srgbClr val="FF8E84"/>
+                </a:solidFill>
+                <a:latin typeface="IBM Plex Sans KR" pitchFamily="34" charset="0"/>
+                <a:ea typeface="IBM Plex Sans KR" pitchFamily="34" charset="-122"/>
+                <a:cs typeface="IBM Plex Sans KR" pitchFamily="34" charset="-120"/>
+              </a:rPr>
+              <a:t>최소EV</a:t>
+            </a:r>
+            <a:pPr indent="0" marL="0">
+              <a:lnSpc>
+                <a:spcPct val="125000"/>
+              </a:lnSpc>
+              <a:buNone/>
+            </a:pPr>
+            <a:r>
+              <a:rPr lang="en-US" sz="950" dirty="0">
+                <a:solidFill>
+                  <a:srgbClr val="D8CFC2"/>
+                </a:solidFill>
+                <a:latin typeface="IBM Plex Sans KR" pitchFamily="34" charset="0"/>
+                <a:ea typeface="IBM Plex Sans KR" pitchFamily="34" charset="-122"/>
+                <a:cs typeface="IBM Plex Sans KR" pitchFamily="34" charset="-120"/>
+              </a:rPr>
+              <a:t> = 최소지분 + 순차입금
+</a:t>
+            </a:r>
+            <a:pPr indent="0" marL="0">
+              <a:lnSpc>
+                <a:spcPct val="125000"/>
+              </a:lnSpc>
+              <a:buNone/>
+            </a:pPr>
+            <a:r>
+              <a:rPr lang="en-US" sz="950" b="1" dirty="0">
+                <a:solidFill>
+                  <a:srgbClr val="FF8E84"/>
+                </a:solidFill>
+                <a:latin typeface="IBM Plex Sans KR" pitchFamily="34" charset="0"/>
+                <a:ea typeface="IBM Plex Sans KR" pitchFamily="34" charset="-122"/>
+                <a:cs typeface="IBM Plex Sans KR" pitchFamily="34" charset="-120"/>
+              </a:rPr>
+              <a:t>멀티플</a:t>
+            </a:r>
+            <a:pPr indent="0" marL="0">
+              <a:lnSpc>
+                <a:spcPct val="125000"/>
+              </a:lnSpc>
+              <a:buNone/>
+            </a:pPr>
+            <a:r>
+              <a:rPr lang="en-US" sz="950" dirty="0">
+                <a:solidFill>
+                  <a:srgbClr val="D8CFC2"/>
+                </a:solidFill>
+                <a:latin typeface="IBM Plex Sans KR" pitchFamily="34" charset="0"/>
+                <a:ea typeface="IBM Plex Sans KR" pitchFamily="34" charset="-122"/>
+                <a:cs typeface="IBM Plex Sans KR" pitchFamily="34" charset="-120"/>
+              </a:rPr>
+              <a:t> = 최소EV ÷ run-rate EBITDA</a:t>
+            </a:r>
+            <a:endParaRPr lang="en-US" sz="950" dirty="0"/>
+          </a:p>
+        </p:txBody>
+      </p:sp>
+      <p:sp>
+        <p:nvSpPr>
+          <p:cNvPr id="32" name="Text 30"/>
+          <p:cNvSpPr/>
+          <p:nvPr/>
+        </p:nvSpPr>
+        <p:spPr>
+          <a:xfrm>
+            <a:off x="4133088" y="1627632"/>
+            <a:ext cx="5989320" cy="219456"/>
+          </a:xfrm>
+          <a:prstGeom prst="rect">
+            <a:avLst/>
+          </a:prstGeom>
+          <a:noFill/>
+          <a:ln/>
+        </p:spPr>
+        <p:txBody>
+          <a:bodyPr wrap="square" lIns="0" tIns="0" rIns="0" bIns="0" rtlCol="0" anchor="ctr"/>
+          <a:lstStyle/>
+          <a:p>
+            <a:pPr indent="0" marL="0">
+              <a:buNone/>
+            </a:pPr>
+            <a:r>
+              <a:rPr lang="en-US" sz="850" spc="150" kern="0" dirty="0">
+                <a:solidFill>
+                  <a:srgbClr val="9A847C"/>
+                </a:solidFill>
+                <a:latin typeface="IBM Plex Mono" pitchFamily="34" charset="0"/>
+                <a:ea typeface="IBM Plex Mono" pitchFamily="34" charset="-122"/>
+                <a:cs typeface="IBM Plex Mono" pitchFamily="34" charset="-120"/>
+              </a:rPr>
+              <a:t>조달 시나리오 — implied min EV/EBITDA · SCENARIOS</a:t>
             </a:r>
             <a:endParaRPr lang="en-US" sz="850" dirty="0"/>
           </a:p>
         </p:txBody>
       </p:sp>
-      <p:sp>
-        <p:nvSpPr>
-          <p:cNvPr id="30" name="Shape 28"/>
-          <p:cNvSpPr/>
-          <p:nvPr/>
-        </p:nvSpPr>
-        <p:spPr>
-          <a:xfrm>
-            <a:off x="4864608" y="1920240"/>
-            <a:ext cx="5257800" cy="749808"/>
-          </a:xfrm>
-          <a:prstGeom prst="roundRect">
-            <a:avLst>
-              <a:gd name="adj" fmla="val 7317"/>
-            </a:avLst>
-          </a:prstGeom>
-          <a:solidFill>
-            <a:srgbClr val="FFFFFF"/>
-          </a:solidFill>
-          <a:ln w="12700">
+      <p:graphicFrame>
+        <p:nvGraphicFramePr>
+          <p:cNvPr id="5" name="Table 0"/>
+          <p:cNvGraphicFramePr>
+            <a:graphicFrameLocks noGrp="1"/>
+          </p:cNvGraphicFramePr>
+          <p:nvPr>
+            <p:extLst>
+              <p:ext uri="{D42A27DB-BD31-4B8C-83A1-F6EECF244321}">
+                <p14:modId xmlns:p14="http://schemas.microsoft.com/office/powerpoint/2010/main" val="1579011935"/>
+              </p:ext>
+            </p:extLst>
+          </p:nvPr>
+        </p:nvGraphicFramePr>
+        <p:xfrm>
+          <a:off x="4133088" y="1901952"/>
+          <a:ext cx="5989320" cy="914400"/>
+        </p:xfrm>
+        <a:graphic>
+          <a:graphicData uri="http://schemas.openxmlformats.org/drawingml/2006/table">
+            <a:tbl>
+              <a:tblPr/>
+              <a:tblGrid>
+                <a:gridCol w="2148840"/>
+                <a:gridCol w="658368"/>
+                <a:gridCol w="658368"/>
+                <a:gridCol w="868680"/>
+                <a:gridCol w="777240"/>
+                <a:gridCol w="786384"/>
+              </a:tblGrid>
+              <a:tr h="310896">
+                <a:tc>
+                  <a:txBody>
+                    <a:bodyPr/>
+                    <a:lstStyle/>
+                    <a:p>
+                      <a:pPr algn="l" indent="0" marL="0">
+                        <a:buNone/>
+                      </a:pPr>
+                      <a:r>
+                        <a:rPr lang="en-US" sz="900" b="1" dirty="0">
+                          <a:solidFill>
+                            <a:srgbClr val="FFFFFF"/>
+                          </a:solidFill>
+                          <a:latin typeface="IBM Plex Sans KR" pitchFamily="34" charset="0"/>
+                          <a:ea typeface="IBM Plex Sans KR" pitchFamily="34" charset="-122"/>
+                          <a:cs typeface="IBM Plex Sans KR" pitchFamily="34" charset="-120"/>
+                        </a:rPr>
+                        <a:t>시나리오</a:t>
+                      </a:r>
+                      <a:endParaRPr lang="en-US" sz="900" dirty="0">
+                        <a:latin typeface="IBM Plex Sans KR" charset="0"/>
+                        <a:ea typeface="IBM Plex Sans KR" charset="0"/>
+                        <a:cs typeface="IBM Plex Sans KR" charset="0"/>
+                      </a:endParaRPr>
+                    </a:p>
+                  </a:txBody>
+                  <a:tcPr marL="63500" marR="63500" marT="25400" marB="25400" anchor="ctr">
+                    <a:lnL w="6350" cap="flat" cmpd="sng" algn="ctr">
+                      <a:solidFill>
+                        <a:srgbClr val="E4DED4"/>
+                      </a:solidFill>
+                      <a:prstDash val="solid"/>
+                      <a:round/>
+                      <a:headEnd type="none" w="med" len="med"/>
+                      <a:tailEnd type="none" w="med" len="med"/>
+                    </a:lnL>
+                    <a:lnR w="6350" cap="flat" cmpd="sng" algn="ctr">
+                      <a:solidFill>
+                        <a:srgbClr val="E4DED4"/>
+                      </a:solidFill>
+                      <a:prstDash val="solid"/>
+                      <a:round/>
+                      <a:headEnd type="none" w="med" len="med"/>
+                      <a:tailEnd type="none" w="med" len="med"/>
+                    </a:lnR>
+                    <a:lnT w="6350" cap="flat" cmpd="sng" algn="ctr">
+                      <a:solidFill>
+                        <a:srgbClr val="E4DED4"/>
+                      </a:solidFill>
+                      <a:prstDash val="solid"/>
+                      <a:round/>
+                      <a:headEnd type="none" w="med" len="med"/>
+                      <a:tailEnd type="none" w="med" len="med"/>
+                    </a:lnT>
+                    <a:lnB w="6350" cap="flat" cmpd="sng" algn="ctr">
+                      <a:solidFill>
+                        <a:srgbClr val="E4DED4"/>
+                      </a:solidFill>
+                      <a:prstDash val="solid"/>
+                      <a:round/>
+                      <a:headEnd type="none" w="med" len="med"/>
+                      <a:tailEnd type="none" w="med" len="med"/>
+                    </a:lnB>
+                    <a:solidFill>
+                      <a:srgbClr val="1B1714"/>
+                    </a:solidFill>
+                  </a:tcPr>
+                </a:tc>
+                <a:tc>
+                  <a:txBody>
+                    <a:bodyPr/>
+                    <a:lstStyle/>
+                    <a:p>
+                      <a:pPr algn="ctr" indent="0" marL="0">
+                        <a:buNone/>
+                      </a:pPr>
+                      <a:r>
+                        <a:rPr lang="en-US" sz="900" b="1" dirty="0">
+                          <a:solidFill>
+                            <a:srgbClr val="FFFFFF"/>
+                          </a:solidFill>
+                          <a:latin typeface="IBM Plex Sans KR" pitchFamily="34" charset="0"/>
+                          <a:ea typeface="IBM Plex Sans KR" pitchFamily="34" charset="-122"/>
+                          <a:cs typeface="IBM Plex Sans KR" pitchFamily="34" charset="-120"/>
+                        </a:rPr>
+                        <a:t>그랜트</a:t>
+                      </a:r>
+                      <a:endParaRPr lang="en-US" sz="900" dirty="0">
+                        <a:latin typeface="IBM Plex Sans KR" charset="0"/>
+                        <a:ea typeface="IBM Plex Sans KR" charset="0"/>
+                        <a:cs typeface="IBM Plex Sans KR" charset="0"/>
+                      </a:endParaRPr>
+                    </a:p>
+                  </a:txBody>
+                  <a:tcPr marL="63500" marR="63500" marT="25400" marB="25400" anchor="ctr">
+                    <a:lnL w="6350" cap="flat" cmpd="sng" algn="ctr">
+                      <a:solidFill>
+                        <a:srgbClr val="E4DED4"/>
+                      </a:solidFill>
+                      <a:prstDash val="solid"/>
+                      <a:round/>
+                      <a:headEnd type="none" w="med" len="med"/>
+                      <a:tailEnd type="none" w="med" len="med"/>
+                    </a:lnL>
+                    <a:lnR w="6350" cap="flat" cmpd="sng" algn="ctr">
+                      <a:solidFill>
+                        <a:srgbClr val="E4DED4"/>
+                      </a:solidFill>
+                      <a:prstDash val="solid"/>
+                      <a:round/>
+                      <a:headEnd type="none" w="med" len="med"/>
+                      <a:tailEnd type="none" w="med" len="med"/>
+                    </a:lnR>
+                    <a:lnT w="6350" cap="flat" cmpd="sng" algn="ctr">
+                      <a:solidFill>
+                        <a:srgbClr val="E4DED4"/>
+                      </a:solidFill>
+                      <a:prstDash val="solid"/>
+                      <a:round/>
+                      <a:headEnd type="none" w="med" len="med"/>
+                      <a:tailEnd type="none" w="med" len="med"/>
+                    </a:lnT>
+                    <a:lnB w="6350" cap="flat" cmpd="sng" algn="ctr">
+                      <a:solidFill>
+                        <a:srgbClr val="E4DED4"/>
+                      </a:solidFill>
+                      <a:prstDash val="solid"/>
+                      <a:round/>
+                      <a:headEnd type="none" w="med" len="med"/>
+                      <a:tailEnd type="none" w="med" len="med"/>
+                    </a:lnB>
+                    <a:solidFill>
+                      <a:srgbClr val="1B1714"/>
+                    </a:solidFill>
+                  </a:tcPr>
+                </a:tc>
+                <a:tc>
+                  <a:txBody>
+                    <a:bodyPr/>
+                    <a:lstStyle/>
+                    <a:p>
+                      <a:pPr algn="ctr" indent="0" marL="0">
+                        <a:buNone/>
+                      </a:pPr>
+                      <a:r>
+                        <a:rPr lang="en-US" sz="900" b="1" dirty="0">
+                          <a:solidFill>
+                            <a:srgbClr val="FFFFFF"/>
+                          </a:solidFill>
+                          <a:latin typeface="IBM Plex Sans KR" pitchFamily="34" charset="0"/>
+                          <a:ea typeface="IBM Plex Sans KR" pitchFamily="34" charset="-122"/>
+                          <a:cs typeface="IBM Plex Sans KR" pitchFamily="34" charset="-120"/>
+                        </a:rPr>
+                        <a:t>희석캡</a:t>
+                      </a:r>
+                      <a:endParaRPr lang="en-US" sz="900" dirty="0">
+                        <a:latin typeface="IBM Plex Sans KR" charset="0"/>
+                        <a:ea typeface="IBM Plex Sans KR" charset="0"/>
+                        <a:cs typeface="IBM Plex Sans KR" charset="0"/>
+                      </a:endParaRPr>
+                    </a:p>
+                  </a:txBody>
+                  <a:tcPr marL="63500" marR="63500" marT="25400" marB="25400" anchor="ctr">
+                    <a:lnL w="6350" cap="flat" cmpd="sng" algn="ctr">
+                      <a:solidFill>
+                        <a:srgbClr val="E4DED4"/>
+                      </a:solidFill>
+                      <a:prstDash val="solid"/>
+                      <a:round/>
+                      <a:headEnd type="none" w="med" len="med"/>
+                      <a:tailEnd type="none" w="med" len="med"/>
+                    </a:lnL>
+                    <a:lnR w="6350" cap="flat" cmpd="sng" algn="ctr">
+                      <a:solidFill>
+                        <a:srgbClr val="E4DED4"/>
+                      </a:solidFill>
+                      <a:prstDash val="solid"/>
+                      <a:round/>
+                      <a:headEnd type="none" w="med" len="med"/>
+                      <a:tailEnd type="none" w="med" len="med"/>
+                    </a:lnR>
+                    <a:lnT w="6350" cap="flat" cmpd="sng" algn="ctr">
+                      <a:solidFill>
+                        <a:srgbClr val="E4DED4"/>
+                      </a:solidFill>
+                      <a:prstDash val="solid"/>
+                      <a:round/>
+                      <a:headEnd type="none" w="med" len="med"/>
+                      <a:tailEnd type="none" w="med" len="med"/>
+                    </a:lnT>
+                    <a:lnB w="6350" cap="flat" cmpd="sng" algn="ctr">
+                      <a:solidFill>
+                        <a:srgbClr val="E4DED4"/>
+                      </a:solidFill>
+                      <a:prstDash val="solid"/>
+                      <a:round/>
+                      <a:headEnd type="none" w="med" len="med"/>
+                      <a:tailEnd type="none" w="med" len="med"/>
+                    </a:lnB>
+                    <a:solidFill>
+                      <a:srgbClr val="1B1714"/>
+                    </a:solidFill>
+                  </a:tcPr>
+                </a:tc>
+                <a:tc>
+                  <a:txBody>
+                    <a:bodyPr/>
+                    <a:lstStyle/>
+                    <a:p>
+                      <a:pPr algn="ctr" indent="0" marL="0">
+                        <a:buNone/>
+                      </a:pPr>
+                      <a:r>
+                        <a:rPr lang="en-US" sz="900" b="1" dirty="0">
+                          <a:solidFill>
+                            <a:srgbClr val="FFFFFF"/>
+                          </a:solidFill>
+                          <a:latin typeface="IBM Plex Sans KR" pitchFamily="34" charset="0"/>
+                          <a:ea typeface="IBM Plex Sans KR" pitchFamily="34" charset="-122"/>
+                          <a:cs typeface="IBM Plex Sans KR" pitchFamily="34" charset="-120"/>
+                        </a:rPr>
+                        <a:t>최소 EV</a:t>
+                      </a:r>
+                      <a:endParaRPr lang="en-US" sz="900" dirty="0">
+                        <a:latin typeface="IBM Plex Sans KR" charset="0"/>
+                        <a:ea typeface="IBM Plex Sans KR" charset="0"/>
+                        <a:cs typeface="IBM Plex Sans KR" charset="0"/>
+                      </a:endParaRPr>
+                    </a:p>
+                  </a:txBody>
+                  <a:tcPr marL="63500" marR="63500" marT="25400" marB="25400" anchor="ctr">
+                    <a:lnL w="6350" cap="flat" cmpd="sng" algn="ctr">
+                      <a:solidFill>
+                        <a:srgbClr val="E4DED4"/>
+                      </a:solidFill>
+                      <a:prstDash val="solid"/>
+                      <a:round/>
+                      <a:headEnd type="none" w="med" len="med"/>
+                      <a:tailEnd type="none" w="med" len="med"/>
+                    </a:lnL>
+                    <a:lnR w="6350" cap="flat" cmpd="sng" algn="ctr">
+                      <a:solidFill>
+                        <a:srgbClr val="E4DED4"/>
+                      </a:solidFill>
+                      <a:prstDash val="solid"/>
+                      <a:round/>
+                      <a:headEnd type="none" w="med" len="med"/>
+                      <a:tailEnd type="none" w="med" len="med"/>
+                    </a:lnR>
+                    <a:lnT w="6350" cap="flat" cmpd="sng" algn="ctr">
+                      <a:solidFill>
+                        <a:srgbClr val="E4DED4"/>
+                      </a:solidFill>
+                      <a:prstDash val="solid"/>
+                      <a:round/>
+                      <a:headEnd type="none" w="med" len="med"/>
+                      <a:tailEnd type="none" w="med" len="med"/>
+                    </a:lnT>
+                    <a:lnB w="6350" cap="flat" cmpd="sng" algn="ctr">
+                      <a:solidFill>
+                        <a:srgbClr val="E4DED4"/>
+                      </a:solidFill>
+                      <a:prstDash val="solid"/>
+                      <a:round/>
+                      <a:headEnd type="none" w="med" len="med"/>
+                      <a:tailEnd type="none" w="med" len="med"/>
+                    </a:lnB>
+                    <a:solidFill>
+                      <a:srgbClr val="1B1714"/>
+                    </a:solidFill>
+                  </a:tcPr>
+                </a:tc>
+                <a:tc>
+                  <a:txBody>
+                    <a:bodyPr/>
+                    <a:lstStyle/>
+                    <a:p>
+                      <a:pPr algn="ctr" indent="0" marL="0">
+                        <a:buNone/>
+                      </a:pPr>
+                      <a:r>
+                        <a:rPr lang="en-US" sz="900" b="1" dirty="0">
+                          <a:solidFill>
+                            <a:srgbClr val="FFFFFF"/>
+                          </a:solidFill>
+                          <a:latin typeface="IBM Plex Sans KR" pitchFamily="34" charset="0"/>
+                          <a:ea typeface="IBM Plex Sans KR" pitchFamily="34" charset="-122"/>
+                          <a:cs typeface="IBM Plex Sans KR" pitchFamily="34" charset="-120"/>
+                        </a:rPr>
+                        <a:t>멀티플</a:t>
+                      </a:r>
+                      <a:endParaRPr lang="en-US" sz="900" dirty="0">
+                        <a:latin typeface="IBM Plex Sans KR" charset="0"/>
+                        <a:ea typeface="IBM Plex Sans KR" charset="0"/>
+                        <a:cs typeface="IBM Plex Sans KR" charset="0"/>
+                      </a:endParaRPr>
+                    </a:p>
+                  </a:txBody>
+                  <a:tcPr marL="63500" marR="63500" marT="25400" marB="25400" anchor="ctr">
+                    <a:lnL w="6350" cap="flat" cmpd="sng" algn="ctr">
+                      <a:solidFill>
+                        <a:srgbClr val="E4DED4"/>
+                      </a:solidFill>
+                      <a:prstDash val="solid"/>
+                      <a:round/>
+                      <a:headEnd type="none" w="med" len="med"/>
+                      <a:tailEnd type="none" w="med" len="med"/>
+                    </a:lnL>
+                    <a:lnR w="6350" cap="flat" cmpd="sng" algn="ctr">
+                      <a:solidFill>
+                        <a:srgbClr val="E4DED4"/>
+                      </a:solidFill>
+                      <a:prstDash val="solid"/>
+                      <a:round/>
+                      <a:headEnd type="none" w="med" len="med"/>
+                      <a:tailEnd type="none" w="med" len="med"/>
+                    </a:lnR>
+                    <a:lnT w="6350" cap="flat" cmpd="sng" algn="ctr">
+                      <a:solidFill>
+                        <a:srgbClr val="E4DED4"/>
+                      </a:solidFill>
+                      <a:prstDash val="solid"/>
+                      <a:round/>
+                      <a:headEnd type="none" w="med" len="med"/>
+                      <a:tailEnd type="none" w="med" len="med"/>
+                    </a:lnT>
+                    <a:lnB w="6350" cap="flat" cmpd="sng" algn="ctr">
+                      <a:solidFill>
+                        <a:srgbClr val="E4DED4"/>
+                      </a:solidFill>
+                      <a:prstDash val="solid"/>
+                      <a:round/>
+                      <a:headEnd type="none" w="med" len="med"/>
+                      <a:tailEnd type="none" w="med" len="med"/>
+                    </a:lnB>
+                    <a:solidFill>
+                      <a:srgbClr val="1B1714"/>
+                    </a:solidFill>
+                  </a:tcPr>
+                </a:tc>
+                <a:tc>
+                  <a:txBody>
+                    <a:bodyPr/>
+                    <a:lstStyle/>
+                    <a:p>
+                      <a:pPr algn="ctr" indent="0" marL="0">
+                        <a:buNone/>
+                      </a:pPr>
+                      <a:r>
+                        <a:rPr lang="en-US" sz="900" b="1" dirty="0">
+                          <a:solidFill>
+                            <a:srgbClr val="FFFFFF"/>
+                          </a:solidFill>
+                          <a:latin typeface="IBM Plex Sans KR" pitchFamily="34" charset="0"/>
+                          <a:ea typeface="IBM Plex Sans KR" pitchFamily="34" charset="-122"/>
+                          <a:cs typeface="IBM Plex Sans KR" pitchFamily="34" charset="-120"/>
+                        </a:rPr>
+                        <a:t>peer초과</a:t>
+                      </a:r>
+                      <a:endParaRPr lang="en-US" sz="900" dirty="0">
+                        <a:latin typeface="IBM Plex Sans KR" charset="0"/>
+                        <a:ea typeface="IBM Plex Sans KR" charset="0"/>
+                        <a:cs typeface="IBM Plex Sans KR" charset="0"/>
+                      </a:endParaRPr>
+                    </a:p>
+                  </a:txBody>
+                  <a:tcPr marL="63500" marR="63500" marT="25400" marB="25400" anchor="ctr">
+                    <a:lnL w="6350" cap="flat" cmpd="sng" algn="ctr">
+                      <a:solidFill>
+                        <a:srgbClr val="E4DED4"/>
+                      </a:solidFill>
+                      <a:prstDash val="solid"/>
+                      <a:round/>
+                      <a:headEnd type="none" w="med" len="med"/>
+                      <a:tailEnd type="none" w="med" len="med"/>
+                    </a:lnL>
+                    <a:lnR w="6350" cap="flat" cmpd="sng" algn="ctr">
+                      <a:solidFill>
+                        <a:srgbClr val="E4DED4"/>
+                      </a:solidFill>
+                      <a:prstDash val="solid"/>
+                      <a:round/>
+                      <a:headEnd type="none" w="med" len="med"/>
+                      <a:tailEnd type="none" w="med" len="med"/>
+                    </a:lnR>
+                    <a:lnT w="6350" cap="flat" cmpd="sng" algn="ctr">
+                      <a:solidFill>
+                        <a:srgbClr val="E4DED4"/>
+                      </a:solidFill>
+                      <a:prstDash val="solid"/>
+                      <a:round/>
+                      <a:headEnd type="none" w="med" len="med"/>
+                      <a:tailEnd type="none" w="med" len="med"/>
+                    </a:lnT>
+                    <a:lnB w="6350" cap="flat" cmpd="sng" algn="ctr">
+                      <a:solidFill>
+                        <a:srgbClr val="E4DED4"/>
+                      </a:solidFill>
+                      <a:prstDash val="solid"/>
+                      <a:round/>
+                      <a:headEnd type="none" w="med" len="med"/>
+                      <a:tailEnd type="none" w="med" len="med"/>
+                    </a:lnB>
+                    <a:solidFill>
+                      <a:srgbClr val="1B1714"/>
+                    </a:solidFill>
+                  </a:tcPr>
+                </a:tc>
+              </a:tr>
+              <a:tr h="512064">
+                <a:tc>
+                  <a:txBody>
+                    <a:bodyPr/>
+                    <a:lstStyle/>
+                    <a:p>
+                      <a:pPr indent="0" marL="0">
+                        <a:buNone/>
+                      </a:pPr>
+                      <a:r>
+                        <a:rPr lang="en-US" sz="950" dirty="0">
+                          <a:solidFill>
+                            <a:srgbClr val="1B1714"/>
+                          </a:solidFill>
+                          <a:latin typeface="IBM Plex Sans KR" pitchFamily="34" charset="0"/>
+                          <a:ea typeface="IBM Plex Sans KR" pitchFamily="34" charset="-122"/>
+                          <a:cs typeface="IBM Plex Sans KR" pitchFamily="34" charset="-120"/>
+                        </a:rPr>
+                        <a:t>BASE  (그랜트10/지분30)</a:t>
+                      </a:r>
+                      <a:endParaRPr lang="en-US" sz="950" dirty="0">
+                        <a:latin typeface="IBM Plex Sans KR" charset="0"/>
+                        <a:ea typeface="IBM Plex Sans KR" charset="0"/>
+                        <a:cs typeface="IBM Plex Sans KR" charset="0"/>
+                      </a:endParaRPr>
+                    </a:p>
+                  </a:txBody>
+                  <a:tcPr marL="63500" marR="63500" marT="25400" marB="25400" anchor="ctr">
+                    <a:lnL w="6350" cap="flat" cmpd="sng" algn="ctr">
+                      <a:solidFill>
+                        <a:srgbClr val="E4DED4"/>
+                      </a:solidFill>
+                      <a:prstDash val="solid"/>
+                      <a:round/>
+                      <a:headEnd type="none" w="med" len="med"/>
+                      <a:tailEnd type="none" w="med" len="med"/>
+                    </a:lnL>
+                    <a:lnR w="6350" cap="flat" cmpd="sng" algn="ctr">
+                      <a:solidFill>
+                        <a:srgbClr val="E4DED4"/>
+                      </a:solidFill>
+                      <a:prstDash val="solid"/>
+                      <a:round/>
+                      <a:headEnd type="none" w="med" len="med"/>
+                      <a:tailEnd type="none" w="med" len="med"/>
+                    </a:lnR>
+                    <a:lnT w="6350" cap="flat" cmpd="sng" algn="ctr">
+                      <a:solidFill>
+                        <a:srgbClr val="E4DED4"/>
+                      </a:solidFill>
+                      <a:prstDash val="solid"/>
+                      <a:round/>
+                      <a:headEnd type="none" w="med" len="med"/>
+                      <a:tailEnd type="none" w="med" len="med"/>
+                    </a:lnT>
+                    <a:lnB w="6350" cap="flat" cmpd="sng" algn="ctr">
+                      <a:solidFill>
+                        <a:srgbClr val="E4DED4"/>
+                      </a:solidFill>
+                      <a:prstDash val="solid"/>
+                      <a:round/>
+                      <a:headEnd type="none" w="med" len="med"/>
+                      <a:tailEnd type="none" w="med" len="med"/>
+                    </a:lnB>
+                    <a:solidFill>
+                      <a:srgbClr val="FFFFFF"/>
+                    </a:solidFill>
+                  </a:tcPr>
+                </a:tc>
+                <a:tc>
+                  <a:txBody>
+                    <a:bodyPr/>
+                    <a:lstStyle/>
+                    <a:p>
+                      <a:pPr algn="ctr" indent="0" marL="0">
+                        <a:buNone/>
+                      </a:pPr>
+                      <a:r>
+                        <a:rPr lang="en-US" sz="950" dirty="0">
+                          <a:solidFill>
+                            <a:srgbClr val="1B1714"/>
+                          </a:solidFill>
+                          <a:latin typeface="IBM Plex Mono" pitchFamily="34" charset="0"/>
+                          <a:ea typeface="IBM Plex Mono" pitchFamily="34" charset="-122"/>
+                          <a:cs typeface="IBM Plex Mono" pitchFamily="34" charset="-120"/>
+                        </a:rPr>
+                        <a:t>10%</a:t>
+                      </a:r>
+                      <a:endParaRPr lang="en-US" sz="950" dirty="0">
+                        <a:latin typeface="IBM Plex Mono" charset="0"/>
+                        <a:ea typeface="IBM Plex Mono" charset="0"/>
+                        <a:cs typeface="IBM Plex Mono" charset="0"/>
+                      </a:endParaRPr>
+                    </a:p>
+                  </a:txBody>
+                  <a:tcPr marL="63500" marR="63500" marT="25400" marB="25400" anchor="ctr">
+                    <a:lnL w="6350" cap="flat" cmpd="sng" algn="ctr">
+                      <a:solidFill>
+                        <a:srgbClr val="E4DED4"/>
+                      </a:solidFill>
+                      <a:prstDash val="solid"/>
+                      <a:round/>
+                      <a:headEnd type="none" w="med" len="med"/>
+                      <a:tailEnd type="none" w="med" len="med"/>
+                    </a:lnL>
+                    <a:lnR w="6350" cap="flat" cmpd="sng" algn="ctr">
+                      <a:solidFill>
+                        <a:srgbClr val="E4DED4"/>
+                      </a:solidFill>
+                      <a:prstDash val="solid"/>
+                      <a:round/>
+                      <a:headEnd type="none" w="med" len="med"/>
+                      <a:tailEnd type="none" w="med" len="med"/>
+                    </a:lnR>
+                    <a:lnT w="6350" cap="flat" cmpd="sng" algn="ctr">
+                      <a:solidFill>
+                        <a:srgbClr val="E4DED4"/>
+                      </a:solidFill>
+                      <a:prstDash val="solid"/>
+                      <a:round/>
+                      <a:headEnd type="none" w="med" len="med"/>
+                      <a:tailEnd type="none" w="med" len="med"/>
+                    </a:lnT>
+                    <a:lnB w="6350" cap="flat" cmpd="sng" algn="ctr">
+                      <a:solidFill>
+                        <a:srgbClr val="E4DED4"/>
+                      </a:solidFill>
+                      <a:prstDash val="solid"/>
+                      <a:round/>
+                      <a:headEnd type="none" w="med" len="med"/>
+                      <a:tailEnd type="none" w="med" len="med"/>
+                    </a:lnB>
+                    <a:solidFill>
+                      <a:srgbClr val="FFFFFF"/>
+                    </a:solidFill>
+                  </a:tcPr>
+                </a:tc>
+                <a:tc>
+                  <a:txBody>
+                    <a:bodyPr/>
+                    <a:lstStyle/>
+                    <a:p>
+                      <a:pPr algn="ctr" indent="0" marL="0">
+                        <a:buNone/>
+                      </a:pPr>
+                      <a:r>
+                        <a:rPr lang="en-US" sz="950" dirty="0">
+                          <a:solidFill>
+                            <a:srgbClr val="1B1714"/>
+                          </a:solidFill>
+                          <a:latin typeface="IBM Plex Mono" pitchFamily="34" charset="0"/>
+                          <a:ea typeface="IBM Plex Mono" pitchFamily="34" charset="-122"/>
+                          <a:cs typeface="IBM Plex Mono" pitchFamily="34" charset="-120"/>
+                        </a:rPr>
+                        <a:t>20%</a:t>
+                      </a:r>
+                      <a:endParaRPr lang="en-US" sz="950" dirty="0">
+                        <a:latin typeface="IBM Plex Mono" charset="0"/>
+                        <a:ea typeface="IBM Plex Mono" charset="0"/>
+                        <a:cs typeface="IBM Plex Mono" charset="0"/>
+                      </a:endParaRPr>
+                    </a:p>
+                  </a:txBody>
+                  <a:tcPr marL="63500" marR="63500" marT="25400" marB="25400" anchor="ctr">
+                    <a:lnL w="6350" cap="flat" cmpd="sng" algn="ctr">
+                      <a:solidFill>
+                        <a:srgbClr val="E4DED4"/>
+                      </a:solidFill>
+                      <a:prstDash val="solid"/>
+                      <a:round/>
+                      <a:headEnd type="none" w="med" len="med"/>
+                      <a:tailEnd type="none" w="med" len="med"/>
+                    </a:lnL>
+                    <a:lnR w="6350" cap="flat" cmpd="sng" algn="ctr">
+                      <a:solidFill>
+                        <a:srgbClr val="E4DED4"/>
+                      </a:solidFill>
+                      <a:prstDash val="solid"/>
+                      <a:round/>
+                      <a:headEnd type="none" w="med" len="med"/>
+                      <a:tailEnd type="none" w="med" len="med"/>
+                    </a:lnR>
+                    <a:lnT w="6350" cap="flat" cmpd="sng" algn="ctr">
+                      <a:solidFill>
+                        <a:srgbClr val="E4DED4"/>
+                      </a:solidFill>
+                      <a:prstDash val="solid"/>
+                      <a:round/>
+                      <a:headEnd type="none" w="med" len="med"/>
+                      <a:tailEnd type="none" w="med" len="med"/>
+                    </a:lnT>
+                    <a:lnB w="6350" cap="flat" cmpd="sng" algn="ctr">
+                      <a:solidFill>
+                        <a:srgbClr val="E4DED4"/>
+                      </a:solidFill>
+                      <a:prstDash val="solid"/>
+                      <a:round/>
+                      <a:headEnd type="none" w="med" len="med"/>
+                      <a:tailEnd type="none" w="med" len="med"/>
+                    </a:lnB>
+                    <a:solidFill>
+                      <a:srgbClr val="FFFFFF"/>
+                    </a:solidFill>
+                  </a:tcPr>
+                </a:tc>
+                <a:tc>
+                  <a:txBody>
+                    <a:bodyPr/>
+                    <a:lstStyle/>
+                    <a:p>
+                      <a:pPr algn="ctr" indent="0" marL="0">
+                        <a:buNone/>
+                      </a:pPr>
+                      <a:r>
+                        <a:rPr lang="en-US" sz="950" dirty="0">
+                          <a:solidFill>
+                            <a:srgbClr val="1B1714"/>
+                          </a:solidFill>
+                          <a:latin typeface="IBM Plex Mono" pitchFamily="34" charset="0"/>
+                          <a:ea typeface="IBM Plex Mono" pitchFamily="34" charset="-122"/>
+                          <a:cs typeface="IBM Plex Mono" pitchFamily="34" charset="-120"/>
+                        </a:rPr>
+                        <a:t>$8.6bn</a:t>
+                      </a:r>
+                      <a:endParaRPr lang="en-US" sz="950" dirty="0">
+                        <a:latin typeface="IBM Plex Mono" charset="0"/>
+                        <a:ea typeface="IBM Plex Mono" charset="0"/>
+                        <a:cs typeface="IBM Plex Mono" charset="0"/>
+                      </a:endParaRPr>
+                    </a:p>
+                  </a:txBody>
+                  <a:tcPr marL="63500" marR="63500" marT="25400" marB="25400" anchor="ctr">
+                    <a:lnL w="6350" cap="flat" cmpd="sng" algn="ctr">
+                      <a:solidFill>
+                        <a:srgbClr val="E4DED4"/>
+                      </a:solidFill>
+                      <a:prstDash val="solid"/>
+                      <a:round/>
+                      <a:headEnd type="none" w="med" len="med"/>
+                      <a:tailEnd type="none" w="med" len="med"/>
+                    </a:lnL>
+                    <a:lnR w="6350" cap="flat" cmpd="sng" algn="ctr">
+                      <a:solidFill>
+                        <a:srgbClr val="E4DED4"/>
+                      </a:solidFill>
+                      <a:prstDash val="solid"/>
+                      <a:round/>
+                      <a:headEnd type="none" w="med" len="med"/>
+                      <a:tailEnd type="none" w="med" len="med"/>
+                    </a:lnR>
+                    <a:lnT w="6350" cap="flat" cmpd="sng" algn="ctr">
+                      <a:solidFill>
+                        <a:srgbClr val="E4DED4"/>
+                      </a:solidFill>
+                      <a:prstDash val="solid"/>
+                      <a:round/>
+                      <a:headEnd type="none" w="med" len="med"/>
+                      <a:tailEnd type="none" w="med" len="med"/>
+                    </a:lnT>
+                    <a:lnB w="6350" cap="flat" cmpd="sng" algn="ctr">
+                      <a:solidFill>
+                        <a:srgbClr val="E4DED4"/>
+                      </a:solidFill>
+                      <a:prstDash val="solid"/>
+                      <a:round/>
+                      <a:headEnd type="none" w="med" len="med"/>
+                      <a:tailEnd type="none" w="med" len="med"/>
+                    </a:lnB>
+                    <a:solidFill>
+                      <a:srgbClr val="FFFFFF"/>
+                    </a:solidFill>
+                  </a:tcPr>
+                </a:tc>
+                <a:tc>
+                  <a:txBody>
+                    <a:bodyPr/>
+                    <a:lstStyle/>
+                    <a:p>
+                      <a:pPr algn="ctr" indent="0" marL="0">
+                        <a:buNone/>
+                      </a:pPr>
+                      <a:r>
+                        <a:rPr lang="en-US" sz="1200" b="1" dirty="0">
+                          <a:solidFill>
+                            <a:srgbClr val="C1121F"/>
+                          </a:solidFill>
+                          <a:latin typeface="Space Grotesk" pitchFamily="34" charset="0"/>
+                          <a:ea typeface="Space Grotesk" pitchFamily="34" charset="-122"/>
+                          <a:cs typeface="Space Grotesk" pitchFamily="34" charset="-120"/>
+                        </a:rPr>
+                        <a:t>19.3x</a:t>
+                      </a:r>
+                      <a:endParaRPr lang="en-US" sz="1200" dirty="0">
+                        <a:latin typeface="Space Grotesk" charset="0"/>
+                        <a:ea typeface="Space Grotesk" charset="0"/>
+                        <a:cs typeface="Space Grotesk" charset="0"/>
+                      </a:endParaRPr>
+                    </a:p>
+                  </a:txBody>
+                  <a:tcPr marL="63500" marR="63500" marT="25400" marB="25400" anchor="ctr">
+                    <a:lnL w="6350" cap="flat" cmpd="sng" algn="ctr">
+                      <a:solidFill>
+                        <a:srgbClr val="E4DED4"/>
+                      </a:solidFill>
+                      <a:prstDash val="solid"/>
+                      <a:round/>
+                      <a:headEnd type="none" w="med" len="med"/>
+                      <a:tailEnd type="none" w="med" len="med"/>
+                    </a:lnL>
+                    <a:lnR w="6350" cap="flat" cmpd="sng" algn="ctr">
+                      <a:solidFill>
+                        <a:srgbClr val="E4DED4"/>
+                      </a:solidFill>
+                      <a:prstDash val="solid"/>
+                      <a:round/>
+                      <a:headEnd type="none" w="med" len="med"/>
+                      <a:tailEnd type="none" w="med" len="med"/>
+                    </a:lnR>
+                    <a:lnT w="6350" cap="flat" cmpd="sng" algn="ctr">
+                      <a:solidFill>
+                        <a:srgbClr val="E4DED4"/>
+                      </a:solidFill>
+                      <a:prstDash val="solid"/>
+                      <a:round/>
+                      <a:headEnd type="none" w="med" len="med"/>
+                      <a:tailEnd type="none" w="med" len="med"/>
+                    </a:lnT>
+                    <a:lnB w="6350" cap="flat" cmpd="sng" algn="ctr">
+                      <a:solidFill>
+                        <a:srgbClr val="E4DED4"/>
+                      </a:solidFill>
+                      <a:prstDash val="solid"/>
+                      <a:round/>
+                      <a:headEnd type="none" w="med" len="med"/>
+                      <a:tailEnd type="none" w="med" len="med"/>
+                    </a:lnB>
+                    <a:solidFill>
+                      <a:srgbClr val="FFFFFF"/>
+                    </a:solidFill>
+                  </a:tcPr>
+                </a:tc>
+                <a:tc>
+                  <a:txBody>
+                    <a:bodyPr/>
+                    <a:lstStyle/>
+                    <a:p>
+                      <a:pPr algn="ctr" indent="0" marL="0">
+                        <a:buNone/>
+                      </a:pPr>
+                      <a:r>
+                        <a:rPr lang="en-US" sz="800" b="1" dirty="0">
+                          <a:solidFill>
+                            <a:srgbClr val="C1121F"/>
+                          </a:solidFill>
+                          <a:latin typeface="IBM Plex Mono" pitchFamily="34" charset="0"/>
+                          <a:ea typeface="IBM Plex Mono" pitchFamily="34" charset="-122"/>
+                          <a:cs typeface="IBM Plex Mono" pitchFamily="34" charset="-120"/>
+                        </a:rPr>
+                        <a:t>+6.3x</a:t>
+                      </a:r>
+                      <a:endParaRPr lang="en-US" sz="800" dirty="0">
+                        <a:latin typeface="IBM Plex Mono" charset="0"/>
+                        <a:ea typeface="IBM Plex Mono" charset="0"/>
+                        <a:cs typeface="IBM Plex Mono" charset="0"/>
+                      </a:endParaRPr>
+                    </a:p>
+                  </a:txBody>
+                  <a:tcPr marL="63500" marR="63500" marT="25400" marB="25400" anchor="ctr">
+                    <a:lnL w="6350" cap="flat" cmpd="sng" algn="ctr">
+                      <a:solidFill>
+                        <a:srgbClr val="E4DED4"/>
+                      </a:solidFill>
+                      <a:prstDash val="solid"/>
+                      <a:round/>
+                      <a:headEnd type="none" w="med" len="med"/>
+                      <a:tailEnd type="none" w="med" len="med"/>
+                    </a:lnL>
+                    <a:lnR w="6350" cap="flat" cmpd="sng" algn="ctr">
+                      <a:solidFill>
+                        <a:srgbClr val="E4DED4"/>
+                      </a:solidFill>
+                      <a:prstDash val="solid"/>
+                      <a:round/>
+                      <a:headEnd type="none" w="med" len="med"/>
+                      <a:tailEnd type="none" w="med" len="med"/>
+                    </a:lnR>
+                    <a:lnT w="6350" cap="flat" cmpd="sng" algn="ctr">
+                      <a:solidFill>
+                        <a:srgbClr val="E4DED4"/>
+                      </a:solidFill>
+                      <a:prstDash val="solid"/>
+                      <a:round/>
+                      <a:headEnd type="none" w="med" len="med"/>
+                      <a:tailEnd type="none" w="med" len="med"/>
+                    </a:lnT>
+                    <a:lnB w="6350" cap="flat" cmpd="sng" algn="ctr">
+                      <a:solidFill>
+                        <a:srgbClr val="E4DED4"/>
+                      </a:solidFill>
+                      <a:prstDash val="solid"/>
+                      <a:round/>
+                      <a:headEnd type="none" w="med" len="med"/>
+                      <a:tailEnd type="none" w="med" len="med"/>
+                    </a:lnB>
+                    <a:solidFill>
+                      <a:srgbClr val="FFFFFF"/>
+                    </a:solidFill>
+                  </a:tcPr>
+                </a:tc>
+              </a:tr>
+              <a:tr h="512064">
+                <a:tc>
+                  <a:txBody>
+                    <a:bodyPr/>
+                    <a:lstStyle/>
+                    <a:p>
+                      <a:pPr indent="0" marL="0">
+                        <a:buNone/>
+                      </a:pPr>
+                      <a:r>
+                        <a:rPr lang="en-US" sz="950" dirty="0">
+                          <a:solidFill>
+                            <a:srgbClr val="1B1714"/>
+                          </a:solidFill>
+                          <a:latin typeface="IBM Plex Sans KR" pitchFamily="34" charset="0"/>
+                          <a:ea typeface="IBM Plex Sans KR" pitchFamily="34" charset="-122"/>
+                          <a:cs typeface="IBM Plex Sans KR" pitchFamily="34" charset="-120"/>
+                        </a:rPr>
+                        <a:t>① CoC 20% + 그랜트 20%</a:t>
+                      </a:r>
+                      <a:endParaRPr lang="en-US" sz="950" dirty="0">
+                        <a:latin typeface="IBM Plex Sans KR" charset="0"/>
+                        <a:ea typeface="IBM Plex Sans KR" charset="0"/>
+                        <a:cs typeface="IBM Plex Sans KR" charset="0"/>
+                      </a:endParaRPr>
+                    </a:p>
+                  </a:txBody>
+                  <a:tcPr marL="63500" marR="63500" marT="25400" marB="25400" anchor="ctr">
+                    <a:lnL w="6350" cap="flat" cmpd="sng" algn="ctr">
+                      <a:solidFill>
+                        <a:srgbClr val="E4DED4"/>
+                      </a:solidFill>
+                      <a:prstDash val="solid"/>
+                      <a:round/>
+                      <a:headEnd type="none" w="med" len="med"/>
+                      <a:tailEnd type="none" w="med" len="med"/>
+                    </a:lnL>
+                    <a:lnR w="6350" cap="flat" cmpd="sng" algn="ctr">
+                      <a:solidFill>
+                        <a:srgbClr val="E4DED4"/>
+                      </a:solidFill>
+                      <a:prstDash val="solid"/>
+                      <a:round/>
+                      <a:headEnd type="none" w="med" len="med"/>
+                      <a:tailEnd type="none" w="med" len="med"/>
+                    </a:lnR>
+                    <a:lnT w="6350" cap="flat" cmpd="sng" algn="ctr">
+                      <a:solidFill>
+                        <a:srgbClr val="E4DED4"/>
+                      </a:solidFill>
+                      <a:prstDash val="solid"/>
+                      <a:round/>
+                      <a:headEnd type="none" w="med" len="med"/>
+                      <a:tailEnd type="none" w="med" len="med"/>
+                    </a:lnT>
+                    <a:lnB w="6350" cap="flat" cmpd="sng" algn="ctr">
+                      <a:solidFill>
+                        <a:srgbClr val="E4DED4"/>
+                      </a:solidFill>
+                      <a:prstDash val="solid"/>
+                      <a:round/>
+                      <a:headEnd type="none" w="med" len="med"/>
+                      <a:tailEnd type="none" w="med" len="med"/>
+                    </a:lnB>
+                    <a:solidFill>
+                      <a:srgbClr val="E8F3EC"/>
+                    </a:solidFill>
+                  </a:tcPr>
+                </a:tc>
+                <a:tc>
+                  <a:txBody>
+                    <a:bodyPr/>
+                    <a:lstStyle/>
+                    <a:p>
+                      <a:pPr algn="ctr" indent="0" marL="0">
+                        <a:buNone/>
+                      </a:pPr>
+                      <a:r>
+                        <a:rPr lang="en-US" sz="950" dirty="0">
+                          <a:solidFill>
+                            <a:srgbClr val="1B1714"/>
+                          </a:solidFill>
+                          <a:latin typeface="IBM Plex Mono" pitchFamily="34" charset="0"/>
+                          <a:ea typeface="IBM Plex Mono" pitchFamily="34" charset="-122"/>
+                          <a:cs typeface="IBM Plex Mono" pitchFamily="34" charset="-120"/>
+                        </a:rPr>
+                        <a:t>20%</a:t>
+                      </a:r>
+                      <a:endParaRPr lang="en-US" sz="950" dirty="0">
+                        <a:latin typeface="IBM Plex Mono" charset="0"/>
+                        <a:ea typeface="IBM Plex Mono" charset="0"/>
+                        <a:cs typeface="IBM Plex Mono" charset="0"/>
+                      </a:endParaRPr>
+                    </a:p>
+                  </a:txBody>
+                  <a:tcPr marL="63500" marR="63500" marT="25400" marB="25400" anchor="ctr">
+                    <a:lnL w="6350" cap="flat" cmpd="sng" algn="ctr">
+                      <a:solidFill>
+                        <a:srgbClr val="E4DED4"/>
+                      </a:solidFill>
+                      <a:prstDash val="solid"/>
+                      <a:round/>
+                      <a:headEnd type="none" w="med" len="med"/>
+                      <a:tailEnd type="none" w="med" len="med"/>
+                    </a:lnL>
+                    <a:lnR w="6350" cap="flat" cmpd="sng" algn="ctr">
+                      <a:solidFill>
+                        <a:srgbClr val="E4DED4"/>
+                      </a:solidFill>
+                      <a:prstDash val="solid"/>
+                      <a:round/>
+                      <a:headEnd type="none" w="med" len="med"/>
+                      <a:tailEnd type="none" w="med" len="med"/>
+                    </a:lnR>
+                    <a:lnT w="6350" cap="flat" cmpd="sng" algn="ctr">
+                      <a:solidFill>
+                        <a:srgbClr val="E4DED4"/>
+                      </a:solidFill>
+                      <a:prstDash val="solid"/>
+                      <a:round/>
+                      <a:headEnd type="none" w="med" len="med"/>
+                      <a:tailEnd type="none" w="med" len="med"/>
+                    </a:lnT>
+                    <a:lnB w="6350" cap="flat" cmpd="sng" algn="ctr">
+                      <a:solidFill>
+                        <a:srgbClr val="E4DED4"/>
+                      </a:solidFill>
+                      <a:prstDash val="solid"/>
+                      <a:round/>
+                      <a:headEnd type="none" w="med" len="med"/>
+                      <a:tailEnd type="none" w="med" len="med"/>
+                    </a:lnB>
+                    <a:solidFill>
+                      <a:srgbClr val="E8F3EC"/>
+                    </a:solidFill>
+                  </a:tcPr>
+                </a:tc>
+                <a:tc>
+                  <a:txBody>
+                    <a:bodyPr/>
+                    <a:lstStyle/>
+                    <a:p>
+                      <a:pPr algn="ctr" indent="0" marL="0">
+                        <a:buNone/>
+                      </a:pPr>
+                      <a:r>
+                        <a:rPr lang="en-US" sz="950" dirty="0">
+                          <a:solidFill>
+                            <a:srgbClr val="1B1714"/>
+                          </a:solidFill>
+                          <a:latin typeface="IBM Plex Mono" pitchFamily="34" charset="0"/>
+                          <a:ea typeface="IBM Plex Mono" pitchFamily="34" charset="-122"/>
+                          <a:cs typeface="IBM Plex Mono" pitchFamily="34" charset="-120"/>
+                        </a:rPr>
+                        <a:t>20%</a:t>
+                      </a:r>
+                      <a:endParaRPr lang="en-US" sz="950" dirty="0">
+                        <a:latin typeface="IBM Plex Mono" charset="0"/>
+                        <a:ea typeface="IBM Plex Mono" charset="0"/>
+                        <a:cs typeface="IBM Plex Mono" charset="0"/>
+                      </a:endParaRPr>
+                    </a:p>
+                  </a:txBody>
+                  <a:tcPr marL="63500" marR="63500" marT="25400" marB="25400" anchor="ctr">
+                    <a:lnL w="6350" cap="flat" cmpd="sng" algn="ctr">
+                      <a:solidFill>
+                        <a:srgbClr val="E4DED4"/>
+                      </a:solidFill>
+                      <a:prstDash val="solid"/>
+                      <a:round/>
+                      <a:headEnd type="none" w="med" len="med"/>
+                      <a:tailEnd type="none" w="med" len="med"/>
+                    </a:lnL>
+                    <a:lnR w="6350" cap="flat" cmpd="sng" algn="ctr">
+                      <a:solidFill>
+                        <a:srgbClr val="E4DED4"/>
+                      </a:solidFill>
+                      <a:prstDash val="solid"/>
+                      <a:round/>
+                      <a:headEnd type="none" w="med" len="med"/>
+                      <a:tailEnd type="none" w="med" len="med"/>
+                    </a:lnR>
+                    <a:lnT w="6350" cap="flat" cmpd="sng" algn="ctr">
+                      <a:solidFill>
+                        <a:srgbClr val="E4DED4"/>
+                      </a:solidFill>
+                      <a:prstDash val="solid"/>
+                      <a:round/>
+                      <a:headEnd type="none" w="med" len="med"/>
+                      <a:tailEnd type="none" w="med" len="med"/>
+                    </a:lnT>
+                    <a:lnB w="6350" cap="flat" cmpd="sng" algn="ctr">
+                      <a:solidFill>
+                        <a:srgbClr val="E4DED4"/>
+                      </a:solidFill>
+                      <a:prstDash val="solid"/>
+                      <a:round/>
+                      <a:headEnd type="none" w="med" len="med"/>
+                      <a:tailEnd type="none" w="med" len="med"/>
+                    </a:lnB>
+                    <a:solidFill>
+                      <a:srgbClr val="E8F3EC"/>
+                    </a:solidFill>
+                  </a:tcPr>
+                </a:tc>
+                <a:tc>
+                  <a:txBody>
+                    <a:bodyPr/>
+                    <a:lstStyle/>
+                    <a:p>
+                      <a:pPr algn="ctr" indent="0" marL="0">
+                        <a:buNone/>
+                      </a:pPr>
+                      <a:r>
+                        <a:rPr lang="en-US" sz="950" dirty="0">
+                          <a:solidFill>
+                            <a:srgbClr val="1B1714"/>
+                          </a:solidFill>
+                          <a:latin typeface="IBM Plex Mono" pitchFamily="34" charset="0"/>
+                          <a:ea typeface="IBM Plex Mono" pitchFamily="34" charset="-122"/>
+                          <a:cs typeface="IBM Plex Mono" pitchFamily="34" charset="-120"/>
+                        </a:rPr>
+                        <a:t>$7.8bn</a:t>
+                      </a:r>
+                      <a:endParaRPr lang="en-US" sz="950" dirty="0">
+                        <a:latin typeface="IBM Plex Mono" charset="0"/>
+                        <a:ea typeface="IBM Plex Mono" charset="0"/>
+                        <a:cs typeface="IBM Plex Mono" charset="0"/>
+                      </a:endParaRPr>
+                    </a:p>
+                  </a:txBody>
+                  <a:tcPr marL="63500" marR="63500" marT="25400" marB="25400" anchor="ctr">
+                    <a:lnL w="6350" cap="flat" cmpd="sng" algn="ctr">
+                      <a:solidFill>
+                        <a:srgbClr val="E4DED4"/>
+                      </a:solidFill>
+                      <a:prstDash val="solid"/>
+                      <a:round/>
+                      <a:headEnd type="none" w="med" len="med"/>
+                      <a:tailEnd type="none" w="med" len="med"/>
+                    </a:lnL>
+                    <a:lnR w="6350" cap="flat" cmpd="sng" algn="ctr">
+                      <a:solidFill>
+                        <a:srgbClr val="E4DED4"/>
+                      </a:solidFill>
+                      <a:prstDash val="solid"/>
+                      <a:round/>
+                      <a:headEnd type="none" w="med" len="med"/>
+                      <a:tailEnd type="none" w="med" len="med"/>
+                    </a:lnR>
+                    <a:lnT w="6350" cap="flat" cmpd="sng" algn="ctr">
+                      <a:solidFill>
+                        <a:srgbClr val="E4DED4"/>
+                      </a:solidFill>
+                      <a:prstDash val="solid"/>
+                      <a:round/>
+                      <a:headEnd type="none" w="med" len="med"/>
+                      <a:tailEnd type="none" w="med" len="med"/>
+                    </a:lnT>
+                    <a:lnB w="6350" cap="flat" cmpd="sng" algn="ctr">
+                      <a:solidFill>
+                        <a:srgbClr val="E4DED4"/>
+                      </a:solidFill>
+                      <a:prstDash val="solid"/>
+                      <a:round/>
+                      <a:headEnd type="none" w="med" len="med"/>
+                      <a:tailEnd type="none" w="med" len="med"/>
+                    </a:lnB>
+                    <a:solidFill>
+                      <a:srgbClr val="E8F3EC"/>
+                    </a:solidFill>
+                  </a:tcPr>
+                </a:tc>
+                <a:tc>
+                  <a:txBody>
+                    <a:bodyPr/>
+                    <a:lstStyle/>
+                    <a:p>
+                      <a:pPr algn="ctr" indent="0" marL="0">
+                        <a:buNone/>
+                      </a:pPr>
+                      <a:r>
+                        <a:rPr lang="en-US" sz="1200" b="1" dirty="0">
+                          <a:solidFill>
+                            <a:srgbClr val="C1121F"/>
+                          </a:solidFill>
+                          <a:latin typeface="Space Grotesk" pitchFamily="34" charset="0"/>
+                          <a:ea typeface="Space Grotesk" pitchFamily="34" charset="-122"/>
+                          <a:cs typeface="Space Grotesk" pitchFamily="34" charset="-120"/>
+                        </a:rPr>
+                        <a:t>17.7x</a:t>
+                      </a:r>
+                      <a:endParaRPr lang="en-US" sz="1200" dirty="0">
+                        <a:latin typeface="Space Grotesk" charset="0"/>
+                        <a:ea typeface="Space Grotesk" charset="0"/>
+                        <a:cs typeface="Space Grotesk" charset="0"/>
+                      </a:endParaRPr>
+                    </a:p>
+                  </a:txBody>
+                  <a:tcPr marL="63500" marR="63500" marT="25400" marB="25400" anchor="ctr">
+                    <a:lnL w="6350" cap="flat" cmpd="sng" algn="ctr">
+                      <a:solidFill>
+                        <a:srgbClr val="E4DED4"/>
+                      </a:solidFill>
+                      <a:prstDash val="solid"/>
+                      <a:round/>
+                      <a:headEnd type="none" w="med" len="med"/>
+                      <a:tailEnd type="none" w="med" len="med"/>
+                    </a:lnL>
+                    <a:lnR w="6350" cap="flat" cmpd="sng" algn="ctr">
+                      <a:solidFill>
+                        <a:srgbClr val="E4DED4"/>
+                      </a:solidFill>
+                      <a:prstDash val="solid"/>
+                      <a:round/>
+                      <a:headEnd type="none" w="med" len="med"/>
+                      <a:tailEnd type="none" w="med" len="med"/>
+                    </a:lnR>
+                    <a:lnT w="6350" cap="flat" cmpd="sng" algn="ctr">
+                      <a:solidFill>
+                        <a:srgbClr val="E4DED4"/>
+                      </a:solidFill>
+                      <a:prstDash val="solid"/>
+                      <a:round/>
+                      <a:headEnd type="none" w="med" len="med"/>
+                      <a:tailEnd type="none" w="med" len="med"/>
+                    </a:lnT>
+                    <a:lnB w="6350" cap="flat" cmpd="sng" algn="ctr">
+                      <a:solidFill>
+                        <a:srgbClr val="E4DED4"/>
+                      </a:solidFill>
+                      <a:prstDash val="solid"/>
+                      <a:round/>
+                      <a:headEnd type="none" w="med" len="med"/>
+                      <a:tailEnd type="none" w="med" len="med"/>
+                    </a:lnB>
+                    <a:solidFill>
+                      <a:srgbClr val="E8F3EC"/>
+                    </a:solidFill>
+                  </a:tcPr>
+                </a:tc>
+                <a:tc>
+                  <a:txBody>
+                    <a:bodyPr/>
+                    <a:lstStyle/>
+                    <a:p>
+                      <a:pPr algn="ctr" indent="0" marL="0">
+                        <a:buNone/>
+                      </a:pPr>
+                      <a:r>
+                        <a:rPr lang="en-US" sz="800" b="1" dirty="0">
+                          <a:solidFill>
+                            <a:srgbClr val="6F6960"/>
+                          </a:solidFill>
+                          <a:latin typeface="IBM Plex Mono" pitchFamily="34" charset="0"/>
+                          <a:ea typeface="IBM Plex Mono" pitchFamily="34" charset="-122"/>
+                          <a:cs typeface="IBM Plex Mono" pitchFamily="34" charset="-120"/>
+                        </a:rPr>
+                        <a:t>+4.7x</a:t>
+                      </a:r>
+                      <a:endParaRPr lang="en-US" sz="800" dirty="0">
+                        <a:latin typeface="IBM Plex Mono" charset="0"/>
+                        <a:ea typeface="IBM Plex Mono" charset="0"/>
+                        <a:cs typeface="IBM Plex Mono" charset="0"/>
+                      </a:endParaRPr>
+                    </a:p>
+                  </a:txBody>
+                  <a:tcPr marL="63500" marR="63500" marT="25400" marB="25400" anchor="ctr">
+                    <a:lnL w="6350" cap="flat" cmpd="sng" algn="ctr">
+                      <a:solidFill>
+                        <a:srgbClr val="E4DED4"/>
+                      </a:solidFill>
+                      <a:prstDash val="solid"/>
+                      <a:round/>
+                      <a:headEnd type="none" w="med" len="med"/>
+                      <a:tailEnd type="none" w="med" len="med"/>
+                    </a:lnL>
+                    <a:lnR w="6350" cap="flat" cmpd="sng" algn="ctr">
+                      <a:solidFill>
+                        <a:srgbClr val="E4DED4"/>
+                      </a:solidFill>
+                      <a:prstDash val="solid"/>
+                      <a:round/>
+                      <a:headEnd type="none" w="med" len="med"/>
+                      <a:tailEnd type="none" w="med" len="med"/>
+                    </a:lnR>
+                    <a:lnT w="6350" cap="flat" cmpd="sng" algn="ctr">
+                      <a:solidFill>
+                        <a:srgbClr val="E4DED4"/>
+                      </a:solidFill>
+                      <a:prstDash val="solid"/>
+                      <a:round/>
+                      <a:headEnd type="none" w="med" len="med"/>
+                      <a:tailEnd type="none" w="med" len="med"/>
+                    </a:lnT>
+                    <a:lnB w="6350" cap="flat" cmpd="sng" algn="ctr">
+                      <a:solidFill>
+                        <a:srgbClr val="E4DED4"/>
+                      </a:solidFill>
+                      <a:prstDash val="solid"/>
+                      <a:round/>
+                      <a:headEnd type="none" w="med" len="med"/>
+                      <a:tailEnd type="none" w="med" len="med"/>
+                    </a:lnB>
+                    <a:solidFill>
+                      <a:srgbClr val="E8F3EC"/>
+                    </a:solidFill>
+                  </a:tcPr>
+                </a:tc>
+              </a:tr>
+              <a:tr h="512064">
+                <a:tc>
+                  <a:txBody>
+                    <a:bodyPr/>
+                    <a:lstStyle/>
+                    <a:p>
+                      <a:pPr indent="0" marL="0">
+                        <a:buNone/>
+                      </a:pPr>
+                      <a:r>
+                        <a:rPr lang="en-US" sz="950" dirty="0">
+                          <a:solidFill>
+                            <a:srgbClr val="1B1714"/>
+                          </a:solidFill>
+                          <a:latin typeface="IBM Plex Sans KR" pitchFamily="34" charset="0"/>
+                          <a:ea typeface="IBM Plex Sans KR" pitchFamily="34" charset="-122"/>
+                          <a:cs typeface="IBM Plex Sans KR" pitchFamily="34" charset="-120"/>
+                        </a:rPr>
+                        <a:t>② CoC 해제 → 희석 30%</a:t>
+                      </a:r>
+                      <a:endParaRPr lang="en-US" sz="950" dirty="0">
+                        <a:latin typeface="IBM Plex Sans KR" charset="0"/>
+                        <a:ea typeface="IBM Plex Sans KR" charset="0"/>
+                        <a:cs typeface="IBM Plex Sans KR" charset="0"/>
+                      </a:endParaRPr>
+                    </a:p>
+                  </a:txBody>
+                  <a:tcPr marL="63500" marR="63500" marT="25400" marB="25400" anchor="ctr">
+                    <a:lnL w="6350" cap="flat" cmpd="sng" algn="ctr">
+                      <a:solidFill>
+                        <a:srgbClr val="E4DED4"/>
+                      </a:solidFill>
+                      <a:prstDash val="solid"/>
+                      <a:round/>
+                      <a:headEnd type="none" w="med" len="med"/>
+                      <a:tailEnd type="none" w="med" len="med"/>
+                    </a:lnL>
+                    <a:lnR w="6350" cap="flat" cmpd="sng" algn="ctr">
+                      <a:solidFill>
+                        <a:srgbClr val="E4DED4"/>
+                      </a:solidFill>
+                      <a:prstDash val="solid"/>
+                      <a:round/>
+                      <a:headEnd type="none" w="med" len="med"/>
+                      <a:tailEnd type="none" w="med" len="med"/>
+                    </a:lnR>
+                    <a:lnT w="6350" cap="flat" cmpd="sng" algn="ctr">
+                      <a:solidFill>
+                        <a:srgbClr val="E4DED4"/>
+                      </a:solidFill>
+                      <a:prstDash val="solid"/>
+                      <a:round/>
+                      <a:headEnd type="none" w="med" len="med"/>
+                      <a:tailEnd type="none" w="med" len="med"/>
+                    </a:lnT>
+                    <a:lnB w="6350" cap="flat" cmpd="sng" algn="ctr">
+                      <a:solidFill>
+                        <a:srgbClr val="E4DED4"/>
+                      </a:solidFill>
+                      <a:prstDash val="solid"/>
+                      <a:round/>
+                      <a:headEnd type="none" w="med" len="med"/>
+                      <a:tailEnd type="none" w="med" len="med"/>
+                    </a:lnB>
+                    <a:solidFill>
+                      <a:srgbClr val="E8F3EC"/>
+                    </a:solidFill>
+                  </a:tcPr>
+                </a:tc>
+                <a:tc>
+                  <a:txBody>
+                    <a:bodyPr/>
+                    <a:lstStyle/>
+                    <a:p>
+                      <a:pPr algn="ctr" indent="0" marL="0">
+                        <a:buNone/>
+                      </a:pPr>
+                      <a:r>
+                        <a:rPr lang="en-US" sz="950" dirty="0">
+                          <a:solidFill>
+                            <a:srgbClr val="1B1714"/>
+                          </a:solidFill>
+                          <a:latin typeface="IBM Plex Mono" pitchFamily="34" charset="0"/>
+                          <a:ea typeface="IBM Plex Mono" pitchFamily="34" charset="-122"/>
+                          <a:cs typeface="IBM Plex Mono" pitchFamily="34" charset="-120"/>
+                        </a:rPr>
+                        <a:t>10%</a:t>
+                      </a:r>
+                      <a:endParaRPr lang="en-US" sz="950" dirty="0">
+                        <a:latin typeface="IBM Plex Mono" charset="0"/>
+                        <a:ea typeface="IBM Plex Mono" charset="0"/>
+                        <a:cs typeface="IBM Plex Mono" charset="0"/>
+                      </a:endParaRPr>
+                    </a:p>
+                  </a:txBody>
+                  <a:tcPr marL="63500" marR="63500" marT="25400" marB="25400" anchor="ctr">
+                    <a:lnL w="6350" cap="flat" cmpd="sng" algn="ctr">
+                      <a:solidFill>
+                        <a:srgbClr val="E4DED4"/>
+                      </a:solidFill>
+                      <a:prstDash val="solid"/>
+                      <a:round/>
+                      <a:headEnd type="none" w="med" len="med"/>
+                      <a:tailEnd type="none" w="med" len="med"/>
+                    </a:lnL>
+                    <a:lnR w="6350" cap="flat" cmpd="sng" algn="ctr">
+                      <a:solidFill>
+                        <a:srgbClr val="E4DED4"/>
+                      </a:solidFill>
+                      <a:prstDash val="solid"/>
+                      <a:round/>
+                      <a:headEnd type="none" w="med" len="med"/>
+                      <a:tailEnd type="none" w="med" len="med"/>
+                    </a:lnR>
+                    <a:lnT w="6350" cap="flat" cmpd="sng" algn="ctr">
+                      <a:solidFill>
+                        <a:srgbClr val="E4DED4"/>
+                      </a:solidFill>
+                      <a:prstDash val="solid"/>
+                      <a:round/>
+                      <a:headEnd type="none" w="med" len="med"/>
+                      <a:tailEnd type="none" w="med" len="med"/>
+                    </a:lnT>
+                    <a:lnB w="6350" cap="flat" cmpd="sng" algn="ctr">
+                      <a:solidFill>
+                        <a:srgbClr val="E4DED4"/>
+                      </a:solidFill>
+                      <a:prstDash val="solid"/>
+                      <a:round/>
+                      <a:headEnd type="none" w="med" len="med"/>
+                      <a:tailEnd type="none" w="med" len="med"/>
+                    </a:lnB>
+                    <a:solidFill>
+                      <a:srgbClr val="E8F3EC"/>
+                    </a:solidFill>
+                  </a:tcPr>
+                </a:tc>
+                <a:tc>
+                  <a:txBody>
+                    <a:bodyPr/>
+                    <a:lstStyle/>
+                    <a:p>
+                      <a:pPr algn="ctr" indent="0" marL="0">
+                        <a:buNone/>
+                      </a:pPr>
+                      <a:r>
+                        <a:rPr lang="en-US" sz="950" dirty="0">
+                          <a:solidFill>
+                            <a:srgbClr val="1B1714"/>
+                          </a:solidFill>
+                          <a:latin typeface="IBM Plex Mono" pitchFamily="34" charset="0"/>
+                          <a:ea typeface="IBM Plex Mono" pitchFamily="34" charset="-122"/>
+                          <a:cs typeface="IBM Plex Mono" pitchFamily="34" charset="-120"/>
+                        </a:rPr>
+                        <a:t>30%</a:t>
+                      </a:r>
+                      <a:endParaRPr lang="en-US" sz="950" dirty="0">
+                        <a:latin typeface="IBM Plex Mono" charset="0"/>
+                        <a:ea typeface="IBM Plex Mono" charset="0"/>
+                        <a:cs typeface="IBM Plex Mono" charset="0"/>
+                      </a:endParaRPr>
+                    </a:p>
+                  </a:txBody>
+                  <a:tcPr marL="63500" marR="63500" marT="25400" marB="25400" anchor="ctr">
+                    <a:lnL w="6350" cap="flat" cmpd="sng" algn="ctr">
+                      <a:solidFill>
+                        <a:srgbClr val="E4DED4"/>
+                      </a:solidFill>
+                      <a:prstDash val="solid"/>
+                      <a:round/>
+                      <a:headEnd type="none" w="med" len="med"/>
+                      <a:tailEnd type="none" w="med" len="med"/>
+                    </a:lnL>
+                    <a:lnR w="6350" cap="flat" cmpd="sng" algn="ctr">
+                      <a:solidFill>
+                        <a:srgbClr val="E4DED4"/>
+                      </a:solidFill>
+                      <a:prstDash val="solid"/>
+                      <a:round/>
+                      <a:headEnd type="none" w="med" len="med"/>
+                      <a:tailEnd type="none" w="med" len="med"/>
+                    </a:lnR>
+                    <a:lnT w="6350" cap="flat" cmpd="sng" algn="ctr">
+                      <a:solidFill>
+                        <a:srgbClr val="E4DED4"/>
+                      </a:solidFill>
+                      <a:prstDash val="solid"/>
+                      <a:round/>
+                      <a:headEnd type="none" w="med" len="med"/>
+                      <a:tailEnd type="none" w="med" len="med"/>
+                    </a:lnT>
+                    <a:lnB w="6350" cap="flat" cmpd="sng" algn="ctr">
+                      <a:solidFill>
+                        <a:srgbClr val="E4DED4"/>
+                      </a:solidFill>
+                      <a:prstDash val="solid"/>
+                      <a:round/>
+                      <a:headEnd type="none" w="med" len="med"/>
+                      <a:tailEnd type="none" w="med" len="med"/>
+                    </a:lnB>
+                    <a:solidFill>
+                      <a:srgbClr val="E8F3EC"/>
+                    </a:solidFill>
+                  </a:tcPr>
+                </a:tc>
+                <a:tc>
+                  <a:txBody>
+                    <a:bodyPr/>
+                    <a:lstStyle/>
+                    <a:p>
+                      <a:pPr algn="ctr" indent="0" marL="0">
+                        <a:buNone/>
+                      </a:pPr>
+                      <a:r>
+                        <a:rPr lang="en-US" sz="950" dirty="0">
+                          <a:solidFill>
+                            <a:srgbClr val="1B1714"/>
+                          </a:solidFill>
+                          <a:latin typeface="IBM Plex Mono" pitchFamily="34" charset="0"/>
+                          <a:ea typeface="IBM Plex Mono" pitchFamily="34" charset="-122"/>
+                          <a:cs typeface="IBM Plex Mono" pitchFamily="34" charset="-120"/>
+                        </a:rPr>
+                        <a:t>$7.8bn</a:t>
+                      </a:r>
+                      <a:endParaRPr lang="en-US" sz="950" dirty="0">
+                        <a:latin typeface="IBM Plex Mono" charset="0"/>
+                        <a:ea typeface="IBM Plex Mono" charset="0"/>
+                        <a:cs typeface="IBM Plex Mono" charset="0"/>
+                      </a:endParaRPr>
+                    </a:p>
+                  </a:txBody>
+                  <a:tcPr marL="63500" marR="63500" marT="25400" marB="25400" anchor="ctr">
+                    <a:lnL w="6350" cap="flat" cmpd="sng" algn="ctr">
+                      <a:solidFill>
+                        <a:srgbClr val="E4DED4"/>
+                      </a:solidFill>
+                      <a:prstDash val="solid"/>
+                      <a:round/>
+                      <a:headEnd type="none" w="med" len="med"/>
+                      <a:tailEnd type="none" w="med" len="med"/>
+                    </a:lnL>
+                    <a:lnR w="6350" cap="flat" cmpd="sng" algn="ctr">
+                      <a:solidFill>
+                        <a:srgbClr val="E4DED4"/>
+                      </a:solidFill>
+                      <a:prstDash val="solid"/>
+                      <a:round/>
+                      <a:headEnd type="none" w="med" len="med"/>
+                      <a:tailEnd type="none" w="med" len="med"/>
+                    </a:lnR>
+                    <a:lnT w="6350" cap="flat" cmpd="sng" algn="ctr">
+                      <a:solidFill>
+                        <a:srgbClr val="E4DED4"/>
+                      </a:solidFill>
+                      <a:prstDash val="solid"/>
+                      <a:round/>
+                      <a:headEnd type="none" w="med" len="med"/>
+                      <a:tailEnd type="none" w="med" len="med"/>
+                    </a:lnT>
+                    <a:lnB w="6350" cap="flat" cmpd="sng" algn="ctr">
+                      <a:solidFill>
+                        <a:srgbClr val="E4DED4"/>
+                      </a:solidFill>
+                      <a:prstDash val="solid"/>
+                      <a:round/>
+                      <a:headEnd type="none" w="med" len="med"/>
+                      <a:tailEnd type="none" w="med" len="med"/>
+                    </a:lnB>
+                    <a:solidFill>
+                      <a:srgbClr val="E8F3EC"/>
+                    </a:solidFill>
+                  </a:tcPr>
+                </a:tc>
+                <a:tc>
+                  <a:txBody>
+                    <a:bodyPr/>
+                    <a:lstStyle/>
+                    <a:p>
+                      <a:pPr algn="ctr" indent="0" marL="0">
+                        <a:buNone/>
+                      </a:pPr>
+                      <a:r>
+                        <a:rPr lang="en-US" sz="1200" b="1" dirty="0">
+                          <a:solidFill>
+                            <a:srgbClr val="C1121F"/>
+                          </a:solidFill>
+                          <a:latin typeface="Space Grotesk" pitchFamily="34" charset="0"/>
+                          <a:ea typeface="Space Grotesk" pitchFamily="34" charset="-122"/>
+                          <a:cs typeface="Space Grotesk" pitchFamily="34" charset="-120"/>
+                        </a:rPr>
+                        <a:t>17.7x</a:t>
+                      </a:r>
+                      <a:endParaRPr lang="en-US" sz="1200" dirty="0">
+                        <a:latin typeface="Space Grotesk" charset="0"/>
+                        <a:ea typeface="Space Grotesk" charset="0"/>
+                        <a:cs typeface="Space Grotesk" charset="0"/>
+                      </a:endParaRPr>
+                    </a:p>
+                  </a:txBody>
+                  <a:tcPr marL="63500" marR="63500" marT="25400" marB="25400" anchor="ctr">
+                    <a:lnL w="6350" cap="flat" cmpd="sng" algn="ctr">
+                      <a:solidFill>
+                        <a:srgbClr val="E4DED4"/>
+                      </a:solidFill>
+                      <a:prstDash val="solid"/>
+                      <a:round/>
+                      <a:headEnd type="none" w="med" len="med"/>
+                      <a:tailEnd type="none" w="med" len="med"/>
+                    </a:lnL>
+                    <a:lnR w="6350" cap="flat" cmpd="sng" algn="ctr">
+                      <a:solidFill>
+                        <a:srgbClr val="E4DED4"/>
+                      </a:solidFill>
+                      <a:prstDash val="solid"/>
+                      <a:round/>
+                      <a:headEnd type="none" w="med" len="med"/>
+                      <a:tailEnd type="none" w="med" len="med"/>
+                    </a:lnR>
+                    <a:lnT w="6350" cap="flat" cmpd="sng" algn="ctr">
+                      <a:solidFill>
+                        <a:srgbClr val="E4DED4"/>
+                      </a:solidFill>
+                      <a:prstDash val="solid"/>
+                      <a:round/>
+                      <a:headEnd type="none" w="med" len="med"/>
+                      <a:tailEnd type="none" w="med" len="med"/>
+                    </a:lnT>
+                    <a:lnB w="6350" cap="flat" cmpd="sng" algn="ctr">
+                      <a:solidFill>
+                        <a:srgbClr val="E4DED4"/>
+                      </a:solidFill>
+                      <a:prstDash val="solid"/>
+                      <a:round/>
+                      <a:headEnd type="none" w="med" len="med"/>
+                      <a:tailEnd type="none" w="med" len="med"/>
+                    </a:lnB>
+                    <a:solidFill>
+                      <a:srgbClr val="E8F3EC"/>
+                    </a:solidFill>
+                  </a:tcPr>
+                </a:tc>
+                <a:tc>
+                  <a:txBody>
+                    <a:bodyPr/>
+                    <a:lstStyle/>
+                    <a:p>
+                      <a:pPr algn="ctr" indent="0" marL="0">
+                        <a:buNone/>
+                      </a:pPr>
+                      <a:r>
+                        <a:rPr lang="en-US" sz="800" b="1" dirty="0">
+                          <a:solidFill>
+                            <a:srgbClr val="6F6960"/>
+                          </a:solidFill>
+                          <a:latin typeface="IBM Plex Mono" pitchFamily="34" charset="0"/>
+                          <a:ea typeface="IBM Plex Mono" pitchFamily="34" charset="-122"/>
+                          <a:cs typeface="IBM Plex Mono" pitchFamily="34" charset="-120"/>
+                        </a:rPr>
+                        <a:t>+4.7x</a:t>
+                      </a:r>
+                      <a:endParaRPr lang="en-US" sz="800" dirty="0">
+                        <a:latin typeface="IBM Plex Mono" charset="0"/>
+                        <a:ea typeface="IBM Plex Mono" charset="0"/>
+                        <a:cs typeface="IBM Plex Mono" charset="0"/>
+                      </a:endParaRPr>
+                    </a:p>
+                  </a:txBody>
+                  <a:tcPr marL="63500" marR="63500" marT="25400" marB="25400" anchor="ctr">
+                    <a:lnL w="6350" cap="flat" cmpd="sng" algn="ctr">
+                      <a:solidFill>
+                        <a:srgbClr val="E4DED4"/>
+                      </a:solidFill>
+                      <a:prstDash val="solid"/>
+                      <a:round/>
+                      <a:headEnd type="none" w="med" len="med"/>
+                      <a:tailEnd type="none" w="med" len="med"/>
+                    </a:lnL>
+                    <a:lnR w="6350" cap="flat" cmpd="sng" algn="ctr">
+                      <a:solidFill>
+                        <a:srgbClr val="E4DED4"/>
+                      </a:solidFill>
+                      <a:prstDash val="solid"/>
+                      <a:round/>
+                      <a:headEnd type="none" w="med" len="med"/>
+                      <a:tailEnd type="none" w="med" len="med"/>
+                    </a:lnR>
+                    <a:lnT w="6350" cap="flat" cmpd="sng" algn="ctr">
+                      <a:solidFill>
+                        <a:srgbClr val="E4DED4"/>
+                      </a:solidFill>
+                      <a:prstDash val="solid"/>
+                      <a:round/>
+                      <a:headEnd type="none" w="med" len="med"/>
+                      <a:tailEnd type="none" w="med" len="med"/>
+                    </a:lnT>
+                    <a:lnB w="6350" cap="flat" cmpd="sng" algn="ctr">
+                      <a:solidFill>
+                        <a:srgbClr val="E4DED4"/>
+                      </a:solidFill>
+                      <a:prstDash val="solid"/>
+                      <a:round/>
+                      <a:headEnd type="none" w="med" len="med"/>
+                      <a:tailEnd type="none" w="med" len="med"/>
+                    </a:lnB>
+                    <a:solidFill>
+                      <a:srgbClr val="E8F3EC"/>
+                    </a:solidFill>
+                  </a:tcPr>
+                </a:tc>
+              </a:tr>
+              <a:tr h="512064">
+                <a:tc>
+                  <a:txBody>
+                    <a:bodyPr/>
+                    <a:lstStyle/>
+                    <a:p>
+                      <a:pPr indent="0" marL="0">
+                        <a:buNone/>
+                      </a:pPr>
+                      <a:r>
+                        <a:rPr lang="en-US" sz="950" dirty="0">
+                          <a:solidFill>
+                            <a:srgbClr val="1B1714"/>
+                          </a:solidFill>
+                          <a:latin typeface="IBM Plex Sans KR" pitchFamily="34" charset="0"/>
+                          <a:ea typeface="IBM Plex Sans KR" pitchFamily="34" charset="-122"/>
+                          <a:cs typeface="IBM Plex Sans KR" pitchFamily="34" charset="-120"/>
+                        </a:rPr>
+                        <a:t>①+② 결합</a:t>
+                      </a:r>
+                      <a:endParaRPr lang="en-US" sz="950" dirty="0">
+                        <a:latin typeface="IBM Plex Sans KR" charset="0"/>
+                        <a:ea typeface="IBM Plex Sans KR" charset="0"/>
+                        <a:cs typeface="IBM Plex Sans KR" charset="0"/>
+                      </a:endParaRPr>
+                    </a:p>
+                  </a:txBody>
+                  <a:tcPr marL="63500" marR="63500" marT="25400" marB="25400" anchor="ctr">
+                    <a:lnL w="6350" cap="flat" cmpd="sng" algn="ctr">
+                      <a:solidFill>
+                        <a:srgbClr val="E4DED4"/>
+                      </a:solidFill>
+                      <a:prstDash val="solid"/>
+                      <a:round/>
+                      <a:headEnd type="none" w="med" len="med"/>
+                      <a:tailEnd type="none" w="med" len="med"/>
+                    </a:lnL>
+                    <a:lnR w="6350" cap="flat" cmpd="sng" algn="ctr">
+                      <a:solidFill>
+                        <a:srgbClr val="E4DED4"/>
+                      </a:solidFill>
+                      <a:prstDash val="solid"/>
+                      <a:round/>
+                      <a:headEnd type="none" w="med" len="med"/>
+                      <a:tailEnd type="none" w="med" len="med"/>
+                    </a:lnR>
+                    <a:lnT w="6350" cap="flat" cmpd="sng" algn="ctr">
+                      <a:solidFill>
+                        <a:srgbClr val="E4DED4"/>
+                      </a:solidFill>
+                      <a:prstDash val="solid"/>
+                      <a:round/>
+                      <a:headEnd type="none" w="med" len="med"/>
+                      <a:tailEnd type="none" w="med" len="med"/>
+                    </a:lnT>
+                    <a:lnB w="6350" cap="flat" cmpd="sng" algn="ctr">
+                      <a:solidFill>
+                        <a:srgbClr val="E4DED4"/>
+                      </a:solidFill>
+                      <a:prstDash val="solid"/>
+                      <a:round/>
+                      <a:headEnd type="none" w="med" len="med"/>
+                      <a:tailEnd type="none" w="med" len="med"/>
+                    </a:lnB>
+                    <a:solidFill>
+                      <a:srgbClr val="E8F3EC"/>
+                    </a:solidFill>
+                  </a:tcPr>
+                </a:tc>
+                <a:tc>
+                  <a:txBody>
+                    <a:bodyPr/>
+                    <a:lstStyle/>
+                    <a:p>
+                      <a:pPr algn="ctr" indent="0" marL="0">
+                        <a:buNone/>
+                      </a:pPr>
+                      <a:r>
+                        <a:rPr lang="en-US" sz="950" dirty="0">
+                          <a:solidFill>
+                            <a:srgbClr val="1B1714"/>
+                          </a:solidFill>
+                          <a:latin typeface="IBM Plex Mono" pitchFamily="34" charset="0"/>
+                          <a:ea typeface="IBM Plex Mono" pitchFamily="34" charset="-122"/>
+                          <a:cs typeface="IBM Plex Mono" pitchFamily="34" charset="-120"/>
+                        </a:rPr>
+                        <a:t>20%</a:t>
+                      </a:r>
+                      <a:endParaRPr lang="en-US" sz="950" dirty="0">
+                        <a:latin typeface="IBM Plex Mono" charset="0"/>
+                        <a:ea typeface="IBM Plex Mono" charset="0"/>
+                        <a:cs typeface="IBM Plex Mono" charset="0"/>
+                      </a:endParaRPr>
+                    </a:p>
+                  </a:txBody>
+                  <a:tcPr marL="63500" marR="63500" marT="25400" marB="25400" anchor="ctr">
+                    <a:lnL w="6350" cap="flat" cmpd="sng" algn="ctr">
+                      <a:solidFill>
+                        <a:srgbClr val="E4DED4"/>
+                      </a:solidFill>
+                      <a:prstDash val="solid"/>
+                      <a:round/>
+                      <a:headEnd type="none" w="med" len="med"/>
+                      <a:tailEnd type="none" w="med" len="med"/>
+                    </a:lnL>
+                    <a:lnR w="6350" cap="flat" cmpd="sng" algn="ctr">
+                      <a:solidFill>
+                        <a:srgbClr val="E4DED4"/>
+                      </a:solidFill>
+                      <a:prstDash val="solid"/>
+                      <a:round/>
+                      <a:headEnd type="none" w="med" len="med"/>
+                      <a:tailEnd type="none" w="med" len="med"/>
+                    </a:lnR>
+                    <a:lnT w="6350" cap="flat" cmpd="sng" algn="ctr">
+                      <a:solidFill>
+                        <a:srgbClr val="E4DED4"/>
+                      </a:solidFill>
+                      <a:prstDash val="solid"/>
+                      <a:round/>
+                      <a:headEnd type="none" w="med" len="med"/>
+                      <a:tailEnd type="none" w="med" len="med"/>
+                    </a:lnT>
+                    <a:lnB w="6350" cap="flat" cmpd="sng" algn="ctr">
+                      <a:solidFill>
+                        <a:srgbClr val="E4DED4"/>
+                      </a:solidFill>
+                      <a:prstDash val="solid"/>
+                      <a:round/>
+                      <a:headEnd type="none" w="med" len="med"/>
+                      <a:tailEnd type="none" w="med" len="med"/>
+                    </a:lnB>
+                    <a:solidFill>
+                      <a:srgbClr val="E8F3EC"/>
+                    </a:solidFill>
+                  </a:tcPr>
+                </a:tc>
+                <a:tc>
+                  <a:txBody>
+                    <a:bodyPr/>
+                    <a:lstStyle/>
+                    <a:p>
+                      <a:pPr algn="ctr" indent="0" marL="0">
+                        <a:buNone/>
+                      </a:pPr>
+                      <a:r>
+                        <a:rPr lang="en-US" sz="950" dirty="0">
+                          <a:solidFill>
+                            <a:srgbClr val="1B1714"/>
+                          </a:solidFill>
+                          <a:latin typeface="IBM Plex Mono" pitchFamily="34" charset="0"/>
+                          <a:ea typeface="IBM Plex Mono" pitchFamily="34" charset="-122"/>
+                          <a:cs typeface="IBM Plex Mono" pitchFamily="34" charset="-120"/>
+                        </a:rPr>
+                        <a:t>30%</a:t>
+                      </a:r>
+                      <a:endParaRPr lang="en-US" sz="950" dirty="0">
+                        <a:latin typeface="IBM Plex Mono" charset="0"/>
+                        <a:ea typeface="IBM Plex Mono" charset="0"/>
+                        <a:cs typeface="IBM Plex Mono" charset="0"/>
+                      </a:endParaRPr>
+                    </a:p>
+                  </a:txBody>
+                  <a:tcPr marL="63500" marR="63500" marT="25400" marB="25400" anchor="ctr">
+                    <a:lnL w="6350" cap="flat" cmpd="sng" algn="ctr">
+                      <a:solidFill>
+                        <a:srgbClr val="E4DED4"/>
+                      </a:solidFill>
+                      <a:prstDash val="solid"/>
+                      <a:round/>
+                      <a:headEnd type="none" w="med" len="med"/>
+                      <a:tailEnd type="none" w="med" len="med"/>
+                    </a:lnL>
+                    <a:lnR w="6350" cap="flat" cmpd="sng" algn="ctr">
+                      <a:solidFill>
+                        <a:srgbClr val="E4DED4"/>
+                      </a:solidFill>
+                      <a:prstDash val="solid"/>
+                      <a:round/>
+                      <a:headEnd type="none" w="med" len="med"/>
+                      <a:tailEnd type="none" w="med" len="med"/>
+                    </a:lnR>
+                    <a:lnT w="6350" cap="flat" cmpd="sng" algn="ctr">
+                      <a:solidFill>
+                        <a:srgbClr val="E4DED4"/>
+                      </a:solidFill>
+                      <a:prstDash val="solid"/>
+                      <a:round/>
+                      <a:headEnd type="none" w="med" len="med"/>
+                      <a:tailEnd type="none" w="med" len="med"/>
+                    </a:lnT>
+                    <a:lnB w="6350" cap="flat" cmpd="sng" algn="ctr">
+                      <a:solidFill>
+                        <a:srgbClr val="E4DED4"/>
+                      </a:solidFill>
+                      <a:prstDash val="solid"/>
+                      <a:round/>
+                      <a:headEnd type="none" w="med" len="med"/>
+                      <a:tailEnd type="none" w="med" len="med"/>
+                    </a:lnB>
+                    <a:solidFill>
+                      <a:srgbClr val="E8F3EC"/>
+                    </a:solidFill>
+                  </a:tcPr>
+                </a:tc>
+                <a:tc>
+                  <a:txBody>
+                    <a:bodyPr/>
+                    <a:lstStyle/>
+                    <a:p>
+                      <a:pPr algn="ctr" indent="0" marL="0">
+                        <a:buNone/>
+                      </a:pPr>
+                      <a:r>
+                        <a:rPr lang="en-US" sz="950" dirty="0">
+                          <a:solidFill>
+                            <a:srgbClr val="1B1714"/>
+                          </a:solidFill>
+                          <a:latin typeface="IBM Plex Mono" pitchFamily="34" charset="0"/>
+                          <a:ea typeface="IBM Plex Mono" pitchFamily="34" charset="-122"/>
+                          <a:cs typeface="IBM Plex Mono" pitchFamily="34" charset="-120"/>
+                        </a:rPr>
+                        <a:t>$7.3bn</a:t>
+                      </a:r>
+                      <a:endParaRPr lang="en-US" sz="950" dirty="0">
+                        <a:latin typeface="IBM Plex Mono" charset="0"/>
+                        <a:ea typeface="IBM Plex Mono" charset="0"/>
+                        <a:cs typeface="IBM Plex Mono" charset="0"/>
+                      </a:endParaRPr>
+                    </a:p>
+                  </a:txBody>
+                  <a:tcPr marL="63500" marR="63500" marT="25400" marB="25400" anchor="ctr">
+                    <a:lnL w="6350" cap="flat" cmpd="sng" algn="ctr">
+                      <a:solidFill>
+                        <a:srgbClr val="E4DED4"/>
+                      </a:solidFill>
+                      <a:prstDash val="solid"/>
+                      <a:round/>
+                      <a:headEnd type="none" w="med" len="med"/>
+                      <a:tailEnd type="none" w="med" len="med"/>
+                    </a:lnL>
+                    <a:lnR w="6350" cap="flat" cmpd="sng" algn="ctr">
+                      <a:solidFill>
+                        <a:srgbClr val="E4DED4"/>
+                      </a:solidFill>
+                      <a:prstDash val="solid"/>
+                      <a:round/>
+                      <a:headEnd type="none" w="med" len="med"/>
+                      <a:tailEnd type="none" w="med" len="med"/>
+                    </a:lnR>
+                    <a:lnT w="6350" cap="flat" cmpd="sng" algn="ctr">
+                      <a:solidFill>
+                        <a:srgbClr val="E4DED4"/>
+                      </a:solidFill>
+                      <a:prstDash val="solid"/>
+                      <a:round/>
+                      <a:headEnd type="none" w="med" len="med"/>
+                      <a:tailEnd type="none" w="med" len="med"/>
+                    </a:lnT>
+                    <a:lnB w="6350" cap="flat" cmpd="sng" algn="ctr">
+                      <a:solidFill>
+                        <a:srgbClr val="E4DED4"/>
+                      </a:solidFill>
+                      <a:prstDash val="solid"/>
+                      <a:round/>
+                      <a:headEnd type="none" w="med" len="med"/>
+                      <a:tailEnd type="none" w="med" len="med"/>
+                    </a:lnB>
+                    <a:solidFill>
+                      <a:srgbClr val="E8F3EC"/>
+                    </a:solidFill>
+                  </a:tcPr>
+                </a:tc>
+                <a:tc>
+                  <a:txBody>
+                    <a:bodyPr/>
+                    <a:lstStyle/>
+                    <a:p>
+                      <a:pPr algn="ctr" indent="0" marL="0">
+                        <a:buNone/>
+                      </a:pPr>
+                      <a:r>
+                        <a:rPr lang="en-US" sz="1200" b="1" dirty="0">
+                          <a:solidFill>
+                            <a:srgbClr val="C1121F"/>
+                          </a:solidFill>
+                          <a:latin typeface="Space Grotesk" pitchFamily="34" charset="0"/>
+                          <a:ea typeface="Space Grotesk" pitchFamily="34" charset="-122"/>
+                          <a:cs typeface="Space Grotesk" pitchFamily="34" charset="-120"/>
+                        </a:rPr>
+                        <a:t>16.6x</a:t>
+                      </a:r>
+                      <a:endParaRPr lang="en-US" sz="1200" dirty="0">
+                        <a:latin typeface="Space Grotesk" charset="0"/>
+                        <a:ea typeface="Space Grotesk" charset="0"/>
+                        <a:cs typeface="Space Grotesk" charset="0"/>
+                      </a:endParaRPr>
+                    </a:p>
+                  </a:txBody>
+                  <a:tcPr marL="63500" marR="63500" marT="25400" marB="25400" anchor="ctr">
+                    <a:lnL w="6350" cap="flat" cmpd="sng" algn="ctr">
+                      <a:solidFill>
+                        <a:srgbClr val="E4DED4"/>
+                      </a:solidFill>
+                      <a:prstDash val="solid"/>
+                      <a:round/>
+                      <a:headEnd type="none" w="med" len="med"/>
+                      <a:tailEnd type="none" w="med" len="med"/>
+                    </a:lnL>
+                    <a:lnR w="6350" cap="flat" cmpd="sng" algn="ctr">
+                      <a:solidFill>
+                        <a:srgbClr val="E4DED4"/>
+                      </a:solidFill>
+                      <a:prstDash val="solid"/>
+                      <a:round/>
+                      <a:headEnd type="none" w="med" len="med"/>
+                      <a:tailEnd type="none" w="med" len="med"/>
+                    </a:lnR>
+                    <a:lnT w="6350" cap="flat" cmpd="sng" algn="ctr">
+                      <a:solidFill>
+                        <a:srgbClr val="E4DED4"/>
+                      </a:solidFill>
+                      <a:prstDash val="solid"/>
+                      <a:round/>
+                      <a:headEnd type="none" w="med" len="med"/>
+                      <a:tailEnd type="none" w="med" len="med"/>
+                    </a:lnT>
+                    <a:lnB w="6350" cap="flat" cmpd="sng" algn="ctr">
+                      <a:solidFill>
+                        <a:srgbClr val="E4DED4"/>
+                      </a:solidFill>
+                      <a:prstDash val="solid"/>
+                      <a:round/>
+                      <a:headEnd type="none" w="med" len="med"/>
+                      <a:tailEnd type="none" w="med" len="med"/>
+                    </a:lnB>
+                    <a:solidFill>
+                      <a:srgbClr val="E8F3EC"/>
+                    </a:solidFill>
+                  </a:tcPr>
+                </a:tc>
+                <a:tc>
+                  <a:txBody>
+                    <a:bodyPr/>
+                    <a:lstStyle/>
+                    <a:p>
+                      <a:pPr algn="ctr" indent="0" marL="0">
+                        <a:buNone/>
+                      </a:pPr>
+                      <a:r>
+                        <a:rPr lang="en-US" sz="800" b="1" dirty="0">
+                          <a:solidFill>
+                            <a:srgbClr val="6F6960"/>
+                          </a:solidFill>
+                          <a:latin typeface="IBM Plex Mono" pitchFamily="34" charset="0"/>
+                          <a:ea typeface="IBM Plex Mono" pitchFamily="34" charset="-122"/>
+                          <a:cs typeface="IBM Plex Mono" pitchFamily="34" charset="-120"/>
+                        </a:rPr>
+                        <a:t>+3.6x</a:t>
+                      </a:r>
+                      <a:endParaRPr lang="en-US" sz="800" dirty="0">
+                        <a:latin typeface="IBM Plex Mono" charset="0"/>
+                        <a:ea typeface="IBM Plex Mono" charset="0"/>
+                        <a:cs typeface="IBM Plex Mono" charset="0"/>
+                      </a:endParaRPr>
+                    </a:p>
+                  </a:txBody>
+                  <a:tcPr marL="63500" marR="63500" marT="25400" marB="25400" anchor="ctr">
+                    <a:lnL w="6350" cap="flat" cmpd="sng" algn="ctr">
+                      <a:solidFill>
+                        <a:srgbClr val="E4DED4"/>
+                      </a:solidFill>
+                      <a:prstDash val="solid"/>
+                      <a:round/>
+                      <a:headEnd type="none" w="med" len="med"/>
+                      <a:tailEnd type="none" w="med" len="med"/>
+                    </a:lnL>
+                    <a:lnR w="6350" cap="flat" cmpd="sng" algn="ctr">
+                      <a:solidFill>
+                        <a:srgbClr val="E4DED4"/>
+                      </a:solidFill>
+                      <a:prstDash val="solid"/>
+                      <a:round/>
+                      <a:headEnd type="none" w="med" len="med"/>
+                      <a:tailEnd type="none" w="med" len="med"/>
+                    </a:lnR>
+                    <a:lnT w="6350" cap="flat" cmpd="sng" algn="ctr">
+                      <a:solidFill>
+                        <a:srgbClr val="E4DED4"/>
+                      </a:solidFill>
+                      <a:prstDash val="solid"/>
+                      <a:round/>
+                      <a:headEnd type="none" w="med" len="med"/>
+                      <a:tailEnd type="none" w="med" len="med"/>
+                    </a:lnT>
+                    <a:lnB w="6350" cap="flat" cmpd="sng" algn="ctr">
+                      <a:solidFill>
+                        <a:srgbClr val="E4DED4"/>
+                      </a:solidFill>
+                      <a:prstDash val="solid"/>
+                      <a:round/>
+                      <a:headEnd type="none" w="med" len="med"/>
+                      <a:tailEnd type="none" w="med" len="med"/>
+                    </a:lnB>
+                    <a:solidFill>
+                      <a:srgbClr val="E8F3EC"/>
+                    </a:solidFill>
+                  </a:tcPr>
+                </a:tc>
+              </a:tr>
+            </a:tbl>
+          </a:graphicData>
+        </a:graphic>
+      </p:graphicFrame>
+      <p:sp>
+        <p:nvSpPr>
+          <p:cNvPr id="34" name="Text 31"/>
+          <p:cNvSpPr/>
+          <p:nvPr/>
+        </p:nvSpPr>
+        <p:spPr>
+          <a:xfrm>
+            <a:off x="4133088" y="4480560"/>
+            <a:ext cx="5989320" cy="219456"/>
+          </a:xfrm>
+          <a:prstGeom prst="rect">
+            <a:avLst/>
+          </a:prstGeom>
+          <a:noFill/>
+          <a:ln/>
+        </p:spPr>
+        <p:txBody>
+          <a:bodyPr wrap="square" lIns="0" tIns="0" rIns="0" bIns="0" rtlCol="0" anchor="ctr"/>
+          <a:lstStyle/>
+          <a:p>
+            <a:pPr indent="0" marL="0">
+              <a:buNone/>
+            </a:pPr>
+            <a:r>
+              <a:rPr lang="en-US" sz="850" spc="150" kern="0" dirty="0">
+                <a:solidFill>
+                  <a:srgbClr val="9A847C"/>
+                </a:solidFill>
+                <a:latin typeface="IBM Plex Mono" pitchFamily="34" charset="0"/>
+                <a:ea typeface="IBM Plex Mono" pitchFamily="34" charset="-122"/>
+                <a:cs typeface="IBM Plex Mono" pitchFamily="34" charset="-120"/>
+              </a:rPr>
+              <a:t>peer 밴드 대비 위치 · 조달 레버는 갭을 좁힌다</a:t>
+            </a:r>
+            <a:endParaRPr lang="en-US" sz="850" dirty="0"/>
+          </a:p>
+        </p:txBody>
+      </p:sp>
+      <p:sp>
+        <p:nvSpPr>
+          <p:cNvPr id="35" name="Shape 32"/>
+          <p:cNvSpPr/>
+          <p:nvPr/>
+        </p:nvSpPr>
+        <p:spPr>
+          <a:xfrm>
+            <a:off x="4178808" y="5074920"/>
+            <a:ext cx="5349240" cy="0"/>
+          </a:xfrm>
+          <a:prstGeom prst="line">
+            <a:avLst/>
+          </a:prstGeom>
+          <a:noFill/>
+          <a:ln w="38100">
             <a:solidFill>
-              <a:srgbClr val="E4DED4"/>
+              <a:srgbClr val="D8CFC2"/>
             </a:solidFill>
             <a:prstDash val="solid"/>
           </a:ln>
@@ -7625,34 +10072,162 @@
       </p:sp>
       <p:sp>
         <p:nvSpPr>
-          <p:cNvPr id="31" name="Shape 29"/>
-          <p:cNvSpPr/>
-          <p:nvPr/>
-        </p:nvSpPr>
-        <p:spPr>
-          <a:xfrm>
-            <a:off x="5047488" y="2139696"/>
-            <a:ext cx="310896" cy="310896"/>
+          <p:cNvPr id="36" name="Shape 33"/>
+          <p:cNvSpPr/>
+          <p:nvPr/>
+        </p:nvSpPr>
+        <p:spPr>
+          <a:xfrm>
+            <a:off x="4178808" y="4992624"/>
+            <a:ext cx="2228850" cy="164592"/>
+          </a:xfrm>
+          <a:prstGeom prst="rect">
+            <a:avLst/>
+          </a:prstGeom>
+          <a:solidFill>
+            <a:srgbClr val="E8F3EC"/>
+          </a:solidFill>
+          <a:ln w="9525">
+            <a:solidFill>
+              <a:srgbClr val="1E7A4D"/>
+            </a:solidFill>
+            <a:prstDash val="solid"/>
+          </a:ln>
+        </p:spPr>
+      </p:sp>
+      <p:sp>
+        <p:nvSpPr>
+          <p:cNvPr id="37" name="Text 34"/>
+          <p:cNvSpPr/>
+          <p:nvPr/>
+        </p:nvSpPr>
+        <p:spPr>
+          <a:xfrm>
+            <a:off x="4178808" y="4764024"/>
+            <a:ext cx="2228850" cy="182880"/>
+          </a:xfrm>
+          <a:prstGeom prst="rect">
+            <a:avLst/>
+          </a:prstGeom>
+          <a:noFill/>
+          <a:ln/>
+        </p:spPr>
+        <p:txBody>
+          <a:bodyPr wrap="square" lIns="0" tIns="0" rIns="0" bIns="0" rtlCol="0" anchor="ctr"/>
+          <a:lstStyle/>
+          <a:p>
+            <a:pPr algn="ctr" indent="0" marL="0">
+              <a:buNone/>
+            </a:pPr>
+            <a:r>
+              <a:rPr lang="en-US" sz="800" dirty="0">
+                <a:solidFill>
+                  <a:srgbClr val="1E7A4D"/>
+                </a:solidFill>
+                <a:latin typeface="IBM Plex Mono" pitchFamily="34" charset="0"/>
+                <a:ea typeface="IBM Plex Mono" pitchFamily="34" charset="-122"/>
+                <a:cs typeface="IBM Plex Mono" pitchFamily="34" charset="-120"/>
+              </a:rPr>
+              <a:t>peer 8~13x</a:t>
+            </a:r>
+            <a:endParaRPr lang="en-US" sz="800" dirty="0"/>
+          </a:p>
+        </p:txBody>
+      </p:sp>
+      <p:sp>
+        <p:nvSpPr>
+          <p:cNvPr id="38" name="Shape 35"/>
+          <p:cNvSpPr/>
+          <p:nvPr/>
+        </p:nvSpPr>
+        <p:spPr>
+          <a:xfrm>
+            <a:off x="8012430" y="4855464"/>
+            <a:ext cx="1203579" cy="0"/>
+          </a:xfrm>
+          <a:prstGeom prst="line">
+            <a:avLst/>
+          </a:prstGeom>
+          <a:noFill/>
+          <a:ln w="15875">
+            <a:solidFill>
+              <a:srgbClr val="FF8E84"/>
+            </a:solidFill>
+            <a:prstDash val="solid"/>
+            <a:headEnd type="none"/>
+            <a:tailEnd type="triangle"/>
+          </a:ln>
+        </p:spPr>
+      </p:sp>
+      <p:sp>
+        <p:nvSpPr>
+          <p:cNvPr id="39" name="Text 36"/>
+          <p:cNvSpPr/>
+          <p:nvPr/>
+        </p:nvSpPr>
+        <p:spPr>
+          <a:xfrm>
+            <a:off x="7738110" y="4672584"/>
+            <a:ext cx="1752219" cy="164592"/>
+          </a:xfrm>
+          <a:prstGeom prst="rect">
+            <a:avLst/>
+          </a:prstGeom>
+          <a:noFill/>
+          <a:ln/>
+        </p:spPr>
+        <p:txBody>
+          <a:bodyPr wrap="square" lIns="0" tIns="0" rIns="0" bIns="0" rtlCol="0" anchor="ctr"/>
+          <a:lstStyle/>
+          <a:p>
+            <a:pPr algn="ctr" indent="0" marL="0">
+              <a:buNone/>
+            </a:pPr>
+            <a:r>
+              <a:rPr lang="en-US" sz="700" dirty="0">
+                <a:solidFill>
+                  <a:srgbClr val="FF8E84"/>
+                </a:solidFill>
+                <a:latin typeface="IBM Plex Mono" pitchFamily="34" charset="0"/>
+                <a:ea typeface="IBM Plex Mono" pitchFamily="34" charset="-122"/>
+                <a:cs typeface="IBM Plex Mono" pitchFamily="34" charset="-120"/>
+              </a:rPr>
+              <a:t>조달 레버 −2.7x</a:t>
+            </a:r>
+            <a:endParaRPr lang="en-US" sz="700" dirty="0"/>
+          </a:p>
+        </p:txBody>
+      </p:sp>
+      <p:sp>
+        <p:nvSpPr>
+          <p:cNvPr id="40" name="Shape 37"/>
+          <p:cNvSpPr/>
+          <p:nvPr/>
+        </p:nvSpPr>
+        <p:spPr>
+          <a:xfrm>
+            <a:off x="9170289" y="5029200"/>
+            <a:ext cx="91440" cy="91440"/>
           </a:xfrm>
           <a:prstGeom prst="ellipse">
             <a:avLst/>
           </a:prstGeom>
           <a:solidFill>
-            <a:srgbClr val="D8CFC2"/>
+            <a:srgbClr val="C1121F"/>
           </a:solidFill>
           <a:ln/>
         </p:spPr>
       </p:sp>
       <p:sp>
         <p:nvSpPr>
-          <p:cNvPr id="32" name="Text 30"/>
-          <p:cNvSpPr/>
-          <p:nvPr/>
-        </p:nvSpPr>
-        <p:spPr>
-          <a:xfrm>
-            <a:off x="5047488" y="2139696"/>
-            <a:ext cx="310896" cy="310896"/>
+          <p:cNvPr id="41" name="Text 38"/>
+          <p:cNvSpPr/>
+          <p:nvPr/>
+        </p:nvSpPr>
+        <p:spPr>
+          <a:xfrm>
+            <a:off x="8758809" y="5166360"/>
+            <a:ext cx="914400" cy="182880"/>
           </a:xfrm>
           <a:prstGeom prst="rect">
             <a:avLst/>
@@ -7668,1072 +10243,632 @@
               <a:buNone/>
             </a:pPr>
             <a:r>
-              <a:rPr lang="en-US" sz="1400" b="1" dirty="0">
-                <a:solidFill>
-                  <a:srgbClr val="1B1714"/>
+              <a:rPr lang="en-US" sz="750" b="1" dirty="0">
+                <a:solidFill>
+                  <a:srgbClr val="C1121F"/>
+                </a:solidFill>
+                <a:latin typeface="IBM Plex Mono" pitchFamily="34" charset="0"/>
+                <a:ea typeface="IBM Plex Mono" pitchFamily="34" charset="-122"/>
+                <a:cs typeface="IBM Plex Mono" pitchFamily="34" charset="-120"/>
+              </a:rPr>
+              <a:t>BASE</a:t>
+            </a:r>
+            <a:endParaRPr lang="en-US" sz="750" dirty="0"/>
+          </a:p>
+        </p:txBody>
+      </p:sp>
+      <p:sp>
+        <p:nvSpPr>
+          <p:cNvPr id="42" name="Text 39"/>
+          <p:cNvSpPr/>
+          <p:nvPr/>
+        </p:nvSpPr>
+        <p:spPr>
+          <a:xfrm>
+            <a:off x="8758809" y="5056632"/>
+            <a:ext cx="914400" cy="182880"/>
+          </a:xfrm>
+          <a:prstGeom prst="rect">
+            <a:avLst/>
+          </a:prstGeom>
+          <a:noFill/>
+          <a:ln/>
+        </p:spPr>
+        <p:txBody>
+          <a:bodyPr wrap="square" lIns="0" tIns="0" rIns="0" bIns="0" rtlCol="0" anchor="t"/>
+          <a:lstStyle/>
+          <a:p>
+            <a:pPr algn="ctr" indent="0" marL="0">
+              <a:buNone/>
+            </a:pPr>
+            <a:r>
+              <a:rPr lang="en-US" sz="800" b="1" dirty="0">
+                <a:solidFill>
+                  <a:srgbClr val="C1121F"/>
+                </a:solidFill>
+                <a:latin typeface="IBM Plex Mono" pitchFamily="34" charset="0"/>
+                <a:ea typeface="IBM Plex Mono" pitchFamily="34" charset="-122"/>
+                <a:cs typeface="IBM Plex Mono" pitchFamily="34" charset="-120"/>
+              </a:rPr>
+              <a:t>19.3x</a:t>
+            </a:r>
+            <a:endParaRPr lang="en-US" sz="800" dirty="0"/>
+          </a:p>
+        </p:txBody>
+      </p:sp>
+      <p:sp>
+        <p:nvSpPr>
+          <p:cNvPr id="43" name="Shape 40"/>
+          <p:cNvSpPr/>
+          <p:nvPr/>
+        </p:nvSpPr>
+        <p:spPr>
+          <a:xfrm>
+            <a:off x="8457057" y="5029200"/>
+            <a:ext cx="91440" cy="91440"/>
+          </a:xfrm>
+          <a:prstGeom prst="ellipse">
+            <a:avLst/>
+          </a:prstGeom>
+          <a:solidFill>
+            <a:srgbClr val="8A5A55"/>
+          </a:solidFill>
+          <a:ln/>
+        </p:spPr>
+      </p:sp>
+      <p:sp>
+        <p:nvSpPr>
+          <p:cNvPr id="44" name="Text 41"/>
+          <p:cNvSpPr/>
+          <p:nvPr/>
+        </p:nvSpPr>
+        <p:spPr>
+          <a:xfrm>
+            <a:off x="8045577" y="5166360"/>
+            <a:ext cx="914400" cy="182880"/>
+          </a:xfrm>
+          <a:prstGeom prst="rect">
+            <a:avLst/>
+          </a:prstGeom>
+          <a:noFill/>
+          <a:ln/>
+        </p:spPr>
+        <p:txBody>
+          <a:bodyPr wrap="square" lIns="0" tIns="0" rIns="0" bIns="0" rtlCol="0" anchor="ctr"/>
+          <a:lstStyle/>
+          <a:p>
+            <a:pPr algn="ctr" indent="0" marL="0">
+              <a:buNone/>
+            </a:pPr>
+            <a:r>
+              <a:rPr lang="en-US" sz="750" b="1" dirty="0">
+                <a:solidFill>
+                  <a:srgbClr val="8A5A55"/>
+                </a:solidFill>
+                <a:latin typeface="IBM Plex Mono" pitchFamily="34" charset="0"/>
+                <a:ea typeface="IBM Plex Mono" pitchFamily="34" charset="-122"/>
+                <a:cs typeface="IBM Plex Mono" pitchFamily="34" charset="-120"/>
+              </a:rPr>
+              <a:t>①·②</a:t>
+            </a:r>
+            <a:endParaRPr lang="en-US" sz="750" dirty="0"/>
+          </a:p>
+        </p:txBody>
+      </p:sp>
+      <p:sp>
+        <p:nvSpPr>
+          <p:cNvPr id="45" name="Text 42"/>
+          <p:cNvSpPr/>
+          <p:nvPr/>
+        </p:nvSpPr>
+        <p:spPr>
+          <a:xfrm>
+            <a:off x="8045577" y="5056632"/>
+            <a:ext cx="914400" cy="182880"/>
+          </a:xfrm>
+          <a:prstGeom prst="rect">
+            <a:avLst/>
+          </a:prstGeom>
+          <a:noFill/>
+          <a:ln/>
+        </p:spPr>
+        <p:txBody>
+          <a:bodyPr wrap="square" lIns="0" tIns="0" rIns="0" bIns="0" rtlCol="0" anchor="t"/>
+          <a:lstStyle/>
+          <a:p>
+            <a:pPr algn="ctr" indent="0" marL="0">
+              <a:buNone/>
+            </a:pPr>
+            <a:r>
+              <a:rPr lang="en-US" sz="800" b="1" dirty="0">
+                <a:solidFill>
+                  <a:srgbClr val="8A5A55"/>
+                </a:solidFill>
+                <a:latin typeface="IBM Plex Mono" pitchFamily="34" charset="0"/>
+                <a:ea typeface="IBM Plex Mono" pitchFamily="34" charset="-122"/>
+                <a:cs typeface="IBM Plex Mono" pitchFamily="34" charset="-120"/>
+              </a:rPr>
+              <a:t>17.7x</a:t>
+            </a:r>
+            <a:endParaRPr lang="en-US" sz="800" dirty="0"/>
+          </a:p>
+        </p:txBody>
+      </p:sp>
+      <p:sp>
+        <p:nvSpPr>
+          <p:cNvPr id="46" name="Shape 43"/>
+          <p:cNvSpPr/>
+          <p:nvPr/>
+        </p:nvSpPr>
+        <p:spPr>
+          <a:xfrm>
+            <a:off x="7966710" y="5029200"/>
+            <a:ext cx="91440" cy="91440"/>
+          </a:xfrm>
+          <a:prstGeom prst="ellipse">
+            <a:avLst/>
+          </a:prstGeom>
+          <a:solidFill>
+            <a:srgbClr val="8A5A55"/>
+          </a:solidFill>
+          <a:ln/>
+        </p:spPr>
+      </p:sp>
+      <p:sp>
+        <p:nvSpPr>
+          <p:cNvPr id="47" name="Text 44"/>
+          <p:cNvSpPr/>
+          <p:nvPr/>
+        </p:nvSpPr>
+        <p:spPr>
+          <a:xfrm>
+            <a:off x="7555230" y="5166360"/>
+            <a:ext cx="914400" cy="182880"/>
+          </a:xfrm>
+          <a:prstGeom prst="rect">
+            <a:avLst/>
+          </a:prstGeom>
+          <a:noFill/>
+          <a:ln/>
+        </p:spPr>
+        <p:txBody>
+          <a:bodyPr wrap="square" lIns="0" tIns="0" rIns="0" bIns="0" rtlCol="0" anchor="ctr"/>
+          <a:lstStyle/>
+          <a:p>
+            <a:pPr algn="ctr" indent="0" marL="0">
+              <a:buNone/>
+            </a:pPr>
+            <a:r>
+              <a:rPr lang="en-US" sz="750" b="1" dirty="0">
+                <a:solidFill>
+                  <a:srgbClr val="8A5A55"/>
+                </a:solidFill>
+                <a:latin typeface="IBM Plex Mono" pitchFamily="34" charset="0"/>
+                <a:ea typeface="IBM Plex Mono" pitchFamily="34" charset="-122"/>
+                <a:cs typeface="IBM Plex Mono" pitchFamily="34" charset="-120"/>
+              </a:rPr>
+              <a:t>①+②</a:t>
+            </a:r>
+            <a:endParaRPr lang="en-US" sz="750" dirty="0"/>
+          </a:p>
+        </p:txBody>
+      </p:sp>
+      <p:sp>
+        <p:nvSpPr>
+          <p:cNvPr id="48" name="Text 45"/>
+          <p:cNvSpPr/>
+          <p:nvPr/>
+        </p:nvSpPr>
+        <p:spPr>
+          <a:xfrm>
+            <a:off x="7555230" y="5056632"/>
+            <a:ext cx="914400" cy="182880"/>
+          </a:xfrm>
+          <a:prstGeom prst="rect">
+            <a:avLst/>
+          </a:prstGeom>
+          <a:noFill/>
+          <a:ln/>
+        </p:spPr>
+        <p:txBody>
+          <a:bodyPr wrap="square" lIns="0" tIns="0" rIns="0" bIns="0" rtlCol="0" anchor="t"/>
+          <a:lstStyle/>
+          <a:p>
+            <a:pPr algn="ctr" indent="0" marL="0">
+              <a:buNone/>
+            </a:pPr>
+            <a:r>
+              <a:rPr lang="en-US" sz="800" b="1" dirty="0">
+                <a:solidFill>
+                  <a:srgbClr val="8A5A55"/>
+                </a:solidFill>
+                <a:latin typeface="IBM Plex Mono" pitchFamily="34" charset="0"/>
+                <a:ea typeface="IBM Plex Mono" pitchFamily="34" charset="-122"/>
+                <a:cs typeface="IBM Plex Mono" pitchFamily="34" charset="-120"/>
+              </a:rPr>
+              <a:t>16.6x</a:t>
+            </a:r>
+            <a:endParaRPr lang="en-US" sz="800" dirty="0"/>
+          </a:p>
+        </p:txBody>
+      </p:sp>
+      <p:sp>
+        <p:nvSpPr>
+          <p:cNvPr id="49" name="Text 46"/>
+          <p:cNvSpPr/>
+          <p:nvPr/>
+        </p:nvSpPr>
+        <p:spPr>
+          <a:xfrm>
+            <a:off x="3904488" y="5330952"/>
+            <a:ext cx="548640" cy="164592"/>
+          </a:xfrm>
+          <a:prstGeom prst="rect">
+            <a:avLst/>
+          </a:prstGeom>
+          <a:noFill/>
+          <a:ln/>
+        </p:spPr>
+        <p:txBody>
+          <a:bodyPr wrap="square" lIns="0" tIns="0" rIns="0" bIns="0" rtlCol="0" anchor="ctr"/>
+          <a:lstStyle/>
+          <a:p>
+            <a:pPr algn="ctr" indent="0" marL="0">
+              <a:buNone/>
+            </a:pPr>
+            <a:r>
+              <a:rPr lang="en-US" sz="700" dirty="0">
+                <a:solidFill>
+                  <a:srgbClr val="9A847C"/>
+                </a:solidFill>
+                <a:latin typeface="IBM Plex Mono" pitchFamily="34" charset="0"/>
+                <a:ea typeface="IBM Plex Mono" pitchFamily="34" charset="-122"/>
+                <a:cs typeface="IBM Plex Mono" pitchFamily="34" charset="-120"/>
+              </a:rPr>
+              <a:t>8x</a:t>
+            </a:r>
+            <a:endParaRPr lang="en-US" sz="700" dirty="0"/>
+          </a:p>
+        </p:txBody>
+      </p:sp>
+      <p:sp>
+        <p:nvSpPr>
+          <p:cNvPr id="50" name="Text 47"/>
+          <p:cNvSpPr/>
+          <p:nvPr/>
+        </p:nvSpPr>
+        <p:spPr>
+          <a:xfrm>
+            <a:off x="6133338" y="5330952"/>
+            <a:ext cx="548640" cy="164592"/>
+          </a:xfrm>
+          <a:prstGeom prst="rect">
+            <a:avLst/>
+          </a:prstGeom>
+          <a:noFill/>
+          <a:ln/>
+        </p:spPr>
+        <p:txBody>
+          <a:bodyPr wrap="square" lIns="0" tIns="0" rIns="0" bIns="0" rtlCol="0" anchor="ctr"/>
+          <a:lstStyle/>
+          <a:p>
+            <a:pPr algn="ctr" indent="0" marL="0">
+              <a:buNone/>
+            </a:pPr>
+            <a:r>
+              <a:rPr lang="en-US" sz="700" dirty="0">
+                <a:solidFill>
+                  <a:srgbClr val="9A847C"/>
+                </a:solidFill>
+                <a:latin typeface="IBM Plex Mono" pitchFamily="34" charset="0"/>
+                <a:ea typeface="IBM Plex Mono" pitchFamily="34" charset="-122"/>
+                <a:cs typeface="IBM Plex Mono" pitchFamily="34" charset="-120"/>
+              </a:rPr>
+              <a:t>13x</a:t>
+            </a:r>
+            <a:endParaRPr lang="en-US" sz="700" dirty="0"/>
+          </a:p>
+        </p:txBody>
+      </p:sp>
+      <p:sp>
+        <p:nvSpPr>
+          <p:cNvPr id="51" name="Text 48"/>
+          <p:cNvSpPr/>
+          <p:nvPr/>
+        </p:nvSpPr>
+        <p:spPr>
+          <a:xfrm>
+            <a:off x="7470648" y="5330952"/>
+            <a:ext cx="548640" cy="164592"/>
+          </a:xfrm>
+          <a:prstGeom prst="rect">
+            <a:avLst/>
+          </a:prstGeom>
+          <a:noFill/>
+          <a:ln/>
+        </p:spPr>
+        <p:txBody>
+          <a:bodyPr wrap="square" lIns="0" tIns="0" rIns="0" bIns="0" rtlCol="0" anchor="ctr"/>
+          <a:lstStyle/>
+          <a:p>
+            <a:pPr algn="ctr" indent="0" marL="0">
+              <a:buNone/>
+            </a:pPr>
+            <a:r>
+              <a:rPr lang="en-US" sz="700" dirty="0">
+                <a:solidFill>
+                  <a:srgbClr val="9A847C"/>
+                </a:solidFill>
+                <a:latin typeface="IBM Plex Mono" pitchFamily="34" charset="0"/>
+                <a:ea typeface="IBM Plex Mono" pitchFamily="34" charset="-122"/>
+                <a:cs typeface="IBM Plex Mono" pitchFamily="34" charset="-120"/>
+              </a:rPr>
+              <a:t>16x</a:t>
+            </a:r>
+            <a:endParaRPr lang="en-US" sz="700" dirty="0"/>
+          </a:p>
+        </p:txBody>
+      </p:sp>
+      <p:sp>
+        <p:nvSpPr>
+          <p:cNvPr id="52" name="Text 49"/>
+          <p:cNvSpPr/>
+          <p:nvPr/>
+        </p:nvSpPr>
+        <p:spPr>
+          <a:xfrm>
+            <a:off x="9253728" y="5330952"/>
+            <a:ext cx="548640" cy="164592"/>
+          </a:xfrm>
+          <a:prstGeom prst="rect">
+            <a:avLst/>
+          </a:prstGeom>
+          <a:noFill/>
+          <a:ln/>
+        </p:spPr>
+        <p:txBody>
+          <a:bodyPr wrap="square" lIns="0" tIns="0" rIns="0" bIns="0" rtlCol="0" anchor="ctr"/>
+          <a:lstStyle/>
+          <a:p>
+            <a:pPr algn="ctr" indent="0" marL="0">
+              <a:buNone/>
+            </a:pPr>
+            <a:r>
+              <a:rPr lang="en-US" sz="700" dirty="0">
+                <a:solidFill>
+                  <a:srgbClr val="9A847C"/>
+                </a:solidFill>
+                <a:latin typeface="IBM Plex Mono" pitchFamily="34" charset="0"/>
+                <a:ea typeface="IBM Plex Mono" pitchFamily="34" charset="-122"/>
+                <a:cs typeface="IBM Plex Mono" pitchFamily="34" charset="-120"/>
+              </a:rPr>
+              <a:t>20x</a:t>
+            </a:r>
+            <a:endParaRPr lang="en-US" sz="700" dirty="0"/>
+          </a:p>
+        </p:txBody>
+      </p:sp>
+      <p:sp>
+        <p:nvSpPr>
+          <p:cNvPr id="53" name="Shape 50"/>
+          <p:cNvSpPr/>
+          <p:nvPr/>
+        </p:nvSpPr>
+        <p:spPr>
+          <a:xfrm>
+            <a:off x="566928" y="5797296"/>
+            <a:ext cx="9555480" cy="1170432"/>
+          </a:xfrm>
+          <a:prstGeom prst="roundRect">
+            <a:avLst>
+              <a:gd name="adj" fmla="val 4688"/>
+            </a:avLst>
+          </a:prstGeom>
+          <a:solidFill>
+            <a:srgbClr val="211C18"/>
+          </a:solidFill>
+          <a:ln/>
+        </p:spPr>
+      </p:sp>
+      <p:sp>
+        <p:nvSpPr>
+          <p:cNvPr id="54" name="Text 51"/>
+          <p:cNvSpPr/>
+          <p:nvPr/>
+        </p:nvSpPr>
+        <p:spPr>
+          <a:xfrm>
+            <a:off x="841248" y="5888736"/>
+            <a:ext cx="9006840" cy="274320"/>
+          </a:xfrm>
+          <a:prstGeom prst="rect">
+            <a:avLst/>
+          </a:prstGeom>
+          <a:noFill/>
+          <a:ln/>
+        </p:spPr>
+        <p:txBody>
+          <a:bodyPr wrap="square" lIns="0" tIns="0" rIns="0" bIns="0" rtlCol="0" anchor="ctr"/>
+          <a:lstStyle/>
+          <a:p>
+            <a:pPr indent="0" marL="0">
+              <a:buNone/>
+            </a:pPr>
+            <a:r>
+              <a:rPr lang="en-US" sz="1300" b="1" dirty="0">
+                <a:solidFill>
+                  <a:srgbClr val="FF8E84"/>
                 </a:solidFill>
                 <a:latin typeface="Noto Serif KR" pitchFamily="34" charset="0"/>
                 <a:ea typeface="Noto Serif KR" pitchFamily="34" charset="-122"/>
                 <a:cs typeface="Noto Serif KR" pitchFamily="34" charset="-120"/>
               </a:rPr>
-              <a:t>1</a:t>
-            </a:r>
-            <a:endParaRPr lang="en-US" sz="1400" dirty="0"/>
-          </a:p>
-        </p:txBody>
-      </p:sp>
-      <p:sp>
-        <p:nvSpPr>
-          <p:cNvPr id="33" name="Text 31"/>
-          <p:cNvSpPr/>
-          <p:nvPr/>
-        </p:nvSpPr>
-        <p:spPr>
-          <a:xfrm>
-            <a:off x="5486400" y="2029968"/>
-            <a:ext cx="2971800" cy="310896"/>
-          </a:xfrm>
-          <a:prstGeom prst="rect">
-            <a:avLst/>
-          </a:prstGeom>
-          <a:noFill/>
-          <a:ln/>
-        </p:spPr>
-        <p:txBody>
-          <a:bodyPr wrap="square" lIns="0" tIns="0" rIns="0" bIns="0" rtlCol="0" anchor="ctr"/>
+              <a:t>결론 — 조달 레버는 갭을 좁히지만, 밴드 진입은 마진이 결정한다</a:t>
+            </a:r>
+            <a:endParaRPr lang="en-US" sz="1300" dirty="0"/>
+          </a:p>
+        </p:txBody>
+      </p:sp>
+      <p:sp>
+        <p:nvSpPr>
+          <p:cNvPr id="55" name="Text 52"/>
+          <p:cNvSpPr/>
+          <p:nvPr/>
+        </p:nvSpPr>
+        <p:spPr>
+          <a:xfrm>
+            <a:off x="841248" y="6199632"/>
+            <a:ext cx="9006840" cy="713232"/>
+          </a:xfrm>
+          <a:prstGeom prst="rect">
+            <a:avLst/>
+          </a:prstGeom>
+          <a:noFill/>
+          <a:ln/>
+        </p:spPr>
+        <p:txBody>
+          <a:bodyPr wrap="square" lIns="0" tIns="0" rIns="0" bIns="0" rtlCol="0" anchor="t"/>
           <a:lstStyle/>
           <a:p>
             <a:pPr indent="0" marL="0">
-              <a:buNone/>
-            </a:pPr>
-            <a:r>
-              <a:rPr lang="en-US" sz="1250" b="1" dirty="0">
-                <a:solidFill>
-                  <a:srgbClr val="1B1714"/>
+              <a:lnSpc>
+                <a:spcPct val="115000"/>
+              </a:lnSpc>
+              <a:buNone/>
+            </a:pPr>
+            <a:r>
+              <a:rPr lang="en-US" sz="950" dirty="0">
+                <a:solidFill>
+                  <a:srgbClr val="D8CFC2"/>
                 </a:solidFill>
                 <a:latin typeface="IBM Plex Sans KR" pitchFamily="34" charset="0"/>
                 <a:ea typeface="IBM Plex Sans KR" pitchFamily="34" charset="-122"/>
                 <a:cs typeface="IBM Plex Sans KR" pitchFamily="34" charset="-120"/>
               </a:rPr>
-              <a:t>최소 지분가치</a:t>
-            </a:r>
-            <a:endParaRPr lang="en-US" sz="1250" dirty="0"/>
-          </a:p>
-        </p:txBody>
-      </p:sp>
-      <p:sp>
-        <p:nvSpPr>
-          <p:cNvPr id="34" name="Text 32"/>
-          <p:cNvSpPr/>
-          <p:nvPr/>
-        </p:nvSpPr>
-        <p:spPr>
-          <a:xfrm>
-            <a:off x="5486400" y="2331720"/>
-            <a:ext cx="2971800" cy="256032"/>
-          </a:xfrm>
-          <a:prstGeom prst="rect">
-            <a:avLst/>
-          </a:prstGeom>
-          <a:noFill/>
-          <a:ln/>
-        </p:spPr>
-        <p:txBody>
-          <a:bodyPr wrap="square" lIns="0" tIns="0" rIns="0" bIns="0" rtlCol="0" anchor="ctr"/>
-          <a:lstStyle/>
-          <a:p>
+              <a:t>run-rate ex-AMPC EBITDA </a:t>
+            </a:r>
             <a:pPr indent="0" marL="0">
-              <a:buNone/>
-            </a:pPr>
-            <a:r>
-              <a:rPr lang="en-US" sz="900" dirty="0">
-                <a:solidFill>
-                  <a:srgbClr val="6F6960"/>
+              <a:lnSpc>
+                <a:spcPct val="115000"/>
+              </a:lnSpc>
+              <a:buNone/>
+            </a:pPr>
+            <a:r>
+              <a:rPr lang="en-US" sz="950" b="1" dirty="0">
+                <a:solidFill>
+                  <a:srgbClr val="86D6A6"/>
                 </a:solidFill>
                 <a:latin typeface="IBM Plex Sans KR" pitchFamily="34" charset="0"/>
                 <a:ea typeface="IBM Plex Sans KR" pitchFamily="34" charset="-122"/>
                 <a:cs typeface="IBM Plex Sans KR" pitchFamily="34" charset="-120"/>
               </a:rPr>
-              <a:t>외부 지분 $0.43bn ÷ 20% 희석</a:t>
-            </a:r>
-            <a:endParaRPr lang="en-US" sz="900" dirty="0"/>
-          </a:p>
-        </p:txBody>
-      </p:sp>
-      <p:sp>
-        <p:nvSpPr>
-          <p:cNvPr id="35" name="Text 33"/>
-          <p:cNvSpPr/>
-          <p:nvPr/>
-        </p:nvSpPr>
-        <p:spPr>
-          <a:xfrm>
-            <a:off x="8385048" y="2048256"/>
-            <a:ext cx="1554480" cy="502920"/>
-          </a:xfrm>
-          <a:prstGeom prst="rect">
-            <a:avLst/>
-          </a:prstGeom>
-          <a:noFill/>
-          <a:ln/>
-        </p:spPr>
-        <p:txBody>
-          <a:bodyPr wrap="square" lIns="0" tIns="0" rIns="0" bIns="0" rtlCol="0" anchor="ctr"/>
-          <a:lstStyle/>
-          <a:p>
-            <a:pPr algn="r" indent="0" marL="0">
-              <a:buNone/>
-            </a:pPr>
-            <a:r>
-              <a:rPr lang="en-US" sz="2600" b="1" dirty="0">
-                <a:solidFill>
-                  <a:srgbClr val="1B1714"/>
-                </a:solidFill>
-                <a:latin typeface="Space Grotesk" pitchFamily="34" charset="0"/>
-                <a:ea typeface="Space Grotesk" pitchFamily="34" charset="-122"/>
-                <a:cs typeface="Space Grotesk" pitchFamily="34" charset="-120"/>
-              </a:rPr>
-              <a:t>$2.1</a:t>
-            </a:r>
-            <a:pPr algn="r" indent="0" marL="0">
-              <a:buNone/>
-            </a:pPr>
-            <a:r>
-              <a:rPr lang="en-US" sz="1400" b="1" dirty="0">
-                <a:solidFill>
-                  <a:srgbClr val="1B1714"/>
-                </a:solidFill>
-                <a:latin typeface="Space Grotesk" pitchFamily="34" charset="0"/>
-                <a:ea typeface="Space Grotesk" pitchFamily="34" charset="-122"/>
-                <a:cs typeface="Space Grotesk" pitchFamily="34" charset="-120"/>
-              </a:rPr>
-              <a:t>bn</a:t>
-            </a:r>
-            <a:endParaRPr lang="en-US" sz="2600" dirty="0"/>
-          </a:p>
-        </p:txBody>
-      </p:sp>
-      <p:sp>
-        <p:nvSpPr>
-          <p:cNvPr id="36" name="Shape 34"/>
-          <p:cNvSpPr/>
-          <p:nvPr/>
-        </p:nvSpPr>
-        <p:spPr>
-          <a:xfrm>
-            <a:off x="4864608" y="2761488"/>
-            <a:ext cx="5257800" cy="749808"/>
-          </a:xfrm>
-          <a:prstGeom prst="roundRect">
-            <a:avLst>
-              <a:gd name="adj" fmla="val 7317"/>
-            </a:avLst>
-          </a:prstGeom>
-          <a:solidFill>
-            <a:srgbClr val="FFFFFF"/>
-          </a:solidFill>
-          <a:ln w="12700">
-            <a:solidFill>
-              <a:srgbClr val="E4DED4"/>
-            </a:solidFill>
-            <a:prstDash val="solid"/>
-          </a:ln>
-        </p:spPr>
-      </p:sp>
-      <p:sp>
-        <p:nvSpPr>
-          <p:cNvPr id="37" name="Shape 35"/>
-          <p:cNvSpPr/>
-          <p:nvPr/>
-        </p:nvSpPr>
-        <p:spPr>
-          <a:xfrm>
-            <a:off x="5047488" y="2980944"/>
-            <a:ext cx="310896" cy="310896"/>
-          </a:xfrm>
-          <a:prstGeom prst="ellipse">
-            <a:avLst/>
-          </a:prstGeom>
-          <a:solidFill>
-            <a:srgbClr val="D8CFC2"/>
-          </a:solidFill>
-          <a:ln/>
-        </p:spPr>
-      </p:sp>
-      <p:sp>
-        <p:nvSpPr>
-          <p:cNvPr id="38" name="Text 36"/>
-          <p:cNvSpPr/>
-          <p:nvPr/>
-        </p:nvSpPr>
-        <p:spPr>
-          <a:xfrm>
-            <a:off x="5047488" y="2980944"/>
-            <a:ext cx="310896" cy="310896"/>
-          </a:xfrm>
-          <a:prstGeom prst="rect">
-            <a:avLst/>
-          </a:prstGeom>
-          <a:noFill/>
-          <a:ln/>
-        </p:spPr>
-        <p:txBody>
-          <a:bodyPr wrap="square" lIns="0" tIns="0" rIns="0" bIns="0" rtlCol="0" anchor="ctr"/>
-          <a:lstStyle/>
-          <a:p>
-            <a:pPr algn="ctr" indent="0" marL="0">
-              <a:buNone/>
-            </a:pPr>
-            <a:r>
-              <a:rPr lang="en-US" sz="1400" b="1" dirty="0">
-                <a:solidFill>
-                  <a:srgbClr val="1B1714"/>
-                </a:solidFill>
-                <a:latin typeface="Noto Serif KR" pitchFamily="34" charset="0"/>
-                <a:ea typeface="Noto Serif KR" pitchFamily="34" charset="-122"/>
-                <a:cs typeface="Noto Serif KR" pitchFamily="34" charset="-120"/>
-              </a:rPr>
-              <a:t>2</a:t>
-            </a:r>
-            <a:endParaRPr lang="en-US" sz="1400" dirty="0"/>
-          </a:p>
-        </p:txBody>
-      </p:sp>
-      <p:sp>
-        <p:nvSpPr>
-          <p:cNvPr id="39" name="Text 37"/>
-          <p:cNvSpPr/>
-          <p:nvPr/>
-        </p:nvSpPr>
-        <p:spPr>
-          <a:xfrm>
-            <a:off x="5486400" y="2871216"/>
-            <a:ext cx="2971800" cy="310896"/>
-          </a:xfrm>
-          <a:prstGeom prst="rect">
-            <a:avLst/>
-          </a:prstGeom>
-          <a:noFill/>
-          <a:ln/>
-        </p:spPr>
-        <p:txBody>
-          <a:bodyPr wrap="square" lIns="0" tIns="0" rIns="0" bIns="0" rtlCol="0" anchor="ctr"/>
-          <a:lstStyle/>
-          <a:p>
+              <a:t>$442mm 유지</a:t>
+            </a:r>
             <a:pPr indent="0" marL="0">
-              <a:buNone/>
-            </a:pPr>
-            <a:r>
-              <a:rPr lang="en-US" sz="1250" b="1" dirty="0">
-                <a:solidFill>
-                  <a:srgbClr val="1B1714"/>
+              <a:lnSpc>
+                <a:spcPct val="115000"/>
+              </a:lnSpc>
+              <a:buNone/>
+            </a:pPr>
+            <a:r>
+              <a:rPr lang="en-US" sz="950" dirty="0">
+                <a:solidFill>
+                  <a:srgbClr val="D8CFC2"/>
                 </a:solidFill>
                 <a:latin typeface="IBM Plex Sans KR" pitchFamily="34" charset="0"/>
                 <a:ea typeface="IBM Plex Sans KR" pitchFamily="34" charset="-122"/>
                 <a:cs typeface="IBM Plex Sans KR" pitchFamily="34" charset="-120"/>
               </a:rPr>
-              <a:t>→ 최소 EV</a:t>
-            </a:r>
-            <a:endParaRPr lang="en-US" sz="1250" dirty="0"/>
-          </a:p>
-        </p:txBody>
-      </p:sp>
-      <p:sp>
-        <p:nvSpPr>
-          <p:cNvPr id="40" name="Text 38"/>
-          <p:cNvSpPr/>
-          <p:nvPr/>
-        </p:nvSpPr>
-        <p:spPr>
-          <a:xfrm>
-            <a:off x="5486400" y="3172968"/>
-            <a:ext cx="2971800" cy="256032"/>
-          </a:xfrm>
-          <a:prstGeom prst="rect">
-            <a:avLst/>
-          </a:prstGeom>
-          <a:noFill/>
-          <a:ln/>
-        </p:spPr>
-        <p:txBody>
-          <a:bodyPr wrap="square" lIns="0" tIns="0" rIns="0" bIns="0" rtlCol="0" anchor="ctr"/>
-          <a:lstStyle/>
-          <a:p>
+              <a:t> 기준(기저 $0.2bn은 pre-SOP 조기현금·EV 방어용, run-rate 불변). </a:t>
+            </a:r>
             <a:pPr indent="0" marL="0">
-              <a:buNone/>
-            </a:pPr>
-            <a:r>
-              <a:rPr lang="en-US" sz="900" dirty="0">
-                <a:solidFill>
-                  <a:srgbClr val="6F6960"/>
+              <a:lnSpc>
+                <a:spcPct val="115000"/>
+              </a:lnSpc>
+              <a:buNone/>
+            </a:pPr>
+            <a:r>
+              <a:rPr lang="en-US" sz="950" b="1" dirty="0">
+                <a:solidFill>
+                  <a:srgbClr val="86D6A6"/>
                 </a:solidFill>
                 <a:latin typeface="IBM Plex Sans KR" pitchFamily="34" charset="0"/>
                 <a:ea typeface="IBM Plex Sans KR" pitchFamily="34" charset="-122"/>
                 <a:cs typeface="IBM Plex Sans KR" pitchFamily="34" charset="-120"/>
               </a:rPr>
-              <a:t>지분 $2.1 + 순차입금 $6.4 (BA3.7+OT2.6)</a:t>
-            </a:r>
-            <a:endParaRPr lang="en-US" sz="900" dirty="0"/>
-          </a:p>
-        </p:txBody>
-      </p:sp>
-      <p:sp>
-        <p:nvSpPr>
-          <p:cNvPr id="41" name="Text 39"/>
-          <p:cNvSpPr/>
-          <p:nvPr/>
-        </p:nvSpPr>
-        <p:spPr>
-          <a:xfrm>
-            <a:off x="8385048" y="2889504"/>
-            <a:ext cx="1554480" cy="502920"/>
-          </a:xfrm>
-          <a:prstGeom prst="rect">
-            <a:avLst/>
-          </a:prstGeom>
-          <a:noFill/>
-          <a:ln/>
-        </p:spPr>
-        <p:txBody>
-          <a:bodyPr wrap="square" lIns="0" tIns="0" rIns="0" bIns="0" rtlCol="0" anchor="ctr"/>
-          <a:lstStyle/>
-          <a:p>
-            <a:pPr algn="r" indent="0" marL="0">
-              <a:buNone/>
-            </a:pPr>
-            <a:r>
-              <a:rPr lang="en-US" sz="2600" b="1" dirty="0">
-                <a:solidFill>
-                  <a:srgbClr val="1B1714"/>
-                </a:solidFill>
-                <a:latin typeface="Space Grotesk" pitchFamily="34" charset="0"/>
-                <a:ea typeface="Space Grotesk" pitchFamily="34" charset="-122"/>
-                <a:cs typeface="Space Grotesk" pitchFamily="34" charset="-120"/>
-              </a:rPr>
-              <a:t>$8.6</a:t>
-            </a:r>
-            <a:pPr algn="r" indent="0" marL="0">
-              <a:buNone/>
-            </a:pPr>
-            <a:r>
-              <a:rPr lang="en-US" sz="1400" b="1" dirty="0">
-                <a:solidFill>
-                  <a:srgbClr val="1B1714"/>
-                </a:solidFill>
-                <a:latin typeface="Space Grotesk" pitchFamily="34" charset="0"/>
-                <a:ea typeface="Space Grotesk" pitchFamily="34" charset="-122"/>
-                <a:cs typeface="Space Grotesk" pitchFamily="34" charset="-120"/>
-              </a:rPr>
-              <a:t>bn</a:t>
-            </a:r>
-            <a:endParaRPr lang="en-US" sz="2600" dirty="0"/>
-          </a:p>
-        </p:txBody>
-      </p:sp>
-      <p:sp>
-        <p:nvSpPr>
-          <p:cNvPr id="42" name="Shape 40"/>
-          <p:cNvSpPr/>
-          <p:nvPr/>
-        </p:nvSpPr>
-        <p:spPr>
-          <a:xfrm>
-            <a:off x="4864608" y="3602736"/>
-            <a:ext cx="5257800" cy="749808"/>
-          </a:xfrm>
-          <a:prstGeom prst="roundRect">
-            <a:avLst>
-              <a:gd name="adj" fmla="val 7317"/>
-            </a:avLst>
-          </a:prstGeom>
-          <a:solidFill>
-            <a:srgbClr val="FFFFFF"/>
-          </a:solidFill>
-          <a:ln w="12700">
-            <a:solidFill>
-              <a:srgbClr val="E4DED4"/>
-            </a:solidFill>
-            <a:prstDash val="solid"/>
-          </a:ln>
-        </p:spPr>
-      </p:sp>
-      <p:sp>
-        <p:nvSpPr>
-          <p:cNvPr id="43" name="Shape 41"/>
-          <p:cNvSpPr/>
-          <p:nvPr/>
-        </p:nvSpPr>
-        <p:spPr>
-          <a:xfrm>
-            <a:off x="5047488" y="3822192"/>
-            <a:ext cx="310896" cy="310896"/>
-          </a:xfrm>
-          <a:prstGeom prst="ellipse">
-            <a:avLst/>
-          </a:prstGeom>
-          <a:solidFill>
-            <a:srgbClr val="D8CFC2"/>
-          </a:solidFill>
-          <a:ln/>
-        </p:spPr>
-      </p:sp>
-      <p:sp>
-        <p:nvSpPr>
-          <p:cNvPr id="44" name="Text 42"/>
-          <p:cNvSpPr/>
-          <p:nvPr/>
-        </p:nvSpPr>
-        <p:spPr>
-          <a:xfrm>
-            <a:off x="5047488" y="3822192"/>
-            <a:ext cx="310896" cy="310896"/>
-          </a:xfrm>
-          <a:prstGeom prst="rect">
-            <a:avLst/>
-          </a:prstGeom>
-          <a:noFill/>
-          <a:ln/>
-        </p:spPr>
-        <p:txBody>
-          <a:bodyPr wrap="square" lIns="0" tIns="0" rIns="0" bIns="0" rtlCol="0" anchor="ctr"/>
-          <a:lstStyle/>
-          <a:p>
-            <a:pPr algn="ctr" indent="0" marL="0">
-              <a:buNone/>
-            </a:pPr>
-            <a:r>
-              <a:rPr lang="en-US" sz="1400" b="1" dirty="0">
-                <a:solidFill>
-                  <a:srgbClr val="1B1714"/>
-                </a:solidFill>
-                <a:latin typeface="Noto Serif KR" pitchFamily="34" charset="0"/>
-                <a:ea typeface="Noto Serif KR" pitchFamily="34" charset="-122"/>
-                <a:cs typeface="Noto Serif KR" pitchFamily="34" charset="-120"/>
-              </a:rPr>
-              <a:t>3</a:t>
-            </a:r>
-            <a:endParaRPr lang="en-US" sz="1400" dirty="0"/>
-          </a:p>
-        </p:txBody>
-      </p:sp>
-      <p:sp>
-        <p:nvSpPr>
-          <p:cNvPr id="45" name="Text 43"/>
-          <p:cNvSpPr/>
-          <p:nvPr/>
-        </p:nvSpPr>
-        <p:spPr>
-          <a:xfrm>
-            <a:off x="5486400" y="3712464"/>
-            <a:ext cx="2971800" cy="310896"/>
-          </a:xfrm>
-          <a:prstGeom prst="rect">
-            <a:avLst/>
-          </a:prstGeom>
-          <a:noFill/>
-          <a:ln/>
-        </p:spPr>
-        <p:txBody>
-          <a:bodyPr wrap="square" lIns="0" tIns="0" rIns="0" bIns="0" rtlCol="0" anchor="ctr"/>
-          <a:lstStyle/>
-          <a:p>
+              <a:t>그랜트 20%(①)</a:t>
+            </a:r>
             <a:pPr indent="0" marL="0">
-              <a:buNone/>
-            </a:pPr>
-            <a:r>
-              <a:rPr lang="en-US" sz="1250" b="1" dirty="0">
-                <a:solidFill>
-                  <a:srgbClr val="1B1714"/>
+              <a:lnSpc>
+                <a:spcPct val="115000"/>
+              </a:lnSpc>
+              <a:buNone/>
+            </a:pPr>
+            <a:r>
+              <a:rPr lang="en-US" sz="950" dirty="0">
+                <a:solidFill>
+                  <a:srgbClr val="D8CFC2"/>
                 </a:solidFill>
                 <a:latin typeface="IBM Plex Sans KR" pitchFamily="34" charset="0"/>
                 <a:ea typeface="IBM Plex Sans KR" pitchFamily="34" charset="-122"/>
                 <a:cs typeface="IBM Plex Sans KR" pitchFamily="34" charset="-120"/>
               </a:rPr>
-              <a:t>→ 최소 implied 멀티플</a:t>
-            </a:r>
-            <a:endParaRPr lang="en-US" sz="1250" dirty="0"/>
-          </a:p>
-        </p:txBody>
-      </p:sp>
-      <p:sp>
-        <p:nvSpPr>
-          <p:cNvPr id="46" name="Text 44"/>
-          <p:cNvSpPr/>
-          <p:nvPr/>
-        </p:nvSpPr>
-        <p:spPr>
-          <a:xfrm>
-            <a:off x="5486400" y="4014216"/>
-            <a:ext cx="2971800" cy="256032"/>
-          </a:xfrm>
-          <a:prstGeom prst="rect">
-            <a:avLst/>
-          </a:prstGeom>
-          <a:noFill/>
-          <a:ln/>
-        </p:spPr>
-        <p:txBody>
-          <a:bodyPr wrap="square" lIns="0" tIns="0" rIns="0" bIns="0" rtlCol="0" anchor="ctr"/>
-          <a:lstStyle/>
-          <a:p>
+              <a:t>·</a:t>
+            </a:r>
             <a:pPr indent="0" marL="0">
-              <a:buNone/>
-            </a:pPr>
-            <a:r>
-              <a:rPr lang="en-US" sz="900" dirty="0">
-                <a:solidFill>
-                  <a:srgbClr val="6F6960"/>
+              <a:lnSpc>
+                <a:spcPct val="115000"/>
+              </a:lnSpc>
+              <a:buNone/>
+            </a:pPr>
+            <a:r>
+              <a:rPr lang="en-US" sz="950" b="1" dirty="0">
+                <a:solidFill>
+                  <a:srgbClr val="86D6A6"/>
                 </a:solidFill>
                 <a:latin typeface="IBM Plex Sans KR" pitchFamily="34" charset="0"/>
                 <a:ea typeface="IBM Plex Sans KR" pitchFamily="34" charset="-122"/>
                 <a:cs typeface="IBM Plex Sans KR" pitchFamily="34" charset="-120"/>
               </a:rPr>
-              <a:t>현 EBITDA $441mm · peer 8~13x 초과</a:t>
-            </a:r>
-            <a:endParaRPr lang="en-US" sz="900" dirty="0"/>
-          </a:p>
-        </p:txBody>
-      </p:sp>
-      <p:sp>
-        <p:nvSpPr>
-          <p:cNvPr id="47" name="Text 45"/>
-          <p:cNvSpPr/>
-          <p:nvPr/>
-        </p:nvSpPr>
-        <p:spPr>
-          <a:xfrm>
-            <a:off x="8385048" y="3730752"/>
-            <a:ext cx="1554480" cy="502920"/>
-          </a:xfrm>
-          <a:prstGeom prst="rect">
-            <a:avLst/>
-          </a:prstGeom>
-          <a:noFill/>
-          <a:ln/>
-        </p:spPr>
-        <p:txBody>
-          <a:bodyPr wrap="square" lIns="0" tIns="0" rIns="0" bIns="0" rtlCol="0" anchor="ctr"/>
-          <a:lstStyle/>
-          <a:p>
-            <a:pPr algn="r" indent="0" marL="0">
-              <a:buNone/>
-            </a:pPr>
-            <a:r>
-              <a:rPr lang="en-US" sz="2600" b="1" dirty="0">
-                <a:solidFill>
-                  <a:srgbClr val="C1121F"/>
-                </a:solidFill>
-                <a:latin typeface="Space Grotesk" pitchFamily="34" charset="0"/>
-                <a:ea typeface="Space Grotesk" pitchFamily="34" charset="-122"/>
-                <a:cs typeface="Space Grotesk" pitchFamily="34" charset="-120"/>
-              </a:rPr>
-              <a:t>~19</a:t>
-            </a:r>
-            <a:pPr algn="r" indent="0" marL="0">
-              <a:buNone/>
-            </a:pPr>
-            <a:r>
-              <a:rPr lang="en-US" sz="1400" b="1" dirty="0">
-                <a:solidFill>
-                  <a:srgbClr val="C1121F"/>
-                </a:solidFill>
-                <a:latin typeface="Space Grotesk" pitchFamily="34" charset="0"/>
-                <a:ea typeface="Space Grotesk" pitchFamily="34" charset="-122"/>
-                <a:cs typeface="Space Grotesk" pitchFamily="34" charset="-120"/>
-              </a:rPr>
-              <a:t>x</a:t>
-            </a:r>
-            <a:endParaRPr lang="en-US" sz="2600" dirty="0"/>
-          </a:p>
-        </p:txBody>
-      </p:sp>
-      <p:sp>
-        <p:nvSpPr>
-          <p:cNvPr id="48" name="Shape 46"/>
-          <p:cNvSpPr/>
-          <p:nvPr/>
-        </p:nvSpPr>
-        <p:spPr>
-          <a:xfrm>
-            <a:off x="4864608" y="4443984"/>
-            <a:ext cx="5257800" cy="749808"/>
-          </a:xfrm>
-          <a:prstGeom prst="roundRect">
-            <a:avLst>
-              <a:gd name="adj" fmla="val 7317"/>
-            </a:avLst>
-          </a:prstGeom>
-          <a:solidFill>
-            <a:srgbClr val="FBF1EF"/>
-          </a:solidFill>
-          <a:ln w="19050">
-            <a:solidFill>
-              <a:srgbClr val="C1121F"/>
-            </a:solidFill>
-            <a:prstDash val="solid"/>
-          </a:ln>
-        </p:spPr>
-      </p:sp>
-      <p:sp>
-        <p:nvSpPr>
-          <p:cNvPr id="49" name="Shape 47"/>
-          <p:cNvSpPr/>
-          <p:nvPr/>
-        </p:nvSpPr>
-        <p:spPr>
-          <a:xfrm>
-            <a:off x="5047488" y="4663440"/>
-            <a:ext cx="310896" cy="310896"/>
-          </a:xfrm>
-          <a:prstGeom prst="ellipse">
-            <a:avLst/>
-          </a:prstGeom>
-          <a:solidFill>
-            <a:srgbClr val="C1121F"/>
-          </a:solidFill>
-          <a:ln/>
-        </p:spPr>
-      </p:sp>
-      <p:sp>
-        <p:nvSpPr>
-          <p:cNvPr id="50" name="Text 48"/>
-          <p:cNvSpPr/>
-          <p:nvPr/>
-        </p:nvSpPr>
-        <p:spPr>
-          <a:xfrm>
-            <a:off x="5047488" y="4663440"/>
-            <a:ext cx="310896" cy="310896"/>
-          </a:xfrm>
-          <a:prstGeom prst="rect">
-            <a:avLst/>
-          </a:prstGeom>
-          <a:noFill/>
-          <a:ln/>
-        </p:spPr>
-        <p:txBody>
-          <a:bodyPr wrap="square" lIns="0" tIns="0" rIns="0" bIns="0" rtlCol="0" anchor="ctr"/>
-          <a:lstStyle/>
-          <a:p>
-            <a:pPr algn="ctr" indent="0" marL="0">
-              <a:buNone/>
-            </a:pPr>
-            <a:r>
-              <a:rPr lang="en-US" sz="1400" b="1" dirty="0">
-                <a:solidFill>
-                  <a:srgbClr val="FFFFFF"/>
-                </a:solidFill>
-                <a:latin typeface="Noto Serif KR" pitchFamily="34" charset="0"/>
-                <a:ea typeface="Noto Serif KR" pitchFamily="34" charset="-122"/>
-                <a:cs typeface="Noto Serif KR" pitchFamily="34" charset="-120"/>
-              </a:rPr>
-              <a:t>4</a:t>
-            </a:r>
-            <a:endParaRPr lang="en-US" sz="1400" dirty="0"/>
-          </a:p>
-        </p:txBody>
-      </p:sp>
-      <p:sp>
-        <p:nvSpPr>
-          <p:cNvPr id="51" name="Text 49"/>
-          <p:cNvSpPr/>
-          <p:nvPr/>
-        </p:nvSpPr>
-        <p:spPr>
-          <a:xfrm>
-            <a:off x="5486400" y="4553712"/>
-            <a:ext cx="2971800" cy="310896"/>
-          </a:xfrm>
-          <a:prstGeom prst="rect">
-            <a:avLst/>
-          </a:prstGeom>
-          <a:noFill/>
-          <a:ln/>
-        </p:spPr>
-        <p:txBody>
-          <a:bodyPr wrap="square" lIns="0" tIns="0" rIns="0" bIns="0" rtlCol="0" anchor="ctr"/>
-          <a:lstStyle/>
-          <a:p>
+              <a:t>CoC 해제 30% 희석(②)</a:t>
+            </a:r>
             <a:pPr indent="0" marL="0">
-              <a:buNone/>
-            </a:pPr>
-            <a:r>
-              <a:rPr lang="en-US" sz="1250" b="1" dirty="0">
-                <a:solidFill>
-                  <a:srgbClr val="C1121F"/>
+              <a:lnSpc>
+                <a:spcPct val="115000"/>
+              </a:lnSpc>
+              <a:buNone/>
+            </a:pPr>
+            <a:r>
+              <a:rPr lang="en-US" sz="950" dirty="0">
+                <a:solidFill>
+                  <a:srgbClr val="D8CFC2"/>
                 </a:solidFill>
                 <a:latin typeface="IBM Plex Sans KR" pitchFamily="34" charset="0"/>
                 <a:ea typeface="IBM Plex Sans KR" pitchFamily="34" charset="-122"/>
                 <a:cs typeface="IBM Plex Sans KR" pitchFamily="34" charset="-120"/>
               </a:rPr>
-              <a:t>→ DCF 환산: 필요 ex-AMPC EBITDA</a:t>
-            </a:r>
-            <a:endParaRPr lang="en-US" sz="1250" dirty="0"/>
-          </a:p>
-        </p:txBody>
-      </p:sp>
-      <p:sp>
-        <p:nvSpPr>
-          <p:cNvPr id="52" name="Text 50"/>
-          <p:cNvSpPr/>
-          <p:nvPr/>
-        </p:nvSpPr>
-        <p:spPr>
-          <a:xfrm>
-            <a:off x="5486400" y="4855464"/>
-            <a:ext cx="2971800" cy="256032"/>
-          </a:xfrm>
-          <a:prstGeom prst="rect">
-            <a:avLst/>
-          </a:prstGeom>
-          <a:noFill/>
-          <a:ln/>
-        </p:spPr>
-        <p:txBody>
-          <a:bodyPr wrap="square" lIns="0" tIns="0" rIns="0" bIns="0" rtlCol="0" anchor="ctr"/>
-          <a:lstStyle/>
-          <a:p>
+              <a:t>은 각각 implied 멀티플을 </a:t>
+            </a:r>
             <a:pPr indent="0" marL="0">
-              <a:buNone/>
-            </a:pPr>
-            <a:r>
-              <a:rPr lang="en-US" sz="900" dirty="0">
-                <a:solidFill>
-                  <a:srgbClr val="6F6960"/>
+              <a:lnSpc>
+                <a:spcPct val="115000"/>
+              </a:lnSpc>
+              <a:buNone/>
+            </a:pPr>
+            <a:r>
+              <a:rPr lang="en-US" sz="950" b="1" dirty="0">
+                <a:solidFill>
+                  <a:srgbClr val="FF8E84"/>
                 </a:solidFill>
                 <a:latin typeface="IBM Plex Sans KR" pitchFamily="34" charset="0"/>
                 <a:ea typeface="IBM Plex Sans KR" pitchFamily="34" charset="-122"/>
                 <a:cs typeface="IBM Plex Sans KR" pitchFamily="34" charset="-120"/>
               </a:rPr>
-              <a:t>현 9%의 약 2.5배 (모델 sweep)</a:t>
-            </a:r>
-            <a:endParaRPr lang="en-US" sz="900" dirty="0"/>
-          </a:p>
-        </p:txBody>
-      </p:sp>
-      <p:sp>
-        <p:nvSpPr>
-          <p:cNvPr id="53" name="Text 51"/>
-          <p:cNvSpPr/>
-          <p:nvPr/>
-        </p:nvSpPr>
-        <p:spPr>
-          <a:xfrm>
-            <a:off x="8385048" y="4572000"/>
-            <a:ext cx="1554480" cy="502920"/>
-          </a:xfrm>
-          <a:prstGeom prst="rect">
-            <a:avLst/>
-          </a:prstGeom>
-          <a:noFill/>
-          <a:ln/>
-        </p:spPr>
-        <p:txBody>
-          <a:bodyPr wrap="square" lIns="0" tIns="0" rIns="0" bIns="0" rtlCol="0" anchor="ctr"/>
-          <a:lstStyle/>
-          <a:p>
-            <a:pPr algn="r" indent="0" marL="0">
-              <a:buNone/>
-            </a:pPr>
-            <a:r>
-              <a:rPr lang="en-US" sz="2600" b="1" dirty="0">
-                <a:solidFill>
-                  <a:srgbClr val="C1121F"/>
-                </a:solidFill>
-                <a:latin typeface="Space Grotesk" pitchFamily="34" charset="0"/>
-                <a:ea typeface="Space Grotesk" pitchFamily="34" charset="-122"/>
-                <a:cs typeface="Space Grotesk" pitchFamily="34" charset="-120"/>
-              </a:rPr>
-              <a:t>~22</a:t>
-            </a:r>
-            <a:pPr algn="r" indent="0" marL="0">
-              <a:buNone/>
-            </a:pPr>
-            <a:r>
-              <a:rPr lang="en-US" sz="1400" b="1" dirty="0">
-                <a:solidFill>
-                  <a:srgbClr val="C1121F"/>
-                </a:solidFill>
-                <a:latin typeface="Space Grotesk" pitchFamily="34" charset="0"/>
-                <a:ea typeface="Space Grotesk" pitchFamily="34" charset="-122"/>
-                <a:cs typeface="Space Grotesk" pitchFamily="34" charset="-120"/>
-              </a:rPr>
-              <a:t>%</a:t>
-            </a:r>
-            <a:endParaRPr lang="en-US" sz="2600" dirty="0"/>
-          </a:p>
-        </p:txBody>
-      </p:sp>
-      <p:sp>
-        <p:nvSpPr>
-          <p:cNvPr id="54" name="Shape 52"/>
-          <p:cNvSpPr/>
-          <p:nvPr/>
-        </p:nvSpPr>
-        <p:spPr>
-          <a:xfrm>
-            <a:off x="566928" y="5440680"/>
-            <a:ext cx="9555480" cy="658368"/>
-          </a:xfrm>
-          <a:prstGeom prst="roundRect">
-            <a:avLst>
-              <a:gd name="adj" fmla="val 6944"/>
-            </a:avLst>
-          </a:prstGeom>
-          <a:solidFill>
-            <a:srgbClr val="211C18"/>
-          </a:solidFill>
-          <a:ln/>
-        </p:spPr>
-      </p:sp>
-      <p:sp>
-        <p:nvSpPr>
-          <p:cNvPr id="55" name="Text 53"/>
-          <p:cNvSpPr/>
-          <p:nvPr/>
-        </p:nvSpPr>
-        <p:spPr>
-          <a:xfrm>
-            <a:off x="841248" y="5440680"/>
-            <a:ext cx="2468880" cy="658368"/>
-          </a:xfrm>
-          <a:prstGeom prst="rect">
-            <a:avLst/>
-          </a:prstGeom>
-          <a:noFill/>
-          <a:ln/>
-        </p:spPr>
-        <p:txBody>
-          <a:bodyPr wrap="square" lIns="0" tIns="0" rIns="0" bIns="0" rtlCol="0" anchor="ctr"/>
-          <a:lstStyle/>
-          <a:p>
-            <a:pPr indent="0" marL="0">
-              <a:buNone/>
-            </a:pPr>
-            <a:r>
-              <a:rPr lang="en-US" sz="1200" b="1" dirty="0">
-                <a:solidFill>
-                  <a:srgbClr val="FF8E84"/>
-                </a:solidFill>
-                <a:latin typeface="Noto Serif KR" pitchFamily="34" charset="0"/>
-                <a:ea typeface="Noto Serif KR" pitchFamily="34" charset="-122"/>
-                <a:cs typeface="Noto Serif KR" pitchFamily="34" charset="-120"/>
-              </a:rPr>
-              <a:t>필요 마진 갭 — 9% → ~22%</a:t>
-            </a:r>
-            <a:endParaRPr lang="en-US" sz="1200" dirty="0"/>
-          </a:p>
-        </p:txBody>
-      </p:sp>
-      <p:sp>
-        <p:nvSpPr>
-          <p:cNvPr id="56" name="Shape 54"/>
-          <p:cNvSpPr/>
-          <p:nvPr/>
-        </p:nvSpPr>
-        <p:spPr>
-          <a:xfrm>
-            <a:off x="3584448" y="5769864"/>
-            <a:ext cx="6263640" cy="0"/>
-          </a:xfrm>
-          <a:prstGeom prst="line">
-            <a:avLst/>
-          </a:prstGeom>
-          <a:noFill/>
-          <a:ln w="38100">
-            <a:solidFill>
-              <a:srgbClr val="3A342E"/>
-            </a:solidFill>
-            <a:prstDash val="solid"/>
-          </a:ln>
-        </p:spPr>
-      </p:sp>
-      <p:sp>
-        <p:nvSpPr>
-          <p:cNvPr id="57" name="Shape 55"/>
-          <p:cNvSpPr/>
-          <p:nvPr/>
-        </p:nvSpPr>
-        <p:spPr>
-          <a:xfrm>
-            <a:off x="5839358" y="5769864"/>
-            <a:ext cx="3382366" cy="0"/>
-          </a:xfrm>
-          <a:prstGeom prst="line">
-            <a:avLst/>
-          </a:prstGeom>
-          <a:noFill/>
-          <a:ln w="38100">
-            <a:solidFill>
-              <a:srgbClr val="C1121F"/>
-            </a:solidFill>
-            <a:prstDash val="solid"/>
-          </a:ln>
-        </p:spPr>
-      </p:sp>
-      <p:sp>
-        <p:nvSpPr>
-          <p:cNvPr id="58" name="Text 56"/>
-          <p:cNvSpPr/>
-          <p:nvPr/>
-        </p:nvSpPr>
-        <p:spPr>
-          <a:xfrm>
-            <a:off x="5382158" y="5477256"/>
-            <a:ext cx="914400" cy="182880"/>
-          </a:xfrm>
-          <a:prstGeom prst="rect">
-            <a:avLst/>
-          </a:prstGeom>
-          <a:noFill/>
-          <a:ln/>
-        </p:spPr>
-        <p:txBody>
-          <a:bodyPr wrap="square" lIns="0" tIns="0" rIns="0" bIns="0" rtlCol="0" anchor="ctr"/>
-          <a:lstStyle/>
-          <a:p>
-            <a:pPr algn="ctr" indent="0" marL="0">
-              <a:buNone/>
-            </a:pPr>
-            <a:r>
-              <a:rPr lang="en-US" sz="900" dirty="0">
-                <a:solidFill>
-                  <a:srgbClr val="D8CFC2"/>
-                </a:solidFill>
-                <a:latin typeface="IBM Plex Mono" pitchFamily="34" charset="0"/>
-                <a:ea typeface="IBM Plex Mono" pitchFamily="34" charset="-122"/>
-                <a:cs typeface="IBM Plex Mono" pitchFamily="34" charset="-120"/>
-              </a:rPr>
-              <a:t>현 9%</a:t>
-            </a:r>
-            <a:endParaRPr lang="en-US" sz="900" dirty="0"/>
-          </a:p>
-        </p:txBody>
-      </p:sp>
-      <p:sp>
-        <p:nvSpPr>
-          <p:cNvPr id="59" name="Text 57"/>
-          <p:cNvSpPr/>
-          <p:nvPr/>
-        </p:nvSpPr>
-        <p:spPr>
-          <a:xfrm>
-            <a:off x="8581644" y="5477256"/>
-            <a:ext cx="1280160" cy="182880"/>
-          </a:xfrm>
-          <a:prstGeom prst="rect">
-            <a:avLst/>
-          </a:prstGeom>
-          <a:noFill/>
-          <a:ln/>
-        </p:spPr>
-        <p:txBody>
-          <a:bodyPr wrap="square" lIns="0" tIns="0" rIns="0" bIns="0" rtlCol="0" anchor="ctr"/>
-          <a:lstStyle/>
-          <a:p>
-            <a:pPr algn="ctr" indent="0" marL="0">
-              <a:buNone/>
-            </a:pPr>
-            <a:r>
-              <a:rPr lang="en-US" sz="900" b="1" dirty="0">
-                <a:solidFill>
-                  <a:srgbClr val="FF8E84"/>
-                </a:solidFill>
-                <a:latin typeface="IBM Plex Mono" pitchFamily="34" charset="0"/>
-                <a:ea typeface="IBM Plex Mono" pitchFamily="34" charset="-122"/>
-                <a:cs typeface="IBM Plex Mono" pitchFamily="34" charset="-120"/>
-              </a:rPr>
-              <a:t>필요 ~22%</a:t>
-            </a:r>
-            <a:endParaRPr lang="en-US" sz="900" dirty="0"/>
-          </a:p>
-        </p:txBody>
-      </p:sp>
-      <p:sp>
-        <p:nvSpPr>
-          <p:cNvPr id="60" name="Shape 58"/>
-          <p:cNvSpPr/>
-          <p:nvPr/>
-        </p:nvSpPr>
-        <p:spPr>
-          <a:xfrm>
-            <a:off x="566928" y="6236208"/>
-            <a:ext cx="9555480" cy="786384"/>
-          </a:xfrm>
-          <a:prstGeom prst="roundRect">
-            <a:avLst>
-              <a:gd name="adj" fmla="val 6977"/>
-            </a:avLst>
-          </a:prstGeom>
-          <a:solidFill>
-            <a:srgbClr val="211C18"/>
-          </a:solidFill>
-          <a:ln/>
-        </p:spPr>
-      </p:sp>
-      <p:sp>
-        <p:nvSpPr>
-          <p:cNvPr id="61" name="Text 59"/>
-          <p:cNvSpPr/>
-          <p:nvPr/>
-        </p:nvSpPr>
-        <p:spPr>
-          <a:xfrm>
-            <a:off x="841248" y="6327648"/>
-            <a:ext cx="5486400" cy="256032"/>
-          </a:xfrm>
-          <a:prstGeom prst="rect">
-            <a:avLst/>
-          </a:prstGeom>
-          <a:noFill/>
-          <a:ln/>
-        </p:spPr>
-        <p:txBody>
-          <a:bodyPr wrap="square" lIns="0" tIns="0" rIns="0" bIns="0" rtlCol="0" anchor="ctr"/>
-          <a:lstStyle/>
-          <a:p>
-            <a:pPr indent="0" marL="0">
-              <a:buNone/>
-            </a:pPr>
-            <a:r>
-              <a:rPr lang="en-US" sz="1300" b="1" dirty="0">
-                <a:solidFill>
-                  <a:srgbClr val="FF8E84"/>
-                </a:solidFill>
-                <a:latin typeface="Noto Serif KR" pitchFamily="34" charset="0"/>
-                <a:ea typeface="Noto Serif KR" pitchFamily="34" charset="-122"/>
-                <a:cs typeface="Noto Serif KR" pitchFamily="34" charset="-120"/>
-              </a:rPr>
-              <a:t>결론 — 마진이 딜의 성패를 가른다</a:t>
-            </a:r>
-            <a:endParaRPr lang="en-US" sz="1300" dirty="0"/>
-          </a:p>
-        </p:txBody>
-      </p:sp>
-      <p:sp>
-        <p:nvSpPr>
-          <p:cNvPr id="62" name="Text 60"/>
-          <p:cNvSpPr/>
-          <p:nvPr/>
-        </p:nvSpPr>
-        <p:spPr>
-          <a:xfrm>
-            <a:off x="841248" y="6583680"/>
-            <a:ext cx="9006840" cy="384048"/>
-          </a:xfrm>
-          <a:prstGeom prst="rect">
-            <a:avLst/>
-          </a:prstGeom>
-          <a:noFill/>
-          <a:ln/>
-        </p:spPr>
-        <p:txBody>
-          <a:bodyPr wrap="square" lIns="0" tIns="0" rIns="0" bIns="0" rtlCol="0" anchor="t"/>
-          <a:lstStyle/>
-          <a:p>
+              <a:t>19.3x→17.7x</a:t>
+            </a:r>
             <a:pPr indent="0" marL="0">
               <a:lnSpc>
-                <a:spcPct val="110000"/>
+                <a:spcPct val="115000"/>
               </a:lnSpc>
               <a:buNone/>
             </a:pPr>
@@ -8746,11 +10881,11 @@
                 <a:ea typeface="IBM Plex Sans KR" pitchFamily="34" charset="-122"/>
                 <a:cs typeface="IBM Plex Sans KR" pitchFamily="34" charset="-120"/>
               </a:rPr>
-              <a:t>현 9% 마진으로는 20% 희석 한도 내 지분조달 불가. 길은 둘 — 시장이 </a:t>
+              <a:t>, 둘 다면 </a:t>
             </a:r>
             <a:pPr indent="0" marL="0">
               <a:lnSpc>
-                <a:spcPct val="110000"/>
+                <a:spcPct val="115000"/>
               </a:lnSpc>
               <a:buNone/>
             </a:pPr>
@@ -8763,11 +10898,11 @@
                 <a:ea typeface="IBM Plex Sans KR" pitchFamily="34" charset="-122"/>
                 <a:cs typeface="IBM Plex Sans KR" pitchFamily="34" charset="-120"/>
               </a:rPr>
-              <a:t>~19x(peer 상단 초과)</a:t>
+              <a:t>16.6x</a:t>
             </a:r>
             <a:pPr indent="0" marL="0">
               <a:lnSpc>
-                <a:spcPct val="110000"/>
+                <a:spcPct val="115000"/>
               </a:lnSpc>
               <a:buNone/>
             </a:pPr>
@@ -8780,11 +10915,11 @@
                 <a:ea typeface="IBM Plex Sans KR" pitchFamily="34" charset="-122"/>
                 <a:cs typeface="IBM Plex Sans KR" pitchFamily="34" charset="-120"/>
               </a:rPr>
-              <a:t>를 주거나, </a:t>
+              <a:t>로 낮춰 peer(8~13x)에 근접시키나 밴드까진 못 미친다. 잔여 갭(~3.6x)은 </a:t>
             </a:r>
             <a:pPr indent="0" marL="0">
               <a:lnSpc>
-                <a:spcPct val="110000"/>
+                <a:spcPct val="115000"/>
               </a:lnSpc>
               <a:buNone/>
             </a:pPr>
@@ -8801,7 +10936,7 @@
             </a:r>
             <a:pPr indent="0" marL="0">
               <a:lnSpc>
-                <a:spcPct val="110000"/>
+                <a:spcPct val="115000"/>
               </a:lnSpc>
               <a:buNone/>
             </a:pPr>
@@ -8814,7 +10949,7 @@
                 <a:ea typeface="IBM Plex Sans KR" pitchFamily="34" charset="-122"/>
                 <a:cs typeface="IBM Plex Sans KR" pitchFamily="34" charset="-120"/>
               </a:rPr>
-              <a:t> 올려 정상 멀티플(≈8x)에서 $8.6bn EV를 정당화하거나. ★ 순차입금 $6.4bn · 모델 sweep</a:t>
+              <a:t> 올리거나 시장이 프리미엄 멀티플을 줄 때 닫힌다. ★ 순차입금 $6.4bn·부채비중 60% 고정</a:t>
             </a:r>
             <a:endParaRPr lang="en-US" sz="950" dirty="0"/>
           </a:p>
@@ -8822,7 +10957,7 @@
       </p:sp>
       <p:sp>
         <p:nvSpPr>
-          <p:cNvPr id="63" name="Shape 61"/>
+          <p:cNvPr id="56" name="Shape 53"/>
           <p:cNvSpPr/>
           <p:nvPr/>
         </p:nvSpPr>
@@ -8845,7 +10980,7 @@
       </p:sp>
       <p:sp>
         <p:nvSpPr>
-          <p:cNvPr id="64" name="Text 62"/>
+          <p:cNvPr id="57" name="Text 54"/>
           <p:cNvSpPr/>
           <p:nvPr/>
         </p:nvSpPr>
@@ -8884,7 +11019,7 @@
       </p:sp>
       <p:sp>
         <p:nvSpPr>
-          <p:cNvPr id="65" name="Text 63"/>
+          <p:cNvPr id="58" name="Text 55"/>
           <p:cNvSpPr/>
           <p:nvPr/>
         </p:nvSpPr>

--- a/sk_valuation_project/output/SK_Funding_v3_editable.pptx
+++ b/sk_valuation_project/output/SK_Funding_v3_editable.pptx
@@ -2025,7 +2025,7 @@
                           <a:ea typeface="IBM Plex Sans KR" pitchFamily="34" charset="-122"/>
                           <a:cs typeface="IBM Plex Sans KR" pitchFamily="34" charset="-120"/>
                         </a:rPr>
-                        <a:t>명판 / 가동(COD)</a:t>
+                        <a:t>명판 / 가동률(run-rate)</a:t>
                       </a:r>
                       <a:endParaRPr lang="en-US" sz="950" dirty="0">
                         <a:latin typeface="IBM Plex Sans KR" charset="0"/>
@@ -2087,13 +2087,13 @@
                       <a:r>
                         <a:rPr lang="en-US" sz="950" b="1" dirty="0">
                           <a:solidFill>
-                            <a:srgbClr val="1B1714"/>
+                            <a:srgbClr val="1E7A4D"/>
                           </a:solidFill>
                           <a:latin typeface="IBM Plex Mono" pitchFamily="34" charset="0"/>
                           <a:ea typeface="IBM Plex Mono" pitchFamily="34" charset="-122"/>
                           <a:cs typeface="IBM Plex Mono" pitchFamily="34" charset="-120"/>
                         </a:rPr>
-                        <a:t>21.2 GWh / 2027~28</a:t>
+                        <a:t>21.2 GWh / 85%</a:t>
                       </a:r>
                       <a:endParaRPr lang="en-US" sz="950" dirty="0">
                         <a:latin typeface="IBM Plex Mono" charset="0"/>
@@ -2369,7 +2369,7 @@
                           <a:ea typeface="IBM Plex Mono" pitchFamily="34" charset="-122"/>
                           <a:cs typeface="IBM Plex Mono" pitchFamily="34" charset="-120"/>
                         </a:rPr>
-                        <a:t>~$2.2bn</a:t>
+                        <a:t>~$2.7bn</a:t>
                       </a:r>
                       <a:endParaRPr lang="en-US" sz="950" dirty="0">
                         <a:latin typeface="IBM Plex Mono" charset="0"/>
@@ -3003,7 +3003,7 @@
                           <a:ea typeface="IBM Plex Sans KR" pitchFamily="34" charset="-122"/>
                           <a:cs typeface="IBM Plex Sans KR" pitchFamily="34" charset="-120"/>
                         </a:rPr>
-                        <a:t>명판 / 가동(COD)</a:t>
+                        <a:t>명판 / 가동률(run-rate)</a:t>
                       </a:r>
                       <a:endParaRPr lang="en-US" sz="950" dirty="0">
                         <a:latin typeface="IBM Plex Sans KR" charset="0"/>
@@ -3065,13 +3065,13 @@
                       <a:r>
                         <a:rPr lang="en-US" sz="950" b="1" dirty="0">
                           <a:solidFill>
-                            <a:srgbClr val="1B1714"/>
+                            <a:srgbClr val="1E7A4D"/>
                           </a:solidFill>
                           <a:latin typeface="IBM Plex Mono" pitchFamily="34" charset="0"/>
                           <a:ea typeface="IBM Plex Mono" pitchFamily="34" charset="-122"/>
                           <a:cs typeface="IBM Plex Mono" pitchFamily="34" charset="-120"/>
                         </a:rPr>
-                        <a:t>29.7 GWh / 2028</a:t>
+                        <a:t>29.7 GWh / 82%</a:t>
                       </a:r>
                       <a:endParaRPr lang="en-US" sz="950" dirty="0">
                         <a:latin typeface="IBM Plex Mono" charset="0"/>
@@ -3347,7 +3347,7 @@
                           <a:ea typeface="IBM Plex Mono" pitchFamily="34" charset="-122"/>
                           <a:cs typeface="IBM Plex Mono" pitchFamily="34" charset="-120"/>
                         </a:rPr>
-                        <a:t>~$2.7bn</a:t>
+                        <a:t>~$3.5bn</a:t>
                       </a:r>
                       <a:endParaRPr lang="en-US" sz="950" dirty="0">
                         <a:latin typeface="IBM Plex Mono" charset="0"/>
@@ -4108,7 +4108,7 @@
                 <a:ea typeface="IBM Plex Sans KR" pitchFamily="34" charset="-122"/>
                 <a:cs typeface="IBM Plex Sans KR" pitchFamily="34" charset="-120"/>
               </a:rPr>
-              <a:t>DC블록 ASP $155/kWh 사업화 — 셀+모듈+컨테이너</a:t>
+              <a:t>DC센터 수요 확보 → 가동률 85% (BA)·82% (OT) run-rate</a:t>
             </a:r>
             <a:endParaRPr lang="en-US" sz="1050" dirty="0"/>
           </a:p>
@@ -4186,7 +4186,7 @@
                 <a:ea typeface="IBM Plex Sans KR" pitchFamily="34" charset="-122"/>
                 <a:cs typeface="IBM Plex Sans KR" pitchFamily="34" charset="-120"/>
               </a:rPr>
-              <a:t>SKBA pre-SOP 기저 $0.2bn(2026~) · run-rate ex-AMPC $442mm 유지</a:t>
+              <a:t>run-rate ex-AMPC EBITDA $554mm (BA 241 + OT 313, 9% 마진)</a:t>
             </a:r>
             <a:endParaRPr lang="en-US" sz="1050" dirty="0"/>
           </a:p>
@@ -4264,7 +4264,7 @@
                 <a:ea typeface="IBM Plex Sans KR" pitchFamily="34" charset="-122"/>
                 <a:cs typeface="IBM Plex Sans KR" pitchFamily="34" charset="-120"/>
               </a:rPr>
-              <a:t>DCF EV ≈ $4.0bn (기저 조기현금 반영·밴드 $3.5~4.5bn)</a:t>
+              <a:t>DCF EV ≈ $5.0bn (가동률 상향 반영·pre-SOP 기저 $0.2bn 포함)</a:t>
             </a:r>
             <a:endParaRPr lang="en-US" sz="1050" dirty="0"/>
           </a:p>
@@ -4558,7 +4558,7 @@
                 <a:ea typeface="Space Grotesk" pitchFamily="34" charset="-122"/>
                 <a:cs typeface="Space Grotesk" pitchFamily="34" charset="-120"/>
               </a:rPr>
-              <a:t>442</a:t>
+              <a:t>554</a:t>
             </a:r>
             <a:pPr indent="0" marL="0">
               <a:buNone/>
@@ -4788,7 +4788,7 @@
                 <a:ea typeface="Space Grotesk" pitchFamily="34" charset="-122"/>
                 <a:cs typeface="Space Grotesk" pitchFamily="34" charset="-120"/>
               </a:rPr>
-              <a:t>4.0</a:t>
+              <a:t>5.0</a:t>
             </a:r>
             <a:pPr indent="0" marL="0">
               <a:buNone/>
@@ -7122,7 +7122,7 @@
                 <a:ea typeface="IBM Plex Sans KR" pitchFamily="34" charset="-122"/>
                 <a:cs typeface="IBM Plex Sans KR" pitchFamily="34" charset="-120"/>
               </a:rPr>
-              <a:t>공급 셀 (개조 후)</a:t>
+              <a:t>가동률 (run-rate) ★</a:t>
             </a:r>
             <a:endParaRPr lang="en-US" sz="950" dirty="0"/>
           </a:p>
@@ -7155,13 +7155,13 @@
             <a:r>
               <a:rPr lang="en-US" sz="1000" b="1" dirty="0">
                 <a:solidFill>
-                  <a:srgbClr val="1B1714"/>
+                  <a:srgbClr val="1E7A4D"/>
                 </a:solidFill>
                 <a:latin typeface="IBM Plex Mono" pitchFamily="34" charset="0"/>
                 <a:ea typeface="IBM Plex Mono" pitchFamily="34" charset="-122"/>
                 <a:cs typeface="IBM Plex Mono" pitchFamily="34" charset="-120"/>
               </a:rPr>
-              <a:t>파우치+각형</a:t>
+              <a:t>85%/82% DC수요</a:t>
             </a:r>
             <a:endParaRPr lang="en-US" sz="1000" dirty="0"/>
           </a:p>
@@ -7357,13 +7357,13 @@
             <a:r>
               <a:rPr lang="en-US" sz="1000" b="1" dirty="0">
                 <a:solidFill>
-                  <a:srgbClr val="1B1714"/>
+                  <a:srgbClr val="1E7A4D"/>
                 </a:solidFill>
                 <a:latin typeface="IBM Plex Mono" pitchFamily="34" charset="0"/>
                 <a:ea typeface="IBM Plex Mono" pitchFamily="34" charset="-122"/>
                 <a:cs typeface="IBM Plex Mono" pitchFamily="34" charset="-120"/>
               </a:rPr>
-              <a:t>$442mm</a:t>
+              <a:t>$554mm</a:t>
             </a:r>
             <a:endParaRPr lang="en-US" sz="1000" dirty="0"/>
           </a:p>
@@ -8654,7 +8654,7 @@
                           <a:ea typeface="Space Grotesk" pitchFamily="34" charset="-122"/>
                           <a:cs typeface="Space Grotesk" pitchFamily="34" charset="-120"/>
                         </a:rPr>
-                        <a:t>19.3x</a:t>
+                        <a:t>15.4x</a:t>
                       </a:r>
                       <a:endParaRPr lang="en-US" sz="1200" dirty="0">
                         <a:latin typeface="Space Grotesk" charset="0"/>
@@ -8722,7 +8722,7 @@
                           <a:ea typeface="IBM Plex Mono" pitchFamily="34" charset="-122"/>
                           <a:cs typeface="IBM Plex Mono" pitchFamily="34" charset="-120"/>
                         </a:rPr>
-                        <a:t>+6.3x</a:t>
+                        <a:t>+2.4x</a:t>
                       </a:r>
                       <a:endParaRPr lang="en-US" sz="800" dirty="0">
                         <a:latin typeface="IBM Plex Mono" charset="0"/>
@@ -9064,7 +9064,7 @@
                           <a:ea typeface="Space Grotesk" pitchFamily="34" charset="-122"/>
                           <a:cs typeface="Space Grotesk" pitchFamily="34" charset="-120"/>
                         </a:rPr>
-                        <a:t>17.7x</a:t>
+                        <a:t>14.1x</a:t>
                       </a:r>
                       <a:endParaRPr lang="en-US" sz="1200" dirty="0">
                         <a:latin typeface="Space Grotesk" charset="0"/>
@@ -9132,7 +9132,7 @@
                           <a:ea typeface="IBM Plex Mono" pitchFamily="34" charset="-122"/>
                           <a:cs typeface="IBM Plex Mono" pitchFamily="34" charset="-120"/>
                         </a:rPr>
-                        <a:t>+4.7x</a:t>
+                        <a:t>+1.1x</a:t>
                       </a:r>
                       <a:endParaRPr lang="en-US" sz="800" dirty="0">
                         <a:latin typeface="IBM Plex Mono" charset="0"/>
@@ -9474,7 +9474,7 @@
                           <a:ea typeface="Space Grotesk" pitchFamily="34" charset="-122"/>
                           <a:cs typeface="Space Grotesk" pitchFamily="34" charset="-120"/>
                         </a:rPr>
-                        <a:t>17.7x</a:t>
+                        <a:t>14.1x</a:t>
                       </a:r>
                       <a:endParaRPr lang="en-US" sz="1200" dirty="0">
                         <a:latin typeface="Space Grotesk" charset="0"/>
@@ -9542,7 +9542,7 @@
                           <a:ea typeface="IBM Plex Mono" pitchFamily="34" charset="-122"/>
                           <a:cs typeface="IBM Plex Mono" pitchFamily="34" charset="-120"/>
                         </a:rPr>
-                        <a:t>+4.7x</a:t>
+                        <a:t>+1.1x</a:t>
                       </a:r>
                       <a:endParaRPr lang="en-US" sz="800" dirty="0">
                         <a:latin typeface="IBM Plex Mono" charset="0"/>
@@ -9878,13 +9878,13 @@
                       <a:r>
                         <a:rPr lang="en-US" sz="1200" b="1" dirty="0">
                           <a:solidFill>
-                            <a:srgbClr val="C1121F"/>
+                            <a:srgbClr val="1E7A4D"/>
                           </a:solidFill>
                           <a:latin typeface="Space Grotesk" pitchFamily="34" charset="0"/>
                           <a:ea typeface="Space Grotesk" pitchFamily="34" charset="-122"/>
                           <a:cs typeface="Space Grotesk" pitchFamily="34" charset="-120"/>
                         </a:rPr>
-                        <a:t>16.6x</a:t>
+                        <a:t>13.3x</a:t>
                       </a:r>
                       <a:endParaRPr lang="en-US" sz="1200" dirty="0">
                         <a:latin typeface="Space Grotesk" charset="0"/>
@@ -9946,13 +9946,13 @@
                       <a:r>
                         <a:rPr lang="en-US" sz="800" b="1" dirty="0">
                           <a:solidFill>
-                            <a:srgbClr val="6F6960"/>
+                            <a:srgbClr val="1E7A4D"/>
                           </a:solidFill>
                           <a:latin typeface="IBM Plex Mono" pitchFamily="34" charset="0"/>
                           <a:ea typeface="IBM Plex Mono" pitchFamily="34" charset="-122"/>
                           <a:cs typeface="IBM Plex Mono" pitchFamily="34" charset="-120"/>
                         </a:rPr>
-                        <a:t>+3.6x</a:t>
+                        <a:t>+0.3x</a:t>
                       </a:r>
                       <a:endParaRPr lang="en-US" sz="800" dirty="0">
                         <a:latin typeface="IBM Plex Mono" charset="0"/>
@@ -10079,7 +10079,7 @@
         <p:spPr>
           <a:xfrm>
             <a:off x="4178808" y="4992624"/>
-            <a:ext cx="2228850" cy="164592"/>
+            <a:ext cx="2971800" cy="164592"/>
           </a:xfrm>
           <a:prstGeom prst="rect">
             <a:avLst/>
@@ -10104,7 +10104,7 @@
         <p:spPr>
           <a:xfrm>
             <a:off x="4178808" y="4764024"/>
-            <a:ext cx="2228850" cy="182880"/>
+            <a:ext cx="2971800" cy="182880"/>
           </a:xfrm>
           <a:prstGeom prst="rect">
             <a:avLst/>
@@ -10142,8 +10142,8 @@
         </p:nvSpPr>
         <p:spPr>
           <a:xfrm>
-            <a:off x="8012430" y="4855464"/>
-            <a:ext cx="1203579" cy="0"/>
+            <a:off x="7328916" y="4855464"/>
+            <a:ext cx="1248156" cy="0"/>
           </a:xfrm>
           <a:prstGeom prst="line">
             <a:avLst/>
@@ -10167,8 +10167,8 @@
         </p:nvSpPr>
         <p:spPr>
           <a:xfrm>
-            <a:off x="7738110" y="4672584"/>
-            <a:ext cx="1752219" cy="164592"/>
+            <a:off x="7054596" y="4672584"/>
+            <a:ext cx="1796796" cy="164592"/>
           </a:xfrm>
           <a:prstGeom prst="rect">
             <a:avLst/>
@@ -10192,7 +10192,7 @@
                 <a:ea typeface="IBM Plex Mono" pitchFamily="34" charset="-122"/>
                 <a:cs typeface="IBM Plex Mono" pitchFamily="34" charset="-120"/>
               </a:rPr>
-              <a:t>조달 레버 −2.7x</a:t>
+              <a:t>조달 레버 −2.1x</a:t>
             </a:r>
             <a:endParaRPr lang="en-US" sz="700" dirty="0"/>
           </a:p>
@@ -10206,7 +10206,7 @@
         </p:nvSpPr>
         <p:spPr>
           <a:xfrm>
-            <a:off x="9170289" y="5029200"/>
+            <a:off x="8531352" y="5029200"/>
             <a:ext cx="91440" cy="91440"/>
           </a:xfrm>
           <a:prstGeom prst="ellipse">
@@ -10226,7 +10226,7 @@
         </p:nvSpPr>
         <p:spPr>
           <a:xfrm>
-            <a:off x="8758809" y="5166360"/>
+            <a:off x="8119872" y="5166360"/>
             <a:ext cx="914400" cy="182880"/>
           </a:xfrm>
           <a:prstGeom prst="rect">
@@ -10265,7 +10265,7 @@
         </p:nvSpPr>
         <p:spPr>
           <a:xfrm>
-            <a:off x="8758809" y="5056632"/>
+            <a:off x="8119872" y="5056632"/>
             <a:ext cx="914400" cy="182880"/>
           </a:xfrm>
           <a:prstGeom prst="rect">
@@ -10290,7 +10290,7 @@
                 <a:ea typeface="IBM Plex Mono" pitchFamily="34" charset="-122"/>
                 <a:cs typeface="IBM Plex Mono" pitchFamily="34" charset="-120"/>
               </a:rPr>
-              <a:t>19.3x</a:t>
+              <a:t>15.4x</a:t>
             </a:r>
             <a:endParaRPr lang="en-US" sz="800" dirty="0"/>
           </a:p>
@@ -10304,7 +10304,7 @@
         </p:nvSpPr>
         <p:spPr>
           <a:xfrm>
-            <a:off x="8457057" y="5029200"/>
+            <a:off x="7758684" y="5029200"/>
             <a:ext cx="91440" cy="91440"/>
           </a:xfrm>
           <a:prstGeom prst="ellipse">
@@ -10324,7 +10324,7 @@
         </p:nvSpPr>
         <p:spPr>
           <a:xfrm>
-            <a:off x="8045577" y="5166360"/>
+            <a:off x="7347204" y="5166360"/>
             <a:ext cx="914400" cy="182880"/>
           </a:xfrm>
           <a:prstGeom prst="rect">
@@ -10363,7 +10363,7 @@
         </p:nvSpPr>
         <p:spPr>
           <a:xfrm>
-            <a:off x="8045577" y="5056632"/>
+            <a:off x="7347204" y="5056632"/>
             <a:ext cx="914400" cy="182880"/>
           </a:xfrm>
           <a:prstGeom prst="rect">
@@ -10388,7 +10388,7 @@
                 <a:ea typeface="IBM Plex Mono" pitchFamily="34" charset="-122"/>
                 <a:cs typeface="IBM Plex Mono" pitchFamily="34" charset="-120"/>
               </a:rPr>
-              <a:t>17.7x</a:t>
+              <a:t>14.1x</a:t>
             </a:r>
             <a:endParaRPr lang="en-US" sz="800" dirty="0"/>
           </a:p>
@@ -10402,14 +10402,14 @@
         </p:nvSpPr>
         <p:spPr>
           <a:xfrm>
-            <a:off x="7966710" y="5029200"/>
+            <a:off x="7283196" y="5029200"/>
             <a:ext cx="91440" cy="91440"/>
           </a:xfrm>
           <a:prstGeom prst="ellipse">
             <a:avLst/>
           </a:prstGeom>
           <a:solidFill>
-            <a:srgbClr val="8A5A55"/>
+            <a:srgbClr val="1E7A4D"/>
           </a:solidFill>
           <a:ln/>
         </p:spPr>
@@ -10422,7 +10422,7 @@
         </p:nvSpPr>
         <p:spPr>
           <a:xfrm>
-            <a:off x="7555230" y="5166360"/>
+            <a:off x="6871716" y="5166360"/>
             <a:ext cx="914400" cy="182880"/>
           </a:xfrm>
           <a:prstGeom prst="rect">
@@ -10441,7 +10441,7 @@
             <a:r>
               <a:rPr lang="en-US" sz="750" b="1" dirty="0">
                 <a:solidFill>
-                  <a:srgbClr val="8A5A55"/>
+                  <a:srgbClr val="1E7A4D"/>
                 </a:solidFill>
                 <a:latin typeface="IBM Plex Mono" pitchFamily="34" charset="0"/>
                 <a:ea typeface="IBM Plex Mono" pitchFamily="34" charset="-122"/>
@@ -10461,7 +10461,7 @@
         </p:nvSpPr>
         <p:spPr>
           <a:xfrm>
-            <a:off x="7555230" y="5056632"/>
+            <a:off x="6871716" y="5056632"/>
             <a:ext cx="914400" cy="182880"/>
           </a:xfrm>
           <a:prstGeom prst="rect">
@@ -10480,13 +10480,13 @@
             <a:r>
               <a:rPr lang="en-US" sz="800" b="1" dirty="0">
                 <a:solidFill>
-                  <a:srgbClr val="8A5A55"/>
+                  <a:srgbClr val="1E7A4D"/>
                 </a:solidFill>
                 <a:latin typeface="IBM Plex Mono" pitchFamily="34" charset="0"/>
                 <a:ea typeface="IBM Plex Mono" pitchFamily="34" charset="-122"/>
                 <a:cs typeface="IBM Plex Mono" pitchFamily="34" charset="-120"/>
               </a:rPr>
-              <a:t>16.6x</a:t>
+              <a:t>13.3x</a:t>
             </a:r>
             <a:endParaRPr lang="en-US" sz="800" dirty="0"/>
           </a:p>
@@ -10539,7 +10539,7 @@
         </p:nvSpPr>
         <p:spPr>
           <a:xfrm>
-            <a:off x="6133338" y="5330952"/>
+            <a:off x="5687568" y="5330952"/>
             <a:ext cx="548640" cy="164592"/>
           </a:xfrm>
           <a:prstGeom prst="rect">
@@ -10564,7 +10564,7 @@
                 <a:ea typeface="IBM Plex Mono" pitchFamily="34" charset="-122"/>
                 <a:cs typeface="IBM Plex Mono" pitchFamily="34" charset="-120"/>
               </a:rPr>
-              <a:t>13x</a:t>
+              <a:t>11x</a:t>
             </a:r>
             <a:endParaRPr lang="en-US" sz="700" dirty="0"/>
           </a:p>
@@ -10578,7 +10578,7 @@
         </p:nvSpPr>
         <p:spPr>
           <a:xfrm>
-            <a:off x="7470648" y="5330952"/>
+            <a:off x="6876288" y="5330952"/>
             <a:ext cx="548640" cy="164592"/>
           </a:xfrm>
           <a:prstGeom prst="rect">
@@ -10603,7 +10603,7 @@
                 <a:ea typeface="IBM Plex Mono" pitchFamily="34" charset="-122"/>
                 <a:cs typeface="IBM Plex Mono" pitchFamily="34" charset="-120"/>
               </a:rPr>
-              <a:t>16x</a:t>
+              <a:t>13x</a:t>
             </a:r>
             <a:endParaRPr lang="en-US" sz="700" dirty="0"/>
           </a:p>
@@ -10617,7 +10617,7 @@
         </p:nvSpPr>
         <p:spPr>
           <a:xfrm>
-            <a:off x="9253728" y="5330952"/>
+            <a:off x="8065008" y="5330952"/>
             <a:ext cx="548640" cy="164592"/>
           </a:xfrm>
           <a:prstGeom prst="rect">
@@ -10642,7 +10642,7 @@
                 <a:ea typeface="IBM Plex Mono" pitchFamily="34" charset="-122"/>
                 <a:cs typeface="IBM Plex Mono" pitchFamily="34" charset="-120"/>
               </a:rPr>
-              <a:t>20x</a:t>
+              <a:t>15x</a:t>
             </a:r>
             <a:endParaRPr lang="en-US" sz="700" dirty="0"/>
           </a:p>
@@ -10650,7 +10650,46 @@
       </p:sp>
       <p:sp>
         <p:nvSpPr>
-          <p:cNvPr id="53" name="Shape 50"/>
+          <p:cNvPr id="53" name="Text 50"/>
+          <p:cNvSpPr/>
+          <p:nvPr/>
+        </p:nvSpPr>
+        <p:spPr>
+          <a:xfrm>
+            <a:off x="9253728" y="5330952"/>
+            <a:ext cx="548640" cy="164592"/>
+          </a:xfrm>
+          <a:prstGeom prst="rect">
+            <a:avLst/>
+          </a:prstGeom>
+          <a:noFill/>
+          <a:ln/>
+        </p:spPr>
+        <p:txBody>
+          <a:bodyPr wrap="square" lIns="0" tIns="0" rIns="0" bIns="0" rtlCol="0" anchor="ctr"/>
+          <a:lstStyle/>
+          <a:p>
+            <a:pPr algn="ctr" indent="0" marL="0">
+              <a:buNone/>
+            </a:pPr>
+            <a:r>
+              <a:rPr lang="en-US" sz="700" dirty="0">
+                <a:solidFill>
+                  <a:srgbClr val="9A847C"/>
+                </a:solidFill>
+                <a:latin typeface="IBM Plex Mono" pitchFamily="34" charset="0"/>
+                <a:ea typeface="IBM Plex Mono" pitchFamily="34" charset="-122"/>
+                <a:cs typeface="IBM Plex Mono" pitchFamily="34" charset="-120"/>
+              </a:rPr>
+              <a:t>17x</a:t>
+            </a:r>
+            <a:endParaRPr lang="en-US" sz="700" dirty="0"/>
+          </a:p>
+        </p:txBody>
+      </p:sp>
+      <p:sp>
+        <p:nvSpPr>
+          <p:cNvPr id="54" name="Shape 51"/>
           <p:cNvSpPr/>
           <p:nvPr/>
         </p:nvSpPr>
@@ -10672,7 +10711,7 @@
       </p:sp>
       <p:sp>
         <p:nvSpPr>
-          <p:cNvPr id="54" name="Text 51"/>
+          <p:cNvPr id="55" name="Text 52"/>
           <p:cNvSpPr/>
           <p:nvPr/>
         </p:nvSpPr>
@@ -10703,7 +10742,7 @@
                 <a:ea typeface="Noto Serif KR" pitchFamily="34" charset="-122"/>
                 <a:cs typeface="Noto Serif KR" pitchFamily="34" charset="-120"/>
               </a:rPr>
-              <a:t>결론 — 조달 레버는 갭을 좁히지만, 밴드 진입은 마진이 결정한다</a:t>
+              <a:t>결론 — 가동률 85%가 멀티플을 peer 상단까지 끌어내린다</a:t>
             </a:r>
             <a:endParaRPr lang="en-US" sz="1300" dirty="0"/>
           </a:p>
@@ -10711,7 +10750,7 @@
       </p:sp>
       <p:sp>
         <p:nvSpPr>
-          <p:cNvPr id="55" name="Text 52"/>
+          <p:cNvPr id="56" name="Text 53"/>
           <p:cNvSpPr/>
           <p:nvPr/>
         </p:nvSpPr>
@@ -10745,7 +10784,7 @@
                 <a:ea typeface="IBM Plex Sans KR" pitchFamily="34" charset="-122"/>
                 <a:cs typeface="IBM Plex Sans KR" pitchFamily="34" charset="-120"/>
               </a:rPr>
-              <a:t>run-rate ex-AMPC EBITDA </a:t>
+              <a:t>DC센터 수요로 </a:t>
             </a:r>
             <a:pPr indent="0" marL="0">
               <a:lnSpc>
@@ -10762,7 +10801,7 @@
                 <a:ea typeface="IBM Plex Sans KR" pitchFamily="34" charset="-122"/>
                 <a:cs typeface="IBM Plex Sans KR" pitchFamily="34" charset="-120"/>
               </a:rPr>
-              <a:t>$442mm 유지</a:t>
+              <a:t>가동률 85%/82%</a:t>
             </a:r>
             <a:pPr indent="0" marL="0">
               <a:lnSpc>
@@ -10779,7 +10818,7 @@
                 <a:ea typeface="IBM Plex Sans KR" pitchFamily="34" charset="-122"/>
                 <a:cs typeface="IBM Plex Sans KR" pitchFamily="34" charset="-120"/>
               </a:rPr>
-              <a:t> 기준(기저 $0.2bn은 pre-SOP 조기현금·EV 방어용, run-rate 불변). </a:t>
+              <a:t> 확보 시 run-rate ex-AMPC EBITDA가 </a:t>
             </a:r>
             <a:pPr indent="0" marL="0">
               <a:lnSpc>
@@ -10796,7 +10835,7 @@
                 <a:ea typeface="IBM Plex Sans KR" pitchFamily="34" charset="-122"/>
                 <a:cs typeface="IBM Plex Sans KR" pitchFamily="34" charset="-120"/>
               </a:rPr>
-              <a:t>그랜트 20%(①)</a:t>
+              <a:t>$442→$554mm</a:t>
             </a:r>
             <a:pPr indent="0" marL="0">
               <a:lnSpc>
@@ -10813,7 +10852,7 @@
                 <a:ea typeface="IBM Plex Sans KR" pitchFamily="34" charset="-122"/>
                 <a:cs typeface="IBM Plex Sans KR" pitchFamily="34" charset="-120"/>
               </a:rPr>
-              <a:t>·</a:t>
+              <a:t>로 올라 BASE 멀티플이 </a:t>
             </a:r>
             <a:pPr indent="0" marL="0">
               <a:lnSpc>
@@ -10824,13 +10863,13 @@
             <a:r>
               <a:rPr lang="en-US" sz="950" b="1" dirty="0">
                 <a:solidFill>
-                  <a:srgbClr val="86D6A6"/>
+                  <a:srgbClr val="FF8E84"/>
                 </a:solidFill>
                 <a:latin typeface="IBM Plex Sans KR" pitchFamily="34" charset="0"/>
                 <a:ea typeface="IBM Plex Sans KR" pitchFamily="34" charset="-122"/>
                 <a:cs typeface="IBM Plex Sans KR" pitchFamily="34" charset="-120"/>
               </a:rPr>
-              <a:t>CoC 해제 30% 희석(②)</a:t>
+              <a:t>19.3x→15.4x</a:t>
             </a:r>
             <a:pPr indent="0" marL="0">
               <a:lnSpc>
@@ -10847,7 +10886,7 @@
                 <a:ea typeface="IBM Plex Sans KR" pitchFamily="34" charset="-122"/>
                 <a:cs typeface="IBM Plex Sans KR" pitchFamily="34" charset="-120"/>
               </a:rPr>
-              <a:t>은 각각 implied 멀티플을 </a:t>
+              <a:t>. 여기에 </a:t>
             </a:r>
             <a:pPr indent="0" marL="0">
               <a:lnSpc>
@@ -10858,13 +10897,13 @@
             <a:r>
               <a:rPr lang="en-US" sz="950" b="1" dirty="0">
                 <a:solidFill>
-                  <a:srgbClr val="FF8E84"/>
+                  <a:srgbClr val="86D6A6"/>
                 </a:solidFill>
                 <a:latin typeface="IBM Plex Sans KR" pitchFamily="34" charset="0"/>
                 <a:ea typeface="IBM Plex Sans KR" pitchFamily="34" charset="-122"/>
                 <a:cs typeface="IBM Plex Sans KR" pitchFamily="34" charset="-120"/>
               </a:rPr>
-              <a:t>19.3x→17.7x</a:t>
+              <a:t>그랜트 20%(①)</a:t>
             </a:r>
             <a:pPr indent="0" marL="0">
               <a:lnSpc>
@@ -10881,7 +10920,7 @@
                 <a:ea typeface="IBM Plex Sans KR" pitchFamily="34" charset="-122"/>
                 <a:cs typeface="IBM Plex Sans KR" pitchFamily="34" charset="-120"/>
               </a:rPr>
-              <a:t>, 둘 다면 </a:t>
+              <a:t> 또는 </a:t>
             </a:r>
             <a:pPr indent="0" marL="0">
               <a:lnSpc>
@@ -10892,13 +10931,13 @@
             <a:r>
               <a:rPr lang="en-US" sz="950" b="1" dirty="0">
                 <a:solidFill>
-                  <a:srgbClr val="FF8E84"/>
+                  <a:srgbClr val="86D6A6"/>
                 </a:solidFill>
                 <a:latin typeface="IBM Plex Sans KR" pitchFamily="34" charset="0"/>
                 <a:ea typeface="IBM Plex Sans KR" pitchFamily="34" charset="-122"/>
                 <a:cs typeface="IBM Plex Sans KR" pitchFamily="34" charset="-120"/>
               </a:rPr>
-              <a:t>16.6x</a:t>
+              <a:t>CoC 해제 30% 희석(②)</a:t>
             </a:r>
             <a:pPr indent="0" marL="0">
               <a:lnSpc>
@@ -10915,7 +10954,7 @@
                 <a:ea typeface="IBM Plex Sans KR" pitchFamily="34" charset="-122"/>
                 <a:cs typeface="IBM Plex Sans KR" pitchFamily="34" charset="-120"/>
               </a:rPr>
-              <a:t>로 낮춰 peer(8~13x)에 근접시키나 밴드까진 못 미친다. 잔여 갭(~3.6x)은 </a:t>
+              <a:t>은 각각 14.1x, 둘 다면 </a:t>
             </a:r>
             <a:pPr indent="0" marL="0">
               <a:lnSpc>
@@ -10932,7 +10971,7 @@
                 <a:ea typeface="IBM Plex Sans KR" pitchFamily="34" charset="-122"/>
                 <a:cs typeface="IBM Plex Sans KR" pitchFamily="34" charset="-120"/>
               </a:rPr>
-              <a:t>ex-AMPC EBITDA를 ~22%로</a:t>
+              <a:t>13.3x — peer 상단(13x)에 사실상 안착</a:t>
             </a:r>
             <a:pPr indent="0" marL="0">
               <a:lnSpc>
@@ -10949,7 +10988,7 @@
                 <a:ea typeface="IBM Plex Sans KR" pitchFamily="34" charset="-122"/>
                 <a:cs typeface="IBM Plex Sans KR" pitchFamily="34" charset="-120"/>
               </a:rPr>
-              <a:t> 올리거나 시장이 프리미엄 멀티플을 줄 때 닫힌다. ★ 순차입금 $6.4bn·부채비중 60% 고정</a:t>
+              <a:t> (잔여 +0.3x). 남는 미세 갭은 마진(ex-AMPC EBITDA)이나 시장 프리미엄이 닫는다. ★ 순차입금 $6.4bn·부채비중 60% 고정</a:t>
             </a:r>
             <a:endParaRPr lang="en-US" sz="950" dirty="0"/>
           </a:p>
@@ -10957,7 +10996,7 @@
       </p:sp>
       <p:sp>
         <p:nvSpPr>
-          <p:cNvPr id="56" name="Shape 53"/>
+          <p:cNvPr id="57" name="Shape 54"/>
           <p:cNvSpPr/>
           <p:nvPr/>
         </p:nvSpPr>
@@ -10980,7 +11019,7 @@
       </p:sp>
       <p:sp>
         <p:nvSpPr>
-          <p:cNvPr id="57" name="Text 54"/>
+          <p:cNvPr id="58" name="Text 55"/>
           <p:cNvSpPr/>
           <p:nvPr/>
         </p:nvSpPr>
@@ -11019,7 +11058,7 @@
       </p:sp>
       <p:sp>
         <p:nvSpPr>
-          <p:cNvPr id="58" name="Text 55"/>
+          <p:cNvPr id="59" name="Text 56"/>
           <p:cNvSpPr/>
           <p:nvPr/>
         </p:nvSpPr>

--- a/sk_valuation_project/output/SK_Funding_v3_editable.pptx
+++ b/sk_valuation_project/output/SK_Funding_v3_editable.pptx
@@ -4264,7 +4264,7 @@
                 <a:ea typeface="IBM Plex Sans KR" pitchFamily="34" charset="-122"/>
                 <a:cs typeface="IBM Plex Sans KR" pitchFamily="34" charset="-120"/>
               </a:rPr>
-              <a:t>DCF EV ≈ $5.0bn (가동률 상향 반영·pre-SOP 기저 $0.2bn 포함)</a:t>
+              <a:t>DCF EV ≈ $5.0bn · WACC 10.5% / 영구성장(TGR) 2.0% / Ke 13%</a:t>
             </a:r>
             <a:endParaRPr lang="en-US" sz="1050" dirty="0"/>
           </a:p>
@@ -6996,8 +6996,8 @@
         </p:nvSpPr>
         <p:spPr>
           <a:xfrm>
-            <a:off x="566928" y="1901952"/>
-            <a:ext cx="1828800" cy="329184"/>
+            <a:off x="566928" y="1883664"/>
+            <a:ext cx="1828800" cy="274320"/>
           </a:xfrm>
           <a:prstGeom prst="rect">
             <a:avLst/>
@@ -7035,8 +7035,8 @@
         </p:nvSpPr>
         <p:spPr>
           <a:xfrm>
-            <a:off x="2121408" y="1901952"/>
-            <a:ext cx="1645920" cy="329184"/>
+            <a:off x="2029968" y="1883664"/>
+            <a:ext cx="1737360" cy="274320"/>
           </a:xfrm>
           <a:prstGeom prst="rect">
             <a:avLst/>
@@ -7074,7 +7074,7 @@
         </p:nvSpPr>
         <p:spPr>
           <a:xfrm>
-            <a:off x="566928" y="2240280"/>
+            <a:off x="566928" y="2167128"/>
             <a:ext cx="3200400" cy="0"/>
           </a:xfrm>
           <a:prstGeom prst="line">
@@ -7097,8 +7097,8 @@
         </p:nvSpPr>
         <p:spPr>
           <a:xfrm>
-            <a:off x="566928" y="2267712"/>
-            <a:ext cx="1828800" cy="329184"/>
+            <a:off x="566928" y="2189988"/>
+            <a:ext cx="1828800" cy="274320"/>
           </a:xfrm>
           <a:prstGeom prst="rect">
             <a:avLst/>
@@ -7136,8 +7136,8 @@
         </p:nvSpPr>
         <p:spPr>
           <a:xfrm>
-            <a:off x="2121408" y="2267712"/>
-            <a:ext cx="1645920" cy="329184"/>
+            <a:off x="2029968" y="2189988"/>
+            <a:ext cx="1737360" cy="274320"/>
           </a:xfrm>
           <a:prstGeom prst="rect">
             <a:avLst/>
@@ -7175,7 +7175,7 @@
         </p:nvSpPr>
         <p:spPr>
           <a:xfrm>
-            <a:off x="566928" y="2606040"/>
+            <a:off x="566928" y="2473452"/>
             <a:ext cx="3200400" cy="0"/>
           </a:xfrm>
           <a:prstGeom prst="line">
@@ -7198,8 +7198,8 @@
         </p:nvSpPr>
         <p:spPr>
           <a:xfrm>
-            <a:off x="566928" y="2633472"/>
-            <a:ext cx="1828800" cy="329184"/>
+            <a:off x="566928" y="2496312"/>
+            <a:ext cx="1828800" cy="274320"/>
           </a:xfrm>
           <a:prstGeom prst="rect">
             <a:avLst/>
@@ -7237,8 +7237,8 @@
         </p:nvSpPr>
         <p:spPr>
           <a:xfrm>
-            <a:off x="2121408" y="2633472"/>
-            <a:ext cx="1645920" cy="329184"/>
+            <a:off x="2029968" y="2496312"/>
+            <a:ext cx="1737360" cy="274320"/>
           </a:xfrm>
           <a:prstGeom prst="rect">
             <a:avLst/>
@@ -7276,7 +7276,7 @@
         </p:nvSpPr>
         <p:spPr>
           <a:xfrm>
-            <a:off x="566928" y="2971800"/>
+            <a:off x="566928" y="2779776"/>
             <a:ext cx="3200400" cy="0"/>
           </a:xfrm>
           <a:prstGeom prst="line">
@@ -7299,8 +7299,8 @@
         </p:nvSpPr>
         <p:spPr>
           <a:xfrm>
-            <a:off x="566928" y="2999232"/>
-            <a:ext cx="1828800" cy="329184"/>
+            <a:off x="566928" y="2802636"/>
+            <a:ext cx="1828800" cy="274320"/>
           </a:xfrm>
           <a:prstGeom prst="rect">
             <a:avLst/>
@@ -7338,8 +7338,8 @@
         </p:nvSpPr>
         <p:spPr>
           <a:xfrm>
-            <a:off x="2121408" y="2999232"/>
-            <a:ext cx="1645920" cy="329184"/>
+            <a:off x="2029968" y="2802636"/>
+            <a:ext cx="1737360" cy="274320"/>
           </a:xfrm>
           <a:prstGeom prst="rect">
             <a:avLst/>
@@ -7377,7 +7377,7 @@
         </p:nvSpPr>
         <p:spPr>
           <a:xfrm>
-            <a:off x="566928" y="3337560"/>
+            <a:off x="566928" y="3086100"/>
             <a:ext cx="3200400" cy="0"/>
           </a:xfrm>
           <a:prstGeom prst="line">
@@ -7400,8 +7400,8 @@
         </p:nvSpPr>
         <p:spPr>
           <a:xfrm>
-            <a:off x="566928" y="3364992"/>
-            <a:ext cx="1828800" cy="329184"/>
+            <a:off x="566928" y="3108960"/>
+            <a:ext cx="1828800" cy="274320"/>
           </a:xfrm>
           <a:prstGeom prst="rect">
             <a:avLst/>
@@ -7425,7 +7425,7 @@
                 <a:ea typeface="IBM Plex Sans KR" pitchFamily="34" charset="-122"/>
                 <a:cs typeface="IBM Plex Sans KR" pitchFamily="34" charset="-120"/>
               </a:rPr>
-              <a:t>신규 조달</a:t>
+              <a:t>WACC / 영구성장 ★</a:t>
             </a:r>
             <a:endParaRPr lang="en-US" sz="950" dirty="0"/>
           </a:p>
@@ -7439,8 +7439,8 @@
         </p:nvSpPr>
         <p:spPr>
           <a:xfrm>
-            <a:off x="2121408" y="3364992"/>
-            <a:ext cx="1645920" cy="329184"/>
+            <a:off x="2029968" y="3108960"/>
+            <a:ext cx="1737360" cy="274320"/>
           </a:xfrm>
           <a:prstGeom prst="rect">
             <a:avLst/>
@@ -7464,7 +7464,7 @@
                 <a:ea typeface="IBM Plex Mono" pitchFamily="34" charset="-122"/>
                 <a:cs typeface="IBM Plex Mono" pitchFamily="34" charset="-120"/>
               </a:rPr>
-              <a:t>$1.42bn</a:t>
+              <a:t>10.5% / 2.0%</a:t>
             </a:r>
             <a:endParaRPr lang="en-US" sz="1000" dirty="0"/>
           </a:p>
@@ -7478,7 +7478,7 @@
         </p:nvSpPr>
         <p:spPr>
           <a:xfrm>
-            <a:off x="566928" y="3703320"/>
+            <a:off x="566928" y="3392424"/>
             <a:ext cx="3200400" cy="0"/>
           </a:xfrm>
           <a:prstGeom prst="line">
@@ -7501,8 +7501,8 @@
         </p:nvSpPr>
         <p:spPr>
           <a:xfrm>
-            <a:off x="566928" y="3730752"/>
-            <a:ext cx="1828800" cy="329184"/>
+            <a:off x="566928" y="3415284"/>
+            <a:ext cx="1828800" cy="274320"/>
           </a:xfrm>
           <a:prstGeom prst="rect">
             <a:avLst/>
@@ -7526,7 +7526,7 @@
                 <a:ea typeface="IBM Plex Sans KR" pitchFamily="34" charset="-122"/>
                 <a:cs typeface="IBM Plex Sans KR" pitchFamily="34" charset="-120"/>
               </a:rPr>
-              <a:t>순차입금 (BA/OT)</a:t>
+              <a:t>Cost of equity (Ke)</a:t>
             </a:r>
             <a:endParaRPr lang="en-US" sz="950" dirty="0"/>
           </a:p>
@@ -7540,8 +7540,8 @@
         </p:nvSpPr>
         <p:spPr>
           <a:xfrm>
-            <a:off x="2121408" y="3730752"/>
-            <a:ext cx="1645920" cy="329184"/>
+            <a:off x="2029968" y="3415284"/>
+            <a:ext cx="1737360" cy="274320"/>
           </a:xfrm>
           <a:prstGeom prst="rect">
             <a:avLst/>
@@ -7565,7 +7565,7 @@
                 <a:ea typeface="IBM Plex Mono" pitchFamily="34" charset="-122"/>
                 <a:cs typeface="IBM Plex Mono" pitchFamily="34" charset="-120"/>
               </a:rPr>
-              <a:t>$6.4bn</a:t>
+              <a:t>13.0%</a:t>
             </a:r>
             <a:endParaRPr lang="en-US" sz="1000" dirty="0"/>
           </a:p>
@@ -7579,7 +7579,7 @@
         </p:nvSpPr>
         <p:spPr>
           <a:xfrm>
-            <a:off x="566928" y="4069080"/>
+            <a:off x="566928" y="3698748"/>
             <a:ext cx="3200400" cy="0"/>
           </a:xfrm>
           <a:prstGeom prst="line">
@@ -7602,8 +7602,8 @@
         </p:nvSpPr>
         <p:spPr>
           <a:xfrm>
-            <a:off x="566928" y="4096512"/>
-            <a:ext cx="1828800" cy="329184"/>
+            <a:off x="566928" y="3721608"/>
+            <a:ext cx="1828800" cy="274320"/>
           </a:xfrm>
           <a:prstGeom prst="rect">
             <a:avLst/>
@@ -7627,7 +7627,7 @@
                 <a:ea typeface="IBM Plex Sans KR" pitchFamily="34" charset="-122"/>
                 <a:cs typeface="IBM Plex Sans KR" pitchFamily="34" charset="-120"/>
               </a:rPr>
-              <a:t>peer EV/EBITDA</a:t>
+              <a:t>신규 조달</a:t>
             </a:r>
             <a:endParaRPr lang="en-US" sz="950" dirty="0"/>
           </a:p>
@@ -7641,8 +7641,8 @@
         </p:nvSpPr>
         <p:spPr>
           <a:xfrm>
-            <a:off x="2121408" y="4096512"/>
-            <a:ext cx="1645920" cy="329184"/>
+            <a:off x="2029968" y="3721608"/>
+            <a:ext cx="1737360" cy="274320"/>
           </a:xfrm>
           <a:prstGeom prst="rect">
             <a:avLst/>
@@ -7666,7 +7666,7 @@
                 <a:ea typeface="IBM Plex Mono" pitchFamily="34" charset="-122"/>
                 <a:cs typeface="IBM Plex Mono" pitchFamily="34" charset="-120"/>
               </a:rPr>
-              <a:t>8~13x</a:t>
+              <a:t>$1.42bn</a:t>
             </a:r>
             <a:endParaRPr lang="en-US" sz="1000" dirty="0"/>
           </a:p>
@@ -7680,7 +7680,7 @@
         </p:nvSpPr>
         <p:spPr>
           <a:xfrm>
-            <a:off x="566928" y="4434840"/>
+            <a:off x="566928" y="4005072"/>
             <a:ext cx="3200400" cy="0"/>
           </a:xfrm>
           <a:prstGeom prst="line">
@@ -7697,18 +7697,220 @@
       </p:sp>
       <p:sp>
         <p:nvSpPr>
-          <p:cNvPr id="29" name="Shape 27"/>
-          <p:cNvSpPr/>
-          <p:nvPr/>
-        </p:nvSpPr>
-        <p:spPr>
-          <a:xfrm>
-            <a:off x="566928" y="4517136"/>
-            <a:ext cx="3200400" cy="1170432"/>
+          <p:cNvPr id="29" name="Text 27"/>
+          <p:cNvSpPr/>
+          <p:nvPr/>
+        </p:nvSpPr>
+        <p:spPr>
+          <a:xfrm>
+            <a:off x="566928" y="4027932"/>
+            <a:ext cx="1828800" cy="274320"/>
+          </a:xfrm>
+          <a:prstGeom prst="rect">
+            <a:avLst/>
+          </a:prstGeom>
+          <a:noFill/>
+          <a:ln/>
+        </p:spPr>
+        <p:txBody>
+          <a:bodyPr wrap="square" lIns="0" tIns="0" rIns="0" bIns="0" rtlCol="0" anchor="ctr"/>
+          <a:lstStyle/>
+          <a:p>
+            <a:pPr indent="0" marL="0">
+              <a:buNone/>
+            </a:pPr>
+            <a:r>
+              <a:rPr lang="en-US" sz="950" dirty="0">
+                <a:solidFill>
+                  <a:srgbClr val="6F6960"/>
+                </a:solidFill>
+                <a:latin typeface="IBM Plex Sans KR" pitchFamily="34" charset="0"/>
+                <a:ea typeface="IBM Plex Sans KR" pitchFamily="34" charset="-122"/>
+                <a:cs typeface="IBM Plex Sans KR" pitchFamily="34" charset="-120"/>
+              </a:rPr>
+              <a:t>순차입금 (BA/OT)</a:t>
+            </a:r>
+            <a:endParaRPr lang="en-US" sz="950" dirty="0"/>
+          </a:p>
+        </p:txBody>
+      </p:sp>
+      <p:sp>
+        <p:nvSpPr>
+          <p:cNvPr id="30" name="Text 28"/>
+          <p:cNvSpPr/>
+          <p:nvPr/>
+        </p:nvSpPr>
+        <p:spPr>
+          <a:xfrm>
+            <a:off x="2029968" y="4027932"/>
+            <a:ext cx="1737360" cy="274320"/>
+          </a:xfrm>
+          <a:prstGeom prst="rect">
+            <a:avLst/>
+          </a:prstGeom>
+          <a:noFill/>
+          <a:ln/>
+        </p:spPr>
+        <p:txBody>
+          <a:bodyPr wrap="square" lIns="0" tIns="0" rIns="0" bIns="0" rtlCol="0" anchor="ctr"/>
+          <a:lstStyle/>
+          <a:p>
+            <a:pPr algn="r" indent="0" marL="0">
+              <a:buNone/>
+            </a:pPr>
+            <a:r>
+              <a:rPr lang="en-US" sz="1000" b="1" dirty="0">
+                <a:solidFill>
+                  <a:srgbClr val="1B1714"/>
+                </a:solidFill>
+                <a:latin typeface="IBM Plex Mono" pitchFamily="34" charset="0"/>
+                <a:ea typeface="IBM Plex Mono" pitchFamily="34" charset="-122"/>
+                <a:cs typeface="IBM Plex Mono" pitchFamily="34" charset="-120"/>
+              </a:rPr>
+              <a:t>$6.4bn</a:t>
+            </a:r>
+            <a:endParaRPr lang="en-US" sz="1000" dirty="0"/>
+          </a:p>
+        </p:txBody>
+      </p:sp>
+      <p:sp>
+        <p:nvSpPr>
+          <p:cNvPr id="31" name="Shape 29"/>
+          <p:cNvSpPr/>
+          <p:nvPr/>
+        </p:nvSpPr>
+        <p:spPr>
+          <a:xfrm>
+            <a:off x="566928" y="4311396"/>
+            <a:ext cx="3200400" cy="0"/>
+          </a:xfrm>
+          <a:prstGeom prst="line">
+            <a:avLst/>
+          </a:prstGeom>
+          <a:noFill/>
+          <a:ln w="6350">
+            <a:solidFill>
+              <a:srgbClr val="E4DED4"/>
+            </a:solidFill>
+            <a:prstDash val="solid"/>
+          </a:ln>
+        </p:spPr>
+      </p:sp>
+      <p:sp>
+        <p:nvSpPr>
+          <p:cNvPr id="32" name="Text 30"/>
+          <p:cNvSpPr/>
+          <p:nvPr/>
+        </p:nvSpPr>
+        <p:spPr>
+          <a:xfrm>
+            <a:off x="566928" y="4334256"/>
+            <a:ext cx="1828800" cy="274320"/>
+          </a:xfrm>
+          <a:prstGeom prst="rect">
+            <a:avLst/>
+          </a:prstGeom>
+          <a:noFill/>
+          <a:ln/>
+        </p:spPr>
+        <p:txBody>
+          <a:bodyPr wrap="square" lIns="0" tIns="0" rIns="0" bIns="0" rtlCol="0" anchor="ctr"/>
+          <a:lstStyle/>
+          <a:p>
+            <a:pPr indent="0" marL="0">
+              <a:buNone/>
+            </a:pPr>
+            <a:r>
+              <a:rPr lang="en-US" sz="950" dirty="0">
+                <a:solidFill>
+                  <a:srgbClr val="6F6960"/>
+                </a:solidFill>
+                <a:latin typeface="IBM Plex Sans KR" pitchFamily="34" charset="0"/>
+                <a:ea typeface="IBM Plex Sans KR" pitchFamily="34" charset="-122"/>
+                <a:cs typeface="IBM Plex Sans KR" pitchFamily="34" charset="-120"/>
+              </a:rPr>
+              <a:t>peer EV/EBITDA</a:t>
+            </a:r>
+            <a:endParaRPr lang="en-US" sz="950" dirty="0"/>
+          </a:p>
+        </p:txBody>
+      </p:sp>
+      <p:sp>
+        <p:nvSpPr>
+          <p:cNvPr id="33" name="Text 31"/>
+          <p:cNvSpPr/>
+          <p:nvPr/>
+        </p:nvSpPr>
+        <p:spPr>
+          <a:xfrm>
+            <a:off x="2029968" y="4334256"/>
+            <a:ext cx="1737360" cy="274320"/>
+          </a:xfrm>
+          <a:prstGeom prst="rect">
+            <a:avLst/>
+          </a:prstGeom>
+          <a:noFill/>
+          <a:ln/>
+        </p:spPr>
+        <p:txBody>
+          <a:bodyPr wrap="square" lIns="0" tIns="0" rIns="0" bIns="0" rtlCol="0" anchor="ctr"/>
+          <a:lstStyle/>
+          <a:p>
+            <a:pPr algn="r" indent="0" marL="0">
+              <a:buNone/>
+            </a:pPr>
+            <a:r>
+              <a:rPr lang="en-US" sz="1000" b="1" dirty="0">
+                <a:solidFill>
+                  <a:srgbClr val="1B1714"/>
+                </a:solidFill>
+                <a:latin typeface="IBM Plex Mono" pitchFamily="34" charset="0"/>
+                <a:ea typeface="IBM Plex Mono" pitchFamily="34" charset="-122"/>
+                <a:cs typeface="IBM Plex Mono" pitchFamily="34" charset="-120"/>
+              </a:rPr>
+              <a:t>8~13x</a:t>
+            </a:r>
+            <a:endParaRPr lang="en-US" sz="1000" dirty="0"/>
+          </a:p>
+        </p:txBody>
+      </p:sp>
+      <p:sp>
+        <p:nvSpPr>
+          <p:cNvPr id="34" name="Shape 32"/>
+          <p:cNvSpPr/>
+          <p:nvPr/>
+        </p:nvSpPr>
+        <p:spPr>
+          <a:xfrm>
+            <a:off x="566928" y="4617720"/>
+            <a:ext cx="3200400" cy="0"/>
+          </a:xfrm>
+          <a:prstGeom prst="line">
+            <a:avLst/>
+          </a:prstGeom>
+          <a:noFill/>
+          <a:ln w="6350">
+            <a:solidFill>
+              <a:srgbClr val="E4DED4"/>
+            </a:solidFill>
+            <a:prstDash val="solid"/>
+          </a:ln>
+        </p:spPr>
+      </p:sp>
+      <p:sp>
+        <p:nvSpPr>
+          <p:cNvPr id="35" name="Shape 33"/>
+          <p:cNvSpPr/>
+          <p:nvPr/>
+        </p:nvSpPr>
+        <p:spPr>
+          <a:xfrm>
+            <a:off x="566928" y="4677156"/>
+            <a:ext cx="3200400" cy="1042416"/>
           </a:xfrm>
           <a:prstGeom prst="roundRect">
             <a:avLst>
-              <a:gd name="adj" fmla="val 4688"/>
+              <a:gd name="adj" fmla="val 5263"/>
             </a:avLst>
           </a:prstGeom>
           <a:solidFill>
@@ -7719,14 +7921,14 @@
       </p:sp>
       <p:sp>
         <p:nvSpPr>
-          <p:cNvPr id="30" name="Text 28"/>
-          <p:cNvSpPr/>
-          <p:nvPr/>
-        </p:nvSpPr>
-        <p:spPr>
-          <a:xfrm>
-            <a:off x="768096" y="4608576"/>
-            <a:ext cx="2834640" cy="219456"/>
+          <p:cNvPr id="36" name="Text 34"/>
+          <p:cNvSpPr/>
+          <p:nvPr/>
+        </p:nvSpPr>
+        <p:spPr>
+          <a:xfrm>
+            <a:off x="768096" y="4750308"/>
+            <a:ext cx="2834640" cy="201168"/>
           </a:xfrm>
           <a:prstGeom prst="rect">
             <a:avLst/>
@@ -7758,14 +7960,14 @@
       </p:sp>
       <p:sp>
         <p:nvSpPr>
-          <p:cNvPr id="31" name="Text 29"/>
-          <p:cNvSpPr/>
-          <p:nvPr/>
-        </p:nvSpPr>
-        <p:spPr>
-          <a:xfrm>
-            <a:off x="768096" y="4846320"/>
-            <a:ext cx="2834640" cy="786384"/>
+          <p:cNvPr id="37" name="Text 35"/>
+          <p:cNvSpPr/>
+          <p:nvPr/>
+        </p:nvSpPr>
+        <p:spPr>
+          <a:xfrm>
+            <a:off x="768096" y="4969764"/>
+            <a:ext cx="2834640" cy="713232"/>
           </a:xfrm>
           <a:prstGeom prst="rect">
             <a:avLst/>
@@ -7779,12 +7981,12 @@
           <a:p>
             <a:pPr indent="0" marL="0">
               <a:lnSpc>
-                <a:spcPct val="125000"/>
+                <a:spcPct val="120000"/>
               </a:lnSpc>
               <a:buNone/>
             </a:pPr>
             <a:r>
-              <a:rPr lang="en-US" sz="950" b="1" dirty="0">
+              <a:rPr lang="en-US" sz="900" b="1" dirty="0">
                 <a:solidFill>
                   <a:srgbClr val="FF8E84"/>
                 </a:solidFill>
@@ -7796,12 +7998,12 @@
             </a:r>
             <a:pPr indent="0" marL="0">
               <a:lnSpc>
-                <a:spcPct val="125000"/>
+                <a:spcPct val="120000"/>
               </a:lnSpc>
               <a:buNone/>
             </a:pPr>
             <a:r>
-              <a:rPr lang="en-US" sz="950" dirty="0">
+              <a:rPr lang="en-US" sz="900" dirty="0">
                 <a:solidFill>
                   <a:srgbClr val="D8CFC2"/>
                 </a:solidFill>
@@ -7814,12 +8016,12 @@
             </a:r>
             <a:pPr indent="0" marL="0">
               <a:lnSpc>
-                <a:spcPct val="125000"/>
+                <a:spcPct val="120000"/>
               </a:lnSpc>
               <a:buNone/>
             </a:pPr>
             <a:r>
-              <a:rPr lang="en-US" sz="950" b="1" dirty="0">
+              <a:rPr lang="en-US" sz="900" b="1" dirty="0">
                 <a:solidFill>
                   <a:srgbClr val="FF8E84"/>
                 </a:solidFill>
@@ -7831,12 +8033,12 @@
             </a:r>
             <a:pPr indent="0" marL="0">
               <a:lnSpc>
-                <a:spcPct val="125000"/>
+                <a:spcPct val="120000"/>
               </a:lnSpc>
               <a:buNone/>
             </a:pPr>
             <a:r>
-              <a:rPr lang="en-US" sz="950" dirty="0">
+              <a:rPr lang="en-US" sz="900" dirty="0">
                 <a:solidFill>
                   <a:srgbClr val="D8CFC2"/>
                 </a:solidFill>
@@ -7849,12 +8051,12 @@
             </a:r>
             <a:pPr indent="0" marL="0">
               <a:lnSpc>
-                <a:spcPct val="125000"/>
+                <a:spcPct val="120000"/>
               </a:lnSpc>
               <a:buNone/>
             </a:pPr>
             <a:r>
-              <a:rPr lang="en-US" sz="950" b="1" dirty="0">
+              <a:rPr lang="en-US" sz="900" b="1" dirty="0">
                 <a:solidFill>
                   <a:srgbClr val="FF8E84"/>
                 </a:solidFill>
@@ -7866,12 +8068,12 @@
             </a:r>
             <a:pPr indent="0" marL="0">
               <a:lnSpc>
-                <a:spcPct val="125000"/>
+                <a:spcPct val="120000"/>
               </a:lnSpc>
               <a:buNone/>
             </a:pPr>
             <a:r>
-              <a:rPr lang="en-US" sz="950" dirty="0">
+              <a:rPr lang="en-US" sz="900" dirty="0">
                 <a:solidFill>
                   <a:srgbClr val="D8CFC2"/>
                 </a:solidFill>
@@ -7881,13 +8083,13 @@
               </a:rPr>
               <a:t> = 최소EV ÷ run-rate EBITDA</a:t>
             </a:r>
-            <a:endParaRPr lang="en-US" sz="950" dirty="0"/>
-          </a:p>
-        </p:txBody>
-      </p:sp>
-      <p:sp>
-        <p:nvSpPr>
-          <p:cNvPr id="32" name="Text 30"/>
+            <a:endParaRPr lang="en-US" sz="900" dirty="0"/>
+          </a:p>
+        </p:txBody>
+      </p:sp>
+      <p:sp>
+        <p:nvSpPr>
+          <p:cNvPr id="38" name="Text 36"/>
           <p:cNvSpPr/>
           <p:nvPr/>
         </p:nvSpPr>
@@ -7939,7 +8141,7 @@
           </p:nvPr>
         </p:nvGraphicFramePr>
         <p:xfrm>
-          <a:off x="4133088" y="1901952"/>
+          <a:off x="4133088" y="1883664"/>
           <a:ext cx="5989320" cy="914400"/>
         </p:xfrm>
         <a:graphic>
@@ -7954,7 +8156,7 @@
                 <a:gridCol w="777240"/>
                 <a:gridCol w="786384"/>
               </a:tblGrid>
-              <a:tr h="310896">
+              <a:tr h="292608">
                 <a:tc>
                   <a:txBody>
                     <a:bodyPr/>
@@ -8364,7 +8566,7 @@
                   </a:tcPr>
                 </a:tc>
               </a:tr>
-              <a:tr h="512064">
+              <a:tr h="429768">
                 <a:tc>
                   <a:txBody>
                     <a:bodyPr/>
@@ -8774,7 +8976,7 @@
                   </a:tcPr>
                 </a:tc>
               </a:tr>
-              <a:tr h="512064">
+              <a:tr h="429768">
                 <a:tc>
                   <a:txBody>
                     <a:bodyPr/>
@@ -8793,6 +8995,1236 @@
                           <a:cs typeface="IBM Plex Sans KR" pitchFamily="34" charset="-120"/>
                         </a:rPr>
                         <a:t>① CoC 20% + 그랜트 20%</a:t>
+                      </a:r>
+                      <a:endParaRPr lang="en-US" sz="950" dirty="0">
+                        <a:latin typeface="IBM Plex Sans KR" charset="0"/>
+                        <a:ea typeface="IBM Plex Sans KR" charset="0"/>
+                        <a:cs typeface="IBM Plex Sans KR" charset="0"/>
+                      </a:endParaRPr>
+                    </a:p>
+                  </a:txBody>
+                  <a:tcPr marL="63500" marR="63500" marT="25400" marB="25400" anchor="ctr">
+                    <a:lnL w="6350" cap="flat" cmpd="sng" algn="ctr">
+                      <a:solidFill>
+                        <a:srgbClr val="E4DED4"/>
+                      </a:solidFill>
+                      <a:prstDash val="solid"/>
+                      <a:round/>
+                      <a:headEnd type="none" w="med" len="med"/>
+                      <a:tailEnd type="none" w="med" len="med"/>
+                    </a:lnL>
+                    <a:lnR w="6350" cap="flat" cmpd="sng" algn="ctr">
+                      <a:solidFill>
+                        <a:srgbClr val="E4DED4"/>
+                      </a:solidFill>
+                      <a:prstDash val="solid"/>
+                      <a:round/>
+                      <a:headEnd type="none" w="med" len="med"/>
+                      <a:tailEnd type="none" w="med" len="med"/>
+                    </a:lnR>
+                    <a:lnT w="6350" cap="flat" cmpd="sng" algn="ctr">
+                      <a:solidFill>
+                        <a:srgbClr val="E4DED4"/>
+                      </a:solidFill>
+                      <a:prstDash val="solid"/>
+                      <a:round/>
+                      <a:headEnd type="none" w="med" len="med"/>
+                      <a:tailEnd type="none" w="med" len="med"/>
+                    </a:lnT>
+                    <a:lnB w="6350" cap="flat" cmpd="sng" algn="ctr">
+                      <a:solidFill>
+                        <a:srgbClr val="E4DED4"/>
+                      </a:solidFill>
+                      <a:prstDash val="solid"/>
+                      <a:round/>
+                      <a:headEnd type="none" w="med" len="med"/>
+                      <a:tailEnd type="none" w="med" len="med"/>
+                    </a:lnB>
+                    <a:solidFill>
+                      <a:srgbClr val="FFFFFF"/>
+                    </a:solidFill>
+                  </a:tcPr>
+                </a:tc>
+                <a:tc>
+                  <a:txBody>
+                    <a:bodyPr/>
+                    <a:lstStyle/>
+                    <a:p>
+                      <a:pPr algn="ctr" indent="0" marL="0">
+                        <a:buNone/>
+                      </a:pPr>
+                      <a:r>
+                        <a:rPr lang="en-US" sz="950" dirty="0">
+                          <a:solidFill>
+                            <a:srgbClr val="1B1714"/>
+                          </a:solidFill>
+                          <a:latin typeface="IBM Plex Mono" pitchFamily="34" charset="0"/>
+                          <a:ea typeface="IBM Plex Mono" pitchFamily="34" charset="-122"/>
+                          <a:cs typeface="IBM Plex Mono" pitchFamily="34" charset="-120"/>
+                        </a:rPr>
+                        <a:t>20%</a:t>
+                      </a:r>
+                      <a:endParaRPr lang="en-US" sz="950" dirty="0">
+                        <a:latin typeface="IBM Plex Mono" charset="0"/>
+                        <a:ea typeface="IBM Plex Mono" charset="0"/>
+                        <a:cs typeface="IBM Plex Mono" charset="0"/>
+                      </a:endParaRPr>
+                    </a:p>
+                  </a:txBody>
+                  <a:tcPr marL="63500" marR="63500" marT="25400" marB="25400" anchor="ctr">
+                    <a:lnL w="6350" cap="flat" cmpd="sng" algn="ctr">
+                      <a:solidFill>
+                        <a:srgbClr val="E4DED4"/>
+                      </a:solidFill>
+                      <a:prstDash val="solid"/>
+                      <a:round/>
+                      <a:headEnd type="none" w="med" len="med"/>
+                      <a:tailEnd type="none" w="med" len="med"/>
+                    </a:lnL>
+                    <a:lnR w="6350" cap="flat" cmpd="sng" algn="ctr">
+                      <a:solidFill>
+                        <a:srgbClr val="E4DED4"/>
+                      </a:solidFill>
+                      <a:prstDash val="solid"/>
+                      <a:round/>
+                      <a:headEnd type="none" w="med" len="med"/>
+                      <a:tailEnd type="none" w="med" len="med"/>
+                    </a:lnR>
+                    <a:lnT w="6350" cap="flat" cmpd="sng" algn="ctr">
+                      <a:solidFill>
+                        <a:srgbClr val="E4DED4"/>
+                      </a:solidFill>
+                      <a:prstDash val="solid"/>
+                      <a:round/>
+                      <a:headEnd type="none" w="med" len="med"/>
+                      <a:tailEnd type="none" w="med" len="med"/>
+                    </a:lnT>
+                    <a:lnB w="6350" cap="flat" cmpd="sng" algn="ctr">
+                      <a:solidFill>
+                        <a:srgbClr val="E4DED4"/>
+                      </a:solidFill>
+                      <a:prstDash val="solid"/>
+                      <a:round/>
+                      <a:headEnd type="none" w="med" len="med"/>
+                      <a:tailEnd type="none" w="med" len="med"/>
+                    </a:lnB>
+                    <a:solidFill>
+                      <a:srgbClr val="FFFFFF"/>
+                    </a:solidFill>
+                  </a:tcPr>
+                </a:tc>
+                <a:tc>
+                  <a:txBody>
+                    <a:bodyPr/>
+                    <a:lstStyle/>
+                    <a:p>
+                      <a:pPr algn="ctr" indent="0" marL="0">
+                        <a:buNone/>
+                      </a:pPr>
+                      <a:r>
+                        <a:rPr lang="en-US" sz="950" dirty="0">
+                          <a:solidFill>
+                            <a:srgbClr val="1B1714"/>
+                          </a:solidFill>
+                          <a:latin typeface="IBM Plex Mono" pitchFamily="34" charset="0"/>
+                          <a:ea typeface="IBM Plex Mono" pitchFamily="34" charset="-122"/>
+                          <a:cs typeface="IBM Plex Mono" pitchFamily="34" charset="-120"/>
+                        </a:rPr>
+                        <a:t>20%</a:t>
+                      </a:r>
+                      <a:endParaRPr lang="en-US" sz="950" dirty="0">
+                        <a:latin typeface="IBM Plex Mono" charset="0"/>
+                        <a:ea typeface="IBM Plex Mono" charset="0"/>
+                        <a:cs typeface="IBM Plex Mono" charset="0"/>
+                      </a:endParaRPr>
+                    </a:p>
+                  </a:txBody>
+                  <a:tcPr marL="63500" marR="63500" marT="25400" marB="25400" anchor="ctr">
+                    <a:lnL w="6350" cap="flat" cmpd="sng" algn="ctr">
+                      <a:solidFill>
+                        <a:srgbClr val="E4DED4"/>
+                      </a:solidFill>
+                      <a:prstDash val="solid"/>
+                      <a:round/>
+                      <a:headEnd type="none" w="med" len="med"/>
+                      <a:tailEnd type="none" w="med" len="med"/>
+                    </a:lnL>
+                    <a:lnR w="6350" cap="flat" cmpd="sng" algn="ctr">
+                      <a:solidFill>
+                        <a:srgbClr val="E4DED4"/>
+                      </a:solidFill>
+                      <a:prstDash val="solid"/>
+                      <a:round/>
+                      <a:headEnd type="none" w="med" len="med"/>
+                      <a:tailEnd type="none" w="med" len="med"/>
+                    </a:lnR>
+                    <a:lnT w="6350" cap="flat" cmpd="sng" algn="ctr">
+                      <a:solidFill>
+                        <a:srgbClr val="E4DED4"/>
+                      </a:solidFill>
+                      <a:prstDash val="solid"/>
+                      <a:round/>
+                      <a:headEnd type="none" w="med" len="med"/>
+                      <a:tailEnd type="none" w="med" len="med"/>
+                    </a:lnT>
+                    <a:lnB w="6350" cap="flat" cmpd="sng" algn="ctr">
+                      <a:solidFill>
+                        <a:srgbClr val="E4DED4"/>
+                      </a:solidFill>
+                      <a:prstDash val="solid"/>
+                      <a:round/>
+                      <a:headEnd type="none" w="med" len="med"/>
+                      <a:tailEnd type="none" w="med" len="med"/>
+                    </a:lnB>
+                    <a:solidFill>
+                      <a:srgbClr val="FFFFFF"/>
+                    </a:solidFill>
+                  </a:tcPr>
+                </a:tc>
+                <a:tc>
+                  <a:txBody>
+                    <a:bodyPr/>
+                    <a:lstStyle/>
+                    <a:p>
+                      <a:pPr algn="ctr" indent="0" marL="0">
+                        <a:buNone/>
+                      </a:pPr>
+                      <a:r>
+                        <a:rPr lang="en-US" sz="950" dirty="0">
+                          <a:solidFill>
+                            <a:srgbClr val="1B1714"/>
+                          </a:solidFill>
+                          <a:latin typeface="IBM Plex Mono" pitchFamily="34" charset="0"/>
+                          <a:ea typeface="IBM Plex Mono" pitchFamily="34" charset="-122"/>
+                          <a:cs typeface="IBM Plex Mono" pitchFamily="34" charset="-120"/>
+                        </a:rPr>
+                        <a:t>$7.8bn</a:t>
+                      </a:r>
+                      <a:endParaRPr lang="en-US" sz="950" dirty="0">
+                        <a:latin typeface="IBM Plex Mono" charset="0"/>
+                        <a:ea typeface="IBM Plex Mono" charset="0"/>
+                        <a:cs typeface="IBM Plex Mono" charset="0"/>
+                      </a:endParaRPr>
+                    </a:p>
+                  </a:txBody>
+                  <a:tcPr marL="63500" marR="63500" marT="25400" marB="25400" anchor="ctr">
+                    <a:lnL w="6350" cap="flat" cmpd="sng" algn="ctr">
+                      <a:solidFill>
+                        <a:srgbClr val="E4DED4"/>
+                      </a:solidFill>
+                      <a:prstDash val="solid"/>
+                      <a:round/>
+                      <a:headEnd type="none" w="med" len="med"/>
+                      <a:tailEnd type="none" w="med" len="med"/>
+                    </a:lnL>
+                    <a:lnR w="6350" cap="flat" cmpd="sng" algn="ctr">
+                      <a:solidFill>
+                        <a:srgbClr val="E4DED4"/>
+                      </a:solidFill>
+                      <a:prstDash val="solid"/>
+                      <a:round/>
+                      <a:headEnd type="none" w="med" len="med"/>
+                      <a:tailEnd type="none" w="med" len="med"/>
+                    </a:lnR>
+                    <a:lnT w="6350" cap="flat" cmpd="sng" algn="ctr">
+                      <a:solidFill>
+                        <a:srgbClr val="E4DED4"/>
+                      </a:solidFill>
+                      <a:prstDash val="solid"/>
+                      <a:round/>
+                      <a:headEnd type="none" w="med" len="med"/>
+                      <a:tailEnd type="none" w="med" len="med"/>
+                    </a:lnT>
+                    <a:lnB w="6350" cap="flat" cmpd="sng" algn="ctr">
+                      <a:solidFill>
+                        <a:srgbClr val="E4DED4"/>
+                      </a:solidFill>
+                      <a:prstDash val="solid"/>
+                      <a:round/>
+                      <a:headEnd type="none" w="med" len="med"/>
+                      <a:tailEnd type="none" w="med" len="med"/>
+                    </a:lnB>
+                    <a:solidFill>
+                      <a:srgbClr val="FFFFFF"/>
+                    </a:solidFill>
+                  </a:tcPr>
+                </a:tc>
+                <a:tc>
+                  <a:txBody>
+                    <a:bodyPr/>
+                    <a:lstStyle/>
+                    <a:p>
+                      <a:pPr algn="ctr" indent="0" marL="0">
+                        <a:buNone/>
+                      </a:pPr>
+                      <a:r>
+                        <a:rPr lang="en-US" sz="1200" b="1" dirty="0">
+                          <a:solidFill>
+                            <a:srgbClr val="C1121F"/>
+                          </a:solidFill>
+                          <a:latin typeface="Space Grotesk" pitchFamily="34" charset="0"/>
+                          <a:ea typeface="Space Grotesk" pitchFamily="34" charset="-122"/>
+                          <a:cs typeface="Space Grotesk" pitchFamily="34" charset="-120"/>
+                        </a:rPr>
+                        <a:t>14.1x</a:t>
+                      </a:r>
+                      <a:endParaRPr lang="en-US" sz="1200" dirty="0">
+                        <a:latin typeface="Space Grotesk" charset="0"/>
+                        <a:ea typeface="Space Grotesk" charset="0"/>
+                        <a:cs typeface="Space Grotesk" charset="0"/>
+                      </a:endParaRPr>
+                    </a:p>
+                  </a:txBody>
+                  <a:tcPr marL="63500" marR="63500" marT="25400" marB="25400" anchor="ctr">
+                    <a:lnL w="6350" cap="flat" cmpd="sng" algn="ctr">
+                      <a:solidFill>
+                        <a:srgbClr val="E4DED4"/>
+                      </a:solidFill>
+                      <a:prstDash val="solid"/>
+                      <a:round/>
+                      <a:headEnd type="none" w="med" len="med"/>
+                      <a:tailEnd type="none" w="med" len="med"/>
+                    </a:lnL>
+                    <a:lnR w="6350" cap="flat" cmpd="sng" algn="ctr">
+                      <a:solidFill>
+                        <a:srgbClr val="E4DED4"/>
+                      </a:solidFill>
+                      <a:prstDash val="solid"/>
+                      <a:round/>
+                      <a:headEnd type="none" w="med" len="med"/>
+                      <a:tailEnd type="none" w="med" len="med"/>
+                    </a:lnR>
+                    <a:lnT w="6350" cap="flat" cmpd="sng" algn="ctr">
+                      <a:solidFill>
+                        <a:srgbClr val="E4DED4"/>
+                      </a:solidFill>
+                      <a:prstDash val="solid"/>
+                      <a:round/>
+                      <a:headEnd type="none" w="med" len="med"/>
+                      <a:tailEnd type="none" w="med" len="med"/>
+                    </a:lnT>
+                    <a:lnB w="6350" cap="flat" cmpd="sng" algn="ctr">
+                      <a:solidFill>
+                        <a:srgbClr val="E4DED4"/>
+                      </a:solidFill>
+                      <a:prstDash val="solid"/>
+                      <a:round/>
+                      <a:headEnd type="none" w="med" len="med"/>
+                      <a:tailEnd type="none" w="med" len="med"/>
+                    </a:lnB>
+                    <a:solidFill>
+                      <a:srgbClr val="FFFFFF"/>
+                    </a:solidFill>
+                  </a:tcPr>
+                </a:tc>
+                <a:tc>
+                  <a:txBody>
+                    <a:bodyPr/>
+                    <a:lstStyle/>
+                    <a:p>
+                      <a:pPr algn="ctr" indent="0" marL="0">
+                        <a:buNone/>
+                      </a:pPr>
+                      <a:r>
+                        <a:rPr lang="en-US" sz="800" b="1" dirty="0">
+                          <a:solidFill>
+                            <a:srgbClr val="6F6960"/>
+                          </a:solidFill>
+                          <a:latin typeface="IBM Plex Mono" pitchFamily="34" charset="0"/>
+                          <a:ea typeface="IBM Plex Mono" pitchFamily="34" charset="-122"/>
+                          <a:cs typeface="IBM Plex Mono" pitchFamily="34" charset="-120"/>
+                        </a:rPr>
+                        <a:t>+1.1x</a:t>
+                      </a:r>
+                      <a:endParaRPr lang="en-US" sz="800" dirty="0">
+                        <a:latin typeface="IBM Plex Mono" charset="0"/>
+                        <a:ea typeface="IBM Plex Mono" charset="0"/>
+                        <a:cs typeface="IBM Plex Mono" charset="0"/>
+                      </a:endParaRPr>
+                    </a:p>
+                  </a:txBody>
+                  <a:tcPr marL="63500" marR="63500" marT="25400" marB="25400" anchor="ctr">
+                    <a:lnL w="6350" cap="flat" cmpd="sng" algn="ctr">
+                      <a:solidFill>
+                        <a:srgbClr val="E4DED4"/>
+                      </a:solidFill>
+                      <a:prstDash val="solid"/>
+                      <a:round/>
+                      <a:headEnd type="none" w="med" len="med"/>
+                      <a:tailEnd type="none" w="med" len="med"/>
+                    </a:lnL>
+                    <a:lnR w="6350" cap="flat" cmpd="sng" algn="ctr">
+                      <a:solidFill>
+                        <a:srgbClr val="E4DED4"/>
+                      </a:solidFill>
+                      <a:prstDash val="solid"/>
+                      <a:round/>
+                      <a:headEnd type="none" w="med" len="med"/>
+                      <a:tailEnd type="none" w="med" len="med"/>
+                    </a:lnR>
+                    <a:lnT w="6350" cap="flat" cmpd="sng" algn="ctr">
+                      <a:solidFill>
+                        <a:srgbClr val="E4DED4"/>
+                      </a:solidFill>
+                      <a:prstDash val="solid"/>
+                      <a:round/>
+                      <a:headEnd type="none" w="med" len="med"/>
+                      <a:tailEnd type="none" w="med" len="med"/>
+                    </a:lnT>
+                    <a:lnB w="6350" cap="flat" cmpd="sng" algn="ctr">
+                      <a:solidFill>
+                        <a:srgbClr val="E4DED4"/>
+                      </a:solidFill>
+                      <a:prstDash val="solid"/>
+                      <a:round/>
+                      <a:headEnd type="none" w="med" len="med"/>
+                      <a:tailEnd type="none" w="med" len="med"/>
+                    </a:lnB>
+                    <a:solidFill>
+                      <a:srgbClr val="FFFFFF"/>
+                    </a:solidFill>
+                  </a:tcPr>
+                </a:tc>
+              </a:tr>
+              <a:tr h="429768">
+                <a:tc>
+                  <a:txBody>
+                    <a:bodyPr/>
+                    <a:lstStyle/>
+                    <a:p>
+                      <a:pPr indent="0" marL="0">
+                        <a:buNone/>
+                      </a:pPr>
+                      <a:r>
+                        <a:rPr lang="en-US" sz="950" dirty="0">
+                          <a:solidFill>
+                            <a:srgbClr val="1B1714"/>
+                          </a:solidFill>
+                          <a:latin typeface="IBM Plex Sans KR" pitchFamily="34" charset="0"/>
+                          <a:ea typeface="IBM Plex Sans KR" pitchFamily="34" charset="-122"/>
+                          <a:cs typeface="IBM Plex Sans KR" pitchFamily="34" charset="-120"/>
+                        </a:rPr>
+                        <a:t>② CoC 해제 → 희석 30%</a:t>
+                      </a:r>
+                      <a:endParaRPr lang="en-US" sz="950" dirty="0">
+                        <a:latin typeface="IBM Plex Sans KR" charset="0"/>
+                        <a:ea typeface="IBM Plex Sans KR" charset="0"/>
+                        <a:cs typeface="IBM Plex Sans KR" charset="0"/>
+                      </a:endParaRPr>
+                    </a:p>
+                  </a:txBody>
+                  <a:tcPr marL="63500" marR="63500" marT="25400" marB="25400" anchor="ctr">
+                    <a:lnL w="6350" cap="flat" cmpd="sng" algn="ctr">
+                      <a:solidFill>
+                        <a:srgbClr val="E4DED4"/>
+                      </a:solidFill>
+                      <a:prstDash val="solid"/>
+                      <a:round/>
+                      <a:headEnd type="none" w="med" len="med"/>
+                      <a:tailEnd type="none" w="med" len="med"/>
+                    </a:lnL>
+                    <a:lnR w="6350" cap="flat" cmpd="sng" algn="ctr">
+                      <a:solidFill>
+                        <a:srgbClr val="E4DED4"/>
+                      </a:solidFill>
+                      <a:prstDash val="solid"/>
+                      <a:round/>
+                      <a:headEnd type="none" w="med" len="med"/>
+                      <a:tailEnd type="none" w="med" len="med"/>
+                    </a:lnR>
+                    <a:lnT w="6350" cap="flat" cmpd="sng" algn="ctr">
+                      <a:solidFill>
+                        <a:srgbClr val="E4DED4"/>
+                      </a:solidFill>
+                      <a:prstDash val="solid"/>
+                      <a:round/>
+                      <a:headEnd type="none" w="med" len="med"/>
+                      <a:tailEnd type="none" w="med" len="med"/>
+                    </a:lnT>
+                    <a:lnB w="6350" cap="flat" cmpd="sng" algn="ctr">
+                      <a:solidFill>
+                        <a:srgbClr val="E4DED4"/>
+                      </a:solidFill>
+                      <a:prstDash val="solid"/>
+                      <a:round/>
+                      <a:headEnd type="none" w="med" len="med"/>
+                      <a:tailEnd type="none" w="med" len="med"/>
+                    </a:lnB>
+                    <a:solidFill>
+                      <a:srgbClr val="FFFFFF"/>
+                    </a:solidFill>
+                  </a:tcPr>
+                </a:tc>
+                <a:tc>
+                  <a:txBody>
+                    <a:bodyPr/>
+                    <a:lstStyle/>
+                    <a:p>
+                      <a:pPr algn="ctr" indent="0" marL="0">
+                        <a:buNone/>
+                      </a:pPr>
+                      <a:r>
+                        <a:rPr lang="en-US" sz="950" dirty="0">
+                          <a:solidFill>
+                            <a:srgbClr val="1B1714"/>
+                          </a:solidFill>
+                          <a:latin typeface="IBM Plex Mono" pitchFamily="34" charset="0"/>
+                          <a:ea typeface="IBM Plex Mono" pitchFamily="34" charset="-122"/>
+                          <a:cs typeface="IBM Plex Mono" pitchFamily="34" charset="-120"/>
+                        </a:rPr>
+                        <a:t>10%</a:t>
+                      </a:r>
+                      <a:endParaRPr lang="en-US" sz="950" dirty="0">
+                        <a:latin typeface="IBM Plex Mono" charset="0"/>
+                        <a:ea typeface="IBM Plex Mono" charset="0"/>
+                        <a:cs typeface="IBM Plex Mono" charset="0"/>
+                      </a:endParaRPr>
+                    </a:p>
+                  </a:txBody>
+                  <a:tcPr marL="63500" marR="63500" marT="25400" marB="25400" anchor="ctr">
+                    <a:lnL w="6350" cap="flat" cmpd="sng" algn="ctr">
+                      <a:solidFill>
+                        <a:srgbClr val="E4DED4"/>
+                      </a:solidFill>
+                      <a:prstDash val="solid"/>
+                      <a:round/>
+                      <a:headEnd type="none" w="med" len="med"/>
+                      <a:tailEnd type="none" w="med" len="med"/>
+                    </a:lnL>
+                    <a:lnR w="6350" cap="flat" cmpd="sng" algn="ctr">
+                      <a:solidFill>
+                        <a:srgbClr val="E4DED4"/>
+                      </a:solidFill>
+                      <a:prstDash val="solid"/>
+                      <a:round/>
+                      <a:headEnd type="none" w="med" len="med"/>
+                      <a:tailEnd type="none" w="med" len="med"/>
+                    </a:lnR>
+                    <a:lnT w="6350" cap="flat" cmpd="sng" algn="ctr">
+                      <a:solidFill>
+                        <a:srgbClr val="E4DED4"/>
+                      </a:solidFill>
+                      <a:prstDash val="solid"/>
+                      <a:round/>
+                      <a:headEnd type="none" w="med" len="med"/>
+                      <a:tailEnd type="none" w="med" len="med"/>
+                    </a:lnT>
+                    <a:lnB w="6350" cap="flat" cmpd="sng" algn="ctr">
+                      <a:solidFill>
+                        <a:srgbClr val="E4DED4"/>
+                      </a:solidFill>
+                      <a:prstDash val="solid"/>
+                      <a:round/>
+                      <a:headEnd type="none" w="med" len="med"/>
+                      <a:tailEnd type="none" w="med" len="med"/>
+                    </a:lnB>
+                    <a:solidFill>
+                      <a:srgbClr val="FFFFFF"/>
+                    </a:solidFill>
+                  </a:tcPr>
+                </a:tc>
+                <a:tc>
+                  <a:txBody>
+                    <a:bodyPr/>
+                    <a:lstStyle/>
+                    <a:p>
+                      <a:pPr algn="ctr" indent="0" marL="0">
+                        <a:buNone/>
+                      </a:pPr>
+                      <a:r>
+                        <a:rPr lang="en-US" sz="950" dirty="0">
+                          <a:solidFill>
+                            <a:srgbClr val="1B1714"/>
+                          </a:solidFill>
+                          <a:latin typeface="IBM Plex Mono" pitchFamily="34" charset="0"/>
+                          <a:ea typeface="IBM Plex Mono" pitchFamily="34" charset="-122"/>
+                          <a:cs typeface="IBM Plex Mono" pitchFamily="34" charset="-120"/>
+                        </a:rPr>
+                        <a:t>30%</a:t>
+                      </a:r>
+                      <a:endParaRPr lang="en-US" sz="950" dirty="0">
+                        <a:latin typeface="IBM Plex Mono" charset="0"/>
+                        <a:ea typeface="IBM Plex Mono" charset="0"/>
+                        <a:cs typeface="IBM Plex Mono" charset="0"/>
+                      </a:endParaRPr>
+                    </a:p>
+                  </a:txBody>
+                  <a:tcPr marL="63500" marR="63500" marT="25400" marB="25400" anchor="ctr">
+                    <a:lnL w="6350" cap="flat" cmpd="sng" algn="ctr">
+                      <a:solidFill>
+                        <a:srgbClr val="E4DED4"/>
+                      </a:solidFill>
+                      <a:prstDash val="solid"/>
+                      <a:round/>
+                      <a:headEnd type="none" w="med" len="med"/>
+                      <a:tailEnd type="none" w="med" len="med"/>
+                    </a:lnL>
+                    <a:lnR w="6350" cap="flat" cmpd="sng" algn="ctr">
+                      <a:solidFill>
+                        <a:srgbClr val="E4DED4"/>
+                      </a:solidFill>
+                      <a:prstDash val="solid"/>
+                      <a:round/>
+                      <a:headEnd type="none" w="med" len="med"/>
+                      <a:tailEnd type="none" w="med" len="med"/>
+                    </a:lnR>
+                    <a:lnT w="6350" cap="flat" cmpd="sng" algn="ctr">
+                      <a:solidFill>
+                        <a:srgbClr val="E4DED4"/>
+                      </a:solidFill>
+                      <a:prstDash val="solid"/>
+                      <a:round/>
+                      <a:headEnd type="none" w="med" len="med"/>
+                      <a:tailEnd type="none" w="med" len="med"/>
+                    </a:lnT>
+                    <a:lnB w="6350" cap="flat" cmpd="sng" algn="ctr">
+                      <a:solidFill>
+                        <a:srgbClr val="E4DED4"/>
+                      </a:solidFill>
+                      <a:prstDash val="solid"/>
+                      <a:round/>
+                      <a:headEnd type="none" w="med" len="med"/>
+                      <a:tailEnd type="none" w="med" len="med"/>
+                    </a:lnB>
+                    <a:solidFill>
+                      <a:srgbClr val="FFFFFF"/>
+                    </a:solidFill>
+                  </a:tcPr>
+                </a:tc>
+                <a:tc>
+                  <a:txBody>
+                    <a:bodyPr/>
+                    <a:lstStyle/>
+                    <a:p>
+                      <a:pPr algn="ctr" indent="0" marL="0">
+                        <a:buNone/>
+                      </a:pPr>
+                      <a:r>
+                        <a:rPr lang="en-US" sz="950" dirty="0">
+                          <a:solidFill>
+                            <a:srgbClr val="1B1714"/>
+                          </a:solidFill>
+                          <a:latin typeface="IBM Plex Mono" pitchFamily="34" charset="0"/>
+                          <a:ea typeface="IBM Plex Mono" pitchFamily="34" charset="-122"/>
+                          <a:cs typeface="IBM Plex Mono" pitchFamily="34" charset="-120"/>
+                        </a:rPr>
+                        <a:t>$7.8bn</a:t>
+                      </a:r>
+                      <a:endParaRPr lang="en-US" sz="950" dirty="0">
+                        <a:latin typeface="IBM Plex Mono" charset="0"/>
+                        <a:ea typeface="IBM Plex Mono" charset="0"/>
+                        <a:cs typeface="IBM Plex Mono" charset="0"/>
+                      </a:endParaRPr>
+                    </a:p>
+                  </a:txBody>
+                  <a:tcPr marL="63500" marR="63500" marT="25400" marB="25400" anchor="ctr">
+                    <a:lnL w="6350" cap="flat" cmpd="sng" algn="ctr">
+                      <a:solidFill>
+                        <a:srgbClr val="E4DED4"/>
+                      </a:solidFill>
+                      <a:prstDash val="solid"/>
+                      <a:round/>
+                      <a:headEnd type="none" w="med" len="med"/>
+                      <a:tailEnd type="none" w="med" len="med"/>
+                    </a:lnL>
+                    <a:lnR w="6350" cap="flat" cmpd="sng" algn="ctr">
+                      <a:solidFill>
+                        <a:srgbClr val="E4DED4"/>
+                      </a:solidFill>
+                      <a:prstDash val="solid"/>
+                      <a:round/>
+                      <a:headEnd type="none" w="med" len="med"/>
+                      <a:tailEnd type="none" w="med" len="med"/>
+                    </a:lnR>
+                    <a:lnT w="6350" cap="flat" cmpd="sng" algn="ctr">
+                      <a:solidFill>
+                        <a:srgbClr val="E4DED4"/>
+                      </a:solidFill>
+                      <a:prstDash val="solid"/>
+                      <a:round/>
+                      <a:headEnd type="none" w="med" len="med"/>
+                      <a:tailEnd type="none" w="med" len="med"/>
+                    </a:lnT>
+                    <a:lnB w="6350" cap="flat" cmpd="sng" algn="ctr">
+                      <a:solidFill>
+                        <a:srgbClr val="E4DED4"/>
+                      </a:solidFill>
+                      <a:prstDash val="solid"/>
+                      <a:round/>
+                      <a:headEnd type="none" w="med" len="med"/>
+                      <a:tailEnd type="none" w="med" len="med"/>
+                    </a:lnB>
+                    <a:solidFill>
+                      <a:srgbClr val="FFFFFF"/>
+                    </a:solidFill>
+                  </a:tcPr>
+                </a:tc>
+                <a:tc>
+                  <a:txBody>
+                    <a:bodyPr/>
+                    <a:lstStyle/>
+                    <a:p>
+                      <a:pPr algn="ctr" indent="0" marL="0">
+                        <a:buNone/>
+                      </a:pPr>
+                      <a:r>
+                        <a:rPr lang="en-US" sz="1200" b="1" dirty="0">
+                          <a:solidFill>
+                            <a:srgbClr val="C1121F"/>
+                          </a:solidFill>
+                          <a:latin typeface="Space Grotesk" pitchFamily="34" charset="0"/>
+                          <a:ea typeface="Space Grotesk" pitchFamily="34" charset="-122"/>
+                          <a:cs typeface="Space Grotesk" pitchFamily="34" charset="-120"/>
+                        </a:rPr>
+                        <a:t>14.1x</a:t>
+                      </a:r>
+                      <a:endParaRPr lang="en-US" sz="1200" dirty="0">
+                        <a:latin typeface="Space Grotesk" charset="0"/>
+                        <a:ea typeface="Space Grotesk" charset="0"/>
+                        <a:cs typeface="Space Grotesk" charset="0"/>
+                      </a:endParaRPr>
+                    </a:p>
+                  </a:txBody>
+                  <a:tcPr marL="63500" marR="63500" marT="25400" marB="25400" anchor="ctr">
+                    <a:lnL w="6350" cap="flat" cmpd="sng" algn="ctr">
+                      <a:solidFill>
+                        <a:srgbClr val="E4DED4"/>
+                      </a:solidFill>
+                      <a:prstDash val="solid"/>
+                      <a:round/>
+                      <a:headEnd type="none" w="med" len="med"/>
+                      <a:tailEnd type="none" w="med" len="med"/>
+                    </a:lnL>
+                    <a:lnR w="6350" cap="flat" cmpd="sng" algn="ctr">
+                      <a:solidFill>
+                        <a:srgbClr val="E4DED4"/>
+                      </a:solidFill>
+                      <a:prstDash val="solid"/>
+                      <a:round/>
+                      <a:headEnd type="none" w="med" len="med"/>
+                      <a:tailEnd type="none" w="med" len="med"/>
+                    </a:lnR>
+                    <a:lnT w="6350" cap="flat" cmpd="sng" algn="ctr">
+                      <a:solidFill>
+                        <a:srgbClr val="E4DED4"/>
+                      </a:solidFill>
+                      <a:prstDash val="solid"/>
+                      <a:round/>
+                      <a:headEnd type="none" w="med" len="med"/>
+                      <a:tailEnd type="none" w="med" len="med"/>
+                    </a:lnT>
+                    <a:lnB w="6350" cap="flat" cmpd="sng" algn="ctr">
+                      <a:solidFill>
+                        <a:srgbClr val="E4DED4"/>
+                      </a:solidFill>
+                      <a:prstDash val="solid"/>
+                      <a:round/>
+                      <a:headEnd type="none" w="med" len="med"/>
+                      <a:tailEnd type="none" w="med" len="med"/>
+                    </a:lnB>
+                    <a:solidFill>
+                      <a:srgbClr val="FFFFFF"/>
+                    </a:solidFill>
+                  </a:tcPr>
+                </a:tc>
+                <a:tc>
+                  <a:txBody>
+                    <a:bodyPr/>
+                    <a:lstStyle/>
+                    <a:p>
+                      <a:pPr algn="ctr" indent="0" marL="0">
+                        <a:buNone/>
+                      </a:pPr>
+                      <a:r>
+                        <a:rPr lang="en-US" sz="800" b="1" dirty="0">
+                          <a:solidFill>
+                            <a:srgbClr val="6F6960"/>
+                          </a:solidFill>
+                          <a:latin typeface="IBM Plex Mono" pitchFamily="34" charset="0"/>
+                          <a:ea typeface="IBM Plex Mono" pitchFamily="34" charset="-122"/>
+                          <a:cs typeface="IBM Plex Mono" pitchFamily="34" charset="-120"/>
+                        </a:rPr>
+                        <a:t>+1.1x</a:t>
+                      </a:r>
+                      <a:endParaRPr lang="en-US" sz="800" dirty="0">
+                        <a:latin typeface="IBM Plex Mono" charset="0"/>
+                        <a:ea typeface="IBM Plex Mono" charset="0"/>
+                        <a:cs typeface="IBM Plex Mono" charset="0"/>
+                      </a:endParaRPr>
+                    </a:p>
+                  </a:txBody>
+                  <a:tcPr marL="63500" marR="63500" marT="25400" marB="25400" anchor="ctr">
+                    <a:lnL w="6350" cap="flat" cmpd="sng" algn="ctr">
+                      <a:solidFill>
+                        <a:srgbClr val="E4DED4"/>
+                      </a:solidFill>
+                      <a:prstDash val="solid"/>
+                      <a:round/>
+                      <a:headEnd type="none" w="med" len="med"/>
+                      <a:tailEnd type="none" w="med" len="med"/>
+                    </a:lnL>
+                    <a:lnR w="6350" cap="flat" cmpd="sng" algn="ctr">
+                      <a:solidFill>
+                        <a:srgbClr val="E4DED4"/>
+                      </a:solidFill>
+                      <a:prstDash val="solid"/>
+                      <a:round/>
+                      <a:headEnd type="none" w="med" len="med"/>
+                      <a:tailEnd type="none" w="med" len="med"/>
+                    </a:lnR>
+                    <a:lnT w="6350" cap="flat" cmpd="sng" algn="ctr">
+                      <a:solidFill>
+                        <a:srgbClr val="E4DED4"/>
+                      </a:solidFill>
+                      <a:prstDash val="solid"/>
+                      <a:round/>
+                      <a:headEnd type="none" w="med" len="med"/>
+                      <a:tailEnd type="none" w="med" len="med"/>
+                    </a:lnT>
+                    <a:lnB w="6350" cap="flat" cmpd="sng" algn="ctr">
+                      <a:solidFill>
+                        <a:srgbClr val="E4DED4"/>
+                      </a:solidFill>
+                      <a:prstDash val="solid"/>
+                      <a:round/>
+                      <a:headEnd type="none" w="med" len="med"/>
+                      <a:tailEnd type="none" w="med" len="med"/>
+                    </a:lnB>
+                    <a:solidFill>
+                      <a:srgbClr val="FFFFFF"/>
+                    </a:solidFill>
+                  </a:tcPr>
+                </a:tc>
+              </a:tr>
+              <a:tr h="429768">
+                <a:tc>
+                  <a:txBody>
+                    <a:bodyPr/>
+                    <a:lstStyle/>
+                    <a:p>
+                      <a:pPr indent="0" marL="0">
+                        <a:buNone/>
+                      </a:pPr>
+                      <a:r>
+                        <a:rPr lang="en-US" sz="950" dirty="0">
+                          <a:solidFill>
+                            <a:srgbClr val="1B1714"/>
+                          </a:solidFill>
+                          <a:latin typeface="IBM Plex Sans KR" pitchFamily="34" charset="0"/>
+                          <a:ea typeface="IBM Plex Sans KR" pitchFamily="34" charset="-122"/>
+                          <a:cs typeface="IBM Plex Sans KR" pitchFamily="34" charset="-120"/>
+                        </a:rPr>
+                        <a:t>③ CoC 완화 → 희석 49%</a:t>
+                      </a:r>
+                      <a:endParaRPr lang="en-US" sz="950" dirty="0">
+                        <a:latin typeface="IBM Plex Sans KR" charset="0"/>
+                        <a:ea typeface="IBM Plex Sans KR" charset="0"/>
+                        <a:cs typeface="IBM Plex Sans KR" charset="0"/>
+                      </a:endParaRPr>
+                    </a:p>
+                  </a:txBody>
+                  <a:tcPr marL="63500" marR="63500" marT="25400" marB="25400" anchor="ctr">
+                    <a:lnL w="6350" cap="flat" cmpd="sng" algn="ctr">
+                      <a:solidFill>
+                        <a:srgbClr val="E4DED4"/>
+                      </a:solidFill>
+                      <a:prstDash val="solid"/>
+                      <a:round/>
+                      <a:headEnd type="none" w="med" len="med"/>
+                      <a:tailEnd type="none" w="med" len="med"/>
+                    </a:lnL>
+                    <a:lnR w="6350" cap="flat" cmpd="sng" algn="ctr">
+                      <a:solidFill>
+                        <a:srgbClr val="E4DED4"/>
+                      </a:solidFill>
+                      <a:prstDash val="solid"/>
+                      <a:round/>
+                      <a:headEnd type="none" w="med" len="med"/>
+                      <a:tailEnd type="none" w="med" len="med"/>
+                    </a:lnR>
+                    <a:lnT w="6350" cap="flat" cmpd="sng" algn="ctr">
+                      <a:solidFill>
+                        <a:srgbClr val="E4DED4"/>
+                      </a:solidFill>
+                      <a:prstDash val="solid"/>
+                      <a:round/>
+                      <a:headEnd type="none" w="med" len="med"/>
+                      <a:tailEnd type="none" w="med" len="med"/>
+                    </a:lnT>
+                    <a:lnB w="6350" cap="flat" cmpd="sng" algn="ctr">
+                      <a:solidFill>
+                        <a:srgbClr val="E4DED4"/>
+                      </a:solidFill>
+                      <a:prstDash val="solid"/>
+                      <a:round/>
+                      <a:headEnd type="none" w="med" len="med"/>
+                      <a:tailEnd type="none" w="med" len="med"/>
+                    </a:lnB>
+                    <a:solidFill>
+                      <a:srgbClr val="E8F3EC"/>
+                    </a:solidFill>
+                  </a:tcPr>
+                </a:tc>
+                <a:tc>
+                  <a:txBody>
+                    <a:bodyPr/>
+                    <a:lstStyle/>
+                    <a:p>
+                      <a:pPr algn="ctr" indent="0" marL="0">
+                        <a:buNone/>
+                      </a:pPr>
+                      <a:r>
+                        <a:rPr lang="en-US" sz="950" dirty="0">
+                          <a:solidFill>
+                            <a:srgbClr val="1B1714"/>
+                          </a:solidFill>
+                          <a:latin typeface="IBM Plex Mono" pitchFamily="34" charset="0"/>
+                          <a:ea typeface="IBM Plex Mono" pitchFamily="34" charset="-122"/>
+                          <a:cs typeface="IBM Plex Mono" pitchFamily="34" charset="-120"/>
+                        </a:rPr>
+                        <a:t>10%</a:t>
+                      </a:r>
+                      <a:endParaRPr lang="en-US" sz="950" dirty="0">
+                        <a:latin typeface="IBM Plex Mono" charset="0"/>
+                        <a:ea typeface="IBM Plex Mono" charset="0"/>
+                        <a:cs typeface="IBM Plex Mono" charset="0"/>
+                      </a:endParaRPr>
+                    </a:p>
+                  </a:txBody>
+                  <a:tcPr marL="63500" marR="63500" marT="25400" marB="25400" anchor="ctr">
+                    <a:lnL w="6350" cap="flat" cmpd="sng" algn="ctr">
+                      <a:solidFill>
+                        <a:srgbClr val="E4DED4"/>
+                      </a:solidFill>
+                      <a:prstDash val="solid"/>
+                      <a:round/>
+                      <a:headEnd type="none" w="med" len="med"/>
+                      <a:tailEnd type="none" w="med" len="med"/>
+                    </a:lnL>
+                    <a:lnR w="6350" cap="flat" cmpd="sng" algn="ctr">
+                      <a:solidFill>
+                        <a:srgbClr val="E4DED4"/>
+                      </a:solidFill>
+                      <a:prstDash val="solid"/>
+                      <a:round/>
+                      <a:headEnd type="none" w="med" len="med"/>
+                      <a:tailEnd type="none" w="med" len="med"/>
+                    </a:lnR>
+                    <a:lnT w="6350" cap="flat" cmpd="sng" algn="ctr">
+                      <a:solidFill>
+                        <a:srgbClr val="E4DED4"/>
+                      </a:solidFill>
+                      <a:prstDash val="solid"/>
+                      <a:round/>
+                      <a:headEnd type="none" w="med" len="med"/>
+                      <a:tailEnd type="none" w="med" len="med"/>
+                    </a:lnT>
+                    <a:lnB w="6350" cap="flat" cmpd="sng" algn="ctr">
+                      <a:solidFill>
+                        <a:srgbClr val="E4DED4"/>
+                      </a:solidFill>
+                      <a:prstDash val="solid"/>
+                      <a:round/>
+                      <a:headEnd type="none" w="med" len="med"/>
+                      <a:tailEnd type="none" w="med" len="med"/>
+                    </a:lnB>
+                    <a:solidFill>
+                      <a:srgbClr val="E8F3EC"/>
+                    </a:solidFill>
+                  </a:tcPr>
+                </a:tc>
+                <a:tc>
+                  <a:txBody>
+                    <a:bodyPr/>
+                    <a:lstStyle/>
+                    <a:p>
+                      <a:pPr algn="ctr" indent="0" marL="0">
+                        <a:buNone/>
+                      </a:pPr>
+                      <a:r>
+                        <a:rPr lang="en-US" sz="950" dirty="0">
+                          <a:solidFill>
+                            <a:srgbClr val="1B1714"/>
+                          </a:solidFill>
+                          <a:latin typeface="IBM Plex Mono" pitchFamily="34" charset="0"/>
+                          <a:ea typeface="IBM Plex Mono" pitchFamily="34" charset="-122"/>
+                          <a:cs typeface="IBM Plex Mono" pitchFamily="34" charset="-120"/>
+                        </a:rPr>
+                        <a:t>49%</a:t>
+                      </a:r>
+                      <a:endParaRPr lang="en-US" sz="950" dirty="0">
+                        <a:latin typeface="IBM Plex Mono" charset="0"/>
+                        <a:ea typeface="IBM Plex Mono" charset="0"/>
+                        <a:cs typeface="IBM Plex Mono" charset="0"/>
+                      </a:endParaRPr>
+                    </a:p>
+                  </a:txBody>
+                  <a:tcPr marL="63500" marR="63500" marT="25400" marB="25400" anchor="ctr">
+                    <a:lnL w="6350" cap="flat" cmpd="sng" algn="ctr">
+                      <a:solidFill>
+                        <a:srgbClr val="E4DED4"/>
+                      </a:solidFill>
+                      <a:prstDash val="solid"/>
+                      <a:round/>
+                      <a:headEnd type="none" w="med" len="med"/>
+                      <a:tailEnd type="none" w="med" len="med"/>
+                    </a:lnL>
+                    <a:lnR w="6350" cap="flat" cmpd="sng" algn="ctr">
+                      <a:solidFill>
+                        <a:srgbClr val="E4DED4"/>
+                      </a:solidFill>
+                      <a:prstDash val="solid"/>
+                      <a:round/>
+                      <a:headEnd type="none" w="med" len="med"/>
+                      <a:tailEnd type="none" w="med" len="med"/>
+                    </a:lnR>
+                    <a:lnT w="6350" cap="flat" cmpd="sng" algn="ctr">
+                      <a:solidFill>
+                        <a:srgbClr val="E4DED4"/>
+                      </a:solidFill>
+                      <a:prstDash val="solid"/>
+                      <a:round/>
+                      <a:headEnd type="none" w="med" len="med"/>
+                      <a:tailEnd type="none" w="med" len="med"/>
+                    </a:lnT>
+                    <a:lnB w="6350" cap="flat" cmpd="sng" algn="ctr">
+                      <a:solidFill>
+                        <a:srgbClr val="E4DED4"/>
+                      </a:solidFill>
+                      <a:prstDash val="solid"/>
+                      <a:round/>
+                      <a:headEnd type="none" w="med" len="med"/>
+                      <a:tailEnd type="none" w="med" len="med"/>
+                    </a:lnB>
+                    <a:solidFill>
+                      <a:srgbClr val="E8F3EC"/>
+                    </a:solidFill>
+                  </a:tcPr>
+                </a:tc>
+                <a:tc>
+                  <a:txBody>
+                    <a:bodyPr/>
+                    <a:lstStyle/>
+                    <a:p>
+                      <a:pPr algn="ctr" indent="0" marL="0">
+                        <a:buNone/>
+                      </a:pPr>
+                      <a:r>
+                        <a:rPr lang="en-US" sz="950" dirty="0">
+                          <a:solidFill>
+                            <a:srgbClr val="1B1714"/>
+                          </a:solidFill>
+                          <a:latin typeface="IBM Plex Mono" pitchFamily="34" charset="0"/>
+                          <a:ea typeface="IBM Plex Mono" pitchFamily="34" charset="-122"/>
+                          <a:cs typeface="IBM Plex Mono" pitchFamily="34" charset="-120"/>
+                        </a:rPr>
+                        <a:t>$7.3bn</a:t>
+                      </a:r>
+                      <a:endParaRPr lang="en-US" sz="950" dirty="0">
+                        <a:latin typeface="IBM Plex Mono" charset="0"/>
+                        <a:ea typeface="IBM Plex Mono" charset="0"/>
+                        <a:cs typeface="IBM Plex Mono" charset="0"/>
+                      </a:endParaRPr>
+                    </a:p>
+                  </a:txBody>
+                  <a:tcPr marL="63500" marR="63500" marT="25400" marB="25400" anchor="ctr">
+                    <a:lnL w="6350" cap="flat" cmpd="sng" algn="ctr">
+                      <a:solidFill>
+                        <a:srgbClr val="E4DED4"/>
+                      </a:solidFill>
+                      <a:prstDash val="solid"/>
+                      <a:round/>
+                      <a:headEnd type="none" w="med" len="med"/>
+                      <a:tailEnd type="none" w="med" len="med"/>
+                    </a:lnL>
+                    <a:lnR w="6350" cap="flat" cmpd="sng" algn="ctr">
+                      <a:solidFill>
+                        <a:srgbClr val="E4DED4"/>
+                      </a:solidFill>
+                      <a:prstDash val="solid"/>
+                      <a:round/>
+                      <a:headEnd type="none" w="med" len="med"/>
+                      <a:tailEnd type="none" w="med" len="med"/>
+                    </a:lnR>
+                    <a:lnT w="6350" cap="flat" cmpd="sng" algn="ctr">
+                      <a:solidFill>
+                        <a:srgbClr val="E4DED4"/>
+                      </a:solidFill>
+                      <a:prstDash val="solid"/>
+                      <a:round/>
+                      <a:headEnd type="none" w="med" len="med"/>
+                      <a:tailEnd type="none" w="med" len="med"/>
+                    </a:lnT>
+                    <a:lnB w="6350" cap="flat" cmpd="sng" algn="ctr">
+                      <a:solidFill>
+                        <a:srgbClr val="E4DED4"/>
+                      </a:solidFill>
+                      <a:prstDash val="solid"/>
+                      <a:round/>
+                      <a:headEnd type="none" w="med" len="med"/>
+                      <a:tailEnd type="none" w="med" len="med"/>
+                    </a:lnB>
+                    <a:solidFill>
+                      <a:srgbClr val="E8F3EC"/>
+                    </a:solidFill>
+                  </a:tcPr>
+                </a:tc>
+                <a:tc>
+                  <a:txBody>
+                    <a:bodyPr/>
+                    <a:lstStyle/>
+                    <a:p>
+                      <a:pPr algn="ctr" indent="0" marL="0">
+                        <a:buNone/>
+                      </a:pPr>
+                      <a:r>
+                        <a:rPr lang="en-US" sz="1200" b="1" dirty="0">
+                          <a:solidFill>
+                            <a:srgbClr val="C1121F"/>
+                          </a:solidFill>
+                          <a:latin typeface="Space Grotesk" pitchFamily="34" charset="0"/>
+                          <a:ea typeface="Space Grotesk" pitchFamily="34" charset="-122"/>
+                          <a:cs typeface="Space Grotesk" pitchFamily="34" charset="-120"/>
+                        </a:rPr>
+                        <a:t>13.1x</a:t>
+                      </a:r>
+                      <a:endParaRPr lang="en-US" sz="1200" dirty="0">
+                        <a:latin typeface="Space Grotesk" charset="0"/>
+                        <a:ea typeface="Space Grotesk" charset="0"/>
+                        <a:cs typeface="Space Grotesk" charset="0"/>
+                      </a:endParaRPr>
+                    </a:p>
+                  </a:txBody>
+                  <a:tcPr marL="63500" marR="63500" marT="25400" marB="25400" anchor="ctr">
+                    <a:lnL w="6350" cap="flat" cmpd="sng" algn="ctr">
+                      <a:solidFill>
+                        <a:srgbClr val="E4DED4"/>
+                      </a:solidFill>
+                      <a:prstDash val="solid"/>
+                      <a:round/>
+                      <a:headEnd type="none" w="med" len="med"/>
+                      <a:tailEnd type="none" w="med" len="med"/>
+                    </a:lnL>
+                    <a:lnR w="6350" cap="flat" cmpd="sng" algn="ctr">
+                      <a:solidFill>
+                        <a:srgbClr val="E4DED4"/>
+                      </a:solidFill>
+                      <a:prstDash val="solid"/>
+                      <a:round/>
+                      <a:headEnd type="none" w="med" len="med"/>
+                      <a:tailEnd type="none" w="med" len="med"/>
+                    </a:lnR>
+                    <a:lnT w="6350" cap="flat" cmpd="sng" algn="ctr">
+                      <a:solidFill>
+                        <a:srgbClr val="E4DED4"/>
+                      </a:solidFill>
+                      <a:prstDash val="solid"/>
+                      <a:round/>
+                      <a:headEnd type="none" w="med" len="med"/>
+                      <a:tailEnd type="none" w="med" len="med"/>
+                    </a:lnT>
+                    <a:lnB w="6350" cap="flat" cmpd="sng" algn="ctr">
+                      <a:solidFill>
+                        <a:srgbClr val="E4DED4"/>
+                      </a:solidFill>
+                      <a:prstDash val="solid"/>
+                      <a:round/>
+                      <a:headEnd type="none" w="med" len="med"/>
+                      <a:tailEnd type="none" w="med" len="med"/>
+                    </a:lnB>
+                    <a:solidFill>
+                      <a:srgbClr val="E8F3EC"/>
+                    </a:solidFill>
+                  </a:tcPr>
+                </a:tc>
+                <a:tc>
+                  <a:txBody>
+                    <a:bodyPr/>
+                    <a:lstStyle/>
+                    <a:p>
+                      <a:pPr algn="ctr" indent="0" marL="0">
+                        <a:buNone/>
+                      </a:pPr>
+                      <a:r>
+                        <a:rPr lang="en-US" sz="800" b="1" dirty="0">
+                          <a:solidFill>
+                            <a:srgbClr val="6F6960"/>
+                          </a:solidFill>
+                          <a:latin typeface="IBM Plex Mono" pitchFamily="34" charset="0"/>
+                          <a:ea typeface="IBM Plex Mono" pitchFamily="34" charset="-122"/>
+                          <a:cs typeface="IBM Plex Mono" pitchFamily="34" charset="-120"/>
+                        </a:rPr>
+                        <a:t>+0.1x</a:t>
+                      </a:r>
+                      <a:endParaRPr lang="en-US" sz="800" dirty="0">
+                        <a:latin typeface="IBM Plex Mono" charset="0"/>
+                        <a:ea typeface="IBM Plex Mono" charset="0"/>
+                        <a:cs typeface="IBM Plex Mono" charset="0"/>
+                      </a:endParaRPr>
+                    </a:p>
+                  </a:txBody>
+                  <a:tcPr marL="63500" marR="63500" marT="25400" marB="25400" anchor="ctr">
+                    <a:lnL w="6350" cap="flat" cmpd="sng" algn="ctr">
+                      <a:solidFill>
+                        <a:srgbClr val="E4DED4"/>
+                      </a:solidFill>
+                      <a:prstDash val="solid"/>
+                      <a:round/>
+                      <a:headEnd type="none" w="med" len="med"/>
+                      <a:tailEnd type="none" w="med" len="med"/>
+                    </a:lnL>
+                    <a:lnR w="6350" cap="flat" cmpd="sng" algn="ctr">
+                      <a:solidFill>
+                        <a:srgbClr val="E4DED4"/>
+                      </a:solidFill>
+                      <a:prstDash val="solid"/>
+                      <a:round/>
+                      <a:headEnd type="none" w="med" len="med"/>
+                      <a:tailEnd type="none" w="med" len="med"/>
+                    </a:lnR>
+                    <a:lnT w="6350" cap="flat" cmpd="sng" algn="ctr">
+                      <a:solidFill>
+                        <a:srgbClr val="E4DED4"/>
+                      </a:solidFill>
+                      <a:prstDash val="solid"/>
+                      <a:round/>
+                      <a:headEnd type="none" w="med" len="med"/>
+                      <a:tailEnd type="none" w="med" len="med"/>
+                    </a:lnT>
+                    <a:lnB w="6350" cap="flat" cmpd="sng" algn="ctr">
+                      <a:solidFill>
+                        <a:srgbClr val="E4DED4"/>
+                      </a:solidFill>
+                      <a:prstDash val="solid"/>
+                      <a:round/>
+                      <a:headEnd type="none" w="med" len="med"/>
+                      <a:tailEnd type="none" w="med" len="med"/>
+                    </a:lnB>
+                    <a:solidFill>
+                      <a:srgbClr val="E8F3EC"/>
+                    </a:solidFill>
+                  </a:tcPr>
+                </a:tc>
+              </a:tr>
+              <a:tr h="429768">
+                <a:tc>
+                  <a:txBody>
+                    <a:bodyPr/>
+                    <a:lstStyle/>
+                    <a:p>
+                      <a:pPr indent="0" marL="0">
+                        <a:buNone/>
+                      </a:pPr>
+                      <a:r>
+                        <a:rPr lang="en-US" sz="950" dirty="0">
+                          <a:solidFill>
+                            <a:srgbClr val="1B1714"/>
+                          </a:solidFill>
+                          <a:latin typeface="IBM Plex Sans KR" pitchFamily="34" charset="0"/>
+                          <a:ea typeface="IBM Plex Sans KR" pitchFamily="34" charset="-122"/>
+                          <a:cs typeface="IBM Plex Sans KR" pitchFamily="34" charset="-120"/>
+                        </a:rPr>
+                        <a:t>최대결합 (그랜트20+희석49)</a:t>
                       </a:r>
                       <a:endParaRPr lang="en-US" sz="950" dirty="0">
                         <a:latin typeface="IBM Plex Sans KR" charset="0"/>
@@ -8928,7 +10360,7 @@
                           <a:ea typeface="IBM Plex Mono" pitchFamily="34" charset="-122"/>
                           <a:cs typeface="IBM Plex Mono" pitchFamily="34" charset="-120"/>
                         </a:rPr>
-                        <a:t>20%</a:t>
+                        <a:t>49%</a:t>
                       </a:r>
                       <a:endParaRPr lang="en-US" sz="950" dirty="0">
                         <a:latin typeface="IBM Plex Mono" charset="0"/>
@@ -8996,827 +10428,7 @@
                           <a:ea typeface="IBM Plex Mono" pitchFamily="34" charset="-122"/>
                           <a:cs typeface="IBM Plex Mono" pitchFamily="34" charset="-120"/>
                         </a:rPr>
-                        <a:t>$7.8bn</a:t>
-                      </a:r>
-                      <a:endParaRPr lang="en-US" sz="950" dirty="0">
-                        <a:latin typeface="IBM Plex Mono" charset="0"/>
-                        <a:ea typeface="IBM Plex Mono" charset="0"/>
-                        <a:cs typeface="IBM Plex Mono" charset="0"/>
-                      </a:endParaRPr>
-                    </a:p>
-                  </a:txBody>
-                  <a:tcPr marL="63500" marR="63500" marT="25400" marB="25400" anchor="ctr">
-                    <a:lnL w="6350" cap="flat" cmpd="sng" algn="ctr">
-                      <a:solidFill>
-                        <a:srgbClr val="E4DED4"/>
-                      </a:solidFill>
-                      <a:prstDash val="solid"/>
-                      <a:round/>
-                      <a:headEnd type="none" w="med" len="med"/>
-                      <a:tailEnd type="none" w="med" len="med"/>
-                    </a:lnL>
-                    <a:lnR w="6350" cap="flat" cmpd="sng" algn="ctr">
-                      <a:solidFill>
-                        <a:srgbClr val="E4DED4"/>
-                      </a:solidFill>
-                      <a:prstDash val="solid"/>
-                      <a:round/>
-                      <a:headEnd type="none" w="med" len="med"/>
-                      <a:tailEnd type="none" w="med" len="med"/>
-                    </a:lnR>
-                    <a:lnT w="6350" cap="flat" cmpd="sng" algn="ctr">
-                      <a:solidFill>
-                        <a:srgbClr val="E4DED4"/>
-                      </a:solidFill>
-                      <a:prstDash val="solid"/>
-                      <a:round/>
-                      <a:headEnd type="none" w="med" len="med"/>
-                      <a:tailEnd type="none" w="med" len="med"/>
-                    </a:lnT>
-                    <a:lnB w="6350" cap="flat" cmpd="sng" algn="ctr">
-                      <a:solidFill>
-                        <a:srgbClr val="E4DED4"/>
-                      </a:solidFill>
-                      <a:prstDash val="solid"/>
-                      <a:round/>
-                      <a:headEnd type="none" w="med" len="med"/>
-                      <a:tailEnd type="none" w="med" len="med"/>
-                    </a:lnB>
-                    <a:solidFill>
-                      <a:srgbClr val="E8F3EC"/>
-                    </a:solidFill>
-                  </a:tcPr>
-                </a:tc>
-                <a:tc>
-                  <a:txBody>
-                    <a:bodyPr/>
-                    <a:lstStyle/>
-                    <a:p>
-                      <a:pPr algn="ctr" indent="0" marL="0">
-                        <a:buNone/>
-                      </a:pPr>
-                      <a:r>
-                        <a:rPr lang="en-US" sz="1200" b="1" dirty="0">
-                          <a:solidFill>
-                            <a:srgbClr val="C1121F"/>
-                          </a:solidFill>
-                          <a:latin typeface="Space Grotesk" pitchFamily="34" charset="0"/>
-                          <a:ea typeface="Space Grotesk" pitchFamily="34" charset="-122"/>
-                          <a:cs typeface="Space Grotesk" pitchFamily="34" charset="-120"/>
-                        </a:rPr>
-                        <a:t>14.1x</a:t>
-                      </a:r>
-                      <a:endParaRPr lang="en-US" sz="1200" dirty="0">
-                        <a:latin typeface="Space Grotesk" charset="0"/>
-                        <a:ea typeface="Space Grotesk" charset="0"/>
-                        <a:cs typeface="Space Grotesk" charset="0"/>
-                      </a:endParaRPr>
-                    </a:p>
-                  </a:txBody>
-                  <a:tcPr marL="63500" marR="63500" marT="25400" marB="25400" anchor="ctr">
-                    <a:lnL w="6350" cap="flat" cmpd="sng" algn="ctr">
-                      <a:solidFill>
-                        <a:srgbClr val="E4DED4"/>
-                      </a:solidFill>
-                      <a:prstDash val="solid"/>
-                      <a:round/>
-                      <a:headEnd type="none" w="med" len="med"/>
-                      <a:tailEnd type="none" w="med" len="med"/>
-                    </a:lnL>
-                    <a:lnR w="6350" cap="flat" cmpd="sng" algn="ctr">
-                      <a:solidFill>
-                        <a:srgbClr val="E4DED4"/>
-                      </a:solidFill>
-                      <a:prstDash val="solid"/>
-                      <a:round/>
-                      <a:headEnd type="none" w="med" len="med"/>
-                      <a:tailEnd type="none" w="med" len="med"/>
-                    </a:lnR>
-                    <a:lnT w="6350" cap="flat" cmpd="sng" algn="ctr">
-                      <a:solidFill>
-                        <a:srgbClr val="E4DED4"/>
-                      </a:solidFill>
-                      <a:prstDash val="solid"/>
-                      <a:round/>
-                      <a:headEnd type="none" w="med" len="med"/>
-                      <a:tailEnd type="none" w="med" len="med"/>
-                    </a:lnT>
-                    <a:lnB w="6350" cap="flat" cmpd="sng" algn="ctr">
-                      <a:solidFill>
-                        <a:srgbClr val="E4DED4"/>
-                      </a:solidFill>
-                      <a:prstDash val="solid"/>
-                      <a:round/>
-                      <a:headEnd type="none" w="med" len="med"/>
-                      <a:tailEnd type="none" w="med" len="med"/>
-                    </a:lnB>
-                    <a:solidFill>
-                      <a:srgbClr val="E8F3EC"/>
-                    </a:solidFill>
-                  </a:tcPr>
-                </a:tc>
-                <a:tc>
-                  <a:txBody>
-                    <a:bodyPr/>
-                    <a:lstStyle/>
-                    <a:p>
-                      <a:pPr algn="ctr" indent="0" marL="0">
-                        <a:buNone/>
-                      </a:pPr>
-                      <a:r>
-                        <a:rPr lang="en-US" sz="800" b="1" dirty="0">
-                          <a:solidFill>
-                            <a:srgbClr val="6F6960"/>
-                          </a:solidFill>
-                          <a:latin typeface="IBM Plex Mono" pitchFamily="34" charset="0"/>
-                          <a:ea typeface="IBM Plex Mono" pitchFamily="34" charset="-122"/>
-                          <a:cs typeface="IBM Plex Mono" pitchFamily="34" charset="-120"/>
-                        </a:rPr>
-                        <a:t>+1.1x</a:t>
-                      </a:r>
-                      <a:endParaRPr lang="en-US" sz="800" dirty="0">
-                        <a:latin typeface="IBM Plex Mono" charset="0"/>
-                        <a:ea typeface="IBM Plex Mono" charset="0"/>
-                        <a:cs typeface="IBM Plex Mono" charset="0"/>
-                      </a:endParaRPr>
-                    </a:p>
-                  </a:txBody>
-                  <a:tcPr marL="63500" marR="63500" marT="25400" marB="25400" anchor="ctr">
-                    <a:lnL w="6350" cap="flat" cmpd="sng" algn="ctr">
-                      <a:solidFill>
-                        <a:srgbClr val="E4DED4"/>
-                      </a:solidFill>
-                      <a:prstDash val="solid"/>
-                      <a:round/>
-                      <a:headEnd type="none" w="med" len="med"/>
-                      <a:tailEnd type="none" w="med" len="med"/>
-                    </a:lnL>
-                    <a:lnR w="6350" cap="flat" cmpd="sng" algn="ctr">
-                      <a:solidFill>
-                        <a:srgbClr val="E4DED4"/>
-                      </a:solidFill>
-                      <a:prstDash val="solid"/>
-                      <a:round/>
-                      <a:headEnd type="none" w="med" len="med"/>
-                      <a:tailEnd type="none" w="med" len="med"/>
-                    </a:lnR>
-                    <a:lnT w="6350" cap="flat" cmpd="sng" algn="ctr">
-                      <a:solidFill>
-                        <a:srgbClr val="E4DED4"/>
-                      </a:solidFill>
-                      <a:prstDash val="solid"/>
-                      <a:round/>
-                      <a:headEnd type="none" w="med" len="med"/>
-                      <a:tailEnd type="none" w="med" len="med"/>
-                    </a:lnT>
-                    <a:lnB w="6350" cap="flat" cmpd="sng" algn="ctr">
-                      <a:solidFill>
-                        <a:srgbClr val="E4DED4"/>
-                      </a:solidFill>
-                      <a:prstDash val="solid"/>
-                      <a:round/>
-                      <a:headEnd type="none" w="med" len="med"/>
-                      <a:tailEnd type="none" w="med" len="med"/>
-                    </a:lnB>
-                    <a:solidFill>
-                      <a:srgbClr val="E8F3EC"/>
-                    </a:solidFill>
-                  </a:tcPr>
-                </a:tc>
-              </a:tr>
-              <a:tr h="512064">
-                <a:tc>
-                  <a:txBody>
-                    <a:bodyPr/>
-                    <a:lstStyle/>
-                    <a:p>
-                      <a:pPr indent="0" marL="0">
-                        <a:buNone/>
-                      </a:pPr>
-                      <a:r>
-                        <a:rPr lang="en-US" sz="950" dirty="0">
-                          <a:solidFill>
-                            <a:srgbClr val="1B1714"/>
-                          </a:solidFill>
-                          <a:latin typeface="IBM Plex Sans KR" pitchFamily="34" charset="0"/>
-                          <a:ea typeface="IBM Plex Sans KR" pitchFamily="34" charset="-122"/>
-                          <a:cs typeface="IBM Plex Sans KR" pitchFamily="34" charset="-120"/>
-                        </a:rPr>
-                        <a:t>② CoC 해제 → 희석 30%</a:t>
-                      </a:r>
-                      <a:endParaRPr lang="en-US" sz="950" dirty="0">
-                        <a:latin typeface="IBM Plex Sans KR" charset="0"/>
-                        <a:ea typeface="IBM Plex Sans KR" charset="0"/>
-                        <a:cs typeface="IBM Plex Sans KR" charset="0"/>
-                      </a:endParaRPr>
-                    </a:p>
-                  </a:txBody>
-                  <a:tcPr marL="63500" marR="63500" marT="25400" marB="25400" anchor="ctr">
-                    <a:lnL w="6350" cap="flat" cmpd="sng" algn="ctr">
-                      <a:solidFill>
-                        <a:srgbClr val="E4DED4"/>
-                      </a:solidFill>
-                      <a:prstDash val="solid"/>
-                      <a:round/>
-                      <a:headEnd type="none" w="med" len="med"/>
-                      <a:tailEnd type="none" w="med" len="med"/>
-                    </a:lnL>
-                    <a:lnR w="6350" cap="flat" cmpd="sng" algn="ctr">
-                      <a:solidFill>
-                        <a:srgbClr val="E4DED4"/>
-                      </a:solidFill>
-                      <a:prstDash val="solid"/>
-                      <a:round/>
-                      <a:headEnd type="none" w="med" len="med"/>
-                      <a:tailEnd type="none" w="med" len="med"/>
-                    </a:lnR>
-                    <a:lnT w="6350" cap="flat" cmpd="sng" algn="ctr">
-                      <a:solidFill>
-                        <a:srgbClr val="E4DED4"/>
-                      </a:solidFill>
-                      <a:prstDash val="solid"/>
-                      <a:round/>
-                      <a:headEnd type="none" w="med" len="med"/>
-                      <a:tailEnd type="none" w="med" len="med"/>
-                    </a:lnT>
-                    <a:lnB w="6350" cap="flat" cmpd="sng" algn="ctr">
-                      <a:solidFill>
-                        <a:srgbClr val="E4DED4"/>
-                      </a:solidFill>
-                      <a:prstDash val="solid"/>
-                      <a:round/>
-                      <a:headEnd type="none" w="med" len="med"/>
-                      <a:tailEnd type="none" w="med" len="med"/>
-                    </a:lnB>
-                    <a:solidFill>
-                      <a:srgbClr val="E8F3EC"/>
-                    </a:solidFill>
-                  </a:tcPr>
-                </a:tc>
-                <a:tc>
-                  <a:txBody>
-                    <a:bodyPr/>
-                    <a:lstStyle/>
-                    <a:p>
-                      <a:pPr algn="ctr" indent="0" marL="0">
-                        <a:buNone/>
-                      </a:pPr>
-                      <a:r>
-                        <a:rPr lang="en-US" sz="950" dirty="0">
-                          <a:solidFill>
-                            <a:srgbClr val="1B1714"/>
-                          </a:solidFill>
-                          <a:latin typeface="IBM Plex Mono" pitchFamily="34" charset="0"/>
-                          <a:ea typeface="IBM Plex Mono" pitchFamily="34" charset="-122"/>
-                          <a:cs typeface="IBM Plex Mono" pitchFamily="34" charset="-120"/>
-                        </a:rPr>
-                        <a:t>10%</a:t>
-                      </a:r>
-                      <a:endParaRPr lang="en-US" sz="950" dirty="0">
-                        <a:latin typeface="IBM Plex Mono" charset="0"/>
-                        <a:ea typeface="IBM Plex Mono" charset="0"/>
-                        <a:cs typeface="IBM Plex Mono" charset="0"/>
-                      </a:endParaRPr>
-                    </a:p>
-                  </a:txBody>
-                  <a:tcPr marL="63500" marR="63500" marT="25400" marB="25400" anchor="ctr">
-                    <a:lnL w="6350" cap="flat" cmpd="sng" algn="ctr">
-                      <a:solidFill>
-                        <a:srgbClr val="E4DED4"/>
-                      </a:solidFill>
-                      <a:prstDash val="solid"/>
-                      <a:round/>
-                      <a:headEnd type="none" w="med" len="med"/>
-                      <a:tailEnd type="none" w="med" len="med"/>
-                    </a:lnL>
-                    <a:lnR w="6350" cap="flat" cmpd="sng" algn="ctr">
-                      <a:solidFill>
-                        <a:srgbClr val="E4DED4"/>
-                      </a:solidFill>
-                      <a:prstDash val="solid"/>
-                      <a:round/>
-                      <a:headEnd type="none" w="med" len="med"/>
-                      <a:tailEnd type="none" w="med" len="med"/>
-                    </a:lnR>
-                    <a:lnT w="6350" cap="flat" cmpd="sng" algn="ctr">
-                      <a:solidFill>
-                        <a:srgbClr val="E4DED4"/>
-                      </a:solidFill>
-                      <a:prstDash val="solid"/>
-                      <a:round/>
-                      <a:headEnd type="none" w="med" len="med"/>
-                      <a:tailEnd type="none" w="med" len="med"/>
-                    </a:lnT>
-                    <a:lnB w="6350" cap="flat" cmpd="sng" algn="ctr">
-                      <a:solidFill>
-                        <a:srgbClr val="E4DED4"/>
-                      </a:solidFill>
-                      <a:prstDash val="solid"/>
-                      <a:round/>
-                      <a:headEnd type="none" w="med" len="med"/>
-                      <a:tailEnd type="none" w="med" len="med"/>
-                    </a:lnB>
-                    <a:solidFill>
-                      <a:srgbClr val="E8F3EC"/>
-                    </a:solidFill>
-                  </a:tcPr>
-                </a:tc>
-                <a:tc>
-                  <a:txBody>
-                    <a:bodyPr/>
-                    <a:lstStyle/>
-                    <a:p>
-                      <a:pPr algn="ctr" indent="0" marL="0">
-                        <a:buNone/>
-                      </a:pPr>
-                      <a:r>
-                        <a:rPr lang="en-US" sz="950" dirty="0">
-                          <a:solidFill>
-                            <a:srgbClr val="1B1714"/>
-                          </a:solidFill>
-                          <a:latin typeface="IBM Plex Mono" pitchFamily="34" charset="0"/>
-                          <a:ea typeface="IBM Plex Mono" pitchFamily="34" charset="-122"/>
-                          <a:cs typeface="IBM Plex Mono" pitchFamily="34" charset="-120"/>
-                        </a:rPr>
-                        <a:t>30%</a:t>
-                      </a:r>
-                      <a:endParaRPr lang="en-US" sz="950" dirty="0">
-                        <a:latin typeface="IBM Plex Mono" charset="0"/>
-                        <a:ea typeface="IBM Plex Mono" charset="0"/>
-                        <a:cs typeface="IBM Plex Mono" charset="0"/>
-                      </a:endParaRPr>
-                    </a:p>
-                  </a:txBody>
-                  <a:tcPr marL="63500" marR="63500" marT="25400" marB="25400" anchor="ctr">
-                    <a:lnL w="6350" cap="flat" cmpd="sng" algn="ctr">
-                      <a:solidFill>
-                        <a:srgbClr val="E4DED4"/>
-                      </a:solidFill>
-                      <a:prstDash val="solid"/>
-                      <a:round/>
-                      <a:headEnd type="none" w="med" len="med"/>
-                      <a:tailEnd type="none" w="med" len="med"/>
-                    </a:lnL>
-                    <a:lnR w="6350" cap="flat" cmpd="sng" algn="ctr">
-                      <a:solidFill>
-                        <a:srgbClr val="E4DED4"/>
-                      </a:solidFill>
-                      <a:prstDash val="solid"/>
-                      <a:round/>
-                      <a:headEnd type="none" w="med" len="med"/>
-                      <a:tailEnd type="none" w="med" len="med"/>
-                    </a:lnR>
-                    <a:lnT w="6350" cap="flat" cmpd="sng" algn="ctr">
-                      <a:solidFill>
-                        <a:srgbClr val="E4DED4"/>
-                      </a:solidFill>
-                      <a:prstDash val="solid"/>
-                      <a:round/>
-                      <a:headEnd type="none" w="med" len="med"/>
-                      <a:tailEnd type="none" w="med" len="med"/>
-                    </a:lnT>
-                    <a:lnB w="6350" cap="flat" cmpd="sng" algn="ctr">
-                      <a:solidFill>
-                        <a:srgbClr val="E4DED4"/>
-                      </a:solidFill>
-                      <a:prstDash val="solid"/>
-                      <a:round/>
-                      <a:headEnd type="none" w="med" len="med"/>
-                      <a:tailEnd type="none" w="med" len="med"/>
-                    </a:lnB>
-                    <a:solidFill>
-                      <a:srgbClr val="E8F3EC"/>
-                    </a:solidFill>
-                  </a:tcPr>
-                </a:tc>
-                <a:tc>
-                  <a:txBody>
-                    <a:bodyPr/>
-                    <a:lstStyle/>
-                    <a:p>
-                      <a:pPr algn="ctr" indent="0" marL="0">
-                        <a:buNone/>
-                      </a:pPr>
-                      <a:r>
-                        <a:rPr lang="en-US" sz="950" dirty="0">
-                          <a:solidFill>
-                            <a:srgbClr val="1B1714"/>
-                          </a:solidFill>
-                          <a:latin typeface="IBM Plex Mono" pitchFamily="34" charset="0"/>
-                          <a:ea typeface="IBM Plex Mono" pitchFamily="34" charset="-122"/>
-                          <a:cs typeface="IBM Plex Mono" pitchFamily="34" charset="-120"/>
-                        </a:rPr>
-                        <a:t>$7.8bn</a:t>
-                      </a:r>
-                      <a:endParaRPr lang="en-US" sz="950" dirty="0">
-                        <a:latin typeface="IBM Plex Mono" charset="0"/>
-                        <a:ea typeface="IBM Plex Mono" charset="0"/>
-                        <a:cs typeface="IBM Plex Mono" charset="0"/>
-                      </a:endParaRPr>
-                    </a:p>
-                  </a:txBody>
-                  <a:tcPr marL="63500" marR="63500" marT="25400" marB="25400" anchor="ctr">
-                    <a:lnL w="6350" cap="flat" cmpd="sng" algn="ctr">
-                      <a:solidFill>
-                        <a:srgbClr val="E4DED4"/>
-                      </a:solidFill>
-                      <a:prstDash val="solid"/>
-                      <a:round/>
-                      <a:headEnd type="none" w="med" len="med"/>
-                      <a:tailEnd type="none" w="med" len="med"/>
-                    </a:lnL>
-                    <a:lnR w="6350" cap="flat" cmpd="sng" algn="ctr">
-                      <a:solidFill>
-                        <a:srgbClr val="E4DED4"/>
-                      </a:solidFill>
-                      <a:prstDash val="solid"/>
-                      <a:round/>
-                      <a:headEnd type="none" w="med" len="med"/>
-                      <a:tailEnd type="none" w="med" len="med"/>
-                    </a:lnR>
-                    <a:lnT w="6350" cap="flat" cmpd="sng" algn="ctr">
-                      <a:solidFill>
-                        <a:srgbClr val="E4DED4"/>
-                      </a:solidFill>
-                      <a:prstDash val="solid"/>
-                      <a:round/>
-                      <a:headEnd type="none" w="med" len="med"/>
-                      <a:tailEnd type="none" w="med" len="med"/>
-                    </a:lnT>
-                    <a:lnB w="6350" cap="flat" cmpd="sng" algn="ctr">
-                      <a:solidFill>
-                        <a:srgbClr val="E4DED4"/>
-                      </a:solidFill>
-                      <a:prstDash val="solid"/>
-                      <a:round/>
-                      <a:headEnd type="none" w="med" len="med"/>
-                      <a:tailEnd type="none" w="med" len="med"/>
-                    </a:lnB>
-                    <a:solidFill>
-                      <a:srgbClr val="E8F3EC"/>
-                    </a:solidFill>
-                  </a:tcPr>
-                </a:tc>
-                <a:tc>
-                  <a:txBody>
-                    <a:bodyPr/>
-                    <a:lstStyle/>
-                    <a:p>
-                      <a:pPr algn="ctr" indent="0" marL="0">
-                        <a:buNone/>
-                      </a:pPr>
-                      <a:r>
-                        <a:rPr lang="en-US" sz="1200" b="1" dirty="0">
-                          <a:solidFill>
-                            <a:srgbClr val="C1121F"/>
-                          </a:solidFill>
-                          <a:latin typeface="Space Grotesk" pitchFamily="34" charset="0"/>
-                          <a:ea typeface="Space Grotesk" pitchFamily="34" charset="-122"/>
-                          <a:cs typeface="Space Grotesk" pitchFamily="34" charset="-120"/>
-                        </a:rPr>
-                        <a:t>14.1x</a:t>
-                      </a:r>
-                      <a:endParaRPr lang="en-US" sz="1200" dirty="0">
-                        <a:latin typeface="Space Grotesk" charset="0"/>
-                        <a:ea typeface="Space Grotesk" charset="0"/>
-                        <a:cs typeface="Space Grotesk" charset="0"/>
-                      </a:endParaRPr>
-                    </a:p>
-                  </a:txBody>
-                  <a:tcPr marL="63500" marR="63500" marT="25400" marB="25400" anchor="ctr">
-                    <a:lnL w="6350" cap="flat" cmpd="sng" algn="ctr">
-                      <a:solidFill>
-                        <a:srgbClr val="E4DED4"/>
-                      </a:solidFill>
-                      <a:prstDash val="solid"/>
-                      <a:round/>
-                      <a:headEnd type="none" w="med" len="med"/>
-                      <a:tailEnd type="none" w="med" len="med"/>
-                    </a:lnL>
-                    <a:lnR w="6350" cap="flat" cmpd="sng" algn="ctr">
-                      <a:solidFill>
-                        <a:srgbClr val="E4DED4"/>
-                      </a:solidFill>
-                      <a:prstDash val="solid"/>
-                      <a:round/>
-                      <a:headEnd type="none" w="med" len="med"/>
-                      <a:tailEnd type="none" w="med" len="med"/>
-                    </a:lnR>
-                    <a:lnT w="6350" cap="flat" cmpd="sng" algn="ctr">
-                      <a:solidFill>
-                        <a:srgbClr val="E4DED4"/>
-                      </a:solidFill>
-                      <a:prstDash val="solid"/>
-                      <a:round/>
-                      <a:headEnd type="none" w="med" len="med"/>
-                      <a:tailEnd type="none" w="med" len="med"/>
-                    </a:lnT>
-                    <a:lnB w="6350" cap="flat" cmpd="sng" algn="ctr">
-                      <a:solidFill>
-                        <a:srgbClr val="E4DED4"/>
-                      </a:solidFill>
-                      <a:prstDash val="solid"/>
-                      <a:round/>
-                      <a:headEnd type="none" w="med" len="med"/>
-                      <a:tailEnd type="none" w="med" len="med"/>
-                    </a:lnB>
-                    <a:solidFill>
-                      <a:srgbClr val="E8F3EC"/>
-                    </a:solidFill>
-                  </a:tcPr>
-                </a:tc>
-                <a:tc>
-                  <a:txBody>
-                    <a:bodyPr/>
-                    <a:lstStyle/>
-                    <a:p>
-                      <a:pPr algn="ctr" indent="0" marL="0">
-                        <a:buNone/>
-                      </a:pPr>
-                      <a:r>
-                        <a:rPr lang="en-US" sz="800" b="1" dirty="0">
-                          <a:solidFill>
-                            <a:srgbClr val="6F6960"/>
-                          </a:solidFill>
-                          <a:latin typeface="IBM Plex Mono" pitchFamily="34" charset="0"/>
-                          <a:ea typeface="IBM Plex Mono" pitchFamily="34" charset="-122"/>
-                          <a:cs typeface="IBM Plex Mono" pitchFamily="34" charset="-120"/>
-                        </a:rPr>
-                        <a:t>+1.1x</a:t>
-                      </a:r>
-                      <a:endParaRPr lang="en-US" sz="800" dirty="0">
-                        <a:latin typeface="IBM Plex Mono" charset="0"/>
-                        <a:ea typeface="IBM Plex Mono" charset="0"/>
-                        <a:cs typeface="IBM Plex Mono" charset="0"/>
-                      </a:endParaRPr>
-                    </a:p>
-                  </a:txBody>
-                  <a:tcPr marL="63500" marR="63500" marT="25400" marB="25400" anchor="ctr">
-                    <a:lnL w="6350" cap="flat" cmpd="sng" algn="ctr">
-                      <a:solidFill>
-                        <a:srgbClr val="E4DED4"/>
-                      </a:solidFill>
-                      <a:prstDash val="solid"/>
-                      <a:round/>
-                      <a:headEnd type="none" w="med" len="med"/>
-                      <a:tailEnd type="none" w="med" len="med"/>
-                    </a:lnL>
-                    <a:lnR w="6350" cap="flat" cmpd="sng" algn="ctr">
-                      <a:solidFill>
-                        <a:srgbClr val="E4DED4"/>
-                      </a:solidFill>
-                      <a:prstDash val="solid"/>
-                      <a:round/>
-                      <a:headEnd type="none" w="med" len="med"/>
-                      <a:tailEnd type="none" w="med" len="med"/>
-                    </a:lnR>
-                    <a:lnT w="6350" cap="flat" cmpd="sng" algn="ctr">
-                      <a:solidFill>
-                        <a:srgbClr val="E4DED4"/>
-                      </a:solidFill>
-                      <a:prstDash val="solid"/>
-                      <a:round/>
-                      <a:headEnd type="none" w="med" len="med"/>
-                      <a:tailEnd type="none" w="med" len="med"/>
-                    </a:lnT>
-                    <a:lnB w="6350" cap="flat" cmpd="sng" algn="ctr">
-                      <a:solidFill>
-                        <a:srgbClr val="E4DED4"/>
-                      </a:solidFill>
-                      <a:prstDash val="solid"/>
-                      <a:round/>
-                      <a:headEnd type="none" w="med" len="med"/>
-                      <a:tailEnd type="none" w="med" len="med"/>
-                    </a:lnB>
-                    <a:solidFill>
-                      <a:srgbClr val="E8F3EC"/>
-                    </a:solidFill>
-                  </a:tcPr>
-                </a:tc>
-              </a:tr>
-              <a:tr h="512064">
-                <a:tc>
-                  <a:txBody>
-                    <a:bodyPr/>
-                    <a:lstStyle/>
-                    <a:p>
-                      <a:pPr indent="0" marL="0">
-                        <a:buNone/>
-                      </a:pPr>
-                      <a:r>
-                        <a:rPr lang="en-US" sz="950" dirty="0">
-                          <a:solidFill>
-                            <a:srgbClr val="1B1714"/>
-                          </a:solidFill>
-                          <a:latin typeface="IBM Plex Sans KR" pitchFamily="34" charset="0"/>
-                          <a:ea typeface="IBM Plex Sans KR" pitchFamily="34" charset="-122"/>
-                          <a:cs typeface="IBM Plex Sans KR" pitchFamily="34" charset="-120"/>
-                        </a:rPr>
-                        <a:t>①+② 결합</a:t>
-                      </a:r>
-                      <a:endParaRPr lang="en-US" sz="950" dirty="0">
-                        <a:latin typeface="IBM Plex Sans KR" charset="0"/>
-                        <a:ea typeface="IBM Plex Sans KR" charset="0"/>
-                        <a:cs typeface="IBM Plex Sans KR" charset="0"/>
-                      </a:endParaRPr>
-                    </a:p>
-                  </a:txBody>
-                  <a:tcPr marL="63500" marR="63500" marT="25400" marB="25400" anchor="ctr">
-                    <a:lnL w="6350" cap="flat" cmpd="sng" algn="ctr">
-                      <a:solidFill>
-                        <a:srgbClr val="E4DED4"/>
-                      </a:solidFill>
-                      <a:prstDash val="solid"/>
-                      <a:round/>
-                      <a:headEnd type="none" w="med" len="med"/>
-                      <a:tailEnd type="none" w="med" len="med"/>
-                    </a:lnL>
-                    <a:lnR w="6350" cap="flat" cmpd="sng" algn="ctr">
-                      <a:solidFill>
-                        <a:srgbClr val="E4DED4"/>
-                      </a:solidFill>
-                      <a:prstDash val="solid"/>
-                      <a:round/>
-                      <a:headEnd type="none" w="med" len="med"/>
-                      <a:tailEnd type="none" w="med" len="med"/>
-                    </a:lnR>
-                    <a:lnT w="6350" cap="flat" cmpd="sng" algn="ctr">
-                      <a:solidFill>
-                        <a:srgbClr val="E4DED4"/>
-                      </a:solidFill>
-                      <a:prstDash val="solid"/>
-                      <a:round/>
-                      <a:headEnd type="none" w="med" len="med"/>
-                      <a:tailEnd type="none" w="med" len="med"/>
-                    </a:lnT>
-                    <a:lnB w="6350" cap="flat" cmpd="sng" algn="ctr">
-                      <a:solidFill>
-                        <a:srgbClr val="E4DED4"/>
-                      </a:solidFill>
-                      <a:prstDash val="solid"/>
-                      <a:round/>
-                      <a:headEnd type="none" w="med" len="med"/>
-                      <a:tailEnd type="none" w="med" len="med"/>
-                    </a:lnB>
-                    <a:solidFill>
-                      <a:srgbClr val="E8F3EC"/>
-                    </a:solidFill>
-                  </a:tcPr>
-                </a:tc>
-                <a:tc>
-                  <a:txBody>
-                    <a:bodyPr/>
-                    <a:lstStyle/>
-                    <a:p>
-                      <a:pPr algn="ctr" indent="0" marL="0">
-                        <a:buNone/>
-                      </a:pPr>
-                      <a:r>
-                        <a:rPr lang="en-US" sz="950" dirty="0">
-                          <a:solidFill>
-                            <a:srgbClr val="1B1714"/>
-                          </a:solidFill>
-                          <a:latin typeface="IBM Plex Mono" pitchFamily="34" charset="0"/>
-                          <a:ea typeface="IBM Plex Mono" pitchFamily="34" charset="-122"/>
-                          <a:cs typeface="IBM Plex Mono" pitchFamily="34" charset="-120"/>
-                        </a:rPr>
-                        <a:t>20%</a:t>
-                      </a:r>
-                      <a:endParaRPr lang="en-US" sz="950" dirty="0">
-                        <a:latin typeface="IBM Plex Mono" charset="0"/>
-                        <a:ea typeface="IBM Plex Mono" charset="0"/>
-                        <a:cs typeface="IBM Plex Mono" charset="0"/>
-                      </a:endParaRPr>
-                    </a:p>
-                  </a:txBody>
-                  <a:tcPr marL="63500" marR="63500" marT="25400" marB="25400" anchor="ctr">
-                    <a:lnL w="6350" cap="flat" cmpd="sng" algn="ctr">
-                      <a:solidFill>
-                        <a:srgbClr val="E4DED4"/>
-                      </a:solidFill>
-                      <a:prstDash val="solid"/>
-                      <a:round/>
-                      <a:headEnd type="none" w="med" len="med"/>
-                      <a:tailEnd type="none" w="med" len="med"/>
-                    </a:lnL>
-                    <a:lnR w="6350" cap="flat" cmpd="sng" algn="ctr">
-                      <a:solidFill>
-                        <a:srgbClr val="E4DED4"/>
-                      </a:solidFill>
-                      <a:prstDash val="solid"/>
-                      <a:round/>
-                      <a:headEnd type="none" w="med" len="med"/>
-                      <a:tailEnd type="none" w="med" len="med"/>
-                    </a:lnR>
-                    <a:lnT w="6350" cap="flat" cmpd="sng" algn="ctr">
-                      <a:solidFill>
-                        <a:srgbClr val="E4DED4"/>
-                      </a:solidFill>
-                      <a:prstDash val="solid"/>
-                      <a:round/>
-                      <a:headEnd type="none" w="med" len="med"/>
-                      <a:tailEnd type="none" w="med" len="med"/>
-                    </a:lnT>
-                    <a:lnB w="6350" cap="flat" cmpd="sng" algn="ctr">
-                      <a:solidFill>
-                        <a:srgbClr val="E4DED4"/>
-                      </a:solidFill>
-                      <a:prstDash val="solid"/>
-                      <a:round/>
-                      <a:headEnd type="none" w="med" len="med"/>
-                      <a:tailEnd type="none" w="med" len="med"/>
-                    </a:lnB>
-                    <a:solidFill>
-                      <a:srgbClr val="E8F3EC"/>
-                    </a:solidFill>
-                  </a:tcPr>
-                </a:tc>
-                <a:tc>
-                  <a:txBody>
-                    <a:bodyPr/>
-                    <a:lstStyle/>
-                    <a:p>
-                      <a:pPr algn="ctr" indent="0" marL="0">
-                        <a:buNone/>
-                      </a:pPr>
-                      <a:r>
-                        <a:rPr lang="en-US" sz="950" dirty="0">
-                          <a:solidFill>
-                            <a:srgbClr val="1B1714"/>
-                          </a:solidFill>
-                          <a:latin typeface="IBM Plex Mono" pitchFamily="34" charset="0"/>
-                          <a:ea typeface="IBM Plex Mono" pitchFamily="34" charset="-122"/>
-                          <a:cs typeface="IBM Plex Mono" pitchFamily="34" charset="-120"/>
-                        </a:rPr>
-                        <a:t>30%</a:t>
-                      </a:r>
-                      <a:endParaRPr lang="en-US" sz="950" dirty="0">
-                        <a:latin typeface="IBM Plex Mono" charset="0"/>
-                        <a:ea typeface="IBM Plex Mono" charset="0"/>
-                        <a:cs typeface="IBM Plex Mono" charset="0"/>
-                      </a:endParaRPr>
-                    </a:p>
-                  </a:txBody>
-                  <a:tcPr marL="63500" marR="63500" marT="25400" marB="25400" anchor="ctr">
-                    <a:lnL w="6350" cap="flat" cmpd="sng" algn="ctr">
-                      <a:solidFill>
-                        <a:srgbClr val="E4DED4"/>
-                      </a:solidFill>
-                      <a:prstDash val="solid"/>
-                      <a:round/>
-                      <a:headEnd type="none" w="med" len="med"/>
-                      <a:tailEnd type="none" w="med" len="med"/>
-                    </a:lnL>
-                    <a:lnR w="6350" cap="flat" cmpd="sng" algn="ctr">
-                      <a:solidFill>
-                        <a:srgbClr val="E4DED4"/>
-                      </a:solidFill>
-                      <a:prstDash val="solid"/>
-                      <a:round/>
-                      <a:headEnd type="none" w="med" len="med"/>
-                      <a:tailEnd type="none" w="med" len="med"/>
-                    </a:lnR>
-                    <a:lnT w="6350" cap="flat" cmpd="sng" algn="ctr">
-                      <a:solidFill>
-                        <a:srgbClr val="E4DED4"/>
-                      </a:solidFill>
-                      <a:prstDash val="solid"/>
-                      <a:round/>
-                      <a:headEnd type="none" w="med" len="med"/>
-                      <a:tailEnd type="none" w="med" len="med"/>
-                    </a:lnT>
-                    <a:lnB w="6350" cap="flat" cmpd="sng" algn="ctr">
-                      <a:solidFill>
-                        <a:srgbClr val="E4DED4"/>
-                      </a:solidFill>
-                      <a:prstDash val="solid"/>
-                      <a:round/>
-                      <a:headEnd type="none" w="med" len="med"/>
-                      <a:tailEnd type="none" w="med" len="med"/>
-                    </a:lnB>
-                    <a:solidFill>
-                      <a:srgbClr val="E8F3EC"/>
-                    </a:solidFill>
-                  </a:tcPr>
-                </a:tc>
-                <a:tc>
-                  <a:txBody>
-                    <a:bodyPr/>
-                    <a:lstStyle/>
-                    <a:p>
-                      <a:pPr algn="ctr" indent="0" marL="0">
-                        <a:buNone/>
-                      </a:pPr>
-                      <a:r>
-                        <a:rPr lang="en-US" sz="950" dirty="0">
-                          <a:solidFill>
-                            <a:srgbClr val="1B1714"/>
-                          </a:solidFill>
-                          <a:latin typeface="IBM Plex Mono" pitchFamily="34" charset="0"/>
-                          <a:ea typeface="IBM Plex Mono" pitchFamily="34" charset="-122"/>
-                          <a:cs typeface="IBM Plex Mono" pitchFamily="34" charset="-120"/>
-                        </a:rPr>
-                        <a:t>$7.3bn</a:t>
+                        <a:t>$7.0bn</a:t>
                       </a:r>
                       <a:endParaRPr lang="en-US" sz="950" dirty="0">
                         <a:latin typeface="IBM Plex Mono" charset="0"/>
@@ -9884,7 +10496,7 @@
                           <a:ea typeface="Space Grotesk" pitchFamily="34" charset="-122"/>
                           <a:cs typeface="Space Grotesk" pitchFamily="34" charset="-120"/>
                         </a:rPr>
-                        <a:t>13.3x</a:t>
+                        <a:t>12.6x</a:t>
                       </a:r>
                       <a:endParaRPr lang="en-US" sz="1200" dirty="0">
                         <a:latin typeface="Space Grotesk" charset="0"/>
@@ -9952,7 +10564,7 @@
                           <a:ea typeface="IBM Plex Mono" pitchFamily="34" charset="-122"/>
                           <a:cs typeface="IBM Plex Mono" pitchFamily="34" charset="-120"/>
                         </a:rPr>
-                        <a:t>+0.3x</a:t>
+                        <a:t>−0.4x</a:t>
                       </a:r>
                       <a:endParaRPr lang="en-US" sz="800" dirty="0">
                         <a:latin typeface="IBM Plex Mono" charset="0"/>
@@ -10010,7 +10622,7 @@
       </p:graphicFrame>
       <p:sp>
         <p:nvSpPr>
-          <p:cNvPr id="34" name="Text 31"/>
+          <p:cNvPr id="40" name="Text 37"/>
           <p:cNvSpPr/>
           <p:nvPr/>
         </p:nvSpPr>
@@ -10049,7 +10661,7 @@
       </p:sp>
       <p:sp>
         <p:nvSpPr>
-          <p:cNvPr id="35" name="Shape 32"/>
+          <p:cNvPr id="41" name="Shape 38"/>
           <p:cNvSpPr/>
           <p:nvPr/>
         </p:nvSpPr>
@@ -10072,14 +10684,14 @@
       </p:sp>
       <p:sp>
         <p:nvSpPr>
-          <p:cNvPr id="36" name="Shape 33"/>
+          <p:cNvPr id="42" name="Shape 39"/>
           <p:cNvSpPr/>
           <p:nvPr/>
         </p:nvSpPr>
         <p:spPr>
           <a:xfrm>
             <a:off x="4178808" y="4992624"/>
-            <a:ext cx="2971800" cy="164592"/>
+            <a:ext cx="3343275" cy="164592"/>
           </a:xfrm>
           <a:prstGeom prst="rect">
             <a:avLst/>
@@ -10097,14 +10709,14 @@
       </p:sp>
       <p:sp>
         <p:nvSpPr>
-          <p:cNvPr id="37" name="Text 34"/>
+          <p:cNvPr id="43" name="Text 40"/>
           <p:cNvSpPr/>
           <p:nvPr/>
         </p:nvSpPr>
         <p:spPr>
           <a:xfrm>
             <a:off x="4178808" y="4764024"/>
-            <a:ext cx="2971800" cy="182880"/>
+            <a:ext cx="3343275" cy="182880"/>
           </a:xfrm>
           <a:prstGeom prst="rect">
             <a:avLst/>
@@ -10136,14 +10748,14 @@
       </p:sp>
       <p:sp>
         <p:nvSpPr>
-          <p:cNvPr id="38" name="Shape 35"/>
-          <p:cNvSpPr/>
-          <p:nvPr/>
-        </p:nvSpPr>
-        <p:spPr>
-          <a:xfrm>
-            <a:off x="7328916" y="4855464"/>
-            <a:ext cx="1248156" cy="0"/>
+          <p:cNvPr id="44" name="Shape 41"/>
+          <p:cNvSpPr/>
+          <p:nvPr/>
+        </p:nvSpPr>
+        <p:spPr>
+          <a:xfrm>
+            <a:off x="7254621" y="4855464"/>
+            <a:ext cx="1872234" cy="0"/>
           </a:xfrm>
           <a:prstGeom prst="line">
             <a:avLst/>
@@ -10161,14 +10773,14 @@
       </p:sp>
       <p:sp>
         <p:nvSpPr>
-          <p:cNvPr id="39" name="Text 36"/>
-          <p:cNvSpPr/>
-          <p:nvPr/>
-        </p:nvSpPr>
-        <p:spPr>
-          <a:xfrm>
-            <a:off x="7054596" y="4672584"/>
-            <a:ext cx="1796796" cy="164592"/>
+          <p:cNvPr id="45" name="Text 42"/>
+          <p:cNvSpPr/>
+          <p:nvPr/>
+        </p:nvSpPr>
+        <p:spPr>
+          <a:xfrm>
+            <a:off x="6888861" y="4672584"/>
+            <a:ext cx="2603754" cy="164592"/>
           </a:xfrm>
           <a:prstGeom prst="rect">
             <a:avLst/>
@@ -10192,7 +10804,7 @@
                 <a:ea typeface="IBM Plex Mono" pitchFamily="34" charset="-122"/>
                 <a:cs typeface="IBM Plex Mono" pitchFamily="34" charset="-120"/>
               </a:rPr>
-              <a:t>조달 레버 −2.1x</a:t>
+              <a:t>조달 레버 −2.8x → 밴드 진입</a:t>
             </a:r>
             <a:endParaRPr lang="en-US" sz="700" dirty="0"/>
           </a:p>
@@ -10200,13 +10812,13 @@
       </p:sp>
       <p:sp>
         <p:nvSpPr>
-          <p:cNvPr id="40" name="Shape 37"/>
-          <p:cNvSpPr/>
-          <p:nvPr/>
-        </p:nvSpPr>
-        <p:spPr>
-          <a:xfrm>
-            <a:off x="8531352" y="5029200"/>
+          <p:cNvPr id="46" name="Shape 43"/>
+          <p:cNvSpPr/>
+          <p:nvPr/>
+        </p:nvSpPr>
+        <p:spPr>
+          <a:xfrm>
+            <a:off x="9081135" y="5029200"/>
             <a:ext cx="91440" cy="91440"/>
           </a:xfrm>
           <a:prstGeom prst="ellipse">
@@ -10220,13 +10832,13 @@
       </p:sp>
       <p:sp>
         <p:nvSpPr>
-          <p:cNvPr id="41" name="Text 38"/>
-          <p:cNvSpPr/>
-          <p:nvPr/>
-        </p:nvSpPr>
-        <p:spPr>
-          <a:xfrm>
-            <a:off x="8119872" y="5166360"/>
+          <p:cNvPr id="47" name="Text 44"/>
+          <p:cNvSpPr/>
+          <p:nvPr/>
+        </p:nvSpPr>
+        <p:spPr>
+          <a:xfrm>
+            <a:off x="8669655" y="5166360"/>
             <a:ext cx="914400" cy="182880"/>
           </a:xfrm>
           <a:prstGeom prst="rect">
@@ -10259,13 +10871,13 @@
       </p:sp>
       <p:sp>
         <p:nvSpPr>
-          <p:cNvPr id="42" name="Text 39"/>
-          <p:cNvSpPr/>
-          <p:nvPr/>
-        </p:nvSpPr>
-        <p:spPr>
-          <a:xfrm>
-            <a:off x="8119872" y="5056632"/>
+          <p:cNvPr id="48" name="Text 45"/>
+          <p:cNvSpPr/>
+          <p:nvPr/>
+        </p:nvSpPr>
+        <p:spPr>
+          <a:xfrm>
+            <a:off x="8669655" y="5056632"/>
             <a:ext cx="914400" cy="182880"/>
           </a:xfrm>
           <a:prstGeom prst="rect">
@@ -10298,13 +10910,13 @@
       </p:sp>
       <p:sp>
         <p:nvSpPr>
-          <p:cNvPr id="43" name="Shape 40"/>
-          <p:cNvSpPr/>
-          <p:nvPr/>
-        </p:nvSpPr>
-        <p:spPr>
-          <a:xfrm>
-            <a:off x="7758684" y="5029200"/>
+          <p:cNvPr id="49" name="Shape 46"/>
+          <p:cNvSpPr/>
+          <p:nvPr/>
+        </p:nvSpPr>
+        <p:spPr>
+          <a:xfrm>
+            <a:off x="8211883" y="5029200"/>
             <a:ext cx="91440" cy="91440"/>
           </a:xfrm>
           <a:prstGeom prst="ellipse">
@@ -10318,13 +10930,13 @@
       </p:sp>
       <p:sp>
         <p:nvSpPr>
-          <p:cNvPr id="44" name="Text 41"/>
-          <p:cNvSpPr/>
-          <p:nvPr/>
-        </p:nvSpPr>
-        <p:spPr>
-          <a:xfrm>
-            <a:off x="7347204" y="5166360"/>
+          <p:cNvPr id="50" name="Text 47"/>
+          <p:cNvSpPr/>
+          <p:nvPr/>
+        </p:nvSpPr>
+        <p:spPr>
+          <a:xfrm>
+            <a:off x="7800403" y="5166360"/>
             <a:ext cx="914400" cy="182880"/>
           </a:xfrm>
           <a:prstGeom prst="rect">
@@ -10357,13 +10969,13 @@
       </p:sp>
       <p:sp>
         <p:nvSpPr>
-          <p:cNvPr id="45" name="Text 42"/>
-          <p:cNvSpPr/>
-          <p:nvPr/>
-        </p:nvSpPr>
-        <p:spPr>
-          <a:xfrm>
-            <a:off x="7347204" y="5056632"/>
+          <p:cNvPr id="51" name="Text 48"/>
+          <p:cNvSpPr/>
+          <p:nvPr/>
+        </p:nvSpPr>
+        <p:spPr>
+          <a:xfrm>
+            <a:off x="7800403" y="5056632"/>
             <a:ext cx="914400" cy="182880"/>
           </a:xfrm>
           <a:prstGeom prst="rect">
@@ -10396,13 +11008,111 @@
       </p:sp>
       <p:sp>
         <p:nvSpPr>
-          <p:cNvPr id="46" name="Shape 43"/>
-          <p:cNvSpPr/>
-          <p:nvPr/>
-        </p:nvSpPr>
-        <p:spPr>
-          <a:xfrm>
-            <a:off x="7283196" y="5029200"/>
+          <p:cNvPr id="52" name="Shape 49"/>
+          <p:cNvSpPr/>
+          <p:nvPr/>
+        </p:nvSpPr>
+        <p:spPr>
+          <a:xfrm>
+            <a:off x="7543228" y="5029200"/>
+            <a:ext cx="91440" cy="91440"/>
+          </a:xfrm>
+          <a:prstGeom prst="ellipse">
+            <a:avLst/>
+          </a:prstGeom>
+          <a:solidFill>
+            <a:srgbClr val="8A5A55"/>
+          </a:solidFill>
+          <a:ln/>
+        </p:spPr>
+      </p:sp>
+      <p:sp>
+        <p:nvSpPr>
+          <p:cNvPr id="53" name="Text 50"/>
+          <p:cNvSpPr/>
+          <p:nvPr/>
+        </p:nvSpPr>
+        <p:spPr>
+          <a:xfrm>
+            <a:off x="7131749" y="5166360"/>
+            <a:ext cx="914400" cy="182880"/>
+          </a:xfrm>
+          <a:prstGeom prst="rect">
+            <a:avLst/>
+          </a:prstGeom>
+          <a:noFill/>
+          <a:ln/>
+        </p:spPr>
+        <p:txBody>
+          <a:bodyPr wrap="square" lIns="0" tIns="0" rIns="0" bIns="0" rtlCol="0" anchor="ctr"/>
+          <a:lstStyle/>
+          <a:p>
+            <a:pPr algn="ctr" indent="0" marL="0">
+              <a:buNone/>
+            </a:pPr>
+            <a:r>
+              <a:rPr lang="en-US" sz="750" b="1" dirty="0">
+                <a:solidFill>
+                  <a:srgbClr val="8A5A55"/>
+                </a:solidFill>
+                <a:latin typeface="IBM Plex Mono" pitchFamily="34" charset="0"/>
+                <a:ea typeface="IBM Plex Mono" pitchFamily="34" charset="-122"/>
+                <a:cs typeface="IBM Plex Mono" pitchFamily="34" charset="-120"/>
+              </a:rPr>
+              <a:t>③</a:t>
+            </a:r>
+            <a:endParaRPr lang="en-US" sz="750" dirty="0"/>
+          </a:p>
+        </p:txBody>
+      </p:sp>
+      <p:sp>
+        <p:nvSpPr>
+          <p:cNvPr id="54" name="Text 51"/>
+          <p:cNvSpPr/>
+          <p:nvPr/>
+        </p:nvSpPr>
+        <p:spPr>
+          <a:xfrm>
+            <a:off x="7131749" y="5056632"/>
+            <a:ext cx="914400" cy="182880"/>
+          </a:xfrm>
+          <a:prstGeom prst="rect">
+            <a:avLst/>
+          </a:prstGeom>
+          <a:noFill/>
+          <a:ln/>
+        </p:spPr>
+        <p:txBody>
+          <a:bodyPr wrap="square" lIns="0" tIns="0" rIns="0" bIns="0" rtlCol="0" anchor="t"/>
+          <a:lstStyle/>
+          <a:p>
+            <a:pPr algn="ctr" indent="0" marL="0">
+              <a:buNone/>
+            </a:pPr>
+            <a:r>
+              <a:rPr lang="en-US" sz="800" b="1" dirty="0">
+                <a:solidFill>
+                  <a:srgbClr val="8A5A55"/>
+                </a:solidFill>
+                <a:latin typeface="IBM Plex Mono" pitchFamily="34" charset="0"/>
+                <a:ea typeface="IBM Plex Mono" pitchFamily="34" charset="-122"/>
+                <a:cs typeface="IBM Plex Mono" pitchFamily="34" charset="-120"/>
+              </a:rPr>
+              <a:t>13.1x</a:t>
+            </a:r>
+            <a:endParaRPr lang="en-US" sz="800" dirty="0"/>
+          </a:p>
+        </p:txBody>
+      </p:sp>
+      <p:sp>
+        <p:nvSpPr>
+          <p:cNvPr id="55" name="Shape 52"/>
+          <p:cNvSpPr/>
+          <p:nvPr/>
+        </p:nvSpPr>
+        <p:spPr>
+          <a:xfrm>
+            <a:off x="7208901" y="5029200"/>
             <a:ext cx="91440" cy="91440"/>
           </a:xfrm>
           <a:prstGeom prst="ellipse">
@@ -10416,13 +11126,13 @@
       </p:sp>
       <p:sp>
         <p:nvSpPr>
-          <p:cNvPr id="47" name="Text 44"/>
-          <p:cNvSpPr/>
-          <p:nvPr/>
-        </p:nvSpPr>
-        <p:spPr>
-          <a:xfrm>
-            <a:off x="6871716" y="5166360"/>
+          <p:cNvPr id="56" name="Text 53"/>
+          <p:cNvSpPr/>
+          <p:nvPr/>
+        </p:nvSpPr>
+        <p:spPr>
+          <a:xfrm>
+            <a:off x="6797421" y="5166360"/>
             <a:ext cx="914400" cy="182880"/>
           </a:xfrm>
           <a:prstGeom prst="rect">
@@ -10447,7 +11157,7 @@
                 <a:ea typeface="IBM Plex Mono" pitchFamily="34" charset="-122"/>
                 <a:cs typeface="IBM Plex Mono" pitchFamily="34" charset="-120"/>
               </a:rPr>
-              <a:t>①+②</a:t>
+              <a:t>최대</a:t>
             </a:r>
             <a:endParaRPr lang="en-US" sz="750" dirty="0"/>
           </a:p>
@@ -10455,13 +11165,13 @@
       </p:sp>
       <p:sp>
         <p:nvSpPr>
-          <p:cNvPr id="48" name="Text 45"/>
-          <p:cNvSpPr/>
-          <p:nvPr/>
-        </p:nvSpPr>
-        <p:spPr>
-          <a:xfrm>
-            <a:off x="6871716" y="5056632"/>
+          <p:cNvPr id="57" name="Text 54"/>
+          <p:cNvSpPr/>
+          <p:nvPr/>
+        </p:nvSpPr>
+        <p:spPr>
+          <a:xfrm>
+            <a:off x="6797421" y="5056632"/>
             <a:ext cx="914400" cy="182880"/>
           </a:xfrm>
           <a:prstGeom prst="rect">
@@ -10486,7 +11196,7 @@
                 <a:ea typeface="IBM Plex Mono" pitchFamily="34" charset="-122"/>
                 <a:cs typeface="IBM Plex Mono" pitchFamily="34" charset="-120"/>
               </a:rPr>
-              <a:t>13.3x</a:t>
+              <a:t>12.6x</a:t>
             </a:r>
             <a:endParaRPr lang="en-US" sz="800" dirty="0"/>
           </a:p>
@@ -10494,7 +11204,7 @@
       </p:sp>
       <p:sp>
         <p:nvSpPr>
-          <p:cNvPr id="49" name="Text 46"/>
+          <p:cNvPr id="58" name="Text 55"/>
           <p:cNvSpPr/>
           <p:nvPr/>
         </p:nvSpPr>
@@ -10533,13 +11243,13 @@
       </p:sp>
       <p:sp>
         <p:nvSpPr>
-          <p:cNvPr id="50" name="Text 47"/>
-          <p:cNvSpPr/>
-          <p:nvPr/>
-        </p:nvSpPr>
-        <p:spPr>
-          <a:xfrm>
-            <a:off x="5687568" y="5330952"/>
+          <p:cNvPr id="59" name="Text 56"/>
+          <p:cNvSpPr/>
+          <p:nvPr/>
+        </p:nvSpPr>
+        <p:spPr>
+          <a:xfrm>
+            <a:off x="5910453" y="5330952"/>
             <a:ext cx="548640" cy="164592"/>
           </a:xfrm>
           <a:prstGeom prst="rect">
@@ -10572,13 +11282,13 @@
       </p:sp>
       <p:sp>
         <p:nvSpPr>
-          <p:cNvPr id="51" name="Text 48"/>
-          <p:cNvSpPr/>
-          <p:nvPr/>
-        </p:nvSpPr>
-        <p:spPr>
-          <a:xfrm>
-            <a:off x="6876288" y="5330952"/>
+          <p:cNvPr id="60" name="Text 57"/>
+          <p:cNvSpPr/>
+          <p:nvPr/>
+        </p:nvSpPr>
+        <p:spPr>
+          <a:xfrm>
+            <a:off x="7247763" y="5330952"/>
             <a:ext cx="548640" cy="164592"/>
           </a:xfrm>
           <a:prstGeom prst="rect">
@@ -10611,13 +11321,13 @@
       </p:sp>
       <p:sp>
         <p:nvSpPr>
-          <p:cNvPr id="52" name="Text 49"/>
-          <p:cNvSpPr/>
-          <p:nvPr/>
-        </p:nvSpPr>
-        <p:spPr>
-          <a:xfrm>
-            <a:off x="8065008" y="5330952"/>
+          <p:cNvPr id="61" name="Text 58"/>
+          <p:cNvSpPr/>
+          <p:nvPr/>
+        </p:nvSpPr>
+        <p:spPr>
+          <a:xfrm>
+            <a:off x="7916418" y="5330952"/>
             <a:ext cx="548640" cy="164592"/>
           </a:xfrm>
           <a:prstGeom prst="rect">
@@ -10642,7 +11352,7 @@
                 <a:ea typeface="IBM Plex Mono" pitchFamily="34" charset="-122"/>
                 <a:cs typeface="IBM Plex Mono" pitchFamily="34" charset="-120"/>
               </a:rPr>
-              <a:t>15x</a:t>
+              <a:t>14x</a:t>
             </a:r>
             <a:endParaRPr lang="en-US" sz="700" dirty="0"/>
           </a:p>
@@ -10650,7 +11360,7 @@
       </p:sp>
       <p:sp>
         <p:nvSpPr>
-          <p:cNvPr id="53" name="Text 50"/>
+          <p:cNvPr id="62" name="Text 59"/>
           <p:cNvSpPr/>
           <p:nvPr/>
         </p:nvSpPr>
@@ -10681,7 +11391,7 @@
                 <a:ea typeface="IBM Plex Mono" pitchFamily="34" charset="-122"/>
                 <a:cs typeface="IBM Plex Mono" pitchFamily="34" charset="-120"/>
               </a:rPr>
-              <a:t>17x</a:t>
+              <a:t>16x</a:t>
             </a:r>
             <a:endParaRPr lang="en-US" sz="700" dirty="0"/>
           </a:p>
@@ -10689,7 +11399,7 @@
       </p:sp>
       <p:sp>
         <p:nvSpPr>
-          <p:cNvPr id="54" name="Shape 51"/>
+          <p:cNvPr id="63" name="Shape 60"/>
           <p:cNvSpPr/>
           <p:nvPr/>
         </p:nvSpPr>
@@ -10711,7 +11421,7 @@
       </p:sp>
       <p:sp>
         <p:nvSpPr>
-          <p:cNvPr id="55" name="Text 52"/>
+          <p:cNvPr id="64" name="Text 61"/>
           <p:cNvSpPr/>
           <p:nvPr/>
         </p:nvSpPr>
@@ -10742,7 +11452,7 @@
                 <a:ea typeface="Noto Serif KR" pitchFamily="34" charset="-122"/>
                 <a:cs typeface="Noto Serif KR" pitchFamily="34" charset="-120"/>
               </a:rPr>
-              <a:t>결론 — 가동률 85%가 멀티플을 peer 상단까지 끌어내린다</a:t>
+              <a:t>결론 — 희석 캡을 49%까지 열면 밴드 안으로 들어온다</a:t>
             </a:r>
             <a:endParaRPr lang="en-US" sz="1300" dirty="0"/>
           </a:p>
@@ -10750,7 +11460,7 @@
       </p:sp>
       <p:sp>
         <p:nvSpPr>
-          <p:cNvPr id="56" name="Text 53"/>
+          <p:cNvPr id="65" name="Text 62"/>
           <p:cNvSpPr/>
           <p:nvPr/>
         </p:nvSpPr>
@@ -10784,7 +11494,7 @@
                 <a:ea typeface="IBM Plex Sans KR" pitchFamily="34" charset="-122"/>
                 <a:cs typeface="IBM Plex Sans KR" pitchFamily="34" charset="-120"/>
               </a:rPr>
-              <a:t>DC센터 수요로 </a:t>
+              <a:t>가동률 85%/82%로 run-rate EBITDA </a:t>
             </a:r>
             <a:pPr indent="0" marL="0">
               <a:lnSpc>
@@ -10801,7 +11511,7 @@
                 <a:ea typeface="IBM Plex Sans KR" pitchFamily="34" charset="-122"/>
                 <a:cs typeface="IBM Plex Sans KR" pitchFamily="34" charset="-120"/>
               </a:rPr>
-              <a:t>가동률 85%/82%</a:t>
+              <a:t>$554mm</a:t>
             </a:r>
             <a:pPr indent="0" marL="0">
               <a:lnSpc>
@@ -10818,7 +11528,7 @@
                 <a:ea typeface="IBM Plex Sans KR" pitchFamily="34" charset="-122"/>
                 <a:cs typeface="IBM Plex Sans KR" pitchFamily="34" charset="-120"/>
               </a:rPr>
-              <a:t> 확보 시 run-rate ex-AMPC EBITDA가 </a:t>
+              <a:t> → BASE </a:t>
             </a:r>
             <a:pPr indent="0" marL="0">
               <a:lnSpc>
@@ -10829,13 +11539,13 @@
             <a:r>
               <a:rPr lang="en-US" sz="950" b="1" dirty="0">
                 <a:solidFill>
-                  <a:srgbClr val="86D6A6"/>
+                  <a:srgbClr val="FF8E84"/>
                 </a:solidFill>
                 <a:latin typeface="IBM Plex Sans KR" pitchFamily="34" charset="0"/>
                 <a:ea typeface="IBM Plex Sans KR" pitchFamily="34" charset="-122"/>
                 <a:cs typeface="IBM Plex Sans KR" pitchFamily="34" charset="-120"/>
               </a:rPr>
-              <a:t>$442→$554mm</a:t>
+              <a:t>15.4x</a:t>
             </a:r>
             <a:pPr indent="0" marL="0">
               <a:lnSpc>
@@ -10852,7 +11562,7 @@
                 <a:ea typeface="IBM Plex Sans KR" pitchFamily="34" charset="-122"/>
                 <a:cs typeface="IBM Plex Sans KR" pitchFamily="34" charset="-120"/>
               </a:rPr>
-              <a:t>로 올라 BASE 멀티플이 </a:t>
+              <a:t>. 그랜트 20%나 희석 30%로 14.1x, 희석을 </a:t>
             </a:r>
             <a:pPr indent="0" marL="0">
               <a:lnSpc>
@@ -10863,13 +11573,13 @@
             <a:r>
               <a:rPr lang="en-US" sz="950" b="1" dirty="0">
                 <a:solidFill>
-                  <a:srgbClr val="FF8E84"/>
+                  <a:srgbClr val="86D6A6"/>
                 </a:solidFill>
                 <a:latin typeface="IBM Plex Sans KR" pitchFamily="34" charset="0"/>
                 <a:ea typeface="IBM Plex Sans KR" pitchFamily="34" charset="-122"/>
                 <a:cs typeface="IBM Plex Sans KR" pitchFamily="34" charset="-120"/>
               </a:rPr>
-              <a:t>19.3x→15.4x</a:t>
+              <a:t>49%(③)</a:t>
             </a:r>
             <a:pPr indent="0" marL="0">
               <a:lnSpc>
@@ -10886,7 +11596,7 @@
                 <a:ea typeface="IBM Plex Sans KR" pitchFamily="34" charset="-122"/>
                 <a:cs typeface="IBM Plex Sans KR" pitchFamily="34" charset="-120"/>
               </a:rPr>
-              <a:t>. 여기에 </a:t>
+              <a:t>까지 열면 13.1x, </a:t>
             </a:r>
             <a:pPr indent="0" marL="0">
               <a:lnSpc>
@@ -10903,7 +11613,7 @@
                 <a:ea typeface="IBM Plex Sans KR" pitchFamily="34" charset="-122"/>
                 <a:cs typeface="IBM Plex Sans KR" pitchFamily="34" charset="-120"/>
               </a:rPr>
-              <a:t>그랜트 20%(①)</a:t>
+              <a:t>그랜트20+희석49 결합 시 12.6x — peer 밴드(8~13x) 진입</a:t>
             </a:r>
             <a:pPr indent="0" marL="0">
               <a:lnSpc>
@@ -10920,7 +11630,7 @@
                 <a:ea typeface="IBM Plex Sans KR" pitchFamily="34" charset="-122"/>
                 <a:cs typeface="IBM Plex Sans KR" pitchFamily="34" charset="-120"/>
               </a:rPr>
-              <a:t> 또는 </a:t>
+              <a:t>. DCF는 </a:t>
             </a:r>
             <a:pPr indent="0" marL="0">
               <a:lnSpc>
@@ -10937,7 +11647,7 @@
                 <a:ea typeface="IBM Plex Sans KR" pitchFamily="34" charset="-122"/>
                 <a:cs typeface="IBM Plex Sans KR" pitchFamily="34" charset="-120"/>
               </a:rPr>
-              <a:t>CoC 해제 30% 희석(②)</a:t>
+              <a:t>WACC 10.5%·영구성장 2.0%</a:t>
             </a:r>
             <a:pPr indent="0" marL="0">
               <a:lnSpc>
@@ -10954,41 +11664,7 @@
                 <a:ea typeface="IBM Plex Sans KR" pitchFamily="34" charset="-122"/>
                 <a:cs typeface="IBM Plex Sans KR" pitchFamily="34" charset="-120"/>
               </a:rPr>
-              <a:t>은 각각 14.1x, 둘 다면 </a:t>
-            </a:r>
-            <a:pPr indent="0" marL="0">
-              <a:lnSpc>
-                <a:spcPct val="115000"/>
-              </a:lnSpc>
-              <a:buNone/>
-            </a:pPr>
-            <a:r>
-              <a:rPr lang="en-US" sz="950" b="1" dirty="0">
-                <a:solidFill>
-                  <a:srgbClr val="86D6A6"/>
-                </a:solidFill>
-                <a:latin typeface="IBM Plex Sans KR" pitchFamily="34" charset="0"/>
-                <a:ea typeface="IBM Plex Sans KR" pitchFamily="34" charset="-122"/>
-                <a:cs typeface="IBM Plex Sans KR" pitchFamily="34" charset="-120"/>
-              </a:rPr>
-              <a:t>13.3x — peer 상단(13x)에 사실상 안착</a:t>
-            </a:r>
-            <a:pPr indent="0" marL="0">
-              <a:lnSpc>
-                <a:spcPct val="115000"/>
-              </a:lnSpc>
-              <a:buNone/>
-            </a:pPr>
-            <a:r>
-              <a:rPr lang="en-US" sz="950" dirty="0">
-                <a:solidFill>
-                  <a:srgbClr val="D8CFC2"/>
-                </a:solidFill>
-                <a:latin typeface="IBM Plex Sans KR" pitchFamily="34" charset="0"/>
-                <a:ea typeface="IBM Plex Sans KR" pitchFamily="34" charset="-122"/>
-                <a:cs typeface="IBM Plex Sans KR" pitchFamily="34" charset="-120"/>
-              </a:rPr>
-              <a:t> (잔여 +0.3x). 남는 미세 갭은 마진(ex-AMPC EBITDA)이나 시장 프리미엄이 닫는다. ★ 순차입금 $6.4bn·부채비중 60% 고정</a:t>
+              <a:t> 기준 EV $5.0bn. 단 49% 희석은 지배력 약화(경영권·연결 이슈) 트레이드오프 — 협상 상한으로만. ★ 순차입금 $6.4bn·부채비중 60% 고정</a:t>
             </a:r>
             <a:endParaRPr lang="en-US" sz="950" dirty="0"/>
           </a:p>
@@ -10996,7 +11672,7 @@
       </p:sp>
       <p:sp>
         <p:nvSpPr>
-          <p:cNvPr id="57" name="Shape 54"/>
+          <p:cNvPr id="66" name="Shape 63"/>
           <p:cNvSpPr/>
           <p:nvPr/>
         </p:nvSpPr>
@@ -11019,7 +11695,7 @@
       </p:sp>
       <p:sp>
         <p:nvSpPr>
-          <p:cNvPr id="58" name="Text 55"/>
+          <p:cNvPr id="67" name="Text 64"/>
           <p:cNvSpPr/>
           <p:nvPr/>
         </p:nvSpPr>
@@ -11058,7 +11734,7 @@
       </p:sp>
       <p:sp>
         <p:nvSpPr>
-          <p:cNvPr id="59" name="Text 56"/>
+          <p:cNvPr id="68" name="Text 65"/>
           <p:cNvSpPr/>
           <p:nvPr/>
         </p:nvSpPr>

--- a/sk_valuation_project/output/SK_Funding_v3_editable.pptx
+++ b/sk_valuation_project/output/SK_Funding_v3_editable.pptx
@@ -2927,7 +2927,7 @@
                           <a:ea typeface="IBM Plex Mono" pitchFamily="34" charset="-122"/>
                           <a:cs typeface="IBM Plex Mono" pitchFamily="34" charset="-120"/>
                         </a:rPr>
-                        <a:t>BA 완전자회사 100%</a:t>
+                        <a:t>BA 100% · SOP ′28 하반기</a:t>
                       </a:r>
                       <a:endParaRPr lang="en-US" sz="800" dirty="0">
                         <a:latin typeface="IBM Plex Mono" charset="0"/>
@@ -4044,7 +4044,7 @@
         </p:nvSpPr>
         <p:spPr>
           <a:xfrm>
-            <a:off x="6007608" y="3730752"/>
+            <a:off x="6007608" y="3712464"/>
             <a:ext cx="228600" cy="274320"/>
           </a:xfrm>
           <a:prstGeom prst="rect">
@@ -4083,7 +4083,7 @@
         </p:nvSpPr>
         <p:spPr>
           <a:xfrm>
-            <a:off x="6263640" y="3730752"/>
+            <a:off x="6263640" y="3712464"/>
             <a:ext cx="3858768" cy="365760"/>
           </a:xfrm>
           <a:prstGeom prst="rect">
@@ -4122,7 +4122,7 @@
         </p:nvSpPr>
         <p:spPr>
           <a:xfrm>
-            <a:off x="6007608" y="4133088"/>
+            <a:off x="6007608" y="4096512"/>
             <a:ext cx="228600" cy="274320"/>
           </a:xfrm>
           <a:prstGeom prst="rect">
@@ -4161,7 +4161,7 @@
         </p:nvSpPr>
         <p:spPr>
           <a:xfrm>
-            <a:off x="6263640" y="4133088"/>
+            <a:off x="6263640" y="4096512"/>
             <a:ext cx="3858768" cy="365760"/>
           </a:xfrm>
           <a:prstGeom prst="rect">
@@ -4194,77 +4194,74 @@
       </p:sp>
       <p:sp>
         <p:nvSpPr>
-          <p:cNvPr id="26" name="Text 20"/>
-          <p:cNvSpPr/>
-          <p:nvPr/>
-        </p:nvSpPr>
-        <p:spPr>
-          <a:xfrm>
-            <a:off x="6007608" y="4535424"/>
-            <a:ext cx="228600" cy="274320"/>
-          </a:xfrm>
-          <a:prstGeom prst="rect">
-            <a:avLst/>
-          </a:prstGeom>
-          <a:noFill/>
-          <a:ln/>
-        </p:spPr>
-        <p:txBody>
-          <a:bodyPr wrap="square" lIns="0" tIns="0" rIns="0" bIns="0" rtlCol="0" anchor="t"/>
+          <p:cNvPr id="26" name="Shape 20"/>
+          <p:cNvSpPr/>
+          <p:nvPr/>
+        </p:nvSpPr>
+        <p:spPr>
+          <a:xfrm>
+            <a:off x="6007608" y="4526280"/>
+            <a:ext cx="4114800" cy="914400"/>
+          </a:xfrm>
+          <a:prstGeom prst="roundRect">
+            <a:avLst>
+              <a:gd name="adj" fmla="val 6000"/>
+            </a:avLst>
+          </a:prstGeom>
+          <a:solidFill>
+            <a:srgbClr val="211C18"/>
+          </a:solidFill>
+          <a:ln/>
+        </p:spPr>
+      </p:sp>
+      <p:sp>
+        <p:nvSpPr>
+          <p:cNvPr id="27" name="Text 21"/>
+          <p:cNvSpPr/>
+          <p:nvPr/>
+        </p:nvSpPr>
+        <p:spPr>
+          <a:xfrm>
+            <a:off x="6208776" y="4617720"/>
+            <a:ext cx="3749040" cy="219456"/>
+          </a:xfrm>
+          <a:prstGeom prst="rect">
+            <a:avLst/>
+          </a:prstGeom>
+          <a:noFill/>
+          <a:ln/>
+        </p:spPr>
+        <p:txBody>
+          <a:bodyPr wrap="square" lIns="0" tIns="0" rIns="0" bIns="0" rtlCol="0" anchor="ctr"/>
           <a:lstStyle/>
           <a:p>
             <a:pPr indent="0" marL="0">
               <a:buNone/>
             </a:pPr>
             <a:r>
-              <a:rPr lang="en-US" sz="1100" dirty="0">
-                <a:solidFill>
-                  <a:srgbClr val="C1121F"/>
+              <a:rPr lang="en-US" sz="1050" b="1" dirty="0">
+                <a:solidFill>
+                  <a:srgbClr val="FFFFFF"/>
                 </a:solidFill>
                 <a:latin typeface="IBM Plex Sans KR" pitchFamily="34" charset="0"/>
                 <a:ea typeface="IBM Plex Sans KR" pitchFamily="34" charset="-122"/>
                 <a:cs typeface="IBM Plex Sans KR" pitchFamily="34" charset="-120"/>
               </a:rPr>
-              <a:t>●</a:t>
-            </a:r>
-            <a:endParaRPr lang="en-US" sz="1100" dirty="0"/>
-          </a:p>
-        </p:txBody>
-      </p:sp>
-      <p:sp>
-        <p:nvSpPr>
-          <p:cNvPr id="27" name="Text 21"/>
-          <p:cNvSpPr/>
-          <p:nvPr/>
-        </p:nvSpPr>
-        <p:spPr>
-          <a:xfrm>
-            <a:off x="6263640" y="4535424"/>
-            <a:ext cx="3858768" cy="365760"/>
-          </a:xfrm>
-          <a:prstGeom prst="rect">
-            <a:avLst/>
-          </a:prstGeom>
-          <a:noFill/>
-          <a:ln/>
-        </p:spPr>
-        <p:txBody>
-          <a:bodyPr wrap="square" lIns="0" tIns="0" rIns="0" bIns="0" rtlCol="0" anchor="t"/>
-          <a:lstStyle/>
-          <a:p>
+              <a:t>밸류에이션 분해 — AMPC(45X) 기여</a:t>
+            </a:r>
             <a:pPr indent="0" marL="0">
               <a:buNone/>
             </a:pPr>
             <a:r>
               <a:rPr lang="en-US" sz="1050" dirty="0">
                 <a:solidFill>
-                  <a:srgbClr val="1B1714"/>
+                  <a:srgbClr val="9A847C"/>
                 </a:solidFill>
                 <a:latin typeface="IBM Plex Sans KR" pitchFamily="34" charset="0"/>
                 <a:ea typeface="IBM Plex Sans KR" pitchFamily="34" charset="-122"/>
                 <a:cs typeface="IBM Plex Sans KR" pitchFamily="34" charset="-120"/>
               </a:rPr>
-              <a:t>DCF EV ≈ $5.0bn · WACC 10.5% / 영구성장(TGR) 2.0% / Ke 13%</a:t>
+              <a:t>   한시보조금·2033 소멸</a:t>
             </a:r>
             <a:endParaRPr lang="en-US" sz="1050" dirty="0"/>
           </a:p>
@@ -4272,85 +4269,178 @@
       </p:sp>
       <p:sp>
         <p:nvSpPr>
-          <p:cNvPr id="28" name="Text 22"/>
-          <p:cNvSpPr/>
-          <p:nvPr/>
-        </p:nvSpPr>
-        <p:spPr>
-          <a:xfrm>
-            <a:off x="6007608" y="4937760"/>
-            <a:ext cx="228600" cy="274320"/>
-          </a:xfrm>
-          <a:prstGeom prst="rect">
-            <a:avLst/>
-          </a:prstGeom>
-          <a:noFill/>
-          <a:ln/>
-        </p:spPr>
-        <p:txBody>
-          <a:bodyPr wrap="square" lIns="0" tIns="0" rIns="0" bIns="0" rtlCol="0" anchor="t"/>
+          <p:cNvPr id="28" name="Shape 22"/>
+          <p:cNvSpPr/>
+          <p:nvPr/>
+        </p:nvSpPr>
+        <p:spPr>
+          <a:xfrm>
+            <a:off x="6208776" y="4928616"/>
+            <a:ext cx="928116" cy="219456"/>
+          </a:xfrm>
+          <a:prstGeom prst="rect">
+            <a:avLst/>
+          </a:prstGeom>
+          <a:solidFill>
+            <a:srgbClr val="1E7A4D"/>
+          </a:solidFill>
+          <a:ln/>
+        </p:spPr>
+      </p:sp>
+      <p:sp>
+        <p:nvSpPr>
+          <p:cNvPr id="29" name="Shape 23"/>
+          <p:cNvSpPr/>
+          <p:nvPr/>
+        </p:nvSpPr>
+        <p:spPr>
+          <a:xfrm>
+            <a:off x="7136892" y="4928616"/>
+            <a:ext cx="2784348" cy="219456"/>
+          </a:xfrm>
+          <a:prstGeom prst="rect">
+            <a:avLst/>
+          </a:prstGeom>
+          <a:solidFill>
+            <a:srgbClr val="FF8E84"/>
+          </a:solidFill>
+          <a:ln/>
+        </p:spPr>
+      </p:sp>
+      <p:sp>
+        <p:nvSpPr>
+          <p:cNvPr id="30" name="Text 24"/>
+          <p:cNvSpPr/>
+          <p:nvPr/>
+        </p:nvSpPr>
+        <p:spPr>
+          <a:xfrm>
+            <a:off x="6208776" y="4928616"/>
+            <a:ext cx="928116" cy="219456"/>
+          </a:xfrm>
+          <a:prstGeom prst="rect">
+            <a:avLst/>
+          </a:prstGeom>
+          <a:noFill/>
+          <a:ln/>
+        </p:spPr>
+        <p:txBody>
+          <a:bodyPr wrap="square" lIns="0" tIns="0" rIns="0" bIns="0" rtlCol="0" anchor="ctr"/>
+          <a:lstStyle/>
+          <a:p>
+            <a:pPr algn="ctr" indent="0" marL="0">
+              <a:buNone/>
+            </a:pPr>
+            <a:r>
+              <a:rPr lang="en-US" sz="750" b="1" dirty="0">
+                <a:solidFill>
+                  <a:srgbClr val="FFFFFF"/>
+                </a:solidFill>
+                <a:latin typeface="IBM Plex Mono" pitchFamily="34" charset="0"/>
+                <a:ea typeface="IBM Plex Mono" pitchFamily="34" charset="-122"/>
+                <a:cs typeface="IBM Plex Mono" pitchFamily="34" charset="-120"/>
+              </a:rPr>
+              <a:t>ex-AMPC $1.2bn</a:t>
+            </a:r>
+            <a:endParaRPr lang="en-US" sz="750" dirty="0"/>
+          </a:p>
+        </p:txBody>
+      </p:sp>
+      <p:sp>
+        <p:nvSpPr>
+          <p:cNvPr id="31" name="Text 25"/>
+          <p:cNvSpPr/>
+          <p:nvPr/>
+        </p:nvSpPr>
+        <p:spPr>
+          <a:xfrm>
+            <a:off x="7136892" y="4928616"/>
+            <a:ext cx="2784348" cy="219456"/>
+          </a:xfrm>
+          <a:prstGeom prst="rect">
+            <a:avLst/>
+          </a:prstGeom>
+          <a:noFill/>
+          <a:ln/>
+        </p:spPr>
+        <p:txBody>
+          <a:bodyPr wrap="square" lIns="0" tIns="0" rIns="0" bIns="0" rtlCol="0" anchor="ctr"/>
+          <a:lstStyle/>
+          <a:p>
+            <a:pPr algn="ctr" indent="0" marL="0">
+              <a:buNone/>
+            </a:pPr>
+            <a:r>
+              <a:rPr lang="en-US" sz="800" b="1" dirty="0">
+                <a:solidFill>
+                  <a:srgbClr val="211C18"/>
+                </a:solidFill>
+                <a:latin typeface="IBM Plex Mono" pitchFamily="34" charset="0"/>
+                <a:ea typeface="IBM Plex Mono" pitchFamily="34" charset="-122"/>
+                <a:cs typeface="IBM Plex Mono" pitchFamily="34" charset="-120"/>
+              </a:rPr>
+              <a:t>AMPC PV $3.6bn (75%)</a:t>
+            </a:r>
+            <a:endParaRPr lang="en-US" sz="800" dirty="0"/>
+          </a:p>
+        </p:txBody>
+      </p:sp>
+      <p:sp>
+        <p:nvSpPr>
+          <p:cNvPr id="32" name="Text 26"/>
+          <p:cNvSpPr/>
+          <p:nvPr/>
+        </p:nvSpPr>
+        <p:spPr>
+          <a:xfrm>
+            <a:off x="6208776" y="5202936"/>
+            <a:ext cx="3749040" cy="201168"/>
+          </a:xfrm>
+          <a:prstGeom prst="rect">
+            <a:avLst/>
+          </a:prstGeom>
+          <a:noFill/>
+          <a:ln/>
+        </p:spPr>
+        <p:txBody>
+          <a:bodyPr wrap="square" lIns="0" tIns="0" rIns="0" bIns="0" rtlCol="0" anchor="ctr"/>
           <a:lstStyle/>
           <a:p>
             <a:pPr indent="0" marL="0">
               <a:buNone/>
             </a:pPr>
             <a:r>
-              <a:rPr lang="en-US" sz="1100" dirty="0">
-                <a:solidFill>
-                  <a:srgbClr val="C1121F"/>
+              <a:rPr lang="en-US" sz="800" b="1" dirty="0">
+                <a:solidFill>
+                  <a:srgbClr val="FFFFFF"/>
                 </a:solidFill>
                 <a:latin typeface="IBM Plex Sans KR" pitchFamily="34" charset="0"/>
                 <a:ea typeface="IBM Plex Sans KR" pitchFamily="34" charset="-122"/>
                 <a:cs typeface="IBM Plex Sans KR" pitchFamily="34" charset="-120"/>
               </a:rPr>
-              <a:t>●</a:t>
-            </a:r>
-            <a:endParaRPr lang="en-US" sz="1100" dirty="0"/>
-          </a:p>
-        </p:txBody>
-      </p:sp>
-      <p:sp>
-        <p:nvSpPr>
-          <p:cNvPr id="29" name="Text 23"/>
-          <p:cNvSpPr/>
-          <p:nvPr/>
-        </p:nvSpPr>
-        <p:spPr>
-          <a:xfrm>
-            <a:off x="6263640" y="4937760"/>
-            <a:ext cx="3858768" cy="365760"/>
-          </a:xfrm>
-          <a:prstGeom prst="rect">
-            <a:avLst/>
-          </a:prstGeom>
-          <a:noFill/>
-          <a:ln/>
-        </p:spPr>
-        <p:txBody>
-          <a:bodyPr wrap="square" lIns="0" tIns="0" rIns="0" bIns="0" rtlCol="0" anchor="t"/>
-          <a:lstStyle/>
-          <a:p>
+              <a:t>DCF EV $4.8bn</a:t>
+            </a:r>
             <a:pPr indent="0" marL="0">
               <a:buNone/>
             </a:pPr>
             <a:r>
-              <a:rPr lang="en-US" sz="1050" dirty="0">
-                <a:solidFill>
-                  <a:srgbClr val="1B1714"/>
+              <a:rPr lang="en-US" sz="800" dirty="0">
+                <a:solidFill>
+                  <a:srgbClr val="D8CFC2"/>
                 </a:solidFill>
                 <a:latin typeface="IBM Plex Sans KR" pitchFamily="34" charset="0"/>
                 <a:ea typeface="IBM Plex Sans KR" pitchFamily="34" charset="-122"/>
                 <a:cs typeface="IBM Plex Sans KR" pitchFamily="34" charset="-120"/>
               </a:rPr>
-              <a:t>NAV(SOTP) ≈ $5.0bn ★</a:t>
-            </a:r>
-            <a:endParaRPr lang="en-US" sz="1050" dirty="0"/>
-          </a:p>
-        </p:txBody>
-      </p:sp>
-      <p:sp>
-        <p:nvSpPr>
-          <p:cNvPr id="30" name="Shape 24"/>
+              <a:t> 의 75%가 한시 AMPC → 멀티플엔 ex-AMPC만. WACC 10.5%·TGR 2%·Ke 13%</a:t>
+            </a:r>
+            <a:endParaRPr lang="en-US" sz="800" dirty="0"/>
+          </a:p>
+        </p:txBody>
+      </p:sp>
+      <p:sp>
+        <p:nvSpPr>
+          <p:cNvPr id="33" name="Shape 27"/>
           <p:cNvSpPr/>
           <p:nvPr/>
         </p:nvSpPr>
@@ -4373,7 +4463,7 @@
       </p:sp>
       <p:sp>
         <p:nvSpPr>
-          <p:cNvPr id="31" name="Text 25"/>
+          <p:cNvPr id="34" name="Text 28"/>
           <p:cNvSpPr/>
           <p:nvPr/>
         </p:nvSpPr>
@@ -4412,7 +4502,7 @@
       </p:sp>
       <p:sp>
         <p:nvSpPr>
-          <p:cNvPr id="32" name="Text 26"/>
+          <p:cNvPr id="35" name="Text 29"/>
           <p:cNvSpPr/>
           <p:nvPr/>
         </p:nvSpPr>
@@ -4465,7 +4555,7 @@
       </p:sp>
       <p:sp>
         <p:nvSpPr>
-          <p:cNvPr id="33" name="Shape 27"/>
+          <p:cNvPr id="36" name="Shape 30"/>
           <p:cNvSpPr/>
           <p:nvPr/>
         </p:nvSpPr>
@@ -4488,7 +4578,7 @@
       </p:sp>
       <p:sp>
         <p:nvSpPr>
-          <p:cNvPr id="34" name="Text 28"/>
+          <p:cNvPr id="37" name="Text 31"/>
           <p:cNvSpPr/>
           <p:nvPr/>
         </p:nvSpPr>
@@ -4527,7 +4617,7 @@
       </p:sp>
       <p:sp>
         <p:nvSpPr>
-          <p:cNvPr id="35" name="Text 29"/>
+          <p:cNvPr id="38" name="Text 32"/>
           <p:cNvSpPr/>
           <p:nvPr/>
         </p:nvSpPr>
@@ -4580,7 +4670,7 @@
       </p:sp>
       <p:sp>
         <p:nvSpPr>
-          <p:cNvPr id="36" name="Shape 30"/>
+          <p:cNvPr id="39" name="Shape 33"/>
           <p:cNvSpPr/>
           <p:nvPr/>
         </p:nvSpPr>
@@ -4603,7 +4693,7 @@
       </p:sp>
       <p:sp>
         <p:nvSpPr>
-          <p:cNvPr id="37" name="Text 31"/>
+          <p:cNvPr id="40" name="Text 34"/>
           <p:cNvSpPr/>
           <p:nvPr/>
         </p:nvSpPr>
@@ -4642,7 +4732,7 @@
       </p:sp>
       <p:sp>
         <p:nvSpPr>
-          <p:cNvPr id="38" name="Text 32"/>
+          <p:cNvPr id="41" name="Text 35"/>
           <p:cNvSpPr/>
           <p:nvPr/>
         </p:nvSpPr>
@@ -4695,7 +4785,7 @@
       </p:sp>
       <p:sp>
         <p:nvSpPr>
-          <p:cNvPr id="39" name="Shape 33"/>
+          <p:cNvPr id="42" name="Shape 36"/>
           <p:cNvSpPr/>
           <p:nvPr/>
         </p:nvSpPr>
@@ -4718,7 +4808,7 @@
       </p:sp>
       <p:sp>
         <p:nvSpPr>
-          <p:cNvPr id="40" name="Text 34"/>
+          <p:cNvPr id="43" name="Text 37"/>
           <p:cNvSpPr/>
           <p:nvPr/>
         </p:nvSpPr>
@@ -4757,7 +4847,7 @@
       </p:sp>
       <p:sp>
         <p:nvSpPr>
-          <p:cNvPr id="41" name="Text 35"/>
+          <p:cNvPr id="44" name="Text 38"/>
           <p:cNvSpPr/>
           <p:nvPr/>
         </p:nvSpPr>
@@ -4788,7 +4878,7 @@
                 <a:ea typeface="Space Grotesk" pitchFamily="34" charset="-122"/>
                 <a:cs typeface="Space Grotesk" pitchFamily="34" charset="-120"/>
               </a:rPr>
-              <a:t>5.0</a:t>
+              <a:t>4.8</a:t>
             </a:r>
             <a:pPr indent="0" marL="0">
               <a:buNone/>
@@ -4810,7 +4900,7 @@
       </p:sp>
       <p:sp>
         <p:nvSpPr>
-          <p:cNvPr id="42" name="Shape 36"/>
+          <p:cNvPr id="45" name="Shape 39"/>
           <p:cNvSpPr/>
           <p:nvPr/>
         </p:nvSpPr>
@@ -4833,7 +4923,7 @@
       </p:sp>
       <p:sp>
         <p:nvSpPr>
-          <p:cNvPr id="43" name="Text 37"/>
+          <p:cNvPr id="46" name="Text 40"/>
           <p:cNvSpPr/>
           <p:nvPr/>
         </p:nvSpPr>
@@ -4872,7 +4962,7 @@
       </p:sp>
       <p:sp>
         <p:nvSpPr>
-          <p:cNvPr id="44" name="Text 38"/>
+          <p:cNvPr id="47" name="Text 41"/>
           <p:cNvSpPr/>
           <p:nvPr/>
         </p:nvSpPr>
@@ -8149,14 +8239,14 @@
             <a:tbl>
               <a:tblPr/>
               <a:tblGrid>
-                <a:gridCol w="2148840"/>
-                <a:gridCol w="658368"/>
-                <a:gridCol w="658368"/>
-                <a:gridCol w="868680"/>
-                <a:gridCol w="777240"/>
-                <a:gridCol w="786384"/>
+                <a:gridCol w="2103120"/>
+                <a:gridCol w="640080"/>
+                <a:gridCol w="640080"/>
+                <a:gridCol w="822960"/>
+                <a:gridCol w="795528"/>
+                <a:gridCol w="896112"/>
               </a:tblGrid>
-              <a:tr h="292608">
+              <a:tr h="365760">
                 <a:tc>
                   <a:txBody>
                     <a:bodyPr/>
@@ -8454,6 +8544,27 @@
                         <a:cs typeface="IBM Plex Sans KR" charset="0"/>
                       </a:endParaRPr>
                     </a:p>
+                    <a:p>
+                      <a:pPr algn="ctr" indent="0" marL="0">
+                        <a:buNone/>
+                      </a:pPr>
+                      <a:r>
+                        <a:rPr lang="en-US" sz="900" b="1" dirty="0">
+                          <a:solidFill>
+                            <a:srgbClr val="FFFFFF"/>
+                          </a:solidFill>
+                          <a:latin typeface="IBM Plex Sans KR" pitchFamily="34" charset="0"/>
+                          <a:ea typeface="IBM Plex Sans KR" pitchFamily="34" charset="-122"/>
+                          <a:cs typeface="IBM Plex Sans KR" pitchFamily="34" charset="-120"/>
+                        </a:rPr>
+                        <a:t>(9%)</a:t>
+                      </a:r>
+                      <a:endParaRPr lang="en-US" sz="900" dirty="0">
+                        <a:latin typeface="IBM Plex Sans KR" charset="0"/>
+                        <a:ea typeface="IBM Plex Sans KR" charset="0"/>
+                        <a:cs typeface="IBM Plex Sans KR" charset="0"/>
+                      </a:endParaRPr>
+                    </a:p>
                   </a:txBody>
                   <a:tcPr marL="63500" marR="63500" marT="25400" marB="25400" anchor="ctr">
                     <a:lnL w="6350" cap="flat" cmpd="sng" algn="ctr">
@@ -8514,7 +8625,28 @@
                           <a:ea typeface="IBM Plex Sans KR" pitchFamily="34" charset="-122"/>
                           <a:cs typeface="IBM Plex Sans KR" pitchFamily="34" charset="-120"/>
                         </a:rPr>
-                        <a:t>peer초과</a:t>
+                        <a:t>필요EBITDA%</a:t>
+                      </a:r>
+                      <a:endParaRPr lang="en-US" sz="900" dirty="0">
+                        <a:latin typeface="IBM Plex Sans KR" charset="0"/>
+                        <a:ea typeface="IBM Plex Sans KR" charset="0"/>
+                        <a:cs typeface="IBM Plex Sans KR" charset="0"/>
+                      </a:endParaRPr>
+                    </a:p>
+                    <a:p>
+                      <a:pPr algn="ctr" indent="0" marL="0">
+                        <a:buNone/>
+                      </a:pPr>
+                      <a:r>
+                        <a:rPr lang="en-US" sz="900" b="1" dirty="0">
+                          <a:solidFill>
+                            <a:srgbClr val="FFFFFF"/>
+                          </a:solidFill>
+                          <a:latin typeface="IBM Plex Sans KR" pitchFamily="34" charset="0"/>
+                          <a:ea typeface="IBM Plex Sans KR" pitchFamily="34" charset="-122"/>
+                          <a:cs typeface="IBM Plex Sans KR" pitchFamily="34" charset="-120"/>
+                        </a:rPr>
+                        <a:t>(→13x)</a:t>
                       </a:r>
                       <a:endParaRPr lang="en-US" sz="900" dirty="0">
                         <a:latin typeface="IBM Plex Sans KR" charset="0"/>
@@ -8566,7 +8698,7 @@
                   </a:tcPr>
                 </a:tc>
               </a:tr>
-              <a:tr h="429768">
+              <a:tr h="402336">
                 <a:tc>
                   <a:txBody>
                     <a:bodyPr/>
@@ -8924,7 +9056,7 @@
                           <a:ea typeface="IBM Plex Mono" pitchFamily="34" charset="-122"/>
                           <a:cs typeface="IBM Plex Mono" pitchFamily="34" charset="-120"/>
                         </a:rPr>
-                        <a:t>+2.4x</a:t>
+                        <a:t>10.7%</a:t>
                       </a:r>
                       <a:endParaRPr lang="en-US" sz="800" dirty="0">
                         <a:latin typeface="IBM Plex Mono" charset="0"/>
@@ -8976,7 +9108,7 @@
                   </a:tcPr>
                 </a:tc>
               </a:tr>
-              <a:tr h="429768">
+              <a:tr h="402336">
                 <a:tc>
                   <a:txBody>
                     <a:bodyPr/>
@@ -9328,13 +9460,13 @@
                       <a:r>
                         <a:rPr lang="en-US" sz="800" b="1" dirty="0">
                           <a:solidFill>
-                            <a:srgbClr val="6F6960"/>
+                            <a:srgbClr val="C1121F"/>
                           </a:solidFill>
                           <a:latin typeface="IBM Plex Mono" pitchFamily="34" charset="0"/>
                           <a:ea typeface="IBM Plex Mono" pitchFamily="34" charset="-122"/>
                           <a:cs typeface="IBM Plex Mono" pitchFamily="34" charset="-120"/>
                         </a:rPr>
-                        <a:t>+1.1x</a:t>
+                        <a:t>9.8%</a:t>
                       </a:r>
                       <a:endParaRPr lang="en-US" sz="800" dirty="0">
                         <a:latin typeface="IBM Plex Mono" charset="0"/>
@@ -9386,7 +9518,7 @@
                   </a:tcPr>
                 </a:tc>
               </a:tr>
-              <a:tr h="429768">
+              <a:tr h="402336">
                 <a:tc>
                   <a:txBody>
                     <a:bodyPr/>
@@ -9738,13 +9870,13 @@
                       <a:r>
                         <a:rPr lang="en-US" sz="800" b="1" dirty="0">
                           <a:solidFill>
-                            <a:srgbClr val="6F6960"/>
+                            <a:srgbClr val="C1121F"/>
                           </a:solidFill>
                           <a:latin typeface="IBM Plex Mono" pitchFamily="34" charset="0"/>
                           <a:ea typeface="IBM Plex Mono" pitchFamily="34" charset="-122"/>
                           <a:cs typeface="IBM Plex Mono" pitchFamily="34" charset="-120"/>
                         </a:rPr>
-                        <a:t>+1.1x</a:t>
+                        <a:t>9.8%</a:t>
                       </a:r>
                       <a:endParaRPr lang="en-US" sz="800" dirty="0">
                         <a:latin typeface="IBM Plex Mono" charset="0"/>
@@ -9796,7 +9928,7 @@
                   </a:tcPr>
                 </a:tc>
               </a:tr>
-              <a:tr h="429768">
+              <a:tr h="402336">
                 <a:tc>
                   <a:txBody>
                     <a:bodyPr/>
@@ -10148,13 +10280,13 @@
                       <a:r>
                         <a:rPr lang="en-US" sz="800" b="1" dirty="0">
                           <a:solidFill>
-                            <a:srgbClr val="6F6960"/>
+                            <a:srgbClr val="C1121F"/>
                           </a:solidFill>
                           <a:latin typeface="IBM Plex Mono" pitchFamily="34" charset="0"/>
                           <a:ea typeface="IBM Plex Mono" pitchFamily="34" charset="-122"/>
                           <a:cs typeface="IBM Plex Mono" pitchFamily="34" charset="-120"/>
                         </a:rPr>
-                        <a:t>+0.1x</a:t>
+                        <a:t>9.1%</a:t>
                       </a:r>
                       <a:endParaRPr lang="en-US" sz="800" dirty="0">
                         <a:latin typeface="IBM Plex Mono" charset="0"/>
@@ -10206,7 +10338,7 @@
                   </a:tcPr>
                 </a:tc>
               </a:tr>
-              <a:tr h="429768">
+              <a:tr h="402336">
                 <a:tc>
                   <a:txBody>
                     <a:bodyPr/>
@@ -10564,7 +10696,7 @@
                           <a:ea typeface="IBM Plex Mono" pitchFamily="34" charset="-122"/>
                           <a:cs typeface="IBM Plex Mono" pitchFamily="34" charset="-120"/>
                         </a:rPr>
-                        <a:t>−0.4x</a:t>
+                        <a:t>8.7%</a:t>
                       </a:r>
                       <a:endParaRPr lang="en-US" sz="800" dirty="0">
                         <a:latin typeface="IBM Plex Mono" charset="0"/>
@@ -10628,6 +10760,45 @@
         </p:nvSpPr>
         <p:spPr>
           <a:xfrm>
+            <a:off x="4133088" y="4279392"/>
+            <a:ext cx="5989320" cy="182880"/>
+          </a:xfrm>
+          <a:prstGeom prst="rect">
+            <a:avLst/>
+          </a:prstGeom>
+          <a:noFill/>
+          <a:ln/>
+        </p:spPr>
+        <p:txBody>
+          <a:bodyPr wrap="square" lIns="0" tIns="0" rIns="0" bIns="0" rtlCol="0" anchor="ctr"/>
+          <a:lstStyle/>
+          <a:p>
+            <a:pPr indent="0" marL="0">
+              <a:buNone/>
+            </a:pPr>
+            <a:r>
+              <a:rPr lang="en-US" sz="750" i="1" dirty="0">
+                <a:solidFill>
+                  <a:srgbClr val="9A847C"/>
+                </a:solidFill>
+                <a:latin typeface="IBM Plex Sans KR" pitchFamily="34" charset="0"/>
+                <a:ea typeface="IBM Plex Sans KR" pitchFamily="34" charset="-122"/>
+                <a:cs typeface="IBM Plex Sans KR" pitchFamily="34" charset="-120"/>
+              </a:rPr>
+              <a:t>필요EBITDA% = 현 9%에서 딜을 peer 상단(13x)에 맞추는 데 필요한 ex-AMPC 마진 · 8.7% ≤ 현 9%면 이미 충족</a:t>
+            </a:r>
+            <a:endParaRPr lang="en-US" sz="750" dirty="0"/>
+          </a:p>
+        </p:txBody>
+      </p:sp>
+      <p:sp>
+        <p:nvSpPr>
+          <p:cNvPr id="41" name="Text 38"/>
+          <p:cNvSpPr/>
+          <p:nvPr/>
+        </p:nvSpPr>
+        <p:spPr>
+          <a:xfrm>
             <a:off x="4133088" y="4480560"/>
             <a:ext cx="5989320" cy="219456"/>
           </a:xfrm>
@@ -10661,7 +10832,7 @@
       </p:sp>
       <p:sp>
         <p:nvSpPr>
-          <p:cNvPr id="41" name="Shape 38"/>
+          <p:cNvPr id="42" name="Shape 39"/>
           <p:cNvSpPr/>
           <p:nvPr/>
         </p:nvSpPr>
@@ -10684,7 +10855,7 @@
       </p:sp>
       <p:sp>
         <p:nvSpPr>
-          <p:cNvPr id="42" name="Shape 39"/>
+          <p:cNvPr id="43" name="Shape 40"/>
           <p:cNvSpPr/>
           <p:nvPr/>
         </p:nvSpPr>
@@ -10709,7 +10880,7 @@
       </p:sp>
       <p:sp>
         <p:nvSpPr>
-          <p:cNvPr id="43" name="Text 40"/>
+          <p:cNvPr id="44" name="Text 41"/>
           <p:cNvSpPr/>
           <p:nvPr/>
         </p:nvSpPr>
@@ -10748,7 +10919,7 @@
       </p:sp>
       <p:sp>
         <p:nvSpPr>
-          <p:cNvPr id="44" name="Shape 41"/>
+          <p:cNvPr id="45" name="Shape 42"/>
           <p:cNvSpPr/>
           <p:nvPr/>
         </p:nvSpPr>
@@ -10773,7 +10944,7 @@
       </p:sp>
       <p:sp>
         <p:nvSpPr>
-          <p:cNvPr id="45" name="Text 42"/>
+          <p:cNvPr id="46" name="Text 43"/>
           <p:cNvSpPr/>
           <p:nvPr/>
         </p:nvSpPr>
@@ -10812,7 +10983,7 @@
       </p:sp>
       <p:sp>
         <p:nvSpPr>
-          <p:cNvPr id="46" name="Shape 43"/>
+          <p:cNvPr id="47" name="Shape 44"/>
           <p:cNvSpPr/>
           <p:nvPr/>
         </p:nvSpPr>
@@ -10832,7 +11003,7 @@
       </p:sp>
       <p:sp>
         <p:nvSpPr>
-          <p:cNvPr id="47" name="Text 44"/>
+          <p:cNvPr id="48" name="Text 45"/>
           <p:cNvSpPr/>
           <p:nvPr/>
         </p:nvSpPr>
@@ -10871,7 +11042,7 @@
       </p:sp>
       <p:sp>
         <p:nvSpPr>
-          <p:cNvPr id="48" name="Text 45"/>
+          <p:cNvPr id="49" name="Text 46"/>
           <p:cNvSpPr/>
           <p:nvPr/>
         </p:nvSpPr>
@@ -10910,7 +11081,7 @@
       </p:sp>
       <p:sp>
         <p:nvSpPr>
-          <p:cNvPr id="49" name="Shape 46"/>
+          <p:cNvPr id="50" name="Shape 47"/>
           <p:cNvSpPr/>
           <p:nvPr/>
         </p:nvSpPr>
@@ -10930,7 +11101,7 @@
       </p:sp>
       <p:sp>
         <p:nvSpPr>
-          <p:cNvPr id="50" name="Text 47"/>
+          <p:cNvPr id="51" name="Text 48"/>
           <p:cNvSpPr/>
           <p:nvPr/>
         </p:nvSpPr>
@@ -10969,7 +11140,7 @@
       </p:sp>
       <p:sp>
         <p:nvSpPr>
-          <p:cNvPr id="51" name="Text 48"/>
+          <p:cNvPr id="52" name="Text 49"/>
           <p:cNvSpPr/>
           <p:nvPr/>
         </p:nvSpPr>
@@ -11008,7 +11179,7 @@
       </p:sp>
       <p:sp>
         <p:nvSpPr>
-          <p:cNvPr id="52" name="Shape 49"/>
+          <p:cNvPr id="53" name="Shape 50"/>
           <p:cNvSpPr/>
           <p:nvPr/>
         </p:nvSpPr>
@@ -11028,7 +11199,7 @@
       </p:sp>
       <p:sp>
         <p:nvSpPr>
-          <p:cNvPr id="53" name="Text 50"/>
+          <p:cNvPr id="54" name="Text 51"/>
           <p:cNvSpPr/>
           <p:nvPr/>
         </p:nvSpPr>
@@ -11067,7 +11238,7 @@
       </p:sp>
       <p:sp>
         <p:nvSpPr>
-          <p:cNvPr id="54" name="Text 51"/>
+          <p:cNvPr id="55" name="Text 52"/>
           <p:cNvSpPr/>
           <p:nvPr/>
         </p:nvSpPr>
@@ -11106,7 +11277,7 @@
       </p:sp>
       <p:sp>
         <p:nvSpPr>
-          <p:cNvPr id="55" name="Shape 52"/>
+          <p:cNvPr id="56" name="Shape 53"/>
           <p:cNvSpPr/>
           <p:nvPr/>
         </p:nvSpPr>
@@ -11126,7 +11297,7 @@
       </p:sp>
       <p:sp>
         <p:nvSpPr>
-          <p:cNvPr id="56" name="Text 53"/>
+          <p:cNvPr id="57" name="Text 54"/>
           <p:cNvSpPr/>
           <p:nvPr/>
         </p:nvSpPr>
@@ -11165,7 +11336,7 @@
       </p:sp>
       <p:sp>
         <p:nvSpPr>
-          <p:cNvPr id="57" name="Text 54"/>
+          <p:cNvPr id="58" name="Text 55"/>
           <p:cNvSpPr/>
           <p:nvPr/>
         </p:nvSpPr>
@@ -11204,7 +11375,7 @@
       </p:sp>
       <p:sp>
         <p:nvSpPr>
-          <p:cNvPr id="58" name="Text 55"/>
+          <p:cNvPr id="59" name="Text 56"/>
           <p:cNvSpPr/>
           <p:nvPr/>
         </p:nvSpPr>
@@ -11243,7 +11414,7 @@
       </p:sp>
       <p:sp>
         <p:nvSpPr>
-          <p:cNvPr id="59" name="Text 56"/>
+          <p:cNvPr id="60" name="Text 57"/>
           <p:cNvSpPr/>
           <p:nvPr/>
         </p:nvSpPr>
@@ -11282,7 +11453,7 @@
       </p:sp>
       <p:sp>
         <p:nvSpPr>
-          <p:cNvPr id="60" name="Text 57"/>
+          <p:cNvPr id="61" name="Text 58"/>
           <p:cNvSpPr/>
           <p:nvPr/>
         </p:nvSpPr>
@@ -11321,7 +11492,7 @@
       </p:sp>
       <p:sp>
         <p:nvSpPr>
-          <p:cNvPr id="61" name="Text 58"/>
+          <p:cNvPr id="62" name="Text 59"/>
           <p:cNvSpPr/>
           <p:nvPr/>
         </p:nvSpPr>
@@ -11360,7 +11531,7 @@
       </p:sp>
       <p:sp>
         <p:nvSpPr>
-          <p:cNvPr id="62" name="Text 59"/>
+          <p:cNvPr id="63" name="Text 60"/>
           <p:cNvSpPr/>
           <p:nvPr/>
         </p:nvSpPr>
@@ -11399,7 +11570,7 @@
       </p:sp>
       <p:sp>
         <p:nvSpPr>
-          <p:cNvPr id="63" name="Shape 60"/>
+          <p:cNvPr id="64" name="Shape 61"/>
           <p:cNvSpPr/>
           <p:nvPr/>
         </p:nvSpPr>
@@ -11421,7 +11592,7 @@
       </p:sp>
       <p:sp>
         <p:nvSpPr>
-          <p:cNvPr id="64" name="Text 61"/>
+          <p:cNvPr id="65" name="Text 62"/>
           <p:cNvSpPr/>
           <p:nvPr/>
         </p:nvSpPr>
@@ -11460,7 +11631,7 @@
       </p:sp>
       <p:sp>
         <p:nvSpPr>
-          <p:cNvPr id="65" name="Text 62"/>
+          <p:cNvPr id="66" name="Text 63"/>
           <p:cNvSpPr/>
           <p:nvPr/>
         </p:nvSpPr>
@@ -11664,7 +11835,7 @@
                 <a:ea typeface="IBM Plex Sans KR" pitchFamily="34" charset="-122"/>
                 <a:cs typeface="IBM Plex Sans KR" pitchFamily="34" charset="-120"/>
               </a:rPr>
-              <a:t> 기준 EV $5.0bn. 단 49% 희석은 지배력 약화(경영권·연결 이슈) 트레이드오프 — 협상 상한으로만. ★ 순차입금 $6.4bn·부채비중 60% 고정</a:t>
+              <a:t> 기준 EV $4.8bn(그중 AMPC PV $3.6bn·75%). OT SOP ′28 하반기. 단 49% 희석은 지배력 약화 트레이드오프 — 협상 상한으로만. ★ 순차입금 $6.4bn·부채비중 60% 고정</a:t>
             </a:r>
             <a:endParaRPr lang="en-US" sz="950" dirty="0"/>
           </a:p>
@@ -11672,7 +11843,7 @@
       </p:sp>
       <p:sp>
         <p:nvSpPr>
-          <p:cNvPr id="66" name="Shape 63"/>
+          <p:cNvPr id="67" name="Shape 64"/>
           <p:cNvSpPr/>
           <p:nvPr/>
         </p:nvSpPr>
@@ -11695,7 +11866,7 @@
       </p:sp>
       <p:sp>
         <p:nvSpPr>
-          <p:cNvPr id="67" name="Text 64"/>
+          <p:cNvPr id="68" name="Text 65"/>
           <p:cNvSpPr/>
           <p:nvPr/>
         </p:nvSpPr>
@@ -11734,7 +11905,7 @@
       </p:sp>
       <p:sp>
         <p:nvSpPr>
-          <p:cNvPr id="68" name="Text 65"/>
+          <p:cNvPr id="69" name="Text 66"/>
           <p:cNvSpPr/>
           <p:nvPr/>
         </p:nvSpPr>

--- a/sk_valuation_project/output/SK_Funding_v3_editable.pptx
+++ b/sk_valuation_project/output/SK_Funding_v3_editable.pptx
@@ -1715,7 +1715,7 @@
                 <a:ea typeface="IBM Plex Mono" pitchFamily="34" charset="-122"/>
                 <a:cs typeface="IBM Plex Mono" pitchFamily="34" charset="-120"/>
               </a:rPr>
-              <a:t>SK Innovation · IR  /  02</a:t>
+              <a:t>SK 전략팀 · Confidential  /  02</a:t>
             </a:r>
             <a:endParaRPr lang="en-US" sz="900" dirty="0"/>
           </a:p>
@@ -2163,7 +2163,7 @@
                           <a:ea typeface="IBM Plex Sans KR" pitchFamily="34" charset="-122"/>
                           <a:cs typeface="IBM Plex Sans KR" pitchFamily="34" charset="-120"/>
                         </a:rPr>
-                        <a:t>기존 차입 (단독)</a:t>
+                        <a:t>기존 차입 (금융기관보증)</a:t>
                       </a:r>
                       <a:endParaRPr lang="en-US" sz="950" dirty="0">
                         <a:latin typeface="IBM Plex Sans KR" charset="0"/>
@@ -2231,7 +2231,7 @@
                           <a:ea typeface="IBM Plex Mono" pitchFamily="34" charset="-122"/>
                           <a:cs typeface="IBM Plex Mono" pitchFamily="34" charset="-120"/>
                         </a:rPr>
-                        <a:t>~$5.0bn + SKI 보증</a:t>
+                        <a:t>5조원 ≈ $3.7bn</a:t>
                       </a:r>
                       <a:endParaRPr lang="en-US" sz="950" dirty="0">
                         <a:latin typeface="IBM Plex Mono" charset="0"/>
@@ -2715,7 +2715,7 @@
                           <a:ea typeface="IBM Plex Sans KR" pitchFamily="34" charset="-122"/>
                           <a:cs typeface="IBM Plex Sans KR" pitchFamily="34" charset="-120"/>
                         </a:rPr>
-                        <a:t>순자산 NAV ★</a:t>
+                        <a:t>순자산 NAV (BS) ★</a:t>
                       </a:r>
                       <a:endParaRPr lang="en-US" sz="950" dirty="0">
                         <a:latin typeface="IBM Plex Sans KR" charset="0"/>
@@ -3141,7 +3141,7 @@
                           <a:ea typeface="IBM Plex Sans KR" pitchFamily="34" charset="-122"/>
                           <a:cs typeface="IBM Plex Sans KR" pitchFamily="34" charset="-120"/>
                         </a:rPr>
-                        <a:t>기존 차입 (DOE)</a:t>
+                        <a:t>기존 차입 (DOE 융자)</a:t>
                       </a:r>
                       <a:endParaRPr lang="en-US" sz="950" dirty="0">
                         <a:latin typeface="IBM Plex Sans KR" charset="0"/>
@@ -3209,7 +3209,145 @@
                           <a:ea typeface="IBM Plex Mono" pitchFamily="34" charset="-122"/>
                           <a:cs typeface="IBM Plex Mono" pitchFamily="34" charset="-120"/>
                         </a:rPr>
-                        <a:t>$4.0bn ATVM (이자만)</a:t>
+                        <a:t>$4.0bn</a:t>
+                      </a:r>
+                      <a:endParaRPr lang="en-US" sz="950" dirty="0">
+                        <a:latin typeface="IBM Plex Mono" charset="0"/>
+                        <a:ea typeface="IBM Plex Mono" charset="0"/>
+                        <a:cs typeface="IBM Plex Mono" charset="0"/>
+                      </a:endParaRPr>
+                    </a:p>
+                  </a:txBody>
+                  <a:tcPr marL="101600" marR="101600" marT="25400" marB="25400" anchor="ctr">
+                    <a:lnL w="6350" cap="flat" cmpd="sng" algn="ctr">
+                      <a:solidFill>
+                        <a:srgbClr val="ECE6DC"/>
+                      </a:solidFill>
+                      <a:prstDash val="solid"/>
+                      <a:round/>
+                      <a:headEnd type="none" w="med" len="med"/>
+                      <a:tailEnd type="none" w="med" len="med"/>
+                    </a:lnL>
+                    <a:lnR w="6350" cap="flat" cmpd="sng" algn="ctr">
+                      <a:solidFill>
+                        <a:srgbClr val="ECE6DC"/>
+                      </a:solidFill>
+                      <a:prstDash val="solid"/>
+                      <a:round/>
+                      <a:headEnd type="none" w="med" len="med"/>
+                      <a:tailEnd type="none" w="med" len="med"/>
+                    </a:lnR>
+                    <a:lnT w="6350" cap="flat" cmpd="sng" algn="ctr">
+                      <a:solidFill>
+                        <a:srgbClr val="ECE6DC"/>
+                      </a:solidFill>
+                      <a:prstDash val="solid"/>
+                      <a:round/>
+                      <a:headEnd type="none" w="med" len="med"/>
+                      <a:tailEnd type="none" w="med" len="med"/>
+                    </a:lnT>
+                    <a:lnB w="6350" cap="flat" cmpd="sng" algn="ctr">
+                      <a:solidFill>
+                        <a:srgbClr val="ECE6DC"/>
+                      </a:solidFill>
+                      <a:prstDash val="solid"/>
+                      <a:round/>
+                      <a:headEnd type="none" w="med" len="med"/>
+                      <a:tailEnd type="none" w="med" len="med"/>
+                    </a:lnB>
+                    <a:solidFill>
+                      <a:srgbClr val="FFFFFF"/>
+                    </a:solidFill>
+                  </a:tcPr>
+                </a:tc>
+              </a:tr>
+              <a:tr h="333756">
+                <a:tc>
+                  <a:txBody>
+                    <a:bodyPr/>
+                    <a:lstStyle/>
+                    <a:p>
+                      <a:pPr indent="0" marL="0">
+                        <a:buNone/>
+                      </a:pPr>
+                      <a:r>
+                        <a:rPr lang="en-US" sz="950" dirty="0">
+                          <a:solidFill>
+                            <a:srgbClr val="6F6960"/>
+                          </a:solidFill>
+                          <a:latin typeface="IBM Plex Sans KR" pitchFamily="34" charset="0"/>
+                          <a:ea typeface="IBM Plex Sans KR" pitchFamily="34" charset="-122"/>
+                          <a:cs typeface="IBM Plex Sans KR" pitchFamily="34" charset="-120"/>
+                        </a:rPr>
+                        <a:t>  └ 상환</a:t>
+                      </a:r>
+                      <a:endParaRPr lang="en-US" sz="950" dirty="0">
+                        <a:latin typeface="IBM Plex Sans KR" charset="0"/>
+                        <a:ea typeface="IBM Plex Sans KR" charset="0"/>
+                        <a:cs typeface="IBM Plex Sans KR" charset="0"/>
+                      </a:endParaRPr>
+                    </a:p>
+                  </a:txBody>
+                  <a:tcPr marL="101600" marR="101600" marT="25400" marB="25400" anchor="ctr">
+                    <a:lnL w="6350" cap="flat" cmpd="sng" algn="ctr">
+                      <a:solidFill>
+                        <a:srgbClr val="ECE6DC"/>
+                      </a:solidFill>
+                      <a:prstDash val="solid"/>
+                      <a:round/>
+                      <a:headEnd type="none" w="med" len="med"/>
+                      <a:tailEnd type="none" w="med" len="med"/>
+                    </a:lnL>
+                    <a:lnR w="6350" cap="flat" cmpd="sng" algn="ctr">
+                      <a:solidFill>
+                        <a:srgbClr val="ECE6DC"/>
+                      </a:solidFill>
+                      <a:prstDash val="solid"/>
+                      <a:round/>
+                      <a:headEnd type="none" w="med" len="med"/>
+                      <a:tailEnd type="none" w="med" len="med"/>
+                    </a:lnR>
+                    <a:lnT w="6350" cap="flat" cmpd="sng" algn="ctr">
+                      <a:solidFill>
+                        <a:srgbClr val="ECE6DC"/>
+                      </a:solidFill>
+                      <a:prstDash val="solid"/>
+                      <a:round/>
+                      <a:headEnd type="none" w="med" len="med"/>
+                      <a:tailEnd type="none" w="med" len="med"/>
+                    </a:lnT>
+                    <a:lnB w="6350" cap="flat" cmpd="sng" algn="ctr">
+                      <a:solidFill>
+                        <a:srgbClr val="ECE6DC"/>
+                      </a:solidFill>
+                      <a:prstDash val="solid"/>
+                      <a:round/>
+                      <a:headEnd type="none" w="med" len="med"/>
+                      <a:tailEnd type="none" w="med" len="med"/>
+                    </a:lnB>
+                    <a:solidFill>
+                      <a:srgbClr val="FFFFFF"/>
+                    </a:solidFill>
+                  </a:tcPr>
+                </a:tc>
+                <a:tc>
+                  <a:txBody>
+                    <a:bodyPr/>
+                    <a:lstStyle/>
+                    <a:p>
+                      <a:pPr algn="r" indent="0" marL="0">
+                        <a:buNone/>
+                      </a:pPr>
+                      <a:r>
+                        <a:rPr lang="en-US" sz="950" b="1" dirty="0">
+                          <a:solidFill>
+                            <a:srgbClr val="6F6960"/>
+                          </a:solidFill>
+                          <a:latin typeface="IBM Plex Mono" pitchFamily="34" charset="0"/>
+                          <a:ea typeface="IBM Plex Mono" pitchFamily="34" charset="-122"/>
+                          <a:cs typeface="IBM Plex Mono" pitchFamily="34" charset="-120"/>
+                        </a:rPr>
+                        <a:t>이자만~'30 → 이후분할 ★</a:t>
                       </a:r>
                       <a:endParaRPr lang="en-US" sz="950" dirty="0">
                         <a:latin typeface="IBM Plex Mono" charset="0"/>
@@ -3555,7 +3693,7 @@
                           <a:ea typeface="IBM Plex Sans KR" pitchFamily="34" charset="-122"/>
                           <a:cs typeface="IBM Plex Sans KR" pitchFamily="34" charset="-120"/>
                         </a:rPr>
-                        <a:t>순자산 NAV ★</a:t>
+                        <a:t>순자산 NAV (BS) ★</a:t>
                       </a:r>
                       <a:endParaRPr lang="en-US" sz="950" dirty="0">
                         <a:latin typeface="IBM Plex Sans KR" charset="0"/>
@@ -5103,7 +5241,7 @@
                 <a:ea typeface="IBM Plex Mono" pitchFamily="34" charset="-122"/>
                 <a:cs typeface="IBM Plex Mono" pitchFamily="34" charset="-120"/>
               </a:rPr>
-              <a:t>SK Innovation · IR  /  03</a:t>
+              <a:t>SK 전략팀 · Confidential  /  03</a:t>
             </a:r>
             <a:endParaRPr lang="en-US" sz="900" dirty="0"/>
           </a:p>
@@ -6181,7 +6319,7 @@
                 <a:ea typeface="IBM Plex Sans KR" pitchFamily="34" charset="-122"/>
                 <a:cs typeface="IBM Plex Sans KR" pitchFamily="34" charset="-120"/>
               </a:rPr>
-              <a:t>기존 DOE ATVM  </a:t>
+              <a:t>기존 DOE 융자  </a:t>
             </a:r>
             <a:pPr indent="0" marL="0">
               <a:buNone/>
@@ -6932,7 +7070,7 @@
                 <a:ea typeface="IBM Plex Mono" pitchFamily="34" charset="-122"/>
                 <a:cs typeface="IBM Plex Mono" pitchFamily="34" charset="-120"/>
               </a:rPr>
-              <a:t>SK Innovation · IR  /  04</a:t>
+              <a:t>SK 전략팀 · Confidential  /  04</a:t>
             </a:r>
             <a:endParaRPr lang="en-US" sz="900" dirty="0"/>
           </a:p>
@@ -12046,7 +12184,7 @@
                 <a:ea typeface="IBM Plex Mono" pitchFamily="34" charset="-122"/>
                 <a:cs typeface="IBM Plex Mono" pitchFamily="34" charset="-120"/>
               </a:rPr>
-              <a:t>SK Innovation · IR  /  05</a:t>
+              <a:t>SK 전략팀 · Confidential  /  05</a:t>
             </a:r>
             <a:endParaRPr lang="en-US" sz="900" dirty="0"/>
           </a:p>
@@ -13245,7 +13383,7 @@
                           <a:ea typeface="IBM Plex Sans KR" pitchFamily="34" charset="-122"/>
                           <a:cs typeface="IBM Plex Sans KR" pitchFamily="34" charset="-120"/>
                         </a:rPr>
-                        <a:t>LPO (ATVM/Title 17) · OT 기존</a:t>
+                        <a:t>DOE LPO 융자 · OT 기존 (론명 변경 ★)</a:t>
                       </a:r>
                       <a:endParaRPr lang="en-US" sz="950" dirty="0">
                         <a:latin typeface="IBM Plex Sans KR" charset="0"/>

--- a/sk_valuation_project/output/SK_Funding_v3_editable.pptx
+++ b/sk_valuation_project/output/SK_Funding_v3_editable.pptx
@@ -10,9 +10,10 @@
     <p:sldId id="258" r:id="rId4"/>
     <p:sldId id="259" r:id="rId5"/>
     <p:sldId id="260" r:id="rId6"/>
+    <p:sldId id="261" r:id="rId7"/>
   </p:sldIdLst>
   <p:notesMasterIdLst>
-    <p:notesMasterId r:id="rId7"/>
+    <p:notesMasterId r:id="rId8"/>
   </p:notesMasterIdLst>
   <p:sldSz cx="10689336" cy="7562088"/>
   <p:notesSz cx="7562088" cy="10689336"/>
@@ -882,6 +883,94 @@
             <a:fld id="{F7021451-1387-4CA6-816F-3879F97B5CBC}" type="slidenum">
               <a:rPr lang="en-US"/>
               <a:t>5</a:t>
+            </a:fld>
+            <a:endParaRPr lang="en-US"/>
+          </a:p>
+        </p:txBody>
+      </p:sp>
+    </p:spTree>
+    <p:extLst>
+      <p:ext uri="{BB962C8B-B14F-4D97-AF65-F5344CB8AC3E}">
+        <p14:creationId xmlns:p14="http://schemas.microsoft.com/office/powerpoint/2010/main" val="1024086991"/>
+      </p:ext>
+    </p:extLst>
+  </p:cSld>
+  <p:clrMapOvr>
+    <a:masterClrMapping/>
+  </p:clrMapOvr>
+</p:notes>
+</file>
+
+<file path=ppt/notesSlides/notesSlide6.xml><?xml version="1.0" encoding="utf-8"?>
+<p:notes xmlns:a="http://schemas.openxmlformats.org/drawingml/2006/main" xmlns:r="http://schemas.openxmlformats.org/officeDocument/2006/relationships" xmlns:p="http://schemas.openxmlformats.org/presentationml/2006/main">
+  <p:cSld>
+    <p:spTree>
+      <p:nvGrpSpPr>
+        <p:cNvPr id="1" name=""/>
+        <p:cNvGrpSpPr/>
+        <p:nvPr/>
+      </p:nvGrpSpPr>
+      <p:grpSpPr>
+        <a:xfrm>
+          <a:off x="0" y="0"/>
+          <a:ext cx="0" cy="0"/>
+          <a:chOff x="0" y="0"/>
+          <a:chExt cx="0" cy="0"/>
+        </a:xfrm>
+      </p:grpSpPr>
+      <p:sp>
+        <p:nvSpPr>
+          <p:cNvPr id="2" name="Slide Image Placeholder 1"/>
+          <p:cNvSpPr>
+            <a:spLocks noGrp="1" noRot="1" noChangeAspect="1"/>
+          </p:cNvSpPr>
+          <p:nvPr>
+            <p:ph type="sldImg"/>
+          </p:nvPr>
+        </p:nvSpPr>
+        <p:spPr/>
+      </p:sp>
+      <p:sp>
+        <p:nvSpPr>
+          <p:cNvPr id="3" name="Notes Placeholder 2"/>
+          <p:cNvSpPr>
+            <a:spLocks noGrp="1"/>
+          </p:cNvSpPr>
+          <p:nvPr>
+            <p:ph type="body" idx="1"/>
+          </p:nvPr>
+        </p:nvSpPr>
+        <p:spPr/>
+        <p:txBody>
+          <a:bodyPr/>
+          <a:lstStyle/>
+          <a:p>
+            <a:r>
+              <a:rPr lang="en-US" dirty="0"/>
+              <a:t/>
+            </a:r>
+            <a:endParaRPr lang="en-US" dirty="0"/>
+          </a:p>
+        </p:txBody>
+      </p:sp>
+      <p:sp>
+        <p:nvSpPr>
+          <p:cNvPr id="4" name="Slide Number Placeholder 3"/>
+          <p:cNvSpPr>
+            <a:spLocks noGrp="1"/>
+          </p:cNvSpPr>
+          <p:nvPr>
+            <p:ph type="sldNum" sz="quarter" idx="10"/>
+          </p:nvPr>
+        </p:nvSpPr>
+        <p:spPr/>
+        <p:txBody>
+          <a:bodyPr/>
+          <a:lstStyle/>
+          <a:p>
+            <a:fld id="{F7021451-1387-4CA6-816F-3879F97B5CBC}" type="slidenum">
+              <a:rPr lang="en-US"/>
+              <a:t>6</a:t>
             </a:fld>
             <a:endParaRPr lang="en-US"/>
           </a:p>
@@ -12145,7 +12234,7 @@
                 <a:ea typeface="IBM Plex Mono" pitchFamily="34" charset="-122"/>
                 <a:cs typeface="IBM Plex Mono" pitchFamily="34" charset="-120"/>
               </a:rPr>
-              <a:t>CLOSING — GOVERNMENT ENGAGEMENT</a:t>
+              <a:t>VALUATION — PEER MULTIPLES</a:t>
             </a:r>
             <a:endParaRPr lang="en-US" sz="900" dirty="0"/>
           </a:p>
@@ -12185,6 +12274,3670 @@
                 <a:cs typeface="IBM Plex Mono" pitchFamily="34" charset="-120"/>
               </a:rPr>
               <a:t>SK 전략팀 · Confidential  /  05</a:t>
+            </a:r>
+            <a:endParaRPr lang="en-US" sz="900" dirty="0"/>
+          </a:p>
+        </p:txBody>
+      </p:sp>
+      <p:sp>
+        <p:nvSpPr>
+          <p:cNvPr id="4" name="Text 2"/>
+          <p:cNvSpPr/>
+          <p:nvPr/>
+        </p:nvSpPr>
+        <p:spPr>
+          <a:xfrm>
+            <a:off x="566928" y="786384"/>
+            <a:ext cx="7178040" cy="566928"/>
+          </a:xfrm>
+          <a:prstGeom prst="rect">
+            <a:avLst/>
+          </a:prstGeom>
+          <a:noFill/>
+          <a:ln/>
+        </p:spPr>
+        <p:txBody>
+          <a:bodyPr wrap="square" lIns="0" tIns="0" rIns="0" bIns="0" rtlCol="0" anchor="ctr"/>
+          <a:lstStyle/>
+          <a:p>
+            <a:pPr indent="0" marL="0">
+              <a:buNone/>
+            </a:pPr>
+            <a:r>
+              <a:rPr lang="en-US" sz="2600" b="1" dirty="0">
+                <a:solidFill>
+                  <a:srgbClr val="1B1714"/>
+                </a:solidFill>
+                <a:latin typeface="Noto Serif KR" pitchFamily="34" charset="0"/>
+                <a:ea typeface="Noto Serif KR" pitchFamily="34" charset="-122"/>
+                <a:cs typeface="Noto Serif KR" pitchFamily="34" charset="-120"/>
+              </a:rPr>
+              <a:t>Peer 멀티플 (8~13x)</a:t>
+            </a:r>
+            <a:endParaRPr lang="en-US" sz="2600" dirty="0"/>
+          </a:p>
+        </p:txBody>
+      </p:sp>
+      <p:sp>
+        <p:nvSpPr>
+          <p:cNvPr id="5" name="Text 3"/>
+          <p:cNvSpPr/>
+          <p:nvPr/>
+        </p:nvSpPr>
+        <p:spPr>
+          <a:xfrm>
+            <a:off x="7379208" y="932688"/>
+            <a:ext cx="2743200" cy="384048"/>
+          </a:xfrm>
+          <a:prstGeom prst="rect">
+            <a:avLst/>
+          </a:prstGeom>
+          <a:noFill/>
+          <a:ln/>
+        </p:spPr>
+        <p:txBody>
+          <a:bodyPr wrap="square" lIns="0" tIns="0" rIns="0" bIns="0" rtlCol="0" anchor="b"/>
+          <a:lstStyle/>
+          <a:p>
+            <a:pPr algn="r" indent="0" marL="0">
+              <a:buNone/>
+            </a:pPr>
+            <a:r>
+              <a:rPr lang="en-US" sz="950" dirty="0">
+                <a:solidFill>
+                  <a:srgbClr val="6F6960"/>
+                </a:solidFill>
+                <a:latin typeface="IBM Plex Sans KR" pitchFamily="34" charset="0"/>
+                <a:ea typeface="IBM Plex Sans KR" pitchFamily="34" charset="-122"/>
+                <a:cs typeface="IBM Plex Sans KR" pitchFamily="34" charset="-120"/>
+              </a:rPr>
+              <a:t>ex-AMPC EBITDA $554mm 적용</a:t>
+            </a:r>
+            <a:endParaRPr lang="en-US" sz="950" dirty="0"/>
+          </a:p>
+        </p:txBody>
+      </p:sp>
+      <p:sp>
+        <p:nvSpPr>
+          <p:cNvPr id="6" name="Shape 4"/>
+          <p:cNvSpPr/>
+          <p:nvPr/>
+        </p:nvSpPr>
+        <p:spPr>
+          <a:xfrm>
+            <a:off x="566928" y="1426464"/>
+            <a:ext cx="9555480" cy="0"/>
+          </a:xfrm>
+          <a:prstGeom prst="line">
+            <a:avLst/>
+          </a:prstGeom>
+          <a:noFill/>
+          <a:ln w="19050">
+            <a:solidFill>
+              <a:srgbClr val="1B1714"/>
+            </a:solidFill>
+            <a:prstDash val="solid"/>
+          </a:ln>
+        </p:spPr>
+      </p:sp>
+      <p:sp>
+        <p:nvSpPr>
+          <p:cNvPr id="7" name="Text 5"/>
+          <p:cNvSpPr/>
+          <p:nvPr/>
+        </p:nvSpPr>
+        <p:spPr>
+          <a:xfrm>
+            <a:off x="566928" y="1627632"/>
+            <a:ext cx="4572000" cy="219456"/>
+          </a:xfrm>
+          <a:prstGeom prst="rect">
+            <a:avLst/>
+          </a:prstGeom>
+          <a:noFill/>
+          <a:ln/>
+        </p:spPr>
+        <p:txBody>
+          <a:bodyPr wrap="square" lIns="0" tIns="0" rIns="0" bIns="0" rtlCol="0" anchor="ctr"/>
+          <a:lstStyle/>
+          <a:p>
+            <a:pPr indent="0" marL="0">
+              <a:buNone/>
+            </a:pPr>
+            <a:r>
+              <a:rPr lang="en-US" sz="850" spc="150" kern="0" dirty="0">
+                <a:solidFill>
+                  <a:srgbClr val="9A847C"/>
+                </a:solidFill>
+                <a:latin typeface="IBM Plex Mono" pitchFamily="34" charset="0"/>
+                <a:ea typeface="IBM Plex Mono" pitchFamily="34" charset="-122"/>
+                <a:cs typeface="IBM Plex Mono" pitchFamily="34" charset="-120"/>
+              </a:rPr>
+              <a:t>Peer 컴프스 · COMPARABLES (forward EV/EBITDA ★)</a:t>
+            </a:r>
+            <a:endParaRPr lang="en-US" sz="850" dirty="0"/>
+          </a:p>
+        </p:txBody>
+      </p:sp>
+      <p:graphicFrame>
+        <p:nvGraphicFramePr>
+          <p:cNvPr id="6" name="Table 0"/>
+          <p:cNvGraphicFramePr>
+            <a:graphicFrameLocks noGrp="1"/>
+          </p:cNvGraphicFramePr>
+          <p:nvPr>
+            <p:extLst>
+              <p:ext uri="{D42A27DB-BD31-4B8C-83A1-F6EECF244321}">
+                <p14:modId xmlns:p14="http://schemas.microsoft.com/office/powerpoint/2010/main" val="1579011935"/>
+              </p:ext>
+            </p:extLst>
+          </p:nvPr>
+        </p:nvGraphicFramePr>
+        <p:xfrm>
+          <a:off x="566928" y="1883664"/>
+          <a:ext cx="4572000" cy="914400"/>
+        </p:xfrm>
+        <a:graphic>
+          <a:graphicData uri="http://schemas.openxmlformats.org/drawingml/2006/table">
+            <a:tbl>
+              <a:tblPr/>
+              <a:tblGrid>
+                <a:gridCol w="1874520"/>
+                <a:gridCol w="1600200"/>
+                <a:gridCol w="1097280"/>
+              </a:tblGrid>
+              <a:tr h="310896">
+                <a:tc>
+                  <a:txBody>
+                    <a:bodyPr/>
+                    <a:lstStyle/>
+                    <a:p>
+                      <a:pPr algn="l" indent="0" marL="0">
+                        <a:buNone/>
+                      </a:pPr>
+                      <a:r>
+                        <a:rPr lang="en-US" sz="900" b="1" dirty="0">
+                          <a:solidFill>
+                            <a:srgbClr val="FFFFFF"/>
+                          </a:solidFill>
+                          <a:latin typeface="IBM Plex Sans KR" pitchFamily="34" charset="0"/>
+                          <a:ea typeface="IBM Plex Sans KR" pitchFamily="34" charset="-122"/>
+                          <a:cs typeface="IBM Plex Sans KR" pitchFamily="34" charset="-120"/>
+                        </a:rPr>
+                        <a:t>회사</a:t>
+                      </a:r>
+                      <a:endParaRPr lang="en-US" sz="900" dirty="0">
+                        <a:latin typeface="IBM Plex Sans KR" charset="0"/>
+                        <a:ea typeface="IBM Plex Sans KR" charset="0"/>
+                        <a:cs typeface="IBM Plex Sans KR" charset="0"/>
+                      </a:endParaRPr>
+                    </a:p>
+                  </a:txBody>
+                  <a:tcPr marL="88900" marR="88900" marT="25400" marB="25400" anchor="ctr">
+                    <a:lnL w="6350" cap="flat" cmpd="sng" algn="ctr">
+                      <a:solidFill>
+                        <a:srgbClr val="E4DED4"/>
+                      </a:solidFill>
+                      <a:prstDash val="solid"/>
+                      <a:round/>
+                      <a:headEnd type="none" w="med" len="med"/>
+                      <a:tailEnd type="none" w="med" len="med"/>
+                    </a:lnL>
+                    <a:lnR w="6350" cap="flat" cmpd="sng" algn="ctr">
+                      <a:solidFill>
+                        <a:srgbClr val="E4DED4"/>
+                      </a:solidFill>
+                      <a:prstDash val="solid"/>
+                      <a:round/>
+                      <a:headEnd type="none" w="med" len="med"/>
+                      <a:tailEnd type="none" w="med" len="med"/>
+                    </a:lnR>
+                    <a:lnT w="6350" cap="flat" cmpd="sng" algn="ctr">
+                      <a:solidFill>
+                        <a:srgbClr val="E4DED4"/>
+                      </a:solidFill>
+                      <a:prstDash val="solid"/>
+                      <a:round/>
+                      <a:headEnd type="none" w="med" len="med"/>
+                      <a:tailEnd type="none" w="med" len="med"/>
+                    </a:lnT>
+                    <a:lnB w="6350" cap="flat" cmpd="sng" algn="ctr">
+                      <a:solidFill>
+                        <a:srgbClr val="E4DED4"/>
+                      </a:solidFill>
+                      <a:prstDash val="solid"/>
+                      <a:round/>
+                      <a:headEnd type="none" w="med" len="med"/>
+                      <a:tailEnd type="none" w="med" len="med"/>
+                    </a:lnB>
+                    <a:solidFill>
+                      <a:srgbClr val="1B1714"/>
+                    </a:solidFill>
+                  </a:tcPr>
+                </a:tc>
+                <a:tc>
+                  <a:txBody>
+                    <a:bodyPr/>
+                    <a:lstStyle/>
+                    <a:p>
+                      <a:pPr algn="l" indent="0" marL="0">
+                        <a:buNone/>
+                      </a:pPr>
+                      <a:r>
+                        <a:rPr lang="en-US" sz="900" b="1" dirty="0">
+                          <a:solidFill>
+                            <a:srgbClr val="FFFFFF"/>
+                          </a:solidFill>
+                          <a:latin typeface="IBM Plex Sans KR" pitchFamily="34" charset="0"/>
+                          <a:ea typeface="IBM Plex Sans KR" pitchFamily="34" charset="-122"/>
+                          <a:cs typeface="IBM Plex Sans KR" pitchFamily="34" charset="-120"/>
+                        </a:rPr>
+                        <a:t>구분</a:t>
+                      </a:r>
+                      <a:endParaRPr lang="en-US" sz="900" dirty="0">
+                        <a:latin typeface="IBM Plex Sans KR" charset="0"/>
+                        <a:ea typeface="IBM Plex Sans KR" charset="0"/>
+                        <a:cs typeface="IBM Plex Sans KR" charset="0"/>
+                      </a:endParaRPr>
+                    </a:p>
+                  </a:txBody>
+                  <a:tcPr marL="88900" marR="88900" marT="25400" marB="25400" anchor="ctr">
+                    <a:lnL w="6350" cap="flat" cmpd="sng" algn="ctr">
+                      <a:solidFill>
+                        <a:srgbClr val="E4DED4"/>
+                      </a:solidFill>
+                      <a:prstDash val="solid"/>
+                      <a:round/>
+                      <a:headEnd type="none" w="med" len="med"/>
+                      <a:tailEnd type="none" w="med" len="med"/>
+                    </a:lnL>
+                    <a:lnR w="6350" cap="flat" cmpd="sng" algn="ctr">
+                      <a:solidFill>
+                        <a:srgbClr val="E4DED4"/>
+                      </a:solidFill>
+                      <a:prstDash val="solid"/>
+                      <a:round/>
+                      <a:headEnd type="none" w="med" len="med"/>
+                      <a:tailEnd type="none" w="med" len="med"/>
+                    </a:lnR>
+                    <a:lnT w="6350" cap="flat" cmpd="sng" algn="ctr">
+                      <a:solidFill>
+                        <a:srgbClr val="E4DED4"/>
+                      </a:solidFill>
+                      <a:prstDash val="solid"/>
+                      <a:round/>
+                      <a:headEnd type="none" w="med" len="med"/>
+                      <a:tailEnd type="none" w="med" len="med"/>
+                    </a:lnT>
+                    <a:lnB w="6350" cap="flat" cmpd="sng" algn="ctr">
+                      <a:solidFill>
+                        <a:srgbClr val="E4DED4"/>
+                      </a:solidFill>
+                      <a:prstDash val="solid"/>
+                      <a:round/>
+                      <a:headEnd type="none" w="med" len="med"/>
+                      <a:tailEnd type="none" w="med" len="med"/>
+                    </a:lnB>
+                    <a:solidFill>
+                      <a:srgbClr val="1B1714"/>
+                    </a:solidFill>
+                  </a:tcPr>
+                </a:tc>
+                <a:tc>
+                  <a:txBody>
+                    <a:bodyPr/>
+                    <a:lstStyle/>
+                    <a:p>
+                      <a:pPr algn="ctr" indent="0" marL="0">
+                        <a:buNone/>
+                      </a:pPr>
+                      <a:r>
+                        <a:rPr lang="en-US" sz="900" b="1" dirty="0">
+                          <a:solidFill>
+                            <a:srgbClr val="FFFFFF"/>
+                          </a:solidFill>
+                          <a:latin typeface="IBM Plex Sans KR" pitchFamily="34" charset="0"/>
+                          <a:ea typeface="IBM Plex Sans KR" pitchFamily="34" charset="-122"/>
+                          <a:cs typeface="IBM Plex Sans KR" pitchFamily="34" charset="-120"/>
+                        </a:rPr>
+                        <a:t>EV/EBITDA</a:t>
+                      </a:r>
+                      <a:endParaRPr lang="en-US" sz="900" dirty="0">
+                        <a:latin typeface="IBM Plex Sans KR" charset="0"/>
+                        <a:ea typeface="IBM Plex Sans KR" charset="0"/>
+                        <a:cs typeface="IBM Plex Sans KR" charset="0"/>
+                      </a:endParaRPr>
+                    </a:p>
+                  </a:txBody>
+                  <a:tcPr marL="88900" marR="88900" marT="25400" marB="25400" anchor="ctr">
+                    <a:lnL w="6350" cap="flat" cmpd="sng" algn="ctr">
+                      <a:solidFill>
+                        <a:srgbClr val="E4DED4"/>
+                      </a:solidFill>
+                      <a:prstDash val="solid"/>
+                      <a:round/>
+                      <a:headEnd type="none" w="med" len="med"/>
+                      <a:tailEnd type="none" w="med" len="med"/>
+                    </a:lnL>
+                    <a:lnR w="6350" cap="flat" cmpd="sng" algn="ctr">
+                      <a:solidFill>
+                        <a:srgbClr val="E4DED4"/>
+                      </a:solidFill>
+                      <a:prstDash val="solid"/>
+                      <a:round/>
+                      <a:headEnd type="none" w="med" len="med"/>
+                      <a:tailEnd type="none" w="med" len="med"/>
+                    </a:lnR>
+                    <a:lnT w="6350" cap="flat" cmpd="sng" algn="ctr">
+                      <a:solidFill>
+                        <a:srgbClr val="E4DED4"/>
+                      </a:solidFill>
+                      <a:prstDash val="solid"/>
+                      <a:round/>
+                      <a:headEnd type="none" w="med" len="med"/>
+                      <a:tailEnd type="none" w="med" len="med"/>
+                    </a:lnT>
+                    <a:lnB w="6350" cap="flat" cmpd="sng" algn="ctr">
+                      <a:solidFill>
+                        <a:srgbClr val="E4DED4"/>
+                      </a:solidFill>
+                      <a:prstDash val="solid"/>
+                      <a:round/>
+                      <a:headEnd type="none" w="med" len="med"/>
+                      <a:tailEnd type="none" w="med" len="med"/>
+                    </a:lnB>
+                    <a:solidFill>
+                      <a:srgbClr val="1B1714"/>
+                    </a:solidFill>
+                  </a:tcPr>
+                </a:tc>
+              </a:tr>
+              <a:tr h="365760">
+                <a:tc>
+                  <a:txBody>
+                    <a:bodyPr/>
+                    <a:lstStyle/>
+                    <a:p>
+                      <a:pPr indent="0" marL="0">
+                        <a:buNone/>
+                      </a:pPr>
+                      <a:r>
+                        <a:rPr lang="en-US" sz="950" dirty="0">
+                          <a:solidFill>
+                            <a:srgbClr val="1B1714"/>
+                          </a:solidFill>
+                          <a:latin typeface="IBM Plex Sans KR" pitchFamily="34" charset="0"/>
+                          <a:ea typeface="IBM Plex Sans KR" pitchFamily="34" charset="-122"/>
+                          <a:cs typeface="IBM Plex Sans KR" pitchFamily="34" charset="-120"/>
+                        </a:rPr>
+                        <a:t>CATL</a:t>
+                      </a:r>
+                      <a:endParaRPr lang="en-US" sz="950" dirty="0">
+                        <a:latin typeface="IBM Plex Sans KR" charset="0"/>
+                        <a:ea typeface="IBM Plex Sans KR" charset="0"/>
+                        <a:cs typeface="IBM Plex Sans KR" charset="0"/>
+                      </a:endParaRPr>
+                    </a:p>
+                  </a:txBody>
+                  <a:tcPr marL="88900" marR="88900" marT="25400" marB="25400" anchor="ctr">
+                    <a:lnL w="6350" cap="flat" cmpd="sng" algn="ctr">
+                      <a:solidFill>
+                        <a:srgbClr val="E4DED4"/>
+                      </a:solidFill>
+                      <a:prstDash val="solid"/>
+                      <a:round/>
+                      <a:headEnd type="none" w="med" len="med"/>
+                      <a:tailEnd type="none" w="med" len="med"/>
+                    </a:lnL>
+                    <a:lnR w="6350" cap="flat" cmpd="sng" algn="ctr">
+                      <a:solidFill>
+                        <a:srgbClr val="E4DED4"/>
+                      </a:solidFill>
+                      <a:prstDash val="solid"/>
+                      <a:round/>
+                      <a:headEnd type="none" w="med" len="med"/>
+                      <a:tailEnd type="none" w="med" len="med"/>
+                    </a:lnR>
+                    <a:lnT w="6350" cap="flat" cmpd="sng" algn="ctr">
+                      <a:solidFill>
+                        <a:srgbClr val="E4DED4"/>
+                      </a:solidFill>
+                      <a:prstDash val="solid"/>
+                      <a:round/>
+                      <a:headEnd type="none" w="med" len="med"/>
+                      <a:tailEnd type="none" w="med" len="med"/>
+                    </a:lnT>
+                    <a:lnB w="6350" cap="flat" cmpd="sng" algn="ctr">
+                      <a:solidFill>
+                        <a:srgbClr val="E4DED4"/>
+                      </a:solidFill>
+                      <a:prstDash val="solid"/>
+                      <a:round/>
+                      <a:headEnd type="none" w="med" len="med"/>
+                      <a:tailEnd type="none" w="med" len="med"/>
+                    </a:lnB>
+                    <a:solidFill>
+                      <a:srgbClr val="FFFFFF"/>
+                    </a:solidFill>
+                  </a:tcPr>
+                </a:tc>
+                <a:tc>
+                  <a:txBody>
+                    <a:bodyPr/>
+                    <a:lstStyle/>
+                    <a:p>
+                      <a:pPr indent="0" marL="0">
+                        <a:buNone/>
+                      </a:pPr>
+                      <a:r>
+                        <a:rPr lang="en-US" sz="950" dirty="0">
+                          <a:solidFill>
+                            <a:srgbClr val="6F6960"/>
+                          </a:solidFill>
+                          <a:latin typeface="IBM Plex Mono" pitchFamily="34" charset="0"/>
+                          <a:ea typeface="IBM Plex Mono" pitchFamily="34" charset="-122"/>
+                          <a:cs typeface="IBM Plex Mono" pitchFamily="34" charset="-120"/>
+                        </a:rPr>
+                        <a:t>셀 · 글로벌 1위</a:t>
+                      </a:r>
+                      <a:endParaRPr lang="en-US" sz="950" dirty="0">
+                        <a:latin typeface="IBM Plex Mono" charset="0"/>
+                        <a:ea typeface="IBM Plex Mono" charset="0"/>
+                        <a:cs typeface="IBM Plex Mono" charset="0"/>
+                      </a:endParaRPr>
+                    </a:p>
+                  </a:txBody>
+                  <a:tcPr marL="88900" marR="88900" marT="25400" marB="25400" anchor="ctr">
+                    <a:lnL w="6350" cap="flat" cmpd="sng" algn="ctr">
+                      <a:solidFill>
+                        <a:srgbClr val="E4DED4"/>
+                      </a:solidFill>
+                      <a:prstDash val="solid"/>
+                      <a:round/>
+                      <a:headEnd type="none" w="med" len="med"/>
+                      <a:tailEnd type="none" w="med" len="med"/>
+                    </a:lnL>
+                    <a:lnR w="6350" cap="flat" cmpd="sng" algn="ctr">
+                      <a:solidFill>
+                        <a:srgbClr val="E4DED4"/>
+                      </a:solidFill>
+                      <a:prstDash val="solid"/>
+                      <a:round/>
+                      <a:headEnd type="none" w="med" len="med"/>
+                      <a:tailEnd type="none" w="med" len="med"/>
+                    </a:lnR>
+                    <a:lnT w="6350" cap="flat" cmpd="sng" algn="ctr">
+                      <a:solidFill>
+                        <a:srgbClr val="E4DED4"/>
+                      </a:solidFill>
+                      <a:prstDash val="solid"/>
+                      <a:round/>
+                      <a:headEnd type="none" w="med" len="med"/>
+                      <a:tailEnd type="none" w="med" len="med"/>
+                    </a:lnT>
+                    <a:lnB w="6350" cap="flat" cmpd="sng" algn="ctr">
+                      <a:solidFill>
+                        <a:srgbClr val="E4DED4"/>
+                      </a:solidFill>
+                      <a:prstDash val="solid"/>
+                      <a:round/>
+                      <a:headEnd type="none" w="med" len="med"/>
+                      <a:tailEnd type="none" w="med" len="med"/>
+                    </a:lnB>
+                    <a:solidFill>
+                      <a:srgbClr val="FFFFFF"/>
+                    </a:solidFill>
+                  </a:tcPr>
+                </a:tc>
+                <a:tc>
+                  <a:txBody>
+                    <a:bodyPr/>
+                    <a:lstStyle/>
+                    <a:p>
+                      <a:pPr algn="ctr" indent="0" marL="0">
+                        <a:buNone/>
+                      </a:pPr>
+                      <a:r>
+                        <a:rPr lang="en-US" sz="1100" b="1" dirty="0">
+                          <a:solidFill>
+                            <a:srgbClr val="1B1714"/>
+                          </a:solidFill>
+                          <a:latin typeface="Space Grotesk" pitchFamily="34" charset="0"/>
+                          <a:ea typeface="Space Grotesk" pitchFamily="34" charset="-122"/>
+                          <a:cs typeface="Space Grotesk" pitchFamily="34" charset="-120"/>
+                        </a:rPr>
+                        <a:t>12~13x</a:t>
+                      </a:r>
+                      <a:endParaRPr lang="en-US" sz="1100" dirty="0">
+                        <a:latin typeface="Space Grotesk" charset="0"/>
+                        <a:ea typeface="Space Grotesk" charset="0"/>
+                        <a:cs typeface="Space Grotesk" charset="0"/>
+                      </a:endParaRPr>
+                    </a:p>
+                  </a:txBody>
+                  <a:tcPr marL="88900" marR="88900" marT="25400" marB="25400" anchor="ctr">
+                    <a:lnL w="6350" cap="flat" cmpd="sng" algn="ctr">
+                      <a:solidFill>
+                        <a:srgbClr val="E4DED4"/>
+                      </a:solidFill>
+                      <a:prstDash val="solid"/>
+                      <a:round/>
+                      <a:headEnd type="none" w="med" len="med"/>
+                      <a:tailEnd type="none" w="med" len="med"/>
+                    </a:lnL>
+                    <a:lnR w="6350" cap="flat" cmpd="sng" algn="ctr">
+                      <a:solidFill>
+                        <a:srgbClr val="E4DED4"/>
+                      </a:solidFill>
+                      <a:prstDash val="solid"/>
+                      <a:round/>
+                      <a:headEnd type="none" w="med" len="med"/>
+                      <a:tailEnd type="none" w="med" len="med"/>
+                    </a:lnR>
+                    <a:lnT w="6350" cap="flat" cmpd="sng" algn="ctr">
+                      <a:solidFill>
+                        <a:srgbClr val="E4DED4"/>
+                      </a:solidFill>
+                      <a:prstDash val="solid"/>
+                      <a:round/>
+                      <a:headEnd type="none" w="med" len="med"/>
+                      <a:tailEnd type="none" w="med" len="med"/>
+                    </a:lnT>
+                    <a:lnB w="6350" cap="flat" cmpd="sng" algn="ctr">
+                      <a:solidFill>
+                        <a:srgbClr val="E4DED4"/>
+                      </a:solidFill>
+                      <a:prstDash val="solid"/>
+                      <a:round/>
+                      <a:headEnd type="none" w="med" len="med"/>
+                      <a:tailEnd type="none" w="med" len="med"/>
+                    </a:lnB>
+                    <a:solidFill>
+                      <a:srgbClr val="FFFFFF"/>
+                    </a:solidFill>
+                  </a:tcPr>
+                </a:tc>
+              </a:tr>
+              <a:tr h="365760">
+                <a:tc>
+                  <a:txBody>
+                    <a:bodyPr/>
+                    <a:lstStyle/>
+                    <a:p>
+                      <a:pPr indent="0" marL="0">
+                        <a:buNone/>
+                      </a:pPr>
+                      <a:r>
+                        <a:rPr lang="en-US" sz="950" dirty="0">
+                          <a:solidFill>
+                            <a:srgbClr val="1B1714"/>
+                          </a:solidFill>
+                          <a:latin typeface="IBM Plex Sans KR" pitchFamily="34" charset="0"/>
+                          <a:ea typeface="IBM Plex Sans KR" pitchFamily="34" charset="-122"/>
+                          <a:cs typeface="IBM Plex Sans KR" pitchFamily="34" charset="-120"/>
+                        </a:rPr>
+                        <a:t>Tesla (Energy)</a:t>
+                      </a:r>
+                      <a:endParaRPr lang="en-US" sz="950" dirty="0">
+                        <a:latin typeface="IBM Plex Sans KR" charset="0"/>
+                        <a:ea typeface="IBM Plex Sans KR" charset="0"/>
+                        <a:cs typeface="IBM Plex Sans KR" charset="0"/>
+                      </a:endParaRPr>
+                    </a:p>
+                  </a:txBody>
+                  <a:tcPr marL="88900" marR="88900" marT="25400" marB="25400" anchor="ctr">
+                    <a:lnL w="6350" cap="flat" cmpd="sng" algn="ctr">
+                      <a:solidFill>
+                        <a:srgbClr val="E4DED4"/>
+                      </a:solidFill>
+                      <a:prstDash val="solid"/>
+                      <a:round/>
+                      <a:headEnd type="none" w="med" len="med"/>
+                      <a:tailEnd type="none" w="med" len="med"/>
+                    </a:lnL>
+                    <a:lnR w="6350" cap="flat" cmpd="sng" algn="ctr">
+                      <a:solidFill>
+                        <a:srgbClr val="E4DED4"/>
+                      </a:solidFill>
+                      <a:prstDash val="solid"/>
+                      <a:round/>
+                      <a:headEnd type="none" w="med" len="med"/>
+                      <a:tailEnd type="none" w="med" len="med"/>
+                    </a:lnR>
+                    <a:lnT w="6350" cap="flat" cmpd="sng" algn="ctr">
+                      <a:solidFill>
+                        <a:srgbClr val="E4DED4"/>
+                      </a:solidFill>
+                      <a:prstDash val="solid"/>
+                      <a:round/>
+                      <a:headEnd type="none" w="med" len="med"/>
+                      <a:tailEnd type="none" w="med" len="med"/>
+                    </a:lnT>
+                    <a:lnB w="6350" cap="flat" cmpd="sng" algn="ctr">
+                      <a:solidFill>
+                        <a:srgbClr val="E4DED4"/>
+                      </a:solidFill>
+                      <a:prstDash val="solid"/>
+                      <a:round/>
+                      <a:headEnd type="none" w="med" len="med"/>
+                      <a:tailEnd type="none" w="med" len="med"/>
+                    </a:lnB>
+                    <a:solidFill>
+                      <a:srgbClr val="FFFFFF"/>
+                    </a:solidFill>
+                  </a:tcPr>
+                </a:tc>
+                <a:tc>
+                  <a:txBody>
+                    <a:bodyPr/>
+                    <a:lstStyle/>
+                    <a:p>
+                      <a:pPr indent="0" marL="0">
+                        <a:buNone/>
+                      </a:pPr>
+                      <a:r>
+                        <a:rPr lang="en-US" sz="950" dirty="0">
+                          <a:solidFill>
+                            <a:srgbClr val="6F6960"/>
+                          </a:solidFill>
+                          <a:latin typeface="IBM Plex Mono" pitchFamily="34" charset="0"/>
+                          <a:ea typeface="IBM Plex Mono" pitchFamily="34" charset="-122"/>
+                          <a:cs typeface="IBM Plex Mono" pitchFamily="34" charset="-120"/>
+                        </a:rPr>
+                        <a:t>ESS 시스템</a:t>
+                      </a:r>
+                      <a:endParaRPr lang="en-US" sz="950" dirty="0">
+                        <a:latin typeface="IBM Plex Mono" charset="0"/>
+                        <a:ea typeface="IBM Plex Mono" charset="0"/>
+                        <a:cs typeface="IBM Plex Mono" charset="0"/>
+                      </a:endParaRPr>
+                    </a:p>
+                  </a:txBody>
+                  <a:tcPr marL="88900" marR="88900" marT="25400" marB="25400" anchor="ctr">
+                    <a:lnL w="6350" cap="flat" cmpd="sng" algn="ctr">
+                      <a:solidFill>
+                        <a:srgbClr val="E4DED4"/>
+                      </a:solidFill>
+                      <a:prstDash val="solid"/>
+                      <a:round/>
+                      <a:headEnd type="none" w="med" len="med"/>
+                      <a:tailEnd type="none" w="med" len="med"/>
+                    </a:lnL>
+                    <a:lnR w="6350" cap="flat" cmpd="sng" algn="ctr">
+                      <a:solidFill>
+                        <a:srgbClr val="E4DED4"/>
+                      </a:solidFill>
+                      <a:prstDash val="solid"/>
+                      <a:round/>
+                      <a:headEnd type="none" w="med" len="med"/>
+                      <a:tailEnd type="none" w="med" len="med"/>
+                    </a:lnR>
+                    <a:lnT w="6350" cap="flat" cmpd="sng" algn="ctr">
+                      <a:solidFill>
+                        <a:srgbClr val="E4DED4"/>
+                      </a:solidFill>
+                      <a:prstDash val="solid"/>
+                      <a:round/>
+                      <a:headEnd type="none" w="med" len="med"/>
+                      <a:tailEnd type="none" w="med" len="med"/>
+                    </a:lnT>
+                    <a:lnB w="6350" cap="flat" cmpd="sng" algn="ctr">
+                      <a:solidFill>
+                        <a:srgbClr val="E4DED4"/>
+                      </a:solidFill>
+                      <a:prstDash val="solid"/>
+                      <a:round/>
+                      <a:headEnd type="none" w="med" len="med"/>
+                      <a:tailEnd type="none" w="med" len="med"/>
+                    </a:lnB>
+                    <a:solidFill>
+                      <a:srgbClr val="FFFFFF"/>
+                    </a:solidFill>
+                  </a:tcPr>
+                </a:tc>
+                <a:tc>
+                  <a:txBody>
+                    <a:bodyPr/>
+                    <a:lstStyle/>
+                    <a:p>
+                      <a:pPr algn="ctr" indent="0" marL="0">
+                        <a:buNone/>
+                      </a:pPr>
+                      <a:r>
+                        <a:rPr lang="en-US" sz="1100" b="1" dirty="0">
+                          <a:solidFill>
+                            <a:srgbClr val="1B1714"/>
+                          </a:solidFill>
+                          <a:latin typeface="Space Grotesk" pitchFamily="34" charset="0"/>
+                          <a:ea typeface="Space Grotesk" pitchFamily="34" charset="-122"/>
+                          <a:cs typeface="Space Grotesk" pitchFamily="34" charset="-120"/>
+                        </a:rPr>
+                        <a:t>~12x</a:t>
+                      </a:r>
+                      <a:endParaRPr lang="en-US" sz="1100" dirty="0">
+                        <a:latin typeface="Space Grotesk" charset="0"/>
+                        <a:ea typeface="Space Grotesk" charset="0"/>
+                        <a:cs typeface="Space Grotesk" charset="0"/>
+                      </a:endParaRPr>
+                    </a:p>
+                  </a:txBody>
+                  <a:tcPr marL="88900" marR="88900" marT="25400" marB="25400" anchor="ctr">
+                    <a:lnL w="6350" cap="flat" cmpd="sng" algn="ctr">
+                      <a:solidFill>
+                        <a:srgbClr val="E4DED4"/>
+                      </a:solidFill>
+                      <a:prstDash val="solid"/>
+                      <a:round/>
+                      <a:headEnd type="none" w="med" len="med"/>
+                      <a:tailEnd type="none" w="med" len="med"/>
+                    </a:lnL>
+                    <a:lnR w="6350" cap="flat" cmpd="sng" algn="ctr">
+                      <a:solidFill>
+                        <a:srgbClr val="E4DED4"/>
+                      </a:solidFill>
+                      <a:prstDash val="solid"/>
+                      <a:round/>
+                      <a:headEnd type="none" w="med" len="med"/>
+                      <a:tailEnd type="none" w="med" len="med"/>
+                    </a:lnR>
+                    <a:lnT w="6350" cap="flat" cmpd="sng" algn="ctr">
+                      <a:solidFill>
+                        <a:srgbClr val="E4DED4"/>
+                      </a:solidFill>
+                      <a:prstDash val="solid"/>
+                      <a:round/>
+                      <a:headEnd type="none" w="med" len="med"/>
+                      <a:tailEnd type="none" w="med" len="med"/>
+                    </a:lnT>
+                    <a:lnB w="6350" cap="flat" cmpd="sng" algn="ctr">
+                      <a:solidFill>
+                        <a:srgbClr val="E4DED4"/>
+                      </a:solidFill>
+                      <a:prstDash val="solid"/>
+                      <a:round/>
+                      <a:headEnd type="none" w="med" len="med"/>
+                      <a:tailEnd type="none" w="med" len="med"/>
+                    </a:lnB>
+                    <a:solidFill>
+                      <a:srgbClr val="FFFFFF"/>
+                    </a:solidFill>
+                  </a:tcPr>
+                </a:tc>
+              </a:tr>
+              <a:tr h="365760">
+                <a:tc>
+                  <a:txBody>
+                    <a:bodyPr/>
+                    <a:lstStyle/>
+                    <a:p>
+                      <a:pPr indent="0" marL="0">
+                        <a:buNone/>
+                      </a:pPr>
+                      <a:r>
+                        <a:rPr lang="en-US" sz="950" dirty="0">
+                          <a:solidFill>
+                            <a:srgbClr val="1B1714"/>
+                          </a:solidFill>
+                          <a:latin typeface="IBM Plex Sans KR" pitchFamily="34" charset="0"/>
+                          <a:ea typeface="IBM Plex Sans KR" pitchFamily="34" charset="-122"/>
+                          <a:cs typeface="IBM Plex Sans KR" pitchFamily="34" charset="-120"/>
+                        </a:rPr>
+                        <a:t>Fluence</a:t>
+                      </a:r>
+                      <a:endParaRPr lang="en-US" sz="950" dirty="0">
+                        <a:latin typeface="IBM Plex Sans KR" charset="0"/>
+                        <a:ea typeface="IBM Plex Sans KR" charset="0"/>
+                        <a:cs typeface="IBM Plex Sans KR" charset="0"/>
+                      </a:endParaRPr>
+                    </a:p>
+                  </a:txBody>
+                  <a:tcPr marL="88900" marR="88900" marT="25400" marB="25400" anchor="ctr">
+                    <a:lnL w="6350" cap="flat" cmpd="sng" algn="ctr">
+                      <a:solidFill>
+                        <a:srgbClr val="E4DED4"/>
+                      </a:solidFill>
+                      <a:prstDash val="solid"/>
+                      <a:round/>
+                      <a:headEnd type="none" w="med" len="med"/>
+                      <a:tailEnd type="none" w="med" len="med"/>
+                    </a:lnL>
+                    <a:lnR w="6350" cap="flat" cmpd="sng" algn="ctr">
+                      <a:solidFill>
+                        <a:srgbClr val="E4DED4"/>
+                      </a:solidFill>
+                      <a:prstDash val="solid"/>
+                      <a:round/>
+                      <a:headEnd type="none" w="med" len="med"/>
+                      <a:tailEnd type="none" w="med" len="med"/>
+                    </a:lnR>
+                    <a:lnT w="6350" cap="flat" cmpd="sng" algn="ctr">
+                      <a:solidFill>
+                        <a:srgbClr val="E4DED4"/>
+                      </a:solidFill>
+                      <a:prstDash val="solid"/>
+                      <a:round/>
+                      <a:headEnd type="none" w="med" len="med"/>
+                      <a:tailEnd type="none" w="med" len="med"/>
+                    </a:lnT>
+                    <a:lnB w="6350" cap="flat" cmpd="sng" algn="ctr">
+                      <a:solidFill>
+                        <a:srgbClr val="E4DED4"/>
+                      </a:solidFill>
+                      <a:prstDash val="solid"/>
+                      <a:round/>
+                      <a:headEnd type="none" w="med" len="med"/>
+                      <a:tailEnd type="none" w="med" len="med"/>
+                    </a:lnB>
+                    <a:solidFill>
+                      <a:srgbClr val="FFFFFF"/>
+                    </a:solidFill>
+                  </a:tcPr>
+                </a:tc>
+                <a:tc>
+                  <a:txBody>
+                    <a:bodyPr/>
+                    <a:lstStyle/>
+                    <a:p>
+                      <a:pPr indent="0" marL="0">
+                        <a:buNone/>
+                      </a:pPr>
+                      <a:r>
+                        <a:rPr lang="en-US" sz="950" dirty="0">
+                          <a:solidFill>
+                            <a:srgbClr val="6F6960"/>
+                          </a:solidFill>
+                          <a:latin typeface="IBM Plex Mono" pitchFamily="34" charset="0"/>
+                          <a:ea typeface="IBM Plex Mono" pitchFamily="34" charset="-122"/>
+                          <a:cs typeface="IBM Plex Mono" pitchFamily="34" charset="-120"/>
+                        </a:rPr>
+                        <a:t>ESS 인티그레이터</a:t>
+                      </a:r>
+                      <a:endParaRPr lang="en-US" sz="950" dirty="0">
+                        <a:latin typeface="IBM Plex Mono" charset="0"/>
+                        <a:ea typeface="IBM Plex Mono" charset="0"/>
+                        <a:cs typeface="IBM Plex Mono" charset="0"/>
+                      </a:endParaRPr>
+                    </a:p>
+                  </a:txBody>
+                  <a:tcPr marL="88900" marR="88900" marT="25400" marB="25400" anchor="ctr">
+                    <a:lnL w="6350" cap="flat" cmpd="sng" algn="ctr">
+                      <a:solidFill>
+                        <a:srgbClr val="E4DED4"/>
+                      </a:solidFill>
+                      <a:prstDash val="solid"/>
+                      <a:round/>
+                      <a:headEnd type="none" w="med" len="med"/>
+                      <a:tailEnd type="none" w="med" len="med"/>
+                    </a:lnL>
+                    <a:lnR w="6350" cap="flat" cmpd="sng" algn="ctr">
+                      <a:solidFill>
+                        <a:srgbClr val="E4DED4"/>
+                      </a:solidFill>
+                      <a:prstDash val="solid"/>
+                      <a:round/>
+                      <a:headEnd type="none" w="med" len="med"/>
+                      <a:tailEnd type="none" w="med" len="med"/>
+                    </a:lnR>
+                    <a:lnT w="6350" cap="flat" cmpd="sng" algn="ctr">
+                      <a:solidFill>
+                        <a:srgbClr val="E4DED4"/>
+                      </a:solidFill>
+                      <a:prstDash val="solid"/>
+                      <a:round/>
+                      <a:headEnd type="none" w="med" len="med"/>
+                      <a:tailEnd type="none" w="med" len="med"/>
+                    </a:lnT>
+                    <a:lnB w="6350" cap="flat" cmpd="sng" algn="ctr">
+                      <a:solidFill>
+                        <a:srgbClr val="E4DED4"/>
+                      </a:solidFill>
+                      <a:prstDash val="solid"/>
+                      <a:round/>
+                      <a:headEnd type="none" w="med" len="med"/>
+                      <a:tailEnd type="none" w="med" len="med"/>
+                    </a:lnB>
+                    <a:solidFill>
+                      <a:srgbClr val="FFFFFF"/>
+                    </a:solidFill>
+                  </a:tcPr>
+                </a:tc>
+                <a:tc>
+                  <a:txBody>
+                    <a:bodyPr/>
+                    <a:lstStyle/>
+                    <a:p>
+                      <a:pPr algn="ctr" indent="0" marL="0">
+                        <a:buNone/>
+                      </a:pPr>
+                      <a:r>
+                        <a:rPr lang="en-US" sz="1100" b="1" dirty="0">
+                          <a:solidFill>
+                            <a:srgbClr val="1B1714"/>
+                          </a:solidFill>
+                          <a:latin typeface="Space Grotesk" pitchFamily="34" charset="0"/>
+                          <a:ea typeface="Space Grotesk" pitchFamily="34" charset="-122"/>
+                          <a:cs typeface="Space Grotesk" pitchFamily="34" charset="-120"/>
+                        </a:rPr>
+                        <a:t>~11x</a:t>
+                      </a:r>
+                      <a:endParaRPr lang="en-US" sz="1100" dirty="0">
+                        <a:latin typeface="Space Grotesk" charset="0"/>
+                        <a:ea typeface="Space Grotesk" charset="0"/>
+                        <a:cs typeface="Space Grotesk" charset="0"/>
+                      </a:endParaRPr>
+                    </a:p>
+                  </a:txBody>
+                  <a:tcPr marL="88900" marR="88900" marT="25400" marB="25400" anchor="ctr">
+                    <a:lnL w="6350" cap="flat" cmpd="sng" algn="ctr">
+                      <a:solidFill>
+                        <a:srgbClr val="E4DED4"/>
+                      </a:solidFill>
+                      <a:prstDash val="solid"/>
+                      <a:round/>
+                      <a:headEnd type="none" w="med" len="med"/>
+                      <a:tailEnd type="none" w="med" len="med"/>
+                    </a:lnL>
+                    <a:lnR w="6350" cap="flat" cmpd="sng" algn="ctr">
+                      <a:solidFill>
+                        <a:srgbClr val="E4DED4"/>
+                      </a:solidFill>
+                      <a:prstDash val="solid"/>
+                      <a:round/>
+                      <a:headEnd type="none" w="med" len="med"/>
+                      <a:tailEnd type="none" w="med" len="med"/>
+                    </a:lnR>
+                    <a:lnT w="6350" cap="flat" cmpd="sng" algn="ctr">
+                      <a:solidFill>
+                        <a:srgbClr val="E4DED4"/>
+                      </a:solidFill>
+                      <a:prstDash val="solid"/>
+                      <a:round/>
+                      <a:headEnd type="none" w="med" len="med"/>
+                      <a:tailEnd type="none" w="med" len="med"/>
+                    </a:lnT>
+                    <a:lnB w="6350" cap="flat" cmpd="sng" algn="ctr">
+                      <a:solidFill>
+                        <a:srgbClr val="E4DED4"/>
+                      </a:solidFill>
+                      <a:prstDash val="solid"/>
+                      <a:round/>
+                      <a:headEnd type="none" w="med" len="med"/>
+                      <a:tailEnd type="none" w="med" len="med"/>
+                    </a:lnB>
+                    <a:solidFill>
+                      <a:srgbClr val="FFFFFF"/>
+                    </a:solidFill>
+                  </a:tcPr>
+                </a:tc>
+              </a:tr>
+              <a:tr h="365760">
+                <a:tc>
+                  <a:txBody>
+                    <a:bodyPr/>
+                    <a:lstStyle/>
+                    <a:p>
+                      <a:pPr indent="0" marL="0">
+                        <a:buNone/>
+                      </a:pPr>
+                      <a:r>
+                        <a:rPr lang="en-US" sz="950" dirty="0">
+                          <a:solidFill>
+                            <a:srgbClr val="1B1714"/>
+                          </a:solidFill>
+                          <a:latin typeface="IBM Plex Sans KR" pitchFamily="34" charset="0"/>
+                          <a:ea typeface="IBM Plex Sans KR" pitchFamily="34" charset="-122"/>
+                          <a:cs typeface="IBM Plex Sans KR" pitchFamily="34" charset="-120"/>
+                        </a:rPr>
+                        <a:t>LG에너지솔루션</a:t>
+                      </a:r>
+                      <a:endParaRPr lang="en-US" sz="950" dirty="0">
+                        <a:latin typeface="IBM Plex Sans KR" charset="0"/>
+                        <a:ea typeface="IBM Plex Sans KR" charset="0"/>
+                        <a:cs typeface="IBM Plex Sans KR" charset="0"/>
+                      </a:endParaRPr>
+                    </a:p>
+                  </a:txBody>
+                  <a:tcPr marL="88900" marR="88900" marT="25400" marB="25400" anchor="ctr">
+                    <a:lnL w="6350" cap="flat" cmpd="sng" algn="ctr">
+                      <a:solidFill>
+                        <a:srgbClr val="E4DED4"/>
+                      </a:solidFill>
+                      <a:prstDash val="solid"/>
+                      <a:round/>
+                      <a:headEnd type="none" w="med" len="med"/>
+                      <a:tailEnd type="none" w="med" len="med"/>
+                    </a:lnL>
+                    <a:lnR w="6350" cap="flat" cmpd="sng" algn="ctr">
+                      <a:solidFill>
+                        <a:srgbClr val="E4DED4"/>
+                      </a:solidFill>
+                      <a:prstDash val="solid"/>
+                      <a:round/>
+                      <a:headEnd type="none" w="med" len="med"/>
+                      <a:tailEnd type="none" w="med" len="med"/>
+                    </a:lnR>
+                    <a:lnT w="6350" cap="flat" cmpd="sng" algn="ctr">
+                      <a:solidFill>
+                        <a:srgbClr val="E4DED4"/>
+                      </a:solidFill>
+                      <a:prstDash val="solid"/>
+                      <a:round/>
+                      <a:headEnd type="none" w="med" len="med"/>
+                      <a:tailEnd type="none" w="med" len="med"/>
+                    </a:lnT>
+                    <a:lnB w="6350" cap="flat" cmpd="sng" algn="ctr">
+                      <a:solidFill>
+                        <a:srgbClr val="E4DED4"/>
+                      </a:solidFill>
+                      <a:prstDash val="solid"/>
+                      <a:round/>
+                      <a:headEnd type="none" w="med" len="med"/>
+                      <a:tailEnd type="none" w="med" len="med"/>
+                    </a:lnB>
+                    <a:solidFill>
+                      <a:srgbClr val="FFFFFF"/>
+                    </a:solidFill>
+                  </a:tcPr>
+                </a:tc>
+                <a:tc>
+                  <a:txBody>
+                    <a:bodyPr/>
+                    <a:lstStyle/>
+                    <a:p>
+                      <a:pPr indent="0" marL="0">
+                        <a:buNone/>
+                      </a:pPr>
+                      <a:r>
+                        <a:rPr lang="en-US" sz="950" dirty="0">
+                          <a:solidFill>
+                            <a:srgbClr val="6F6960"/>
+                          </a:solidFill>
+                          <a:latin typeface="IBM Plex Mono" pitchFamily="34" charset="0"/>
+                          <a:ea typeface="IBM Plex Mono" pitchFamily="34" charset="-122"/>
+                          <a:cs typeface="IBM Plex Mono" pitchFamily="34" charset="-120"/>
+                        </a:rPr>
+                        <a:t>셀</a:t>
+                      </a:r>
+                      <a:endParaRPr lang="en-US" sz="950" dirty="0">
+                        <a:latin typeface="IBM Plex Mono" charset="0"/>
+                        <a:ea typeface="IBM Plex Mono" charset="0"/>
+                        <a:cs typeface="IBM Plex Mono" charset="0"/>
+                      </a:endParaRPr>
+                    </a:p>
+                  </a:txBody>
+                  <a:tcPr marL="88900" marR="88900" marT="25400" marB="25400" anchor="ctr">
+                    <a:lnL w="6350" cap="flat" cmpd="sng" algn="ctr">
+                      <a:solidFill>
+                        <a:srgbClr val="E4DED4"/>
+                      </a:solidFill>
+                      <a:prstDash val="solid"/>
+                      <a:round/>
+                      <a:headEnd type="none" w="med" len="med"/>
+                      <a:tailEnd type="none" w="med" len="med"/>
+                    </a:lnL>
+                    <a:lnR w="6350" cap="flat" cmpd="sng" algn="ctr">
+                      <a:solidFill>
+                        <a:srgbClr val="E4DED4"/>
+                      </a:solidFill>
+                      <a:prstDash val="solid"/>
+                      <a:round/>
+                      <a:headEnd type="none" w="med" len="med"/>
+                      <a:tailEnd type="none" w="med" len="med"/>
+                    </a:lnR>
+                    <a:lnT w="6350" cap="flat" cmpd="sng" algn="ctr">
+                      <a:solidFill>
+                        <a:srgbClr val="E4DED4"/>
+                      </a:solidFill>
+                      <a:prstDash val="solid"/>
+                      <a:round/>
+                      <a:headEnd type="none" w="med" len="med"/>
+                      <a:tailEnd type="none" w="med" len="med"/>
+                    </a:lnT>
+                    <a:lnB w="6350" cap="flat" cmpd="sng" algn="ctr">
+                      <a:solidFill>
+                        <a:srgbClr val="E4DED4"/>
+                      </a:solidFill>
+                      <a:prstDash val="solid"/>
+                      <a:round/>
+                      <a:headEnd type="none" w="med" len="med"/>
+                      <a:tailEnd type="none" w="med" len="med"/>
+                    </a:lnB>
+                    <a:solidFill>
+                      <a:srgbClr val="FFFFFF"/>
+                    </a:solidFill>
+                  </a:tcPr>
+                </a:tc>
+                <a:tc>
+                  <a:txBody>
+                    <a:bodyPr/>
+                    <a:lstStyle/>
+                    <a:p>
+                      <a:pPr algn="ctr" indent="0" marL="0">
+                        <a:buNone/>
+                      </a:pPr>
+                      <a:r>
+                        <a:rPr lang="en-US" sz="1100" b="1" dirty="0">
+                          <a:solidFill>
+                            <a:srgbClr val="1B1714"/>
+                          </a:solidFill>
+                          <a:latin typeface="Space Grotesk" pitchFamily="34" charset="0"/>
+                          <a:ea typeface="Space Grotesk" pitchFamily="34" charset="-122"/>
+                          <a:cs typeface="Space Grotesk" pitchFamily="34" charset="-120"/>
+                        </a:rPr>
+                        <a:t>~10x</a:t>
+                      </a:r>
+                      <a:endParaRPr lang="en-US" sz="1100" dirty="0">
+                        <a:latin typeface="Space Grotesk" charset="0"/>
+                        <a:ea typeface="Space Grotesk" charset="0"/>
+                        <a:cs typeface="Space Grotesk" charset="0"/>
+                      </a:endParaRPr>
+                    </a:p>
+                  </a:txBody>
+                  <a:tcPr marL="88900" marR="88900" marT="25400" marB="25400" anchor="ctr">
+                    <a:lnL w="6350" cap="flat" cmpd="sng" algn="ctr">
+                      <a:solidFill>
+                        <a:srgbClr val="E4DED4"/>
+                      </a:solidFill>
+                      <a:prstDash val="solid"/>
+                      <a:round/>
+                      <a:headEnd type="none" w="med" len="med"/>
+                      <a:tailEnd type="none" w="med" len="med"/>
+                    </a:lnL>
+                    <a:lnR w="6350" cap="flat" cmpd="sng" algn="ctr">
+                      <a:solidFill>
+                        <a:srgbClr val="E4DED4"/>
+                      </a:solidFill>
+                      <a:prstDash val="solid"/>
+                      <a:round/>
+                      <a:headEnd type="none" w="med" len="med"/>
+                      <a:tailEnd type="none" w="med" len="med"/>
+                    </a:lnR>
+                    <a:lnT w="6350" cap="flat" cmpd="sng" algn="ctr">
+                      <a:solidFill>
+                        <a:srgbClr val="E4DED4"/>
+                      </a:solidFill>
+                      <a:prstDash val="solid"/>
+                      <a:round/>
+                      <a:headEnd type="none" w="med" len="med"/>
+                      <a:tailEnd type="none" w="med" len="med"/>
+                    </a:lnT>
+                    <a:lnB w="6350" cap="flat" cmpd="sng" algn="ctr">
+                      <a:solidFill>
+                        <a:srgbClr val="E4DED4"/>
+                      </a:solidFill>
+                      <a:prstDash val="solid"/>
+                      <a:round/>
+                      <a:headEnd type="none" w="med" len="med"/>
+                      <a:tailEnd type="none" w="med" len="med"/>
+                    </a:lnB>
+                    <a:solidFill>
+                      <a:srgbClr val="FFFFFF"/>
+                    </a:solidFill>
+                  </a:tcPr>
+                </a:tc>
+              </a:tr>
+              <a:tr h="365760">
+                <a:tc>
+                  <a:txBody>
+                    <a:bodyPr/>
+                    <a:lstStyle/>
+                    <a:p>
+                      <a:pPr indent="0" marL="0">
+                        <a:buNone/>
+                      </a:pPr>
+                      <a:r>
+                        <a:rPr lang="en-US" sz="950" dirty="0">
+                          <a:solidFill>
+                            <a:srgbClr val="1B1714"/>
+                          </a:solidFill>
+                          <a:latin typeface="IBM Plex Sans KR" pitchFamily="34" charset="0"/>
+                          <a:ea typeface="IBM Plex Sans KR" pitchFamily="34" charset="-122"/>
+                          <a:cs typeface="IBM Plex Sans KR" pitchFamily="34" charset="-120"/>
+                        </a:rPr>
+                        <a:t>삼성SDI</a:t>
+                      </a:r>
+                      <a:endParaRPr lang="en-US" sz="950" dirty="0">
+                        <a:latin typeface="IBM Plex Sans KR" charset="0"/>
+                        <a:ea typeface="IBM Plex Sans KR" charset="0"/>
+                        <a:cs typeface="IBM Plex Sans KR" charset="0"/>
+                      </a:endParaRPr>
+                    </a:p>
+                  </a:txBody>
+                  <a:tcPr marL="88900" marR="88900" marT="25400" marB="25400" anchor="ctr">
+                    <a:lnL w="6350" cap="flat" cmpd="sng" algn="ctr">
+                      <a:solidFill>
+                        <a:srgbClr val="E4DED4"/>
+                      </a:solidFill>
+                      <a:prstDash val="solid"/>
+                      <a:round/>
+                      <a:headEnd type="none" w="med" len="med"/>
+                      <a:tailEnd type="none" w="med" len="med"/>
+                    </a:lnL>
+                    <a:lnR w="6350" cap="flat" cmpd="sng" algn="ctr">
+                      <a:solidFill>
+                        <a:srgbClr val="E4DED4"/>
+                      </a:solidFill>
+                      <a:prstDash val="solid"/>
+                      <a:round/>
+                      <a:headEnd type="none" w="med" len="med"/>
+                      <a:tailEnd type="none" w="med" len="med"/>
+                    </a:lnR>
+                    <a:lnT w="6350" cap="flat" cmpd="sng" algn="ctr">
+                      <a:solidFill>
+                        <a:srgbClr val="E4DED4"/>
+                      </a:solidFill>
+                      <a:prstDash val="solid"/>
+                      <a:round/>
+                      <a:headEnd type="none" w="med" len="med"/>
+                      <a:tailEnd type="none" w="med" len="med"/>
+                    </a:lnT>
+                    <a:lnB w="6350" cap="flat" cmpd="sng" algn="ctr">
+                      <a:solidFill>
+                        <a:srgbClr val="E4DED4"/>
+                      </a:solidFill>
+                      <a:prstDash val="solid"/>
+                      <a:round/>
+                      <a:headEnd type="none" w="med" len="med"/>
+                      <a:tailEnd type="none" w="med" len="med"/>
+                    </a:lnB>
+                    <a:solidFill>
+                      <a:srgbClr val="FFFFFF"/>
+                    </a:solidFill>
+                  </a:tcPr>
+                </a:tc>
+                <a:tc>
+                  <a:txBody>
+                    <a:bodyPr/>
+                    <a:lstStyle/>
+                    <a:p>
+                      <a:pPr indent="0" marL="0">
+                        <a:buNone/>
+                      </a:pPr>
+                      <a:r>
+                        <a:rPr lang="en-US" sz="950" dirty="0">
+                          <a:solidFill>
+                            <a:srgbClr val="6F6960"/>
+                          </a:solidFill>
+                          <a:latin typeface="IBM Plex Mono" pitchFamily="34" charset="0"/>
+                          <a:ea typeface="IBM Plex Mono" pitchFamily="34" charset="-122"/>
+                          <a:cs typeface="IBM Plex Mono" pitchFamily="34" charset="-120"/>
+                        </a:rPr>
+                        <a:t>셀</a:t>
+                      </a:r>
+                      <a:endParaRPr lang="en-US" sz="950" dirty="0">
+                        <a:latin typeface="IBM Plex Mono" charset="0"/>
+                        <a:ea typeface="IBM Plex Mono" charset="0"/>
+                        <a:cs typeface="IBM Plex Mono" charset="0"/>
+                      </a:endParaRPr>
+                    </a:p>
+                  </a:txBody>
+                  <a:tcPr marL="88900" marR="88900" marT="25400" marB="25400" anchor="ctr">
+                    <a:lnL w="6350" cap="flat" cmpd="sng" algn="ctr">
+                      <a:solidFill>
+                        <a:srgbClr val="E4DED4"/>
+                      </a:solidFill>
+                      <a:prstDash val="solid"/>
+                      <a:round/>
+                      <a:headEnd type="none" w="med" len="med"/>
+                      <a:tailEnd type="none" w="med" len="med"/>
+                    </a:lnL>
+                    <a:lnR w="6350" cap="flat" cmpd="sng" algn="ctr">
+                      <a:solidFill>
+                        <a:srgbClr val="E4DED4"/>
+                      </a:solidFill>
+                      <a:prstDash val="solid"/>
+                      <a:round/>
+                      <a:headEnd type="none" w="med" len="med"/>
+                      <a:tailEnd type="none" w="med" len="med"/>
+                    </a:lnR>
+                    <a:lnT w="6350" cap="flat" cmpd="sng" algn="ctr">
+                      <a:solidFill>
+                        <a:srgbClr val="E4DED4"/>
+                      </a:solidFill>
+                      <a:prstDash val="solid"/>
+                      <a:round/>
+                      <a:headEnd type="none" w="med" len="med"/>
+                      <a:tailEnd type="none" w="med" len="med"/>
+                    </a:lnT>
+                    <a:lnB w="6350" cap="flat" cmpd="sng" algn="ctr">
+                      <a:solidFill>
+                        <a:srgbClr val="E4DED4"/>
+                      </a:solidFill>
+                      <a:prstDash val="solid"/>
+                      <a:round/>
+                      <a:headEnd type="none" w="med" len="med"/>
+                      <a:tailEnd type="none" w="med" len="med"/>
+                    </a:lnB>
+                    <a:solidFill>
+                      <a:srgbClr val="FFFFFF"/>
+                    </a:solidFill>
+                  </a:tcPr>
+                </a:tc>
+                <a:tc>
+                  <a:txBody>
+                    <a:bodyPr/>
+                    <a:lstStyle/>
+                    <a:p>
+                      <a:pPr algn="ctr" indent="0" marL="0">
+                        <a:buNone/>
+                      </a:pPr>
+                      <a:r>
+                        <a:rPr lang="en-US" sz="1100" b="1" dirty="0">
+                          <a:solidFill>
+                            <a:srgbClr val="1B1714"/>
+                          </a:solidFill>
+                          <a:latin typeface="Space Grotesk" pitchFamily="34" charset="0"/>
+                          <a:ea typeface="Space Grotesk" pitchFamily="34" charset="-122"/>
+                          <a:cs typeface="Space Grotesk" pitchFamily="34" charset="-120"/>
+                        </a:rPr>
+                        <a:t>~9x</a:t>
+                      </a:r>
+                      <a:endParaRPr lang="en-US" sz="1100" dirty="0">
+                        <a:latin typeface="Space Grotesk" charset="0"/>
+                        <a:ea typeface="Space Grotesk" charset="0"/>
+                        <a:cs typeface="Space Grotesk" charset="0"/>
+                      </a:endParaRPr>
+                    </a:p>
+                  </a:txBody>
+                  <a:tcPr marL="88900" marR="88900" marT="25400" marB="25400" anchor="ctr">
+                    <a:lnL w="6350" cap="flat" cmpd="sng" algn="ctr">
+                      <a:solidFill>
+                        <a:srgbClr val="E4DED4"/>
+                      </a:solidFill>
+                      <a:prstDash val="solid"/>
+                      <a:round/>
+                      <a:headEnd type="none" w="med" len="med"/>
+                      <a:tailEnd type="none" w="med" len="med"/>
+                    </a:lnL>
+                    <a:lnR w="6350" cap="flat" cmpd="sng" algn="ctr">
+                      <a:solidFill>
+                        <a:srgbClr val="E4DED4"/>
+                      </a:solidFill>
+                      <a:prstDash val="solid"/>
+                      <a:round/>
+                      <a:headEnd type="none" w="med" len="med"/>
+                      <a:tailEnd type="none" w="med" len="med"/>
+                    </a:lnR>
+                    <a:lnT w="6350" cap="flat" cmpd="sng" algn="ctr">
+                      <a:solidFill>
+                        <a:srgbClr val="E4DED4"/>
+                      </a:solidFill>
+                      <a:prstDash val="solid"/>
+                      <a:round/>
+                      <a:headEnd type="none" w="med" len="med"/>
+                      <a:tailEnd type="none" w="med" len="med"/>
+                    </a:lnT>
+                    <a:lnB w="6350" cap="flat" cmpd="sng" algn="ctr">
+                      <a:solidFill>
+                        <a:srgbClr val="E4DED4"/>
+                      </a:solidFill>
+                      <a:prstDash val="solid"/>
+                      <a:round/>
+                      <a:headEnd type="none" w="med" len="med"/>
+                      <a:tailEnd type="none" w="med" len="med"/>
+                    </a:lnB>
+                    <a:solidFill>
+                      <a:srgbClr val="FFFFFF"/>
+                    </a:solidFill>
+                  </a:tcPr>
+                </a:tc>
+              </a:tr>
+              <a:tr h="420624">
+                <a:tc>
+                  <a:txBody>
+                    <a:bodyPr/>
+                    <a:lstStyle/>
+                    <a:p>
+                      <a:pPr indent="0" marL="0">
+                        <a:buNone/>
+                      </a:pPr>
+                      <a:r>
+                        <a:rPr lang="en-US" sz="950" dirty="0">
+                          <a:solidFill>
+                            <a:srgbClr val="1B1714"/>
+                          </a:solidFill>
+                          <a:latin typeface="IBM Plex Sans KR" pitchFamily="34" charset="0"/>
+                          <a:ea typeface="IBM Plex Sans KR" pitchFamily="34" charset="-122"/>
+                          <a:cs typeface="IBM Plex Sans KR" pitchFamily="34" charset="-120"/>
+                        </a:rPr>
+                        <a:t>Peer 밴드 (적용)</a:t>
+                      </a:r>
+                      <a:endParaRPr lang="en-US" sz="950" dirty="0">
+                        <a:latin typeface="IBM Plex Sans KR" charset="0"/>
+                        <a:ea typeface="IBM Plex Sans KR" charset="0"/>
+                        <a:cs typeface="IBM Plex Sans KR" charset="0"/>
+                      </a:endParaRPr>
+                    </a:p>
+                  </a:txBody>
+                  <a:tcPr marL="88900" marR="88900" marT="25400" marB="25400" anchor="ctr">
+                    <a:lnL w="6350" cap="flat" cmpd="sng" algn="ctr">
+                      <a:solidFill>
+                        <a:srgbClr val="E4DED4"/>
+                      </a:solidFill>
+                      <a:prstDash val="solid"/>
+                      <a:round/>
+                      <a:headEnd type="none" w="med" len="med"/>
+                      <a:tailEnd type="none" w="med" len="med"/>
+                    </a:lnL>
+                    <a:lnR w="6350" cap="flat" cmpd="sng" algn="ctr">
+                      <a:solidFill>
+                        <a:srgbClr val="E4DED4"/>
+                      </a:solidFill>
+                      <a:prstDash val="solid"/>
+                      <a:round/>
+                      <a:headEnd type="none" w="med" len="med"/>
+                      <a:tailEnd type="none" w="med" len="med"/>
+                    </a:lnR>
+                    <a:lnT w="6350" cap="flat" cmpd="sng" algn="ctr">
+                      <a:solidFill>
+                        <a:srgbClr val="E4DED4"/>
+                      </a:solidFill>
+                      <a:prstDash val="solid"/>
+                      <a:round/>
+                      <a:headEnd type="none" w="med" len="med"/>
+                      <a:tailEnd type="none" w="med" len="med"/>
+                    </a:lnT>
+                    <a:lnB w="6350" cap="flat" cmpd="sng" algn="ctr">
+                      <a:solidFill>
+                        <a:srgbClr val="E4DED4"/>
+                      </a:solidFill>
+                      <a:prstDash val="solid"/>
+                      <a:round/>
+                      <a:headEnd type="none" w="med" len="med"/>
+                      <a:tailEnd type="none" w="med" len="med"/>
+                    </a:lnB>
+                    <a:solidFill>
+                      <a:srgbClr val="F2ECE0"/>
+                    </a:solidFill>
+                  </a:tcPr>
+                </a:tc>
+                <a:tc>
+                  <a:txBody>
+                    <a:bodyPr/>
+                    <a:lstStyle/>
+                    <a:p>
+                      <a:pPr indent="0" marL="0">
+                        <a:buNone/>
+                      </a:pPr>
+                      <a:r>
+                        <a:rPr lang="en-US" sz="950" dirty="0">
+                          <a:solidFill>
+                            <a:srgbClr val="6F6960"/>
+                          </a:solidFill>
+                          <a:latin typeface="IBM Plex Mono" pitchFamily="34" charset="0"/>
+                          <a:ea typeface="IBM Plex Mono" pitchFamily="34" charset="-122"/>
+                          <a:cs typeface="IBM Plex Mono" pitchFamily="34" charset="-120"/>
+                        </a:rPr>
+                        <a:t>forward</a:t>
+                      </a:r>
+                      <a:endParaRPr lang="en-US" sz="950" dirty="0">
+                        <a:latin typeface="IBM Plex Mono" charset="0"/>
+                        <a:ea typeface="IBM Plex Mono" charset="0"/>
+                        <a:cs typeface="IBM Plex Mono" charset="0"/>
+                      </a:endParaRPr>
+                    </a:p>
+                  </a:txBody>
+                  <a:tcPr marL="88900" marR="88900" marT="25400" marB="25400" anchor="ctr">
+                    <a:lnL w="6350" cap="flat" cmpd="sng" algn="ctr">
+                      <a:solidFill>
+                        <a:srgbClr val="E4DED4"/>
+                      </a:solidFill>
+                      <a:prstDash val="solid"/>
+                      <a:round/>
+                      <a:headEnd type="none" w="med" len="med"/>
+                      <a:tailEnd type="none" w="med" len="med"/>
+                    </a:lnL>
+                    <a:lnR w="6350" cap="flat" cmpd="sng" algn="ctr">
+                      <a:solidFill>
+                        <a:srgbClr val="E4DED4"/>
+                      </a:solidFill>
+                      <a:prstDash val="solid"/>
+                      <a:round/>
+                      <a:headEnd type="none" w="med" len="med"/>
+                      <a:tailEnd type="none" w="med" len="med"/>
+                    </a:lnR>
+                    <a:lnT w="6350" cap="flat" cmpd="sng" algn="ctr">
+                      <a:solidFill>
+                        <a:srgbClr val="E4DED4"/>
+                      </a:solidFill>
+                      <a:prstDash val="solid"/>
+                      <a:round/>
+                      <a:headEnd type="none" w="med" len="med"/>
+                      <a:tailEnd type="none" w="med" len="med"/>
+                    </a:lnT>
+                    <a:lnB w="6350" cap="flat" cmpd="sng" algn="ctr">
+                      <a:solidFill>
+                        <a:srgbClr val="E4DED4"/>
+                      </a:solidFill>
+                      <a:prstDash val="solid"/>
+                      <a:round/>
+                      <a:headEnd type="none" w="med" len="med"/>
+                      <a:tailEnd type="none" w="med" len="med"/>
+                    </a:lnB>
+                    <a:solidFill>
+                      <a:srgbClr val="F2ECE0"/>
+                    </a:solidFill>
+                  </a:tcPr>
+                </a:tc>
+                <a:tc>
+                  <a:txBody>
+                    <a:bodyPr/>
+                    <a:lstStyle/>
+                    <a:p>
+                      <a:pPr algn="ctr" indent="0" marL="0">
+                        <a:buNone/>
+                      </a:pPr>
+                      <a:r>
+                        <a:rPr lang="en-US" sz="1100" b="1" dirty="0">
+                          <a:solidFill>
+                            <a:srgbClr val="C1121F"/>
+                          </a:solidFill>
+                          <a:latin typeface="Space Grotesk" pitchFamily="34" charset="0"/>
+                          <a:ea typeface="Space Grotesk" pitchFamily="34" charset="-122"/>
+                          <a:cs typeface="Space Grotesk" pitchFamily="34" charset="-120"/>
+                        </a:rPr>
+                        <a:t>8~13x</a:t>
+                      </a:r>
+                      <a:endParaRPr lang="en-US" sz="1100" dirty="0">
+                        <a:latin typeface="Space Grotesk" charset="0"/>
+                        <a:ea typeface="Space Grotesk" charset="0"/>
+                        <a:cs typeface="Space Grotesk" charset="0"/>
+                      </a:endParaRPr>
+                    </a:p>
+                  </a:txBody>
+                  <a:tcPr marL="88900" marR="88900" marT="25400" marB="25400" anchor="ctr">
+                    <a:lnL w="6350" cap="flat" cmpd="sng" algn="ctr">
+                      <a:solidFill>
+                        <a:srgbClr val="E4DED4"/>
+                      </a:solidFill>
+                      <a:prstDash val="solid"/>
+                      <a:round/>
+                      <a:headEnd type="none" w="med" len="med"/>
+                      <a:tailEnd type="none" w="med" len="med"/>
+                    </a:lnL>
+                    <a:lnR w="6350" cap="flat" cmpd="sng" algn="ctr">
+                      <a:solidFill>
+                        <a:srgbClr val="E4DED4"/>
+                      </a:solidFill>
+                      <a:prstDash val="solid"/>
+                      <a:round/>
+                      <a:headEnd type="none" w="med" len="med"/>
+                      <a:tailEnd type="none" w="med" len="med"/>
+                    </a:lnR>
+                    <a:lnT w="6350" cap="flat" cmpd="sng" algn="ctr">
+                      <a:solidFill>
+                        <a:srgbClr val="E4DED4"/>
+                      </a:solidFill>
+                      <a:prstDash val="solid"/>
+                      <a:round/>
+                      <a:headEnd type="none" w="med" len="med"/>
+                      <a:tailEnd type="none" w="med" len="med"/>
+                    </a:lnT>
+                    <a:lnB w="6350" cap="flat" cmpd="sng" algn="ctr">
+                      <a:solidFill>
+                        <a:srgbClr val="E4DED4"/>
+                      </a:solidFill>
+                      <a:prstDash val="solid"/>
+                      <a:round/>
+                      <a:headEnd type="none" w="med" len="med"/>
+                      <a:tailEnd type="none" w="med" len="med"/>
+                    </a:lnB>
+                    <a:solidFill>
+                      <a:srgbClr val="F2ECE0"/>
+                    </a:solidFill>
+                  </a:tcPr>
+                </a:tc>
+              </a:tr>
+            </a:tbl>
+          </a:graphicData>
+        </a:graphic>
+      </p:graphicFrame>
+      <p:sp>
+        <p:nvSpPr>
+          <p:cNvPr id="9" name="Text 6"/>
+          <p:cNvSpPr/>
+          <p:nvPr/>
+        </p:nvSpPr>
+        <p:spPr>
+          <a:xfrm>
+            <a:off x="566928" y="4590288"/>
+            <a:ext cx="4572000" cy="310896"/>
+          </a:xfrm>
+          <a:prstGeom prst="rect">
+            <a:avLst/>
+          </a:prstGeom>
+          <a:noFill/>
+          <a:ln/>
+        </p:spPr>
+        <p:txBody>
+          <a:bodyPr wrap="square" lIns="0" tIns="0" rIns="0" bIns="0" rtlCol="0" anchor="t"/>
+          <a:lstStyle/>
+          <a:p>
+            <a:pPr indent="0" marL="0">
+              <a:lnSpc>
+                <a:spcPct val="110000"/>
+              </a:lnSpc>
+              <a:buNone/>
+            </a:pPr>
+            <a:r>
+              <a:rPr lang="en-US" sz="750" i="1" dirty="0">
+                <a:solidFill>
+                  <a:srgbClr val="9A847C"/>
+                </a:solidFill>
+                <a:latin typeface="IBM Plex Sans KR" pitchFamily="34" charset="0"/>
+                <a:ea typeface="IBM Plex Sans KR" pitchFamily="34" charset="-122"/>
+                <a:cs typeface="IBM Plex Sans KR" pitchFamily="34" charset="-120"/>
+              </a:rPr>
+              <a:t>★ 증권사 추정 forward · peer EBITDA엔 AMPC 포함 → 우리는 ex-AMPC(보수적, apples-to-apples 아님)</a:t>
+            </a:r>
+            <a:endParaRPr lang="en-US" sz="750" dirty="0"/>
+          </a:p>
+        </p:txBody>
+      </p:sp>
+      <p:sp>
+        <p:nvSpPr>
+          <p:cNvPr id="10" name="Text 7"/>
+          <p:cNvSpPr/>
+          <p:nvPr/>
+        </p:nvSpPr>
+        <p:spPr>
+          <a:xfrm>
+            <a:off x="5504688" y="1627632"/>
+            <a:ext cx="4617720" cy="219456"/>
+          </a:xfrm>
+          <a:prstGeom prst="rect">
+            <a:avLst/>
+          </a:prstGeom>
+          <a:noFill/>
+          <a:ln/>
+        </p:spPr>
+        <p:txBody>
+          <a:bodyPr wrap="square" lIns="0" tIns="0" rIns="0" bIns="0" rtlCol="0" anchor="ctr"/>
+          <a:lstStyle/>
+          <a:p>
+            <a:pPr indent="0" marL="0">
+              <a:buNone/>
+            </a:pPr>
+            <a:r>
+              <a:rPr lang="en-US" sz="850" spc="150" kern="0" dirty="0">
+                <a:solidFill>
+                  <a:srgbClr val="9A847C"/>
+                </a:solidFill>
+                <a:latin typeface="IBM Plex Mono" pitchFamily="34" charset="0"/>
+                <a:ea typeface="IBM Plex Mono" pitchFamily="34" charset="-122"/>
+                <a:cs typeface="IBM Plex Mono" pitchFamily="34" charset="-120"/>
+              </a:rPr>
+              <a:t>우리 EBITDA 적용 · IMPLIED (× $554mm)</a:t>
+            </a:r>
+            <a:endParaRPr lang="en-US" sz="850" dirty="0"/>
+          </a:p>
+        </p:txBody>
+      </p:sp>
+      <p:graphicFrame>
+        <p:nvGraphicFramePr>
+          <p:cNvPr id="11" name="Table 1"/>
+          <p:cNvGraphicFramePr>
+            <a:graphicFrameLocks noGrp="1"/>
+          </p:cNvGraphicFramePr>
+          <p:nvPr>
+            <p:extLst>
+              <p:ext uri="{D42A27DB-BD31-4B8C-83A1-F6EECF244321}">
+                <p14:modId xmlns:p14="http://schemas.microsoft.com/office/powerpoint/2010/main" val="1579011935"/>
+              </p:ext>
+            </p:extLst>
+          </p:nvPr>
+        </p:nvGraphicFramePr>
+        <p:xfrm>
+          <a:off x="5504688" y="1883664"/>
+          <a:ext cx="4617720" cy="914400"/>
+        </p:xfrm>
+        <a:graphic>
+          <a:graphicData uri="http://schemas.openxmlformats.org/drawingml/2006/table">
+            <a:tbl>
+              <a:tblPr/>
+              <a:tblGrid>
+                <a:gridCol w="1051560"/>
+                <a:gridCol w="1417320"/>
+                <a:gridCol w="2148840"/>
+              </a:tblGrid>
+              <a:tr h="457200">
+                <a:tc>
+                  <a:txBody>
+                    <a:bodyPr/>
+                    <a:lstStyle/>
+                    <a:p>
+                      <a:pPr algn="ctr" indent="0" marL="0">
+                        <a:buNone/>
+                      </a:pPr>
+                      <a:r>
+                        <a:rPr lang="en-US" sz="900" b="1" dirty="0">
+                          <a:solidFill>
+                            <a:srgbClr val="FFFFFF"/>
+                          </a:solidFill>
+                          <a:latin typeface="IBM Plex Sans KR" pitchFamily="34" charset="0"/>
+                          <a:ea typeface="IBM Plex Sans KR" pitchFamily="34" charset="-122"/>
+                          <a:cs typeface="IBM Plex Sans KR" pitchFamily="34" charset="-120"/>
+                        </a:rPr>
+                        <a:t>멀티플</a:t>
+                      </a:r>
+                      <a:endParaRPr lang="en-US" sz="900" dirty="0">
+                        <a:latin typeface="IBM Plex Sans KR" charset="0"/>
+                        <a:ea typeface="IBM Plex Sans KR" charset="0"/>
+                        <a:cs typeface="IBM Plex Sans KR" charset="0"/>
+                      </a:endParaRPr>
+                    </a:p>
+                  </a:txBody>
+                  <a:tcPr marL="76200" marR="76200" marT="25400" marB="25400" anchor="ctr">
+                    <a:lnL w="6350" cap="flat" cmpd="sng" algn="ctr">
+                      <a:solidFill>
+                        <a:srgbClr val="E4DED4"/>
+                      </a:solidFill>
+                      <a:prstDash val="solid"/>
+                      <a:round/>
+                      <a:headEnd type="none" w="med" len="med"/>
+                      <a:tailEnd type="none" w="med" len="med"/>
+                    </a:lnL>
+                    <a:lnR w="6350" cap="flat" cmpd="sng" algn="ctr">
+                      <a:solidFill>
+                        <a:srgbClr val="E4DED4"/>
+                      </a:solidFill>
+                      <a:prstDash val="solid"/>
+                      <a:round/>
+                      <a:headEnd type="none" w="med" len="med"/>
+                      <a:tailEnd type="none" w="med" len="med"/>
+                    </a:lnR>
+                    <a:lnT w="6350" cap="flat" cmpd="sng" algn="ctr">
+                      <a:solidFill>
+                        <a:srgbClr val="E4DED4"/>
+                      </a:solidFill>
+                      <a:prstDash val="solid"/>
+                      <a:round/>
+                      <a:headEnd type="none" w="med" len="med"/>
+                      <a:tailEnd type="none" w="med" len="med"/>
+                    </a:lnT>
+                    <a:lnB w="6350" cap="flat" cmpd="sng" algn="ctr">
+                      <a:solidFill>
+                        <a:srgbClr val="E4DED4"/>
+                      </a:solidFill>
+                      <a:prstDash val="solid"/>
+                      <a:round/>
+                      <a:headEnd type="none" w="med" len="med"/>
+                      <a:tailEnd type="none" w="med" len="med"/>
+                    </a:lnB>
+                    <a:solidFill>
+                      <a:srgbClr val="1B1714"/>
+                    </a:solidFill>
+                  </a:tcPr>
+                </a:tc>
+                <a:tc>
+                  <a:txBody>
+                    <a:bodyPr/>
+                    <a:lstStyle/>
+                    <a:p>
+                      <a:pPr algn="ctr" indent="0" marL="0">
+                        <a:buNone/>
+                      </a:pPr>
+                      <a:r>
+                        <a:rPr lang="en-US" sz="900" b="1" dirty="0">
+                          <a:solidFill>
+                            <a:srgbClr val="FFFFFF"/>
+                          </a:solidFill>
+                          <a:latin typeface="IBM Plex Sans KR" pitchFamily="34" charset="0"/>
+                          <a:ea typeface="IBM Plex Sans KR" pitchFamily="34" charset="-122"/>
+                          <a:cs typeface="IBM Plex Sans KR" pitchFamily="34" charset="-120"/>
+                        </a:rPr>
+                        <a:t>내재 EV</a:t>
+                      </a:r>
+                      <a:endParaRPr lang="en-US" sz="900" dirty="0">
+                        <a:latin typeface="IBM Plex Sans KR" charset="0"/>
+                        <a:ea typeface="IBM Plex Sans KR" charset="0"/>
+                        <a:cs typeface="IBM Plex Sans KR" charset="0"/>
+                      </a:endParaRPr>
+                    </a:p>
+                  </a:txBody>
+                  <a:tcPr marL="76200" marR="76200" marT="25400" marB="25400" anchor="ctr">
+                    <a:lnL w="6350" cap="flat" cmpd="sng" algn="ctr">
+                      <a:solidFill>
+                        <a:srgbClr val="E4DED4"/>
+                      </a:solidFill>
+                      <a:prstDash val="solid"/>
+                      <a:round/>
+                      <a:headEnd type="none" w="med" len="med"/>
+                      <a:tailEnd type="none" w="med" len="med"/>
+                    </a:lnL>
+                    <a:lnR w="6350" cap="flat" cmpd="sng" algn="ctr">
+                      <a:solidFill>
+                        <a:srgbClr val="E4DED4"/>
+                      </a:solidFill>
+                      <a:prstDash val="solid"/>
+                      <a:round/>
+                      <a:headEnd type="none" w="med" len="med"/>
+                      <a:tailEnd type="none" w="med" len="med"/>
+                    </a:lnR>
+                    <a:lnT w="6350" cap="flat" cmpd="sng" algn="ctr">
+                      <a:solidFill>
+                        <a:srgbClr val="E4DED4"/>
+                      </a:solidFill>
+                      <a:prstDash val="solid"/>
+                      <a:round/>
+                      <a:headEnd type="none" w="med" len="med"/>
+                      <a:tailEnd type="none" w="med" len="med"/>
+                    </a:lnT>
+                    <a:lnB w="6350" cap="flat" cmpd="sng" algn="ctr">
+                      <a:solidFill>
+                        <a:srgbClr val="E4DED4"/>
+                      </a:solidFill>
+                      <a:prstDash val="solid"/>
+                      <a:round/>
+                      <a:headEnd type="none" w="med" len="med"/>
+                      <a:tailEnd type="none" w="med" len="med"/>
+                    </a:lnB>
+                    <a:solidFill>
+                      <a:srgbClr val="1B1714"/>
+                    </a:solidFill>
+                  </a:tcPr>
+                </a:tc>
+                <a:tc>
+                  <a:txBody>
+                    <a:bodyPr/>
+                    <a:lstStyle/>
+                    <a:p>
+                      <a:pPr algn="ctr" indent="0" marL="0">
+                        <a:buNone/>
+                      </a:pPr>
+                      <a:r>
+                        <a:rPr lang="en-US" sz="900" b="1" dirty="0">
+                          <a:solidFill>
+                            <a:srgbClr val="FFFFFF"/>
+                          </a:solidFill>
+                          <a:latin typeface="IBM Plex Sans KR" pitchFamily="34" charset="0"/>
+                          <a:ea typeface="IBM Plex Sans KR" pitchFamily="34" charset="-122"/>
+                          <a:cs typeface="IBM Plex Sans KR" pitchFamily="34" charset="-120"/>
+                        </a:rPr>
+                        <a:t>내재 지분가치</a:t>
+                      </a:r>
+                      <a:endParaRPr lang="en-US" sz="900" dirty="0">
+                        <a:latin typeface="IBM Plex Sans KR" charset="0"/>
+                        <a:ea typeface="IBM Plex Sans KR" charset="0"/>
+                        <a:cs typeface="IBM Plex Sans KR" charset="0"/>
+                      </a:endParaRPr>
+                    </a:p>
+                    <a:p>
+                      <a:pPr algn="ctr" indent="0" marL="0">
+                        <a:buNone/>
+                      </a:pPr>
+                      <a:r>
+                        <a:rPr lang="en-US" sz="900" b="1" dirty="0">
+                          <a:solidFill>
+                            <a:srgbClr val="FFFFFF"/>
+                          </a:solidFill>
+                          <a:latin typeface="IBM Plex Sans KR" pitchFamily="34" charset="0"/>
+                          <a:ea typeface="IBM Plex Sans KR" pitchFamily="34" charset="-122"/>
+                          <a:cs typeface="IBM Plex Sans KR" pitchFamily="34" charset="-120"/>
+                        </a:rPr>
+                        <a:t>(−순차입 $6.4bn)</a:t>
+                      </a:r>
+                      <a:endParaRPr lang="en-US" sz="900" dirty="0">
+                        <a:latin typeface="IBM Plex Sans KR" charset="0"/>
+                        <a:ea typeface="IBM Plex Sans KR" charset="0"/>
+                        <a:cs typeface="IBM Plex Sans KR" charset="0"/>
+                      </a:endParaRPr>
+                    </a:p>
+                  </a:txBody>
+                  <a:tcPr marL="76200" marR="76200" marT="25400" marB="25400" anchor="ctr">
+                    <a:lnL w="6350" cap="flat" cmpd="sng" algn="ctr">
+                      <a:solidFill>
+                        <a:srgbClr val="E4DED4"/>
+                      </a:solidFill>
+                      <a:prstDash val="solid"/>
+                      <a:round/>
+                      <a:headEnd type="none" w="med" len="med"/>
+                      <a:tailEnd type="none" w="med" len="med"/>
+                    </a:lnL>
+                    <a:lnR w="6350" cap="flat" cmpd="sng" algn="ctr">
+                      <a:solidFill>
+                        <a:srgbClr val="E4DED4"/>
+                      </a:solidFill>
+                      <a:prstDash val="solid"/>
+                      <a:round/>
+                      <a:headEnd type="none" w="med" len="med"/>
+                      <a:tailEnd type="none" w="med" len="med"/>
+                    </a:lnR>
+                    <a:lnT w="6350" cap="flat" cmpd="sng" algn="ctr">
+                      <a:solidFill>
+                        <a:srgbClr val="E4DED4"/>
+                      </a:solidFill>
+                      <a:prstDash val="solid"/>
+                      <a:round/>
+                      <a:headEnd type="none" w="med" len="med"/>
+                      <a:tailEnd type="none" w="med" len="med"/>
+                    </a:lnT>
+                    <a:lnB w="6350" cap="flat" cmpd="sng" algn="ctr">
+                      <a:solidFill>
+                        <a:srgbClr val="E4DED4"/>
+                      </a:solidFill>
+                      <a:prstDash val="solid"/>
+                      <a:round/>
+                      <a:headEnd type="none" w="med" len="med"/>
+                      <a:tailEnd type="none" w="med" len="med"/>
+                    </a:lnB>
+                    <a:solidFill>
+                      <a:srgbClr val="1B1714"/>
+                    </a:solidFill>
+                  </a:tcPr>
+                </a:tc>
+              </a:tr>
+              <a:tr h="475488">
+                <a:tc>
+                  <a:txBody>
+                    <a:bodyPr/>
+                    <a:lstStyle/>
+                    <a:p>
+                      <a:pPr algn="ctr" indent="0" marL="0">
+                        <a:buNone/>
+                      </a:pPr>
+                      <a:r>
+                        <a:rPr lang="en-US" sz="1200" b="1" dirty="0">
+                          <a:solidFill>
+                            <a:srgbClr val="1B1714"/>
+                          </a:solidFill>
+                          <a:latin typeface="Space Grotesk" pitchFamily="34" charset="0"/>
+                          <a:ea typeface="Space Grotesk" pitchFamily="34" charset="-122"/>
+                          <a:cs typeface="Space Grotesk" pitchFamily="34" charset="-120"/>
+                        </a:rPr>
+                        <a:t>8.0x</a:t>
+                      </a:r>
+                      <a:endParaRPr lang="en-US" sz="1200" dirty="0">
+                        <a:latin typeface="Space Grotesk" charset="0"/>
+                        <a:ea typeface="Space Grotesk" charset="0"/>
+                        <a:cs typeface="Space Grotesk" charset="0"/>
+                      </a:endParaRPr>
+                    </a:p>
+                  </a:txBody>
+                  <a:tcPr marL="76200" marR="76200" marT="25400" marB="25400" anchor="ctr">
+                    <a:lnL w="6350" cap="flat" cmpd="sng" algn="ctr">
+                      <a:solidFill>
+                        <a:srgbClr val="E4DED4"/>
+                      </a:solidFill>
+                      <a:prstDash val="solid"/>
+                      <a:round/>
+                      <a:headEnd type="none" w="med" len="med"/>
+                      <a:tailEnd type="none" w="med" len="med"/>
+                    </a:lnL>
+                    <a:lnR w="6350" cap="flat" cmpd="sng" algn="ctr">
+                      <a:solidFill>
+                        <a:srgbClr val="E4DED4"/>
+                      </a:solidFill>
+                      <a:prstDash val="solid"/>
+                      <a:round/>
+                      <a:headEnd type="none" w="med" len="med"/>
+                      <a:tailEnd type="none" w="med" len="med"/>
+                    </a:lnR>
+                    <a:lnT w="6350" cap="flat" cmpd="sng" algn="ctr">
+                      <a:solidFill>
+                        <a:srgbClr val="E4DED4"/>
+                      </a:solidFill>
+                      <a:prstDash val="solid"/>
+                      <a:round/>
+                      <a:headEnd type="none" w="med" len="med"/>
+                      <a:tailEnd type="none" w="med" len="med"/>
+                    </a:lnT>
+                    <a:lnB w="6350" cap="flat" cmpd="sng" algn="ctr">
+                      <a:solidFill>
+                        <a:srgbClr val="E4DED4"/>
+                      </a:solidFill>
+                      <a:prstDash val="solid"/>
+                      <a:round/>
+                      <a:headEnd type="none" w="med" len="med"/>
+                      <a:tailEnd type="none" w="med" len="med"/>
+                    </a:lnB>
+                    <a:solidFill>
+                      <a:srgbClr val="FFFFFF"/>
+                    </a:solidFill>
+                  </a:tcPr>
+                </a:tc>
+                <a:tc>
+                  <a:txBody>
+                    <a:bodyPr/>
+                    <a:lstStyle/>
+                    <a:p>
+                      <a:pPr algn="ctr" indent="0" marL="0">
+                        <a:buNone/>
+                      </a:pPr>
+                      <a:r>
+                        <a:rPr lang="en-US" sz="1000" dirty="0">
+                          <a:solidFill>
+                            <a:srgbClr val="1B1714"/>
+                          </a:solidFill>
+                          <a:latin typeface="IBM Plex Mono" pitchFamily="34" charset="0"/>
+                          <a:ea typeface="IBM Plex Mono" pitchFamily="34" charset="-122"/>
+                          <a:cs typeface="IBM Plex Mono" pitchFamily="34" charset="-120"/>
+                        </a:rPr>
+                        <a:t>$4.4bn</a:t>
+                      </a:r>
+                      <a:endParaRPr lang="en-US" sz="1000" dirty="0">
+                        <a:latin typeface="IBM Plex Mono" charset="0"/>
+                        <a:ea typeface="IBM Plex Mono" charset="0"/>
+                        <a:cs typeface="IBM Plex Mono" charset="0"/>
+                      </a:endParaRPr>
+                    </a:p>
+                  </a:txBody>
+                  <a:tcPr marL="76200" marR="76200" marT="25400" marB="25400" anchor="ctr">
+                    <a:lnL w="6350" cap="flat" cmpd="sng" algn="ctr">
+                      <a:solidFill>
+                        <a:srgbClr val="E4DED4"/>
+                      </a:solidFill>
+                      <a:prstDash val="solid"/>
+                      <a:round/>
+                      <a:headEnd type="none" w="med" len="med"/>
+                      <a:tailEnd type="none" w="med" len="med"/>
+                    </a:lnL>
+                    <a:lnR w="6350" cap="flat" cmpd="sng" algn="ctr">
+                      <a:solidFill>
+                        <a:srgbClr val="E4DED4"/>
+                      </a:solidFill>
+                      <a:prstDash val="solid"/>
+                      <a:round/>
+                      <a:headEnd type="none" w="med" len="med"/>
+                      <a:tailEnd type="none" w="med" len="med"/>
+                    </a:lnR>
+                    <a:lnT w="6350" cap="flat" cmpd="sng" algn="ctr">
+                      <a:solidFill>
+                        <a:srgbClr val="E4DED4"/>
+                      </a:solidFill>
+                      <a:prstDash val="solid"/>
+                      <a:round/>
+                      <a:headEnd type="none" w="med" len="med"/>
+                      <a:tailEnd type="none" w="med" len="med"/>
+                    </a:lnT>
+                    <a:lnB w="6350" cap="flat" cmpd="sng" algn="ctr">
+                      <a:solidFill>
+                        <a:srgbClr val="E4DED4"/>
+                      </a:solidFill>
+                      <a:prstDash val="solid"/>
+                      <a:round/>
+                      <a:headEnd type="none" w="med" len="med"/>
+                      <a:tailEnd type="none" w="med" len="med"/>
+                    </a:lnB>
+                    <a:solidFill>
+                      <a:srgbClr val="FFFFFF"/>
+                    </a:solidFill>
+                  </a:tcPr>
+                </a:tc>
+                <a:tc>
+                  <a:txBody>
+                    <a:bodyPr/>
+                    <a:lstStyle/>
+                    <a:p>
+                      <a:pPr algn="ctr" indent="0" marL="0">
+                        <a:buNone/>
+                      </a:pPr>
+                      <a:r>
+                        <a:rPr lang="en-US" sz="1000" b="1" dirty="0">
+                          <a:solidFill>
+                            <a:srgbClr val="C1121F"/>
+                          </a:solidFill>
+                          <a:latin typeface="IBM Plex Mono" pitchFamily="34" charset="0"/>
+                          <a:ea typeface="IBM Plex Mono" pitchFamily="34" charset="-122"/>
+                          <a:cs typeface="IBM Plex Mono" pitchFamily="34" charset="-120"/>
+                        </a:rPr>
+                        <a:t>−$2.0bn</a:t>
+                      </a:r>
+                      <a:endParaRPr lang="en-US" sz="1000" dirty="0">
+                        <a:latin typeface="IBM Plex Mono" charset="0"/>
+                        <a:ea typeface="IBM Plex Mono" charset="0"/>
+                        <a:cs typeface="IBM Plex Mono" charset="0"/>
+                      </a:endParaRPr>
+                    </a:p>
+                  </a:txBody>
+                  <a:tcPr marL="76200" marR="76200" marT="25400" marB="25400" anchor="ctr">
+                    <a:lnL w="6350" cap="flat" cmpd="sng" algn="ctr">
+                      <a:solidFill>
+                        <a:srgbClr val="E4DED4"/>
+                      </a:solidFill>
+                      <a:prstDash val="solid"/>
+                      <a:round/>
+                      <a:headEnd type="none" w="med" len="med"/>
+                      <a:tailEnd type="none" w="med" len="med"/>
+                    </a:lnL>
+                    <a:lnR w="6350" cap="flat" cmpd="sng" algn="ctr">
+                      <a:solidFill>
+                        <a:srgbClr val="E4DED4"/>
+                      </a:solidFill>
+                      <a:prstDash val="solid"/>
+                      <a:round/>
+                      <a:headEnd type="none" w="med" len="med"/>
+                      <a:tailEnd type="none" w="med" len="med"/>
+                    </a:lnR>
+                    <a:lnT w="6350" cap="flat" cmpd="sng" algn="ctr">
+                      <a:solidFill>
+                        <a:srgbClr val="E4DED4"/>
+                      </a:solidFill>
+                      <a:prstDash val="solid"/>
+                      <a:round/>
+                      <a:headEnd type="none" w="med" len="med"/>
+                      <a:tailEnd type="none" w="med" len="med"/>
+                    </a:lnT>
+                    <a:lnB w="6350" cap="flat" cmpd="sng" algn="ctr">
+                      <a:solidFill>
+                        <a:srgbClr val="E4DED4"/>
+                      </a:solidFill>
+                      <a:prstDash val="solid"/>
+                      <a:round/>
+                      <a:headEnd type="none" w="med" len="med"/>
+                      <a:tailEnd type="none" w="med" len="med"/>
+                    </a:lnB>
+                    <a:solidFill>
+                      <a:srgbClr val="FFFFFF"/>
+                    </a:solidFill>
+                  </a:tcPr>
+                </a:tc>
+              </a:tr>
+              <a:tr h="475488">
+                <a:tc>
+                  <a:txBody>
+                    <a:bodyPr/>
+                    <a:lstStyle/>
+                    <a:p>
+                      <a:pPr algn="ctr" indent="0" marL="0">
+                        <a:buNone/>
+                      </a:pPr>
+                      <a:r>
+                        <a:rPr lang="en-US" sz="1200" b="1" dirty="0">
+                          <a:solidFill>
+                            <a:srgbClr val="1B1714"/>
+                          </a:solidFill>
+                          <a:latin typeface="Space Grotesk" pitchFamily="34" charset="0"/>
+                          <a:ea typeface="Space Grotesk" pitchFamily="34" charset="-122"/>
+                          <a:cs typeface="Space Grotesk" pitchFamily="34" charset="-120"/>
+                        </a:rPr>
+                        <a:t>10.5x</a:t>
+                      </a:r>
+                      <a:endParaRPr lang="en-US" sz="1200" dirty="0">
+                        <a:latin typeface="Space Grotesk" charset="0"/>
+                        <a:ea typeface="Space Grotesk" charset="0"/>
+                        <a:cs typeface="Space Grotesk" charset="0"/>
+                      </a:endParaRPr>
+                    </a:p>
+                  </a:txBody>
+                  <a:tcPr marL="76200" marR="76200" marT="25400" marB="25400" anchor="ctr">
+                    <a:lnL w="6350" cap="flat" cmpd="sng" algn="ctr">
+                      <a:solidFill>
+                        <a:srgbClr val="E4DED4"/>
+                      </a:solidFill>
+                      <a:prstDash val="solid"/>
+                      <a:round/>
+                      <a:headEnd type="none" w="med" len="med"/>
+                      <a:tailEnd type="none" w="med" len="med"/>
+                    </a:lnL>
+                    <a:lnR w="6350" cap="flat" cmpd="sng" algn="ctr">
+                      <a:solidFill>
+                        <a:srgbClr val="E4DED4"/>
+                      </a:solidFill>
+                      <a:prstDash val="solid"/>
+                      <a:round/>
+                      <a:headEnd type="none" w="med" len="med"/>
+                      <a:tailEnd type="none" w="med" len="med"/>
+                    </a:lnR>
+                    <a:lnT w="6350" cap="flat" cmpd="sng" algn="ctr">
+                      <a:solidFill>
+                        <a:srgbClr val="E4DED4"/>
+                      </a:solidFill>
+                      <a:prstDash val="solid"/>
+                      <a:round/>
+                      <a:headEnd type="none" w="med" len="med"/>
+                      <a:tailEnd type="none" w="med" len="med"/>
+                    </a:lnT>
+                    <a:lnB w="6350" cap="flat" cmpd="sng" algn="ctr">
+                      <a:solidFill>
+                        <a:srgbClr val="E4DED4"/>
+                      </a:solidFill>
+                      <a:prstDash val="solid"/>
+                      <a:round/>
+                      <a:headEnd type="none" w="med" len="med"/>
+                      <a:tailEnd type="none" w="med" len="med"/>
+                    </a:lnB>
+                    <a:solidFill>
+                      <a:srgbClr val="FFFFFF"/>
+                    </a:solidFill>
+                  </a:tcPr>
+                </a:tc>
+                <a:tc>
+                  <a:txBody>
+                    <a:bodyPr/>
+                    <a:lstStyle/>
+                    <a:p>
+                      <a:pPr algn="ctr" indent="0" marL="0">
+                        <a:buNone/>
+                      </a:pPr>
+                      <a:r>
+                        <a:rPr lang="en-US" sz="1000" dirty="0">
+                          <a:solidFill>
+                            <a:srgbClr val="1B1714"/>
+                          </a:solidFill>
+                          <a:latin typeface="IBM Plex Mono" pitchFamily="34" charset="0"/>
+                          <a:ea typeface="IBM Plex Mono" pitchFamily="34" charset="-122"/>
+                          <a:cs typeface="IBM Plex Mono" pitchFamily="34" charset="-120"/>
+                        </a:rPr>
+                        <a:t>$5.8bn</a:t>
+                      </a:r>
+                      <a:endParaRPr lang="en-US" sz="1000" dirty="0">
+                        <a:latin typeface="IBM Plex Mono" charset="0"/>
+                        <a:ea typeface="IBM Plex Mono" charset="0"/>
+                        <a:cs typeface="IBM Plex Mono" charset="0"/>
+                      </a:endParaRPr>
+                    </a:p>
+                  </a:txBody>
+                  <a:tcPr marL="76200" marR="76200" marT="25400" marB="25400" anchor="ctr">
+                    <a:lnL w="6350" cap="flat" cmpd="sng" algn="ctr">
+                      <a:solidFill>
+                        <a:srgbClr val="E4DED4"/>
+                      </a:solidFill>
+                      <a:prstDash val="solid"/>
+                      <a:round/>
+                      <a:headEnd type="none" w="med" len="med"/>
+                      <a:tailEnd type="none" w="med" len="med"/>
+                    </a:lnL>
+                    <a:lnR w="6350" cap="flat" cmpd="sng" algn="ctr">
+                      <a:solidFill>
+                        <a:srgbClr val="E4DED4"/>
+                      </a:solidFill>
+                      <a:prstDash val="solid"/>
+                      <a:round/>
+                      <a:headEnd type="none" w="med" len="med"/>
+                      <a:tailEnd type="none" w="med" len="med"/>
+                    </a:lnR>
+                    <a:lnT w="6350" cap="flat" cmpd="sng" algn="ctr">
+                      <a:solidFill>
+                        <a:srgbClr val="E4DED4"/>
+                      </a:solidFill>
+                      <a:prstDash val="solid"/>
+                      <a:round/>
+                      <a:headEnd type="none" w="med" len="med"/>
+                      <a:tailEnd type="none" w="med" len="med"/>
+                    </a:lnT>
+                    <a:lnB w="6350" cap="flat" cmpd="sng" algn="ctr">
+                      <a:solidFill>
+                        <a:srgbClr val="E4DED4"/>
+                      </a:solidFill>
+                      <a:prstDash val="solid"/>
+                      <a:round/>
+                      <a:headEnd type="none" w="med" len="med"/>
+                      <a:tailEnd type="none" w="med" len="med"/>
+                    </a:lnB>
+                    <a:solidFill>
+                      <a:srgbClr val="FFFFFF"/>
+                    </a:solidFill>
+                  </a:tcPr>
+                </a:tc>
+                <a:tc>
+                  <a:txBody>
+                    <a:bodyPr/>
+                    <a:lstStyle/>
+                    <a:p>
+                      <a:pPr algn="ctr" indent="0" marL="0">
+                        <a:buNone/>
+                      </a:pPr>
+                      <a:r>
+                        <a:rPr lang="en-US" sz="1000" b="1" dirty="0">
+                          <a:solidFill>
+                            <a:srgbClr val="C1121F"/>
+                          </a:solidFill>
+                          <a:latin typeface="IBM Plex Mono" pitchFamily="34" charset="0"/>
+                          <a:ea typeface="IBM Plex Mono" pitchFamily="34" charset="-122"/>
+                          <a:cs typeface="IBM Plex Mono" pitchFamily="34" charset="-120"/>
+                        </a:rPr>
+                        <a:t>−$0.6bn</a:t>
+                      </a:r>
+                      <a:endParaRPr lang="en-US" sz="1000" dirty="0">
+                        <a:latin typeface="IBM Plex Mono" charset="0"/>
+                        <a:ea typeface="IBM Plex Mono" charset="0"/>
+                        <a:cs typeface="IBM Plex Mono" charset="0"/>
+                      </a:endParaRPr>
+                    </a:p>
+                  </a:txBody>
+                  <a:tcPr marL="76200" marR="76200" marT="25400" marB="25400" anchor="ctr">
+                    <a:lnL w="6350" cap="flat" cmpd="sng" algn="ctr">
+                      <a:solidFill>
+                        <a:srgbClr val="E4DED4"/>
+                      </a:solidFill>
+                      <a:prstDash val="solid"/>
+                      <a:round/>
+                      <a:headEnd type="none" w="med" len="med"/>
+                      <a:tailEnd type="none" w="med" len="med"/>
+                    </a:lnL>
+                    <a:lnR w="6350" cap="flat" cmpd="sng" algn="ctr">
+                      <a:solidFill>
+                        <a:srgbClr val="E4DED4"/>
+                      </a:solidFill>
+                      <a:prstDash val="solid"/>
+                      <a:round/>
+                      <a:headEnd type="none" w="med" len="med"/>
+                      <a:tailEnd type="none" w="med" len="med"/>
+                    </a:lnR>
+                    <a:lnT w="6350" cap="flat" cmpd="sng" algn="ctr">
+                      <a:solidFill>
+                        <a:srgbClr val="E4DED4"/>
+                      </a:solidFill>
+                      <a:prstDash val="solid"/>
+                      <a:round/>
+                      <a:headEnd type="none" w="med" len="med"/>
+                      <a:tailEnd type="none" w="med" len="med"/>
+                    </a:lnT>
+                    <a:lnB w="6350" cap="flat" cmpd="sng" algn="ctr">
+                      <a:solidFill>
+                        <a:srgbClr val="E4DED4"/>
+                      </a:solidFill>
+                      <a:prstDash val="solid"/>
+                      <a:round/>
+                      <a:headEnd type="none" w="med" len="med"/>
+                      <a:tailEnd type="none" w="med" len="med"/>
+                    </a:lnB>
+                    <a:solidFill>
+                      <a:srgbClr val="FFFFFF"/>
+                    </a:solidFill>
+                  </a:tcPr>
+                </a:tc>
+              </a:tr>
+              <a:tr h="475488">
+                <a:tc>
+                  <a:txBody>
+                    <a:bodyPr/>
+                    <a:lstStyle/>
+                    <a:p>
+                      <a:pPr algn="ctr" indent="0" marL="0">
+                        <a:buNone/>
+                      </a:pPr>
+                      <a:r>
+                        <a:rPr lang="en-US" sz="1200" b="1" dirty="0">
+                          <a:solidFill>
+                            <a:srgbClr val="1B1714"/>
+                          </a:solidFill>
+                          <a:latin typeface="Space Grotesk" pitchFamily="34" charset="0"/>
+                          <a:ea typeface="Space Grotesk" pitchFamily="34" charset="-122"/>
+                          <a:cs typeface="Space Grotesk" pitchFamily="34" charset="-120"/>
+                        </a:rPr>
+                        <a:t>13.0x</a:t>
+                      </a:r>
+                      <a:endParaRPr lang="en-US" sz="1200" dirty="0">
+                        <a:latin typeface="Space Grotesk" charset="0"/>
+                        <a:ea typeface="Space Grotesk" charset="0"/>
+                        <a:cs typeface="Space Grotesk" charset="0"/>
+                      </a:endParaRPr>
+                    </a:p>
+                  </a:txBody>
+                  <a:tcPr marL="76200" marR="76200" marT="25400" marB="25400" anchor="ctr">
+                    <a:lnL w="6350" cap="flat" cmpd="sng" algn="ctr">
+                      <a:solidFill>
+                        <a:srgbClr val="E4DED4"/>
+                      </a:solidFill>
+                      <a:prstDash val="solid"/>
+                      <a:round/>
+                      <a:headEnd type="none" w="med" len="med"/>
+                      <a:tailEnd type="none" w="med" len="med"/>
+                    </a:lnL>
+                    <a:lnR w="6350" cap="flat" cmpd="sng" algn="ctr">
+                      <a:solidFill>
+                        <a:srgbClr val="E4DED4"/>
+                      </a:solidFill>
+                      <a:prstDash val="solid"/>
+                      <a:round/>
+                      <a:headEnd type="none" w="med" len="med"/>
+                      <a:tailEnd type="none" w="med" len="med"/>
+                    </a:lnR>
+                    <a:lnT w="6350" cap="flat" cmpd="sng" algn="ctr">
+                      <a:solidFill>
+                        <a:srgbClr val="E4DED4"/>
+                      </a:solidFill>
+                      <a:prstDash val="solid"/>
+                      <a:round/>
+                      <a:headEnd type="none" w="med" len="med"/>
+                      <a:tailEnd type="none" w="med" len="med"/>
+                    </a:lnT>
+                    <a:lnB w="6350" cap="flat" cmpd="sng" algn="ctr">
+                      <a:solidFill>
+                        <a:srgbClr val="E4DED4"/>
+                      </a:solidFill>
+                      <a:prstDash val="solid"/>
+                      <a:round/>
+                      <a:headEnd type="none" w="med" len="med"/>
+                      <a:tailEnd type="none" w="med" len="med"/>
+                    </a:lnB>
+                    <a:solidFill>
+                      <a:srgbClr val="E8F3EC"/>
+                    </a:solidFill>
+                  </a:tcPr>
+                </a:tc>
+                <a:tc>
+                  <a:txBody>
+                    <a:bodyPr/>
+                    <a:lstStyle/>
+                    <a:p>
+                      <a:pPr algn="ctr" indent="0" marL="0">
+                        <a:buNone/>
+                      </a:pPr>
+                      <a:r>
+                        <a:rPr lang="en-US" sz="1000" dirty="0">
+                          <a:solidFill>
+                            <a:srgbClr val="1B1714"/>
+                          </a:solidFill>
+                          <a:latin typeface="IBM Plex Mono" pitchFamily="34" charset="0"/>
+                          <a:ea typeface="IBM Plex Mono" pitchFamily="34" charset="-122"/>
+                          <a:cs typeface="IBM Plex Mono" pitchFamily="34" charset="-120"/>
+                        </a:rPr>
+                        <a:t>$7.2bn</a:t>
+                      </a:r>
+                      <a:endParaRPr lang="en-US" sz="1000" dirty="0">
+                        <a:latin typeface="IBM Plex Mono" charset="0"/>
+                        <a:ea typeface="IBM Plex Mono" charset="0"/>
+                        <a:cs typeface="IBM Plex Mono" charset="0"/>
+                      </a:endParaRPr>
+                    </a:p>
+                  </a:txBody>
+                  <a:tcPr marL="76200" marR="76200" marT="25400" marB="25400" anchor="ctr">
+                    <a:lnL w="6350" cap="flat" cmpd="sng" algn="ctr">
+                      <a:solidFill>
+                        <a:srgbClr val="E4DED4"/>
+                      </a:solidFill>
+                      <a:prstDash val="solid"/>
+                      <a:round/>
+                      <a:headEnd type="none" w="med" len="med"/>
+                      <a:tailEnd type="none" w="med" len="med"/>
+                    </a:lnL>
+                    <a:lnR w="6350" cap="flat" cmpd="sng" algn="ctr">
+                      <a:solidFill>
+                        <a:srgbClr val="E4DED4"/>
+                      </a:solidFill>
+                      <a:prstDash val="solid"/>
+                      <a:round/>
+                      <a:headEnd type="none" w="med" len="med"/>
+                      <a:tailEnd type="none" w="med" len="med"/>
+                    </a:lnR>
+                    <a:lnT w="6350" cap="flat" cmpd="sng" algn="ctr">
+                      <a:solidFill>
+                        <a:srgbClr val="E4DED4"/>
+                      </a:solidFill>
+                      <a:prstDash val="solid"/>
+                      <a:round/>
+                      <a:headEnd type="none" w="med" len="med"/>
+                      <a:tailEnd type="none" w="med" len="med"/>
+                    </a:lnT>
+                    <a:lnB w="6350" cap="flat" cmpd="sng" algn="ctr">
+                      <a:solidFill>
+                        <a:srgbClr val="E4DED4"/>
+                      </a:solidFill>
+                      <a:prstDash val="solid"/>
+                      <a:round/>
+                      <a:headEnd type="none" w="med" len="med"/>
+                      <a:tailEnd type="none" w="med" len="med"/>
+                    </a:lnB>
+                    <a:solidFill>
+                      <a:srgbClr val="E8F3EC"/>
+                    </a:solidFill>
+                  </a:tcPr>
+                </a:tc>
+                <a:tc>
+                  <a:txBody>
+                    <a:bodyPr/>
+                    <a:lstStyle/>
+                    <a:p>
+                      <a:pPr algn="ctr" indent="0" marL="0">
+                        <a:buNone/>
+                      </a:pPr>
+                      <a:r>
+                        <a:rPr lang="en-US" sz="1000" b="1" dirty="0">
+                          <a:solidFill>
+                            <a:srgbClr val="1E7A4D"/>
+                          </a:solidFill>
+                          <a:latin typeface="IBM Plex Mono" pitchFamily="34" charset="0"/>
+                          <a:ea typeface="IBM Plex Mono" pitchFamily="34" charset="-122"/>
+                          <a:cs typeface="IBM Plex Mono" pitchFamily="34" charset="-120"/>
+                        </a:rPr>
+                        <a:t>+$0.8bn</a:t>
+                      </a:r>
+                      <a:endParaRPr lang="en-US" sz="1000" dirty="0">
+                        <a:latin typeface="IBM Plex Mono" charset="0"/>
+                        <a:ea typeface="IBM Plex Mono" charset="0"/>
+                        <a:cs typeface="IBM Plex Mono" charset="0"/>
+                      </a:endParaRPr>
+                    </a:p>
+                  </a:txBody>
+                  <a:tcPr marL="76200" marR="76200" marT="25400" marB="25400" anchor="ctr">
+                    <a:lnL w="6350" cap="flat" cmpd="sng" algn="ctr">
+                      <a:solidFill>
+                        <a:srgbClr val="E4DED4"/>
+                      </a:solidFill>
+                      <a:prstDash val="solid"/>
+                      <a:round/>
+                      <a:headEnd type="none" w="med" len="med"/>
+                      <a:tailEnd type="none" w="med" len="med"/>
+                    </a:lnL>
+                    <a:lnR w="6350" cap="flat" cmpd="sng" algn="ctr">
+                      <a:solidFill>
+                        <a:srgbClr val="E4DED4"/>
+                      </a:solidFill>
+                      <a:prstDash val="solid"/>
+                      <a:round/>
+                      <a:headEnd type="none" w="med" len="med"/>
+                      <a:tailEnd type="none" w="med" len="med"/>
+                    </a:lnR>
+                    <a:lnT w="6350" cap="flat" cmpd="sng" algn="ctr">
+                      <a:solidFill>
+                        <a:srgbClr val="E4DED4"/>
+                      </a:solidFill>
+                      <a:prstDash val="solid"/>
+                      <a:round/>
+                      <a:headEnd type="none" w="med" len="med"/>
+                      <a:tailEnd type="none" w="med" len="med"/>
+                    </a:lnT>
+                    <a:lnB w="6350" cap="flat" cmpd="sng" algn="ctr">
+                      <a:solidFill>
+                        <a:srgbClr val="E4DED4"/>
+                      </a:solidFill>
+                      <a:prstDash val="solid"/>
+                      <a:round/>
+                      <a:headEnd type="none" w="med" len="med"/>
+                      <a:tailEnd type="none" w="med" len="med"/>
+                    </a:lnB>
+                    <a:solidFill>
+                      <a:srgbClr val="E8F3EC"/>
+                    </a:solidFill>
+                  </a:tcPr>
+                </a:tc>
+              </a:tr>
+            </a:tbl>
+          </a:graphicData>
+        </a:graphic>
+      </p:graphicFrame>
+      <p:sp>
+        <p:nvSpPr>
+          <p:cNvPr id="12" name="Shape 8"/>
+          <p:cNvSpPr/>
+          <p:nvPr/>
+        </p:nvSpPr>
+        <p:spPr>
+          <a:xfrm>
+            <a:off x="5504688" y="3913632"/>
+            <a:ext cx="4617720" cy="786384"/>
+          </a:xfrm>
+          <a:prstGeom prst="roundRect">
+            <a:avLst>
+              <a:gd name="adj" fmla="val 6977"/>
+            </a:avLst>
+          </a:prstGeom>
+          <a:solidFill>
+            <a:srgbClr val="211C18"/>
+          </a:solidFill>
+          <a:ln/>
+        </p:spPr>
+      </p:sp>
+      <p:sp>
+        <p:nvSpPr>
+          <p:cNvPr id="13" name="Text 9"/>
+          <p:cNvSpPr/>
+          <p:nvPr/>
+        </p:nvSpPr>
+        <p:spPr>
+          <a:xfrm>
+            <a:off x="5724144" y="3913632"/>
+            <a:ext cx="4206240" cy="786384"/>
+          </a:xfrm>
+          <a:prstGeom prst="rect">
+            <a:avLst/>
+          </a:prstGeom>
+          <a:noFill/>
+          <a:ln/>
+        </p:spPr>
+        <p:txBody>
+          <a:bodyPr wrap="square" lIns="0" tIns="0" rIns="0" bIns="0" rtlCol="0" anchor="ctr"/>
+          <a:lstStyle/>
+          <a:p>
+            <a:pPr indent="0" marL="0">
+              <a:lnSpc>
+                <a:spcPct val="130000"/>
+              </a:lnSpc>
+              <a:buNone/>
+            </a:pPr>
+            <a:r>
+              <a:rPr lang="en-US" sz="1000" dirty="0">
+                <a:solidFill>
+                  <a:srgbClr val="D8CFC2"/>
+                </a:solidFill>
+                <a:latin typeface="IBM Plex Sans KR" pitchFamily="34" charset="0"/>
+                <a:ea typeface="IBM Plex Sans KR" pitchFamily="34" charset="-122"/>
+                <a:cs typeface="IBM Plex Sans KR" pitchFamily="34" charset="-120"/>
+              </a:rPr>
+              <a:t>DCF 내재  </a:t>
+            </a:r>
+            <a:pPr indent="0" marL="0">
+              <a:lnSpc>
+                <a:spcPct val="130000"/>
+              </a:lnSpc>
+              <a:buNone/>
+            </a:pPr>
+            <a:r>
+              <a:rPr lang="en-US" sz="1000" b="1" dirty="0">
+                <a:solidFill>
+                  <a:srgbClr val="86D6A6"/>
+                </a:solidFill>
+                <a:latin typeface="IBM Plex Sans KR" pitchFamily="34" charset="0"/>
+                <a:ea typeface="IBM Plex Sans KR" pitchFamily="34" charset="-122"/>
+                <a:cs typeface="IBM Plex Sans KR" pitchFamily="34" charset="-120"/>
+              </a:rPr>
+              <a:t>≈ 8.7x</a:t>
+            </a:r>
+            <a:pPr indent="0" marL="0">
+              <a:lnSpc>
+                <a:spcPct val="130000"/>
+              </a:lnSpc>
+              <a:buNone/>
+            </a:pPr>
+            <a:r>
+              <a:rPr lang="en-US" sz="1000" dirty="0">
+                <a:solidFill>
+                  <a:srgbClr val="D8CFC2"/>
+                </a:solidFill>
+                <a:latin typeface="IBM Plex Sans KR" pitchFamily="34" charset="0"/>
+                <a:ea typeface="IBM Plex Sans KR" pitchFamily="34" charset="-122"/>
+                <a:cs typeface="IBM Plex Sans KR" pitchFamily="34" charset="-120"/>
+              </a:rPr>
+              <a:t>  (EV $4.8bn · peer 하단)
+</a:t>
+            </a:r>
+            <a:pPr indent="0" marL="0">
+              <a:lnSpc>
+                <a:spcPct val="130000"/>
+              </a:lnSpc>
+              <a:buNone/>
+            </a:pPr>
+            <a:r>
+              <a:rPr lang="en-US" sz="1000" dirty="0">
+                <a:solidFill>
+                  <a:srgbClr val="D8CFC2"/>
+                </a:solidFill>
+                <a:latin typeface="IBM Plex Sans KR" pitchFamily="34" charset="0"/>
+                <a:ea typeface="IBM Plex Sans KR" pitchFamily="34" charset="-122"/>
+                <a:cs typeface="IBM Plex Sans KR" pitchFamily="34" charset="-120"/>
+              </a:rPr>
+              <a:t>역산 필요  </a:t>
+            </a:r>
+            <a:pPr indent="0" marL="0">
+              <a:lnSpc>
+                <a:spcPct val="130000"/>
+              </a:lnSpc>
+              <a:buNone/>
+            </a:pPr>
+            <a:r>
+              <a:rPr lang="en-US" sz="1000" b="1" dirty="0">
+                <a:solidFill>
+                  <a:srgbClr val="FF8E84"/>
+                </a:solidFill>
+                <a:latin typeface="IBM Plex Sans KR" pitchFamily="34" charset="0"/>
+                <a:ea typeface="IBM Plex Sans KR" pitchFamily="34" charset="-122"/>
+                <a:cs typeface="IBM Plex Sans KR" pitchFamily="34" charset="-120"/>
+              </a:rPr>
+              <a:t>12.6~15.4x</a:t>
+            </a:r>
+            <a:pPr indent="0" marL="0">
+              <a:lnSpc>
+                <a:spcPct val="130000"/>
+              </a:lnSpc>
+              <a:buNone/>
+            </a:pPr>
+            <a:r>
+              <a:rPr lang="en-US" sz="1000" dirty="0">
+                <a:solidFill>
+                  <a:srgbClr val="D8CFC2"/>
+                </a:solidFill>
+                <a:latin typeface="IBM Plex Sans KR" pitchFamily="34" charset="0"/>
+                <a:ea typeface="IBM Plex Sans KR" pitchFamily="34" charset="-122"/>
+                <a:cs typeface="IBM Plex Sans KR" pitchFamily="34" charset="-120"/>
+              </a:rPr>
+              <a:t>  (딜 성립 · peer 상단 초과)</a:t>
+            </a:r>
+            <a:endParaRPr lang="en-US" sz="1000" dirty="0"/>
+          </a:p>
+        </p:txBody>
+      </p:sp>
+      <p:sp>
+        <p:nvSpPr>
+          <p:cNvPr id="14" name="Text 10"/>
+          <p:cNvSpPr/>
+          <p:nvPr/>
+        </p:nvSpPr>
+        <p:spPr>
+          <a:xfrm>
+            <a:off x="566928" y="5029200"/>
+            <a:ext cx="9555480" cy="219456"/>
+          </a:xfrm>
+          <a:prstGeom prst="rect">
+            <a:avLst/>
+          </a:prstGeom>
+          <a:noFill/>
+          <a:ln/>
+        </p:spPr>
+        <p:txBody>
+          <a:bodyPr wrap="square" lIns="0" tIns="0" rIns="0" bIns="0" rtlCol="0" anchor="ctr"/>
+          <a:lstStyle/>
+          <a:p>
+            <a:pPr indent="0" marL="0">
+              <a:buNone/>
+            </a:pPr>
+            <a:r>
+              <a:rPr lang="en-US" sz="850" spc="150" kern="0" dirty="0">
+                <a:solidFill>
+                  <a:srgbClr val="9A847C"/>
+                </a:solidFill>
+                <a:latin typeface="IBM Plex Mono" pitchFamily="34" charset="0"/>
+                <a:ea typeface="IBM Plex Mono" pitchFamily="34" charset="-122"/>
+                <a:cs typeface="IBM Plex Mono" pitchFamily="34" charset="-120"/>
+              </a:rPr>
+              <a:t>풋볼필드 — 내재 EV ($bn) · peer / DCF / 역산 필요</a:t>
+            </a:r>
+            <a:endParaRPr lang="en-US" sz="850" dirty="0"/>
+          </a:p>
+        </p:txBody>
+      </p:sp>
+      <p:sp>
+        <p:nvSpPr>
+          <p:cNvPr id="15" name="Shape 11"/>
+          <p:cNvSpPr/>
+          <p:nvPr/>
+        </p:nvSpPr>
+        <p:spPr>
+          <a:xfrm>
+            <a:off x="704088" y="5715000"/>
+            <a:ext cx="8641080" cy="0"/>
+          </a:xfrm>
+          <a:prstGeom prst="line">
+            <a:avLst/>
+          </a:prstGeom>
+          <a:noFill/>
+          <a:ln w="31750">
+            <a:solidFill>
+              <a:srgbClr val="D8CFC2"/>
+            </a:solidFill>
+            <a:prstDash val="solid"/>
+          </a:ln>
+        </p:spPr>
+      </p:sp>
+      <p:sp>
+        <p:nvSpPr>
+          <p:cNvPr id="16" name="Shape 12"/>
+          <p:cNvSpPr/>
+          <p:nvPr/>
+        </p:nvSpPr>
+        <p:spPr>
+          <a:xfrm>
+            <a:off x="2763545" y="5614416"/>
+            <a:ext cx="3989299" cy="201168"/>
+          </a:xfrm>
+          <a:prstGeom prst="rect">
+            <a:avLst/>
+          </a:prstGeom>
+          <a:solidFill>
+            <a:srgbClr val="E8F3EC"/>
+          </a:solidFill>
+          <a:ln w="9525">
+            <a:solidFill>
+              <a:srgbClr val="1E7A4D"/>
+            </a:solidFill>
+            <a:prstDash val="solid"/>
+          </a:ln>
+        </p:spPr>
+      </p:sp>
+      <p:sp>
+        <p:nvSpPr>
+          <p:cNvPr id="17" name="Text 13"/>
+          <p:cNvSpPr/>
+          <p:nvPr/>
+        </p:nvSpPr>
+        <p:spPr>
+          <a:xfrm>
+            <a:off x="2763545" y="5385816"/>
+            <a:ext cx="3989299" cy="182880"/>
+          </a:xfrm>
+          <a:prstGeom prst="rect">
+            <a:avLst/>
+          </a:prstGeom>
+          <a:noFill/>
+          <a:ln/>
+        </p:spPr>
+        <p:txBody>
+          <a:bodyPr wrap="square" lIns="0" tIns="0" rIns="0" bIns="0" rtlCol="0" anchor="ctr"/>
+          <a:lstStyle/>
+          <a:p>
+            <a:pPr algn="ctr" indent="0" marL="0">
+              <a:buNone/>
+            </a:pPr>
+            <a:r>
+              <a:rPr lang="en-US" sz="800" b="1" dirty="0">
+                <a:solidFill>
+                  <a:srgbClr val="1E7A4D"/>
+                </a:solidFill>
+                <a:latin typeface="IBM Plex Mono" pitchFamily="34" charset="0"/>
+                <a:ea typeface="IBM Plex Mono" pitchFamily="34" charset="-122"/>
+                <a:cs typeface="IBM Plex Mono" pitchFamily="34" charset="-120"/>
+              </a:rPr>
+              <a:t>peer 8~13x  $4.4~7.2bn</a:t>
+            </a:r>
+            <a:endParaRPr lang="en-US" sz="800" dirty="0"/>
+          </a:p>
+        </p:txBody>
+      </p:sp>
+      <p:sp>
+        <p:nvSpPr>
+          <p:cNvPr id="18" name="Shape 14"/>
+          <p:cNvSpPr/>
+          <p:nvPr/>
+        </p:nvSpPr>
+        <p:spPr>
+          <a:xfrm>
+            <a:off x="6436004" y="5614416"/>
+            <a:ext cx="2232279" cy="201168"/>
+          </a:xfrm>
+          <a:prstGeom prst="rect">
+            <a:avLst/>
+          </a:prstGeom>
+          <a:solidFill>
+            <a:srgbClr val="FBF1EF"/>
+          </a:solidFill>
+          <a:ln w="9525">
+            <a:solidFill>
+              <a:srgbClr val="C1121F"/>
+            </a:solidFill>
+            <a:prstDash val="solid"/>
+          </a:ln>
+        </p:spPr>
+      </p:sp>
+      <p:sp>
+        <p:nvSpPr>
+          <p:cNvPr id="19" name="Text 15"/>
+          <p:cNvSpPr/>
+          <p:nvPr/>
+        </p:nvSpPr>
+        <p:spPr>
+          <a:xfrm>
+            <a:off x="6253124" y="5861304"/>
+            <a:ext cx="2780919" cy="182880"/>
+          </a:xfrm>
+          <a:prstGeom prst="rect">
+            <a:avLst/>
+          </a:prstGeom>
+          <a:noFill/>
+          <a:ln/>
+        </p:spPr>
+        <p:txBody>
+          <a:bodyPr wrap="square" lIns="0" tIns="0" rIns="0" bIns="0" rtlCol="0" anchor="ctr"/>
+          <a:lstStyle/>
+          <a:p>
+            <a:pPr algn="ctr" indent="0" marL="0">
+              <a:buNone/>
+            </a:pPr>
+            <a:r>
+              <a:rPr lang="en-US" sz="750" b="1" dirty="0">
+                <a:solidFill>
+                  <a:srgbClr val="C1121F"/>
+                </a:solidFill>
+                <a:latin typeface="IBM Plex Mono" pitchFamily="34" charset="0"/>
+                <a:ea typeface="IBM Plex Mono" pitchFamily="34" charset="-122"/>
+                <a:cs typeface="IBM Plex Mono" pitchFamily="34" charset="-120"/>
+              </a:rPr>
+              <a:t>역산 필요 12.6~15.4x</a:t>
+            </a:r>
+            <a:endParaRPr lang="en-US" sz="750" dirty="0"/>
+          </a:p>
+        </p:txBody>
+      </p:sp>
+      <p:sp>
+        <p:nvSpPr>
+          <p:cNvPr id="20" name="Shape 16"/>
+          <p:cNvSpPr/>
+          <p:nvPr/>
+        </p:nvSpPr>
+        <p:spPr>
+          <a:xfrm>
+            <a:off x="5600700" y="5440680"/>
+            <a:ext cx="0" cy="548640"/>
+          </a:xfrm>
+          <a:prstGeom prst="line">
+            <a:avLst/>
+          </a:prstGeom>
+          <a:noFill/>
+          <a:ln w="15875">
+            <a:solidFill>
+              <a:srgbClr val="1B1714"/>
+            </a:solidFill>
+            <a:prstDash val="dash"/>
+          </a:ln>
+        </p:spPr>
+      </p:sp>
+      <p:sp>
+        <p:nvSpPr>
+          <p:cNvPr id="21" name="Text 17"/>
+          <p:cNvSpPr/>
+          <p:nvPr/>
+        </p:nvSpPr>
+        <p:spPr>
+          <a:xfrm>
+            <a:off x="4503420" y="5221224"/>
+            <a:ext cx="2194560" cy="182880"/>
+          </a:xfrm>
+          <a:prstGeom prst="rect">
+            <a:avLst/>
+          </a:prstGeom>
+          <a:noFill/>
+          <a:ln/>
+        </p:spPr>
+        <p:txBody>
+          <a:bodyPr wrap="square" lIns="0" tIns="0" rIns="0" bIns="0" rtlCol="0" anchor="ctr"/>
+          <a:lstStyle/>
+          <a:p>
+            <a:pPr algn="ctr" indent="0" marL="0">
+              <a:buNone/>
+            </a:pPr>
+            <a:r>
+              <a:rPr lang="en-US" sz="750" b="1" dirty="0">
+                <a:solidFill>
+                  <a:srgbClr val="1B1714"/>
+                </a:solidFill>
+                <a:latin typeface="IBM Plex Mono" pitchFamily="34" charset="0"/>
+                <a:ea typeface="IBM Plex Mono" pitchFamily="34" charset="-122"/>
+                <a:cs typeface="IBM Plex Mono" pitchFamily="34" charset="-120"/>
+              </a:rPr>
+              <a:t>순차입금 $6.4bn (지분 손익분기)</a:t>
+            </a:r>
+            <a:endParaRPr lang="en-US" sz="750" dirty="0"/>
+          </a:p>
+        </p:txBody>
+      </p:sp>
+      <p:sp>
+        <p:nvSpPr>
+          <p:cNvPr id="22" name="Shape 18"/>
+          <p:cNvSpPr/>
+          <p:nvPr/>
+        </p:nvSpPr>
+        <p:spPr>
+          <a:xfrm>
+            <a:off x="3299155" y="5660136"/>
+            <a:ext cx="109728" cy="109728"/>
+          </a:xfrm>
+          <a:prstGeom prst="ellipse">
+            <a:avLst/>
+          </a:prstGeom>
+          <a:solidFill>
+            <a:srgbClr val="1E7A4D"/>
+          </a:solidFill>
+          <a:ln/>
+        </p:spPr>
+      </p:sp>
+      <p:sp>
+        <p:nvSpPr>
+          <p:cNvPr id="23" name="Text 19"/>
+          <p:cNvSpPr/>
+          <p:nvPr/>
+        </p:nvSpPr>
+        <p:spPr>
+          <a:xfrm>
+            <a:off x="2576779" y="5861304"/>
+            <a:ext cx="1554480" cy="182880"/>
+          </a:xfrm>
+          <a:prstGeom prst="rect">
+            <a:avLst/>
+          </a:prstGeom>
+          <a:noFill/>
+          <a:ln/>
+        </p:spPr>
+        <p:txBody>
+          <a:bodyPr wrap="square" lIns="0" tIns="0" rIns="0" bIns="0" rtlCol="0" anchor="ctr"/>
+          <a:lstStyle/>
+          <a:p>
+            <a:pPr algn="ctr" indent="0" marL="0">
+              <a:buNone/>
+            </a:pPr>
+            <a:r>
+              <a:rPr lang="en-US" sz="750" b="1" dirty="0">
+                <a:solidFill>
+                  <a:srgbClr val="1E7A4D"/>
+                </a:solidFill>
+                <a:latin typeface="IBM Plex Mono" pitchFamily="34" charset="0"/>
+                <a:ea typeface="IBM Plex Mono" pitchFamily="34" charset="-122"/>
+                <a:cs typeface="IBM Plex Mono" pitchFamily="34" charset="-120"/>
+              </a:rPr>
+              <a:t>DCF $4.8bn·8.7x</a:t>
+            </a:r>
+            <a:endParaRPr lang="en-US" sz="750" dirty="0"/>
+          </a:p>
+        </p:txBody>
+      </p:sp>
+      <p:sp>
+        <p:nvSpPr>
+          <p:cNvPr id="24" name="Text 20"/>
+          <p:cNvSpPr/>
+          <p:nvPr/>
+        </p:nvSpPr>
+        <p:spPr>
+          <a:xfrm>
+            <a:off x="429768" y="6080760"/>
+            <a:ext cx="548640" cy="146304"/>
+          </a:xfrm>
+          <a:prstGeom prst="rect">
+            <a:avLst/>
+          </a:prstGeom>
+          <a:noFill/>
+          <a:ln/>
+        </p:spPr>
+        <p:txBody>
+          <a:bodyPr wrap="square" lIns="0" tIns="0" rIns="0" bIns="0" rtlCol="0" anchor="ctr"/>
+          <a:lstStyle/>
+          <a:p>
+            <a:pPr algn="ctr" indent="0" marL="0">
+              <a:buNone/>
+            </a:pPr>
+            <a:r>
+              <a:rPr lang="en-US" sz="650" dirty="0">
+                <a:solidFill>
+                  <a:srgbClr val="9A847C"/>
+                </a:solidFill>
+                <a:latin typeface="IBM Plex Mono" pitchFamily="34" charset="0"/>
+                <a:ea typeface="IBM Plex Mono" pitchFamily="34" charset="-122"/>
+                <a:cs typeface="IBM Plex Mono" pitchFamily="34" charset="-120"/>
+              </a:rPr>
+              <a:t>$3bn</a:t>
+            </a:r>
+            <a:endParaRPr lang="en-US" sz="650" dirty="0"/>
+          </a:p>
+        </p:txBody>
+      </p:sp>
+      <p:sp>
+        <p:nvSpPr>
+          <p:cNvPr id="25" name="Text 21"/>
+          <p:cNvSpPr/>
+          <p:nvPr/>
+        </p:nvSpPr>
+        <p:spPr>
+          <a:xfrm>
+            <a:off x="1869948" y="6080760"/>
+            <a:ext cx="548640" cy="146304"/>
+          </a:xfrm>
+          <a:prstGeom prst="rect">
+            <a:avLst/>
+          </a:prstGeom>
+          <a:noFill/>
+          <a:ln/>
+        </p:spPr>
+        <p:txBody>
+          <a:bodyPr wrap="square" lIns="0" tIns="0" rIns="0" bIns="0" rtlCol="0" anchor="ctr"/>
+          <a:lstStyle/>
+          <a:p>
+            <a:pPr algn="ctr" indent="0" marL="0">
+              <a:buNone/>
+            </a:pPr>
+            <a:r>
+              <a:rPr lang="en-US" sz="650" dirty="0">
+                <a:solidFill>
+                  <a:srgbClr val="9A847C"/>
+                </a:solidFill>
+                <a:latin typeface="IBM Plex Mono" pitchFamily="34" charset="0"/>
+                <a:ea typeface="IBM Plex Mono" pitchFamily="34" charset="-122"/>
+                <a:cs typeface="IBM Plex Mono" pitchFamily="34" charset="-120"/>
+              </a:rPr>
+              <a:t>$4bn</a:t>
+            </a:r>
+            <a:endParaRPr lang="en-US" sz="650" dirty="0"/>
+          </a:p>
+        </p:txBody>
+      </p:sp>
+      <p:sp>
+        <p:nvSpPr>
+          <p:cNvPr id="26" name="Text 22"/>
+          <p:cNvSpPr/>
+          <p:nvPr/>
+        </p:nvSpPr>
+        <p:spPr>
+          <a:xfrm>
+            <a:off x="3310128" y="6080760"/>
+            <a:ext cx="548640" cy="146304"/>
+          </a:xfrm>
+          <a:prstGeom prst="rect">
+            <a:avLst/>
+          </a:prstGeom>
+          <a:noFill/>
+          <a:ln/>
+        </p:spPr>
+        <p:txBody>
+          <a:bodyPr wrap="square" lIns="0" tIns="0" rIns="0" bIns="0" rtlCol="0" anchor="ctr"/>
+          <a:lstStyle/>
+          <a:p>
+            <a:pPr algn="ctr" indent="0" marL="0">
+              <a:buNone/>
+            </a:pPr>
+            <a:r>
+              <a:rPr lang="en-US" sz="650" dirty="0">
+                <a:solidFill>
+                  <a:srgbClr val="9A847C"/>
+                </a:solidFill>
+                <a:latin typeface="IBM Plex Mono" pitchFamily="34" charset="0"/>
+                <a:ea typeface="IBM Plex Mono" pitchFamily="34" charset="-122"/>
+                <a:cs typeface="IBM Plex Mono" pitchFamily="34" charset="-120"/>
+              </a:rPr>
+              <a:t>$5bn</a:t>
+            </a:r>
+            <a:endParaRPr lang="en-US" sz="650" dirty="0"/>
+          </a:p>
+        </p:txBody>
+      </p:sp>
+      <p:sp>
+        <p:nvSpPr>
+          <p:cNvPr id="27" name="Text 23"/>
+          <p:cNvSpPr/>
+          <p:nvPr/>
+        </p:nvSpPr>
+        <p:spPr>
+          <a:xfrm>
+            <a:off x="4750308" y="6080760"/>
+            <a:ext cx="548640" cy="146304"/>
+          </a:xfrm>
+          <a:prstGeom prst="rect">
+            <a:avLst/>
+          </a:prstGeom>
+          <a:noFill/>
+          <a:ln/>
+        </p:spPr>
+        <p:txBody>
+          <a:bodyPr wrap="square" lIns="0" tIns="0" rIns="0" bIns="0" rtlCol="0" anchor="ctr"/>
+          <a:lstStyle/>
+          <a:p>
+            <a:pPr algn="ctr" indent="0" marL="0">
+              <a:buNone/>
+            </a:pPr>
+            <a:r>
+              <a:rPr lang="en-US" sz="650" dirty="0">
+                <a:solidFill>
+                  <a:srgbClr val="9A847C"/>
+                </a:solidFill>
+                <a:latin typeface="IBM Plex Mono" pitchFamily="34" charset="0"/>
+                <a:ea typeface="IBM Plex Mono" pitchFamily="34" charset="-122"/>
+                <a:cs typeface="IBM Plex Mono" pitchFamily="34" charset="-120"/>
+              </a:rPr>
+              <a:t>$6bn</a:t>
+            </a:r>
+            <a:endParaRPr lang="en-US" sz="650" dirty="0"/>
+          </a:p>
+        </p:txBody>
+      </p:sp>
+      <p:sp>
+        <p:nvSpPr>
+          <p:cNvPr id="28" name="Text 24"/>
+          <p:cNvSpPr/>
+          <p:nvPr/>
+        </p:nvSpPr>
+        <p:spPr>
+          <a:xfrm>
+            <a:off x="6190488" y="6080760"/>
+            <a:ext cx="548640" cy="146304"/>
+          </a:xfrm>
+          <a:prstGeom prst="rect">
+            <a:avLst/>
+          </a:prstGeom>
+          <a:noFill/>
+          <a:ln/>
+        </p:spPr>
+        <p:txBody>
+          <a:bodyPr wrap="square" lIns="0" tIns="0" rIns="0" bIns="0" rtlCol="0" anchor="ctr"/>
+          <a:lstStyle/>
+          <a:p>
+            <a:pPr algn="ctr" indent="0" marL="0">
+              <a:buNone/>
+            </a:pPr>
+            <a:r>
+              <a:rPr lang="en-US" sz="650" dirty="0">
+                <a:solidFill>
+                  <a:srgbClr val="9A847C"/>
+                </a:solidFill>
+                <a:latin typeface="IBM Plex Mono" pitchFamily="34" charset="0"/>
+                <a:ea typeface="IBM Plex Mono" pitchFamily="34" charset="-122"/>
+                <a:cs typeface="IBM Plex Mono" pitchFamily="34" charset="-120"/>
+              </a:rPr>
+              <a:t>$7bn</a:t>
+            </a:r>
+            <a:endParaRPr lang="en-US" sz="650" dirty="0"/>
+          </a:p>
+        </p:txBody>
+      </p:sp>
+      <p:sp>
+        <p:nvSpPr>
+          <p:cNvPr id="29" name="Text 25"/>
+          <p:cNvSpPr/>
+          <p:nvPr/>
+        </p:nvSpPr>
+        <p:spPr>
+          <a:xfrm>
+            <a:off x="7630668" y="6080760"/>
+            <a:ext cx="548640" cy="146304"/>
+          </a:xfrm>
+          <a:prstGeom prst="rect">
+            <a:avLst/>
+          </a:prstGeom>
+          <a:noFill/>
+          <a:ln/>
+        </p:spPr>
+        <p:txBody>
+          <a:bodyPr wrap="square" lIns="0" tIns="0" rIns="0" bIns="0" rtlCol="0" anchor="ctr"/>
+          <a:lstStyle/>
+          <a:p>
+            <a:pPr algn="ctr" indent="0" marL="0">
+              <a:buNone/>
+            </a:pPr>
+            <a:r>
+              <a:rPr lang="en-US" sz="650" dirty="0">
+                <a:solidFill>
+                  <a:srgbClr val="9A847C"/>
+                </a:solidFill>
+                <a:latin typeface="IBM Plex Mono" pitchFamily="34" charset="0"/>
+                <a:ea typeface="IBM Plex Mono" pitchFamily="34" charset="-122"/>
+                <a:cs typeface="IBM Plex Mono" pitchFamily="34" charset="-120"/>
+              </a:rPr>
+              <a:t>$8bn</a:t>
+            </a:r>
+            <a:endParaRPr lang="en-US" sz="650" dirty="0"/>
+          </a:p>
+        </p:txBody>
+      </p:sp>
+      <p:sp>
+        <p:nvSpPr>
+          <p:cNvPr id="30" name="Text 26"/>
+          <p:cNvSpPr/>
+          <p:nvPr/>
+        </p:nvSpPr>
+        <p:spPr>
+          <a:xfrm>
+            <a:off x="9070848" y="6080760"/>
+            <a:ext cx="548640" cy="146304"/>
+          </a:xfrm>
+          <a:prstGeom prst="rect">
+            <a:avLst/>
+          </a:prstGeom>
+          <a:noFill/>
+          <a:ln/>
+        </p:spPr>
+        <p:txBody>
+          <a:bodyPr wrap="square" lIns="0" tIns="0" rIns="0" bIns="0" rtlCol="0" anchor="ctr"/>
+          <a:lstStyle/>
+          <a:p>
+            <a:pPr algn="ctr" indent="0" marL="0">
+              <a:buNone/>
+            </a:pPr>
+            <a:r>
+              <a:rPr lang="en-US" sz="650" dirty="0">
+                <a:solidFill>
+                  <a:srgbClr val="9A847C"/>
+                </a:solidFill>
+                <a:latin typeface="IBM Plex Mono" pitchFamily="34" charset="0"/>
+                <a:ea typeface="IBM Plex Mono" pitchFamily="34" charset="-122"/>
+                <a:cs typeface="IBM Plex Mono" pitchFamily="34" charset="-120"/>
+              </a:rPr>
+              <a:t>$9bn</a:t>
+            </a:r>
+            <a:endParaRPr lang="en-US" sz="650" dirty="0"/>
+          </a:p>
+        </p:txBody>
+      </p:sp>
+      <p:sp>
+        <p:nvSpPr>
+          <p:cNvPr id="31" name="Shape 27"/>
+          <p:cNvSpPr/>
+          <p:nvPr/>
+        </p:nvSpPr>
+        <p:spPr>
+          <a:xfrm>
+            <a:off x="566928" y="6272784"/>
+            <a:ext cx="9555480" cy="749808"/>
+          </a:xfrm>
+          <a:prstGeom prst="roundRect">
+            <a:avLst>
+              <a:gd name="adj" fmla="val 7317"/>
+            </a:avLst>
+          </a:prstGeom>
+          <a:solidFill>
+            <a:srgbClr val="F2ECE0"/>
+          </a:solidFill>
+          <a:ln/>
+        </p:spPr>
+      </p:sp>
+      <p:sp>
+        <p:nvSpPr>
+          <p:cNvPr id="32" name="Text 28"/>
+          <p:cNvSpPr/>
+          <p:nvPr/>
+        </p:nvSpPr>
+        <p:spPr>
+          <a:xfrm>
+            <a:off x="795528" y="6272784"/>
+            <a:ext cx="9098280" cy="749808"/>
+          </a:xfrm>
+          <a:prstGeom prst="rect">
+            <a:avLst/>
+          </a:prstGeom>
+          <a:noFill/>
+          <a:ln/>
+        </p:spPr>
+        <p:txBody>
+          <a:bodyPr wrap="square" lIns="0" tIns="0" rIns="0" bIns="0" rtlCol="0" anchor="ctr"/>
+          <a:lstStyle/>
+          <a:p>
+            <a:pPr indent="0" marL="0">
+              <a:lnSpc>
+                <a:spcPct val="112000"/>
+              </a:lnSpc>
+              <a:buNone/>
+            </a:pPr>
+            <a:r>
+              <a:rPr lang="en-US" sz="950" b="1" dirty="0">
+                <a:solidFill>
+                  <a:srgbClr val="C1121F"/>
+                </a:solidFill>
+                <a:latin typeface="IBM Plex Sans KR" pitchFamily="34" charset="0"/>
+                <a:ea typeface="IBM Plex Sans KR" pitchFamily="34" charset="-122"/>
+                <a:cs typeface="IBM Plex Sans KR" pitchFamily="34" charset="-120"/>
+              </a:rPr>
+              <a:t>[핵심]  </a:t>
+            </a:r>
+            <a:pPr indent="0" marL="0">
+              <a:lnSpc>
+                <a:spcPct val="112000"/>
+              </a:lnSpc>
+              <a:buNone/>
+            </a:pPr>
+            <a:r>
+              <a:rPr lang="en-US" sz="950" dirty="0">
+                <a:solidFill>
+                  <a:srgbClr val="1B1714"/>
+                </a:solidFill>
+                <a:latin typeface="IBM Plex Sans KR" pitchFamily="34" charset="0"/>
+                <a:ea typeface="IBM Plex Sans KR" pitchFamily="34" charset="-122"/>
+                <a:cs typeface="IBM Plex Sans KR" pitchFamily="34" charset="-120"/>
+              </a:rPr>
+              <a:t>ex-AMPC EBITDA $554mm에 peer 8~13x → EV $4.4~7.2bn. 순차입금 $6.4bn 감안 시 지분가치는 </a:t>
+            </a:r>
+            <a:pPr indent="0" marL="0">
+              <a:lnSpc>
+                <a:spcPct val="112000"/>
+              </a:lnSpc>
+              <a:buNone/>
+            </a:pPr>
+            <a:r>
+              <a:rPr lang="en-US" sz="950" b="1" dirty="0">
+                <a:solidFill>
+                  <a:srgbClr val="1E7A4D"/>
+                </a:solidFill>
+                <a:latin typeface="IBM Plex Sans KR" pitchFamily="34" charset="0"/>
+                <a:ea typeface="IBM Plex Sans KR" pitchFamily="34" charset="-122"/>
+                <a:cs typeface="IBM Plex Sans KR" pitchFamily="34" charset="-120"/>
+              </a:rPr>
+              <a:t>13x(+$0.8bn)에서야 (+)</a:t>
+            </a:r>
+            <a:pPr indent="0" marL="0">
+              <a:lnSpc>
+                <a:spcPct val="112000"/>
+              </a:lnSpc>
+              <a:buNone/>
+            </a:pPr>
+            <a:r>
+              <a:rPr lang="en-US" sz="950" dirty="0">
+                <a:solidFill>
+                  <a:srgbClr val="1B1714"/>
+                </a:solidFill>
+                <a:latin typeface="IBM Plex Sans KR" pitchFamily="34" charset="0"/>
+                <a:ea typeface="IBM Plex Sans KR" pitchFamily="34" charset="-122"/>
+                <a:cs typeface="IBM Plex Sans KR" pitchFamily="34" charset="-120"/>
+              </a:rPr>
+              <a:t>, 8x는 −$2.0bn. DCF도 ~8.7x로 peer 하단이라, 딜 성립에 필요한 </a:t>
+            </a:r>
+            <a:pPr indent="0" marL="0">
+              <a:lnSpc>
+                <a:spcPct val="112000"/>
+              </a:lnSpc>
+              <a:buNone/>
+            </a:pPr>
+            <a:r>
+              <a:rPr lang="en-US" sz="950" b="1" dirty="0">
+                <a:solidFill>
+                  <a:srgbClr val="C1121F"/>
+                </a:solidFill>
+                <a:latin typeface="IBM Plex Sans KR" pitchFamily="34" charset="0"/>
+                <a:ea typeface="IBM Plex Sans KR" pitchFamily="34" charset="-122"/>
+                <a:cs typeface="IBM Plex Sans KR" pitchFamily="34" charset="-120"/>
+              </a:rPr>
+              <a:t>12.6~15.4x는 peer 상단 초과</a:t>
+            </a:r>
+            <a:pPr indent="0" marL="0">
+              <a:lnSpc>
+                <a:spcPct val="112000"/>
+              </a:lnSpc>
+              <a:buNone/>
+            </a:pPr>
+            <a:r>
+              <a:rPr lang="en-US" sz="950" dirty="0">
+                <a:solidFill>
+                  <a:srgbClr val="1B1714"/>
+                </a:solidFill>
+                <a:latin typeface="IBM Plex Sans KR" pitchFamily="34" charset="0"/>
+                <a:ea typeface="IBM Plex Sans KR" pitchFamily="34" charset="-122"/>
+                <a:cs typeface="IBM Plex Sans KR" pitchFamily="34" charset="-120"/>
+              </a:rPr>
+              <a:t> → 그랜트·희석·ex-AMPC 마진 개선으로 메워야. (AMPC 포함 시 EV의 75%가 보조금)</a:t>
+            </a:r>
+            <a:endParaRPr lang="en-US" sz="950" dirty="0"/>
+          </a:p>
+        </p:txBody>
+      </p:sp>
+      <p:sp>
+        <p:nvSpPr>
+          <p:cNvPr id="33" name="Shape 29"/>
+          <p:cNvSpPr/>
+          <p:nvPr/>
+        </p:nvSpPr>
+        <p:spPr>
+          <a:xfrm>
+            <a:off x="566928" y="7141464"/>
+            <a:ext cx="9555480" cy="0"/>
+          </a:xfrm>
+          <a:prstGeom prst="line">
+            <a:avLst/>
+          </a:prstGeom>
+          <a:noFill/>
+          <a:ln w="9525">
+            <a:solidFill>
+              <a:srgbClr val="E4DED4"/>
+            </a:solidFill>
+            <a:prstDash val="solid"/>
+          </a:ln>
+        </p:spPr>
+      </p:sp>
+      <p:sp>
+        <p:nvSpPr>
+          <p:cNvPr id="34" name="Text 30"/>
+          <p:cNvSpPr/>
+          <p:nvPr/>
+        </p:nvSpPr>
+        <p:spPr>
+          <a:xfrm>
+            <a:off x="566928" y="7178040"/>
+            <a:ext cx="5486400" cy="237744"/>
+          </a:xfrm>
+          <a:prstGeom prst="rect">
+            <a:avLst/>
+          </a:prstGeom>
+          <a:noFill/>
+          <a:ln/>
+        </p:spPr>
+        <p:txBody>
+          <a:bodyPr wrap="square" lIns="0" tIns="0" rIns="0" bIns="0" rtlCol="0" anchor="ctr"/>
+          <a:lstStyle/>
+          <a:p>
+            <a:pPr indent="0" marL="0">
+              <a:buNone/>
+            </a:pPr>
+            <a:r>
+              <a:rPr lang="en-US" sz="750" dirty="0">
+                <a:solidFill>
+                  <a:srgbClr val="9A847C"/>
+                </a:solidFill>
+                <a:latin typeface="IBM Plex Sans KR" pitchFamily="34" charset="0"/>
+                <a:ea typeface="IBM Plex Sans KR" pitchFamily="34" charset="-122"/>
+                <a:cs typeface="IBM Plex Sans KR" pitchFamily="34" charset="-120"/>
+              </a:rPr>
+              <a:t>SK 전략팀 · Strictly Private &amp; Confidential</a:t>
+            </a:r>
+            <a:endParaRPr lang="en-US" sz="750" dirty="0"/>
+          </a:p>
+        </p:txBody>
+      </p:sp>
+      <p:sp>
+        <p:nvSpPr>
+          <p:cNvPr id="35" name="Text 31"/>
+          <p:cNvSpPr/>
+          <p:nvPr/>
+        </p:nvSpPr>
+        <p:spPr>
+          <a:xfrm>
+            <a:off x="7836408" y="7178040"/>
+            <a:ext cx="2286000" cy="237744"/>
+          </a:xfrm>
+          <a:prstGeom prst="rect">
+            <a:avLst/>
+          </a:prstGeom>
+          <a:noFill/>
+          <a:ln/>
+        </p:spPr>
+        <p:txBody>
+          <a:bodyPr wrap="square" lIns="0" tIns="0" rIns="0" bIns="0" rtlCol="0" anchor="ctr"/>
+          <a:lstStyle/>
+          <a:p>
+            <a:pPr algn="r" indent="0" marL="0">
+              <a:buNone/>
+            </a:pPr>
+            <a:r>
+              <a:rPr lang="en-US" sz="750" dirty="0">
+                <a:solidFill>
+                  <a:srgbClr val="9A847C"/>
+                </a:solidFill>
+                <a:latin typeface="IBM Plex Mono" pitchFamily="34" charset="0"/>
+                <a:ea typeface="IBM Plex Mono" pitchFamily="34" charset="-122"/>
+                <a:cs typeface="IBM Plex Mono" pitchFamily="34" charset="-120"/>
+              </a:rPr>
+              <a:t>★ = 미검증</a:t>
+            </a:r>
+            <a:endParaRPr lang="en-US" sz="750" dirty="0"/>
+          </a:p>
+        </p:txBody>
+      </p:sp>
+    </p:spTree>
+  </p:cSld>
+  <p:clrMapOvr>
+    <a:masterClrMapping/>
+  </p:clrMapOvr>
+</p:sld>
+</file>
+
+<file path=ppt/slides/slide6.xml><?xml version="1.0" encoding="utf-8"?>
+<p:sld xmlns:a="http://schemas.openxmlformats.org/drawingml/2006/main" xmlns:r="http://schemas.openxmlformats.org/officeDocument/2006/relationships" xmlns:p="http://schemas.openxmlformats.org/presentationml/2006/main">
+  <p:cSld name="Slide 6">
+    <p:bg>
+      <p:bgPr>
+        <a:solidFill>
+          <a:srgbClr val="FBF9F5"/>
+        </a:solidFill>
+      </p:bgPr>
+    </p:bg>
+    <p:spTree>
+      <p:nvGrpSpPr>
+        <p:cNvPr id="1" name=""/>
+        <p:cNvGrpSpPr/>
+        <p:nvPr/>
+      </p:nvGrpSpPr>
+      <p:grpSpPr>
+        <a:xfrm>
+          <a:off x="0" y="0"/>
+          <a:ext cx="0" cy="0"/>
+          <a:chOff x="0" y="0"/>
+          <a:chExt cx="0" cy="0"/>
+        </a:xfrm>
+      </p:grpSpPr>
+      <p:sp>
+        <p:nvSpPr>
+          <p:cNvPr id="2" name="Text 0"/>
+          <p:cNvSpPr/>
+          <p:nvPr/>
+        </p:nvSpPr>
+        <p:spPr>
+          <a:xfrm>
+            <a:off x="566928" y="475488"/>
+            <a:ext cx="6858000" cy="237744"/>
+          </a:xfrm>
+          <a:prstGeom prst="rect">
+            <a:avLst/>
+          </a:prstGeom>
+          <a:noFill/>
+          <a:ln/>
+        </p:spPr>
+        <p:txBody>
+          <a:bodyPr wrap="square" lIns="0" tIns="0" rIns="0" bIns="0" rtlCol="0" anchor="ctr"/>
+          <a:lstStyle/>
+          <a:p>
+            <a:pPr indent="0" marL="0">
+              <a:buNone/>
+            </a:pPr>
+            <a:r>
+              <a:rPr lang="en-US" sz="900" spc="200" kern="0" dirty="0">
+                <a:solidFill>
+                  <a:srgbClr val="C1121F"/>
+                </a:solidFill>
+                <a:latin typeface="IBM Plex Mono" pitchFamily="34" charset="0"/>
+                <a:ea typeface="IBM Plex Mono" pitchFamily="34" charset="-122"/>
+                <a:cs typeface="IBM Plex Mono" pitchFamily="34" charset="-120"/>
+              </a:rPr>
+              <a:t>CLOSING — GOVERNMENT ENGAGEMENT</a:t>
+            </a:r>
+            <a:endParaRPr lang="en-US" sz="900" dirty="0"/>
+          </a:p>
+        </p:txBody>
+      </p:sp>
+      <p:sp>
+        <p:nvSpPr>
+          <p:cNvPr id="3" name="Text 1"/>
+          <p:cNvSpPr/>
+          <p:nvPr/>
+        </p:nvSpPr>
+        <p:spPr>
+          <a:xfrm>
+            <a:off x="6007608" y="475488"/>
+            <a:ext cx="4114800" cy="237744"/>
+          </a:xfrm>
+          <a:prstGeom prst="rect">
+            <a:avLst/>
+          </a:prstGeom>
+          <a:noFill/>
+          <a:ln/>
+        </p:spPr>
+        <p:txBody>
+          <a:bodyPr wrap="square" lIns="0" tIns="0" rIns="0" bIns="0" rtlCol="0" anchor="ctr"/>
+          <a:lstStyle/>
+          <a:p>
+            <a:pPr algn="r" indent="0" marL="0">
+              <a:buNone/>
+            </a:pPr>
+            <a:r>
+              <a:rPr lang="en-US" sz="900" spc="150" kern="0" dirty="0">
+                <a:solidFill>
+                  <a:srgbClr val="9A847C"/>
+                </a:solidFill>
+                <a:latin typeface="IBM Plex Mono" pitchFamily="34" charset="0"/>
+                <a:ea typeface="IBM Plex Mono" pitchFamily="34" charset="-122"/>
+                <a:cs typeface="IBM Plex Mono" pitchFamily="34" charset="-120"/>
+              </a:rPr>
+              <a:t>SK 전략팀 · Confidential  /  06</a:t>
             </a:r>
             <a:endParaRPr lang="en-US" sz="900" dirty="0"/>
           </a:p>
@@ -13144,7 +16897,7 @@
       </p:sp>
       <p:graphicFrame>
         <p:nvGraphicFramePr>
-          <p:cNvPr id="6" name="Table 0"/>
+          <p:cNvPr id="7" name="Table 0"/>
           <p:cNvGraphicFramePr>
             <a:graphicFrameLocks noGrp="1"/>
           </p:cNvGraphicFramePr>
@@ -13872,7 +17625,7 @@
                 <a:ea typeface="IBM Plex Sans KR" pitchFamily="34" charset="-122"/>
                 <a:cs typeface="IBM Plex Sans KR" pitchFamily="34" charset="-120"/>
               </a:rPr>
-              <a:t>• CoC 20% 캡 유지
+              <a:t>• CoC 완화 협상 (희석 30~49% 여지)
 </a:t>
             </a:r>
             <a:pPr indent="0" marL="0">

--- a/sk_valuation_project/output/SK_Funding_v3_editable.pptx
+++ b/sk_valuation_project/output/SK_Funding_v3_editable.pptx
@@ -8185,7 +8185,7 @@
                 <a:ea typeface="IBM Plex Mono" pitchFamily="34" charset="-122"/>
                 <a:cs typeface="IBM Plex Mono" pitchFamily="34" charset="-120"/>
               </a:rPr>
-              <a:t>8~13x</a:t>
+              <a:t>8~13x 보수 (실측 p.5)</a:t>
             </a:r>
             <a:endParaRPr lang="en-US" sz="1000" dirty="0"/>
           </a:p>
@@ -12312,7 +12312,7 @@
                 <a:ea typeface="Noto Serif KR" pitchFamily="34" charset="-122"/>
                 <a:cs typeface="Noto Serif KR" pitchFamily="34" charset="-120"/>
               </a:rPr>
-              <a:t>Peer 멀티플 (8~13x)</a:t>
+              <a:t>Peer 멀티플 — 실측 + EBITDA 기준</a:t>
             </a:r>
             <a:endParaRPr lang="en-US" sz="2600" dirty="0"/>
           </a:p>
@@ -12351,7 +12351,7 @@
                 <a:ea typeface="IBM Plex Sans KR" pitchFamily="34" charset="-122"/>
                 <a:cs typeface="IBM Plex Sans KR" pitchFamily="34" charset="-120"/>
               </a:rPr>
-              <a:t>ex-AMPC EBITDA $554mm 적용</a:t>
+              <a:t>forward EV/EBITDA · 2026.7</a:t>
             </a:r>
             <a:endParaRPr lang="en-US" sz="950" dirty="0"/>
           </a:p>
@@ -12413,7 +12413,7 @@
                 <a:ea typeface="IBM Plex Mono" pitchFamily="34" charset="-122"/>
                 <a:cs typeface="IBM Plex Mono" pitchFamily="34" charset="-120"/>
               </a:rPr>
-              <a:t>Peer 컴프스 · COMPARABLES (forward EV/EBITDA ★)</a:t>
+              <a:t>Peer 컴프스 (실측) · forward EV/EBITDA ★</a:t>
             </a:r>
             <a:endParaRPr lang="en-US" sz="850" dirty="0"/>
           </a:p>
@@ -12443,8 +12443,8 @@
               <a:tblPr/>
               <a:tblGrid>
                 <a:gridCol w="1874520"/>
-                <a:gridCol w="1600200"/>
-                <a:gridCol w="1097280"/>
+                <a:gridCol w="1325880"/>
+                <a:gridCol w="1371600"/>
               </a:tblGrid>
               <a:tr h="310896">
                 <a:tc>
@@ -12465,74 +12465,6 @@
                           <a:cs typeface="IBM Plex Sans KR" pitchFamily="34" charset="-120"/>
                         </a:rPr>
                         <a:t>회사</a:t>
-                      </a:r>
-                      <a:endParaRPr lang="en-US" sz="900" dirty="0">
-                        <a:latin typeface="IBM Plex Sans KR" charset="0"/>
-                        <a:ea typeface="IBM Plex Sans KR" charset="0"/>
-                        <a:cs typeface="IBM Plex Sans KR" charset="0"/>
-                      </a:endParaRPr>
-                    </a:p>
-                  </a:txBody>
-                  <a:tcPr marL="88900" marR="88900" marT="25400" marB="25400" anchor="ctr">
-                    <a:lnL w="6350" cap="flat" cmpd="sng" algn="ctr">
-                      <a:solidFill>
-                        <a:srgbClr val="E4DED4"/>
-                      </a:solidFill>
-                      <a:prstDash val="solid"/>
-                      <a:round/>
-                      <a:headEnd type="none" w="med" len="med"/>
-                      <a:tailEnd type="none" w="med" len="med"/>
-                    </a:lnL>
-                    <a:lnR w="6350" cap="flat" cmpd="sng" algn="ctr">
-                      <a:solidFill>
-                        <a:srgbClr val="E4DED4"/>
-                      </a:solidFill>
-                      <a:prstDash val="solid"/>
-                      <a:round/>
-                      <a:headEnd type="none" w="med" len="med"/>
-                      <a:tailEnd type="none" w="med" len="med"/>
-                    </a:lnR>
-                    <a:lnT w="6350" cap="flat" cmpd="sng" algn="ctr">
-                      <a:solidFill>
-                        <a:srgbClr val="E4DED4"/>
-                      </a:solidFill>
-                      <a:prstDash val="solid"/>
-                      <a:round/>
-                      <a:headEnd type="none" w="med" len="med"/>
-                      <a:tailEnd type="none" w="med" len="med"/>
-                    </a:lnT>
-                    <a:lnB w="6350" cap="flat" cmpd="sng" algn="ctr">
-                      <a:solidFill>
-                        <a:srgbClr val="E4DED4"/>
-                      </a:solidFill>
-                      <a:prstDash val="solid"/>
-                      <a:round/>
-                      <a:headEnd type="none" w="med" len="med"/>
-                      <a:tailEnd type="none" w="med" len="med"/>
-                    </a:lnB>
-                    <a:solidFill>
-                      <a:srgbClr val="1B1714"/>
-                    </a:solidFill>
-                  </a:tcPr>
-                </a:tc>
-                <a:tc>
-                  <a:txBody>
-                    <a:bodyPr/>
-                    <a:lstStyle/>
-                    <a:p>
-                      <a:pPr algn="l" indent="0" marL="0">
-                        <a:buNone/>
-                      </a:pPr>
-                      <a:r>
-                        <a:rPr lang="en-US" sz="900" b="1" dirty="0">
-                          <a:solidFill>
-                            <a:srgbClr val="FFFFFF"/>
-                          </a:solidFill>
-                          <a:latin typeface="IBM Plex Sans KR" pitchFamily="34" charset="0"/>
-                          <a:ea typeface="IBM Plex Sans KR" pitchFamily="34" charset="-122"/>
-                          <a:cs typeface="IBM Plex Sans KR" pitchFamily="34" charset="-120"/>
-                        </a:rPr>
-                        <a:t>구분</a:t>
                       </a:r>
                       <a:endParaRPr lang="en-US" sz="900" dirty="0">
                         <a:latin typeface="IBM Plex Sans KR" charset="0"/>
@@ -12651,6 +12583,280 @@
                     </a:solidFill>
                   </a:tcPr>
                 </a:tc>
+                <a:tc>
+                  <a:txBody>
+                    <a:bodyPr/>
+                    <a:lstStyle/>
+                    <a:p>
+                      <a:pPr algn="l" indent="0" marL="0">
+                        <a:buNone/>
+                      </a:pPr>
+                      <a:r>
+                        <a:rPr lang="en-US" sz="900" b="1" dirty="0">
+                          <a:solidFill>
+                            <a:srgbClr val="FFFFFF"/>
+                          </a:solidFill>
+                          <a:latin typeface="IBM Plex Sans KR" pitchFamily="34" charset="0"/>
+                          <a:ea typeface="IBM Plex Sans KR" pitchFamily="34" charset="-122"/>
+                          <a:cs typeface="IBM Plex Sans KR" pitchFamily="34" charset="-120"/>
+                        </a:rPr>
+                        <a:t>비고</a:t>
+                      </a:r>
+                      <a:endParaRPr lang="en-US" sz="900" dirty="0">
+                        <a:latin typeface="IBM Plex Sans KR" charset="0"/>
+                        <a:ea typeface="IBM Plex Sans KR" charset="0"/>
+                        <a:cs typeface="IBM Plex Sans KR" charset="0"/>
+                      </a:endParaRPr>
+                    </a:p>
+                  </a:txBody>
+                  <a:tcPr marL="88900" marR="88900" marT="25400" marB="25400" anchor="ctr">
+                    <a:lnL w="6350" cap="flat" cmpd="sng" algn="ctr">
+                      <a:solidFill>
+                        <a:srgbClr val="E4DED4"/>
+                      </a:solidFill>
+                      <a:prstDash val="solid"/>
+                      <a:round/>
+                      <a:headEnd type="none" w="med" len="med"/>
+                      <a:tailEnd type="none" w="med" len="med"/>
+                    </a:lnL>
+                    <a:lnR w="6350" cap="flat" cmpd="sng" algn="ctr">
+                      <a:solidFill>
+                        <a:srgbClr val="E4DED4"/>
+                      </a:solidFill>
+                      <a:prstDash val="solid"/>
+                      <a:round/>
+                      <a:headEnd type="none" w="med" len="med"/>
+                      <a:tailEnd type="none" w="med" len="med"/>
+                    </a:lnR>
+                    <a:lnT w="6350" cap="flat" cmpd="sng" algn="ctr">
+                      <a:solidFill>
+                        <a:srgbClr val="E4DED4"/>
+                      </a:solidFill>
+                      <a:prstDash val="solid"/>
+                      <a:round/>
+                      <a:headEnd type="none" w="med" len="med"/>
+                      <a:tailEnd type="none" w="med" len="med"/>
+                    </a:lnT>
+                    <a:lnB w="6350" cap="flat" cmpd="sng" algn="ctr">
+                      <a:solidFill>
+                        <a:srgbClr val="E4DED4"/>
+                      </a:solidFill>
+                      <a:prstDash val="solid"/>
+                      <a:round/>
+                      <a:headEnd type="none" w="med" len="med"/>
+                      <a:tailEnd type="none" w="med" len="med"/>
+                    </a:lnB>
+                    <a:solidFill>
+                      <a:srgbClr val="1B1714"/>
+                    </a:solidFill>
+                  </a:tcPr>
+                </a:tc>
+              </a:tr>
+              <a:tr h="365760">
+                <a:tc>
+                  <a:txBody>
+                    <a:bodyPr/>
+                    <a:lstStyle/>
+                    <a:p>
+                      <a:pPr indent="0" marL="0">
+                        <a:buNone/>
+                      </a:pPr>
+                      <a:r>
+                        <a:rPr lang="en-US" sz="950" dirty="0">
+                          <a:solidFill>
+                            <a:srgbClr val="1B1714"/>
+                          </a:solidFill>
+                          <a:latin typeface="IBM Plex Sans KR" pitchFamily="34" charset="0"/>
+                          <a:ea typeface="IBM Plex Sans KR" pitchFamily="34" charset="-122"/>
+                          <a:cs typeface="IBM Plex Sans KR" pitchFamily="34" charset="-120"/>
+                        </a:rPr>
+                        <a:t>LG에너지솔루션</a:t>
+                      </a:r>
+                      <a:endParaRPr lang="en-US" sz="950" dirty="0">
+                        <a:latin typeface="IBM Plex Sans KR" charset="0"/>
+                        <a:ea typeface="IBM Plex Sans KR" charset="0"/>
+                        <a:cs typeface="IBM Plex Sans KR" charset="0"/>
+                      </a:endParaRPr>
+                    </a:p>
+                  </a:txBody>
+                  <a:tcPr marL="88900" marR="88900" marT="25400" marB="25400" anchor="ctr">
+                    <a:lnL w="6350" cap="flat" cmpd="sng" algn="ctr">
+                      <a:solidFill>
+                        <a:srgbClr val="E4DED4"/>
+                      </a:solidFill>
+                      <a:prstDash val="solid"/>
+                      <a:round/>
+                      <a:headEnd type="none" w="med" len="med"/>
+                      <a:tailEnd type="none" w="med" len="med"/>
+                    </a:lnL>
+                    <a:lnR w="6350" cap="flat" cmpd="sng" algn="ctr">
+                      <a:solidFill>
+                        <a:srgbClr val="E4DED4"/>
+                      </a:solidFill>
+                      <a:prstDash val="solid"/>
+                      <a:round/>
+                      <a:headEnd type="none" w="med" len="med"/>
+                      <a:tailEnd type="none" w="med" len="med"/>
+                    </a:lnR>
+                    <a:lnT w="6350" cap="flat" cmpd="sng" algn="ctr">
+                      <a:solidFill>
+                        <a:srgbClr val="E4DED4"/>
+                      </a:solidFill>
+                      <a:prstDash val="solid"/>
+                      <a:round/>
+                      <a:headEnd type="none" w="med" len="med"/>
+                      <a:tailEnd type="none" w="med" len="med"/>
+                    </a:lnT>
+                    <a:lnB w="6350" cap="flat" cmpd="sng" algn="ctr">
+                      <a:solidFill>
+                        <a:srgbClr val="E4DED4"/>
+                      </a:solidFill>
+                      <a:prstDash val="solid"/>
+                      <a:round/>
+                      <a:headEnd type="none" w="med" len="med"/>
+                      <a:tailEnd type="none" w="med" len="med"/>
+                    </a:lnB>
+                    <a:solidFill>
+                      <a:srgbClr val="FFFFFF"/>
+                    </a:solidFill>
+                  </a:tcPr>
+                </a:tc>
+                <a:tc>
+                  <a:txBody>
+                    <a:bodyPr/>
+                    <a:lstStyle/>
+                    <a:p>
+                      <a:pPr algn="ctr" indent="0" marL="0">
+                        <a:buNone/>
+                      </a:pPr>
+                      <a:r>
+                        <a:rPr lang="en-US" sz="1050" b="1" dirty="0">
+                          <a:solidFill>
+                            <a:srgbClr val="1B1714"/>
+                          </a:solidFill>
+                          <a:latin typeface="Space Grotesk" pitchFamily="34" charset="0"/>
+                          <a:ea typeface="Space Grotesk" pitchFamily="34" charset="-122"/>
+                          <a:cs typeface="Space Grotesk" pitchFamily="34" charset="-120"/>
+                        </a:rPr>
+                        <a:t>19x → 15x</a:t>
+                      </a:r>
+                      <a:endParaRPr lang="en-US" sz="1050" dirty="0">
+                        <a:latin typeface="Space Grotesk" charset="0"/>
+                        <a:ea typeface="Space Grotesk" charset="0"/>
+                        <a:cs typeface="Space Grotesk" charset="0"/>
+                      </a:endParaRPr>
+                    </a:p>
+                  </a:txBody>
+                  <a:tcPr marL="88900" marR="88900" marT="25400" marB="25400" anchor="ctr">
+                    <a:lnL w="6350" cap="flat" cmpd="sng" algn="ctr">
+                      <a:solidFill>
+                        <a:srgbClr val="E4DED4"/>
+                      </a:solidFill>
+                      <a:prstDash val="solid"/>
+                      <a:round/>
+                      <a:headEnd type="none" w="med" len="med"/>
+                      <a:tailEnd type="none" w="med" len="med"/>
+                    </a:lnL>
+                    <a:lnR w="6350" cap="flat" cmpd="sng" algn="ctr">
+                      <a:solidFill>
+                        <a:srgbClr val="E4DED4"/>
+                      </a:solidFill>
+                      <a:prstDash val="solid"/>
+                      <a:round/>
+                      <a:headEnd type="none" w="med" len="med"/>
+                      <a:tailEnd type="none" w="med" len="med"/>
+                    </a:lnR>
+                    <a:lnT w="6350" cap="flat" cmpd="sng" algn="ctr">
+                      <a:solidFill>
+                        <a:srgbClr val="E4DED4"/>
+                      </a:solidFill>
+                      <a:prstDash val="solid"/>
+                      <a:round/>
+                      <a:headEnd type="none" w="med" len="med"/>
+                      <a:tailEnd type="none" w="med" len="med"/>
+                    </a:lnT>
+                    <a:lnB w="6350" cap="flat" cmpd="sng" algn="ctr">
+                      <a:solidFill>
+                        <a:srgbClr val="E4DED4"/>
+                      </a:solidFill>
+                      <a:prstDash val="solid"/>
+                      <a:round/>
+                      <a:headEnd type="none" w="med" len="med"/>
+                      <a:tailEnd type="none" w="med" len="med"/>
+                    </a:lnB>
+                    <a:solidFill>
+                      <a:srgbClr val="FFFFFF"/>
+                    </a:solidFill>
+                  </a:tcPr>
+                </a:tc>
+                <a:tc>
+                  <a:txBody>
+                    <a:bodyPr/>
+                    <a:lstStyle/>
+                    <a:p>
+                      <a:pPr indent="0" marL="0">
+                        <a:buNone/>
+                      </a:pPr>
+                      <a:r>
+                        <a:rPr lang="en-US" sz="850" dirty="0">
+                          <a:solidFill>
+                            <a:srgbClr val="6F6960"/>
+                          </a:solidFill>
+                          <a:latin typeface="IBM Plex Mono" pitchFamily="34" charset="0"/>
+                          <a:ea typeface="IBM Plex Mono" pitchFamily="34" charset="-122"/>
+                          <a:cs typeface="IBM Plex Mono" pitchFamily="34" charset="-120"/>
+                        </a:rPr>
+                        <a:t>26F / 27F</a:t>
+                      </a:r>
+                      <a:endParaRPr lang="en-US" sz="850" dirty="0">
+                        <a:latin typeface="IBM Plex Mono" charset="0"/>
+                        <a:ea typeface="IBM Plex Mono" charset="0"/>
+                        <a:cs typeface="IBM Plex Mono" charset="0"/>
+                      </a:endParaRPr>
+                    </a:p>
+                  </a:txBody>
+                  <a:tcPr marL="88900" marR="88900" marT="25400" marB="25400" anchor="ctr">
+                    <a:lnL w="6350" cap="flat" cmpd="sng" algn="ctr">
+                      <a:solidFill>
+                        <a:srgbClr val="E4DED4"/>
+                      </a:solidFill>
+                      <a:prstDash val="solid"/>
+                      <a:round/>
+                      <a:headEnd type="none" w="med" len="med"/>
+                      <a:tailEnd type="none" w="med" len="med"/>
+                    </a:lnL>
+                    <a:lnR w="6350" cap="flat" cmpd="sng" algn="ctr">
+                      <a:solidFill>
+                        <a:srgbClr val="E4DED4"/>
+                      </a:solidFill>
+                      <a:prstDash val="solid"/>
+                      <a:round/>
+                      <a:headEnd type="none" w="med" len="med"/>
+                      <a:tailEnd type="none" w="med" len="med"/>
+                    </a:lnR>
+                    <a:lnT w="6350" cap="flat" cmpd="sng" algn="ctr">
+                      <a:solidFill>
+                        <a:srgbClr val="E4DED4"/>
+                      </a:solidFill>
+                      <a:prstDash val="solid"/>
+                      <a:round/>
+                      <a:headEnd type="none" w="med" len="med"/>
+                      <a:tailEnd type="none" w="med" len="med"/>
+                    </a:lnT>
+                    <a:lnB w="6350" cap="flat" cmpd="sng" algn="ctr">
+                      <a:solidFill>
+                        <a:srgbClr val="E4DED4"/>
+                      </a:solidFill>
+                      <a:prstDash val="solid"/>
+                      <a:round/>
+                      <a:headEnd type="none" w="med" len="med"/>
+                      <a:tailEnd type="none" w="med" len="med"/>
+                    </a:lnB>
+                    <a:solidFill>
+                      <a:srgbClr val="FFFFFF"/>
+                    </a:solidFill>
+                  </a:tcPr>
+                </a:tc>
               </a:tr>
               <a:tr h="365760">
                 <a:tc>
@@ -12726,24 +12932,24 @@
                     <a:bodyPr/>
                     <a:lstStyle/>
                     <a:p>
-                      <a:pPr indent="0" marL="0">
+                      <a:pPr algn="ctr" indent="0" marL="0">
                         <a:buNone/>
                       </a:pPr>
                       <a:r>
-                        <a:rPr lang="en-US" sz="950" dirty="0">
+                        <a:rPr lang="en-US" sz="1050" b="1" dirty="0">
                           <a:solidFill>
-                            <a:srgbClr val="6F6960"/>
+                            <a:srgbClr val="1B1714"/>
                           </a:solidFill>
-                          <a:latin typeface="IBM Plex Mono" pitchFamily="34" charset="0"/>
-                          <a:ea typeface="IBM Plex Mono" pitchFamily="34" charset="-122"/>
-                          <a:cs typeface="IBM Plex Mono" pitchFamily="34" charset="-120"/>
+                          <a:latin typeface="Space Grotesk" pitchFamily="34" charset="0"/>
+                          <a:ea typeface="Space Grotesk" pitchFamily="34" charset="-122"/>
+                          <a:cs typeface="Space Grotesk" pitchFamily="34" charset="-120"/>
                         </a:rPr>
-                        <a:t>셀 · 글로벌 1위</a:t>
+                        <a:t>~13x</a:t>
                       </a:r>
-                      <a:endParaRPr lang="en-US" sz="950" dirty="0">
-                        <a:latin typeface="IBM Plex Mono" charset="0"/>
-                        <a:ea typeface="IBM Plex Mono" charset="0"/>
-                        <a:cs typeface="IBM Plex Mono" charset="0"/>
+                      <a:endParaRPr lang="en-US" sz="1050" dirty="0">
+                        <a:latin typeface="Space Grotesk" charset="0"/>
+                        <a:ea typeface="Space Grotesk" charset="0"/>
+                        <a:cs typeface="Space Grotesk" charset="0"/>
                       </a:endParaRPr>
                     </a:p>
                   </a:txBody>
@@ -12794,24 +13000,24 @@
                     <a:bodyPr/>
                     <a:lstStyle/>
                     <a:p>
-                      <a:pPr algn="ctr" indent="0" marL="0">
+                      <a:pPr indent="0" marL="0">
                         <a:buNone/>
                       </a:pPr>
                       <a:r>
-                        <a:rPr lang="en-US" sz="1100" b="1" dirty="0">
+                        <a:rPr lang="en-US" sz="850" dirty="0">
                           <a:solidFill>
-                            <a:srgbClr val="1B1714"/>
+                            <a:srgbClr val="6F6960"/>
                           </a:solidFill>
-                          <a:latin typeface="Space Grotesk" pitchFamily="34" charset="0"/>
-                          <a:ea typeface="Space Grotesk" pitchFamily="34" charset="-122"/>
-                          <a:cs typeface="Space Grotesk" pitchFamily="34" charset="-120"/>
+                          <a:latin typeface="IBM Plex Mono" pitchFamily="34" charset="0"/>
+                          <a:ea typeface="IBM Plex Mono" pitchFamily="34" charset="-122"/>
+                          <a:cs typeface="IBM Plex Mono" pitchFamily="34" charset="-120"/>
                         </a:rPr>
-                        <a:t>12~13x</a:t>
+                        <a:t>PE22·최고수익</a:t>
                       </a:r>
-                      <a:endParaRPr lang="en-US" sz="1100" dirty="0">
-                        <a:latin typeface="Space Grotesk" charset="0"/>
-                        <a:ea typeface="Space Grotesk" charset="0"/>
-                        <a:cs typeface="Space Grotesk" charset="0"/>
+                      <a:endParaRPr lang="en-US" sz="850" dirty="0">
+                        <a:latin typeface="IBM Plex Mono" charset="0"/>
+                        <a:ea typeface="IBM Plex Mono" charset="0"/>
+                        <a:cs typeface="IBM Plex Mono" charset="0"/>
                       </a:endParaRPr>
                     </a:p>
                   </a:txBody>
@@ -12876,12 +13082,80 @@
                           <a:ea typeface="IBM Plex Sans KR" pitchFamily="34" charset="-122"/>
                           <a:cs typeface="IBM Plex Sans KR" pitchFamily="34" charset="-120"/>
                         </a:rPr>
-                        <a:t>Tesla (Energy)</a:t>
+                        <a:t>삼성SDI</a:t>
                       </a:r>
                       <a:endParaRPr lang="en-US" sz="950" dirty="0">
                         <a:latin typeface="IBM Plex Sans KR" charset="0"/>
                         <a:ea typeface="IBM Plex Sans KR" charset="0"/>
                         <a:cs typeface="IBM Plex Sans KR" charset="0"/>
+                      </a:endParaRPr>
+                    </a:p>
+                  </a:txBody>
+                  <a:tcPr marL="88900" marR="88900" marT="25400" marB="25400" anchor="ctr">
+                    <a:lnL w="6350" cap="flat" cmpd="sng" algn="ctr">
+                      <a:solidFill>
+                        <a:srgbClr val="E4DED4"/>
+                      </a:solidFill>
+                      <a:prstDash val="solid"/>
+                      <a:round/>
+                      <a:headEnd type="none" w="med" len="med"/>
+                      <a:tailEnd type="none" w="med" len="med"/>
+                    </a:lnL>
+                    <a:lnR w="6350" cap="flat" cmpd="sng" algn="ctr">
+                      <a:solidFill>
+                        <a:srgbClr val="E4DED4"/>
+                      </a:solidFill>
+                      <a:prstDash val="solid"/>
+                      <a:round/>
+                      <a:headEnd type="none" w="med" len="med"/>
+                      <a:tailEnd type="none" w="med" len="med"/>
+                    </a:lnR>
+                    <a:lnT w="6350" cap="flat" cmpd="sng" algn="ctr">
+                      <a:solidFill>
+                        <a:srgbClr val="E4DED4"/>
+                      </a:solidFill>
+                      <a:prstDash val="solid"/>
+                      <a:round/>
+                      <a:headEnd type="none" w="med" len="med"/>
+                      <a:tailEnd type="none" w="med" len="med"/>
+                    </a:lnT>
+                    <a:lnB w="6350" cap="flat" cmpd="sng" algn="ctr">
+                      <a:solidFill>
+                        <a:srgbClr val="E4DED4"/>
+                      </a:solidFill>
+                      <a:prstDash val="solid"/>
+                      <a:round/>
+                      <a:headEnd type="none" w="med" len="med"/>
+                      <a:tailEnd type="none" w="med" len="med"/>
+                    </a:lnB>
+                    <a:solidFill>
+                      <a:srgbClr val="FFFFFF"/>
+                    </a:solidFill>
+                  </a:tcPr>
+                </a:tc>
+                <a:tc>
+                  <a:txBody>
+                    <a:bodyPr/>
+                    <a:lstStyle/>
+                    <a:p>
+                      <a:pPr algn="ctr" indent="0" marL="0">
+                        <a:buNone/>
+                      </a:pPr>
+                      <a:r>
+                        <a:rPr lang="en-US" sz="1050" b="1" dirty="0">
+                          <a:solidFill>
+                            <a:srgbClr val="9A847C"/>
+                          </a:solidFill>
+                          <a:latin typeface="Space Grotesk" pitchFamily="34" charset="0"/>
+                          <a:ea typeface="Space Grotesk" pitchFamily="34" charset="-122"/>
+                          <a:cs typeface="Space Grotesk" pitchFamily="34" charset="-120"/>
+                        </a:rPr>
+                        <a:t>n.m.</a:t>
+                      </a:r>
+                      <a:endParaRPr lang="en-US" sz="1050" dirty="0">
+                        <a:latin typeface="Space Grotesk" charset="0"/>
+                        <a:ea typeface="Space Grotesk" charset="0"/>
+                        <a:cs typeface="Space Grotesk" charset="0"/>
                       </a:endParaRPr>
                     </a:p>
                   </a:txBody>
@@ -12936,7 +13210,7 @@
                         <a:buNone/>
                       </a:pPr>
                       <a:r>
-                        <a:rPr lang="en-US" sz="950" dirty="0">
+                        <a:rPr lang="en-US" sz="850" dirty="0">
                           <a:solidFill>
                             <a:srgbClr val="6F6960"/>
                           </a:solidFill>
@@ -12944,80 +13218,12 @@
                           <a:ea typeface="IBM Plex Mono" pitchFamily="34" charset="-122"/>
                           <a:cs typeface="IBM Plex Mono" pitchFamily="34" charset="-120"/>
                         </a:rPr>
-                        <a:t>ESS 시스템</a:t>
+                        <a:t>EBITDA 적자근접</a:t>
                       </a:r>
-                      <a:endParaRPr lang="en-US" sz="950" dirty="0">
+                      <a:endParaRPr lang="en-US" sz="850" dirty="0">
                         <a:latin typeface="IBM Plex Mono" charset="0"/>
                         <a:ea typeface="IBM Plex Mono" charset="0"/>
                         <a:cs typeface="IBM Plex Mono" charset="0"/>
-                      </a:endParaRPr>
-                    </a:p>
-                  </a:txBody>
-                  <a:tcPr marL="88900" marR="88900" marT="25400" marB="25400" anchor="ctr">
-                    <a:lnL w="6350" cap="flat" cmpd="sng" algn="ctr">
-                      <a:solidFill>
-                        <a:srgbClr val="E4DED4"/>
-                      </a:solidFill>
-                      <a:prstDash val="solid"/>
-                      <a:round/>
-                      <a:headEnd type="none" w="med" len="med"/>
-                      <a:tailEnd type="none" w="med" len="med"/>
-                    </a:lnL>
-                    <a:lnR w="6350" cap="flat" cmpd="sng" algn="ctr">
-                      <a:solidFill>
-                        <a:srgbClr val="E4DED4"/>
-                      </a:solidFill>
-                      <a:prstDash val="solid"/>
-                      <a:round/>
-                      <a:headEnd type="none" w="med" len="med"/>
-                      <a:tailEnd type="none" w="med" len="med"/>
-                    </a:lnR>
-                    <a:lnT w="6350" cap="flat" cmpd="sng" algn="ctr">
-                      <a:solidFill>
-                        <a:srgbClr val="E4DED4"/>
-                      </a:solidFill>
-                      <a:prstDash val="solid"/>
-                      <a:round/>
-                      <a:headEnd type="none" w="med" len="med"/>
-                      <a:tailEnd type="none" w="med" len="med"/>
-                    </a:lnT>
-                    <a:lnB w="6350" cap="flat" cmpd="sng" algn="ctr">
-                      <a:solidFill>
-                        <a:srgbClr val="E4DED4"/>
-                      </a:solidFill>
-                      <a:prstDash val="solid"/>
-                      <a:round/>
-                      <a:headEnd type="none" w="med" len="med"/>
-                      <a:tailEnd type="none" w="med" len="med"/>
-                    </a:lnB>
-                    <a:solidFill>
-                      <a:srgbClr val="FFFFFF"/>
-                    </a:solidFill>
-                  </a:tcPr>
-                </a:tc>
-                <a:tc>
-                  <a:txBody>
-                    <a:bodyPr/>
-                    <a:lstStyle/>
-                    <a:p>
-                      <a:pPr algn="ctr" indent="0" marL="0">
-                        <a:buNone/>
-                      </a:pPr>
-                      <a:r>
-                        <a:rPr lang="en-US" sz="1100" b="1" dirty="0">
-                          <a:solidFill>
-                            <a:srgbClr val="1B1714"/>
-                          </a:solidFill>
-                          <a:latin typeface="Space Grotesk" pitchFamily="34" charset="0"/>
-                          <a:ea typeface="Space Grotesk" pitchFamily="34" charset="-122"/>
-                          <a:cs typeface="Space Grotesk" pitchFamily="34" charset="-120"/>
-                        </a:rPr>
-                        <a:t>~12x</a:t>
-                      </a:r>
-                      <a:endParaRPr lang="en-US" sz="1100" dirty="0">
-                        <a:latin typeface="Space Grotesk" charset="0"/>
-                        <a:ea typeface="Space Grotesk" charset="0"/>
-                        <a:cs typeface="Space Grotesk" charset="0"/>
                       </a:endParaRPr>
                     </a:p>
                   </a:txBody>
@@ -13138,24 +13344,24 @@
                     <a:bodyPr/>
                     <a:lstStyle/>
                     <a:p>
-                      <a:pPr indent="0" marL="0">
+                      <a:pPr algn="ctr" indent="0" marL="0">
                         <a:buNone/>
                       </a:pPr>
                       <a:r>
-                        <a:rPr lang="en-US" sz="950" dirty="0">
+                        <a:rPr lang="en-US" sz="1050" b="1" dirty="0">
                           <a:solidFill>
-                            <a:srgbClr val="6F6960"/>
+                            <a:srgbClr val="9A847C"/>
                           </a:solidFill>
-                          <a:latin typeface="IBM Plex Mono" pitchFamily="34" charset="0"/>
-                          <a:ea typeface="IBM Plex Mono" pitchFamily="34" charset="-122"/>
-                          <a:cs typeface="IBM Plex Mono" pitchFamily="34" charset="-120"/>
+                          <a:latin typeface="Space Grotesk" pitchFamily="34" charset="0"/>
+                          <a:ea typeface="Space Grotesk" pitchFamily="34" charset="-122"/>
+                          <a:cs typeface="Space Grotesk" pitchFamily="34" charset="-120"/>
                         </a:rPr>
-                        <a:t>ESS 인티그레이터</a:t>
+                        <a:t>n.m.</a:t>
                       </a:r>
-                      <a:endParaRPr lang="en-US" sz="950" dirty="0">
-                        <a:latin typeface="IBM Plex Mono" charset="0"/>
-                        <a:ea typeface="IBM Plex Mono" charset="0"/>
-                        <a:cs typeface="IBM Plex Mono" charset="0"/>
+                      <a:endParaRPr lang="en-US" sz="1050" dirty="0">
+                        <a:latin typeface="Space Grotesk" charset="0"/>
+                        <a:ea typeface="Space Grotesk" charset="0"/>
+                        <a:cs typeface="Space Grotesk" charset="0"/>
                       </a:endParaRPr>
                     </a:p>
                   </a:txBody>
@@ -13206,24 +13412,24 @@
                     <a:bodyPr/>
                     <a:lstStyle/>
                     <a:p>
-                      <a:pPr algn="ctr" indent="0" marL="0">
+                      <a:pPr indent="0" marL="0">
                         <a:buNone/>
                       </a:pPr>
                       <a:r>
-                        <a:rPr lang="en-US" sz="1100" b="1" dirty="0">
+                        <a:rPr lang="en-US" sz="850" dirty="0">
                           <a:solidFill>
-                            <a:srgbClr val="1B1714"/>
+                            <a:srgbClr val="6F6960"/>
                           </a:solidFill>
-                          <a:latin typeface="Space Grotesk" pitchFamily="34" charset="0"/>
-                          <a:ea typeface="Space Grotesk" pitchFamily="34" charset="-122"/>
-                          <a:cs typeface="Space Grotesk" pitchFamily="34" charset="-120"/>
+                          <a:latin typeface="IBM Plex Mono" pitchFamily="34" charset="0"/>
+                          <a:ea typeface="IBM Plex Mono" pitchFamily="34" charset="-122"/>
+                          <a:cs typeface="IBM Plex Mono" pitchFamily="34" charset="-120"/>
                         </a:rPr>
-                        <a:t>~11x</a:t>
+                        <a:t>adjEBITDA$40~60M</a:t>
                       </a:r>
-                      <a:endParaRPr lang="en-US" sz="1100" dirty="0">
-                        <a:latin typeface="Space Grotesk" charset="0"/>
-                        <a:ea typeface="Space Grotesk" charset="0"/>
-                        <a:cs typeface="Space Grotesk" charset="0"/>
+                      <a:endParaRPr lang="en-US" sz="850" dirty="0">
+                        <a:latin typeface="IBM Plex Mono" charset="0"/>
+                        <a:ea typeface="IBM Plex Mono" charset="0"/>
+                        <a:cs typeface="IBM Plex Mono" charset="0"/>
                       </a:endParaRPr>
                     </a:p>
                   </a:txBody>
@@ -13270,7 +13476,7 @@
                   </a:tcPr>
                 </a:tc>
               </a:tr>
-              <a:tr h="365760">
+              <a:tr h="384048">
                 <a:tc>
                   <a:txBody>
                     <a:bodyPr/>
@@ -13288,7 +13494,7 @@
                           <a:ea typeface="IBM Plex Sans KR" pitchFamily="34" charset="-122"/>
                           <a:cs typeface="IBM Plex Sans KR" pitchFamily="34" charset="-120"/>
                         </a:rPr>
-                        <a:t>LG에너지솔루션</a:t>
+                        <a:t>정상화(mid-cycle)</a:t>
                       </a:r>
                       <a:endParaRPr lang="en-US" sz="950" dirty="0">
                         <a:latin typeface="IBM Plex Sans KR" charset="0"/>
@@ -13335,7 +13541,75 @@
                       <a:tailEnd type="none" w="med" len="med"/>
                     </a:lnB>
                     <a:solidFill>
-                      <a:srgbClr val="FFFFFF"/>
+                      <a:srgbClr val="E8F3EC"/>
+                    </a:solidFill>
+                  </a:tcPr>
+                </a:tc>
+                <a:tc>
+                  <a:txBody>
+                    <a:bodyPr/>
+                    <a:lstStyle/>
+                    <a:p>
+                      <a:pPr algn="ctr" indent="0" marL="0">
+                        <a:buNone/>
+                      </a:pPr>
+                      <a:r>
+                        <a:rPr lang="en-US" sz="1050" b="1" dirty="0">
+                          <a:solidFill>
+                            <a:srgbClr val="1E7A4D"/>
+                          </a:solidFill>
+                          <a:latin typeface="Space Grotesk" pitchFamily="34" charset="0"/>
+                          <a:ea typeface="Space Grotesk" pitchFamily="34" charset="-122"/>
+                          <a:cs typeface="Space Grotesk" pitchFamily="34" charset="-120"/>
+                        </a:rPr>
+                        <a:t>13~15x</a:t>
+                      </a:r>
+                      <a:endParaRPr lang="en-US" sz="1050" dirty="0">
+                        <a:latin typeface="Space Grotesk" charset="0"/>
+                        <a:ea typeface="Space Grotesk" charset="0"/>
+                        <a:cs typeface="Space Grotesk" charset="0"/>
+                      </a:endParaRPr>
+                    </a:p>
+                  </a:txBody>
+                  <a:tcPr marL="88900" marR="88900" marT="25400" marB="25400" anchor="ctr">
+                    <a:lnL w="6350" cap="flat" cmpd="sng" algn="ctr">
+                      <a:solidFill>
+                        <a:srgbClr val="E4DED4"/>
+                      </a:solidFill>
+                      <a:prstDash val="solid"/>
+                      <a:round/>
+                      <a:headEnd type="none" w="med" len="med"/>
+                      <a:tailEnd type="none" w="med" len="med"/>
+                    </a:lnL>
+                    <a:lnR w="6350" cap="flat" cmpd="sng" algn="ctr">
+                      <a:solidFill>
+                        <a:srgbClr val="E4DED4"/>
+                      </a:solidFill>
+                      <a:prstDash val="solid"/>
+                      <a:round/>
+                      <a:headEnd type="none" w="med" len="med"/>
+                      <a:tailEnd type="none" w="med" len="med"/>
+                    </a:lnR>
+                    <a:lnT w="6350" cap="flat" cmpd="sng" algn="ctr">
+                      <a:solidFill>
+                        <a:srgbClr val="E4DED4"/>
+                      </a:solidFill>
+                      <a:prstDash val="solid"/>
+                      <a:round/>
+                      <a:headEnd type="none" w="med" len="med"/>
+                      <a:tailEnd type="none" w="med" len="med"/>
+                    </a:lnT>
+                    <a:lnB w="6350" cap="flat" cmpd="sng" algn="ctr">
+                      <a:solidFill>
+                        <a:srgbClr val="E4DED4"/>
+                      </a:solidFill>
+                      <a:prstDash val="solid"/>
+                      <a:round/>
+                      <a:headEnd type="none" w="med" len="med"/>
+                      <a:tailEnd type="none" w="med" len="med"/>
+                    </a:lnB>
+                    <a:solidFill>
+                      <a:srgbClr val="E8F3EC"/>
                     </a:solidFill>
                   </a:tcPr>
                 </a:tc>
@@ -13348,7 +13622,7 @@
                         <a:buNone/>
                       </a:pPr>
                       <a:r>
-                        <a:rPr lang="en-US" sz="950" dirty="0">
+                        <a:rPr lang="en-US" sz="850" dirty="0">
                           <a:solidFill>
                             <a:srgbClr val="6F6960"/>
                           </a:solidFill>
@@ -13356,9 +13630,9 @@
                           <a:ea typeface="IBM Plex Mono" pitchFamily="34" charset="-122"/>
                           <a:cs typeface="IBM Plex Mono" pitchFamily="34" charset="-120"/>
                         </a:rPr>
-                        <a:t>셀</a:t>
+                        <a:t>← 비교 기준</a:t>
                       </a:r>
-                      <a:endParaRPr lang="en-US" sz="950" dirty="0">
+                      <a:endParaRPr lang="en-US" sz="850" dirty="0">
                         <a:latin typeface="IBM Plex Mono" charset="0"/>
                         <a:ea typeface="IBM Plex Mono" charset="0"/>
                         <a:cs typeface="IBM Plex Mono" charset="0"/>
@@ -13403,80 +13677,12 @@
                       <a:tailEnd type="none" w="med" len="med"/>
                     </a:lnB>
                     <a:solidFill>
-                      <a:srgbClr val="FFFFFF"/>
-                    </a:solidFill>
-                  </a:tcPr>
-                </a:tc>
-                <a:tc>
-                  <a:txBody>
-                    <a:bodyPr/>
-                    <a:lstStyle/>
-                    <a:p>
-                      <a:pPr algn="ctr" indent="0" marL="0">
-                        <a:buNone/>
-                      </a:pPr>
-                      <a:r>
-                        <a:rPr lang="en-US" sz="1100" b="1" dirty="0">
-                          <a:solidFill>
-                            <a:srgbClr val="1B1714"/>
-                          </a:solidFill>
-                          <a:latin typeface="Space Grotesk" pitchFamily="34" charset="0"/>
-                          <a:ea typeface="Space Grotesk" pitchFamily="34" charset="-122"/>
-                          <a:cs typeface="Space Grotesk" pitchFamily="34" charset="-120"/>
-                        </a:rPr>
-                        <a:t>~10x</a:t>
-                      </a:r>
-                      <a:endParaRPr lang="en-US" sz="1100" dirty="0">
-                        <a:latin typeface="Space Grotesk" charset="0"/>
-                        <a:ea typeface="Space Grotesk" charset="0"/>
-                        <a:cs typeface="Space Grotesk" charset="0"/>
-                      </a:endParaRPr>
-                    </a:p>
-                  </a:txBody>
-                  <a:tcPr marL="88900" marR="88900" marT="25400" marB="25400" anchor="ctr">
-                    <a:lnL w="6350" cap="flat" cmpd="sng" algn="ctr">
-                      <a:solidFill>
-                        <a:srgbClr val="E4DED4"/>
-                      </a:solidFill>
-                      <a:prstDash val="solid"/>
-                      <a:round/>
-                      <a:headEnd type="none" w="med" len="med"/>
-                      <a:tailEnd type="none" w="med" len="med"/>
-                    </a:lnL>
-                    <a:lnR w="6350" cap="flat" cmpd="sng" algn="ctr">
-                      <a:solidFill>
-                        <a:srgbClr val="E4DED4"/>
-                      </a:solidFill>
-                      <a:prstDash val="solid"/>
-                      <a:round/>
-                      <a:headEnd type="none" w="med" len="med"/>
-                      <a:tailEnd type="none" w="med" len="med"/>
-                    </a:lnR>
-                    <a:lnT w="6350" cap="flat" cmpd="sng" algn="ctr">
-                      <a:solidFill>
-                        <a:srgbClr val="E4DED4"/>
-                      </a:solidFill>
-                      <a:prstDash val="solid"/>
-                      <a:round/>
-                      <a:headEnd type="none" w="med" len="med"/>
-                      <a:tailEnd type="none" w="med" len="med"/>
-                    </a:lnT>
-                    <a:lnB w="6350" cap="flat" cmpd="sng" algn="ctr">
-                      <a:solidFill>
-                        <a:srgbClr val="E4DED4"/>
-                      </a:solidFill>
-                      <a:prstDash val="solid"/>
-                      <a:round/>
-                      <a:headEnd type="none" w="med" len="med"/>
-                      <a:tailEnd type="none" w="med" len="med"/>
-                    </a:lnB>
-                    <a:solidFill>
-                      <a:srgbClr val="FFFFFF"/>
+                      <a:srgbClr val="E8F3EC"/>
                     </a:solidFill>
                   </a:tcPr>
                 </a:tc>
               </a:tr>
-              <a:tr h="365760">
+              <a:tr h="384048">
                 <a:tc>
                   <a:txBody>
                     <a:bodyPr/>
@@ -13494,7 +13700,7 @@
                           <a:ea typeface="IBM Plex Sans KR" pitchFamily="34" charset="-122"/>
                           <a:cs typeface="IBM Plex Sans KR" pitchFamily="34" charset="-120"/>
                         </a:rPr>
-                        <a:t>삼성SDI</a:t>
+                        <a:t>보수(장기) 가정</a:t>
                       </a:r>
                       <a:endParaRPr lang="en-US" sz="950" dirty="0">
                         <a:latin typeface="IBM Plex Sans KR" charset="0"/>
@@ -13541,75 +13747,7 @@
                       <a:tailEnd type="none" w="med" len="med"/>
                     </a:lnB>
                     <a:solidFill>
-                      <a:srgbClr val="FFFFFF"/>
-                    </a:solidFill>
-                  </a:tcPr>
-                </a:tc>
-                <a:tc>
-                  <a:txBody>
-                    <a:bodyPr/>
-                    <a:lstStyle/>
-                    <a:p>
-                      <a:pPr indent="0" marL="0">
-                        <a:buNone/>
-                      </a:pPr>
-                      <a:r>
-                        <a:rPr lang="en-US" sz="950" dirty="0">
-                          <a:solidFill>
-                            <a:srgbClr val="6F6960"/>
-                          </a:solidFill>
-                          <a:latin typeface="IBM Plex Mono" pitchFamily="34" charset="0"/>
-                          <a:ea typeface="IBM Plex Mono" pitchFamily="34" charset="-122"/>
-                          <a:cs typeface="IBM Plex Mono" pitchFamily="34" charset="-120"/>
-                        </a:rPr>
-                        <a:t>셀</a:t>
-                      </a:r>
-                      <a:endParaRPr lang="en-US" sz="950" dirty="0">
-                        <a:latin typeface="IBM Plex Mono" charset="0"/>
-                        <a:ea typeface="IBM Plex Mono" charset="0"/>
-                        <a:cs typeface="IBM Plex Mono" charset="0"/>
-                      </a:endParaRPr>
-                    </a:p>
-                  </a:txBody>
-                  <a:tcPr marL="88900" marR="88900" marT="25400" marB="25400" anchor="ctr">
-                    <a:lnL w="6350" cap="flat" cmpd="sng" algn="ctr">
-                      <a:solidFill>
-                        <a:srgbClr val="E4DED4"/>
-                      </a:solidFill>
-                      <a:prstDash val="solid"/>
-                      <a:round/>
-                      <a:headEnd type="none" w="med" len="med"/>
-                      <a:tailEnd type="none" w="med" len="med"/>
-                    </a:lnL>
-                    <a:lnR w="6350" cap="flat" cmpd="sng" algn="ctr">
-                      <a:solidFill>
-                        <a:srgbClr val="E4DED4"/>
-                      </a:solidFill>
-                      <a:prstDash val="solid"/>
-                      <a:round/>
-                      <a:headEnd type="none" w="med" len="med"/>
-                      <a:tailEnd type="none" w="med" len="med"/>
-                    </a:lnR>
-                    <a:lnT w="6350" cap="flat" cmpd="sng" algn="ctr">
-                      <a:solidFill>
-                        <a:srgbClr val="E4DED4"/>
-                      </a:solidFill>
-                      <a:prstDash val="solid"/>
-                      <a:round/>
-                      <a:headEnd type="none" w="med" len="med"/>
-                      <a:tailEnd type="none" w="med" len="med"/>
-                    </a:lnT>
-                    <a:lnB w="6350" cap="flat" cmpd="sng" algn="ctr">
-                      <a:solidFill>
-                        <a:srgbClr val="E4DED4"/>
-                      </a:solidFill>
-                      <a:prstDash val="solid"/>
-                      <a:round/>
-                      <a:headEnd type="none" w="med" len="med"/>
-                      <a:tailEnd type="none" w="med" len="med"/>
-                    </a:lnB>
-                    <a:solidFill>
-                      <a:srgbClr val="FFFFFF"/>
+                      <a:srgbClr val="F2ECE0"/>
                     </a:solidFill>
                   </a:tcPr>
                 </a:tc>
@@ -13622,90 +13760,20 @@
                         <a:buNone/>
                       </a:pPr>
                       <a:r>
-                        <a:rPr lang="en-US" sz="1100" b="1" dirty="0">
+                        <a:rPr lang="en-US" sz="1050" b="1" dirty="0">
                           <a:solidFill>
-                            <a:srgbClr val="1B1714"/>
+                            <a:srgbClr val="6F6960"/>
                           </a:solidFill>
                           <a:latin typeface="Space Grotesk" pitchFamily="34" charset="0"/>
                           <a:ea typeface="Space Grotesk" pitchFamily="34" charset="-122"/>
                           <a:cs typeface="Space Grotesk" pitchFamily="34" charset="-120"/>
                         </a:rPr>
-                        <a:t>~9x</a:t>
+                        <a:t>8~13x</a:t>
                       </a:r>
-                      <a:endParaRPr lang="en-US" sz="1100" dirty="0">
+                      <a:endParaRPr lang="en-US" sz="1050" dirty="0">
                         <a:latin typeface="Space Grotesk" charset="0"/>
                         <a:ea typeface="Space Grotesk" charset="0"/>
                         <a:cs typeface="Space Grotesk" charset="0"/>
-                      </a:endParaRPr>
-                    </a:p>
-                  </a:txBody>
-                  <a:tcPr marL="88900" marR="88900" marT="25400" marB="25400" anchor="ctr">
-                    <a:lnL w="6350" cap="flat" cmpd="sng" algn="ctr">
-                      <a:solidFill>
-                        <a:srgbClr val="E4DED4"/>
-                      </a:solidFill>
-                      <a:prstDash val="solid"/>
-                      <a:round/>
-                      <a:headEnd type="none" w="med" len="med"/>
-                      <a:tailEnd type="none" w="med" len="med"/>
-                    </a:lnL>
-                    <a:lnR w="6350" cap="flat" cmpd="sng" algn="ctr">
-                      <a:solidFill>
-                        <a:srgbClr val="E4DED4"/>
-                      </a:solidFill>
-                      <a:prstDash val="solid"/>
-                      <a:round/>
-                      <a:headEnd type="none" w="med" len="med"/>
-                      <a:tailEnd type="none" w="med" len="med"/>
-                    </a:lnR>
-                    <a:lnT w="6350" cap="flat" cmpd="sng" algn="ctr">
-                      <a:solidFill>
-                        <a:srgbClr val="E4DED4"/>
-                      </a:solidFill>
-                      <a:prstDash val="solid"/>
-                      <a:round/>
-                      <a:headEnd type="none" w="med" len="med"/>
-                      <a:tailEnd type="none" w="med" len="med"/>
-                    </a:lnT>
-                    <a:lnB w="6350" cap="flat" cmpd="sng" algn="ctr">
-                      <a:solidFill>
-                        <a:srgbClr val="E4DED4"/>
-                      </a:solidFill>
-                      <a:prstDash val="solid"/>
-                      <a:round/>
-                      <a:headEnd type="none" w="med" len="med"/>
-                      <a:tailEnd type="none" w="med" len="med"/>
-                    </a:lnB>
-                    <a:solidFill>
-                      <a:srgbClr val="FFFFFF"/>
-                    </a:solidFill>
-                  </a:tcPr>
-                </a:tc>
-              </a:tr>
-              <a:tr h="420624">
-                <a:tc>
-                  <a:txBody>
-                    <a:bodyPr/>
-                    <a:lstStyle/>
-                    <a:p>
-                      <a:pPr indent="0" marL="0">
-                        <a:buNone/>
-                      </a:pPr>
-                      <a:r>
-                        <a:rPr lang="en-US" sz="950" dirty="0">
-                          <a:solidFill>
-                            <a:srgbClr val="1B1714"/>
-                          </a:solidFill>
-                          <a:latin typeface="IBM Plex Sans KR" pitchFamily="34" charset="0"/>
-                          <a:ea typeface="IBM Plex Sans KR" pitchFamily="34" charset="-122"/>
-                          <a:cs typeface="IBM Plex Sans KR" pitchFamily="34" charset="-120"/>
-                        </a:rPr>
-                        <a:t>Peer 밴드 (적용)</a:t>
-                      </a:r>
-                      <a:endParaRPr lang="en-US" sz="950" dirty="0">
-                        <a:latin typeface="IBM Plex Sans KR" charset="0"/>
-                        <a:ea typeface="IBM Plex Sans KR" charset="0"/>
-                        <a:cs typeface="IBM Plex Sans KR" charset="0"/>
                       </a:endParaRPr>
                     </a:p>
                   </a:txBody>
@@ -13760,7 +13828,7 @@
                         <a:buNone/>
                       </a:pPr>
                       <a:r>
-                        <a:rPr lang="en-US" sz="950" dirty="0">
+                        <a:rPr lang="en-US" sz="850" dirty="0">
                           <a:solidFill>
                             <a:srgbClr val="6F6960"/>
                           </a:solidFill>
@@ -13768,80 +13836,12 @@
                           <a:ea typeface="IBM Plex Mono" pitchFamily="34" charset="-122"/>
                           <a:cs typeface="IBM Plex Mono" pitchFamily="34" charset="-120"/>
                         </a:rPr>
-                        <a:t>forward</a:t>
+                        <a:t>floor</a:t>
                       </a:r>
-                      <a:endParaRPr lang="en-US" sz="950" dirty="0">
+                      <a:endParaRPr lang="en-US" sz="850" dirty="0">
                         <a:latin typeface="IBM Plex Mono" charset="0"/>
                         <a:ea typeface="IBM Plex Mono" charset="0"/>
                         <a:cs typeface="IBM Plex Mono" charset="0"/>
-                      </a:endParaRPr>
-                    </a:p>
-                  </a:txBody>
-                  <a:tcPr marL="88900" marR="88900" marT="25400" marB="25400" anchor="ctr">
-                    <a:lnL w="6350" cap="flat" cmpd="sng" algn="ctr">
-                      <a:solidFill>
-                        <a:srgbClr val="E4DED4"/>
-                      </a:solidFill>
-                      <a:prstDash val="solid"/>
-                      <a:round/>
-                      <a:headEnd type="none" w="med" len="med"/>
-                      <a:tailEnd type="none" w="med" len="med"/>
-                    </a:lnL>
-                    <a:lnR w="6350" cap="flat" cmpd="sng" algn="ctr">
-                      <a:solidFill>
-                        <a:srgbClr val="E4DED4"/>
-                      </a:solidFill>
-                      <a:prstDash val="solid"/>
-                      <a:round/>
-                      <a:headEnd type="none" w="med" len="med"/>
-                      <a:tailEnd type="none" w="med" len="med"/>
-                    </a:lnR>
-                    <a:lnT w="6350" cap="flat" cmpd="sng" algn="ctr">
-                      <a:solidFill>
-                        <a:srgbClr val="E4DED4"/>
-                      </a:solidFill>
-                      <a:prstDash val="solid"/>
-                      <a:round/>
-                      <a:headEnd type="none" w="med" len="med"/>
-                      <a:tailEnd type="none" w="med" len="med"/>
-                    </a:lnT>
-                    <a:lnB w="6350" cap="flat" cmpd="sng" algn="ctr">
-                      <a:solidFill>
-                        <a:srgbClr val="E4DED4"/>
-                      </a:solidFill>
-                      <a:prstDash val="solid"/>
-                      <a:round/>
-                      <a:headEnd type="none" w="med" len="med"/>
-                      <a:tailEnd type="none" w="med" len="med"/>
-                    </a:lnB>
-                    <a:solidFill>
-                      <a:srgbClr val="F2ECE0"/>
-                    </a:solidFill>
-                  </a:tcPr>
-                </a:tc>
-                <a:tc>
-                  <a:txBody>
-                    <a:bodyPr/>
-                    <a:lstStyle/>
-                    <a:p>
-                      <a:pPr algn="ctr" indent="0" marL="0">
-                        <a:buNone/>
-                      </a:pPr>
-                      <a:r>
-                        <a:rPr lang="en-US" sz="1100" b="1" dirty="0">
-                          <a:solidFill>
-                            <a:srgbClr val="C1121F"/>
-                          </a:solidFill>
-                          <a:latin typeface="Space Grotesk" pitchFamily="34" charset="0"/>
-                          <a:ea typeface="Space Grotesk" pitchFamily="34" charset="-122"/>
-                          <a:cs typeface="Space Grotesk" pitchFamily="34" charset="-120"/>
-                        </a:rPr>
-                        <a:t>8~13x</a:t>
-                      </a:r>
-                      <a:endParaRPr lang="en-US" sz="1100" dirty="0">
-                        <a:latin typeface="Space Grotesk" charset="0"/>
-                        <a:ea typeface="Space Grotesk" charset="0"/>
-                        <a:cs typeface="Space Grotesk" charset="0"/>
                       </a:endParaRPr>
                     </a:p>
                   </a:txBody>
@@ -13900,8 +13900,8 @@
         </p:nvSpPr>
         <p:spPr>
           <a:xfrm>
-            <a:off x="566928" y="4590288"/>
-            <a:ext cx="4572000" cy="310896"/>
+            <a:off x="566928" y="4480560"/>
+            <a:ext cx="4572000" cy="384048"/>
           </a:xfrm>
           <a:prstGeom prst="rect">
             <a:avLst/>
@@ -13928,7 +13928,7 @@
                 <a:ea typeface="IBM Plex Sans KR" pitchFamily="34" charset="-122"/>
                 <a:cs typeface="IBM Plex Sans KR" pitchFamily="34" charset="-120"/>
               </a:rPr>
-              <a:t>★ 증권사 추정 forward · peer EBITDA엔 AMPC 포함 → 우리는 ex-AMPC(보수적, apples-to-apples 아님)</a:t>
+              <a:t>★ 현재 forward는 EV 다운사이클로 EBITDA 트로프 → 15~27x까지 상승(LGES 26x'25F), '27F 정상화 ~13~15x. peer EBITDA엔 자체 보조금 포함(우리 ex-AMPC=보수적). 출처: 증권사·stockanalysis·gurufocus '26.7</a:t>
             </a:r>
             <a:endParaRPr lang="en-US" sz="750" dirty="0"/>
           </a:p>
@@ -13967,7 +13967,7 @@
                 <a:ea typeface="IBM Plex Mono" pitchFamily="34" charset="-122"/>
                 <a:cs typeface="IBM Plex Mono" pitchFamily="34" charset="-120"/>
               </a:rPr>
-              <a:t>우리 EBITDA 적용 · IMPLIED (× $554mm)</a:t>
+              <a:t>우리 멀티플 · EBITDA 기준별 (분모 민감도)</a:t>
             </a:r>
             <a:endParaRPr lang="en-US" sz="850" dirty="0"/>
           </a:p>
@@ -13996,9 +13996,10 @@
             <a:tbl>
               <a:tblPr/>
               <a:tblGrid>
-                <a:gridCol w="1051560"/>
                 <a:gridCol w="1417320"/>
-                <a:gridCol w="2148840"/>
+                <a:gridCol w="868680"/>
+                <a:gridCol w="914400"/>
+                <a:gridCol w="1417320"/>
               </a:tblGrid>
               <a:tr h="457200">
                 <a:tc>
@@ -14006,11 +14007,11 @@
                     <a:bodyPr/>
                     <a:lstStyle/>
                     <a:p>
-                      <a:pPr algn="ctr" indent="0" marL="0">
+                      <a:pPr algn="l" indent="0" marL="0">
                         <a:buNone/>
                       </a:pPr>
                       <a:r>
-                        <a:rPr lang="en-US" sz="900" b="1" dirty="0">
+                        <a:rPr lang="en-US" sz="850" b="1" dirty="0">
                           <a:solidFill>
                             <a:srgbClr val="FFFFFF"/>
                           </a:solidFill>
@@ -14018,16 +14019,16 @@
                           <a:ea typeface="IBM Plex Sans KR" pitchFamily="34" charset="-122"/>
                           <a:cs typeface="IBM Plex Sans KR" pitchFamily="34" charset="-120"/>
                         </a:rPr>
-                        <a:t>멀티플</a:t>
+                        <a:t>EBITDA 기준</a:t>
                       </a:r>
-                      <a:endParaRPr lang="en-US" sz="900" dirty="0">
+                      <a:endParaRPr lang="en-US" sz="850" dirty="0">
                         <a:latin typeface="IBM Plex Sans KR" charset="0"/>
                         <a:ea typeface="IBM Plex Sans KR" charset="0"/>
                         <a:cs typeface="IBM Plex Sans KR" charset="0"/>
                       </a:endParaRPr>
                     </a:p>
                   </a:txBody>
-                  <a:tcPr marL="76200" marR="76200" marT="25400" marB="25400" anchor="ctr">
+                  <a:tcPr marL="63500" marR="63500" marT="25400" marB="25400" anchor="ctr">
                     <a:lnL w="6350" cap="flat" cmpd="sng" algn="ctr">
                       <a:solidFill>
                         <a:srgbClr val="E4DED4"/>
@@ -14078,7 +14079,7 @@
                         <a:buNone/>
                       </a:pPr>
                       <a:r>
-                        <a:rPr lang="en-US" sz="900" b="1" dirty="0">
+                        <a:rPr lang="en-US" sz="850" b="1" dirty="0">
                           <a:solidFill>
                             <a:srgbClr val="FFFFFF"/>
                           </a:solidFill>
@@ -14086,16 +14087,16 @@
                           <a:ea typeface="IBM Plex Sans KR" pitchFamily="34" charset="-122"/>
                           <a:cs typeface="IBM Plex Sans KR" pitchFamily="34" charset="-120"/>
                         </a:rPr>
-                        <a:t>내재 EV</a:t>
+                        <a:t>금액</a:t>
                       </a:r>
-                      <a:endParaRPr lang="en-US" sz="900" dirty="0">
+                      <a:endParaRPr lang="en-US" sz="850" dirty="0">
                         <a:latin typeface="IBM Plex Sans KR" charset="0"/>
                         <a:ea typeface="IBM Plex Sans KR" charset="0"/>
                         <a:cs typeface="IBM Plex Sans KR" charset="0"/>
                       </a:endParaRPr>
                     </a:p>
                   </a:txBody>
-                  <a:tcPr marL="76200" marR="76200" marT="25400" marB="25400" anchor="ctr">
+                  <a:tcPr marL="63500" marR="63500" marT="25400" marB="25400" anchor="ctr">
                     <a:lnL w="6350" cap="flat" cmpd="sng" algn="ctr">
                       <a:solidFill>
                         <a:srgbClr val="E4DED4"/>
@@ -14146,7 +14147,7 @@
                         <a:buNone/>
                       </a:pPr>
                       <a:r>
-                        <a:rPr lang="en-US" sz="900" b="1" dirty="0">
+                        <a:rPr lang="en-US" sz="850" b="1" dirty="0">
                           <a:solidFill>
                             <a:srgbClr val="FFFFFF"/>
                           </a:solidFill>
@@ -14154,9 +14155,77 @@
                           <a:ea typeface="IBM Plex Sans KR" pitchFamily="34" charset="-122"/>
                           <a:cs typeface="IBM Plex Sans KR" pitchFamily="34" charset="-120"/>
                         </a:rPr>
-                        <a:t>내재 지분가치</a:t>
+                        <a:t>DCF 내재</a:t>
                       </a:r>
-                      <a:endParaRPr lang="en-US" sz="900" dirty="0">
+                      <a:endParaRPr lang="en-US" sz="850" dirty="0">
+                        <a:latin typeface="IBM Plex Sans KR" charset="0"/>
+                        <a:ea typeface="IBM Plex Sans KR" charset="0"/>
+                        <a:cs typeface="IBM Plex Sans KR" charset="0"/>
+                      </a:endParaRPr>
+                    </a:p>
+                  </a:txBody>
+                  <a:tcPr marL="63500" marR="63500" marT="25400" marB="25400" anchor="ctr">
+                    <a:lnL w="6350" cap="flat" cmpd="sng" algn="ctr">
+                      <a:solidFill>
+                        <a:srgbClr val="E4DED4"/>
+                      </a:solidFill>
+                      <a:prstDash val="solid"/>
+                      <a:round/>
+                      <a:headEnd type="none" w="med" len="med"/>
+                      <a:tailEnd type="none" w="med" len="med"/>
+                    </a:lnL>
+                    <a:lnR w="6350" cap="flat" cmpd="sng" algn="ctr">
+                      <a:solidFill>
+                        <a:srgbClr val="E4DED4"/>
+                      </a:solidFill>
+                      <a:prstDash val="solid"/>
+                      <a:round/>
+                      <a:headEnd type="none" w="med" len="med"/>
+                      <a:tailEnd type="none" w="med" len="med"/>
+                    </a:lnR>
+                    <a:lnT w="6350" cap="flat" cmpd="sng" algn="ctr">
+                      <a:solidFill>
+                        <a:srgbClr val="E4DED4"/>
+                      </a:solidFill>
+                      <a:prstDash val="solid"/>
+                      <a:round/>
+                      <a:headEnd type="none" w="med" len="med"/>
+                      <a:tailEnd type="none" w="med" len="med"/>
+                    </a:lnT>
+                    <a:lnB w="6350" cap="flat" cmpd="sng" algn="ctr">
+                      <a:solidFill>
+                        <a:srgbClr val="E4DED4"/>
+                      </a:solidFill>
+                      <a:prstDash val="solid"/>
+                      <a:round/>
+                      <a:headEnd type="none" w="med" len="med"/>
+                      <a:tailEnd type="none" w="med" len="med"/>
+                    </a:lnB>
+                    <a:solidFill>
+                      <a:srgbClr val="1B1714"/>
+                    </a:solidFill>
+                  </a:tcPr>
+                </a:tc>
+                <a:tc>
+                  <a:txBody>
+                    <a:bodyPr/>
+                    <a:lstStyle/>
+                    <a:p>
+                      <a:pPr algn="ctr" indent="0" marL="0">
+                        <a:buNone/>
+                      </a:pPr>
+                      <a:r>
+                        <a:rPr lang="en-US" sz="850" b="1" dirty="0">
+                          <a:solidFill>
+                            <a:srgbClr val="FFFFFF"/>
+                          </a:solidFill>
+                          <a:latin typeface="IBM Plex Sans KR" pitchFamily="34" charset="0"/>
+                          <a:ea typeface="IBM Plex Sans KR" pitchFamily="34" charset="-122"/>
+                          <a:cs typeface="IBM Plex Sans KR" pitchFamily="34" charset="-120"/>
+                        </a:rPr>
+                        <a:t>역산 필요</a:t>
+                      </a:r>
+                      <a:endParaRPr lang="en-US" sz="850" dirty="0">
                         <a:latin typeface="IBM Plex Sans KR" charset="0"/>
                         <a:ea typeface="IBM Plex Sans KR" charset="0"/>
                         <a:cs typeface="IBM Plex Sans KR" charset="0"/>
@@ -14167,7 +14236,7 @@
                         <a:buNone/>
                       </a:pPr>
                       <a:r>
-                        <a:rPr lang="en-US" sz="900" b="1" dirty="0">
+                        <a:rPr lang="en-US" sz="850" b="1" dirty="0">
                           <a:solidFill>
                             <a:srgbClr val="FFFFFF"/>
                           </a:solidFill>
@@ -14175,16 +14244,16 @@
                           <a:ea typeface="IBM Plex Sans KR" pitchFamily="34" charset="-122"/>
                           <a:cs typeface="IBM Plex Sans KR" pitchFamily="34" charset="-120"/>
                         </a:rPr>
-                        <a:t>(−순차입 $6.4bn)</a:t>
+                        <a:t>(BASE→최대)</a:t>
                       </a:r>
-                      <a:endParaRPr lang="en-US" sz="900" dirty="0">
+                      <a:endParaRPr lang="en-US" sz="850" dirty="0">
                         <a:latin typeface="IBM Plex Sans KR" charset="0"/>
                         <a:ea typeface="IBM Plex Sans KR" charset="0"/>
                         <a:cs typeface="IBM Plex Sans KR" charset="0"/>
                       </a:endParaRPr>
                     </a:p>
                   </a:txBody>
-                  <a:tcPr marL="76200" marR="76200" marT="25400" marB="25400" anchor="ctr">
+                  <a:tcPr marL="63500" marR="63500" marT="25400" marB="25400" anchor="ctr">
                     <a:lnL w="6350" cap="flat" cmpd="sng" algn="ctr">
                       <a:solidFill>
                         <a:srgbClr val="E4DED4"/>
@@ -14227,7 +14296,75 @@
                   </a:tcPr>
                 </a:tc>
               </a:tr>
-              <a:tr h="475488">
+              <a:tr h="566928">
+                <a:tc>
+                  <a:txBody>
+                    <a:bodyPr/>
+                    <a:lstStyle/>
+                    <a:p>
+                      <a:pPr indent="0" marL="0">
+                        <a:buNone/>
+                      </a:pPr>
+                      <a:r>
+                        <a:rPr lang="en-US" sz="950" b="1" dirty="0">
+                          <a:solidFill>
+                            <a:srgbClr val="1B1714"/>
+                          </a:solidFill>
+                          <a:latin typeface="IBM Plex Sans KR" pitchFamily="34" charset="0"/>
+                          <a:ea typeface="IBM Plex Sans KR" pitchFamily="34" charset="-122"/>
+                          <a:cs typeface="IBM Plex Sans KR" pitchFamily="34" charset="-120"/>
+                        </a:rPr>
+                        <a:t>run-rate 30~32</a:t>
+                      </a:r>
+                      <a:endParaRPr lang="en-US" sz="950" dirty="0">
+                        <a:latin typeface="IBM Plex Sans KR" charset="0"/>
+                        <a:ea typeface="IBM Plex Sans KR" charset="0"/>
+                        <a:cs typeface="IBM Plex Sans KR" charset="0"/>
+                      </a:endParaRPr>
+                    </a:p>
+                  </a:txBody>
+                  <a:tcPr marL="63500" marR="63500" marT="25400" marB="25400" anchor="ctr">
+                    <a:lnL w="6350" cap="flat" cmpd="sng" algn="ctr">
+                      <a:solidFill>
+                        <a:srgbClr val="E4DED4"/>
+                      </a:solidFill>
+                      <a:prstDash val="solid"/>
+                      <a:round/>
+                      <a:headEnd type="none" w="med" len="med"/>
+                      <a:tailEnd type="none" w="med" len="med"/>
+                    </a:lnL>
+                    <a:lnR w="6350" cap="flat" cmpd="sng" algn="ctr">
+                      <a:solidFill>
+                        <a:srgbClr val="E4DED4"/>
+                      </a:solidFill>
+                      <a:prstDash val="solid"/>
+                      <a:round/>
+                      <a:headEnd type="none" w="med" len="med"/>
+                      <a:tailEnd type="none" w="med" len="med"/>
+                    </a:lnR>
+                    <a:lnT w="6350" cap="flat" cmpd="sng" algn="ctr">
+                      <a:solidFill>
+                        <a:srgbClr val="E4DED4"/>
+                      </a:solidFill>
+                      <a:prstDash val="solid"/>
+                      <a:round/>
+                      <a:headEnd type="none" w="med" len="med"/>
+                      <a:tailEnd type="none" w="med" len="med"/>
+                    </a:lnT>
+                    <a:lnB w="6350" cap="flat" cmpd="sng" algn="ctr">
+                      <a:solidFill>
+                        <a:srgbClr val="E4DED4"/>
+                      </a:solidFill>
+                      <a:prstDash val="solid"/>
+                      <a:round/>
+                      <a:headEnd type="none" w="med" len="med"/>
+                      <a:tailEnd type="none" w="med" len="med"/>
+                    </a:lnB>
+                    <a:solidFill>
+                      <a:srgbClr val="E8F3EC"/>
+                    </a:solidFill>
+                  </a:tcPr>
+                </a:tc>
                 <a:tc>
                   <a:txBody>
                     <a:bodyPr/>
@@ -14237,24 +14374,230 @@
                         <a:buNone/>
                       </a:pPr>
                       <a:r>
-                        <a:rPr lang="en-US" sz="1200" b="1" dirty="0">
+                        <a:rPr lang="en-US" sz="950" dirty="0">
                           <a:solidFill>
                             <a:srgbClr val="1B1714"/>
+                          </a:solidFill>
+                          <a:latin typeface="IBM Plex Mono" pitchFamily="34" charset="0"/>
+                          <a:ea typeface="IBM Plex Mono" pitchFamily="34" charset="-122"/>
+                          <a:cs typeface="IBM Plex Mono" pitchFamily="34" charset="-120"/>
+                        </a:rPr>
+                        <a:t>$554mm</a:t>
+                      </a:r>
+                      <a:endParaRPr lang="en-US" sz="950" dirty="0">
+                        <a:latin typeface="IBM Plex Mono" charset="0"/>
+                        <a:ea typeface="IBM Plex Mono" charset="0"/>
+                        <a:cs typeface="IBM Plex Mono" charset="0"/>
+                      </a:endParaRPr>
+                    </a:p>
+                  </a:txBody>
+                  <a:tcPr marL="63500" marR="63500" marT="25400" marB="25400" anchor="ctr">
+                    <a:lnL w="6350" cap="flat" cmpd="sng" algn="ctr">
+                      <a:solidFill>
+                        <a:srgbClr val="E4DED4"/>
+                      </a:solidFill>
+                      <a:prstDash val="solid"/>
+                      <a:round/>
+                      <a:headEnd type="none" w="med" len="med"/>
+                      <a:tailEnd type="none" w="med" len="med"/>
+                    </a:lnL>
+                    <a:lnR w="6350" cap="flat" cmpd="sng" algn="ctr">
+                      <a:solidFill>
+                        <a:srgbClr val="E4DED4"/>
+                      </a:solidFill>
+                      <a:prstDash val="solid"/>
+                      <a:round/>
+                      <a:headEnd type="none" w="med" len="med"/>
+                      <a:tailEnd type="none" w="med" len="med"/>
+                    </a:lnR>
+                    <a:lnT w="6350" cap="flat" cmpd="sng" algn="ctr">
+                      <a:solidFill>
+                        <a:srgbClr val="E4DED4"/>
+                      </a:solidFill>
+                      <a:prstDash val="solid"/>
+                      <a:round/>
+                      <a:headEnd type="none" w="med" len="med"/>
+                      <a:tailEnd type="none" w="med" len="med"/>
+                    </a:lnT>
+                    <a:lnB w="6350" cap="flat" cmpd="sng" algn="ctr">
+                      <a:solidFill>
+                        <a:srgbClr val="E4DED4"/>
+                      </a:solidFill>
+                      <a:prstDash val="solid"/>
+                      <a:round/>
+                      <a:headEnd type="none" w="med" len="med"/>
+                      <a:tailEnd type="none" w="med" len="med"/>
+                    </a:lnB>
+                    <a:solidFill>
+                      <a:srgbClr val="E8F3EC"/>
+                    </a:solidFill>
+                  </a:tcPr>
+                </a:tc>
+                <a:tc>
+                  <a:txBody>
+                    <a:bodyPr/>
+                    <a:lstStyle/>
+                    <a:p>
+                      <a:pPr algn="ctr" indent="0" marL="0">
+                        <a:buNone/>
+                      </a:pPr>
+                      <a:r>
+                        <a:rPr lang="en-US" sz="1150" b="1" dirty="0">
+                          <a:solidFill>
+                            <a:srgbClr val="1E7A4D"/>
                           </a:solidFill>
                           <a:latin typeface="Space Grotesk" pitchFamily="34" charset="0"/>
                           <a:ea typeface="Space Grotesk" pitchFamily="34" charset="-122"/>
                           <a:cs typeface="Space Grotesk" pitchFamily="34" charset="-120"/>
                         </a:rPr>
-                        <a:t>8.0x</a:t>
+                        <a:t>8.7x</a:t>
                       </a:r>
-                      <a:endParaRPr lang="en-US" sz="1200" dirty="0">
+                      <a:endParaRPr lang="en-US" sz="1150" dirty="0">
                         <a:latin typeface="Space Grotesk" charset="0"/>
                         <a:ea typeface="Space Grotesk" charset="0"/>
                         <a:cs typeface="Space Grotesk" charset="0"/>
                       </a:endParaRPr>
                     </a:p>
                   </a:txBody>
-                  <a:tcPr marL="76200" marR="76200" marT="25400" marB="25400" anchor="ctr">
+                  <a:tcPr marL="63500" marR="63500" marT="25400" marB="25400" anchor="ctr">
+                    <a:lnL w="6350" cap="flat" cmpd="sng" algn="ctr">
+                      <a:solidFill>
+                        <a:srgbClr val="E4DED4"/>
+                      </a:solidFill>
+                      <a:prstDash val="solid"/>
+                      <a:round/>
+                      <a:headEnd type="none" w="med" len="med"/>
+                      <a:tailEnd type="none" w="med" len="med"/>
+                    </a:lnL>
+                    <a:lnR w="6350" cap="flat" cmpd="sng" algn="ctr">
+                      <a:solidFill>
+                        <a:srgbClr val="E4DED4"/>
+                      </a:solidFill>
+                      <a:prstDash val="solid"/>
+                      <a:round/>
+                      <a:headEnd type="none" w="med" len="med"/>
+                      <a:tailEnd type="none" w="med" len="med"/>
+                    </a:lnR>
+                    <a:lnT w="6350" cap="flat" cmpd="sng" algn="ctr">
+                      <a:solidFill>
+                        <a:srgbClr val="E4DED4"/>
+                      </a:solidFill>
+                      <a:prstDash val="solid"/>
+                      <a:round/>
+                      <a:headEnd type="none" w="med" len="med"/>
+                      <a:tailEnd type="none" w="med" len="med"/>
+                    </a:lnT>
+                    <a:lnB w="6350" cap="flat" cmpd="sng" algn="ctr">
+                      <a:solidFill>
+                        <a:srgbClr val="E4DED4"/>
+                      </a:solidFill>
+                      <a:prstDash val="solid"/>
+                      <a:round/>
+                      <a:headEnd type="none" w="med" len="med"/>
+                      <a:tailEnd type="none" w="med" len="med"/>
+                    </a:lnB>
+                    <a:solidFill>
+                      <a:srgbClr val="E8F3EC"/>
+                    </a:solidFill>
+                  </a:tcPr>
+                </a:tc>
+                <a:tc>
+                  <a:txBody>
+                    <a:bodyPr/>
+                    <a:lstStyle/>
+                    <a:p>
+                      <a:pPr algn="ctr" indent="0" marL="0">
+                        <a:buNone/>
+                      </a:pPr>
+                      <a:r>
+                        <a:rPr lang="en-US" sz="950" b="1" dirty="0">
+                          <a:solidFill>
+                            <a:srgbClr val="C1121F"/>
+                          </a:solidFill>
+                          <a:latin typeface="IBM Plex Mono" pitchFamily="34" charset="0"/>
+                          <a:ea typeface="IBM Plex Mono" pitchFamily="34" charset="-122"/>
+                          <a:cs typeface="IBM Plex Mono" pitchFamily="34" charset="-120"/>
+                        </a:rPr>
+                        <a:t>12.6~15.4x</a:t>
+                      </a:r>
+                      <a:endParaRPr lang="en-US" sz="950" dirty="0">
+                        <a:latin typeface="IBM Plex Mono" charset="0"/>
+                        <a:ea typeface="IBM Plex Mono" charset="0"/>
+                        <a:cs typeface="IBM Plex Mono" charset="0"/>
+                      </a:endParaRPr>
+                    </a:p>
+                  </a:txBody>
+                  <a:tcPr marL="63500" marR="63500" marT="25400" marB="25400" anchor="ctr">
+                    <a:lnL w="6350" cap="flat" cmpd="sng" algn="ctr">
+                      <a:solidFill>
+                        <a:srgbClr val="E4DED4"/>
+                      </a:solidFill>
+                      <a:prstDash val="solid"/>
+                      <a:round/>
+                      <a:headEnd type="none" w="med" len="med"/>
+                      <a:tailEnd type="none" w="med" len="med"/>
+                    </a:lnL>
+                    <a:lnR w="6350" cap="flat" cmpd="sng" algn="ctr">
+                      <a:solidFill>
+                        <a:srgbClr val="E4DED4"/>
+                      </a:solidFill>
+                      <a:prstDash val="solid"/>
+                      <a:round/>
+                      <a:headEnd type="none" w="med" len="med"/>
+                      <a:tailEnd type="none" w="med" len="med"/>
+                    </a:lnR>
+                    <a:lnT w="6350" cap="flat" cmpd="sng" algn="ctr">
+                      <a:solidFill>
+                        <a:srgbClr val="E4DED4"/>
+                      </a:solidFill>
+                      <a:prstDash val="solid"/>
+                      <a:round/>
+                      <a:headEnd type="none" w="med" len="med"/>
+                      <a:tailEnd type="none" w="med" len="med"/>
+                    </a:lnT>
+                    <a:lnB w="6350" cap="flat" cmpd="sng" algn="ctr">
+                      <a:solidFill>
+                        <a:srgbClr val="E4DED4"/>
+                      </a:solidFill>
+                      <a:prstDash val="solid"/>
+                      <a:round/>
+                      <a:headEnd type="none" w="med" len="med"/>
+                      <a:tailEnd type="none" w="med" len="med"/>
+                    </a:lnB>
+                    <a:solidFill>
+                      <a:srgbClr val="E8F3EC"/>
+                    </a:solidFill>
+                  </a:tcPr>
+                </a:tc>
+              </a:tr>
+              <a:tr h="566928">
+                <a:tc>
+                  <a:txBody>
+                    <a:bodyPr/>
+                    <a:lstStyle/>
+                    <a:p>
+                      <a:pPr indent="0" marL="0">
+                        <a:buNone/>
+                      </a:pPr>
+                      <a:r>
+                        <a:rPr lang="en-US" sz="950" b="1" dirty="0">
+                          <a:solidFill>
+                            <a:srgbClr val="1B1714"/>
+                          </a:solidFill>
+                          <a:latin typeface="IBM Plex Sans KR" pitchFamily="34" charset="0"/>
+                          <a:ea typeface="IBM Plex Sans KR" pitchFamily="34" charset="-122"/>
+                          <a:cs typeface="IBM Plex Sans KR" pitchFamily="34" charset="-120"/>
+                        </a:rPr>
+                        <a:t>2029E forward</a:t>
+                      </a:r>
+                      <a:endParaRPr lang="en-US" sz="950" dirty="0">
+                        <a:latin typeface="IBM Plex Sans KR" charset="0"/>
+                        <a:ea typeface="IBM Plex Sans KR" charset="0"/>
+                        <a:cs typeface="IBM Plex Sans KR" charset="0"/>
+                      </a:endParaRPr>
+                    </a:p>
+                  </a:txBody>
+                  <a:tcPr marL="63500" marR="63500" marT="25400" marB="25400" anchor="ctr">
                     <a:lnL w="6350" cap="flat" cmpd="sng" algn="ctr">
                       <a:solidFill>
                         <a:srgbClr val="E4DED4"/>
@@ -14305,7 +14648,7 @@
                         <a:buNone/>
                       </a:pPr>
                       <a:r>
-                        <a:rPr lang="en-US" sz="1000" dirty="0">
+                        <a:rPr lang="en-US" sz="950" dirty="0">
                           <a:solidFill>
                             <a:srgbClr val="1B1714"/>
                           </a:solidFill>
@@ -14313,16 +14656,16 @@
                           <a:ea typeface="IBM Plex Mono" pitchFamily="34" charset="-122"/>
                           <a:cs typeface="IBM Plex Mono" pitchFamily="34" charset="-120"/>
                         </a:rPr>
-                        <a:t>$4.4bn</a:t>
+                        <a:t>$455mm</a:t>
                       </a:r>
-                      <a:endParaRPr lang="en-US" sz="1000" dirty="0">
+                      <a:endParaRPr lang="en-US" sz="950" dirty="0">
                         <a:latin typeface="IBM Plex Mono" charset="0"/>
                         <a:ea typeface="IBM Plex Mono" charset="0"/>
                         <a:cs typeface="IBM Plex Mono" charset="0"/>
                       </a:endParaRPr>
                     </a:p>
                   </a:txBody>
-                  <a:tcPr marL="76200" marR="76200" marT="25400" marB="25400" anchor="ctr">
+                  <a:tcPr marL="63500" marR="63500" marT="25400" marB="25400" anchor="ctr">
                     <a:lnL w="6350" cap="flat" cmpd="sng" algn="ctr">
                       <a:solidFill>
                         <a:srgbClr val="E4DED4"/>
@@ -14373,94 +14716,24 @@
                         <a:buNone/>
                       </a:pPr>
                       <a:r>
-                        <a:rPr lang="en-US" sz="1000" b="1" dirty="0">
+                        <a:rPr lang="en-US" sz="1150" b="1" dirty="0">
                           <a:solidFill>
-                            <a:srgbClr val="C1121F"/>
-                          </a:solidFill>
-                          <a:latin typeface="IBM Plex Mono" pitchFamily="34" charset="0"/>
-                          <a:ea typeface="IBM Plex Mono" pitchFamily="34" charset="-122"/>
-                          <a:cs typeface="IBM Plex Mono" pitchFamily="34" charset="-120"/>
-                        </a:rPr>
-                        <a:t>−$2.0bn</a:t>
-                      </a:r>
-                      <a:endParaRPr lang="en-US" sz="1000" dirty="0">
-                        <a:latin typeface="IBM Plex Mono" charset="0"/>
-                        <a:ea typeface="IBM Plex Mono" charset="0"/>
-                        <a:cs typeface="IBM Plex Mono" charset="0"/>
-                      </a:endParaRPr>
-                    </a:p>
-                  </a:txBody>
-                  <a:tcPr marL="76200" marR="76200" marT="25400" marB="25400" anchor="ctr">
-                    <a:lnL w="6350" cap="flat" cmpd="sng" algn="ctr">
-                      <a:solidFill>
-                        <a:srgbClr val="E4DED4"/>
-                      </a:solidFill>
-                      <a:prstDash val="solid"/>
-                      <a:round/>
-                      <a:headEnd type="none" w="med" len="med"/>
-                      <a:tailEnd type="none" w="med" len="med"/>
-                    </a:lnL>
-                    <a:lnR w="6350" cap="flat" cmpd="sng" algn="ctr">
-                      <a:solidFill>
-                        <a:srgbClr val="E4DED4"/>
-                      </a:solidFill>
-                      <a:prstDash val="solid"/>
-                      <a:round/>
-                      <a:headEnd type="none" w="med" len="med"/>
-                      <a:tailEnd type="none" w="med" len="med"/>
-                    </a:lnR>
-                    <a:lnT w="6350" cap="flat" cmpd="sng" algn="ctr">
-                      <a:solidFill>
-                        <a:srgbClr val="E4DED4"/>
-                      </a:solidFill>
-                      <a:prstDash val="solid"/>
-                      <a:round/>
-                      <a:headEnd type="none" w="med" len="med"/>
-                      <a:tailEnd type="none" w="med" len="med"/>
-                    </a:lnT>
-                    <a:lnB w="6350" cap="flat" cmpd="sng" algn="ctr">
-                      <a:solidFill>
-                        <a:srgbClr val="E4DED4"/>
-                      </a:solidFill>
-                      <a:prstDash val="solid"/>
-                      <a:round/>
-                      <a:headEnd type="none" w="med" len="med"/>
-                      <a:tailEnd type="none" w="med" len="med"/>
-                    </a:lnB>
-                    <a:solidFill>
-                      <a:srgbClr val="FFFFFF"/>
-                    </a:solidFill>
-                  </a:tcPr>
-                </a:tc>
-              </a:tr>
-              <a:tr h="475488">
-                <a:tc>
-                  <a:txBody>
-                    <a:bodyPr/>
-                    <a:lstStyle/>
-                    <a:p>
-                      <a:pPr algn="ctr" indent="0" marL="0">
-                        <a:buNone/>
-                      </a:pPr>
-                      <a:r>
-                        <a:rPr lang="en-US" sz="1200" b="1" dirty="0">
-                          <a:solidFill>
-                            <a:srgbClr val="1B1714"/>
+                            <a:srgbClr val="1E7A4D"/>
                           </a:solidFill>
                           <a:latin typeface="Space Grotesk" pitchFamily="34" charset="0"/>
                           <a:ea typeface="Space Grotesk" pitchFamily="34" charset="-122"/>
                           <a:cs typeface="Space Grotesk" pitchFamily="34" charset="-120"/>
                         </a:rPr>
-                        <a:t>10.5x</a:t>
+                        <a:t>10.6x</a:t>
                       </a:r>
-                      <a:endParaRPr lang="en-US" sz="1200" dirty="0">
+                      <a:endParaRPr lang="en-US" sz="1150" dirty="0">
                         <a:latin typeface="Space Grotesk" charset="0"/>
                         <a:ea typeface="Space Grotesk" charset="0"/>
                         <a:cs typeface="Space Grotesk" charset="0"/>
                       </a:endParaRPr>
                     </a:p>
                   </a:txBody>
-                  <a:tcPr marL="76200" marR="76200" marT="25400" marB="25400" anchor="ctr">
+                  <a:tcPr marL="63500" marR="63500" marT="25400" marB="25400" anchor="ctr">
                     <a:lnL w="6350" cap="flat" cmpd="sng" algn="ctr">
                       <a:solidFill>
                         <a:srgbClr val="E4DED4"/>
@@ -14511,75 +14784,7 @@
                         <a:buNone/>
                       </a:pPr>
                       <a:r>
-                        <a:rPr lang="en-US" sz="1000" dirty="0">
-                          <a:solidFill>
-                            <a:srgbClr val="1B1714"/>
-                          </a:solidFill>
-                          <a:latin typeface="IBM Plex Mono" pitchFamily="34" charset="0"/>
-                          <a:ea typeface="IBM Plex Mono" pitchFamily="34" charset="-122"/>
-                          <a:cs typeface="IBM Plex Mono" pitchFamily="34" charset="-120"/>
-                        </a:rPr>
-                        <a:t>$5.8bn</a:t>
-                      </a:r>
-                      <a:endParaRPr lang="en-US" sz="1000" dirty="0">
-                        <a:latin typeface="IBM Plex Mono" charset="0"/>
-                        <a:ea typeface="IBM Plex Mono" charset="0"/>
-                        <a:cs typeface="IBM Plex Mono" charset="0"/>
-                      </a:endParaRPr>
-                    </a:p>
-                  </a:txBody>
-                  <a:tcPr marL="76200" marR="76200" marT="25400" marB="25400" anchor="ctr">
-                    <a:lnL w="6350" cap="flat" cmpd="sng" algn="ctr">
-                      <a:solidFill>
-                        <a:srgbClr val="E4DED4"/>
-                      </a:solidFill>
-                      <a:prstDash val="solid"/>
-                      <a:round/>
-                      <a:headEnd type="none" w="med" len="med"/>
-                      <a:tailEnd type="none" w="med" len="med"/>
-                    </a:lnL>
-                    <a:lnR w="6350" cap="flat" cmpd="sng" algn="ctr">
-                      <a:solidFill>
-                        <a:srgbClr val="E4DED4"/>
-                      </a:solidFill>
-                      <a:prstDash val="solid"/>
-                      <a:round/>
-                      <a:headEnd type="none" w="med" len="med"/>
-                      <a:tailEnd type="none" w="med" len="med"/>
-                    </a:lnR>
-                    <a:lnT w="6350" cap="flat" cmpd="sng" algn="ctr">
-                      <a:solidFill>
-                        <a:srgbClr val="E4DED4"/>
-                      </a:solidFill>
-                      <a:prstDash val="solid"/>
-                      <a:round/>
-                      <a:headEnd type="none" w="med" len="med"/>
-                      <a:tailEnd type="none" w="med" len="med"/>
-                    </a:lnT>
-                    <a:lnB w="6350" cap="flat" cmpd="sng" algn="ctr">
-                      <a:solidFill>
-                        <a:srgbClr val="E4DED4"/>
-                      </a:solidFill>
-                      <a:prstDash val="solid"/>
-                      <a:round/>
-                      <a:headEnd type="none" w="med" len="med"/>
-                      <a:tailEnd type="none" w="med" len="med"/>
-                    </a:lnB>
-                    <a:solidFill>
-                      <a:srgbClr val="FFFFFF"/>
-                    </a:solidFill>
-                  </a:tcPr>
-                </a:tc>
-                <a:tc>
-                  <a:txBody>
-                    <a:bodyPr/>
-                    <a:lstStyle/>
-                    <a:p>
-                      <a:pPr algn="ctr" indent="0" marL="0">
-                        <a:buNone/>
-                      </a:pPr>
-                      <a:r>
-                        <a:rPr lang="en-US" sz="1000" b="1" dirty="0">
+                        <a:rPr lang="en-US" sz="950" b="1" dirty="0">
                           <a:solidFill>
                             <a:srgbClr val="C1121F"/>
                           </a:solidFill>
@@ -14587,16 +14792,16 @@
                           <a:ea typeface="IBM Plex Mono" pitchFamily="34" charset="-122"/>
                           <a:cs typeface="IBM Plex Mono" pitchFamily="34" charset="-120"/>
                         </a:rPr>
-                        <a:t>−$0.6bn</a:t>
+                        <a:t>15.3~18.8x</a:t>
                       </a:r>
-                      <a:endParaRPr lang="en-US" sz="1000" dirty="0">
+                      <a:endParaRPr lang="en-US" sz="950" dirty="0">
                         <a:latin typeface="IBM Plex Mono" charset="0"/>
                         <a:ea typeface="IBM Plex Mono" charset="0"/>
                         <a:cs typeface="IBM Plex Mono" charset="0"/>
                       </a:endParaRPr>
                     </a:p>
                   </a:txBody>
-                  <a:tcPr marL="76200" marR="76200" marT="25400" marB="25400" anchor="ctr">
+                  <a:tcPr marL="63500" marR="63500" marT="25400" marB="25400" anchor="ctr">
                     <a:lnL w="6350" cap="flat" cmpd="sng" algn="ctr">
                       <a:solidFill>
                         <a:srgbClr val="E4DED4"/>
@@ -14635,212 +14840,6 @@
                     </a:lnB>
                     <a:solidFill>
                       <a:srgbClr val="FFFFFF"/>
-                    </a:solidFill>
-                  </a:tcPr>
-                </a:tc>
-              </a:tr>
-              <a:tr h="475488">
-                <a:tc>
-                  <a:txBody>
-                    <a:bodyPr/>
-                    <a:lstStyle/>
-                    <a:p>
-                      <a:pPr algn="ctr" indent="0" marL="0">
-                        <a:buNone/>
-                      </a:pPr>
-                      <a:r>
-                        <a:rPr lang="en-US" sz="1200" b="1" dirty="0">
-                          <a:solidFill>
-                            <a:srgbClr val="1B1714"/>
-                          </a:solidFill>
-                          <a:latin typeface="Space Grotesk" pitchFamily="34" charset="0"/>
-                          <a:ea typeface="Space Grotesk" pitchFamily="34" charset="-122"/>
-                          <a:cs typeface="Space Grotesk" pitchFamily="34" charset="-120"/>
-                        </a:rPr>
-                        <a:t>13.0x</a:t>
-                      </a:r>
-                      <a:endParaRPr lang="en-US" sz="1200" dirty="0">
-                        <a:latin typeface="Space Grotesk" charset="0"/>
-                        <a:ea typeface="Space Grotesk" charset="0"/>
-                        <a:cs typeface="Space Grotesk" charset="0"/>
-                      </a:endParaRPr>
-                    </a:p>
-                  </a:txBody>
-                  <a:tcPr marL="76200" marR="76200" marT="25400" marB="25400" anchor="ctr">
-                    <a:lnL w="6350" cap="flat" cmpd="sng" algn="ctr">
-                      <a:solidFill>
-                        <a:srgbClr val="E4DED4"/>
-                      </a:solidFill>
-                      <a:prstDash val="solid"/>
-                      <a:round/>
-                      <a:headEnd type="none" w="med" len="med"/>
-                      <a:tailEnd type="none" w="med" len="med"/>
-                    </a:lnL>
-                    <a:lnR w="6350" cap="flat" cmpd="sng" algn="ctr">
-                      <a:solidFill>
-                        <a:srgbClr val="E4DED4"/>
-                      </a:solidFill>
-                      <a:prstDash val="solid"/>
-                      <a:round/>
-                      <a:headEnd type="none" w="med" len="med"/>
-                      <a:tailEnd type="none" w="med" len="med"/>
-                    </a:lnR>
-                    <a:lnT w="6350" cap="flat" cmpd="sng" algn="ctr">
-                      <a:solidFill>
-                        <a:srgbClr val="E4DED4"/>
-                      </a:solidFill>
-                      <a:prstDash val="solid"/>
-                      <a:round/>
-                      <a:headEnd type="none" w="med" len="med"/>
-                      <a:tailEnd type="none" w="med" len="med"/>
-                    </a:lnT>
-                    <a:lnB w="6350" cap="flat" cmpd="sng" algn="ctr">
-                      <a:solidFill>
-                        <a:srgbClr val="E4DED4"/>
-                      </a:solidFill>
-                      <a:prstDash val="solid"/>
-                      <a:round/>
-                      <a:headEnd type="none" w="med" len="med"/>
-                      <a:tailEnd type="none" w="med" len="med"/>
-                    </a:lnB>
-                    <a:solidFill>
-                      <a:srgbClr val="E8F3EC"/>
-                    </a:solidFill>
-                  </a:tcPr>
-                </a:tc>
-                <a:tc>
-                  <a:txBody>
-                    <a:bodyPr/>
-                    <a:lstStyle/>
-                    <a:p>
-                      <a:pPr algn="ctr" indent="0" marL="0">
-                        <a:buNone/>
-                      </a:pPr>
-                      <a:r>
-                        <a:rPr lang="en-US" sz="1000" dirty="0">
-                          <a:solidFill>
-                            <a:srgbClr val="1B1714"/>
-                          </a:solidFill>
-                          <a:latin typeface="IBM Plex Mono" pitchFamily="34" charset="0"/>
-                          <a:ea typeface="IBM Plex Mono" pitchFamily="34" charset="-122"/>
-                          <a:cs typeface="IBM Plex Mono" pitchFamily="34" charset="-120"/>
-                        </a:rPr>
-                        <a:t>$7.2bn</a:t>
-                      </a:r>
-                      <a:endParaRPr lang="en-US" sz="1000" dirty="0">
-                        <a:latin typeface="IBM Plex Mono" charset="0"/>
-                        <a:ea typeface="IBM Plex Mono" charset="0"/>
-                        <a:cs typeface="IBM Plex Mono" charset="0"/>
-                      </a:endParaRPr>
-                    </a:p>
-                  </a:txBody>
-                  <a:tcPr marL="76200" marR="76200" marT="25400" marB="25400" anchor="ctr">
-                    <a:lnL w="6350" cap="flat" cmpd="sng" algn="ctr">
-                      <a:solidFill>
-                        <a:srgbClr val="E4DED4"/>
-                      </a:solidFill>
-                      <a:prstDash val="solid"/>
-                      <a:round/>
-                      <a:headEnd type="none" w="med" len="med"/>
-                      <a:tailEnd type="none" w="med" len="med"/>
-                    </a:lnL>
-                    <a:lnR w="6350" cap="flat" cmpd="sng" algn="ctr">
-                      <a:solidFill>
-                        <a:srgbClr val="E4DED4"/>
-                      </a:solidFill>
-                      <a:prstDash val="solid"/>
-                      <a:round/>
-                      <a:headEnd type="none" w="med" len="med"/>
-                      <a:tailEnd type="none" w="med" len="med"/>
-                    </a:lnR>
-                    <a:lnT w="6350" cap="flat" cmpd="sng" algn="ctr">
-                      <a:solidFill>
-                        <a:srgbClr val="E4DED4"/>
-                      </a:solidFill>
-                      <a:prstDash val="solid"/>
-                      <a:round/>
-                      <a:headEnd type="none" w="med" len="med"/>
-                      <a:tailEnd type="none" w="med" len="med"/>
-                    </a:lnT>
-                    <a:lnB w="6350" cap="flat" cmpd="sng" algn="ctr">
-                      <a:solidFill>
-                        <a:srgbClr val="E4DED4"/>
-                      </a:solidFill>
-                      <a:prstDash val="solid"/>
-                      <a:round/>
-                      <a:headEnd type="none" w="med" len="med"/>
-                      <a:tailEnd type="none" w="med" len="med"/>
-                    </a:lnB>
-                    <a:solidFill>
-                      <a:srgbClr val="E8F3EC"/>
-                    </a:solidFill>
-                  </a:tcPr>
-                </a:tc>
-                <a:tc>
-                  <a:txBody>
-                    <a:bodyPr/>
-                    <a:lstStyle/>
-                    <a:p>
-                      <a:pPr algn="ctr" indent="0" marL="0">
-                        <a:buNone/>
-                      </a:pPr>
-                      <a:r>
-                        <a:rPr lang="en-US" sz="1000" b="1" dirty="0">
-                          <a:solidFill>
-                            <a:srgbClr val="1E7A4D"/>
-                          </a:solidFill>
-                          <a:latin typeface="IBM Plex Mono" pitchFamily="34" charset="0"/>
-                          <a:ea typeface="IBM Plex Mono" pitchFamily="34" charset="-122"/>
-                          <a:cs typeface="IBM Plex Mono" pitchFamily="34" charset="-120"/>
-                        </a:rPr>
-                        <a:t>+$0.8bn</a:t>
-                      </a:r>
-                      <a:endParaRPr lang="en-US" sz="1000" dirty="0">
-                        <a:latin typeface="IBM Plex Mono" charset="0"/>
-                        <a:ea typeface="IBM Plex Mono" charset="0"/>
-                        <a:cs typeface="IBM Plex Mono" charset="0"/>
-                      </a:endParaRPr>
-                    </a:p>
-                  </a:txBody>
-                  <a:tcPr marL="76200" marR="76200" marT="25400" marB="25400" anchor="ctr">
-                    <a:lnL w="6350" cap="flat" cmpd="sng" algn="ctr">
-                      <a:solidFill>
-                        <a:srgbClr val="E4DED4"/>
-                      </a:solidFill>
-                      <a:prstDash val="solid"/>
-                      <a:round/>
-                      <a:headEnd type="none" w="med" len="med"/>
-                      <a:tailEnd type="none" w="med" len="med"/>
-                    </a:lnL>
-                    <a:lnR w="6350" cap="flat" cmpd="sng" algn="ctr">
-                      <a:solidFill>
-                        <a:srgbClr val="E4DED4"/>
-                      </a:solidFill>
-                      <a:prstDash val="solid"/>
-                      <a:round/>
-                      <a:headEnd type="none" w="med" len="med"/>
-                      <a:tailEnd type="none" w="med" len="med"/>
-                    </a:lnR>
-                    <a:lnT w="6350" cap="flat" cmpd="sng" algn="ctr">
-                      <a:solidFill>
-                        <a:srgbClr val="E4DED4"/>
-                      </a:solidFill>
-                      <a:prstDash val="solid"/>
-                      <a:round/>
-                      <a:headEnd type="none" w="med" len="med"/>
-                      <a:tailEnd type="none" w="med" len="med"/>
-                    </a:lnT>
-                    <a:lnB w="6350" cap="flat" cmpd="sng" algn="ctr">
-                      <a:solidFill>
-                        <a:srgbClr val="E4DED4"/>
-                      </a:solidFill>
-                      <a:prstDash val="solid"/>
-                      <a:round/>
-                      <a:headEnd type="none" w="med" len="med"/>
-                      <a:tailEnd type="none" w="med" len="med"/>
-                    </a:lnB>
-                    <a:solidFill>
-                      <a:srgbClr val="E8F3EC"/>
                     </a:solidFill>
                   </a:tcPr>
                 </a:tc>
@@ -14857,12 +14856,12 @@
         </p:nvSpPr>
         <p:spPr>
           <a:xfrm>
-            <a:off x="5504688" y="3913632"/>
-            <a:ext cx="4617720" cy="786384"/>
+            <a:off x="5504688" y="3639312"/>
+            <a:ext cx="4617720" cy="1024128"/>
           </a:xfrm>
           <a:prstGeom prst="roundRect">
             <a:avLst>
-              <a:gd name="adj" fmla="val 6977"/>
+              <a:gd name="adj" fmla="val 5357"/>
             </a:avLst>
           </a:prstGeom>
           <a:solidFill>
@@ -14879,8 +14878,8 @@
         </p:nvSpPr>
         <p:spPr>
           <a:xfrm>
-            <a:off x="5724144" y="3913632"/>
-            <a:ext cx="4206240" cy="786384"/>
+            <a:off x="5705856" y="3730752"/>
+            <a:ext cx="4251960" cy="219456"/>
           </a:xfrm>
           <a:prstGeom prst="rect">
             <a:avLst/>
@@ -14890,11 +14889,50 @@
         </p:spPr>
         <p:txBody>
           <a:bodyPr wrap="square" lIns="0" tIns="0" rIns="0" bIns="0" rtlCol="0" anchor="ctr"/>
+          <a:lstStyle/>
+          <a:p>
+            <a:pPr indent="0" marL="0">
+              <a:buNone/>
+            </a:pPr>
+            <a:r>
+              <a:rPr lang="en-US" sz="800" spc="50" kern="0" dirty="0">
+                <a:solidFill>
+                  <a:srgbClr val="D8CFC2"/>
+                </a:solidFill>
+                <a:latin typeface="IBM Plex Mono" pitchFamily="34" charset="0"/>
+                <a:ea typeface="IBM Plex Mono" pitchFamily="34" charset="-122"/>
+                <a:cs typeface="IBM Plex Mono" pitchFamily="34" charset="-120"/>
+              </a:rPr>
+              <a:t>정상화 peer 13x 적용 · 내재 지분가치(−순차입 $6.4bn)</a:t>
+            </a:r>
+            <a:endParaRPr lang="en-US" sz="800" dirty="0"/>
+          </a:p>
+        </p:txBody>
+      </p:sp>
+      <p:sp>
+        <p:nvSpPr>
+          <p:cNvPr id="14" name="Text 10"/>
+          <p:cNvSpPr/>
+          <p:nvPr/>
+        </p:nvSpPr>
+        <p:spPr>
+          <a:xfrm>
+            <a:off x="5705856" y="3986784"/>
+            <a:ext cx="4251960" cy="621792"/>
+          </a:xfrm>
+          <a:prstGeom prst="rect">
+            <a:avLst/>
+          </a:prstGeom>
+          <a:noFill/>
+          <a:ln/>
+        </p:spPr>
+        <p:txBody>
+          <a:bodyPr wrap="square" lIns="0" tIns="0" rIns="0" bIns="0" rtlCol="0" anchor="t"/>
           <a:lstStyle/>
           <a:p>
             <a:pPr indent="0" marL="0">
               <a:lnSpc>
-                <a:spcPct val="130000"/>
+                <a:spcPct val="135000"/>
               </a:lnSpc>
               <a:buNone/>
             </a:pPr>
@@ -14907,11 +14945,11 @@
                 <a:ea typeface="IBM Plex Sans KR" pitchFamily="34" charset="-122"/>
                 <a:cs typeface="IBM Plex Sans KR" pitchFamily="34" charset="-120"/>
               </a:rPr>
-              <a:t>DCF 내재  </a:t>
+              <a:t>× $554mm  → EV $7.2bn  </a:t>
             </a:r>
             <a:pPr indent="0" marL="0">
               <a:lnSpc>
-                <a:spcPct val="130000"/>
+                <a:spcPct val="135000"/>
               </a:lnSpc>
               <a:buNone/>
             </a:pPr>
@@ -14924,11 +14962,12 @@
                 <a:ea typeface="IBM Plex Sans KR" pitchFamily="34" charset="-122"/>
                 <a:cs typeface="IBM Plex Sans KR" pitchFamily="34" charset="-120"/>
               </a:rPr>
-              <a:t>≈ 8.7x</a:t>
+              <a:t>지분 +$0.8bn
+</a:t>
             </a:r>
             <a:pPr indent="0" marL="0">
               <a:lnSpc>
-                <a:spcPct val="130000"/>
+                <a:spcPct val="135000"/>
               </a:lnSpc>
               <a:buNone/>
             </a:pPr>
@@ -14941,59 +14980,24 @@
                 <a:ea typeface="IBM Plex Sans KR" pitchFamily="34" charset="-122"/>
                 <a:cs typeface="IBM Plex Sans KR" pitchFamily="34" charset="-120"/>
               </a:rPr>
-              <a:t>  (EV $4.8bn · peer 하단)
-</a:t>
+              <a:t>× $455mm  → EV $5.9bn  </a:t>
             </a:r>
             <a:pPr indent="0" marL="0">
               <a:lnSpc>
-                <a:spcPct val="130000"/>
+                <a:spcPct val="135000"/>
               </a:lnSpc>
               <a:buNone/>
             </a:pPr>
             <a:r>
-              <a:rPr lang="en-US" sz="1000" dirty="0">
-                <a:solidFill>
-                  <a:srgbClr val="D8CFC2"/>
+              <a:rPr lang="en-US" sz="1000" b="1" dirty="0">
+                <a:solidFill>
+                  <a:srgbClr val="FF8E84"/>
                 </a:solidFill>
                 <a:latin typeface="IBM Plex Sans KR" pitchFamily="34" charset="0"/>
                 <a:ea typeface="IBM Plex Sans KR" pitchFamily="34" charset="-122"/>
                 <a:cs typeface="IBM Plex Sans KR" pitchFamily="34" charset="-120"/>
               </a:rPr>
-              <a:t>역산 필요  </a:t>
-            </a:r>
-            <a:pPr indent="0" marL="0">
-              <a:lnSpc>
-                <a:spcPct val="130000"/>
-              </a:lnSpc>
-              <a:buNone/>
-            </a:pPr>
-            <a:r>
-              <a:rPr lang="en-US" sz="1000" b="1" dirty="0">
-                <a:solidFill>
-                  <a:srgbClr val="FF8E84"/>
-                </a:solidFill>
-                <a:latin typeface="IBM Plex Sans KR" pitchFamily="34" charset="0"/>
-                <a:ea typeface="IBM Plex Sans KR" pitchFamily="34" charset="-122"/>
-                <a:cs typeface="IBM Plex Sans KR" pitchFamily="34" charset="-120"/>
-              </a:rPr>
-              <a:t>12.6~15.4x</a:t>
-            </a:r>
-            <a:pPr indent="0" marL="0">
-              <a:lnSpc>
-                <a:spcPct val="130000"/>
-              </a:lnSpc>
-              <a:buNone/>
-            </a:pPr>
-            <a:r>
-              <a:rPr lang="en-US" sz="1000" dirty="0">
-                <a:solidFill>
-                  <a:srgbClr val="D8CFC2"/>
-                </a:solidFill>
-                <a:latin typeface="IBM Plex Sans KR" pitchFamily="34" charset="0"/>
-                <a:ea typeface="IBM Plex Sans KR" pitchFamily="34" charset="-122"/>
-                <a:cs typeface="IBM Plex Sans KR" pitchFamily="34" charset="-120"/>
-              </a:rPr>
-              <a:t>  (딜 성립 · peer 상단 초과)</a:t>
+              <a:t>지분 −$0.5bn</a:t>
             </a:r>
             <a:endParaRPr lang="en-US" sz="1000" dirty="0"/>
           </a:p>
@@ -15001,13 +15005,13 @@
       </p:sp>
       <p:sp>
         <p:nvSpPr>
-          <p:cNvPr id="14" name="Text 10"/>
-          <p:cNvSpPr/>
-          <p:nvPr/>
-        </p:nvSpPr>
-        <p:spPr>
-          <a:xfrm>
-            <a:off x="566928" y="5029200"/>
+          <p:cNvPr id="15" name="Text 11"/>
+          <p:cNvSpPr/>
+          <p:nvPr/>
+        </p:nvSpPr>
+        <p:spPr>
+          <a:xfrm>
+            <a:off x="566928" y="4864608"/>
             <a:ext cx="9555480" cy="219456"/>
           </a:xfrm>
           <a:prstGeom prst="rect">
@@ -15032,7 +15036,7 @@
                 <a:ea typeface="IBM Plex Mono" pitchFamily="34" charset="-122"/>
                 <a:cs typeface="IBM Plex Mono" pitchFamily="34" charset="-120"/>
               </a:rPr>
-              <a:t>풋볼필드 — 내재 EV ($bn) · peer / DCF / 역산 필요</a:t>
+              <a:t>풋볼필드 — 내재 EV ($bn) · run-rate $554mm 기준 · 보수/정상화 peer vs 역산 필요</a:t>
             </a:r>
             <a:endParaRPr lang="en-US" sz="850" dirty="0"/>
           </a:p>
@@ -15040,13 +15044,13 @@
       </p:sp>
       <p:sp>
         <p:nvSpPr>
-          <p:cNvPr id="15" name="Shape 11"/>
-          <p:cNvSpPr/>
-          <p:nvPr/>
-        </p:nvSpPr>
-        <p:spPr>
-          <a:xfrm>
-            <a:off x="704088" y="5715000"/>
+          <p:cNvPr id="16" name="Shape 12"/>
+          <p:cNvSpPr/>
+          <p:nvPr/>
+        </p:nvSpPr>
+        <p:spPr>
+          <a:xfrm>
+            <a:off x="704088" y="5486400"/>
             <a:ext cx="8641080" cy="0"/>
           </a:xfrm>
           <a:prstGeom prst="line">
@@ -15063,14 +15067,78 @@
       </p:sp>
       <p:sp>
         <p:nvSpPr>
-          <p:cNvPr id="16" name="Shape 12"/>
-          <p:cNvSpPr/>
-          <p:nvPr/>
-        </p:nvSpPr>
-        <p:spPr>
-          <a:xfrm>
-            <a:off x="2763545" y="5614416"/>
-            <a:ext cx="3989299" cy="201168"/>
+          <p:cNvPr id="17" name="Shape 13"/>
+          <p:cNvSpPr/>
+          <p:nvPr/>
+        </p:nvSpPr>
+        <p:spPr>
+          <a:xfrm>
+            <a:off x="1447221" y="5394960"/>
+            <a:ext cx="4787158" cy="182880"/>
+          </a:xfrm>
+          <a:prstGeom prst="rect">
+            <a:avLst/>
+          </a:prstGeom>
+          <a:solidFill>
+            <a:srgbClr val="F2ECE0"/>
+          </a:solidFill>
+          <a:ln w="9525">
+            <a:solidFill>
+              <a:srgbClr val="D8CFC2"/>
+            </a:solidFill>
+            <a:prstDash val="solid"/>
+          </a:ln>
+        </p:spPr>
+      </p:sp>
+      <p:sp>
+        <p:nvSpPr>
+          <p:cNvPr id="18" name="Text 14"/>
+          <p:cNvSpPr/>
+          <p:nvPr/>
+        </p:nvSpPr>
+        <p:spPr>
+          <a:xfrm>
+            <a:off x="1447221" y="5605272"/>
+            <a:ext cx="4787158" cy="182880"/>
+          </a:xfrm>
+          <a:prstGeom prst="rect">
+            <a:avLst/>
+          </a:prstGeom>
+          <a:noFill/>
+          <a:ln/>
+        </p:spPr>
+        <p:txBody>
+          <a:bodyPr wrap="square" lIns="0" tIns="0" rIns="0" bIns="0" rtlCol="0" anchor="ctr"/>
+          <a:lstStyle/>
+          <a:p>
+            <a:pPr algn="ctr" indent="0" marL="0">
+              <a:buNone/>
+            </a:pPr>
+            <a:r>
+              <a:rPr lang="en-US" sz="750" dirty="0">
+                <a:solidFill>
+                  <a:srgbClr val="6F6960"/>
+                </a:solidFill>
+                <a:latin typeface="IBM Plex Mono" pitchFamily="34" charset="0"/>
+                <a:ea typeface="IBM Plex Mono" pitchFamily="34" charset="-122"/>
+                <a:cs typeface="IBM Plex Mono" pitchFamily="34" charset="-120"/>
+              </a:rPr>
+              <a:t>보수 8~13x  $4.4~7.2bn</a:t>
+            </a:r>
+            <a:endParaRPr lang="en-US" sz="750" dirty="0"/>
+          </a:p>
+        </p:txBody>
+      </p:sp>
+      <p:sp>
+        <p:nvSpPr>
+          <p:cNvPr id="19" name="Shape 15"/>
+          <p:cNvSpPr/>
+          <p:nvPr/>
+        </p:nvSpPr>
+        <p:spPr>
+          <a:xfrm>
+            <a:off x="6234379" y="5394960"/>
+            <a:ext cx="1918320" cy="182880"/>
           </a:xfrm>
           <a:prstGeom prst="rect">
             <a:avLst/>
@@ -15088,14 +15156,14 @@
       </p:sp>
       <p:sp>
         <p:nvSpPr>
-          <p:cNvPr id="17" name="Text 13"/>
-          <p:cNvSpPr/>
-          <p:nvPr/>
-        </p:nvSpPr>
-        <p:spPr>
-          <a:xfrm>
-            <a:off x="2763545" y="5385816"/>
-            <a:ext cx="3989299" cy="182880"/>
+          <p:cNvPr id="20" name="Text 16"/>
+          <p:cNvSpPr/>
+          <p:nvPr/>
+        </p:nvSpPr>
+        <p:spPr>
+          <a:xfrm>
+            <a:off x="5960059" y="5175504"/>
+            <a:ext cx="2741280" cy="182880"/>
           </a:xfrm>
           <a:prstGeom prst="rect">
             <a:avLst/>
@@ -15111,7 +15179,7 @@
               <a:buNone/>
             </a:pPr>
             <a:r>
-              <a:rPr lang="en-US" sz="800" b="1" dirty="0">
+              <a:rPr lang="en-US" sz="750" b="1" dirty="0">
                 <a:solidFill>
                   <a:srgbClr val="1E7A4D"/>
                 </a:solidFill>
@@ -15119,30 +15187,28 @@
                 <a:ea typeface="IBM Plex Mono" pitchFamily="34" charset="-122"/>
                 <a:cs typeface="IBM Plex Mono" pitchFamily="34" charset="-120"/>
               </a:rPr>
-              <a:t>peer 8~13x  $4.4~7.2bn</a:t>
-            </a:r>
-            <a:endParaRPr lang="en-US" sz="800" dirty="0"/>
-          </a:p>
-        </p:txBody>
-      </p:sp>
-      <p:sp>
-        <p:nvSpPr>
-          <p:cNvPr id="18" name="Shape 14"/>
-          <p:cNvSpPr/>
-          <p:nvPr/>
-        </p:nvSpPr>
-        <p:spPr>
-          <a:xfrm>
-            <a:off x="6436004" y="5614416"/>
-            <a:ext cx="2232279" cy="201168"/>
-          </a:xfrm>
-          <a:prstGeom prst="rect">
-            <a:avLst/>
-          </a:prstGeom>
-          <a:solidFill>
-            <a:srgbClr val="FBF1EF"/>
-          </a:solidFill>
-          <a:ln w="9525">
+              <a:t>정상화 13~15x  $7.2~8.3bn</a:t>
+            </a:r>
+            <a:endParaRPr lang="en-US" sz="750" dirty="0"/>
+          </a:p>
+        </p:txBody>
+      </p:sp>
+      <p:sp>
+        <p:nvSpPr>
+          <p:cNvPr id="21" name="Shape 17"/>
+          <p:cNvSpPr/>
+          <p:nvPr/>
+        </p:nvSpPr>
+        <p:spPr>
+          <a:xfrm>
+            <a:off x="5854172" y="5212080"/>
+            <a:ext cx="2678735" cy="0"/>
+          </a:xfrm>
+          <a:prstGeom prst="line">
+            <a:avLst/>
+          </a:prstGeom>
+          <a:noFill/>
+          <a:ln w="31750">
             <a:solidFill>
               <a:srgbClr val="C1121F"/>
             </a:solidFill>
@@ -15152,14 +15218,14 @@
       </p:sp>
       <p:sp>
         <p:nvSpPr>
-          <p:cNvPr id="19" name="Text 15"/>
-          <p:cNvSpPr/>
-          <p:nvPr/>
-        </p:nvSpPr>
-        <p:spPr>
-          <a:xfrm>
-            <a:off x="6253124" y="5861304"/>
-            <a:ext cx="2780919" cy="182880"/>
+          <p:cNvPr id="22" name="Text 18"/>
+          <p:cNvSpPr/>
+          <p:nvPr/>
+        </p:nvSpPr>
+        <p:spPr>
+          <a:xfrm>
+            <a:off x="5579852" y="5010912"/>
+            <a:ext cx="3501695" cy="182880"/>
           </a:xfrm>
           <a:prstGeom prst="rect">
             <a:avLst/>
@@ -15191,14 +15257,14 @@
       </p:sp>
       <p:sp>
         <p:nvSpPr>
-          <p:cNvPr id="20" name="Shape 16"/>
-          <p:cNvSpPr/>
-          <p:nvPr/>
-        </p:nvSpPr>
-        <p:spPr>
-          <a:xfrm>
-            <a:off x="5600700" y="5440680"/>
-            <a:ext cx="0" cy="548640"/>
+          <p:cNvPr id="23" name="Shape 19"/>
+          <p:cNvSpPr/>
+          <p:nvPr/>
+        </p:nvSpPr>
+        <p:spPr>
+          <a:xfrm>
+            <a:off x="4851806" y="5340096"/>
+            <a:ext cx="0" cy="292608"/>
           </a:xfrm>
           <a:prstGeom prst="line">
             <a:avLst/>
@@ -15214,14 +15280,14 @@
       </p:sp>
       <p:sp>
         <p:nvSpPr>
-          <p:cNvPr id="21" name="Text 17"/>
-          <p:cNvSpPr/>
-          <p:nvPr/>
-        </p:nvSpPr>
-        <p:spPr>
-          <a:xfrm>
-            <a:off x="4503420" y="5221224"/>
-            <a:ext cx="2194560" cy="182880"/>
+          <p:cNvPr id="24" name="Text 20"/>
+          <p:cNvSpPr/>
+          <p:nvPr/>
+        </p:nvSpPr>
+        <p:spPr>
+          <a:xfrm>
+            <a:off x="4120286" y="5760720"/>
+            <a:ext cx="1463040" cy="164592"/>
           </a:xfrm>
           <a:prstGeom prst="rect">
             <a:avLst/>
@@ -15237,7 +15303,7 @@
               <a:buNone/>
             </a:pPr>
             <a:r>
-              <a:rPr lang="en-US" sz="750" b="1" dirty="0">
+              <a:rPr lang="en-US" sz="700" b="1" dirty="0">
                 <a:solidFill>
                   <a:srgbClr val="1B1714"/>
                 </a:solidFill>
@@ -15245,21 +15311,21 @@
                 <a:ea typeface="IBM Plex Mono" pitchFamily="34" charset="-122"/>
                 <a:cs typeface="IBM Plex Mono" pitchFamily="34" charset="-120"/>
               </a:rPr>
-              <a:t>순차입금 $6.4bn (지분 손익분기)</a:t>
-            </a:r>
-            <a:endParaRPr lang="en-US" sz="750" dirty="0"/>
-          </a:p>
-        </p:txBody>
-      </p:sp>
-      <p:sp>
-        <p:nvSpPr>
-          <p:cNvPr id="22" name="Shape 18"/>
-          <p:cNvSpPr/>
-          <p:nvPr/>
-        </p:nvSpPr>
-        <p:spPr>
-          <a:xfrm>
-            <a:off x="3299155" y="5660136"/>
+              <a:t>순차입 $6.4bn</a:t>
+            </a:r>
+            <a:endParaRPr lang="en-US" sz="700" dirty="0"/>
+          </a:p>
+        </p:txBody>
+      </p:sp>
+      <p:sp>
+        <p:nvSpPr>
+          <p:cNvPr id="25" name="Shape 21"/>
+          <p:cNvSpPr/>
+          <p:nvPr/>
+        </p:nvSpPr>
+        <p:spPr>
+          <a:xfrm>
+            <a:off x="2100925" y="5431536"/>
             <a:ext cx="109728" cy="109728"/>
           </a:xfrm>
           <a:prstGeom prst="ellipse">
@@ -15273,13 +15339,13 @@
       </p:sp>
       <p:sp>
         <p:nvSpPr>
-          <p:cNvPr id="23" name="Text 19"/>
-          <p:cNvSpPr/>
-          <p:nvPr/>
-        </p:nvSpPr>
-        <p:spPr>
-          <a:xfrm>
-            <a:off x="2576779" y="5861304"/>
+          <p:cNvPr id="26" name="Text 22"/>
+          <p:cNvSpPr/>
+          <p:nvPr/>
+        </p:nvSpPr>
+        <p:spPr>
+          <a:xfrm>
+            <a:off x="1378549" y="5175504"/>
             <a:ext cx="1554480" cy="182880"/>
           </a:xfrm>
           <a:prstGeom prst="rect">
@@ -15312,13 +15378,13 @@
       </p:sp>
       <p:sp>
         <p:nvSpPr>
-          <p:cNvPr id="24" name="Text 20"/>
-          <p:cNvSpPr/>
-          <p:nvPr/>
-        </p:nvSpPr>
-        <p:spPr>
-          <a:xfrm>
-            <a:off x="429768" y="6080760"/>
+          <p:cNvPr id="27" name="Text 23"/>
+          <p:cNvSpPr/>
+          <p:nvPr/>
+        </p:nvSpPr>
+        <p:spPr>
+          <a:xfrm>
+            <a:off x="429768" y="5888736"/>
             <a:ext cx="548640" cy="146304"/>
           </a:xfrm>
           <a:prstGeom prst="rect">
@@ -15343,7 +15409,7 @@
                 <a:ea typeface="IBM Plex Mono" pitchFamily="34" charset="-122"/>
                 <a:cs typeface="IBM Plex Mono" pitchFamily="34" charset="-120"/>
               </a:rPr>
-              <a:t>$3bn</a:t>
+              <a:t>$4bn</a:t>
             </a:r>
             <a:endParaRPr lang="en-US" sz="650" dirty="0"/>
           </a:p>
@@ -15351,13 +15417,13 @@
       </p:sp>
       <p:sp>
         <p:nvSpPr>
-          <p:cNvPr id="25" name="Text 21"/>
-          <p:cNvSpPr/>
-          <p:nvPr/>
-        </p:nvSpPr>
-        <p:spPr>
-          <a:xfrm>
-            <a:off x="1869948" y="6080760"/>
+          <p:cNvPr id="28" name="Text 24"/>
+          <p:cNvSpPr/>
+          <p:nvPr/>
+        </p:nvSpPr>
+        <p:spPr>
+          <a:xfrm>
+            <a:off x="2157984" y="5888736"/>
             <a:ext cx="548640" cy="146304"/>
           </a:xfrm>
           <a:prstGeom prst="rect">
@@ -15382,7 +15448,7 @@
                 <a:ea typeface="IBM Plex Mono" pitchFamily="34" charset="-122"/>
                 <a:cs typeface="IBM Plex Mono" pitchFamily="34" charset="-120"/>
               </a:rPr>
-              <a:t>$4bn</a:t>
+              <a:t>$5bn</a:t>
             </a:r>
             <a:endParaRPr lang="en-US" sz="650" dirty="0"/>
           </a:p>
@@ -15390,13 +15456,13 @@
       </p:sp>
       <p:sp>
         <p:nvSpPr>
-          <p:cNvPr id="26" name="Text 22"/>
-          <p:cNvSpPr/>
-          <p:nvPr/>
-        </p:nvSpPr>
-        <p:spPr>
-          <a:xfrm>
-            <a:off x="3310128" y="6080760"/>
+          <p:cNvPr id="29" name="Text 25"/>
+          <p:cNvSpPr/>
+          <p:nvPr/>
+        </p:nvSpPr>
+        <p:spPr>
+          <a:xfrm>
+            <a:off x="3886200" y="5888736"/>
             <a:ext cx="548640" cy="146304"/>
           </a:xfrm>
           <a:prstGeom prst="rect">
@@ -15421,7 +15487,7 @@
                 <a:ea typeface="IBM Plex Mono" pitchFamily="34" charset="-122"/>
                 <a:cs typeface="IBM Plex Mono" pitchFamily="34" charset="-120"/>
               </a:rPr>
-              <a:t>$5bn</a:t>
+              <a:t>$6bn</a:t>
             </a:r>
             <a:endParaRPr lang="en-US" sz="650" dirty="0"/>
           </a:p>
@@ -15429,13 +15495,13 @@
       </p:sp>
       <p:sp>
         <p:nvSpPr>
-          <p:cNvPr id="27" name="Text 23"/>
-          <p:cNvSpPr/>
-          <p:nvPr/>
-        </p:nvSpPr>
-        <p:spPr>
-          <a:xfrm>
-            <a:off x="4750308" y="6080760"/>
+          <p:cNvPr id="30" name="Text 26"/>
+          <p:cNvSpPr/>
+          <p:nvPr/>
+        </p:nvSpPr>
+        <p:spPr>
+          <a:xfrm>
+            <a:off x="5614416" y="5888736"/>
             <a:ext cx="548640" cy="146304"/>
           </a:xfrm>
           <a:prstGeom prst="rect">
@@ -15460,7 +15526,7 @@
                 <a:ea typeface="IBM Plex Mono" pitchFamily="34" charset="-122"/>
                 <a:cs typeface="IBM Plex Mono" pitchFamily="34" charset="-120"/>
               </a:rPr>
-              <a:t>$6bn</a:t>
+              <a:t>$7bn</a:t>
             </a:r>
             <a:endParaRPr lang="en-US" sz="650" dirty="0"/>
           </a:p>
@@ -15468,13 +15534,13 @@
       </p:sp>
       <p:sp>
         <p:nvSpPr>
-          <p:cNvPr id="28" name="Text 24"/>
-          <p:cNvSpPr/>
-          <p:nvPr/>
-        </p:nvSpPr>
-        <p:spPr>
-          <a:xfrm>
-            <a:off x="6190488" y="6080760"/>
+          <p:cNvPr id="31" name="Text 27"/>
+          <p:cNvSpPr/>
+          <p:nvPr/>
+        </p:nvSpPr>
+        <p:spPr>
+          <a:xfrm>
+            <a:off x="7342632" y="5888736"/>
             <a:ext cx="548640" cy="146304"/>
           </a:xfrm>
           <a:prstGeom prst="rect">
@@ -15499,7 +15565,7 @@
                 <a:ea typeface="IBM Plex Mono" pitchFamily="34" charset="-122"/>
                 <a:cs typeface="IBM Plex Mono" pitchFamily="34" charset="-120"/>
               </a:rPr>
-              <a:t>$7bn</a:t>
+              <a:t>$8bn</a:t>
             </a:r>
             <a:endParaRPr lang="en-US" sz="650" dirty="0"/>
           </a:p>
@@ -15507,13 +15573,13 @@
       </p:sp>
       <p:sp>
         <p:nvSpPr>
-          <p:cNvPr id="29" name="Text 25"/>
-          <p:cNvSpPr/>
-          <p:nvPr/>
-        </p:nvSpPr>
-        <p:spPr>
-          <a:xfrm>
-            <a:off x="7630668" y="6080760"/>
+          <p:cNvPr id="32" name="Text 28"/>
+          <p:cNvSpPr/>
+          <p:nvPr/>
+        </p:nvSpPr>
+        <p:spPr>
+          <a:xfrm>
+            <a:off x="9070848" y="5888736"/>
             <a:ext cx="548640" cy="146304"/>
           </a:xfrm>
           <a:prstGeom prst="rect">
@@ -15538,7 +15604,7 @@
                 <a:ea typeface="IBM Plex Mono" pitchFamily="34" charset="-122"/>
                 <a:cs typeface="IBM Plex Mono" pitchFamily="34" charset="-120"/>
               </a:rPr>
-              <a:t>$8bn</a:t>
+              <a:t>$9bn</a:t>
             </a:r>
             <a:endParaRPr lang="en-US" sz="650" dirty="0"/>
           </a:p>
@@ -15546,57 +15612,18 @@
       </p:sp>
       <p:sp>
         <p:nvSpPr>
-          <p:cNvPr id="30" name="Text 26"/>
-          <p:cNvSpPr/>
-          <p:nvPr/>
-        </p:nvSpPr>
-        <p:spPr>
-          <a:xfrm>
-            <a:off x="9070848" y="6080760"/>
-            <a:ext cx="548640" cy="146304"/>
-          </a:xfrm>
-          <a:prstGeom prst="rect">
-            <a:avLst/>
-          </a:prstGeom>
-          <a:noFill/>
-          <a:ln/>
-        </p:spPr>
-        <p:txBody>
-          <a:bodyPr wrap="square" lIns="0" tIns="0" rIns="0" bIns="0" rtlCol="0" anchor="ctr"/>
-          <a:lstStyle/>
-          <a:p>
-            <a:pPr algn="ctr" indent="0" marL="0">
-              <a:buNone/>
-            </a:pPr>
-            <a:r>
-              <a:rPr lang="en-US" sz="650" dirty="0">
-                <a:solidFill>
-                  <a:srgbClr val="9A847C"/>
-                </a:solidFill>
-                <a:latin typeface="IBM Plex Mono" pitchFamily="34" charset="0"/>
-                <a:ea typeface="IBM Plex Mono" pitchFamily="34" charset="-122"/>
-                <a:cs typeface="IBM Plex Mono" pitchFamily="34" charset="-120"/>
-              </a:rPr>
-              <a:t>$9bn</a:t>
-            </a:r>
-            <a:endParaRPr lang="en-US" sz="650" dirty="0"/>
-          </a:p>
-        </p:txBody>
-      </p:sp>
-      <p:sp>
-        <p:nvSpPr>
-          <p:cNvPr id="31" name="Shape 27"/>
-          <p:cNvSpPr/>
-          <p:nvPr/>
-        </p:nvSpPr>
-        <p:spPr>
-          <a:xfrm>
-            <a:off x="566928" y="6272784"/>
-            <a:ext cx="9555480" cy="749808"/>
+          <p:cNvPr id="33" name="Shape 29"/>
+          <p:cNvSpPr/>
+          <p:nvPr/>
+        </p:nvSpPr>
+        <p:spPr>
+          <a:xfrm>
+            <a:off x="566928" y="6199632"/>
+            <a:ext cx="9555480" cy="822960"/>
           </a:xfrm>
           <a:prstGeom prst="roundRect">
             <a:avLst>
-              <a:gd name="adj" fmla="val 7317"/>
+              <a:gd name="adj" fmla="val 6667"/>
             </a:avLst>
           </a:prstGeom>
           <a:solidFill>
@@ -15607,14 +15634,14 @@
       </p:sp>
       <p:sp>
         <p:nvSpPr>
-          <p:cNvPr id="32" name="Text 28"/>
-          <p:cNvSpPr/>
-          <p:nvPr/>
-        </p:nvSpPr>
-        <p:spPr>
-          <a:xfrm>
-            <a:off x="795528" y="6272784"/>
-            <a:ext cx="9098280" cy="749808"/>
+          <p:cNvPr id="34" name="Text 30"/>
+          <p:cNvSpPr/>
+          <p:nvPr/>
+        </p:nvSpPr>
+        <p:spPr>
+          <a:xfrm>
+            <a:off x="795528" y="6199632"/>
+            <a:ext cx="9098280" cy="822960"/>
           </a:xfrm>
           <a:prstGeom prst="rect">
             <a:avLst/>
@@ -15633,7 +15660,7 @@
               <a:buNone/>
             </a:pPr>
             <a:r>
-              <a:rPr lang="en-US" sz="950" b="1" dirty="0">
+              <a:rPr lang="en-US" sz="900" b="1" dirty="0">
                 <a:solidFill>
                   <a:srgbClr val="C1121F"/>
                 </a:solidFill>
@@ -15650,7 +15677,7 @@
               <a:buNone/>
             </a:pPr>
             <a:r>
-              <a:rPr lang="en-US" sz="950" dirty="0">
+              <a:rPr lang="en-US" sz="900" dirty="0">
                 <a:solidFill>
                   <a:srgbClr val="1B1714"/>
                 </a:solidFill>
@@ -15658,7 +15685,7 @@
                 <a:ea typeface="IBM Plex Sans KR" pitchFamily="34" charset="-122"/>
                 <a:cs typeface="IBM Plex Sans KR" pitchFamily="34" charset="-120"/>
               </a:rPr>
-              <a:t>ex-AMPC EBITDA $554mm에 peer 8~13x → EV $4.4~7.2bn. 순차입금 $6.4bn 감안 시 지분가치는 </a:t>
+              <a:t>실측 peer는 현재 다운사이클로 </a:t>
             </a:r>
             <a:pPr indent="0" marL="0">
               <a:lnSpc>
@@ -15667,15 +15694,15 @@
               <a:buNone/>
             </a:pPr>
             <a:r>
-              <a:rPr lang="en-US" sz="950" b="1" dirty="0">
-                <a:solidFill>
-                  <a:srgbClr val="1E7A4D"/>
+              <a:rPr lang="en-US" sz="900" b="1" dirty="0">
+                <a:solidFill>
+                  <a:srgbClr val="6F6960"/>
                 </a:solidFill>
                 <a:latin typeface="IBM Plex Sans KR" pitchFamily="34" charset="0"/>
                 <a:ea typeface="IBM Plex Sans KR" pitchFamily="34" charset="-122"/>
                 <a:cs typeface="IBM Plex Sans KR" pitchFamily="34" charset="-120"/>
               </a:rPr>
-              <a:t>13x(+$0.8bn)에서야 (+)</a:t>
+              <a:t>15~27x(트로프)</a:t>
             </a:r>
             <a:pPr indent="0" marL="0">
               <a:lnSpc>
@@ -15684,7 +15711,7 @@
               <a:buNone/>
             </a:pPr>
             <a:r>
-              <a:rPr lang="en-US" sz="950" dirty="0">
+              <a:rPr lang="en-US" sz="900" dirty="0">
                 <a:solidFill>
                   <a:srgbClr val="1B1714"/>
                 </a:solidFill>
@@ -15692,7 +15719,7 @@
                 <a:ea typeface="IBM Plex Sans KR" pitchFamily="34" charset="-122"/>
                 <a:cs typeface="IBM Plex Sans KR" pitchFamily="34" charset="-120"/>
               </a:rPr>
-              <a:t>, 8x는 −$2.0bn. DCF도 ~8.7x로 peer 하단이라, 딜 성립에 필요한 </a:t>
+              <a:t>, 정상화 ~13~15x(LGES '27F 15x·CATL ~13x). run-rate 역산 필요 </a:t>
             </a:r>
             <a:pPr indent="0" marL="0">
               <a:lnSpc>
@@ -15701,15 +15728,15 @@
               <a:buNone/>
             </a:pPr>
             <a:r>
-              <a:rPr lang="en-US" sz="950" b="1" dirty="0">
-                <a:solidFill>
-                  <a:srgbClr val="C1121F"/>
+              <a:rPr lang="en-US" sz="900" b="1" dirty="0">
+                <a:solidFill>
+                  <a:srgbClr val="1E7A4D"/>
                 </a:solidFill>
                 <a:latin typeface="IBM Plex Sans KR" pitchFamily="34" charset="0"/>
                 <a:ea typeface="IBM Plex Sans KR" pitchFamily="34" charset="-122"/>
                 <a:cs typeface="IBM Plex Sans KR" pitchFamily="34" charset="-120"/>
               </a:rPr>
-              <a:t>12.6~15.4x는 peer 상단 초과</a:t>
+              <a:t>12.6~15.4x는 정상화 peer와 거의 일치</a:t>
             </a:r>
             <a:pPr indent="0" marL="0">
               <a:lnSpc>
@@ -15718,7 +15745,7 @@
               <a:buNone/>
             </a:pPr>
             <a:r>
-              <a:rPr lang="en-US" sz="950" dirty="0">
+              <a:rPr lang="en-US" sz="900" dirty="0">
                 <a:solidFill>
                   <a:srgbClr val="1B1714"/>
                 </a:solidFill>
@@ -15726,15 +15753,49 @@
                 <a:ea typeface="IBM Plex Sans KR" pitchFamily="34" charset="-122"/>
                 <a:cs typeface="IBM Plex Sans KR" pitchFamily="34" charset="-120"/>
               </a:rPr>
-              <a:t> → 그랜트·희석·ex-AMPC 마진 개선으로 메워야. (AMPC 포함 시 EV의 75%가 보조금)</a:t>
-            </a:r>
-            <a:endParaRPr lang="en-US" sz="950" dirty="0"/>
-          </a:p>
-        </p:txBody>
-      </p:sp>
-      <p:sp>
-        <p:nvSpPr>
-          <p:cNvPr id="33" name="Shape 29"/>
+              <a:t>(당초 "peer 상단 초과"는 8~13x 보수가정 탓). DCF 내재 8.7x는 오히려 할인. 단 </a:t>
+            </a:r>
+            <a:pPr indent="0" marL="0">
+              <a:lnSpc>
+                <a:spcPct val="112000"/>
+              </a:lnSpc>
+              <a:buNone/>
+            </a:pPr>
+            <a:r>
+              <a:rPr lang="en-US" sz="900" b="1" dirty="0">
+                <a:solidFill>
+                  <a:srgbClr val="C1121F"/>
+                </a:solidFill>
+                <a:latin typeface="IBM Plex Sans KR" pitchFamily="34" charset="0"/>
+                <a:ea typeface="IBM Plex Sans KR" pitchFamily="34" charset="-122"/>
+                <a:cs typeface="IBM Plex Sans KR" pitchFamily="34" charset="-120"/>
+              </a:rPr>
+              <a:t>분모를 2029E($455mm)로 당기면 필요멀티플 15.3~18.8x로 상승</a:t>
+            </a:r>
+            <a:pPr indent="0" marL="0">
+              <a:lnSpc>
+                <a:spcPct val="112000"/>
+              </a:lnSpc>
+              <a:buNone/>
+            </a:pPr>
+            <a:r>
+              <a:rPr lang="en-US" sz="900" dirty="0">
+                <a:solidFill>
+                  <a:srgbClr val="1B1714"/>
+                </a:solidFill>
+                <a:latin typeface="IBM Plex Sans KR" pitchFamily="34" charset="0"/>
+                <a:ea typeface="IBM Plex Sans KR" pitchFamily="34" charset="-122"/>
+                <a:cs typeface="IBM Plex Sans KR" pitchFamily="34" charset="-120"/>
+              </a:rPr>
+              <a:t> — EBITDA 연도 기준이 결과를 좌우. peer는 자체보조금 포함(우리 ex-AMPC, 보수적).</a:t>
+            </a:r>
+            <a:endParaRPr lang="en-US" sz="900" dirty="0"/>
+          </a:p>
+        </p:txBody>
+      </p:sp>
+      <p:sp>
+        <p:nvSpPr>
+          <p:cNvPr id="35" name="Shape 31"/>
           <p:cNvSpPr/>
           <p:nvPr/>
         </p:nvSpPr>
@@ -15757,7 +15818,7 @@
       </p:sp>
       <p:sp>
         <p:nvSpPr>
-          <p:cNvPr id="34" name="Text 30"/>
+          <p:cNvPr id="36" name="Text 32"/>
           <p:cNvSpPr/>
           <p:nvPr/>
         </p:nvSpPr>
@@ -15796,7 +15857,7 @@
       </p:sp>
       <p:sp>
         <p:nvSpPr>
-          <p:cNvPr id="35" name="Text 31"/>
+          <p:cNvPr id="37" name="Text 33"/>
           <p:cNvSpPr/>
           <p:nvPr/>
         </p:nvSpPr>

--- a/sk_valuation_project/output/SK_Funding_v3_editable.pptx
+++ b/sk_valuation_project/output/SK_Funding_v3_editable.pptx
@@ -13900,8 +13900,8 @@
         </p:nvSpPr>
         <p:spPr>
           <a:xfrm>
-            <a:off x="566928" y="4480560"/>
-            <a:ext cx="4572000" cy="384048"/>
+            <a:off x="566928" y="4443984"/>
+            <a:ext cx="4572000" cy="457200"/>
           </a:xfrm>
           <a:prstGeom prst="rect">
             <a:avLst/>
@@ -13915,12 +13915,12 @@
           <a:p>
             <a:pPr indent="0" marL="0">
               <a:lnSpc>
-                <a:spcPct val="110000"/>
+                <a:spcPct val="108000"/>
               </a:lnSpc>
               <a:buNone/>
             </a:pPr>
             <a:r>
-              <a:rPr lang="en-US" sz="750" i="1" dirty="0">
+              <a:rPr lang="en-US" sz="700" i="1" dirty="0">
                 <a:solidFill>
                   <a:srgbClr val="9A847C"/>
                 </a:solidFill>
@@ -13928,9 +13928,9 @@
                 <a:ea typeface="IBM Plex Sans KR" pitchFamily="34" charset="-122"/>
                 <a:cs typeface="IBM Plex Sans KR" pitchFamily="34" charset="-120"/>
               </a:rPr>
-              <a:t>★ 현재 forward는 EV 다운사이클로 EBITDA 트로프 → 15~27x까지 상승(LGES 26x'25F), '27F 정상화 ~13~15x. peer EBITDA엔 자체 보조금 포함(우리 ex-AMPC=보수적). 출처: 증권사·stockanalysis·gurufocus '26.7</a:t>
-            </a:r>
-            <a:endParaRPr lang="en-US" sz="750" dirty="0"/>
+              <a:t>★ LGES EV/EBITDA 26x'25F→19x'26F→15x'27F(stockanalysis·미래에셋) · CATL P/E 20.5x'26E(UBS) · 삼성SDI '26 영업손실→n.m.(미래에셋) · Fluence adjEBITDA$40~60M→n.m. 섹터 트로프로 실측 15~27x·정상화 ~13~15x. peer는 자체보조금 포함(우리 ex-AMPC=보수적) · 정밀값 Bloomberg/FactSet 확정 要</a:t>
+            </a:r>
+            <a:endParaRPr lang="en-US" sz="700" dirty="0"/>
           </a:p>
         </p:txBody>
       </p:sp>

--- a/sk_valuation_project/output/SK_Funding_v3_editable.pptx
+++ b/sk_valuation_project/output/SK_Funding_v3_editable.pptx
@@ -2182,7 +2182,7 @@
                           <a:ea typeface="IBM Plex Mono" pitchFamily="34" charset="-122"/>
                           <a:cs typeface="IBM Plex Mono" pitchFamily="34" charset="-120"/>
                         </a:rPr>
-                        <a:t>21.2 GWh / 85%</a:t>
+                        <a:t>11.0 GWh / 85%</a:t>
                       </a:r>
                       <a:endParaRPr lang="en-US" sz="950" dirty="0">
                         <a:latin typeface="IBM Plex Mono" charset="0"/>
@@ -2458,7 +2458,7 @@
                           <a:ea typeface="IBM Plex Mono" pitchFamily="34" charset="-122"/>
                           <a:cs typeface="IBM Plex Mono" pitchFamily="34" charset="-120"/>
                         </a:rPr>
-                        <a:t>~$2.7bn</a:t>
+                        <a:t>~$1.4bn</a:t>
                       </a:r>
                       <a:endParaRPr lang="en-US" sz="950" dirty="0">
                         <a:latin typeface="IBM Plex Mono" charset="0"/>
@@ -4039,7 +4039,7 @@
                 <a:ea typeface="IBM Plex Mono" pitchFamily="34" charset="-122"/>
                 <a:cs typeface="IBM Plex Mono" pitchFamily="34" charset="-120"/>
               </a:rPr>
-              <a:t>$0.4bn</a:t>
+              <a:t>$0.2bn</a:t>
             </a:r>
             <a:endParaRPr lang="en-US" sz="2000" dirty="0"/>
           </a:p>
@@ -4218,7 +4218,7 @@
                 <a:ea typeface="IBM Plex Mono" pitchFamily="34" charset="-122"/>
                 <a:cs typeface="IBM Plex Mono" pitchFamily="34" charset="-120"/>
               </a:rPr>
-              <a:t>$1.4bn</a:t>
+              <a:t>$1.2bn</a:t>
             </a:r>
             <a:endParaRPr lang="en-US" sz="2400" dirty="0"/>
           </a:p>
@@ -4413,7 +4413,7 @@
                 <a:ea typeface="IBM Plex Sans KR" pitchFamily="34" charset="-122"/>
                 <a:cs typeface="IBM Plex Sans KR" pitchFamily="34" charset="-120"/>
               </a:rPr>
-              <a:t>run-rate ex-AMPC EBITDA $554mm (BA 241 + OT 313, 9% 마진)</a:t>
+              <a:t>run-rate ex-AMPC EBITDA $438mm (BA 125 + OT 313, 9% 마진)</a:t>
             </a:r>
             <a:endParaRPr lang="en-US" sz="1050" dirty="0"/>
           </a:p>
@@ -4503,7 +4503,7 @@
         <p:spPr>
           <a:xfrm>
             <a:off x="6208776" y="4928616"/>
-            <a:ext cx="928116" cy="219456"/>
+            <a:ext cx="1031240" cy="219456"/>
           </a:xfrm>
           <a:prstGeom prst="rect">
             <a:avLst/>
@@ -4522,8 +4522,8 @@
         </p:nvSpPr>
         <p:spPr>
           <a:xfrm>
-            <a:off x="7136892" y="4928616"/>
-            <a:ext cx="2784348" cy="219456"/>
+            <a:off x="7240016" y="4928616"/>
+            <a:ext cx="2681224" cy="219456"/>
           </a:xfrm>
           <a:prstGeom prst="rect">
             <a:avLst/>
@@ -4543,7 +4543,7 @@
         <p:spPr>
           <a:xfrm>
             <a:off x="6208776" y="4928616"/>
-            <a:ext cx="928116" cy="219456"/>
+            <a:ext cx="1031240" cy="219456"/>
           </a:xfrm>
           <a:prstGeom prst="rect">
             <a:avLst/>
@@ -4567,7 +4567,7 @@
                 <a:ea typeface="IBM Plex Mono" pitchFamily="34" charset="-122"/>
                 <a:cs typeface="IBM Plex Mono" pitchFamily="34" charset="-120"/>
               </a:rPr>
-              <a:t>ex-AMPC $1.2bn</a:t>
+              <a:t>ex-AMPC $1.0bn</a:t>
             </a:r>
             <a:endParaRPr lang="en-US" sz="750" dirty="0"/>
           </a:p>
@@ -4581,8 +4581,8 @@
         </p:nvSpPr>
         <p:spPr>
           <a:xfrm>
-            <a:off x="7136892" y="4928616"/>
-            <a:ext cx="2784348" cy="219456"/>
+            <a:off x="7240016" y="4928616"/>
+            <a:ext cx="2681224" cy="219456"/>
           </a:xfrm>
           <a:prstGeom prst="rect">
             <a:avLst/>
@@ -4606,7 +4606,7 @@
                 <a:ea typeface="IBM Plex Mono" pitchFamily="34" charset="-122"/>
                 <a:cs typeface="IBM Plex Mono" pitchFamily="34" charset="-120"/>
               </a:rPr>
-              <a:t>AMPC PV $3.6bn (75%)</a:t>
+              <a:t>AMPC PV $2.7bn (74%)</a:t>
             </a:r>
             <a:endParaRPr lang="en-US" sz="800" dirty="0"/>
           </a:p>
@@ -4645,7 +4645,7 @@
                 <a:ea typeface="IBM Plex Sans KR" pitchFamily="34" charset="-122"/>
                 <a:cs typeface="IBM Plex Sans KR" pitchFamily="34" charset="-120"/>
               </a:rPr>
-              <a:t>DCF EV $4.8bn</a:t>
+              <a:t>DCF EV $3.6bn</a:t>
             </a:r>
             <a:pPr indent="0" marL="0">
               <a:buNone/>
@@ -4659,7 +4659,7 @@
                 <a:ea typeface="IBM Plex Sans KR" pitchFamily="34" charset="-122"/>
                 <a:cs typeface="IBM Plex Sans KR" pitchFamily="34" charset="-120"/>
               </a:rPr>
-              <a:t> 의 75%가 한시 AMPC → 멀티플엔 ex-AMPC만. WACC 10.5%·TGR 2%·Ke 13%</a:t>
+              <a:t> 의 74%가 한시 AMPC → 멀티플엔 ex-AMPC만. WACC 10.5%·TGR 2%·Ke 13%</a:t>
             </a:r>
             <a:endParaRPr lang="en-US" sz="800" dirty="0"/>
           </a:p>
@@ -4760,7 +4760,7 @@
                 <a:ea typeface="Space Grotesk" pitchFamily="34" charset="-122"/>
                 <a:cs typeface="Space Grotesk" pitchFamily="34" charset="-120"/>
               </a:rPr>
-              <a:t>50.9</a:t>
+              <a:t>40.7</a:t>
             </a:r>
             <a:pPr indent="0" marL="0">
               <a:buNone/>
@@ -4875,7 +4875,7 @@
                 <a:ea typeface="Space Grotesk" pitchFamily="34" charset="-122"/>
                 <a:cs typeface="Space Grotesk" pitchFamily="34" charset="-120"/>
               </a:rPr>
-              <a:t>554</a:t>
+              <a:t>438</a:t>
             </a:r>
             <a:pPr indent="0" marL="0">
               <a:buNone/>
@@ -4990,7 +4990,7 @@
                 <a:ea typeface="Space Grotesk" pitchFamily="34" charset="-122"/>
                 <a:cs typeface="Space Grotesk" pitchFamily="34" charset="-120"/>
               </a:rPr>
-              <a:t>1.4</a:t>
+              <a:t>1.2</a:t>
             </a:r>
             <a:pPr indent="0" marL="0">
               <a:buNone/>
@@ -5105,7 +5105,7 @@
                 <a:ea typeface="Space Grotesk" pitchFamily="34" charset="-122"/>
                 <a:cs typeface="Space Grotesk" pitchFamily="34" charset="-120"/>
               </a:rPr>
-              <a:t>4.8</a:t>
+              <a:t>3.6</a:t>
             </a:r>
             <a:pPr indent="0" marL="0">
               <a:buNone/>
@@ -5926,7 +5926,7 @@
                 <a:ea typeface="IBM Plex Mono" pitchFamily="34" charset="-122"/>
                 <a:cs typeface="IBM Plex Mono" pitchFamily="34" charset="-120"/>
               </a:rPr>
-              <a:t>총 $1.4bn 일괄 조달</a:t>
+              <a:t>총 $1.22bn 일괄 조달</a:t>
             </a:r>
             <a:endParaRPr lang="en-US" sz="800" dirty="0"/>
           </a:p>
@@ -6006,7 +6006,7 @@
                 <a:ea typeface="IBM Plex Mono" pitchFamily="34" charset="-122"/>
                 <a:cs typeface="IBM Plex Mono" pitchFamily="34" charset="-120"/>
               </a:rPr>
-              <a:t>$0.14bn</a:t>
+              <a:t>$0.12bn</a:t>
             </a:r>
             <a:endParaRPr lang="en-US" sz="950" dirty="0"/>
           </a:p>
@@ -6125,7 +6125,7 @@
                 <a:ea typeface="IBM Plex Mono" pitchFamily="34" charset="-122"/>
                 <a:cs typeface="IBM Plex Mono" pitchFamily="34" charset="-120"/>
               </a:rPr>
-              <a:t>$0.85bn</a:t>
+              <a:t>$0.73bn</a:t>
             </a:r>
             <a:endParaRPr lang="en-US" sz="950" dirty="0"/>
           </a:p>
@@ -6500,7 +6500,7 @@
                 <a:ea typeface="IBM Plex Sans KR" pitchFamily="34" charset="-122"/>
                 <a:cs typeface="IBM Plex Sans KR" pitchFamily="34" charset="-120"/>
               </a:rPr>
-              <a:t>조달 믹스 그랜트 10% · 지분 30% · 비소구부채 60% ($1.4bn) → 자체 $0.4bn + OT $1.0bn 증자</a:t>
+              <a:t>조달 믹스 그랜트 10% · 지분 30% · 비소구부채 60% ($1.22bn) → 자체 $0.2bn + OT $1.0bn 증자</a:t>
             </a:r>
             <a:endParaRPr lang="en-US" sz="950" dirty="0"/>
           </a:p>
@@ -6644,7 +6644,7 @@
                 <a:ea typeface="Noto Serif KR" pitchFamily="34" charset="-122"/>
                 <a:cs typeface="Noto Serif KR" pitchFamily="34" charset="-120"/>
               </a:rPr>
-              <a:t>BA가 $1.4bn 일괄 조달</a:t>
+              <a:t>BA가 $1.22bn 일괄 조달</a:t>
             </a:r>
             <a:endParaRPr lang="en-US" sz="1700" dirty="0"/>
           </a:p>
@@ -6833,7 +6833,7 @@
                 <a:ea typeface="IBM Plex Sans KR" pitchFamily="34" charset="-122"/>
                 <a:cs typeface="IBM Plex Sans KR" pitchFamily="34" charset="-120"/>
               </a:rPr>
-              <a:t>BA 개조비 $0.4bn을 정부 보조금(MESC·48C)으로 최대한. 무상환·무희석·무CoC → EBIT=0 자산에 깨끗한 자금.</a:t>
+              <a:t>BA 개조비 $0.2bn을 정부 보조금(MESC·48C)으로 최대한. 무상환·무희석·무CoC → EBIT=0 자산에 깨끗한 자금.</a:t>
             </a:r>
             <a:endParaRPr lang="en-US" sz="1000" dirty="0"/>
           </a:p>
@@ -6914,7 +6914,7 @@
                 <a:ea typeface="IBM Plex Sans KR" pitchFamily="34" charset="-122"/>
                 <a:cs typeface="IBM Plex Sans KR" pitchFamily="34" charset="-120"/>
               </a:rPr>
-              <a:t>BA가 $1.4bn 일괄 조달 → 자체 $0.4bn + OT 증자 $1.0bn. 조달은 </a:t>
+              <a:t>BA가 $1.22bn 일괄 조달 → 자체 $0.2bn + OT 증자 $1.0bn. 조달은 </a:t>
             </a:r>
             <a:pPr indent="0" marL="0">
               <a:lnSpc>
@@ -6948,7 +6948,7 @@
                 <a:ea typeface="IBM Plex Sans KR" pitchFamily="34" charset="-122"/>
                 <a:cs typeface="IBM Plex Sans KR" pitchFamily="34" charset="-120"/>
               </a:rPr>
-              <a:t>, 부족분만 비소구부채·Equity. ($1.4bn이 BA에 집중 — 조달여력 확인 ★)</a:t>
+              <a:t>, 부족분만 비소구부채·Equity. ($1.22bn이 BA에 집중 — 조달여력 확인 ★)</a:t>
             </a:r>
             <a:endParaRPr lang="en-US" sz="1050" dirty="0"/>
           </a:p>
@@ -7680,7 +7680,7 @@
                 <a:ea typeface="IBM Plex Mono" pitchFamily="34" charset="-122"/>
                 <a:cs typeface="IBM Plex Mono" pitchFamily="34" charset="-120"/>
               </a:rPr>
-              <a:t>$554mm</a:t>
+              <a:t>$438mm</a:t>
             </a:r>
             <a:endParaRPr lang="en-US" sz="1000" dirty="0"/>
           </a:p>
@@ -7983,7 +7983,7 @@
                 <a:ea typeface="IBM Plex Mono" pitchFamily="34" charset="-122"/>
                 <a:cs typeface="IBM Plex Mono" pitchFamily="34" charset="-120"/>
               </a:rPr>
-              <a:t>$1.42bn</a:t>
+              <a:t>$1.22bn</a:t>
             </a:r>
             <a:endParaRPr lang="en-US" sz="1000" dirty="0"/>
           </a:p>
@@ -9147,7 +9147,7 @@
                           <a:ea typeface="IBM Plex Mono" pitchFamily="34" charset="-122"/>
                           <a:cs typeface="IBM Plex Mono" pitchFamily="34" charset="-120"/>
                         </a:rPr>
-                        <a:t>$8.6bn</a:t>
+                        <a:t>$8.2bn</a:t>
                       </a:r>
                       <a:endParaRPr lang="en-US" sz="950" dirty="0">
                         <a:latin typeface="IBM Plex Mono" charset="0"/>
@@ -9215,7 +9215,7 @@
                           <a:ea typeface="Space Grotesk" pitchFamily="34" charset="-122"/>
                           <a:cs typeface="Space Grotesk" pitchFamily="34" charset="-120"/>
                         </a:rPr>
-                        <a:t>15.4x</a:t>
+                        <a:t>18.8x</a:t>
                       </a:r>
                       <a:endParaRPr lang="en-US" sz="1200" dirty="0">
                         <a:latin typeface="Space Grotesk" charset="0"/>
@@ -9283,7 +9283,7 @@
                           <a:ea typeface="IBM Plex Mono" pitchFamily="34" charset="-122"/>
                           <a:cs typeface="IBM Plex Mono" pitchFamily="34" charset="-120"/>
                         </a:rPr>
-                        <a:t>10.7%</a:t>
+                        <a:t>13.0%</a:t>
                       </a:r>
                       <a:endParaRPr lang="en-US" sz="800" dirty="0">
                         <a:latin typeface="IBM Plex Mono" charset="0"/>
@@ -9557,7 +9557,7 @@
                           <a:ea typeface="IBM Plex Mono" pitchFamily="34" charset="-122"/>
                           <a:cs typeface="IBM Plex Mono" pitchFamily="34" charset="-120"/>
                         </a:rPr>
-                        <a:t>$7.8bn</a:t>
+                        <a:t>$7.6bn</a:t>
                       </a:r>
                       <a:endParaRPr lang="en-US" sz="950" dirty="0">
                         <a:latin typeface="IBM Plex Mono" charset="0"/>
@@ -9625,7 +9625,7 @@
                           <a:ea typeface="Space Grotesk" pitchFamily="34" charset="-122"/>
                           <a:cs typeface="Space Grotesk" pitchFamily="34" charset="-120"/>
                         </a:rPr>
-                        <a:t>14.1x</a:t>
+                        <a:t>17.4x</a:t>
                       </a:r>
                       <a:endParaRPr lang="en-US" sz="1200" dirty="0">
                         <a:latin typeface="Space Grotesk" charset="0"/>
@@ -9693,7 +9693,7 @@
                           <a:ea typeface="IBM Plex Mono" pitchFamily="34" charset="-122"/>
                           <a:cs typeface="IBM Plex Mono" pitchFamily="34" charset="-120"/>
                         </a:rPr>
-                        <a:t>9.8%</a:t>
+                        <a:t>12.0%</a:t>
                       </a:r>
                       <a:endParaRPr lang="en-US" sz="800" dirty="0">
                         <a:latin typeface="IBM Plex Mono" charset="0"/>
@@ -9967,7 +9967,7 @@
                           <a:ea typeface="IBM Plex Mono" pitchFamily="34" charset="-122"/>
                           <a:cs typeface="IBM Plex Mono" pitchFamily="34" charset="-120"/>
                         </a:rPr>
-                        <a:t>$7.8bn</a:t>
+                        <a:t>$7.6bn</a:t>
                       </a:r>
                       <a:endParaRPr lang="en-US" sz="950" dirty="0">
                         <a:latin typeface="IBM Plex Mono" charset="0"/>
@@ -10035,7 +10035,7 @@
                           <a:ea typeface="Space Grotesk" pitchFamily="34" charset="-122"/>
                           <a:cs typeface="Space Grotesk" pitchFamily="34" charset="-120"/>
                         </a:rPr>
-                        <a:t>14.1x</a:t>
+                        <a:t>17.4x</a:t>
                       </a:r>
                       <a:endParaRPr lang="en-US" sz="1200" dirty="0">
                         <a:latin typeface="Space Grotesk" charset="0"/>
@@ -10103,7 +10103,7 @@
                           <a:ea typeface="IBM Plex Mono" pitchFamily="34" charset="-122"/>
                           <a:cs typeface="IBM Plex Mono" pitchFamily="34" charset="-120"/>
                         </a:rPr>
-                        <a:t>9.8%</a:t>
+                        <a:t>12.0%</a:t>
                       </a:r>
                       <a:endParaRPr lang="en-US" sz="800" dirty="0">
                         <a:latin typeface="IBM Plex Mono" charset="0"/>
@@ -10220,6 +10220,416 @@
                       <a:tailEnd type="none" w="med" len="med"/>
                     </a:lnB>
                     <a:solidFill>
+                      <a:srgbClr val="FFFFFF"/>
+                    </a:solidFill>
+                  </a:tcPr>
+                </a:tc>
+                <a:tc>
+                  <a:txBody>
+                    <a:bodyPr/>
+                    <a:lstStyle/>
+                    <a:p>
+                      <a:pPr algn="ctr" indent="0" marL="0">
+                        <a:buNone/>
+                      </a:pPr>
+                      <a:r>
+                        <a:rPr lang="en-US" sz="950" dirty="0">
+                          <a:solidFill>
+                            <a:srgbClr val="1B1714"/>
+                          </a:solidFill>
+                          <a:latin typeface="IBM Plex Mono" pitchFamily="34" charset="0"/>
+                          <a:ea typeface="IBM Plex Mono" pitchFamily="34" charset="-122"/>
+                          <a:cs typeface="IBM Plex Mono" pitchFamily="34" charset="-120"/>
+                        </a:rPr>
+                        <a:t>10%</a:t>
+                      </a:r>
+                      <a:endParaRPr lang="en-US" sz="950" dirty="0">
+                        <a:latin typeface="IBM Plex Mono" charset="0"/>
+                        <a:ea typeface="IBM Plex Mono" charset="0"/>
+                        <a:cs typeface="IBM Plex Mono" charset="0"/>
+                      </a:endParaRPr>
+                    </a:p>
+                  </a:txBody>
+                  <a:tcPr marL="63500" marR="63500" marT="25400" marB="25400" anchor="ctr">
+                    <a:lnL w="6350" cap="flat" cmpd="sng" algn="ctr">
+                      <a:solidFill>
+                        <a:srgbClr val="E4DED4"/>
+                      </a:solidFill>
+                      <a:prstDash val="solid"/>
+                      <a:round/>
+                      <a:headEnd type="none" w="med" len="med"/>
+                      <a:tailEnd type="none" w="med" len="med"/>
+                    </a:lnL>
+                    <a:lnR w="6350" cap="flat" cmpd="sng" algn="ctr">
+                      <a:solidFill>
+                        <a:srgbClr val="E4DED4"/>
+                      </a:solidFill>
+                      <a:prstDash val="solid"/>
+                      <a:round/>
+                      <a:headEnd type="none" w="med" len="med"/>
+                      <a:tailEnd type="none" w="med" len="med"/>
+                    </a:lnR>
+                    <a:lnT w="6350" cap="flat" cmpd="sng" algn="ctr">
+                      <a:solidFill>
+                        <a:srgbClr val="E4DED4"/>
+                      </a:solidFill>
+                      <a:prstDash val="solid"/>
+                      <a:round/>
+                      <a:headEnd type="none" w="med" len="med"/>
+                      <a:tailEnd type="none" w="med" len="med"/>
+                    </a:lnT>
+                    <a:lnB w="6350" cap="flat" cmpd="sng" algn="ctr">
+                      <a:solidFill>
+                        <a:srgbClr val="E4DED4"/>
+                      </a:solidFill>
+                      <a:prstDash val="solid"/>
+                      <a:round/>
+                      <a:headEnd type="none" w="med" len="med"/>
+                      <a:tailEnd type="none" w="med" len="med"/>
+                    </a:lnB>
+                    <a:solidFill>
+                      <a:srgbClr val="FFFFFF"/>
+                    </a:solidFill>
+                  </a:tcPr>
+                </a:tc>
+                <a:tc>
+                  <a:txBody>
+                    <a:bodyPr/>
+                    <a:lstStyle/>
+                    <a:p>
+                      <a:pPr algn="ctr" indent="0" marL="0">
+                        <a:buNone/>
+                      </a:pPr>
+                      <a:r>
+                        <a:rPr lang="en-US" sz="950" dirty="0">
+                          <a:solidFill>
+                            <a:srgbClr val="1B1714"/>
+                          </a:solidFill>
+                          <a:latin typeface="IBM Plex Mono" pitchFamily="34" charset="0"/>
+                          <a:ea typeface="IBM Plex Mono" pitchFamily="34" charset="-122"/>
+                          <a:cs typeface="IBM Plex Mono" pitchFamily="34" charset="-120"/>
+                        </a:rPr>
+                        <a:t>49%</a:t>
+                      </a:r>
+                      <a:endParaRPr lang="en-US" sz="950" dirty="0">
+                        <a:latin typeface="IBM Plex Mono" charset="0"/>
+                        <a:ea typeface="IBM Plex Mono" charset="0"/>
+                        <a:cs typeface="IBM Plex Mono" charset="0"/>
+                      </a:endParaRPr>
+                    </a:p>
+                  </a:txBody>
+                  <a:tcPr marL="63500" marR="63500" marT="25400" marB="25400" anchor="ctr">
+                    <a:lnL w="6350" cap="flat" cmpd="sng" algn="ctr">
+                      <a:solidFill>
+                        <a:srgbClr val="E4DED4"/>
+                      </a:solidFill>
+                      <a:prstDash val="solid"/>
+                      <a:round/>
+                      <a:headEnd type="none" w="med" len="med"/>
+                      <a:tailEnd type="none" w="med" len="med"/>
+                    </a:lnL>
+                    <a:lnR w="6350" cap="flat" cmpd="sng" algn="ctr">
+                      <a:solidFill>
+                        <a:srgbClr val="E4DED4"/>
+                      </a:solidFill>
+                      <a:prstDash val="solid"/>
+                      <a:round/>
+                      <a:headEnd type="none" w="med" len="med"/>
+                      <a:tailEnd type="none" w="med" len="med"/>
+                    </a:lnR>
+                    <a:lnT w="6350" cap="flat" cmpd="sng" algn="ctr">
+                      <a:solidFill>
+                        <a:srgbClr val="E4DED4"/>
+                      </a:solidFill>
+                      <a:prstDash val="solid"/>
+                      <a:round/>
+                      <a:headEnd type="none" w="med" len="med"/>
+                      <a:tailEnd type="none" w="med" len="med"/>
+                    </a:lnT>
+                    <a:lnB w="6350" cap="flat" cmpd="sng" algn="ctr">
+                      <a:solidFill>
+                        <a:srgbClr val="E4DED4"/>
+                      </a:solidFill>
+                      <a:prstDash val="solid"/>
+                      <a:round/>
+                      <a:headEnd type="none" w="med" len="med"/>
+                      <a:tailEnd type="none" w="med" len="med"/>
+                    </a:lnB>
+                    <a:solidFill>
+                      <a:srgbClr val="FFFFFF"/>
+                    </a:solidFill>
+                  </a:tcPr>
+                </a:tc>
+                <a:tc>
+                  <a:txBody>
+                    <a:bodyPr/>
+                    <a:lstStyle/>
+                    <a:p>
+                      <a:pPr algn="ctr" indent="0" marL="0">
+                        <a:buNone/>
+                      </a:pPr>
+                      <a:r>
+                        <a:rPr lang="en-US" sz="950" dirty="0">
+                          <a:solidFill>
+                            <a:srgbClr val="1B1714"/>
+                          </a:solidFill>
+                          <a:latin typeface="IBM Plex Mono" pitchFamily="34" charset="0"/>
+                          <a:ea typeface="IBM Plex Mono" pitchFamily="34" charset="-122"/>
+                          <a:cs typeface="IBM Plex Mono" pitchFamily="34" charset="-120"/>
+                        </a:rPr>
+                        <a:t>$7.1bn</a:t>
+                      </a:r>
+                      <a:endParaRPr lang="en-US" sz="950" dirty="0">
+                        <a:latin typeface="IBM Plex Mono" charset="0"/>
+                        <a:ea typeface="IBM Plex Mono" charset="0"/>
+                        <a:cs typeface="IBM Plex Mono" charset="0"/>
+                      </a:endParaRPr>
+                    </a:p>
+                  </a:txBody>
+                  <a:tcPr marL="63500" marR="63500" marT="25400" marB="25400" anchor="ctr">
+                    <a:lnL w="6350" cap="flat" cmpd="sng" algn="ctr">
+                      <a:solidFill>
+                        <a:srgbClr val="E4DED4"/>
+                      </a:solidFill>
+                      <a:prstDash val="solid"/>
+                      <a:round/>
+                      <a:headEnd type="none" w="med" len="med"/>
+                      <a:tailEnd type="none" w="med" len="med"/>
+                    </a:lnL>
+                    <a:lnR w="6350" cap="flat" cmpd="sng" algn="ctr">
+                      <a:solidFill>
+                        <a:srgbClr val="E4DED4"/>
+                      </a:solidFill>
+                      <a:prstDash val="solid"/>
+                      <a:round/>
+                      <a:headEnd type="none" w="med" len="med"/>
+                      <a:tailEnd type="none" w="med" len="med"/>
+                    </a:lnR>
+                    <a:lnT w="6350" cap="flat" cmpd="sng" algn="ctr">
+                      <a:solidFill>
+                        <a:srgbClr val="E4DED4"/>
+                      </a:solidFill>
+                      <a:prstDash val="solid"/>
+                      <a:round/>
+                      <a:headEnd type="none" w="med" len="med"/>
+                      <a:tailEnd type="none" w="med" len="med"/>
+                    </a:lnT>
+                    <a:lnB w="6350" cap="flat" cmpd="sng" algn="ctr">
+                      <a:solidFill>
+                        <a:srgbClr val="E4DED4"/>
+                      </a:solidFill>
+                      <a:prstDash val="solid"/>
+                      <a:round/>
+                      <a:headEnd type="none" w="med" len="med"/>
+                      <a:tailEnd type="none" w="med" len="med"/>
+                    </a:lnB>
+                    <a:solidFill>
+                      <a:srgbClr val="FFFFFF"/>
+                    </a:solidFill>
+                  </a:tcPr>
+                </a:tc>
+                <a:tc>
+                  <a:txBody>
+                    <a:bodyPr/>
+                    <a:lstStyle/>
+                    <a:p>
+                      <a:pPr algn="ctr" indent="0" marL="0">
+                        <a:buNone/>
+                      </a:pPr>
+                      <a:r>
+                        <a:rPr lang="en-US" sz="1200" b="1" dirty="0">
+                          <a:solidFill>
+                            <a:srgbClr val="C1121F"/>
+                          </a:solidFill>
+                          <a:latin typeface="Space Grotesk" pitchFamily="34" charset="0"/>
+                          <a:ea typeface="Space Grotesk" pitchFamily="34" charset="-122"/>
+                          <a:cs typeface="Space Grotesk" pitchFamily="34" charset="-120"/>
+                        </a:rPr>
+                        <a:t>16.3x</a:t>
+                      </a:r>
+                      <a:endParaRPr lang="en-US" sz="1200" dirty="0">
+                        <a:latin typeface="Space Grotesk" charset="0"/>
+                        <a:ea typeface="Space Grotesk" charset="0"/>
+                        <a:cs typeface="Space Grotesk" charset="0"/>
+                      </a:endParaRPr>
+                    </a:p>
+                  </a:txBody>
+                  <a:tcPr marL="63500" marR="63500" marT="25400" marB="25400" anchor="ctr">
+                    <a:lnL w="6350" cap="flat" cmpd="sng" algn="ctr">
+                      <a:solidFill>
+                        <a:srgbClr val="E4DED4"/>
+                      </a:solidFill>
+                      <a:prstDash val="solid"/>
+                      <a:round/>
+                      <a:headEnd type="none" w="med" len="med"/>
+                      <a:tailEnd type="none" w="med" len="med"/>
+                    </a:lnL>
+                    <a:lnR w="6350" cap="flat" cmpd="sng" algn="ctr">
+                      <a:solidFill>
+                        <a:srgbClr val="E4DED4"/>
+                      </a:solidFill>
+                      <a:prstDash val="solid"/>
+                      <a:round/>
+                      <a:headEnd type="none" w="med" len="med"/>
+                      <a:tailEnd type="none" w="med" len="med"/>
+                    </a:lnR>
+                    <a:lnT w="6350" cap="flat" cmpd="sng" algn="ctr">
+                      <a:solidFill>
+                        <a:srgbClr val="E4DED4"/>
+                      </a:solidFill>
+                      <a:prstDash val="solid"/>
+                      <a:round/>
+                      <a:headEnd type="none" w="med" len="med"/>
+                      <a:tailEnd type="none" w="med" len="med"/>
+                    </a:lnT>
+                    <a:lnB w="6350" cap="flat" cmpd="sng" algn="ctr">
+                      <a:solidFill>
+                        <a:srgbClr val="E4DED4"/>
+                      </a:solidFill>
+                      <a:prstDash val="solid"/>
+                      <a:round/>
+                      <a:headEnd type="none" w="med" len="med"/>
+                      <a:tailEnd type="none" w="med" len="med"/>
+                    </a:lnB>
+                    <a:solidFill>
+                      <a:srgbClr val="FFFFFF"/>
+                    </a:solidFill>
+                  </a:tcPr>
+                </a:tc>
+                <a:tc>
+                  <a:txBody>
+                    <a:bodyPr/>
+                    <a:lstStyle/>
+                    <a:p>
+                      <a:pPr algn="ctr" indent="0" marL="0">
+                        <a:buNone/>
+                      </a:pPr>
+                      <a:r>
+                        <a:rPr lang="en-US" sz="800" b="1" dirty="0">
+                          <a:solidFill>
+                            <a:srgbClr val="C1121F"/>
+                          </a:solidFill>
+                          <a:latin typeface="IBM Plex Mono" pitchFamily="34" charset="0"/>
+                          <a:ea typeface="IBM Plex Mono" pitchFamily="34" charset="-122"/>
+                          <a:cs typeface="IBM Plex Mono" pitchFamily="34" charset="-120"/>
+                        </a:rPr>
+                        <a:t>11.3%</a:t>
+                      </a:r>
+                      <a:endParaRPr lang="en-US" sz="800" dirty="0">
+                        <a:latin typeface="IBM Plex Mono" charset="0"/>
+                        <a:ea typeface="IBM Plex Mono" charset="0"/>
+                        <a:cs typeface="IBM Plex Mono" charset="0"/>
+                      </a:endParaRPr>
+                    </a:p>
+                  </a:txBody>
+                  <a:tcPr marL="63500" marR="63500" marT="25400" marB="25400" anchor="ctr">
+                    <a:lnL w="6350" cap="flat" cmpd="sng" algn="ctr">
+                      <a:solidFill>
+                        <a:srgbClr val="E4DED4"/>
+                      </a:solidFill>
+                      <a:prstDash val="solid"/>
+                      <a:round/>
+                      <a:headEnd type="none" w="med" len="med"/>
+                      <a:tailEnd type="none" w="med" len="med"/>
+                    </a:lnL>
+                    <a:lnR w="6350" cap="flat" cmpd="sng" algn="ctr">
+                      <a:solidFill>
+                        <a:srgbClr val="E4DED4"/>
+                      </a:solidFill>
+                      <a:prstDash val="solid"/>
+                      <a:round/>
+                      <a:headEnd type="none" w="med" len="med"/>
+                      <a:tailEnd type="none" w="med" len="med"/>
+                    </a:lnR>
+                    <a:lnT w="6350" cap="flat" cmpd="sng" algn="ctr">
+                      <a:solidFill>
+                        <a:srgbClr val="E4DED4"/>
+                      </a:solidFill>
+                      <a:prstDash val="solid"/>
+                      <a:round/>
+                      <a:headEnd type="none" w="med" len="med"/>
+                      <a:tailEnd type="none" w="med" len="med"/>
+                    </a:lnT>
+                    <a:lnB w="6350" cap="flat" cmpd="sng" algn="ctr">
+                      <a:solidFill>
+                        <a:srgbClr val="E4DED4"/>
+                      </a:solidFill>
+                      <a:prstDash val="solid"/>
+                      <a:round/>
+                      <a:headEnd type="none" w="med" len="med"/>
+                      <a:tailEnd type="none" w="med" len="med"/>
+                    </a:lnB>
+                    <a:solidFill>
+                      <a:srgbClr val="FFFFFF"/>
+                    </a:solidFill>
+                  </a:tcPr>
+                </a:tc>
+              </a:tr>
+              <a:tr h="402336">
+                <a:tc>
+                  <a:txBody>
+                    <a:bodyPr/>
+                    <a:lstStyle/>
+                    <a:p>
+                      <a:pPr indent="0" marL="0">
+                        <a:buNone/>
+                      </a:pPr>
+                      <a:r>
+                        <a:rPr lang="en-US" sz="950" dirty="0">
+                          <a:solidFill>
+                            <a:srgbClr val="1B1714"/>
+                          </a:solidFill>
+                          <a:latin typeface="IBM Plex Sans KR" pitchFamily="34" charset="0"/>
+                          <a:ea typeface="IBM Plex Sans KR" pitchFamily="34" charset="-122"/>
+                          <a:cs typeface="IBM Plex Sans KR" pitchFamily="34" charset="-120"/>
+                        </a:rPr>
+                        <a:t>최대결합 (그랜트20+희석49)</a:t>
+                      </a:r>
+                      <a:endParaRPr lang="en-US" sz="950" dirty="0">
+                        <a:latin typeface="IBM Plex Sans KR" charset="0"/>
+                        <a:ea typeface="IBM Plex Sans KR" charset="0"/>
+                        <a:cs typeface="IBM Plex Sans KR" charset="0"/>
+                      </a:endParaRPr>
+                    </a:p>
+                  </a:txBody>
+                  <a:tcPr marL="63500" marR="63500" marT="25400" marB="25400" anchor="ctr">
+                    <a:lnL w="6350" cap="flat" cmpd="sng" algn="ctr">
+                      <a:solidFill>
+                        <a:srgbClr val="E4DED4"/>
+                      </a:solidFill>
+                      <a:prstDash val="solid"/>
+                      <a:round/>
+                      <a:headEnd type="none" w="med" len="med"/>
+                      <a:tailEnd type="none" w="med" len="med"/>
+                    </a:lnL>
+                    <a:lnR w="6350" cap="flat" cmpd="sng" algn="ctr">
+                      <a:solidFill>
+                        <a:srgbClr val="E4DED4"/>
+                      </a:solidFill>
+                      <a:prstDash val="solid"/>
+                      <a:round/>
+                      <a:headEnd type="none" w="med" len="med"/>
+                      <a:tailEnd type="none" w="med" len="med"/>
+                    </a:lnR>
+                    <a:lnT w="6350" cap="flat" cmpd="sng" algn="ctr">
+                      <a:solidFill>
+                        <a:srgbClr val="E4DED4"/>
+                      </a:solidFill>
+                      <a:prstDash val="solid"/>
+                      <a:round/>
+                      <a:headEnd type="none" w="med" len="med"/>
+                      <a:tailEnd type="none" w="med" len="med"/>
+                    </a:lnT>
+                    <a:lnB w="6350" cap="flat" cmpd="sng" algn="ctr">
+                      <a:solidFill>
+                        <a:srgbClr val="E4DED4"/>
+                      </a:solidFill>
+                      <a:prstDash val="solid"/>
+                      <a:round/>
+                      <a:headEnd type="none" w="med" len="med"/>
+                      <a:tailEnd type="none" w="med" len="med"/>
+                    </a:lnB>
+                    <a:solidFill>
                       <a:srgbClr val="E8F3EC"/>
                     </a:solidFill>
                   </a:tcPr>
@@ -10241,7 +10651,7 @@
                           <a:ea typeface="IBM Plex Mono" pitchFamily="34" charset="-122"/>
                           <a:cs typeface="IBM Plex Mono" pitchFamily="34" charset="-120"/>
                         </a:rPr>
-                        <a:t>10%</a:t>
+                        <a:t>20%</a:t>
                       </a:r>
                       <a:endParaRPr lang="en-US" sz="950" dirty="0">
                         <a:latin typeface="IBM Plex Mono" charset="0"/>
@@ -10377,7 +10787,7 @@
                           <a:ea typeface="IBM Plex Mono" pitchFamily="34" charset="-122"/>
                           <a:cs typeface="IBM Plex Mono" pitchFamily="34" charset="-120"/>
                         </a:rPr>
-                        <a:t>$7.3bn</a:t>
+                        <a:t>$6.9bn</a:t>
                       </a:r>
                       <a:endParaRPr lang="en-US" sz="950" dirty="0">
                         <a:latin typeface="IBM Plex Mono" charset="0"/>
@@ -10445,7 +10855,7 @@
                           <a:ea typeface="Space Grotesk" pitchFamily="34" charset="-122"/>
                           <a:cs typeface="Space Grotesk" pitchFamily="34" charset="-120"/>
                         </a:rPr>
-                        <a:t>13.1x</a:t>
+                        <a:t>15.7x</a:t>
                       </a:r>
                       <a:endParaRPr lang="en-US" sz="1200" dirty="0">
                         <a:latin typeface="Space Grotesk" charset="0"/>
@@ -10507,423 +10917,13 @@
                       <a:r>
                         <a:rPr lang="en-US" sz="800" b="1" dirty="0">
                           <a:solidFill>
-                            <a:srgbClr val="C1121F"/>
+                            <a:srgbClr val="6F6960"/>
                           </a:solidFill>
                           <a:latin typeface="IBM Plex Mono" pitchFamily="34" charset="0"/>
                           <a:ea typeface="IBM Plex Mono" pitchFamily="34" charset="-122"/>
                           <a:cs typeface="IBM Plex Mono" pitchFamily="34" charset="-120"/>
                         </a:rPr>
-                        <a:t>9.1%</a:t>
-                      </a:r>
-                      <a:endParaRPr lang="en-US" sz="800" dirty="0">
-                        <a:latin typeface="IBM Plex Mono" charset="0"/>
-                        <a:ea typeface="IBM Plex Mono" charset="0"/>
-                        <a:cs typeface="IBM Plex Mono" charset="0"/>
-                      </a:endParaRPr>
-                    </a:p>
-                  </a:txBody>
-                  <a:tcPr marL="63500" marR="63500" marT="25400" marB="25400" anchor="ctr">
-                    <a:lnL w="6350" cap="flat" cmpd="sng" algn="ctr">
-                      <a:solidFill>
-                        <a:srgbClr val="E4DED4"/>
-                      </a:solidFill>
-                      <a:prstDash val="solid"/>
-                      <a:round/>
-                      <a:headEnd type="none" w="med" len="med"/>
-                      <a:tailEnd type="none" w="med" len="med"/>
-                    </a:lnL>
-                    <a:lnR w="6350" cap="flat" cmpd="sng" algn="ctr">
-                      <a:solidFill>
-                        <a:srgbClr val="E4DED4"/>
-                      </a:solidFill>
-                      <a:prstDash val="solid"/>
-                      <a:round/>
-                      <a:headEnd type="none" w="med" len="med"/>
-                      <a:tailEnd type="none" w="med" len="med"/>
-                    </a:lnR>
-                    <a:lnT w="6350" cap="flat" cmpd="sng" algn="ctr">
-                      <a:solidFill>
-                        <a:srgbClr val="E4DED4"/>
-                      </a:solidFill>
-                      <a:prstDash val="solid"/>
-                      <a:round/>
-                      <a:headEnd type="none" w="med" len="med"/>
-                      <a:tailEnd type="none" w="med" len="med"/>
-                    </a:lnT>
-                    <a:lnB w="6350" cap="flat" cmpd="sng" algn="ctr">
-                      <a:solidFill>
-                        <a:srgbClr val="E4DED4"/>
-                      </a:solidFill>
-                      <a:prstDash val="solid"/>
-                      <a:round/>
-                      <a:headEnd type="none" w="med" len="med"/>
-                      <a:tailEnd type="none" w="med" len="med"/>
-                    </a:lnB>
-                    <a:solidFill>
-                      <a:srgbClr val="E8F3EC"/>
-                    </a:solidFill>
-                  </a:tcPr>
-                </a:tc>
-              </a:tr>
-              <a:tr h="402336">
-                <a:tc>
-                  <a:txBody>
-                    <a:bodyPr/>
-                    <a:lstStyle/>
-                    <a:p>
-                      <a:pPr indent="0" marL="0">
-                        <a:buNone/>
-                      </a:pPr>
-                      <a:r>
-                        <a:rPr lang="en-US" sz="950" dirty="0">
-                          <a:solidFill>
-                            <a:srgbClr val="1B1714"/>
-                          </a:solidFill>
-                          <a:latin typeface="IBM Plex Sans KR" pitchFamily="34" charset="0"/>
-                          <a:ea typeface="IBM Plex Sans KR" pitchFamily="34" charset="-122"/>
-                          <a:cs typeface="IBM Plex Sans KR" pitchFamily="34" charset="-120"/>
-                        </a:rPr>
-                        <a:t>최대결합 (그랜트20+희석49)</a:t>
-                      </a:r>
-                      <a:endParaRPr lang="en-US" sz="950" dirty="0">
-                        <a:latin typeface="IBM Plex Sans KR" charset="0"/>
-                        <a:ea typeface="IBM Plex Sans KR" charset="0"/>
-                        <a:cs typeface="IBM Plex Sans KR" charset="0"/>
-                      </a:endParaRPr>
-                    </a:p>
-                  </a:txBody>
-                  <a:tcPr marL="63500" marR="63500" marT="25400" marB="25400" anchor="ctr">
-                    <a:lnL w="6350" cap="flat" cmpd="sng" algn="ctr">
-                      <a:solidFill>
-                        <a:srgbClr val="E4DED4"/>
-                      </a:solidFill>
-                      <a:prstDash val="solid"/>
-                      <a:round/>
-                      <a:headEnd type="none" w="med" len="med"/>
-                      <a:tailEnd type="none" w="med" len="med"/>
-                    </a:lnL>
-                    <a:lnR w="6350" cap="flat" cmpd="sng" algn="ctr">
-                      <a:solidFill>
-                        <a:srgbClr val="E4DED4"/>
-                      </a:solidFill>
-                      <a:prstDash val="solid"/>
-                      <a:round/>
-                      <a:headEnd type="none" w="med" len="med"/>
-                      <a:tailEnd type="none" w="med" len="med"/>
-                    </a:lnR>
-                    <a:lnT w="6350" cap="flat" cmpd="sng" algn="ctr">
-                      <a:solidFill>
-                        <a:srgbClr val="E4DED4"/>
-                      </a:solidFill>
-                      <a:prstDash val="solid"/>
-                      <a:round/>
-                      <a:headEnd type="none" w="med" len="med"/>
-                      <a:tailEnd type="none" w="med" len="med"/>
-                    </a:lnT>
-                    <a:lnB w="6350" cap="flat" cmpd="sng" algn="ctr">
-                      <a:solidFill>
-                        <a:srgbClr val="E4DED4"/>
-                      </a:solidFill>
-                      <a:prstDash val="solid"/>
-                      <a:round/>
-                      <a:headEnd type="none" w="med" len="med"/>
-                      <a:tailEnd type="none" w="med" len="med"/>
-                    </a:lnB>
-                    <a:solidFill>
-                      <a:srgbClr val="E8F3EC"/>
-                    </a:solidFill>
-                  </a:tcPr>
-                </a:tc>
-                <a:tc>
-                  <a:txBody>
-                    <a:bodyPr/>
-                    <a:lstStyle/>
-                    <a:p>
-                      <a:pPr algn="ctr" indent="0" marL="0">
-                        <a:buNone/>
-                      </a:pPr>
-                      <a:r>
-                        <a:rPr lang="en-US" sz="950" dirty="0">
-                          <a:solidFill>
-                            <a:srgbClr val="1B1714"/>
-                          </a:solidFill>
-                          <a:latin typeface="IBM Plex Mono" pitchFamily="34" charset="0"/>
-                          <a:ea typeface="IBM Plex Mono" pitchFamily="34" charset="-122"/>
-                          <a:cs typeface="IBM Plex Mono" pitchFamily="34" charset="-120"/>
-                        </a:rPr>
-                        <a:t>20%</a:t>
-                      </a:r>
-                      <a:endParaRPr lang="en-US" sz="950" dirty="0">
-                        <a:latin typeface="IBM Plex Mono" charset="0"/>
-                        <a:ea typeface="IBM Plex Mono" charset="0"/>
-                        <a:cs typeface="IBM Plex Mono" charset="0"/>
-                      </a:endParaRPr>
-                    </a:p>
-                  </a:txBody>
-                  <a:tcPr marL="63500" marR="63500" marT="25400" marB="25400" anchor="ctr">
-                    <a:lnL w="6350" cap="flat" cmpd="sng" algn="ctr">
-                      <a:solidFill>
-                        <a:srgbClr val="E4DED4"/>
-                      </a:solidFill>
-                      <a:prstDash val="solid"/>
-                      <a:round/>
-                      <a:headEnd type="none" w="med" len="med"/>
-                      <a:tailEnd type="none" w="med" len="med"/>
-                    </a:lnL>
-                    <a:lnR w="6350" cap="flat" cmpd="sng" algn="ctr">
-                      <a:solidFill>
-                        <a:srgbClr val="E4DED4"/>
-                      </a:solidFill>
-                      <a:prstDash val="solid"/>
-                      <a:round/>
-                      <a:headEnd type="none" w="med" len="med"/>
-                      <a:tailEnd type="none" w="med" len="med"/>
-                    </a:lnR>
-                    <a:lnT w="6350" cap="flat" cmpd="sng" algn="ctr">
-                      <a:solidFill>
-                        <a:srgbClr val="E4DED4"/>
-                      </a:solidFill>
-                      <a:prstDash val="solid"/>
-                      <a:round/>
-                      <a:headEnd type="none" w="med" len="med"/>
-                      <a:tailEnd type="none" w="med" len="med"/>
-                    </a:lnT>
-                    <a:lnB w="6350" cap="flat" cmpd="sng" algn="ctr">
-                      <a:solidFill>
-                        <a:srgbClr val="E4DED4"/>
-                      </a:solidFill>
-                      <a:prstDash val="solid"/>
-                      <a:round/>
-                      <a:headEnd type="none" w="med" len="med"/>
-                      <a:tailEnd type="none" w="med" len="med"/>
-                    </a:lnB>
-                    <a:solidFill>
-                      <a:srgbClr val="E8F3EC"/>
-                    </a:solidFill>
-                  </a:tcPr>
-                </a:tc>
-                <a:tc>
-                  <a:txBody>
-                    <a:bodyPr/>
-                    <a:lstStyle/>
-                    <a:p>
-                      <a:pPr algn="ctr" indent="0" marL="0">
-                        <a:buNone/>
-                      </a:pPr>
-                      <a:r>
-                        <a:rPr lang="en-US" sz="950" dirty="0">
-                          <a:solidFill>
-                            <a:srgbClr val="1B1714"/>
-                          </a:solidFill>
-                          <a:latin typeface="IBM Plex Mono" pitchFamily="34" charset="0"/>
-                          <a:ea typeface="IBM Plex Mono" pitchFamily="34" charset="-122"/>
-                          <a:cs typeface="IBM Plex Mono" pitchFamily="34" charset="-120"/>
-                        </a:rPr>
-                        <a:t>49%</a:t>
-                      </a:r>
-                      <a:endParaRPr lang="en-US" sz="950" dirty="0">
-                        <a:latin typeface="IBM Plex Mono" charset="0"/>
-                        <a:ea typeface="IBM Plex Mono" charset="0"/>
-                        <a:cs typeface="IBM Plex Mono" charset="0"/>
-                      </a:endParaRPr>
-                    </a:p>
-                  </a:txBody>
-                  <a:tcPr marL="63500" marR="63500" marT="25400" marB="25400" anchor="ctr">
-                    <a:lnL w="6350" cap="flat" cmpd="sng" algn="ctr">
-                      <a:solidFill>
-                        <a:srgbClr val="E4DED4"/>
-                      </a:solidFill>
-                      <a:prstDash val="solid"/>
-                      <a:round/>
-                      <a:headEnd type="none" w="med" len="med"/>
-                      <a:tailEnd type="none" w="med" len="med"/>
-                    </a:lnL>
-                    <a:lnR w="6350" cap="flat" cmpd="sng" algn="ctr">
-                      <a:solidFill>
-                        <a:srgbClr val="E4DED4"/>
-                      </a:solidFill>
-                      <a:prstDash val="solid"/>
-                      <a:round/>
-                      <a:headEnd type="none" w="med" len="med"/>
-                      <a:tailEnd type="none" w="med" len="med"/>
-                    </a:lnR>
-                    <a:lnT w="6350" cap="flat" cmpd="sng" algn="ctr">
-                      <a:solidFill>
-                        <a:srgbClr val="E4DED4"/>
-                      </a:solidFill>
-                      <a:prstDash val="solid"/>
-                      <a:round/>
-                      <a:headEnd type="none" w="med" len="med"/>
-                      <a:tailEnd type="none" w="med" len="med"/>
-                    </a:lnT>
-                    <a:lnB w="6350" cap="flat" cmpd="sng" algn="ctr">
-                      <a:solidFill>
-                        <a:srgbClr val="E4DED4"/>
-                      </a:solidFill>
-                      <a:prstDash val="solid"/>
-                      <a:round/>
-                      <a:headEnd type="none" w="med" len="med"/>
-                      <a:tailEnd type="none" w="med" len="med"/>
-                    </a:lnB>
-                    <a:solidFill>
-                      <a:srgbClr val="E8F3EC"/>
-                    </a:solidFill>
-                  </a:tcPr>
-                </a:tc>
-                <a:tc>
-                  <a:txBody>
-                    <a:bodyPr/>
-                    <a:lstStyle/>
-                    <a:p>
-                      <a:pPr algn="ctr" indent="0" marL="0">
-                        <a:buNone/>
-                      </a:pPr>
-                      <a:r>
-                        <a:rPr lang="en-US" sz="950" dirty="0">
-                          <a:solidFill>
-                            <a:srgbClr val="1B1714"/>
-                          </a:solidFill>
-                          <a:latin typeface="IBM Plex Mono" pitchFamily="34" charset="0"/>
-                          <a:ea typeface="IBM Plex Mono" pitchFamily="34" charset="-122"/>
-                          <a:cs typeface="IBM Plex Mono" pitchFamily="34" charset="-120"/>
-                        </a:rPr>
-                        <a:t>$7.0bn</a:t>
-                      </a:r>
-                      <a:endParaRPr lang="en-US" sz="950" dirty="0">
-                        <a:latin typeface="IBM Plex Mono" charset="0"/>
-                        <a:ea typeface="IBM Plex Mono" charset="0"/>
-                        <a:cs typeface="IBM Plex Mono" charset="0"/>
-                      </a:endParaRPr>
-                    </a:p>
-                  </a:txBody>
-                  <a:tcPr marL="63500" marR="63500" marT="25400" marB="25400" anchor="ctr">
-                    <a:lnL w="6350" cap="flat" cmpd="sng" algn="ctr">
-                      <a:solidFill>
-                        <a:srgbClr val="E4DED4"/>
-                      </a:solidFill>
-                      <a:prstDash val="solid"/>
-                      <a:round/>
-                      <a:headEnd type="none" w="med" len="med"/>
-                      <a:tailEnd type="none" w="med" len="med"/>
-                    </a:lnL>
-                    <a:lnR w="6350" cap="flat" cmpd="sng" algn="ctr">
-                      <a:solidFill>
-                        <a:srgbClr val="E4DED4"/>
-                      </a:solidFill>
-                      <a:prstDash val="solid"/>
-                      <a:round/>
-                      <a:headEnd type="none" w="med" len="med"/>
-                      <a:tailEnd type="none" w="med" len="med"/>
-                    </a:lnR>
-                    <a:lnT w="6350" cap="flat" cmpd="sng" algn="ctr">
-                      <a:solidFill>
-                        <a:srgbClr val="E4DED4"/>
-                      </a:solidFill>
-                      <a:prstDash val="solid"/>
-                      <a:round/>
-                      <a:headEnd type="none" w="med" len="med"/>
-                      <a:tailEnd type="none" w="med" len="med"/>
-                    </a:lnT>
-                    <a:lnB w="6350" cap="flat" cmpd="sng" algn="ctr">
-                      <a:solidFill>
-                        <a:srgbClr val="E4DED4"/>
-                      </a:solidFill>
-                      <a:prstDash val="solid"/>
-                      <a:round/>
-                      <a:headEnd type="none" w="med" len="med"/>
-                      <a:tailEnd type="none" w="med" len="med"/>
-                    </a:lnB>
-                    <a:solidFill>
-                      <a:srgbClr val="E8F3EC"/>
-                    </a:solidFill>
-                  </a:tcPr>
-                </a:tc>
-                <a:tc>
-                  <a:txBody>
-                    <a:bodyPr/>
-                    <a:lstStyle/>
-                    <a:p>
-                      <a:pPr algn="ctr" indent="0" marL="0">
-                        <a:buNone/>
-                      </a:pPr>
-                      <a:r>
-                        <a:rPr lang="en-US" sz="1200" b="1" dirty="0">
-                          <a:solidFill>
-                            <a:srgbClr val="1E7A4D"/>
-                          </a:solidFill>
-                          <a:latin typeface="Space Grotesk" pitchFamily="34" charset="0"/>
-                          <a:ea typeface="Space Grotesk" pitchFamily="34" charset="-122"/>
-                          <a:cs typeface="Space Grotesk" pitchFamily="34" charset="-120"/>
-                        </a:rPr>
-                        <a:t>12.6x</a:t>
-                      </a:r>
-                      <a:endParaRPr lang="en-US" sz="1200" dirty="0">
-                        <a:latin typeface="Space Grotesk" charset="0"/>
-                        <a:ea typeface="Space Grotesk" charset="0"/>
-                        <a:cs typeface="Space Grotesk" charset="0"/>
-                      </a:endParaRPr>
-                    </a:p>
-                  </a:txBody>
-                  <a:tcPr marL="63500" marR="63500" marT="25400" marB="25400" anchor="ctr">
-                    <a:lnL w="6350" cap="flat" cmpd="sng" algn="ctr">
-                      <a:solidFill>
-                        <a:srgbClr val="E4DED4"/>
-                      </a:solidFill>
-                      <a:prstDash val="solid"/>
-                      <a:round/>
-                      <a:headEnd type="none" w="med" len="med"/>
-                      <a:tailEnd type="none" w="med" len="med"/>
-                    </a:lnL>
-                    <a:lnR w="6350" cap="flat" cmpd="sng" algn="ctr">
-                      <a:solidFill>
-                        <a:srgbClr val="E4DED4"/>
-                      </a:solidFill>
-                      <a:prstDash val="solid"/>
-                      <a:round/>
-                      <a:headEnd type="none" w="med" len="med"/>
-                      <a:tailEnd type="none" w="med" len="med"/>
-                    </a:lnR>
-                    <a:lnT w="6350" cap="flat" cmpd="sng" algn="ctr">
-                      <a:solidFill>
-                        <a:srgbClr val="E4DED4"/>
-                      </a:solidFill>
-                      <a:prstDash val="solid"/>
-                      <a:round/>
-                      <a:headEnd type="none" w="med" len="med"/>
-                      <a:tailEnd type="none" w="med" len="med"/>
-                    </a:lnT>
-                    <a:lnB w="6350" cap="flat" cmpd="sng" algn="ctr">
-                      <a:solidFill>
-                        <a:srgbClr val="E4DED4"/>
-                      </a:solidFill>
-                      <a:prstDash val="solid"/>
-                      <a:round/>
-                      <a:headEnd type="none" w="med" len="med"/>
-                      <a:tailEnd type="none" w="med" len="med"/>
-                    </a:lnB>
-                    <a:solidFill>
-                      <a:srgbClr val="E8F3EC"/>
-                    </a:solidFill>
-                  </a:tcPr>
-                </a:tc>
-                <a:tc>
-                  <a:txBody>
-                    <a:bodyPr/>
-                    <a:lstStyle/>
-                    <a:p>
-                      <a:pPr algn="ctr" indent="0" marL="0">
-                        <a:buNone/>
-                      </a:pPr>
-                      <a:r>
-                        <a:rPr lang="en-US" sz="800" b="1" dirty="0">
-                          <a:solidFill>
-                            <a:srgbClr val="1E7A4D"/>
-                          </a:solidFill>
-                          <a:latin typeface="IBM Plex Mono" pitchFamily="34" charset="0"/>
-                          <a:ea typeface="IBM Plex Mono" pitchFamily="34" charset="-122"/>
-                          <a:cs typeface="IBM Plex Mono" pitchFamily="34" charset="-120"/>
-                        </a:rPr>
-                        <a:t>8.7%</a:t>
+                        <a:t>10.9%</a:t>
                       </a:r>
                       <a:endParaRPr lang="en-US" sz="800" dirty="0">
                         <a:latin typeface="IBM Plex Mono" charset="0"/>
@@ -11012,7 +11012,7 @@
                 <a:ea typeface="IBM Plex Sans KR" pitchFamily="34" charset="-122"/>
                 <a:cs typeface="IBM Plex Sans KR" pitchFamily="34" charset="-120"/>
               </a:rPr>
-              <a:t>필요EBITDA% = 현 9%에서 딜을 peer 상단(13x)에 맞추는 데 필요한 ex-AMPC 마진 · 8.7% ≤ 현 9%면 이미 충족</a:t>
+              <a:t>필요EBITDA% = 딜을 peer 하단(13x)에 맞추는 데 필요한 ex-AMPC 마진 · 현 9% 대비 전 시나리오 미달(10.9~13.0%) → 마진 개선 必</a:t>
             </a:r>
             <a:endParaRPr lang="en-US" sz="750" dirty="0"/>
           </a:p>
@@ -11051,7 +11051,7 @@
                 <a:ea typeface="IBM Plex Mono" pitchFamily="34" charset="-122"/>
                 <a:cs typeface="IBM Plex Mono" pitchFamily="34" charset="-120"/>
               </a:rPr>
-              <a:t>peer 밴드 대비 위치 · 조달 레버는 갭을 좁힌다</a:t>
+              <a:t>peer 밴드(보수 8~13x) 대비 — 전 시나리오 초과</a:t>
             </a:r>
             <a:endParaRPr lang="en-US" sz="850" dirty="0"/>
           </a:p>
@@ -11089,7 +11089,7 @@
         <p:spPr>
           <a:xfrm>
             <a:off x="4178808" y="4992624"/>
-            <a:ext cx="3343275" cy="164592"/>
+            <a:ext cx="2228850" cy="164592"/>
           </a:xfrm>
           <a:prstGeom prst="rect">
             <a:avLst/>
@@ -11114,7 +11114,7 @@
         <p:spPr>
           <a:xfrm>
             <a:off x="4178808" y="4764024"/>
-            <a:ext cx="3343275" cy="182880"/>
+            <a:ext cx="2228850" cy="182880"/>
           </a:xfrm>
           <a:prstGeom prst="rect">
             <a:avLst/>
@@ -11138,7 +11138,7 @@
                 <a:ea typeface="IBM Plex Mono" pitchFamily="34" charset="-122"/>
                 <a:cs typeface="IBM Plex Mono" pitchFamily="34" charset="-120"/>
               </a:rPr>
-              <a:t>peer 8~13x</a:t>
+              <a:t>peer 8~13x(보수)</a:t>
             </a:r>
             <a:endParaRPr lang="en-US" sz="800" dirty="0"/>
           </a:p>
@@ -11152,8 +11152,8 @@
         </p:nvSpPr>
         <p:spPr>
           <a:xfrm>
-            <a:off x="7254621" y="4855464"/>
-            <a:ext cx="1872234" cy="0"/>
+            <a:off x="7611237" y="4855464"/>
+            <a:ext cx="1381887" cy="0"/>
           </a:xfrm>
           <a:prstGeom prst="line">
             <a:avLst/>
@@ -11177,8 +11177,8 @@
         </p:nvSpPr>
         <p:spPr>
           <a:xfrm>
-            <a:off x="6888861" y="4672584"/>
-            <a:ext cx="2603754" cy="164592"/>
+            <a:off x="7154037" y="4672584"/>
+            <a:ext cx="2296287" cy="164592"/>
           </a:xfrm>
           <a:prstGeom prst="rect">
             <a:avLst/>
@@ -11202,7 +11202,7 @@
                 <a:ea typeface="IBM Plex Mono" pitchFamily="34" charset="-122"/>
                 <a:cs typeface="IBM Plex Mono" pitchFamily="34" charset="-120"/>
               </a:rPr>
-              <a:t>조달 레버 −2.8x → 밴드 진입</a:t>
+              <a:t>조달 레버 −3.1x (여전 peer 초과)</a:t>
             </a:r>
             <a:endParaRPr lang="en-US" sz="700" dirty="0"/>
           </a:p>
@@ -11216,7 +11216,7 @@
         </p:nvSpPr>
         <p:spPr>
           <a:xfrm>
-            <a:off x="9081135" y="5029200"/>
+            <a:off x="8947404" y="5029200"/>
             <a:ext cx="91440" cy="91440"/>
           </a:xfrm>
           <a:prstGeom prst="ellipse">
@@ -11236,8 +11236,8 @@
         </p:nvSpPr>
         <p:spPr>
           <a:xfrm>
-            <a:off x="8669655" y="5166360"/>
-            <a:ext cx="914400" cy="182880"/>
+            <a:off x="8353044" y="5166360"/>
+            <a:ext cx="1280160" cy="182880"/>
           </a:xfrm>
           <a:prstGeom prst="rect">
             <a:avLst/>
@@ -11261,7 +11261,7 @@
                 <a:ea typeface="IBM Plex Mono" pitchFamily="34" charset="-122"/>
                 <a:cs typeface="IBM Plex Mono" pitchFamily="34" charset="-120"/>
               </a:rPr>
-              <a:t>BASE</a:t>
+              <a:t>BASE 18.8x</a:t>
             </a:r>
             <a:endParaRPr lang="en-US" sz="750" dirty="0"/>
           </a:p>
@@ -11269,73 +11269,113 @@
       </p:sp>
       <p:sp>
         <p:nvSpPr>
-          <p:cNvPr id="49" name="Text 46"/>
-          <p:cNvSpPr/>
-          <p:nvPr/>
-        </p:nvSpPr>
-        <p:spPr>
-          <a:xfrm>
-            <a:off x="8669655" y="5056632"/>
-            <a:ext cx="914400" cy="182880"/>
-          </a:xfrm>
-          <a:prstGeom prst="rect">
-            <a:avLst/>
-          </a:prstGeom>
-          <a:noFill/>
-          <a:ln/>
-        </p:spPr>
-        <p:txBody>
-          <a:bodyPr wrap="square" lIns="0" tIns="0" rIns="0" bIns="0" rtlCol="0" anchor="t"/>
+          <p:cNvPr id="49" name="Shape 46"/>
+          <p:cNvSpPr/>
+          <p:nvPr/>
+        </p:nvSpPr>
+        <p:spPr>
+          <a:xfrm>
+            <a:off x="8323326" y="5029200"/>
+            <a:ext cx="91440" cy="91440"/>
+          </a:xfrm>
+          <a:prstGeom prst="ellipse">
+            <a:avLst/>
+          </a:prstGeom>
+          <a:solidFill>
+            <a:srgbClr val="C1121F"/>
+          </a:solidFill>
+          <a:ln/>
+        </p:spPr>
+      </p:sp>
+      <p:sp>
+        <p:nvSpPr>
+          <p:cNvPr id="50" name="Shape 47"/>
+          <p:cNvSpPr/>
+          <p:nvPr/>
+        </p:nvSpPr>
+        <p:spPr>
+          <a:xfrm>
+            <a:off x="7832979" y="5029200"/>
+            <a:ext cx="91440" cy="91440"/>
+          </a:xfrm>
+          <a:prstGeom prst="ellipse">
+            <a:avLst/>
+          </a:prstGeom>
+          <a:solidFill>
+            <a:srgbClr val="8A5A55"/>
+          </a:solidFill>
+          <a:ln/>
+        </p:spPr>
+      </p:sp>
+      <p:sp>
+        <p:nvSpPr>
+          <p:cNvPr id="51" name="Shape 48"/>
+          <p:cNvSpPr/>
+          <p:nvPr/>
+        </p:nvSpPr>
+        <p:spPr>
+          <a:xfrm>
+            <a:off x="7565517" y="5029200"/>
+            <a:ext cx="91440" cy="91440"/>
+          </a:xfrm>
+          <a:prstGeom prst="ellipse">
+            <a:avLst/>
+          </a:prstGeom>
+          <a:solidFill>
+            <a:srgbClr val="8A5A55"/>
+          </a:solidFill>
+          <a:ln/>
+        </p:spPr>
+      </p:sp>
+      <p:sp>
+        <p:nvSpPr>
+          <p:cNvPr id="52" name="Text 49"/>
+          <p:cNvSpPr/>
+          <p:nvPr/>
+        </p:nvSpPr>
+        <p:spPr>
+          <a:xfrm>
+            <a:off x="6971157" y="5166360"/>
+            <a:ext cx="1280160" cy="182880"/>
+          </a:xfrm>
+          <a:prstGeom prst="rect">
+            <a:avLst/>
+          </a:prstGeom>
+          <a:noFill/>
+          <a:ln/>
+        </p:spPr>
+        <p:txBody>
+          <a:bodyPr wrap="square" lIns="0" tIns="0" rIns="0" bIns="0" rtlCol="0" anchor="ctr"/>
           <a:lstStyle/>
           <a:p>
             <a:pPr algn="ctr" indent="0" marL="0">
               <a:buNone/>
             </a:pPr>
             <a:r>
-              <a:rPr lang="en-US" sz="800" b="1" dirty="0">
-                <a:solidFill>
-                  <a:srgbClr val="C1121F"/>
+              <a:rPr lang="en-US" sz="750" b="1" dirty="0">
+                <a:solidFill>
+                  <a:srgbClr val="8A5A55"/>
                 </a:solidFill>
                 <a:latin typeface="IBM Plex Mono" pitchFamily="34" charset="0"/>
                 <a:ea typeface="IBM Plex Mono" pitchFamily="34" charset="-122"/>
                 <a:cs typeface="IBM Plex Mono" pitchFamily="34" charset="-120"/>
               </a:rPr>
-              <a:t>15.4x</a:t>
-            </a:r>
-            <a:endParaRPr lang="en-US" sz="800" dirty="0"/>
-          </a:p>
-        </p:txBody>
-      </p:sp>
-      <p:sp>
-        <p:nvSpPr>
-          <p:cNvPr id="50" name="Shape 47"/>
-          <p:cNvSpPr/>
-          <p:nvPr/>
-        </p:nvSpPr>
-        <p:spPr>
-          <a:xfrm>
-            <a:off x="8211883" y="5029200"/>
-            <a:ext cx="91440" cy="91440"/>
-          </a:xfrm>
-          <a:prstGeom prst="ellipse">
-            <a:avLst/>
-          </a:prstGeom>
-          <a:solidFill>
-            <a:srgbClr val="8A5A55"/>
-          </a:solidFill>
-          <a:ln/>
-        </p:spPr>
-      </p:sp>
-      <p:sp>
-        <p:nvSpPr>
-          <p:cNvPr id="51" name="Text 48"/>
-          <p:cNvSpPr/>
-          <p:nvPr/>
-        </p:nvSpPr>
-        <p:spPr>
-          <a:xfrm>
-            <a:off x="7800403" y="5166360"/>
-            <a:ext cx="914400" cy="182880"/>
+              <a:t>최대 15.7x</a:t>
+            </a:r>
+            <a:endParaRPr lang="en-US" sz="750" dirty="0"/>
+          </a:p>
+        </p:txBody>
+      </p:sp>
+      <p:sp>
+        <p:nvSpPr>
+          <p:cNvPr id="53" name="Text 50"/>
+          <p:cNvSpPr/>
+          <p:nvPr/>
+        </p:nvSpPr>
+        <p:spPr>
+          <a:xfrm>
+            <a:off x="3904488" y="5330952"/>
+            <a:ext cx="548640" cy="164592"/>
           </a:xfrm>
           <a:prstGeom prst="rect">
             <a:avLst/>
@@ -11351,89 +11391,69 @@
               <a:buNone/>
             </a:pPr>
             <a:r>
-              <a:rPr lang="en-US" sz="750" b="1" dirty="0">
-                <a:solidFill>
-                  <a:srgbClr val="8A5A55"/>
+              <a:rPr lang="en-US" sz="700" dirty="0">
+                <a:solidFill>
+                  <a:srgbClr val="9A847C"/>
                 </a:solidFill>
                 <a:latin typeface="IBM Plex Mono" pitchFamily="34" charset="0"/>
                 <a:ea typeface="IBM Plex Mono" pitchFamily="34" charset="-122"/>
                 <a:cs typeface="IBM Plex Mono" pitchFamily="34" charset="-120"/>
               </a:rPr>
-              <a:t>①·②</a:t>
-            </a:r>
-            <a:endParaRPr lang="en-US" sz="750" dirty="0"/>
-          </a:p>
-        </p:txBody>
-      </p:sp>
-      <p:sp>
-        <p:nvSpPr>
-          <p:cNvPr id="52" name="Text 49"/>
-          <p:cNvSpPr/>
-          <p:nvPr/>
-        </p:nvSpPr>
-        <p:spPr>
-          <a:xfrm>
-            <a:off x="7800403" y="5056632"/>
-            <a:ext cx="914400" cy="182880"/>
-          </a:xfrm>
-          <a:prstGeom prst="rect">
-            <a:avLst/>
-          </a:prstGeom>
-          <a:noFill/>
-          <a:ln/>
-        </p:spPr>
-        <p:txBody>
-          <a:bodyPr wrap="square" lIns="0" tIns="0" rIns="0" bIns="0" rtlCol="0" anchor="t"/>
+              <a:t>8x</a:t>
+            </a:r>
+            <a:endParaRPr lang="en-US" sz="700" dirty="0"/>
+          </a:p>
+        </p:txBody>
+      </p:sp>
+      <p:sp>
+        <p:nvSpPr>
+          <p:cNvPr id="54" name="Text 51"/>
+          <p:cNvSpPr/>
+          <p:nvPr/>
+        </p:nvSpPr>
+        <p:spPr>
+          <a:xfrm>
+            <a:off x="5241798" y="5330952"/>
+            <a:ext cx="548640" cy="164592"/>
+          </a:xfrm>
+          <a:prstGeom prst="rect">
+            <a:avLst/>
+          </a:prstGeom>
+          <a:noFill/>
+          <a:ln/>
+        </p:spPr>
+        <p:txBody>
+          <a:bodyPr wrap="square" lIns="0" tIns="0" rIns="0" bIns="0" rtlCol="0" anchor="ctr"/>
           <a:lstStyle/>
           <a:p>
             <a:pPr algn="ctr" indent="0" marL="0">
               <a:buNone/>
             </a:pPr>
             <a:r>
-              <a:rPr lang="en-US" sz="800" b="1" dirty="0">
-                <a:solidFill>
-                  <a:srgbClr val="8A5A55"/>
+              <a:rPr lang="en-US" sz="700" dirty="0">
+                <a:solidFill>
+                  <a:srgbClr val="9A847C"/>
                 </a:solidFill>
                 <a:latin typeface="IBM Plex Mono" pitchFamily="34" charset="0"/>
                 <a:ea typeface="IBM Plex Mono" pitchFamily="34" charset="-122"/>
                 <a:cs typeface="IBM Plex Mono" pitchFamily="34" charset="-120"/>
               </a:rPr>
-              <a:t>14.1x</a:t>
-            </a:r>
-            <a:endParaRPr lang="en-US" sz="800" dirty="0"/>
-          </a:p>
-        </p:txBody>
-      </p:sp>
-      <p:sp>
-        <p:nvSpPr>
-          <p:cNvPr id="53" name="Shape 50"/>
-          <p:cNvSpPr/>
-          <p:nvPr/>
-        </p:nvSpPr>
-        <p:spPr>
-          <a:xfrm>
-            <a:off x="7543228" y="5029200"/>
-            <a:ext cx="91440" cy="91440"/>
-          </a:xfrm>
-          <a:prstGeom prst="ellipse">
-            <a:avLst/>
-          </a:prstGeom>
-          <a:solidFill>
-            <a:srgbClr val="8A5A55"/>
-          </a:solidFill>
-          <a:ln/>
-        </p:spPr>
-      </p:sp>
-      <p:sp>
-        <p:nvSpPr>
-          <p:cNvPr id="54" name="Text 51"/>
-          <p:cNvSpPr/>
-          <p:nvPr/>
-        </p:nvSpPr>
-        <p:spPr>
-          <a:xfrm>
-            <a:off x="7131749" y="5166360"/>
-            <a:ext cx="914400" cy="182880"/>
+              <a:t>11x</a:t>
+            </a:r>
+            <a:endParaRPr lang="en-US" sz="700" dirty="0"/>
+          </a:p>
+        </p:txBody>
+      </p:sp>
+      <p:sp>
+        <p:nvSpPr>
+          <p:cNvPr id="55" name="Text 52"/>
+          <p:cNvSpPr/>
+          <p:nvPr/>
+        </p:nvSpPr>
+        <p:spPr>
+          <a:xfrm>
+            <a:off x="6133338" y="5330952"/>
+            <a:ext cx="548640" cy="164592"/>
           </a:xfrm>
           <a:prstGeom prst="rect">
             <a:avLst/>
@@ -11449,78 +11469,58 @@
               <a:buNone/>
             </a:pPr>
             <a:r>
-              <a:rPr lang="en-US" sz="750" b="1" dirty="0">
-                <a:solidFill>
-                  <a:srgbClr val="8A5A55"/>
+              <a:rPr lang="en-US" sz="700" dirty="0">
+                <a:solidFill>
+                  <a:srgbClr val="9A847C"/>
                 </a:solidFill>
                 <a:latin typeface="IBM Plex Mono" pitchFamily="34" charset="0"/>
                 <a:ea typeface="IBM Plex Mono" pitchFamily="34" charset="-122"/>
                 <a:cs typeface="IBM Plex Mono" pitchFamily="34" charset="-120"/>
               </a:rPr>
-              <a:t>③</a:t>
-            </a:r>
-            <a:endParaRPr lang="en-US" sz="750" dirty="0"/>
-          </a:p>
-        </p:txBody>
-      </p:sp>
-      <p:sp>
-        <p:nvSpPr>
-          <p:cNvPr id="55" name="Text 52"/>
-          <p:cNvSpPr/>
-          <p:nvPr/>
-        </p:nvSpPr>
-        <p:spPr>
-          <a:xfrm>
-            <a:off x="7131749" y="5056632"/>
-            <a:ext cx="914400" cy="182880"/>
-          </a:xfrm>
-          <a:prstGeom prst="rect">
-            <a:avLst/>
-          </a:prstGeom>
-          <a:noFill/>
-          <a:ln/>
-        </p:spPr>
-        <p:txBody>
-          <a:bodyPr wrap="square" lIns="0" tIns="0" rIns="0" bIns="0" rtlCol="0" anchor="t"/>
+              <a:t>13x</a:t>
+            </a:r>
+            <a:endParaRPr lang="en-US" sz="700" dirty="0"/>
+          </a:p>
+        </p:txBody>
+      </p:sp>
+      <p:sp>
+        <p:nvSpPr>
+          <p:cNvPr id="56" name="Text 53"/>
+          <p:cNvSpPr/>
+          <p:nvPr/>
+        </p:nvSpPr>
+        <p:spPr>
+          <a:xfrm>
+            <a:off x="7024878" y="5330952"/>
+            <a:ext cx="548640" cy="164592"/>
+          </a:xfrm>
+          <a:prstGeom prst="rect">
+            <a:avLst/>
+          </a:prstGeom>
+          <a:noFill/>
+          <a:ln/>
+        </p:spPr>
+        <p:txBody>
+          <a:bodyPr wrap="square" lIns="0" tIns="0" rIns="0" bIns="0" rtlCol="0" anchor="ctr"/>
           <a:lstStyle/>
           <a:p>
             <a:pPr algn="ctr" indent="0" marL="0">
               <a:buNone/>
             </a:pPr>
             <a:r>
-              <a:rPr lang="en-US" sz="800" b="1" dirty="0">
-                <a:solidFill>
-                  <a:srgbClr val="8A5A55"/>
+              <a:rPr lang="en-US" sz="700" dirty="0">
+                <a:solidFill>
+                  <a:srgbClr val="9A847C"/>
                 </a:solidFill>
                 <a:latin typeface="IBM Plex Mono" pitchFamily="34" charset="0"/>
                 <a:ea typeface="IBM Plex Mono" pitchFamily="34" charset="-122"/>
                 <a:cs typeface="IBM Plex Mono" pitchFamily="34" charset="-120"/>
               </a:rPr>
-              <a:t>13.1x</a:t>
-            </a:r>
-            <a:endParaRPr lang="en-US" sz="800" dirty="0"/>
-          </a:p>
-        </p:txBody>
-      </p:sp>
-      <p:sp>
-        <p:nvSpPr>
-          <p:cNvPr id="56" name="Shape 53"/>
-          <p:cNvSpPr/>
-          <p:nvPr/>
-        </p:nvSpPr>
-        <p:spPr>
-          <a:xfrm>
-            <a:off x="7208901" y="5029200"/>
-            <a:ext cx="91440" cy="91440"/>
-          </a:xfrm>
-          <a:prstGeom prst="ellipse">
-            <a:avLst/>
-          </a:prstGeom>
-          <a:solidFill>
-            <a:srgbClr val="1E7A4D"/>
-          </a:solidFill>
-          <a:ln/>
-        </p:spPr>
+              <a:t>15x</a:t>
+            </a:r>
+            <a:endParaRPr lang="en-US" sz="700" dirty="0"/>
+          </a:p>
+        </p:txBody>
       </p:sp>
       <p:sp>
         <p:nvSpPr>
@@ -11530,8 +11530,8 @@
         </p:nvSpPr>
         <p:spPr>
           <a:xfrm>
-            <a:off x="6797421" y="5166360"/>
-            <a:ext cx="914400" cy="182880"/>
+            <a:off x="8362188" y="5330952"/>
+            <a:ext cx="548640" cy="164592"/>
           </a:xfrm>
           <a:prstGeom prst="rect">
             <a:avLst/>
@@ -11547,17 +11547,17 @@
               <a:buNone/>
             </a:pPr>
             <a:r>
-              <a:rPr lang="en-US" sz="750" b="1" dirty="0">
-                <a:solidFill>
-                  <a:srgbClr val="1E7A4D"/>
+              <a:rPr lang="en-US" sz="700" dirty="0">
+                <a:solidFill>
+                  <a:srgbClr val="9A847C"/>
                 </a:solidFill>
                 <a:latin typeface="IBM Plex Mono" pitchFamily="34" charset="0"/>
                 <a:ea typeface="IBM Plex Mono" pitchFamily="34" charset="-122"/>
                 <a:cs typeface="IBM Plex Mono" pitchFamily="34" charset="-120"/>
               </a:rPr>
-              <a:t>최대</a:t>
-            </a:r>
-            <a:endParaRPr lang="en-US" sz="750" dirty="0"/>
+              <a:t>18x</a:t>
+            </a:r>
+            <a:endParaRPr lang="en-US" sz="700" dirty="0"/>
           </a:p>
         </p:txBody>
       </p:sp>
@@ -11569,71 +11569,32 @@
         </p:nvSpPr>
         <p:spPr>
           <a:xfrm>
-            <a:off x="6797421" y="5056632"/>
-            <a:ext cx="914400" cy="182880"/>
-          </a:xfrm>
-          <a:prstGeom prst="rect">
-            <a:avLst/>
-          </a:prstGeom>
-          <a:noFill/>
-          <a:ln/>
-        </p:spPr>
-        <p:txBody>
-          <a:bodyPr wrap="square" lIns="0" tIns="0" rIns="0" bIns="0" rtlCol="0" anchor="t"/>
+            <a:off x="9253728" y="5330952"/>
+            <a:ext cx="548640" cy="164592"/>
+          </a:xfrm>
+          <a:prstGeom prst="rect">
+            <a:avLst/>
+          </a:prstGeom>
+          <a:noFill/>
+          <a:ln/>
+        </p:spPr>
+        <p:txBody>
+          <a:bodyPr wrap="square" lIns="0" tIns="0" rIns="0" bIns="0" rtlCol="0" anchor="ctr"/>
           <a:lstStyle/>
           <a:p>
             <a:pPr algn="ctr" indent="0" marL="0">
               <a:buNone/>
             </a:pPr>
             <a:r>
-              <a:rPr lang="en-US" sz="800" b="1" dirty="0">
-                <a:solidFill>
-                  <a:srgbClr val="1E7A4D"/>
+              <a:rPr lang="en-US" sz="700" dirty="0">
+                <a:solidFill>
+                  <a:srgbClr val="9A847C"/>
                 </a:solidFill>
                 <a:latin typeface="IBM Plex Mono" pitchFamily="34" charset="0"/>
                 <a:ea typeface="IBM Plex Mono" pitchFamily="34" charset="-122"/>
                 <a:cs typeface="IBM Plex Mono" pitchFamily="34" charset="-120"/>
               </a:rPr>
-              <a:t>12.6x</a:t>
-            </a:r>
-            <a:endParaRPr lang="en-US" sz="800" dirty="0"/>
-          </a:p>
-        </p:txBody>
-      </p:sp>
-      <p:sp>
-        <p:nvSpPr>
-          <p:cNvPr id="59" name="Text 56"/>
-          <p:cNvSpPr/>
-          <p:nvPr/>
-        </p:nvSpPr>
-        <p:spPr>
-          <a:xfrm>
-            <a:off x="3904488" y="5330952"/>
-            <a:ext cx="548640" cy="164592"/>
-          </a:xfrm>
-          <a:prstGeom prst="rect">
-            <a:avLst/>
-          </a:prstGeom>
-          <a:noFill/>
-          <a:ln/>
-        </p:spPr>
-        <p:txBody>
-          <a:bodyPr wrap="square" lIns="0" tIns="0" rIns="0" bIns="0" rtlCol="0" anchor="ctr"/>
-          <a:lstStyle/>
-          <a:p>
-            <a:pPr algn="ctr" indent="0" marL="0">
-              <a:buNone/>
-            </a:pPr>
-            <a:r>
-              <a:rPr lang="en-US" sz="700" dirty="0">
-                <a:solidFill>
-                  <a:srgbClr val="9A847C"/>
-                </a:solidFill>
-                <a:latin typeface="IBM Plex Mono" pitchFamily="34" charset="0"/>
-                <a:ea typeface="IBM Plex Mono" pitchFamily="34" charset="-122"/>
-                <a:cs typeface="IBM Plex Mono" pitchFamily="34" charset="-120"/>
-              </a:rPr>
-              <a:t>8x</a:t>
+              <a:t>20x</a:t>
             </a:r>
             <a:endParaRPr lang="en-US" sz="700" dirty="0"/>
           </a:p>
@@ -11641,163 +11602,7 @@
       </p:sp>
       <p:sp>
         <p:nvSpPr>
-          <p:cNvPr id="60" name="Text 57"/>
-          <p:cNvSpPr/>
-          <p:nvPr/>
-        </p:nvSpPr>
-        <p:spPr>
-          <a:xfrm>
-            <a:off x="5910453" y="5330952"/>
-            <a:ext cx="548640" cy="164592"/>
-          </a:xfrm>
-          <a:prstGeom prst="rect">
-            <a:avLst/>
-          </a:prstGeom>
-          <a:noFill/>
-          <a:ln/>
-        </p:spPr>
-        <p:txBody>
-          <a:bodyPr wrap="square" lIns="0" tIns="0" rIns="0" bIns="0" rtlCol="0" anchor="ctr"/>
-          <a:lstStyle/>
-          <a:p>
-            <a:pPr algn="ctr" indent="0" marL="0">
-              <a:buNone/>
-            </a:pPr>
-            <a:r>
-              <a:rPr lang="en-US" sz="700" dirty="0">
-                <a:solidFill>
-                  <a:srgbClr val="9A847C"/>
-                </a:solidFill>
-                <a:latin typeface="IBM Plex Mono" pitchFamily="34" charset="0"/>
-                <a:ea typeface="IBM Plex Mono" pitchFamily="34" charset="-122"/>
-                <a:cs typeface="IBM Plex Mono" pitchFamily="34" charset="-120"/>
-              </a:rPr>
-              <a:t>11x</a:t>
-            </a:r>
-            <a:endParaRPr lang="en-US" sz="700" dirty="0"/>
-          </a:p>
-        </p:txBody>
-      </p:sp>
-      <p:sp>
-        <p:nvSpPr>
-          <p:cNvPr id="61" name="Text 58"/>
-          <p:cNvSpPr/>
-          <p:nvPr/>
-        </p:nvSpPr>
-        <p:spPr>
-          <a:xfrm>
-            <a:off x="7247763" y="5330952"/>
-            <a:ext cx="548640" cy="164592"/>
-          </a:xfrm>
-          <a:prstGeom prst="rect">
-            <a:avLst/>
-          </a:prstGeom>
-          <a:noFill/>
-          <a:ln/>
-        </p:spPr>
-        <p:txBody>
-          <a:bodyPr wrap="square" lIns="0" tIns="0" rIns="0" bIns="0" rtlCol="0" anchor="ctr"/>
-          <a:lstStyle/>
-          <a:p>
-            <a:pPr algn="ctr" indent="0" marL="0">
-              <a:buNone/>
-            </a:pPr>
-            <a:r>
-              <a:rPr lang="en-US" sz="700" dirty="0">
-                <a:solidFill>
-                  <a:srgbClr val="9A847C"/>
-                </a:solidFill>
-                <a:latin typeface="IBM Plex Mono" pitchFamily="34" charset="0"/>
-                <a:ea typeface="IBM Plex Mono" pitchFamily="34" charset="-122"/>
-                <a:cs typeface="IBM Plex Mono" pitchFamily="34" charset="-120"/>
-              </a:rPr>
-              <a:t>13x</a:t>
-            </a:r>
-            <a:endParaRPr lang="en-US" sz="700" dirty="0"/>
-          </a:p>
-        </p:txBody>
-      </p:sp>
-      <p:sp>
-        <p:nvSpPr>
-          <p:cNvPr id="62" name="Text 59"/>
-          <p:cNvSpPr/>
-          <p:nvPr/>
-        </p:nvSpPr>
-        <p:spPr>
-          <a:xfrm>
-            <a:off x="7916418" y="5330952"/>
-            <a:ext cx="548640" cy="164592"/>
-          </a:xfrm>
-          <a:prstGeom prst="rect">
-            <a:avLst/>
-          </a:prstGeom>
-          <a:noFill/>
-          <a:ln/>
-        </p:spPr>
-        <p:txBody>
-          <a:bodyPr wrap="square" lIns="0" tIns="0" rIns="0" bIns="0" rtlCol="0" anchor="ctr"/>
-          <a:lstStyle/>
-          <a:p>
-            <a:pPr algn="ctr" indent="0" marL="0">
-              <a:buNone/>
-            </a:pPr>
-            <a:r>
-              <a:rPr lang="en-US" sz="700" dirty="0">
-                <a:solidFill>
-                  <a:srgbClr val="9A847C"/>
-                </a:solidFill>
-                <a:latin typeface="IBM Plex Mono" pitchFamily="34" charset="0"/>
-                <a:ea typeface="IBM Plex Mono" pitchFamily="34" charset="-122"/>
-                <a:cs typeface="IBM Plex Mono" pitchFamily="34" charset="-120"/>
-              </a:rPr>
-              <a:t>14x</a:t>
-            </a:r>
-            <a:endParaRPr lang="en-US" sz="700" dirty="0"/>
-          </a:p>
-        </p:txBody>
-      </p:sp>
-      <p:sp>
-        <p:nvSpPr>
-          <p:cNvPr id="63" name="Text 60"/>
-          <p:cNvSpPr/>
-          <p:nvPr/>
-        </p:nvSpPr>
-        <p:spPr>
-          <a:xfrm>
-            <a:off x="9253728" y="5330952"/>
-            <a:ext cx="548640" cy="164592"/>
-          </a:xfrm>
-          <a:prstGeom prst="rect">
-            <a:avLst/>
-          </a:prstGeom>
-          <a:noFill/>
-          <a:ln/>
-        </p:spPr>
-        <p:txBody>
-          <a:bodyPr wrap="square" lIns="0" tIns="0" rIns="0" bIns="0" rtlCol="0" anchor="ctr"/>
-          <a:lstStyle/>
-          <a:p>
-            <a:pPr algn="ctr" indent="0" marL="0">
-              <a:buNone/>
-            </a:pPr>
-            <a:r>
-              <a:rPr lang="en-US" sz="700" dirty="0">
-                <a:solidFill>
-                  <a:srgbClr val="9A847C"/>
-                </a:solidFill>
-                <a:latin typeface="IBM Plex Mono" pitchFamily="34" charset="0"/>
-                <a:ea typeface="IBM Plex Mono" pitchFamily="34" charset="-122"/>
-                <a:cs typeface="IBM Plex Mono" pitchFamily="34" charset="-120"/>
-              </a:rPr>
-              <a:t>16x</a:t>
-            </a:r>
-            <a:endParaRPr lang="en-US" sz="700" dirty="0"/>
-          </a:p>
-        </p:txBody>
-      </p:sp>
-      <p:sp>
-        <p:nvSpPr>
-          <p:cNvPr id="64" name="Shape 61"/>
+          <p:cNvPr id="59" name="Shape 56"/>
           <p:cNvSpPr/>
           <p:nvPr/>
         </p:nvSpPr>
@@ -11819,7 +11624,7 @@
       </p:sp>
       <p:sp>
         <p:nvSpPr>
-          <p:cNvPr id="65" name="Text 62"/>
+          <p:cNvPr id="60" name="Text 57"/>
           <p:cNvSpPr/>
           <p:nvPr/>
         </p:nvSpPr>
@@ -11850,7 +11655,7 @@
                 <a:ea typeface="Noto Serif KR" pitchFamily="34" charset="-122"/>
                 <a:cs typeface="Noto Serif KR" pitchFamily="34" charset="-120"/>
               </a:rPr>
-              <a:t>결론 — 희석 캡을 49%까지 열면 밴드 안으로 들어온다</a:t>
+              <a:t>결론 — BA 11GW 축소로 필요멀티플이 peer를 넘어선다</a:t>
             </a:r>
             <a:endParaRPr lang="en-US" sz="1300" dirty="0"/>
           </a:p>
@@ -11858,7 +11663,7 @@
       </p:sp>
       <p:sp>
         <p:nvSpPr>
-          <p:cNvPr id="66" name="Text 63"/>
+          <p:cNvPr id="61" name="Text 58"/>
           <p:cNvSpPr/>
           <p:nvPr/>
         </p:nvSpPr>
@@ -11892,7 +11697,7 @@
                 <a:ea typeface="IBM Plex Sans KR" pitchFamily="34" charset="-122"/>
                 <a:cs typeface="IBM Plex Sans KR" pitchFamily="34" charset="-120"/>
               </a:rPr>
-              <a:t>가동률 85%/82%로 run-rate EBITDA </a:t>
+              <a:t>BA를 11GW로 축소하면 run-rate ex-AMPC EBITDA가 </a:t>
             </a:r>
             <a:pPr indent="0" marL="0">
               <a:lnSpc>
@@ -11903,13 +11708,13 @@
             <a:r>
               <a:rPr lang="en-US" sz="950" b="1" dirty="0">
                 <a:solidFill>
-                  <a:srgbClr val="86D6A6"/>
+                  <a:srgbClr val="FF8E84"/>
                 </a:solidFill>
                 <a:latin typeface="IBM Plex Sans KR" pitchFamily="34" charset="0"/>
                 <a:ea typeface="IBM Plex Sans KR" pitchFamily="34" charset="-122"/>
                 <a:cs typeface="IBM Plex Sans KR" pitchFamily="34" charset="-120"/>
               </a:rPr>
-              <a:t>$554mm</a:t>
+              <a:t>$554→$438mm</a:t>
             </a:r>
             <a:pPr indent="0" marL="0">
               <a:lnSpc>
@@ -11926,7 +11731,7 @@
                 <a:ea typeface="IBM Plex Sans KR" pitchFamily="34" charset="-122"/>
                 <a:cs typeface="IBM Plex Sans KR" pitchFamily="34" charset="-120"/>
               </a:rPr>
-              <a:t> → BASE </a:t>
+              <a:t>로 줄어 역산 필요 멀티플이 </a:t>
             </a:r>
             <a:pPr indent="0" marL="0">
               <a:lnSpc>
@@ -11943,7 +11748,7 @@
                 <a:ea typeface="IBM Plex Sans KR" pitchFamily="34" charset="-122"/>
                 <a:cs typeface="IBM Plex Sans KR" pitchFamily="34" charset="-120"/>
               </a:rPr>
-              <a:t>15.4x</a:t>
+              <a:t>BASE 18.8x → 최대결합 15.7x</a:t>
             </a:r>
             <a:pPr indent="0" marL="0">
               <a:lnSpc>
@@ -11960,7 +11765,7 @@
                 <a:ea typeface="IBM Plex Sans KR" pitchFamily="34" charset="-122"/>
                 <a:cs typeface="IBM Plex Sans KR" pitchFamily="34" charset="-120"/>
               </a:rPr>
-              <a:t>. 그랜트 20%나 희석 30%로 14.1x, 희석을 </a:t>
+              <a:t>로 상승. 그랜트20·희석49를 다 써도 </a:t>
             </a:r>
             <a:pPr indent="0" marL="0">
               <a:lnSpc>
@@ -11971,13 +11776,13 @@
             <a:r>
               <a:rPr lang="en-US" sz="950" b="1" dirty="0">
                 <a:solidFill>
-                  <a:srgbClr val="86D6A6"/>
+                  <a:srgbClr val="FF8E84"/>
                 </a:solidFill>
                 <a:latin typeface="IBM Plex Sans KR" pitchFamily="34" charset="0"/>
                 <a:ea typeface="IBM Plex Sans KR" pitchFamily="34" charset="-122"/>
                 <a:cs typeface="IBM Plex Sans KR" pitchFamily="34" charset="-120"/>
               </a:rPr>
-              <a:t>49%(③)</a:t>
+              <a:t>정상화 peer(13~15x)를 초과</a:t>
             </a:r>
             <a:pPr indent="0" marL="0">
               <a:lnSpc>
@@ -11994,7 +11799,7 @@
                 <a:ea typeface="IBM Plex Sans KR" pitchFamily="34" charset="-122"/>
                 <a:cs typeface="IBM Plex Sans KR" pitchFamily="34" charset="-120"/>
               </a:rPr>
-              <a:t>까지 열면 13.1x, </a:t>
+              <a:t>(2029E 분모면 19.9~23.8x). DCF 내재 </a:t>
             </a:r>
             <a:pPr indent="0" marL="0">
               <a:lnSpc>
@@ -12011,7 +11816,7 @@
                 <a:ea typeface="IBM Plex Sans KR" pitchFamily="34" charset="-122"/>
                 <a:cs typeface="IBM Plex Sans KR" pitchFamily="34" charset="-120"/>
               </a:rPr>
-              <a:t>그랜트20+희석49 결합 시 12.6x — peer 밴드(8~13x) 진입</a:t>
+              <a:t>8.3x는 여전히 할인</a:t>
             </a:r>
             <a:pPr indent="0" marL="0">
               <a:lnSpc>
@@ -12028,7 +11833,7 @@
                 <a:ea typeface="IBM Plex Sans KR" pitchFamily="34" charset="-122"/>
                 <a:cs typeface="IBM Plex Sans KR" pitchFamily="34" charset="-120"/>
               </a:rPr>
-              <a:t>. DCF는 </a:t>
+              <a:t>. 규모 축소가 지분조달 여력 악화 → 마진 개선(</a:t>
             </a:r>
             <a:pPr indent="0" marL="0">
               <a:lnSpc>
@@ -12045,7 +11850,7 @@
                 <a:ea typeface="IBM Plex Sans KR" pitchFamily="34" charset="-122"/>
                 <a:cs typeface="IBM Plex Sans KR" pitchFamily="34" charset="-120"/>
               </a:rPr>
-              <a:t>WACC 10.5%·영구성장 2.0%</a:t>
+              <a:t>필요 EBITDA% 10.9~13.0%</a:t>
             </a:r>
             <a:pPr indent="0" marL="0">
               <a:lnSpc>
@@ -12062,7 +11867,7 @@
                 <a:ea typeface="IBM Plex Sans KR" pitchFamily="34" charset="-122"/>
                 <a:cs typeface="IBM Plex Sans KR" pitchFamily="34" charset="-120"/>
               </a:rPr>
-              <a:t> 기준 EV $4.8bn(그중 AMPC PV $3.6bn·75%). OT SOP ′28 하반기. 단 49% 희석은 지배력 약화 트레이드오프 — 협상 상한으로만. ★ 순차입금 $6.4bn·부채비중 60% 고정</a:t>
+              <a:t>)이 관건. WACC10.5%·TGR2%·순차입 $6.4bn ★</a:t>
             </a:r>
             <a:endParaRPr lang="en-US" sz="950" dirty="0"/>
           </a:p>
@@ -12070,7 +11875,7 @@
       </p:sp>
       <p:sp>
         <p:nvSpPr>
-          <p:cNvPr id="67" name="Shape 64"/>
+          <p:cNvPr id="62" name="Shape 59"/>
           <p:cNvSpPr/>
           <p:nvPr/>
         </p:nvSpPr>
@@ -12093,7 +11898,7 @@
       </p:sp>
       <p:sp>
         <p:nvSpPr>
-          <p:cNvPr id="68" name="Text 65"/>
+          <p:cNvPr id="63" name="Text 60"/>
           <p:cNvSpPr/>
           <p:nvPr/>
         </p:nvSpPr>
@@ -12132,7 +11937,7 @@
       </p:sp>
       <p:sp>
         <p:nvSpPr>
-          <p:cNvPr id="69" name="Text 66"/>
+          <p:cNvPr id="64" name="Text 61"/>
           <p:cNvSpPr/>
           <p:nvPr/>
         </p:nvSpPr>
@@ -14382,7 +14187,7 @@
                           <a:ea typeface="IBM Plex Mono" pitchFamily="34" charset="-122"/>
                           <a:cs typeface="IBM Plex Mono" pitchFamily="34" charset="-120"/>
                         </a:rPr>
-                        <a:t>$554mm</a:t>
+                        <a:t>$438mm</a:t>
                       </a:r>
                       <a:endParaRPr lang="en-US" sz="950" dirty="0">
                         <a:latin typeface="IBM Plex Mono" charset="0"/>
@@ -14450,7 +14255,7 @@
                           <a:ea typeface="Space Grotesk" pitchFamily="34" charset="-122"/>
                           <a:cs typeface="Space Grotesk" pitchFamily="34" charset="-120"/>
                         </a:rPr>
-                        <a:t>8.7x</a:t>
+                        <a:t>8.3x</a:t>
                       </a:r>
                       <a:endParaRPr lang="en-US" sz="1150" dirty="0">
                         <a:latin typeface="Space Grotesk" charset="0"/>
@@ -14518,7 +14323,7 @@
                           <a:ea typeface="IBM Plex Mono" pitchFamily="34" charset="-122"/>
                           <a:cs typeface="IBM Plex Mono" pitchFamily="34" charset="-120"/>
                         </a:rPr>
-                        <a:t>12.6~15.4x</a:t>
+                        <a:t>15.7~18.8x</a:t>
                       </a:r>
                       <a:endParaRPr lang="en-US" sz="950" dirty="0">
                         <a:latin typeface="IBM Plex Mono" charset="0"/>
@@ -14656,7 +14461,7 @@
                           <a:ea typeface="IBM Plex Mono" pitchFamily="34" charset="-122"/>
                           <a:cs typeface="IBM Plex Mono" pitchFamily="34" charset="-120"/>
                         </a:rPr>
-                        <a:t>$455mm</a:t>
+                        <a:t>$346mm</a:t>
                       </a:r>
                       <a:endParaRPr lang="en-US" sz="950" dirty="0">
                         <a:latin typeface="IBM Plex Mono" charset="0"/>
@@ -14724,7 +14529,7 @@
                           <a:ea typeface="Space Grotesk" pitchFamily="34" charset="-122"/>
                           <a:cs typeface="Space Grotesk" pitchFamily="34" charset="-120"/>
                         </a:rPr>
-                        <a:t>10.6x</a:t>
+                        <a:t>10.5x</a:t>
                       </a:r>
                       <a:endParaRPr lang="en-US" sz="1150" dirty="0">
                         <a:latin typeface="Space Grotesk" charset="0"/>
@@ -14792,7 +14597,7 @@
                           <a:ea typeface="IBM Plex Mono" pitchFamily="34" charset="-122"/>
                           <a:cs typeface="IBM Plex Mono" pitchFamily="34" charset="-120"/>
                         </a:rPr>
-                        <a:t>15.3~18.8x</a:t>
+                        <a:t>19.9~23.8x</a:t>
                       </a:r>
                       <a:endParaRPr lang="en-US" sz="950" dirty="0">
                         <a:latin typeface="IBM Plex Mono" charset="0"/>
@@ -14945,7 +14750,7 @@
                 <a:ea typeface="IBM Plex Sans KR" pitchFamily="34" charset="-122"/>
                 <a:cs typeface="IBM Plex Sans KR" pitchFamily="34" charset="-120"/>
               </a:rPr>
-              <a:t>× $554mm  → EV $7.2bn  </a:t>
+              <a:t>× $438mm  → EV $5.7bn  </a:t>
             </a:r>
             <a:pPr indent="0" marL="0">
               <a:lnSpc>
@@ -14956,13 +14761,13 @@
             <a:r>
               <a:rPr lang="en-US" sz="1000" b="1" dirty="0">
                 <a:solidFill>
-                  <a:srgbClr val="86D6A6"/>
+                  <a:srgbClr val="FF8E84"/>
                 </a:solidFill>
                 <a:latin typeface="IBM Plex Sans KR" pitchFamily="34" charset="0"/>
                 <a:ea typeface="IBM Plex Sans KR" pitchFamily="34" charset="-122"/>
                 <a:cs typeface="IBM Plex Sans KR" pitchFamily="34" charset="-120"/>
               </a:rPr>
-              <a:t>지분 +$0.8bn
+              <a:t>지분 −$0.7bn
 </a:t>
             </a:r>
             <a:pPr indent="0" marL="0">
@@ -14980,7 +14785,7 @@
                 <a:ea typeface="IBM Plex Sans KR" pitchFamily="34" charset="-122"/>
                 <a:cs typeface="IBM Plex Sans KR" pitchFamily="34" charset="-120"/>
               </a:rPr>
-              <a:t>× $455mm  → EV $5.9bn  </a:t>
+              <a:t>× $346mm  → EV $4.5bn  </a:t>
             </a:r>
             <a:pPr indent="0" marL="0">
               <a:lnSpc>
@@ -14997,7 +14802,7 @@
                 <a:ea typeface="IBM Plex Sans KR" pitchFamily="34" charset="-122"/>
                 <a:cs typeface="IBM Plex Sans KR" pitchFamily="34" charset="-120"/>
               </a:rPr>
-              <a:t>지분 −$0.5bn</a:t>
+              <a:t>지분 −$1.9bn</a:t>
             </a:r>
             <a:endParaRPr lang="en-US" sz="1000" dirty="0"/>
           </a:p>
@@ -15036,7 +14841,7 @@
                 <a:ea typeface="IBM Plex Mono" pitchFamily="34" charset="-122"/>
                 <a:cs typeface="IBM Plex Mono" pitchFamily="34" charset="-120"/>
               </a:rPr>
-              <a:t>풋볼필드 — 내재 EV ($bn) · run-rate $554mm 기준 · 보수/정상화 peer vs 역산 필요</a:t>
+              <a:t>풋볼필드 — 내재 EV ($bn) · run-rate $438mm 기준 · 보수/정상화 peer vs 역산 필요</a:t>
             </a:r>
             <a:endParaRPr lang="en-US" sz="850" dirty="0"/>
           </a:p>
@@ -15073,8 +14878,8 @@
         </p:nvSpPr>
         <p:spPr>
           <a:xfrm>
-            <a:off x="1447221" y="5394960"/>
-            <a:ext cx="4787158" cy="182880"/>
+            <a:off x="1424178" y="5394960"/>
+            <a:ext cx="3153994" cy="182880"/>
           </a:xfrm>
           <a:prstGeom prst="rect">
             <a:avLst/>
@@ -15098,8 +14903,8 @@
         </p:nvSpPr>
         <p:spPr>
           <a:xfrm>
-            <a:off x="1447221" y="5605272"/>
-            <a:ext cx="4787158" cy="182880"/>
+            <a:off x="1424178" y="5605272"/>
+            <a:ext cx="3153994" cy="182880"/>
           </a:xfrm>
           <a:prstGeom prst="rect">
             <a:avLst/>
@@ -15123,7 +14928,7 @@
                 <a:ea typeface="IBM Plex Mono" pitchFamily="34" charset="-122"/>
                 <a:cs typeface="IBM Plex Mono" pitchFamily="34" charset="-120"/>
               </a:rPr>
-              <a:t>보수 8~13x  $4.4~7.2bn</a:t>
+              <a:t>보수 8~13x  $3.5~5.7bn</a:t>
             </a:r>
             <a:endParaRPr lang="en-US" sz="750" dirty="0"/>
           </a:p>
@@ -15137,8 +14942,8 @@
         </p:nvSpPr>
         <p:spPr>
           <a:xfrm>
-            <a:off x="6234379" y="5394960"/>
-            <a:ext cx="1918320" cy="182880"/>
+            <a:off x="4578172" y="5394960"/>
+            <a:ext cx="1267358" cy="182880"/>
           </a:xfrm>
           <a:prstGeom prst="rect">
             <a:avLst/>
@@ -15162,8 +14967,8 @@
         </p:nvSpPr>
         <p:spPr>
           <a:xfrm>
-            <a:off x="5960059" y="5175504"/>
-            <a:ext cx="2741280" cy="182880"/>
+            <a:off x="4303852" y="5175504"/>
+            <a:ext cx="2090318" cy="182880"/>
           </a:xfrm>
           <a:prstGeom prst="rect">
             <a:avLst/>
@@ -15187,7 +14992,7 @@
                 <a:ea typeface="IBM Plex Mono" pitchFamily="34" charset="-122"/>
                 <a:cs typeface="IBM Plex Mono" pitchFamily="34" charset="-120"/>
               </a:rPr>
-              <a:t>정상화 13~15x  $7.2~8.3bn</a:t>
+              <a:t>정상화 13~15x  $5.7~6.6bn</a:t>
             </a:r>
             <a:endParaRPr lang="en-US" sz="750" dirty="0"/>
           </a:p>
@@ -15201,8 +15006,8 @@
         </p:nvSpPr>
         <p:spPr>
           <a:xfrm>
-            <a:off x="5854172" y="5212080"/>
-            <a:ext cx="2678735" cy="0"/>
+            <a:off x="6291986" y="5212080"/>
+            <a:ext cx="1958645" cy="0"/>
           </a:xfrm>
           <a:prstGeom prst="line">
             <a:avLst/>
@@ -15224,8 +15029,8 @@
         </p:nvSpPr>
         <p:spPr>
           <a:xfrm>
-            <a:off x="5579852" y="5010912"/>
-            <a:ext cx="3501695" cy="182880"/>
+            <a:off x="6017666" y="5010912"/>
+            <a:ext cx="2781605" cy="182880"/>
           </a:xfrm>
           <a:prstGeom prst="rect">
             <a:avLst/>
@@ -15249,7 +15054,7 @@
                 <a:ea typeface="IBM Plex Mono" pitchFamily="34" charset="-122"/>
                 <a:cs typeface="IBM Plex Mono" pitchFamily="34" charset="-120"/>
               </a:rPr>
-              <a:t>역산 필요 12.6~15.4x</a:t>
+              <a:t>역산 필요 15.7~18.8x</a:t>
             </a:r>
             <a:endParaRPr lang="en-US" sz="750" dirty="0"/>
           </a:p>
@@ -15263,7 +15068,7 @@
         </p:nvSpPr>
         <p:spPr>
           <a:xfrm>
-            <a:off x="4851806" y="5340096"/>
+            <a:off x="5600700" y="5340096"/>
             <a:ext cx="0" cy="292608"/>
           </a:xfrm>
           <a:prstGeom prst="line">
@@ -15286,7 +15091,7 @@
         </p:nvSpPr>
         <p:spPr>
           <a:xfrm>
-            <a:off x="4120286" y="5760720"/>
+            <a:off x="4869180" y="5760720"/>
             <a:ext cx="1463040" cy="164592"/>
           </a:xfrm>
           <a:prstGeom prst="rect">
@@ -15325,7 +15130,7 @@
         </p:nvSpPr>
         <p:spPr>
           <a:xfrm>
-            <a:off x="2100925" y="5431536"/>
+            <a:off x="1585341" y="5431536"/>
             <a:ext cx="109728" cy="109728"/>
           </a:xfrm>
           <a:prstGeom prst="ellipse">
@@ -15345,7 +15150,7 @@
         </p:nvSpPr>
         <p:spPr>
           <a:xfrm>
-            <a:off x="1378549" y="5175504"/>
+            <a:off x="862965" y="5175504"/>
             <a:ext cx="1554480" cy="182880"/>
           </a:xfrm>
           <a:prstGeom prst="rect">
@@ -15370,7 +15175,7 @@
                 <a:ea typeface="IBM Plex Mono" pitchFamily="34" charset="-122"/>
                 <a:cs typeface="IBM Plex Mono" pitchFamily="34" charset="-120"/>
               </a:rPr>
-              <a:t>DCF $4.8bn·8.7x</a:t>
+              <a:t>DCF $3.6bn·8.3x</a:t>
             </a:r>
             <a:endParaRPr lang="en-US" sz="750" dirty="0"/>
           </a:p>
@@ -15409,7 +15214,7 @@
                 <a:ea typeface="IBM Plex Mono" pitchFamily="34" charset="-122"/>
                 <a:cs typeface="IBM Plex Mono" pitchFamily="34" charset="-120"/>
               </a:rPr>
-              <a:t>$4bn</a:t>
+              <a:t>$3bn</a:t>
             </a:r>
             <a:endParaRPr lang="en-US" sz="650" dirty="0"/>
           </a:p>
@@ -15423,7 +15228,7 @@
         </p:nvSpPr>
         <p:spPr>
           <a:xfrm>
-            <a:off x="2157984" y="5888736"/>
+            <a:off x="1869948" y="5888736"/>
             <a:ext cx="548640" cy="146304"/>
           </a:xfrm>
           <a:prstGeom prst="rect">
@@ -15448,7 +15253,7 @@
                 <a:ea typeface="IBM Plex Mono" pitchFamily="34" charset="-122"/>
                 <a:cs typeface="IBM Plex Mono" pitchFamily="34" charset="-120"/>
               </a:rPr>
-              <a:t>$5bn</a:t>
+              <a:t>$4bn</a:t>
             </a:r>
             <a:endParaRPr lang="en-US" sz="650" dirty="0"/>
           </a:p>
@@ -15462,7 +15267,7 @@
         </p:nvSpPr>
         <p:spPr>
           <a:xfrm>
-            <a:off x="3886200" y="5888736"/>
+            <a:off x="3310128" y="5888736"/>
             <a:ext cx="548640" cy="146304"/>
           </a:xfrm>
           <a:prstGeom prst="rect">
@@ -15487,7 +15292,7 @@
                 <a:ea typeface="IBM Plex Mono" pitchFamily="34" charset="-122"/>
                 <a:cs typeface="IBM Plex Mono" pitchFamily="34" charset="-120"/>
               </a:rPr>
-              <a:t>$6bn</a:t>
+              <a:t>$5bn</a:t>
             </a:r>
             <a:endParaRPr lang="en-US" sz="650" dirty="0"/>
           </a:p>
@@ -15501,7 +15306,7 @@
         </p:nvSpPr>
         <p:spPr>
           <a:xfrm>
-            <a:off x="5614416" y="5888736"/>
+            <a:off x="4750308" y="5888736"/>
             <a:ext cx="548640" cy="146304"/>
           </a:xfrm>
           <a:prstGeom prst="rect">
@@ -15526,7 +15331,7 @@
                 <a:ea typeface="IBM Plex Mono" pitchFamily="34" charset="-122"/>
                 <a:cs typeface="IBM Plex Mono" pitchFamily="34" charset="-120"/>
               </a:rPr>
-              <a:t>$7bn</a:t>
+              <a:t>$6bn</a:t>
             </a:r>
             <a:endParaRPr lang="en-US" sz="650" dirty="0"/>
           </a:p>
@@ -15540,7 +15345,7 @@
         </p:nvSpPr>
         <p:spPr>
           <a:xfrm>
-            <a:off x="7342632" y="5888736"/>
+            <a:off x="6190488" y="5888736"/>
             <a:ext cx="548640" cy="146304"/>
           </a:xfrm>
           <a:prstGeom prst="rect">
@@ -15565,7 +15370,7 @@
                 <a:ea typeface="IBM Plex Mono" pitchFamily="34" charset="-122"/>
                 <a:cs typeface="IBM Plex Mono" pitchFamily="34" charset="-120"/>
               </a:rPr>
-              <a:t>$8bn</a:t>
+              <a:t>$7bn</a:t>
             </a:r>
             <a:endParaRPr lang="en-US" sz="650" dirty="0"/>
           </a:p>
@@ -15579,7 +15384,7 @@
         </p:nvSpPr>
         <p:spPr>
           <a:xfrm>
-            <a:off x="9070848" y="5888736"/>
+            <a:off x="7630668" y="5888736"/>
             <a:ext cx="548640" cy="146304"/>
           </a:xfrm>
           <a:prstGeom prst="rect">
@@ -15604,6 +15409,45 @@
                 <a:ea typeface="IBM Plex Mono" pitchFamily="34" charset="-122"/>
                 <a:cs typeface="IBM Plex Mono" pitchFamily="34" charset="-120"/>
               </a:rPr>
+              <a:t>$8bn</a:t>
+            </a:r>
+            <a:endParaRPr lang="en-US" sz="650" dirty="0"/>
+          </a:p>
+        </p:txBody>
+      </p:sp>
+      <p:sp>
+        <p:nvSpPr>
+          <p:cNvPr id="33" name="Text 29"/>
+          <p:cNvSpPr/>
+          <p:nvPr/>
+        </p:nvSpPr>
+        <p:spPr>
+          <a:xfrm>
+            <a:off x="9070848" y="5888736"/>
+            <a:ext cx="548640" cy="146304"/>
+          </a:xfrm>
+          <a:prstGeom prst="rect">
+            <a:avLst/>
+          </a:prstGeom>
+          <a:noFill/>
+          <a:ln/>
+        </p:spPr>
+        <p:txBody>
+          <a:bodyPr wrap="square" lIns="0" tIns="0" rIns="0" bIns="0" rtlCol="0" anchor="ctr"/>
+          <a:lstStyle/>
+          <a:p>
+            <a:pPr algn="ctr" indent="0" marL="0">
+              <a:buNone/>
+            </a:pPr>
+            <a:r>
+              <a:rPr lang="en-US" sz="650" dirty="0">
+                <a:solidFill>
+                  <a:srgbClr val="9A847C"/>
+                </a:solidFill>
+                <a:latin typeface="IBM Plex Mono" pitchFamily="34" charset="0"/>
+                <a:ea typeface="IBM Plex Mono" pitchFamily="34" charset="-122"/>
+                <a:cs typeface="IBM Plex Mono" pitchFamily="34" charset="-120"/>
+              </a:rPr>
               <a:t>$9bn</a:t>
             </a:r>
             <a:endParaRPr lang="en-US" sz="650" dirty="0"/>
@@ -15612,7 +15456,7 @@
       </p:sp>
       <p:sp>
         <p:nvSpPr>
-          <p:cNvPr id="33" name="Shape 29"/>
+          <p:cNvPr id="34" name="Shape 30"/>
           <p:cNvSpPr/>
           <p:nvPr/>
         </p:nvSpPr>
@@ -15634,7 +15478,7 @@
       </p:sp>
       <p:sp>
         <p:nvSpPr>
-          <p:cNvPr id="34" name="Text 30"/>
+          <p:cNvPr id="35" name="Text 31"/>
           <p:cNvSpPr/>
           <p:nvPr/>
         </p:nvSpPr>
@@ -15685,7 +15529,7 @@
                 <a:ea typeface="IBM Plex Sans KR" pitchFamily="34" charset="-122"/>
                 <a:cs typeface="IBM Plex Sans KR" pitchFamily="34" charset="-120"/>
               </a:rPr>
-              <a:t>실측 peer는 현재 다운사이클로 </a:t>
+              <a:t>BA 11GW 축소로 run-rate ex-AMPC EBITDA </a:t>
             </a:r>
             <a:pPr indent="0" marL="0">
               <a:lnSpc>
@@ -15696,13 +15540,13 @@
             <a:r>
               <a:rPr lang="en-US" sz="900" b="1" dirty="0">
                 <a:solidFill>
-                  <a:srgbClr val="6F6960"/>
+                  <a:srgbClr val="C1121F"/>
                 </a:solidFill>
                 <a:latin typeface="IBM Plex Sans KR" pitchFamily="34" charset="0"/>
                 <a:ea typeface="IBM Plex Sans KR" pitchFamily="34" charset="-122"/>
                 <a:cs typeface="IBM Plex Sans KR" pitchFamily="34" charset="-120"/>
               </a:rPr>
-              <a:t>15~27x(트로프)</a:t>
+              <a:t>$554→$438mm</a:t>
             </a:r>
             <a:pPr indent="0" marL="0">
               <a:lnSpc>
@@ -15719,7 +15563,7 @@
                 <a:ea typeface="IBM Plex Sans KR" pitchFamily="34" charset="-122"/>
                 <a:cs typeface="IBM Plex Sans KR" pitchFamily="34" charset="-120"/>
               </a:rPr>
-              <a:t>, 정상화 ~13~15x(LGES '27F 15x·CATL ~13x). run-rate 역산 필요 </a:t>
+              <a:t>. 역산 필요 </a:t>
             </a:r>
             <a:pPr indent="0" marL="0">
               <a:lnSpc>
@@ -15730,13 +15574,13 @@
             <a:r>
               <a:rPr lang="en-US" sz="900" b="1" dirty="0">
                 <a:solidFill>
-                  <a:srgbClr val="1E7A4D"/>
+                  <a:srgbClr val="C1121F"/>
                 </a:solidFill>
                 <a:latin typeface="IBM Plex Sans KR" pitchFamily="34" charset="0"/>
                 <a:ea typeface="IBM Plex Sans KR" pitchFamily="34" charset="-122"/>
                 <a:cs typeface="IBM Plex Sans KR" pitchFamily="34" charset="-120"/>
               </a:rPr>
-              <a:t>12.6~15.4x는 정상화 peer와 거의 일치</a:t>
+              <a:t>15.7~18.8x는 정상화 peer(13~15x)를 초과</a:t>
             </a:r>
             <a:pPr indent="0" marL="0">
               <a:lnSpc>
@@ -15753,7 +15597,7 @@
                 <a:ea typeface="IBM Plex Sans KR" pitchFamily="34" charset="-122"/>
                 <a:cs typeface="IBM Plex Sans KR" pitchFamily="34" charset="-120"/>
               </a:rPr>
-              <a:t>(당초 "peer 상단 초과"는 8~13x 보수가정 탓). DCF 내재 8.7x는 오히려 할인. 단 </a:t>
+              <a:t>(2029E 분모면 19.9~23.8x). DCF 내재 </a:t>
             </a:r>
             <a:pPr indent="0" marL="0">
               <a:lnSpc>
@@ -15764,13 +15608,13 @@
             <a:r>
               <a:rPr lang="en-US" sz="900" b="1" dirty="0">
                 <a:solidFill>
-                  <a:srgbClr val="C1121F"/>
+                  <a:srgbClr val="1E7A4D"/>
                 </a:solidFill>
                 <a:latin typeface="IBM Plex Sans KR" pitchFamily="34" charset="0"/>
                 <a:ea typeface="IBM Plex Sans KR" pitchFamily="34" charset="-122"/>
                 <a:cs typeface="IBM Plex Sans KR" pitchFamily="34" charset="-120"/>
               </a:rPr>
-              <a:t>분모를 2029E($455mm)로 당기면 필요멀티플 15.3~18.8x로 상승</a:t>
+              <a:t>8.3x는 여전히 할인</a:t>
             </a:r>
             <a:pPr indent="0" marL="0">
               <a:lnSpc>
@@ -15787,7 +15631,41 @@
                 <a:ea typeface="IBM Plex Sans KR" pitchFamily="34" charset="-122"/>
                 <a:cs typeface="IBM Plex Sans KR" pitchFamily="34" charset="-120"/>
               </a:rPr>
-              <a:t> — EBITDA 연도 기준이 결과를 좌우. peer는 자체보조금 포함(우리 ex-AMPC, 보수적).</a:t>
+              <a:t>이나, 규모 축소가 지분조달 여력을 악화 → 마진 개선(</a:t>
+            </a:r>
+            <a:pPr indent="0" marL="0">
+              <a:lnSpc>
+                <a:spcPct val="112000"/>
+              </a:lnSpc>
+              <a:buNone/>
+            </a:pPr>
+            <a:r>
+              <a:rPr lang="en-US" sz="900" b="1" dirty="0">
+                <a:solidFill>
+                  <a:srgbClr val="C1121F"/>
+                </a:solidFill>
+                <a:latin typeface="IBM Plex Sans KR" pitchFamily="34" charset="0"/>
+                <a:ea typeface="IBM Plex Sans KR" pitchFamily="34" charset="-122"/>
+                <a:cs typeface="IBM Plex Sans KR" pitchFamily="34" charset="-120"/>
+              </a:rPr>
+              <a:t>필요 EBITDA% 10.9~13.0%</a:t>
+            </a:r>
+            <a:pPr indent="0" marL="0">
+              <a:lnSpc>
+                <a:spcPct val="112000"/>
+              </a:lnSpc>
+              <a:buNone/>
+            </a:pPr>
+            <a:r>
+              <a:rPr lang="en-US" sz="900" dirty="0">
+                <a:solidFill>
+                  <a:srgbClr val="1B1714"/>
+                </a:solidFill>
+                <a:latin typeface="IBM Plex Sans KR" pitchFamily="34" charset="0"/>
+                <a:ea typeface="IBM Plex Sans KR" pitchFamily="34" charset="-122"/>
+                <a:cs typeface="IBM Plex Sans KR" pitchFamily="34" charset="-120"/>
+              </a:rPr>
+              <a:t>)·프리미엄 멀티플이 관건. peer는 자체보조금 포함(우리 ex-AMPC, 보수적).</a:t>
             </a:r>
             <a:endParaRPr lang="en-US" sz="900" dirty="0"/>
           </a:p>
@@ -15795,7 +15673,7 @@
       </p:sp>
       <p:sp>
         <p:nvSpPr>
-          <p:cNvPr id="35" name="Shape 31"/>
+          <p:cNvPr id="36" name="Shape 32"/>
           <p:cNvSpPr/>
           <p:nvPr/>
         </p:nvSpPr>
@@ -15818,7 +15696,7 @@
       </p:sp>
       <p:sp>
         <p:nvSpPr>
-          <p:cNvPr id="36" name="Text 32"/>
+          <p:cNvPr id="37" name="Text 33"/>
           <p:cNvSpPr/>
           <p:nvPr/>
         </p:nvSpPr>
@@ -15857,7 +15735,7 @@
       </p:sp>
       <p:sp>
         <p:nvSpPr>
-          <p:cNvPr id="37" name="Text 33"/>
+          <p:cNvPr id="38" name="Text 34"/>
           <p:cNvSpPr/>
           <p:nvPr/>
         </p:nvSpPr>

--- a/sk_valuation_project/output/SK_Funding_v3_editable.pptx
+++ b/sk_valuation_project/output/SK_Funding_v3_editable.pptx
@@ -4039,7 +4039,7 @@
                 <a:ea typeface="IBM Plex Mono" pitchFamily="34" charset="-122"/>
                 <a:cs typeface="IBM Plex Mono" pitchFamily="34" charset="-120"/>
               </a:rPr>
-              <a:t>$0.2bn</a:t>
+              <a:t>$0.4bn</a:t>
             </a:r>
             <a:endParaRPr lang="en-US" sz="2000" dirty="0"/>
           </a:p>
@@ -4218,7 +4218,7 @@
                 <a:ea typeface="IBM Plex Mono" pitchFamily="34" charset="-122"/>
                 <a:cs typeface="IBM Plex Mono" pitchFamily="34" charset="-120"/>
               </a:rPr>
-              <a:t>$1.2bn</a:t>
+              <a:t>$1.4bn</a:t>
             </a:r>
             <a:endParaRPr lang="en-US" sz="2400" dirty="0"/>
           </a:p>
@@ -4503,7 +4503,7 @@
         <p:spPr>
           <a:xfrm>
             <a:off x="6208776" y="4928616"/>
-            <a:ext cx="1031240" cy="219456"/>
+            <a:ext cx="848563" cy="219456"/>
           </a:xfrm>
           <a:prstGeom prst="rect">
             <a:avLst/>
@@ -4522,8 +4522,8 @@
         </p:nvSpPr>
         <p:spPr>
           <a:xfrm>
-            <a:off x="7240016" y="4928616"/>
-            <a:ext cx="2681224" cy="219456"/>
+            <a:off x="7057339" y="4928616"/>
+            <a:ext cx="2863901" cy="219456"/>
           </a:xfrm>
           <a:prstGeom prst="rect">
             <a:avLst/>
@@ -4543,7 +4543,7 @@
         <p:spPr>
           <a:xfrm>
             <a:off x="6208776" y="4928616"/>
-            <a:ext cx="1031240" cy="219456"/>
+            <a:ext cx="848563" cy="219456"/>
           </a:xfrm>
           <a:prstGeom prst="rect">
             <a:avLst/>
@@ -4567,7 +4567,7 @@
                 <a:ea typeface="IBM Plex Mono" pitchFamily="34" charset="-122"/>
                 <a:cs typeface="IBM Plex Mono" pitchFamily="34" charset="-120"/>
               </a:rPr>
-              <a:t>ex-AMPC $1.0bn</a:t>
+              <a:t>ex-AMPC $0.8bn</a:t>
             </a:r>
             <a:endParaRPr lang="en-US" sz="750" dirty="0"/>
           </a:p>
@@ -4581,8 +4581,8 @@
         </p:nvSpPr>
         <p:spPr>
           <a:xfrm>
-            <a:off x="7240016" y="4928616"/>
-            <a:ext cx="2681224" cy="219456"/>
+            <a:off x="7057339" y="4928616"/>
+            <a:ext cx="2863901" cy="219456"/>
           </a:xfrm>
           <a:prstGeom prst="rect">
             <a:avLst/>
@@ -4606,7 +4606,7 @@
                 <a:ea typeface="IBM Plex Mono" pitchFamily="34" charset="-122"/>
                 <a:cs typeface="IBM Plex Mono" pitchFamily="34" charset="-120"/>
               </a:rPr>
-              <a:t>AMPC PV $2.7bn (74%)</a:t>
+              <a:t>AMPC PV $2.7bn (77%)</a:t>
             </a:r>
             <a:endParaRPr lang="en-US" sz="800" dirty="0"/>
           </a:p>
@@ -4645,7 +4645,7 @@
                 <a:ea typeface="IBM Plex Sans KR" pitchFamily="34" charset="-122"/>
                 <a:cs typeface="IBM Plex Sans KR" pitchFamily="34" charset="-120"/>
               </a:rPr>
-              <a:t>DCF EV $3.6bn</a:t>
+              <a:t>DCF EV $3.5bn</a:t>
             </a:r>
             <a:pPr indent="0" marL="0">
               <a:buNone/>
@@ -4659,7 +4659,7 @@
                 <a:ea typeface="IBM Plex Sans KR" pitchFamily="34" charset="-122"/>
                 <a:cs typeface="IBM Plex Sans KR" pitchFamily="34" charset="-120"/>
               </a:rPr>
-              <a:t> 의 74%가 한시 AMPC → 멀티플엔 ex-AMPC만. WACC 10.5%·TGR 2%·Ke 13%</a:t>
+              <a:t> 의 77%가 한시 AMPC → 멀티플엔 ex-AMPC만. WACC 10.5%·TGR 2%·Ke 13%</a:t>
             </a:r>
             <a:endParaRPr lang="en-US" sz="800" dirty="0"/>
           </a:p>
@@ -4990,7 +4990,7 @@
                 <a:ea typeface="Space Grotesk" pitchFamily="34" charset="-122"/>
                 <a:cs typeface="Space Grotesk" pitchFamily="34" charset="-120"/>
               </a:rPr>
-              <a:t>1.2</a:t>
+              <a:t>1.4</a:t>
             </a:r>
             <a:pPr indent="0" marL="0">
               <a:buNone/>
@@ -5105,7 +5105,7 @@
                 <a:ea typeface="Space Grotesk" pitchFamily="34" charset="-122"/>
                 <a:cs typeface="Space Grotesk" pitchFamily="34" charset="-120"/>
               </a:rPr>
-              <a:t>3.6</a:t>
+              <a:t>3.5</a:t>
             </a:r>
             <a:pPr indent="0" marL="0">
               <a:buNone/>
@@ -5926,7 +5926,7 @@
                 <a:ea typeface="IBM Plex Mono" pitchFamily="34" charset="-122"/>
                 <a:cs typeface="IBM Plex Mono" pitchFamily="34" charset="-120"/>
               </a:rPr>
-              <a:t>총 $1.22bn 일괄 조달</a:t>
+              <a:t>총 $1.42bn 일괄 조달</a:t>
             </a:r>
             <a:endParaRPr lang="en-US" sz="800" dirty="0"/>
           </a:p>
@@ -6006,7 +6006,7 @@
                 <a:ea typeface="IBM Plex Mono" pitchFamily="34" charset="-122"/>
                 <a:cs typeface="IBM Plex Mono" pitchFamily="34" charset="-120"/>
               </a:rPr>
-              <a:t>$0.12bn</a:t>
+              <a:t>$0.14bn</a:t>
             </a:r>
             <a:endParaRPr lang="en-US" sz="950" dirty="0"/>
           </a:p>
@@ -6125,7 +6125,7 @@
                 <a:ea typeface="IBM Plex Mono" pitchFamily="34" charset="-122"/>
                 <a:cs typeface="IBM Plex Mono" pitchFamily="34" charset="-120"/>
               </a:rPr>
-              <a:t>$0.73bn</a:t>
+              <a:t>$0.85bn</a:t>
             </a:r>
             <a:endParaRPr lang="en-US" sz="950" dirty="0"/>
           </a:p>
@@ -6500,7 +6500,7 @@
                 <a:ea typeface="IBM Plex Sans KR" pitchFamily="34" charset="-122"/>
                 <a:cs typeface="IBM Plex Sans KR" pitchFamily="34" charset="-120"/>
               </a:rPr>
-              <a:t>조달 믹스 그랜트 10% · 지분 30% · 비소구부채 60% ($1.22bn) → 자체 $0.2bn + OT $1.0bn 증자</a:t>
+              <a:t>조달 믹스 그랜트 10% · 지분 30% · 비소구부채 60% ($1.42bn) → 자체 $0.4bn + OT $1.0bn 증자</a:t>
             </a:r>
             <a:endParaRPr lang="en-US" sz="950" dirty="0"/>
           </a:p>
@@ -6644,7 +6644,7 @@
                 <a:ea typeface="Noto Serif KR" pitchFamily="34" charset="-122"/>
                 <a:cs typeface="Noto Serif KR" pitchFamily="34" charset="-120"/>
               </a:rPr>
-              <a:t>BA가 $1.22bn 일괄 조달</a:t>
+              <a:t>BA가 $1.42bn 일괄 조달</a:t>
             </a:r>
             <a:endParaRPr lang="en-US" sz="1700" dirty="0"/>
           </a:p>
@@ -6833,7 +6833,7 @@
                 <a:ea typeface="IBM Plex Sans KR" pitchFamily="34" charset="-122"/>
                 <a:cs typeface="IBM Plex Sans KR" pitchFamily="34" charset="-120"/>
               </a:rPr>
-              <a:t>BA 개조비 $0.2bn을 정부 보조금(MESC·48C)으로 최대한. 무상환·무희석·무CoC → EBIT=0 자산에 깨끗한 자금.</a:t>
+              <a:t>BA 개조비 $0.4bn을 정부 보조금(MESC·48C)으로 최대한. 무상환·무희석·무CoC → EBIT=0 자산에 깨끗한 자금.</a:t>
             </a:r>
             <a:endParaRPr lang="en-US" sz="1000" dirty="0"/>
           </a:p>
@@ -6914,7 +6914,7 @@
                 <a:ea typeface="IBM Plex Sans KR" pitchFamily="34" charset="-122"/>
                 <a:cs typeface="IBM Plex Sans KR" pitchFamily="34" charset="-120"/>
               </a:rPr>
-              <a:t>BA가 $1.22bn 일괄 조달 → 자체 $0.2bn + OT 증자 $1.0bn. 조달은 </a:t>
+              <a:t>BA가 $1.42bn 일괄 조달 → 자체 $0.4bn + OT 증자 $1.0bn. 조달은 </a:t>
             </a:r>
             <a:pPr indent="0" marL="0">
               <a:lnSpc>
@@ -6948,7 +6948,7 @@
                 <a:ea typeface="IBM Plex Sans KR" pitchFamily="34" charset="-122"/>
                 <a:cs typeface="IBM Plex Sans KR" pitchFamily="34" charset="-120"/>
               </a:rPr>
-              <a:t>, 부족분만 비소구부채·Equity. ($1.22bn이 BA에 집중 — 조달여력 확인 ★)</a:t>
+              <a:t>, 부족분만 비소구부채·Equity. ($1.42bn이 BA에 집중 — 조달여력 확인 ★)</a:t>
             </a:r>
             <a:endParaRPr lang="en-US" sz="1050" dirty="0"/>
           </a:p>
@@ -7983,7 +7983,7 @@
                 <a:ea typeface="IBM Plex Mono" pitchFamily="34" charset="-122"/>
                 <a:cs typeface="IBM Plex Mono" pitchFamily="34" charset="-120"/>
               </a:rPr>
-              <a:t>$1.22bn</a:t>
+              <a:t>$1.42bn</a:t>
             </a:r>
             <a:endParaRPr lang="en-US" sz="1000" dirty="0"/>
           </a:p>
@@ -9147,7 +9147,7 @@
                           <a:ea typeface="IBM Plex Mono" pitchFamily="34" charset="-122"/>
                           <a:cs typeface="IBM Plex Mono" pitchFamily="34" charset="-120"/>
                         </a:rPr>
-                        <a:t>$8.2bn</a:t>
+                        <a:t>$8.5bn</a:t>
                       </a:r>
                       <a:endParaRPr lang="en-US" sz="950" dirty="0">
                         <a:latin typeface="IBM Plex Mono" charset="0"/>
@@ -9215,7 +9215,7 @@
                           <a:ea typeface="Space Grotesk" pitchFamily="34" charset="-122"/>
                           <a:cs typeface="Space Grotesk" pitchFamily="34" charset="-120"/>
                         </a:rPr>
-                        <a:t>18.8x</a:t>
+                        <a:t>19.5x</a:t>
                       </a:r>
                       <a:endParaRPr lang="en-US" sz="1200" dirty="0">
                         <a:latin typeface="Space Grotesk" charset="0"/>
@@ -9283,7 +9283,7 @@
                           <a:ea typeface="IBM Plex Mono" pitchFamily="34" charset="-122"/>
                           <a:cs typeface="IBM Plex Mono" pitchFamily="34" charset="-120"/>
                         </a:rPr>
-                        <a:t>13.0%</a:t>
+                        <a:t>13.5%</a:t>
                       </a:r>
                       <a:endParaRPr lang="en-US" sz="800" dirty="0">
                         <a:latin typeface="IBM Plex Mono" charset="0"/>
@@ -9557,7 +9557,7 @@
                           <a:ea typeface="IBM Plex Mono" pitchFamily="34" charset="-122"/>
                           <a:cs typeface="IBM Plex Mono" pitchFamily="34" charset="-120"/>
                         </a:rPr>
-                        <a:t>$7.6bn</a:t>
+                        <a:t>$7.8bn</a:t>
                       </a:r>
                       <a:endParaRPr lang="en-US" sz="950" dirty="0">
                         <a:latin typeface="IBM Plex Mono" charset="0"/>
@@ -9625,7 +9625,7 @@
                           <a:ea typeface="Space Grotesk" pitchFamily="34" charset="-122"/>
                           <a:cs typeface="Space Grotesk" pitchFamily="34" charset="-120"/>
                         </a:rPr>
-                        <a:t>17.4x</a:t>
+                        <a:t>17.8x</a:t>
                       </a:r>
                       <a:endParaRPr lang="en-US" sz="1200" dirty="0">
                         <a:latin typeface="Space Grotesk" charset="0"/>
@@ -9693,7 +9693,7 @@
                           <a:ea typeface="IBM Plex Mono" pitchFamily="34" charset="-122"/>
                           <a:cs typeface="IBM Plex Mono" pitchFamily="34" charset="-120"/>
                         </a:rPr>
-                        <a:t>12.0%</a:t>
+                        <a:t>12.4%</a:t>
                       </a:r>
                       <a:endParaRPr lang="en-US" sz="800" dirty="0">
                         <a:latin typeface="IBM Plex Mono" charset="0"/>
@@ -9967,7 +9967,7 @@
                           <a:ea typeface="IBM Plex Mono" pitchFamily="34" charset="-122"/>
                           <a:cs typeface="IBM Plex Mono" pitchFamily="34" charset="-120"/>
                         </a:rPr>
-                        <a:t>$7.6bn</a:t>
+                        <a:t>$7.8bn</a:t>
                       </a:r>
                       <a:endParaRPr lang="en-US" sz="950" dirty="0">
                         <a:latin typeface="IBM Plex Mono" charset="0"/>
@@ -10035,7 +10035,7 @@
                           <a:ea typeface="Space Grotesk" pitchFamily="34" charset="-122"/>
                           <a:cs typeface="Space Grotesk" pitchFamily="34" charset="-120"/>
                         </a:rPr>
-                        <a:t>17.4x</a:t>
+                        <a:t>17.8x</a:t>
                       </a:r>
                       <a:endParaRPr lang="en-US" sz="1200" dirty="0">
                         <a:latin typeface="Space Grotesk" charset="0"/>
@@ -10103,7 +10103,7 @@
                           <a:ea typeface="IBM Plex Mono" pitchFamily="34" charset="-122"/>
                           <a:cs typeface="IBM Plex Mono" pitchFamily="34" charset="-120"/>
                         </a:rPr>
-                        <a:t>12.0%</a:t>
+                        <a:t>12.4%</a:t>
                       </a:r>
                       <a:endParaRPr lang="en-US" sz="800" dirty="0">
                         <a:latin typeface="IBM Plex Mono" charset="0"/>
@@ -10377,7 +10377,7 @@
                           <a:ea typeface="IBM Plex Mono" pitchFamily="34" charset="-122"/>
                           <a:cs typeface="IBM Plex Mono" pitchFamily="34" charset="-120"/>
                         </a:rPr>
-                        <a:t>$7.1bn</a:t>
+                        <a:t>$7.3bn</a:t>
                       </a:r>
                       <a:endParaRPr lang="en-US" sz="950" dirty="0">
                         <a:latin typeface="IBM Plex Mono" charset="0"/>
@@ -10445,7 +10445,7 @@
                           <a:ea typeface="Space Grotesk" pitchFamily="34" charset="-122"/>
                           <a:cs typeface="Space Grotesk" pitchFamily="34" charset="-120"/>
                         </a:rPr>
-                        <a:t>16.3x</a:t>
+                        <a:t>16.6x</a:t>
                       </a:r>
                       <a:endParaRPr lang="en-US" sz="1200" dirty="0">
                         <a:latin typeface="Space Grotesk" charset="0"/>
@@ -10513,7 +10513,7 @@
                           <a:ea typeface="IBM Plex Mono" pitchFamily="34" charset="-122"/>
                           <a:cs typeface="IBM Plex Mono" pitchFamily="34" charset="-120"/>
                         </a:rPr>
-                        <a:t>11.3%</a:t>
+                        <a:t>11.5%</a:t>
                       </a:r>
                       <a:endParaRPr lang="en-US" sz="800" dirty="0">
                         <a:latin typeface="IBM Plex Mono" charset="0"/>
@@ -10787,7 +10787,7 @@
                           <a:ea typeface="IBM Plex Mono" pitchFamily="34" charset="-122"/>
                           <a:cs typeface="IBM Plex Mono" pitchFamily="34" charset="-120"/>
                         </a:rPr>
-                        <a:t>$6.9bn</a:t>
+                        <a:t>$7.0bn</a:t>
                       </a:r>
                       <a:endParaRPr lang="en-US" sz="950" dirty="0">
                         <a:latin typeface="IBM Plex Mono" charset="0"/>
@@ -10855,7 +10855,7 @@
                           <a:ea typeface="Space Grotesk" pitchFamily="34" charset="-122"/>
                           <a:cs typeface="Space Grotesk" pitchFamily="34" charset="-120"/>
                         </a:rPr>
-                        <a:t>15.7x</a:t>
+                        <a:t>15.9x</a:t>
                       </a:r>
                       <a:endParaRPr lang="en-US" sz="1200" dirty="0">
                         <a:latin typeface="Space Grotesk" charset="0"/>
@@ -10923,7 +10923,7 @@
                           <a:ea typeface="IBM Plex Mono" pitchFamily="34" charset="-122"/>
                           <a:cs typeface="IBM Plex Mono" pitchFamily="34" charset="-120"/>
                         </a:rPr>
-                        <a:t>10.9%</a:t>
+                        <a:t>11.0%</a:t>
                       </a:r>
                       <a:endParaRPr lang="en-US" sz="800" dirty="0">
                         <a:latin typeface="IBM Plex Mono" charset="0"/>
@@ -11012,7 +11012,7 @@
                 <a:ea typeface="IBM Plex Sans KR" pitchFamily="34" charset="-122"/>
                 <a:cs typeface="IBM Plex Sans KR" pitchFamily="34" charset="-120"/>
               </a:rPr>
-              <a:t>필요EBITDA% = 딜을 peer 하단(13x)에 맞추는 데 필요한 ex-AMPC 마진 · 현 9% 대비 전 시나리오 미달(10.9~13.0%) → 마진 개선 必</a:t>
+              <a:t>필요EBITDA% = 딜을 peer 하단(13x)에 맞추는 데 필요한 ex-AMPC 마진 · 현 9% 대비 전 시나리오 미달(11.0~13.5%) → 마진 개선 必</a:t>
             </a:r>
             <a:endParaRPr lang="en-US" sz="750" dirty="0"/>
           </a:p>
@@ -11152,8 +11152,8 @@
         </p:nvSpPr>
         <p:spPr>
           <a:xfrm>
-            <a:off x="7611237" y="4855464"/>
-            <a:ext cx="1381887" cy="0"/>
+            <a:off x="7700391" y="4855464"/>
+            <a:ext cx="1604772" cy="0"/>
           </a:xfrm>
           <a:prstGeom prst="line">
             <a:avLst/>
@@ -11177,8 +11177,8 @@
         </p:nvSpPr>
         <p:spPr>
           <a:xfrm>
-            <a:off x="7154037" y="4672584"/>
-            <a:ext cx="2296287" cy="164592"/>
+            <a:off x="7243191" y="4672584"/>
+            <a:ext cx="2519172" cy="164592"/>
           </a:xfrm>
           <a:prstGeom prst="rect">
             <a:avLst/>
@@ -11202,7 +11202,7 @@
                 <a:ea typeface="IBM Plex Mono" pitchFamily="34" charset="-122"/>
                 <a:cs typeface="IBM Plex Mono" pitchFamily="34" charset="-120"/>
               </a:rPr>
-              <a:t>조달 레버 −3.1x (여전 peer 초과)</a:t>
+              <a:t>조달 레버 −3.6x (여전 peer 초과)</a:t>
             </a:r>
             <a:endParaRPr lang="en-US" sz="700" dirty="0"/>
           </a:p>
@@ -11216,7 +11216,7 @@
         </p:nvSpPr>
         <p:spPr>
           <a:xfrm>
-            <a:off x="8947404" y="5029200"/>
+            <a:off x="9259443" y="5029200"/>
             <a:ext cx="91440" cy="91440"/>
           </a:xfrm>
           <a:prstGeom prst="ellipse">
@@ -11236,7 +11236,7 @@
         </p:nvSpPr>
         <p:spPr>
           <a:xfrm>
-            <a:off x="8353044" y="5166360"/>
+            <a:off x="8665083" y="5166360"/>
             <a:ext cx="1280160" cy="182880"/>
           </a:xfrm>
           <a:prstGeom prst="rect">
@@ -11261,7 +11261,7 @@
                 <a:ea typeface="IBM Plex Mono" pitchFamily="34" charset="-122"/>
                 <a:cs typeface="IBM Plex Mono" pitchFamily="34" charset="-120"/>
               </a:rPr>
-              <a:t>BASE 18.8x</a:t>
+              <a:t>BASE 19.5x</a:t>
             </a:r>
             <a:endParaRPr lang="en-US" sz="750" dirty="0"/>
           </a:p>
@@ -11275,7 +11275,7 @@
         </p:nvSpPr>
         <p:spPr>
           <a:xfrm>
-            <a:off x="8323326" y="5029200"/>
+            <a:off x="8501634" y="5029200"/>
             <a:ext cx="91440" cy="91440"/>
           </a:xfrm>
           <a:prstGeom prst="ellipse">
@@ -11295,7 +11295,7 @@
         </p:nvSpPr>
         <p:spPr>
           <a:xfrm>
-            <a:off x="7832979" y="5029200"/>
+            <a:off x="7966710" y="5029200"/>
             <a:ext cx="91440" cy="91440"/>
           </a:xfrm>
           <a:prstGeom prst="ellipse">
@@ -11315,7 +11315,7 @@
         </p:nvSpPr>
         <p:spPr>
           <a:xfrm>
-            <a:off x="7565517" y="5029200"/>
+            <a:off x="7654671" y="5029200"/>
             <a:ext cx="91440" cy="91440"/>
           </a:xfrm>
           <a:prstGeom prst="ellipse">
@@ -11335,7 +11335,7 @@
         </p:nvSpPr>
         <p:spPr>
           <a:xfrm>
-            <a:off x="6971157" y="5166360"/>
+            <a:off x="7060311" y="5166360"/>
             <a:ext cx="1280160" cy="182880"/>
           </a:xfrm>
           <a:prstGeom prst="rect">
@@ -11360,7 +11360,7 @@
                 <a:ea typeface="IBM Plex Mono" pitchFamily="34" charset="-122"/>
                 <a:cs typeface="IBM Plex Mono" pitchFamily="34" charset="-120"/>
               </a:rPr>
-              <a:t>최대 15.7x</a:t>
+              <a:t>최대 15.9x</a:t>
             </a:r>
             <a:endParaRPr lang="en-US" sz="750" dirty="0"/>
           </a:p>
@@ -11748,7 +11748,7 @@
                 <a:ea typeface="IBM Plex Sans KR" pitchFamily="34" charset="-122"/>
                 <a:cs typeface="IBM Plex Sans KR" pitchFamily="34" charset="-120"/>
               </a:rPr>
-              <a:t>BASE 18.8x → 최대결합 15.7x</a:t>
+              <a:t>BASE 19.5x → 최대결합 15.9x</a:t>
             </a:r>
             <a:pPr indent="0" marL="0">
               <a:lnSpc>
@@ -11799,7 +11799,7 @@
                 <a:ea typeface="IBM Plex Sans KR" pitchFamily="34" charset="-122"/>
                 <a:cs typeface="IBM Plex Sans KR" pitchFamily="34" charset="-120"/>
               </a:rPr>
-              <a:t>(2029E 분모면 19.9~23.8x). DCF 내재 </a:t>
+              <a:t>(2029E 분모면 20.2~24.6x). DCF 내재 </a:t>
             </a:r>
             <a:pPr indent="0" marL="0">
               <a:lnSpc>
@@ -11816,7 +11816,7 @@
                 <a:ea typeface="IBM Plex Sans KR" pitchFamily="34" charset="-122"/>
                 <a:cs typeface="IBM Plex Sans KR" pitchFamily="34" charset="-120"/>
               </a:rPr>
-              <a:t>8.3x는 여전히 할인</a:t>
+              <a:t>8.0x는 여전히 할인</a:t>
             </a:r>
             <a:pPr indent="0" marL="0">
               <a:lnSpc>
@@ -11850,7 +11850,7 @@
                 <a:ea typeface="IBM Plex Sans KR" pitchFamily="34" charset="-122"/>
                 <a:cs typeface="IBM Plex Sans KR" pitchFamily="34" charset="-120"/>
               </a:rPr>
-              <a:t>필요 EBITDA% 10.9~13.0%</a:t>
+              <a:t>필요 EBITDA% 11.0~13.5%</a:t>
             </a:r>
             <a:pPr indent="0" marL="0">
               <a:lnSpc>
@@ -14255,7 +14255,7 @@
                           <a:ea typeface="Space Grotesk" pitchFamily="34" charset="-122"/>
                           <a:cs typeface="Space Grotesk" pitchFamily="34" charset="-120"/>
                         </a:rPr>
-                        <a:t>8.3x</a:t>
+                        <a:t>8.0x</a:t>
                       </a:r>
                       <a:endParaRPr lang="en-US" sz="1150" dirty="0">
                         <a:latin typeface="Space Grotesk" charset="0"/>
@@ -14323,7 +14323,7 @@
                           <a:ea typeface="IBM Plex Mono" pitchFamily="34" charset="-122"/>
                           <a:cs typeface="IBM Plex Mono" pitchFamily="34" charset="-120"/>
                         </a:rPr>
-                        <a:t>15.7~18.8x</a:t>
+                        <a:t>15.9~19.5x</a:t>
                       </a:r>
                       <a:endParaRPr lang="en-US" sz="950" dirty="0">
                         <a:latin typeface="IBM Plex Mono" charset="0"/>
@@ -14529,7 +14529,7 @@
                           <a:ea typeface="Space Grotesk" pitchFamily="34" charset="-122"/>
                           <a:cs typeface="Space Grotesk" pitchFamily="34" charset="-120"/>
                         </a:rPr>
-                        <a:t>10.5x</a:t>
+                        <a:t>10.1x</a:t>
                       </a:r>
                       <a:endParaRPr lang="en-US" sz="1150" dirty="0">
                         <a:latin typeface="Space Grotesk" charset="0"/>
@@ -14597,7 +14597,7 @@
                           <a:ea typeface="IBM Plex Mono" pitchFamily="34" charset="-122"/>
                           <a:cs typeface="IBM Plex Mono" pitchFamily="34" charset="-120"/>
                         </a:rPr>
-                        <a:t>19.9~23.8x</a:t>
+                        <a:t>20.2~24.6x</a:t>
                       </a:r>
                       <a:endParaRPr lang="en-US" sz="950" dirty="0">
                         <a:latin typeface="IBM Plex Mono" charset="0"/>
@@ -15006,8 +15006,8 @@
         </p:nvSpPr>
         <p:spPr>
           <a:xfrm>
-            <a:off x="6291986" y="5212080"/>
-            <a:ext cx="1958645" cy="0"/>
+            <a:off x="6407201" y="5212080"/>
+            <a:ext cx="2275484" cy="0"/>
           </a:xfrm>
           <a:prstGeom prst="line">
             <a:avLst/>
@@ -15029,8 +15029,8 @@
         </p:nvSpPr>
         <p:spPr>
           <a:xfrm>
-            <a:off x="6017666" y="5010912"/>
-            <a:ext cx="2781605" cy="182880"/>
+            <a:off x="6132881" y="5010912"/>
+            <a:ext cx="3098444" cy="182880"/>
           </a:xfrm>
           <a:prstGeom prst="rect">
             <a:avLst/>
@@ -15054,7 +15054,7 @@
                 <a:ea typeface="IBM Plex Mono" pitchFamily="34" charset="-122"/>
                 <a:cs typeface="IBM Plex Mono" pitchFamily="34" charset="-120"/>
               </a:rPr>
-              <a:t>역산 필요 15.7~18.8x</a:t>
+              <a:t>역산 필요 15.9~19.5x</a:t>
             </a:r>
             <a:endParaRPr lang="en-US" sz="750" dirty="0"/>
           </a:p>
@@ -15130,7 +15130,7 @@
         </p:nvSpPr>
         <p:spPr>
           <a:xfrm>
-            <a:off x="1585341" y="5431536"/>
+            <a:off x="1354912" y="5431536"/>
             <a:ext cx="109728" cy="109728"/>
           </a:xfrm>
           <a:prstGeom prst="ellipse">
@@ -15150,7 +15150,7 @@
         </p:nvSpPr>
         <p:spPr>
           <a:xfrm>
-            <a:off x="862965" y="5175504"/>
+            <a:off x="632536" y="5175504"/>
             <a:ext cx="1554480" cy="182880"/>
           </a:xfrm>
           <a:prstGeom prst="rect">
@@ -15175,7 +15175,7 @@
                 <a:ea typeface="IBM Plex Mono" pitchFamily="34" charset="-122"/>
                 <a:cs typeface="IBM Plex Mono" pitchFamily="34" charset="-120"/>
               </a:rPr>
-              <a:t>DCF $3.6bn·8.3x</a:t>
+              <a:t>DCF $3.5bn·8.0x</a:t>
             </a:r>
             <a:endParaRPr lang="en-US" sz="750" dirty="0"/>
           </a:p>
@@ -15580,7 +15580,7 @@
                 <a:ea typeface="IBM Plex Sans KR" pitchFamily="34" charset="-122"/>
                 <a:cs typeface="IBM Plex Sans KR" pitchFamily="34" charset="-120"/>
               </a:rPr>
-              <a:t>15.7~18.8x는 정상화 peer(13~15x)를 초과</a:t>
+              <a:t>15.9~19.5x는 정상화 peer(13~15x)를 초과</a:t>
             </a:r>
             <a:pPr indent="0" marL="0">
               <a:lnSpc>
@@ -15597,7 +15597,7 @@
                 <a:ea typeface="IBM Plex Sans KR" pitchFamily="34" charset="-122"/>
                 <a:cs typeface="IBM Plex Sans KR" pitchFamily="34" charset="-120"/>
               </a:rPr>
-              <a:t>(2029E 분모면 19.9~23.8x). DCF 내재 </a:t>
+              <a:t>(2029E 분모면 20.2~24.6x). DCF 내재 </a:t>
             </a:r>
             <a:pPr indent="0" marL="0">
               <a:lnSpc>
@@ -15614,7 +15614,7 @@
                 <a:ea typeface="IBM Plex Sans KR" pitchFamily="34" charset="-122"/>
                 <a:cs typeface="IBM Plex Sans KR" pitchFamily="34" charset="-120"/>
               </a:rPr>
-              <a:t>8.3x는 여전히 할인</a:t>
+              <a:t>8.0x는 여전히 할인</a:t>
             </a:r>
             <a:pPr indent="0" marL="0">
               <a:lnSpc>
@@ -15648,7 +15648,7 @@
                 <a:ea typeface="IBM Plex Sans KR" pitchFamily="34" charset="-122"/>
                 <a:cs typeface="IBM Plex Sans KR" pitchFamily="34" charset="-120"/>
               </a:rPr>
-              <a:t>필요 EBITDA% 10.9~13.0%</a:t>
+              <a:t>필요 EBITDA% 11.0~13.5%</a:t>
             </a:r>
             <a:pPr indent="0" marL="0">
               <a:lnSpc>

--- a/sk_valuation_project/output/SK_Funding_v3_editable.pptx
+++ b/sk_valuation_project/output/SK_Funding_v3_editable.pptx
@@ -2182,7 +2182,7 @@
                           <a:ea typeface="IBM Plex Mono" pitchFamily="34" charset="-122"/>
                           <a:cs typeface="IBM Plex Mono" pitchFamily="34" charset="-120"/>
                         </a:rPr>
-                        <a:t>11.0 GWh / 85%</a:t>
+                        <a:t>18.0 GWh / 85%</a:t>
                       </a:r>
                       <a:endParaRPr lang="en-US" sz="950" dirty="0">
                         <a:latin typeface="IBM Plex Mono" charset="0"/>
@@ -2458,7 +2458,7 @@
                           <a:ea typeface="IBM Plex Mono" pitchFamily="34" charset="-122"/>
                           <a:cs typeface="IBM Plex Mono" pitchFamily="34" charset="-120"/>
                         </a:rPr>
-                        <a:t>~$1.4bn</a:t>
+                        <a:t>~$2.3bn</a:t>
                       </a:r>
                       <a:endParaRPr lang="en-US" sz="950" dirty="0">
                         <a:latin typeface="IBM Plex Mono" charset="0"/>
@@ -4413,7 +4413,7 @@
                 <a:ea typeface="IBM Plex Sans KR" pitchFamily="34" charset="-122"/>
                 <a:cs typeface="IBM Plex Sans KR" pitchFamily="34" charset="-120"/>
               </a:rPr>
-              <a:t>run-rate ex-AMPC EBITDA $438mm (BA 125 + OT 313, 9% 마진)</a:t>
+              <a:t>run-rate ex-AMPC EBITDA $518mm (BA 205 + OT 313, 9% 마진)</a:t>
             </a:r>
             <a:endParaRPr lang="en-US" sz="1050" dirty="0"/>
           </a:p>
@@ -4503,7 +4503,7 @@
         <p:spPr>
           <a:xfrm>
             <a:off x="6208776" y="4928616"/>
-            <a:ext cx="848563" cy="219456"/>
+            <a:ext cx="928116" cy="219456"/>
           </a:xfrm>
           <a:prstGeom prst="rect">
             <a:avLst/>
@@ -4522,8 +4522,8 @@
         </p:nvSpPr>
         <p:spPr>
           <a:xfrm>
-            <a:off x="7057339" y="4928616"/>
-            <a:ext cx="2863901" cy="219456"/>
+            <a:off x="7136892" y="4928616"/>
+            <a:ext cx="2784348" cy="219456"/>
           </a:xfrm>
           <a:prstGeom prst="rect">
             <a:avLst/>
@@ -4543,7 +4543,7 @@
         <p:spPr>
           <a:xfrm>
             <a:off x="6208776" y="4928616"/>
-            <a:ext cx="848563" cy="219456"/>
+            <a:ext cx="928116" cy="219456"/>
           </a:xfrm>
           <a:prstGeom prst="rect">
             <a:avLst/>
@@ -4567,7 +4567,7 @@
                 <a:ea typeface="IBM Plex Mono" pitchFamily="34" charset="-122"/>
                 <a:cs typeface="IBM Plex Mono" pitchFamily="34" charset="-120"/>
               </a:rPr>
-              <a:t>ex-AMPC $0.8bn</a:t>
+              <a:t>ex-AMPC $1.1bn</a:t>
             </a:r>
             <a:endParaRPr lang="en-US" sz="750" dirty="0"/>
           </a:p>
@@ -4581,8 +4581,8 @@
         </p:nvSpPr>
         <p:spPr>
           <a:xfrm>
-            <a:off x="7057339" y="4928616"/>
-            <a:ext cx="2863901" cy="219456"/>
+            <a:off x="7136892" y="4928616"/>
+            <a:ext cx="2784348" cy="219456"/>
           </a:xfrm>
           <a:prstGeom prst="rect">
             <a:avLst/>
@@ -4606,7 +4606,7 @@
                 <a:ea typeface="IBM Plex Mono" pitchFamily="34" charset="-122"/>
                 <a:cs typeface="IBM Plex Mono" pitchFamily="34" charset="-120"/>
               </a:rPr>
-              <a:t>AMPC PV $2.7bn (77%)</a:t>
+              <a:t>AMPC PV $3.3bn (76%)</a:t>
             </a:r>
             <a:endParaRPr lang="en-US" sz="800" dirty="0"/>
           </a:p>
@@ -4645,7 +4645,7 @@
                 <a:ea typeface="IBM Plex Sans KR" pitchFamily="34" charset="-122"/>
                 <a:cs typeface="IBM Plex Sans KR" pitchFamily="34" charset="-120"/>
               </a:rPr>
-              <a:t>DCF EV $3.5bn</a:t>
+              <a:t>DCF EV $4.4bn</a:t>
             </a:r>
             <a:pPr indent="0" marL="0">
               <a:buNone/>
@@ -4659,7 +4659,7 @@
                 <a:ea typeface="IBM Plex Sans KR" pitchFamily="34" charset="-122"/>
                 <a:cs typeface="IBM Plex Sans KR" pitchFamily="34" charset="-120"/>
               </a:rPr>
-              <a:t> 의 77%가 한시 AMPC → 멀티플엔 ex-AMPC만. WACC 10.5%·TGR 2%·Ke 13%</a:t>
+              <a:t> 의 76%가 한시 AMPC → 멀티플엔 ex-AMPC만. WACC 10.5%·TGR 2%·Ke 13%</a:t>
             </a:r>
             <a:endParaRPr lang="en-US" sz="800" dirty="0"/>
           </a:p>
@@ -4760,7 +4760,7 @@
                 <a:ea typeface="Space Grotesk" pitchFamily="34" charset="-122"/>
                 <a:cs typeface="Space Grotesk" pitchFamily="34" charset="-120"/>
               </a:rPr>
-              <a:t>40.7</a:t>
+              <a:t>47.7</a:t>
             </a:r>
             <a:pPr indent="0" marL="0">
               <a:buNone/>
@@ -4875,7 +4875,7 @@
                 <a:ea typeface="Space Grotesk" pitchFamily="34" charset="-122"/>
                 <a:cs typeface="Space Grotesk" pitchFamily="34" charset="-120"/>
               </a:rPr>
-              <a:t>438</a:t>
+              <a:t>518</a:t>
             </a:r>
             <a:pPr indent="0" marL="0">
               <a:buNone/>
@@ -5105,7 +5105,7 @@
                 <a:ea typeface="Space Grotesk" pitchFamily="34" charset="-122"/>
                 <a:cs typeface="Space Grotesk" pitchFamily="34" charset="-120"/>
               </a:rPr>
-              <a:t>3.5</a:t>
+              <a:t>4.4</a:t>
             </a:r>
             <a:pPr indent="0" marL="0">
               <a:buNone/>
@@ -7680,7 +7680,7 @@
                 <a:ea typeface="IBM Plex Mono" pitchFamily="34" charset="-122"/>
                 <a:cs typeface="IBM Plex Mono" pitchFamily="34" charset="-120"/>
               </a:rPr>
-              <a:t>$438mm</a:t>
+              <a:t>$518mm</a:t>
             </a:r>
             <a:endParaRPr lang="en-US" sz="1000" dirty="0"/>
           </a:p>
@@ -9215,7 +9215,7 @@
                           <a:ea typeface="Space Grotesk" pitchFamily="34" charset="-122"/>
                           <a:cs typeface="Space Grotesk" pitchFamily="34" charset="-120"/>
                         </a:rPr>
-                        <a:t>19.5x</a:t>
+                        <a:t>16.5x</a:t>
                       </a:r>
                       <a:endParaRPr lang="en-US" sz="1200" dirty="0">
                         <a:latin typeface="Space Grotesk" charset="0"/>
@@ -9283,7 +9283,7 @@
                           <a:ea typeface="IBM Plex Mono" pitchFamily="34" charset="-122"/>
                           <a:cs typeface="IBM Plex Mono" pitchFamily="34" charset="-120"/>
                         </a:rPr>
-                        <a:t>13.5%</a:t>
+                        <a:t>11.4%</a:t>
                       </a:r>
                       <a:endParaRPr lang="en-US" sz="800" dirty="0">
                         <a:latin typeface="IBM Plex Mono" charset="0"/>
@@ -9625,7 +9625,7 @@
                           <a:ea typeface="Space Grotesk" pitchFamily="34" charset="-122"/>
                           <a:cs typeface="Space Grotesk" pitchFamily="34" charset="-120"/>
                         </a:rPr>
-                        <a:t>17.8x</a:t>
+                        <a:t>15.1x</a:t>
                       </a:r>
                       <a:endParaRPr lang="en-US" sz="1200" dirty="0">
                         <a:latin typeface="Space Grotesk" charset="0"/>
@@ -9693,7 +9693,7 @@
                           <a:ea typeface="IBM Plex Mono" pitchFamily="34" charset="-122"/>
                           <a:cs typeface="IBM Plex Mono" pitchFamily="34" charset="-120"/>
                         </a:rPr>
-                        <a:t>12.4%</a:t>
+                        <a:t>10.5%</a:t>
                       </a:r>
                       <a:endParaRPr lang="en-US" sz="800" dirty="0">
                         <a:latin typeface="IBM Plex Mono" charset="0"/>
@@ -10035,7 +10035,7 @@
                           <a:ea typeface="Space Grotesk" pitchFamily="34" charset="-122"/>
                           <a:cs typeface="Space Grotesk" pitchFamily="34" charset="-120"/>
                         </a:rPr>
-                        <a:t>17.8x</a:t>
+                        <a:t>15.1x</a:t>
                       </a:r>
                       <a:endParaRPr lang="en-US" sz="1200" dirty="0">
                         <a:latin typeface="Space Grotesk" charset="0"/>
@@ -10103,7 +10103,7 @@
                           <a:ea typeface="IBM Plex Mono" pitchFamily="34" charset="-122"/>
                           <a:cs typeface="IBM Plex Mono" pitchFamily="34" charset="-120"/>
                         </a:rPr>
-                        <a:t>12.4%</a:t>
+                        <a:t>10.5%</a:t>
                       </a:r>
                       <a:endParaRPr lang="en-US" sz="800" dirty="0">
                         <a:latin typeface="IBM Plex Mono" charset="0"/>
@@ -10445,7 +10445,7 @@
                           <a:ea typeface="Space Grotesk" pitchFamily="34" charset="-122"/>
                           <a:cs typeface="Space Grotesk" pitchFamily="34" charset="-120"/>
                         </a:rPr>
-                        <a:t>16.6x</a:t>
+                        <a:t>14.0x</a:t>
                       </a:r>
                       <a:endParaRPr lang="en-US" sz="1200" dirty="0">
                         <a:latin typeface="Space Grotesk" charset="0"/>
@@ -10513,7 +10513,7 @@
                           <a:ea typeface="IBM Plex Mono" pitchFamily="34" charset="-122"/>
                           <a:cs typeface="IBM Plex Mono" pitchFamily="34" charset="-120"/>
                         </a:rPr>
-                        <a:t>11.5%</a:t>
+                        <a:t>9.7%</a:t>
                       </a:r>
                       <a:endParaRPr lang="en-US" sz="800" dirty="0">
                         <a:latin typeface="IBM Plex Mono" charset="0"/>
@@ -10855,7 +10855,7 @@
                           <a:ea typeface="Space Grotesk" pitchFamily="34" charset="-122"/>
                           <a:cs typeface="Space Grotesk" pitchFamily="34" charset="-120"/>
                         </a:rPr>
-                        <a:t>15.9x</a:t>
+                        <a:t>13.5x</a:t>
                       </a:r>
                       <a:endParaRPr lang="en-US" sz="1200" dirty="0">
                         <a:latin typeface="Space Grotesk" charset="0"/>
@@ -10923,7 +10923,7 @@
                           <a:ea typeface="IBM Plex Mono" pitchFamily="34" charset="-122"/>
                           <a:cs typeface="IBM Plex Mono" pitchFamily="34" charset="-120"/>
                         </a:rPr>
-                        <a:t>11.0%</a:t>
+                        <a:t>9.3%</a:t>
                       </a:r>
                       <a:endParaRPr lang="en-US" sz="800" dirty="0">
                         <a:latin typeface="IBM Plex Mono" charset="0"/>
@@ -11012,7 +11012,7 @@
                 <a:ea typeface="IBM Plex Sans KR" pitchFamily="34" charset="-122"/>
                 <a:cs typeface="IBM Plex Sans KR" pitchFamily="34" charset="-120"/>
               </a:rPr>
-              <a:t>필요EBITDA% = 딜을 peer 하단(13x)에 맞추는 데 필요한 ex-AMPC 마진 · 현 9% 대비 전 시나리오 미달(11.0~13.5%) → 마진 개선 必</a:t>
+              <a:t>필요EBITDA% = 딜을 peer 하단(13x)에 맞추는 데 필요한 ex-AMPC 마진 · 현 9% 대비 전 시나리오 미달(9.3~11.4%) → 마진 개선 必</a:t>
             </a:r>
             <a:endParaRPr lang="en-US" sz="750" dirty="0"/>
           </a:p>
@@ -11089,7 +11089,7 @@
         <p:spPr>
           <a:xfrm>
             <a:off x="4178808" y="4992624"/>
-            <a:ext cx="2228850" cy="164592"/>
+            <a:ext cx="2674620" cy="164592"/>
           </a:xfrm>
           <a:prstGeom prst="rect">
             <a:avLst/>
@@ -11114,7 +11114,7 @@
         <p:spPr>
           <a:xfrm>
             <a:off x="4178808" y="4764024"/>
-            <a:ext cx="2228850" cy="182880"/>
+            <a:ext cx="2674620" cy="182880"/>
           </a:xfrm>
           <a:prstGeom prst="rect">
             <a:avLst/>
@@ -11152,7 +11152,7 @@
         </p:nvSpPr>
         <p:spPr>
           <a:xfrm>
-            <a:off x="7700391" y="4855464"/>
+            <a:off x="7120890" y="4855464"/>
             <a:ext cx="1604772" cy="0"/>
           </a:xfrm>
           <a:prstGeom prst="line">
@@ -11177,7 +11177,7 @@
         </p:nvSpPr>
         <p:spPr>
           <a:xfrm>
-            <a:off x="7243191" y="4672584"/>
+            <a:off x="6663690" y="4672584"/>
             <a:ext cx="2519172" cy="164592"/>
           </a:xfrm>
           <a:prstGeom prst="rect">
@@ -11202,7 +11202,7 @@
                 <a:ea typeface="IBM Plex Mono" pitchFamily="34" charset="-122"/>
                 <a:cs typeface="IBM Plex Mono" pitchFamily="34" charset="-120"/>
               </a:rPr>
-              <a:t>조달 레버 −3.6x (여전 peer 초과)</a:t>
+              <a:t>조달 레버 −3.0x → 밴드 상단 진입</a:t>
             </a:r>
             <a:endParaRPr lang="en-US" sz="700" dirty="0"/>
           </a:p>
@@ -11216,7 +11216,7 @@
         </p:nvSpPr>
         <p:spPr>
           <a:xfrm>
-            <a:off x="9259443" y="5029200"/>
+            <a:off x="8679942" y="5029200"/>
             <a:ext cx="91440" cy="91440"/>
           </a:xfrm>
           <a:prstGeom prst="ellipse">
@@ -11236,7 +11236,7 @@
         </p:nvSpPr>
         <p:spPr>
           <a:xfrm>
-            <a:off x="8665083" y="5166360"/>
+            <a:off x="8085582" y="5166360"/>
             <a:ext cx="1280160" cy="182880"/>
           </a:xfrm>
           <a:prstGeom prst="rect">
@@ -11261,7 +11261,7 @@
                 <a:ea typeface="IBM Plex Mono" pitchFamily="34" charset="-122"/>
                 <a:cs typeface="IBM Plex Mono" pitchFamily="34" charset="-120"/>
               </a:rPr>
-              <a:t>BASE 19.5x</a:t>
+              <a:t>BASE 16.5x</a:t>
             </a:r>
             <a:endParaRPr lang="en-US" sz="750" dirty="0"/>
           </a:p>
@@ -11275,7 +11275,7 @@
         </p:nvSpPr>
         <p:spPr>
           <a:xfrm>
-            <a:off x="8501634" y="5029200"/>
+            <a:off x="7931048" y="5029200"/>
             <a:ext cx="91440" cy="91440"/>
           </a:xfrm>
           <a:prstGeom prst="ellipse">
@@ -11295,7 +11295,7 @@
         </p:nvSpPr>
         <p:spPr>
           <a:xfrm>
-            <a:off x="7966710" y="5029200"/>
+            <a:off x="7342632" y="5029200"/>
             <a:ext cx="91440" cy="91440"/>
           </a:xfrm>
           <a:prstGeom prst="ellipse">
@@ -11315,14 +11315,14 @@
         </p:nvSpPr>
         <p:spPr>
           <a:xfrm>
-            <a:off x="7654671" y="5029200"/>
+            <a:off x="7075170" y="5029200"/>
             <a:ext cx="91440" cy="91440"/>
           </a:xfrm>
           <a:prstGeom prst="ellipse">
             <a:avLst/>
           </a:prstGeom>
           <a:solidFill>
-            <a:srgbClr val="8A5A55"/>
+            <a:srgbClr val="1E7A4D"/>
           </a:solidFill>
           <a:ln/>
         </p:spPr>
@@ -11335,7 +11335,7 @@
         </p:nvSpPr>
         <p:spPr>
           <a:xfrm>
-            <a:off x="7060311" y="5166360"/>
+            <a:off x="6480810" y="5166360"/>
             <a:ext cx="1280160" cy="182880"/>
           </a:xfrm>
           <a:prstGeom prst="rect">
@@ -11354,13 +11354,13 @@
             <a:r>
               <a:rPr lang="en-US" sz="750" b="1" dirty="0">
                 <a:solidFill>
-                  <a:srgbClr val="8A5A55"/>
+                  <a:srgbClr val="1E7A4D"/>
                 </a:solidFill>
                 <a:latin typeface="IBM Plex Mono" pitchFamily="34" charset="0"/>
                 <a:ea typeface="IBM Plex Mono" pitchFamily="34" charset="-122"/>
                 <a:cs typeface="IBM Plex Mono" pitchFamily="34" charset="-120"/>
               </a:rPr>
-              <a:t>최대 15.9x</a:t>
+              <a:t>최대 13.5x</a:t>
             </a:r>
             <a:endParaRPr lang="en-US" sz="750" dirty="0"/>
           </a:p>
@@ -11413,7 +11413,7 @@
         </p:nvSpPr>
         <p:spPr>
           <a:xfrm>
-            <a:off x="5241798" y="5330952"/>
+            <a:off x="5509260" y="5330952"/>
             <a:ext cx="548640" cy="164592"/>
           </a:xfrm>
           <a:prstGeom prst="rect">
@@ -11452,7 +11452,7 @@
         </p:nvSpPr>
         <p:spPr>
           <a:xfrm>
-            <a:off x="6133338" y="5330952"/>
+            <a:off x="6579108" y="5330952"/>
             <a:ext cx="548640" cy="164592"/>
           </a:xfrm>
           <a:prstGeom prst="rect">
@@ -11491,7 +11491,7 @@
         </p:nvSpPr>
         <p:spPr>
           <a:xfrm>
-            <a:off x="7024878" y="5330952"/>
+            <a:off x="7648956" y="5330952"/>
             <a:ext cx="548640" cy="164592"/>
           </a:xfrm>
           <a:prstGeom prst="rect">
@@ -11530,7 +11530,7 @@
         </p:nvSpPr>
         <p:spPr>
           <a:xfrm>
-            <a:off x="8362188" y="5330952"/>
+            <a:off x="8718804" y="5330952"/>
             <a:ext cx="548640" cy="164592"/>
           </a:xfrm>
           <a:prstGeom prst="rect">
@@ -11555,7 +11555,7 @@
                 <a:ea typeface="IBM Plex Mono" pitchFamily="34" charset="-122"/>
                 <a:cs typeface="IBM Plex Mono" pitchFamily="34" charset="-120"/>
               </a:rPr>
-              <a:t>18x</a:t>
+              <a:t>17x</a:t>
             </a:r>
             <a:endParaRPr lang="en-US" sz="700" dirty="0"/>
           </a:p>
@@ -11563,46 +11563,7 @@
       </p:sp>
       <p:sp>
         <p:nvSpPr>
-          <p:cNvPr id="58" name="Text 55"/>
-          <p:cNvSpPr/>
-          <p:nvPr/>
-        </p:nvSpPr>
-        <p:spPr>
-          <a:xfrm>
-            <a:off x="9253728" y="5330952"/>
-            <a:ext cx="548640" cy="164592"/>
-          </a:xfrm>
-          <a:prstGeom prst="rect">
-            <a:avLst/>
-          </a:prstGeom>
-          <a:noFill/>
-          <a:ln/>
-        </p:spPr>
-        <p:txBody>
-          <a:bodyPr wrap="square" lIns="0" tIns="0" rIns="0" bIns="0" rtlCol="0" anchor="ctr"/>
-          <a:lstStyle/>
-          <a:p>
-            <a:pPr algn="ctr" indent="0" marL="0">
-              <a:buNone/>
-            </a:pPr>
-            <a:r>
-              <a:rPr lang="en-US" sz="700" dirty="0">
-                <a:solidFill>
-                  <a:srgbClr val="9A847C"/>
-                </a:solidFill>
-                <a:latin typeface="IBM Plex Mono" pitchFamily="34" charset="0"/>
-                <a:ea typeface="IBM Plex Mono" pitchFamily="34" charset="-122"/>
-                <a:cs typeface="IBM Plex Mono" pitchFamily="34" charset="-120"/>
-              </a:rPr>
-              <a:t>20x</a:t>
-            </a:r>
-            <a:endParaRPr lang="en-US" sz="700" dirty="0"/>
-          </a:p>
-        </p:txBody>
-      </p:sp>
-      <p:sp>
-        <p:nvSpPr>
-          <p:cNvPr id="59" name="Shape 56"/>
+          <p:cNvPr id="58" name="Shape 55"/>
           <p:cNvSpPr/>
           <p:nvPr/>
         </p:nvSpPr>
@@ -11624,7 +11585,7 @@
       </p:sp>
       <p:sp>
         <p:nvSpPr>
-          <p:cNvPr id="60" name="Text 57"/>
+          <p:cNvPr id="59" name="Text 56"/>
           <p:cNvSpPr/>
           <p:nvPr/>
         </p:nvSpPr>
@@ -11655,7 +11616,7 @@
                 <a:ea typeface="Noto Serif KR" pitchFamily="34" charset="-122"/>
                 <a:cs typeface="Noto Serif KR" pitchFamily="34" charset="-120"/>
               </a:rPr>
-              <a:t>결론 — BA 11GW 축소로 필요멀티플이 peer를 넘어선다</a:t>
+              <a:t>결론 — BA 18GW: 최대결합만 정상화 peer 밴드 하단에 진입</a:t>
             </a:r>
             <a:endParaRPr lang="en-US" sz="1300" dirty="0"/>
           </a:p>
@@ -11663,7 +11624,7 @@
       </p:sp>
       <p:sp>
         <p:nvSpPr>
-          <p:cNvPr id="61" name="Text 58"/>
+          <p:cNvPr id="60" name="Text 57"/>
           <p:cNvSpPr/>
           <p:nvPr/>
         </p:nvSpPr>
@@ -11697,7 +11658,7 @@
                 <a:ea typeface="IBM Plex Sans KR" pitchFamily="34" charset="-122"/>
                 <a:cs typeface="IBM Plex Sans KR" pitchFamily="34" charset="-120"/>
               </a:rPr>
-              <a:t>BA를 11GW로 축소하면 run-rate ex-AMPC EBITDA가 </a:t>
+              <a:t>BA를 18GW로 축소하면 run-rate ex-AMPC EBITDA가 </a:t>
             </a:r>
             <a:pPr indent="0" marL="0">
               <a:lnSpc>
@@ -11714,7 +11675,7 @@
                 <a:ea typeface="IBM Plex Sans KR" pitchFamily="34" charset="-122"/>
                 <a:cs typeface="IBM Plex Sans KR" pitchFamily="34" charset="-120"/>
               </a:rPr>
-              <a:t>$554→$438mm</a:t>
+              <a:t>$554→$518mm</a:t>
             </a:r>
             <a:pPr indent="0" marL="0">
               <a:lnSpc>
@@ -11748,7 +11709,7 @@
                 <a:ea typeface="IBM Plex Sans KR" pitchFamily="34" charset="-122"/>
                 <a:cs typeface="IBM Plex Sans KR" pitchFamily="34" charset="-120"/>
               </a:rPr>
-              <a:t>BASE 19.5x → 최대결합 15.9x</a:t>
+              <a:t>BASE 16.5x → 최대결합 13.5x</a:t>
             </a:r>
             <a:pPr indent="0" marL="0">
               <a:lnSpc>
@@ -11765,7 +11726,7 @@
                 <a:ea typeface="IBM Plex Sans KR" pitchFamily="34" charset="-122"/>
                 <a:cs typeface="IBM Plex Sans KR" pitchFamily="34" charset="-120"/>
               </a:rPr>
-              <a:t>로 상승. 그랜트20·희석49를 다 써도 </a:t>
+              <a:t>로 상승. 그랜트20+희석49(최대결합)면 13.5x로 </a:t>
             </a:r>
             <a:pPr indent="0" marL="0">
               <a:lnSpc>
@@ -11782,7 +11743,7 @@
                 <a:ea typeface="IBM Plex Sans KR" pitchFamily="34" charset="-122"/>
                 <a:cs typeface="IBM Plex Sans KR" pitchFamily="34" charset="-120"/>
               </a:rPr>
-              <a:t>정상화 peer(13~15x)를 초과</a:t>
+              <a:t>정상화 peer(13~15x) 하단 진입, BASE는 16.5x로 초과</a:t>
             </a:r>
             <a:pPr indent="0" marL="0">
               <a:lnSpc>
@@ -11799,7 +11760,7 @@
                 <a:ea typeface="IBM Plex Sans KR" pitchFamily="34" charset="-122"/>
                 <a:cs typeface="IBM Plex Sans KR" pitchFamily="34" charset="-120"/>
               </a:rPr>
-              <a:t>(2029E 분모면 20.2~24.6x). DCF 내재 </a:t>
+              <a:t>(2029E 분모면 16.6~20.3x). DCF 내재 </a:t>
             </a:r>
             <a:pPr indent="0" marL="0">
               <a:lnSpc>
@@ -11816,7 +11777,7 @@
                 <a:ea typeface="IBM Plex Sans KR" pitchFamily="34" charset="-122"/>
                 <a:cs typeface="IBM Plex Sans KR" pitchFamily="34" charset="-120"/>
               </a:rPr>
-              <a:t>8.0x는 여전히 할인</a:t>
+              <a:t>8.5x는 여전히 할인</a:t>
             </a:r>
             <a:pPr indent="0" marL="0">
               <a:lnSpc>
@@ -11850,7 +11811,7 @@
                 <a:ea typeface="IBM Plex Sans KR" pitchFamily="34" charset="-122"/>
                 <a:cs typeface="IBM Plex Sans KR" pitchFamily="34" charset="-120"/>
               </a:rPr>
-              <a:t>필요 EBITDA% 11.0~13.5%</a:t>
+              <a:t>필요 EBITDA% 9.3~11.4%</a:t>
             </a:r>
             <a:pPr indent="0" marL="0">
               <a:lnSpc>
@@ -11875,7 +11836,7 @@
       </p:sp>
       <p:sp>
         <p:nvSpPr>
-          <p:cNvPr id="62" name="Shape 59"/>
+          <p:cNvPr id="61" name="Shape 58"/>
           <p:cNvSpPr/>
           <p:nvPr/>
         </p:nvSpPr>
@@ -11898,7 +11859,7 @@
       </p:sp>
       <p:sp>
         <p:nvSpPr>
-          <p:cNvPr id="63" name="Text 60"/>
+          <p:cNvPr id="62" name="Text 59"/>
           <p:cNvSpPr/>
           <p:nvPr/>
         </p:nvSpPr>
@@ -11937,7 +11898,7 @@
       </p:sp>
       <p:sp>
         <p:nvSpPr>
-          <p:cNvPr id="64" name="Text 61"/>
+          <p:cNvPr id="63" name="Text 60"/>
           <p:cNvSpPr/>
           <p:nvPr/>
         </p:nvSpPr>
@@ -14187,7 +14148,7 @@
                           <a:ea typeface="IBM Plex Mono" pitchFamily="34" charset="-122"/>
                           <a:cs typeface="IBM Plex Mono" pitchFamily="34" charset="-120"/>
                         </a:rPr>
-                        <a:t>$438mm</a:t>
+                        <a:t>$518mm</a:t>
                       </a:r>
                       <a:endParaRPr lang="en-US" sz="950" dirty="0">
                         <a:latin typeface="IBM Plex Mono" charset="0"/>
@@ -14255,7 +14216,7 @@
                           <a:ea typeface="Space Grotesk" pitchFamily="34" charset="-122"/>
                           <a:cs typeface="Space Grotesk" pitchFamily="34" charset="-120"/>
                         </a:rPr>
-                        <a:t>8.0x</a:t>
+                        <a:t>8.5x</a:t>
                       </a:r>
                       <a:endParaRPr lang="en-US" sz="1150" dirty="0">
                         <a:latin typeface="Space Grotesk" charset="0"/>
@@ -14323,7 +14284,7 @@
                           <a:ea typeface="IBM Plex Mono" pitchFamily="34" charset="-122"/>
                           <a:cs typeface="IBM Plex Mono" pitchFamily="34" charset="-120"/>
                         </a:rPr>
-                        <a:t>15.9~19.5x</a:t>
+                        <a:t>13.5~16.5x</a:t>
                       </a:r>
                       <a:endParaRPr lang="en-US" sz="950" dirty="0">
                         <a:latin typeface="IBM Plex Mono" charset="0"/>
@@ -14461,7 +14422,7 @@
                           <a:ea typeface="IBM Plex Mono" pitchFamily="34" charset="-122"/>
                           <a:cs typeface="IBM Plex Mono" pitchFamily="34" charset="-120"/>
                         </a:rPr>
-                        <a:t>$346mm</a:t>
+                        <a:t>$421mm</a:t>
                       </a:r>
                       <a:endParaRPr lang="en-US" sz="950" dirty="0">
                         <a:latin typeface="IBM Plex Mono" charset="0"/>
@@ -14529,7 +14490,7 @@
                           <a:ea typeface="Space Grotesk" pitchFamily="34" charset="-122"/>
                           <a:cs typeface="Space Grotesk" pitchFamily="34" charset="-120"/>
                         </a:rPr>
-                        <a:t>10.1x</a:t>
+                        <a:t>10.5x</a:t>
                       </a:r>
                       <a:endParaRPr lang="en-US" sz="1150" dirty="0">
                         <a:latin typeface="Space Grotesk" charset="0"/>
@@ -14597,7 +14558,7 @@
                           <a:ea typeface="IBM Plex Mono" pitchFamily="34" charset="-122"/>
                           <a:cs typeface="IBM Plex Mono" pitchFamily="34" charset="-120"/>
                         </a:rPr>
-                        <a:t>20.2~24.6x</a:t>
+                        <a:t>16.6~20.3x</a:t>
                       </a:r>
                       <a:endParaRPr lang="en-US" sz="950" dirty="0">
                         <a:latin typeface="IBM Plex Mono" charset="0"/>
@@ -14750,7 +14711,7 @@
                 <a:ea typeface="IBM Plex Sans KR" pitchFamily="34" charset="-122"/>
                 <a:cs typeface="IBM Plex Sans KR" pitchFamily="34" charset="-120"/>
               </a:rPr>
-              <a:t>× $438mm  → EV $5.7bn  </a:t>
+              <a:t>× $518mm  → EV $6.7bn  </a:t>
             </a:r>
             <a:pPr indent="0" marL="0">
               <a:lnSpc>
@@ -14761,13 +14722,13 @@
             <a:r>
               <a:rPr lang="en-US" sz="1000" b="1" dirty="0">
                 <a:solidFill>
-                  <a:srgbClr val="FF8E84"/>
+                  <a:srgbClr val="86D6A6"/>
                 </a:solidFill>
                 <a:latin typeface="IBM Plex Sans KR" pitchFamily="34" charset="0"/>
                 <a:ea typeface="IBM Plex Sans KR" pitchFamily="34" charset="-122"/>
                 <a:cs typeface="IBM Plex Sans KR" pitchFamily="34" charset="-120"/>
               </a:rPr>
-              <a:t>지분 −$0.7bn
+              <a:t>지분 +$0.3bn
 </a:t>
             </a:r>
             <a:pPr indent="0" marL="0">
@@ -14785,7 +14746,7 @@
                 <a:ea typeface="IBM Plex Sans KR" pitchFamily="34" charset="-122"/>
                 <a:cs typeface="IBM Plex Sans KR" pitchFamily="34" charset="-120"/>
               </a:rPr>
-              <a:t>× $346mm  → EV $4.5bn  </a:t>
+              <a:t>× $421mm  → EV $5.5bn  </a:t>
             </a:r>
             <a:pPr indent="0" marL="0">
               <a:lnSpc>
@@ -14802,7 +14763,7 @@
                 <a:ea typeface="IBM Plex Sans KR" pitchFamily="34" charset="-122"/>
                 <a:cs typeface="IBM Plex Sans KR" pitchFamily="34" charset="-120"/>
               </a:rPr>
-              <a:t>지분 −$1.9bn</a:t>
+              <a:t>지분 −$0.9bn</a:t>
             </a:r>
             <a:endParaRPr lang="en-US" sz="1000" dirty="0"/>
           </a:p>
@@ -14841,7 +14802,7 @@
                 <a:ea typeface="IBM Plex Mono" pitchFamily="34" charset="-122"/>
                 <a:cs typeface="IBM Plex Mono" pitchFamily="34" charset="-120"/>
               </a:rPr>
-              <a:t>풋볼필드 — 내재 EV ($bn) · run-rate $438mm 기준 · 보수/정상화 peer vs 역산 필요</a:t>
+              <a:t>풋볼필드 — 내재 EV ($bn) · run-rate $518mm 기준 · 보수/정상화 peer vs 역산 필요</a:t>
             </a:r>
             <a:endParaRPr lang="en-US" sz="850" dirty="0"/>
           </a:p>
@@ -14878,8 +14839,8 @@
         </p:nvSpPr>
         <p:spPr>
           <a:xfrm>
-            <a:off x="1424178" y="5394960"/>
-            <a:ext cx="3153994" cy="182880"/>
+            <a:off x="2345893" y="5394960"/>
+            <a:ext cx="3730066" cy="182880"/>
           </a:xfrm>
           <a:prstGeom prst="rect">
             <a:avLst/>
@@ -14903,8 +14864,8 @@
         </p:nvSpPr>
         <p:spPr>
           <a:xfrm>
-            <a:off x="1424178" y="5605272"/>
-            <a:ext cx="3153994" cy="182880"/>
+            <a:off x="2345893" y="5605272"/>
+            <a:ext cx="3730066" cy="182880"/>
           </a:xfrm>
           <a:prstGeom prst="rect">
             <a:avLst/>
@@ -14928,7 +14889,7 @@
                 <a:ea typeface="IBM Plex Mono" pitchFamily="34" charset="-122"/>
                 <a:cs typeface="IBM Plex Mono" pitchFamily="34" charset="-120"/>
               </a:rPr>
-              <a:t>보수 8~13x  $3.5~5.7bn</a:t>
+              <a:t>보수 8~13x  $4.1~6.7bn</a:t>
             </a:r>
             <a:endParaRPr lang="en-US" sz="750" dirty="0"/>
           </a:p>
@@ -14942,8 +14903,8 @@
         </p:nvSpPr>
         <p:spPr>
           <a:xfrm>
-            <a:off x="4578172" y="5394960"/>
-            <a:ext cx="1267358" cy="182880"/>
+            <a:off x="6075959" y="5394960"/>
+            <a:ext cx="1497787" cy="182880"/>
           </a:xfrm>
           <a:prstGeom prst="rect">
             <a:avLst/>
@@ -14967,8 +14928,8 @@
         </p:nvSpPr>
         <p:spPr>
           <a:xfrm>
-            <a:off x="4303852" y="5175504"/>
-            <a:ext cx="2090318" cy="182880"/>
+            <a:off x="5801639" y="5175504"/>
+            <a:ext cx="2320747" cy="182880"/>
           </a:xfrm>
           <a:prstGeom prst="rect">
             <a:avLst/>
@@ -14992,7 +14953,7 @@
                 <a:ea typeface="IBM Plex Mono" pitchFamily="34" charset="-122"/>
                 <a:cs typeface="IBM Plex Mono" pitchFamily="34" charset="-120"/>
               </a:rPr>
-              <a:t>정상화 13~15x  $5.7~6.6bn</a:t>
+              <a:t>정상화 13~15x  $6.7~7.8bn</a:t>
             </a:r>
             <a:endParaRPr lang="en-US" sz="750" dirty="0"/>
           </a:p>
@@ -15006,8 +14967,8 @@
         </p:nvSpPr>
         <p:spPr>
           <a:xfrm>
-            <a:off x="6407201" y="5212080"/>
-            <a:ext cx="2275484" cy="0"/>
+            <a:off x="6450406" y="5212080"/>
+            <a:ext cx="2246681" cy="0"/>
           </a:xfrm>
           <a:prstGeom prst="line">
             <a:avLst/>
@@ -15029,8 +14990,8 @@
         </p:nvSpPr>
         <p:spPr>
           <a:xfrm>
-            <a:off x="6132881" y="5010912"/>
-            <a:ext cx="3098444" cy="182880"/>
+            <a:off x="6176086" y="5010912"/>
+            <a:ext cx="3069641" cy="182880"/>
           </a:xfrm>
           <a:prstGeom prst="rect">
             <a:avLst/>
@@ -15054,7 +15015,7 @@
                 <a:ea typeface="IBM Plex Mono" pitchFamily="34" charset="-122"/>
                 <a:cs typeface="IBM Plex Mono" pitchFamily="34" charset="-120"/>
               </a:rPr>
-              <a:t>역산 필요 15.9~19.5x</a:t>
+              <a:t>역산 필요 13.5~16.5x</a:t>
             </a:r>
             <a:endParaRPr lang="en-US" sz="750" dirty="0"/>
           </a:p>
@@ -15130,7 +15091,7 @@
         </p:nvSpPr>
         <p:spPr>
           <a:xfrm>
-            <a:off x="1354912" y="5431536"/>
+            <a:off x="2679878" y="5431536"/>
             <a:ext cx="109728" cy="109728"/>
           </a:xfrm>
           <a:prstGeom prst="ellipse">
@@ -15150,7 +15111,7 @@
         </p:nvSpPr>
         <p:spPr>
           <a:xfrm>
-            <a:off x="632536" y="5175504"/>
+            <a:off x="1957502" y="5175504"/>
             <a:ext cx="1554480" cy="182880"/>
           </a:xfrm>
           <a:prstGeom prst="rect">
@@ -15175,7 +15136,7 @@
                 <a:ea typeface="IBM Plex Mono" pitchFamily="34" charset="-122"/>
                 <a:cs typeface="IBM Plex Mono" pitchFamily="34" charset="-120"/>
               </a:rPr>
-              <a:t>DCF $3.5bn·8.0x</a:t>
+              <a:t>DCF $4.4bn·8.5x</a:t>
             </a:r>
             <a:endParaRPr lang="en-US" sz="750" dirty="0"/>
           </a:p>
@@ -15529,7 +15490,7 @@
                 <a:ea typeface="IBM Plex Sans KR" pitchFamily="34" charset="-122"/>
                 <a:cs typeface="IBM Plex Sans KR" pitchFamily="34" charset="-120"/>
               </a:rPr>
-              <a:t>BA 11GW 축소로 run-rate ex-AMPC EBITDA </a:t>
+              <a:t>BA 18GW 축소로 run-rate ex-AMPC EBITDA </a:t>
             </a:r>
             <a:pPr indent="0" marL="0">
               <a:lnSpc>
@@ -15546,7 +15507,7 @@
                 <a:ea typeface="IBM Plex Sans KR" pitchFamily="34" charset="-122"/>
                 <a:cs typeface="IBM Plex Sans KR" pitchFamily="34" charset="-120"/>
               </a:rPr>
-              <a:t>$554→$438mm</a:t>
+              <a:t>$554→$518mm</a:t>
             </a:r>
             <a:pPr indent="0" marL="0">
               <a:lnSpc>
@@ -15580,7 +15541,7 @@
                 <a:ea typeface="IBM Plex Sans KR" pitchFamily="34" charset="-122"/>
                 <a:cs typeface="IBM Plex Sans KR" pitchFamily="34" charset="-120"/>
               </a:rPr>
-              <a:t>15.9~19.5x는 정상화 peer(13~15x)를 초과</a:t>
+              <a:t>13.5~16.5x — 최대결합 13.5x만 정상화 peer(13~15x) 하단 진입, BASE 16.5x는 초과</a:t>
             </a:r>
             <a:pPr indent="0" marL="0">
               <a:lnSpc>
@@ -15597,7 +15558,7 @@
                 <a:ea typeface="IBM Plex Sans KR" pitchFamily="34" charset="-122"/>
                 <a:cs typeface="IBM Plex Sans KR" pitchFamily="34" charset="-120"/>
               </a:rPr>
-              <a:t>(2029E 분모면 20.2~24.6x). DCF 내재 </a:t>
+              <a:t>(2029E 분모면 16.6~20.3x). DCF 내재 </a:t>
             </a:r>
             <a:pPr indent="0" marL="0">
               <a:lnSpc>
@@ -15614,7 +15575,7 @@
                 <a:ea typeface="IBM Plex Sans KR" pitchFamily="34" charset="-122"/>
                 <a:cs typeface="IBM Plex Sans KR" pitchFamily="34" charset="-120"/>
               </a:rPr>
-              <a:t>8.0x는 여전히 할인</a:t>
+              <a:t>8.5x는 여전히 할인</a:t>
             </a:r>
             <a:pPr indent="0" marL="0">
               <a:lnSpc>
@@ -15648,7 +15609,7 @@
                 <a:ea typeface="IBM Plex Sans KR" pitchFamily="34" charset="-122"/>
                 <a:cs typeface="IBM Plex Sans KR" pitchFamily="34" charset="-120"/>
               </a:rPr>
-              <a:t>필요 EBITDA% 11.0~13.5%</a:t>
+              <a:t>필요 EBITDA% 9.3~11.4%</a:t>
             </a:r>
             <a:pPr indent="0" marL="0">
               <a:lnSpc>

--- a/sk_valuation_project/output/SK_Funding_v3_editable.pptx
+++ b/sk_valuation_project/output/SK_Funding_v3_editable.pptx
@@ -2596,7 +2596,7 @@
                           <a:ea typeface="IBM Plex Mono" pitchFamily="34" charset="-122"/>
                           <a:cs typeface="IBM Plex Mono" pitchFamily="34" charset="-120"/>
                         </a:rPr>
-                        <a:t>9% (목표)</a:t>
+                        <a:t>13% (목표)</a:t>
                       </a:r>
                       <a:endParaRPr lang="en-US" sz="950" dirty="0">
                         <a:latin typeface="IBM Plex Mono" charset="0"/>
@@ -3712,7 +3712,7 @@
                           <a:ea typeface="IBM Plex Mono" pitchFamily="34" charset="-122"/>
                           <a:cs typeface="IBM Plex Mono" pitchFamily="34" charset="-120"/>
                         </a:rPr>
-                        <a:t>9% (목표)</a:t>
+                        <a:t>13% (목표)</a:t>
                       </a:r>
                       <a:endParaRPr lang="en-US" sz="950" dirty="0">
                         <a:latin typeface="IBM Plex Mono" charset="0"/>
@@ -4413,7 +4413,7 @@
                 <a:ea typeface="IBM Plex Sans KR" pitchFamily="34" charset="-122"/>
                 <a:cs typeface="IBM Plex Sans KR" pitchFamily="34" charset="-120"/>
               </a:rPr>
-              <a:t>run-rate ex-AMPC EBITDA $518mm (BA 205 + OT 313, 9% 마진)</a:t>
+              <a:t>run-rate ex-AMPC EBITDA $748mm (BA 295 + OT 452, 13% 마진)</a:t>
             </a:r>
             <a:endParaRPr lang="en-US" sz="1050" dirty="0"/>
           </a:p>
@@ -4503,7 +4503,7 @@
         <p:spPr>
           <a:xfrm>
             <a:off x="6208776" y="4928616"/>
-            <a:ext cx="928116" cy="219456"/>
+            <a:ext cx="1670609" cy="219456"/>
           </a:xfrm>
           <a:prstGeom prst="rect">
             <a:avLst/>
@@ -4522,8 +4522,8 @@
         </p:nvSpPr>
         <p:spPr>
           <a:xfrm>
-            <a:off x="7136892" y="4928616"/>
-            <a:ext cx="2784348" cy="219456"/>
+            <a:off x="7879385" y="4928616"/>
+            <a:ext cx="2041855" cy="219456"/>
           </a:xfrm>
           <a:prstGeom prst="rect">
             <a:avLst/>
@@ -4543,7 +4543,7 @@
         <p:spPr>
           <a:xfrm>
             <a:off x="6208776" y="4928616"/>
-            <a:ext cx="928116" cy="219456"/>
+            <a:ext cx="1670609" cy="219456"/>
           </a:xfrm>
           <a:prstGeom prst="rect">
             <a:avLst/>
@@ -4567,7 +4567,7 @@
                 <a:ea typeface="IBM Plex Mono" pitchFamily="34" charset="-122"/>
                 <a:cs typeface="IBM Plex Mono" pitchFamily="34" charset="-120"/>
               </a:rPr>
-              <a:t>ex-AMPC $1.1bn</a:t>
+              <a:t>ex-AMPC $2.7bn</a:t>
             </a:r>
             <a:endParaRPr lang="en-US" sz="750" dirty="0"/>
           </a:p>
@@ -4581,8 +4581,8 @@
         </p:nvSpPr>
         <p:spPr>
           <a:xfrm>
-            <a:off x="7136892" y="4928616"/>
-            <a:ext cx="2784348" cy="219456"/>
+            <a:off x="7879385" y="4928616"/>
+            <a:ext cx="2041855" cy="219456"/>
           </a:xfrm>
           <a:prstGeom prst="rect">
             <a:avLst/>
@@ -4606,7 +4606,7 @@
                 <a:ea typeface="IBM Plex Mono" pitchFamily="34" charset="-122"/>
                 <a:cs typeface="IBM Plex Mono" pitchFamily="34" charset="-120"/>
               </a:rPr>
-              <a:t>AMPC PV $3.3bn (76%)</a:t>
+              <a:t>AMPC PV $3.3bn (55%)</a:t>
             </a:r>
             <a:endParaRPr lang="en-US" sz="800" dirty="0"/>
           </a:p>
@@ -4645,7 +4645,7 @@
                 <a:ea typeface="IBM Plex Sans KR" pitchFamily="34" charset="-122"/>
                 <a:cs typeface="IBM Plex Sans KR" pitchFamily="34" charset="-120"/>
               </a:rPr>
-              <a:t>DCF EV $4.4bn</a:t>
+              <a:t>DCF EV $6.0bn</a:t>
             </a:r>
             <a:pPr indent="0" marL="0">
               <a:buNone/>
@@ -4659,7 +4659,7 @@
                 <a:ea typeface="IBM Plex Sans KR" pitchFamily="34" charset="-122"/>
                 <a:cs typeface="IBM Plex Sans KR" pitchFamily="34" charset="-120"/>
               </a:rPr>
-              <a:t> 의 76%가 한시 AMPC → 멀티플엔 ex-AMPC만. WACC 10.5%·TGR 2%·Ke 13%</a:t>
+              <a:t> 의 55%가 한시 AMPC → 멀티플엔 ex-AMPC만. WACC 10.5%·TGR 2%·Ke 13%</a:t>
             </a:r>
             <a:endParaRPr lang="en-US" sz="800" dirty="0"/>
           </a:p>
@@ -4875,7 +4875,7 @@
                 <a:ea typeface="Space Grotesk" pitchFamily="34" charset="-122"/>
                 <a:cs typeface="Space Grotesk" pitchFamily="34" charset="-120"/>
               </a:rPr>
-              <a:t>518</a:t>
+              <a:t>748</a:t>
             </a:r>
             <a:pPr indent="0" marL="0">
               <a:buNone/>
@@ -5105,7 +5105,7 @@
                 <a:ea typeface="Space Grotesk" pitchFamily="34" charset="-122"/>
                 <a:cs typeface="Space Grotesk" pitchFamily="34" charset="-120"/>
               </a:rPr>
-              <a:t>4.4</a:t>
+              <a:t>6.0</a:t>
             </a:r>
             <a:pPr indent="0" marL="0">
               <a:buNone/>
@@ -7680,7 +7680,7 @@
                 <a:ea typeface="IBM Plex Mono" pitchFamily="34" charset="-122"/>
                 <a:cs typeface="IBM Plex Mono" pitchFamily="34" charset="-120"/>
               </a:rPr>
-              <a:t>$518mm</a:t>
+              <a:t>$748mm</a:t>
             </a:r>
             <a:endParaRPr lang="en-US" sz="1000" dirty="0"/>
           </a:p>
@@ -8784,7 +8784,7 @@
                           <a:ea typeface="IBM Plex Sans KR" pitchFamily="34" charset="-122"/>
                           <a:cs typeface="IBM Plex Sans KR" pitchFamily="34" charset="-120"/>
                         </a:rPr>
-                        <a:t>(9%)</a:t>
+                        <a:t>(13%)</a:t>
                       </a:r>
                       <a:endParaRPr lang="en-US" sz="900" dirty="0">
                         <a:latin typeface="IBM Plex Sans KR" charset="0"/>
@@ -8990,7 +8990,7 @@
                       <a:tailEnd type="none" w="med" len="med"/>
                     </a:lnB>
                     <a:solidFill>
-                      <a:srgbClr val="FFFFFF"/>
+                      <a:srgbClr val="E8F3EC"/>
                     </a:solidFill>
                   </a:tcPr>
                 </a:tc>
@@ -9017,1578 +9017,6 @@
                         <a:latin typeface="IBM Plex Mono" charset="0"/>
                         <a:ea typeface="IBM Plex Mono" charset="0"/>
                         <a:cs typeface="IBM Plex Mono" charset="0"/>
-                      </a:endParaRPr>
-                    </a:p>
-                  </a:txBody>
-                  <a:tcPr marL="63500" marR="63500" marT="25400" marB="25400" anchor="ctr">
-                    <a:lnL w="6350" cap="flat" cmpd="sng" algn="ctr">
-                      <a:solidFill>
-                        <a:srgbClr val="E4DED4"/>
-                      </a:solidFill>
-                      <a:prstDash val="solid"/>
-                      <a:round/>
-                      <a:headEnd type="none" w="med" len="med"/>
-                      <a:tailEnd type="none" w="med" len="med"/>
-                    </a:lnL>
-                    <a:lnR w="6350" cap="flat" cmpd="sng" algn="ctr">
-                      <a:solidFill>
-                        <a:srgbClr val="E4DED4"/>
-                      </a:solidFill>
-                      <a:prstDash val="solid"/>
-                      <a:round/>
-                      <a:headEnd type="none" w="med" len="med"/>
-                      <a:tailEnd type="none" w="med" len="med"/>
-                    </a:lnR>
-                    <a:lnT w="6350" cap="flat" cmpd="sng" algn="ctr">
-                      <a:solidFill>
-                        <a:srgbClr val="E4DED4"/>
-                      </a:solidFill>
-                      <a:prstDash val="solid"/>
-                      <a:round/>
-                      <a:headEnd type="none" w="med" len="med"/>
-                      <a:tailEnd type="none" w="med" len="med"/>
-                    </a:lnT>
-                    <a:lnB w="6350" cap="flat" cmpd="sng" algn="ctr">
-                      <a:solidFill>
-                        <a:srgbClr val="E4DED4"/>
-                      </a:solidFill>
-                      <a:prstDash val="solid"/>
-                      <a:round/>
-                      <a:headEnd type="none" w="med" len="med"/>
-                      <a:tailEnd type="none" w="med" len="med"/>
-                    </a:lnB>
-                    <a:solidFill>
-                      <a:srgbClr val="FFFFFF"/>
-                    </a:solidFill>
-                  </a:tcPr>
-                </a:tc>
-                <a:tc>
-                  <a:txBody>
-                    <a:bodyPr/>
-                    <a:lstStyle/>
-                    <a:p>
-                      <a:pPr algn="ctr" indent="0" marL="0">
-                        <a:buNone/>
-                      </a:pPr>
-                      <a:r>
-                        <a:rPr lang="en-US" sz="950" dirty="0">
-                          <a:solidFill>
-                            <a:srgbClr val="1B1714"/>
-                          </a:solidFill>
-                          <a:latin typeface="IBM Plex Mono" pitchFamily="34" charset="0"/>
-                          <a:ea typeface="IBM Plex Mono" pitchFamily="34" charset="-122"/>
-                          <a:cs typeface="IBM Plex Mono" pitchFamily="34" charset="-120"/>
-                        </a:rPr>
-                        <a:t>20%</a:t>
-                      </a:r>
-                      <a:endParaRPr lang="en-US" sz="950" dirty="0">
-                        <a:latin typeface="IBM Plex Mono" charset="0"/>
-                        <a:ea typeface="IBM Plex Mono" charset="0"/>
-                        <a:cs typeface="IBM Plex Mono" charset="0"/>
-                      </a:endParaRPr>
-                    </a:p>
-                  </a:txBody>
-                  <a:tcPr marL="63500" marR="63500" marT="25400" marB="25400" anchor="ctr">
-                    <a:lnL w="6350" cap="flat" cmpd="sng" algn="ctr">
-                      <a:solidFill>
-                        <a:srgbClr val="E4DED4"/>
-                      </a:solidFill>
-                      <a:prstDash val="solid"/>
-                      <a:round/>
-                      <a:headEnd type="none" w="med" len="med"/>
-                      <a:tailEnd type="none" w="med" len="med"/>
-                    </a:lnL>
-                    <a:lnR w="6350" cap="flat" cmpd="sng" algn="ctr">
-                      <a:solidFill>
-                        <a:srgbClr val="E4DED4"/>
-                      </a:solidFill>
-                      <a:prstDash val="solid"/>
-                      <a:round/>
-                      <a:headEnd type="none" w="med" len="med"/>
-                      <a:tailEnd type="none" w="med" len="med"/>
-                    </a:lnR>
-                    <a:lnT w="6350" cap="flat" cmpd="sng" algn="ctr">
-                      <a:solidFill>
-                        <a:srgbClr val="E4DED4"/>
-                      </a:solidFill>
-                      <a:prstDash val="solid"/>
-                      <a:round/>
-                      <a:headEnd type="none" w="med" len="med"/>
-                      <a:tailEnd type="none" w="med" len="med"/>
-                    </a:lnT>
-                    <a:lnB w="6350" cap="flat" cmpd="sng" algn="ctr">
-                      <a:solidFill>
-                        <a:srgbClr val="E4DED4"/>
-                      </a:solidFill>
-                      <a:prstDash val="solid"/>
-                      <a:round/>
-                      <a:headEnd type="none" w="med" len="med"/>
-                      <a:tailEnd type="none" w="med" len="med"/>
-                    </a:lnB>
-                    <a:solidFill>
-                      <a:srgbClr val="FFFFFF"/>
-                    </a:solidFill>
-                  </a:tcPr>
-                </a:tc>
-                <a:tc>
-                  <a:txBody>
-                    <a:bodyPr/>
-                    <a:lstStyle/>
-                    <a:p>
-                      <a:pPr algn="ctr" indent="0" marL="0">
-                        <a:buNone/>
-                      </a:pPr>
-                      <a:r>
-                        <a:rPr lang="en-US" sz="950" dirty="0">
-                          <a:solidFill>
-                            <a:srgbClr val="1B1714"/>
-                          </a:solidFill>
-                          <a:latin typeface="IBM Plex Mono" pitchFamily="34" charset="0"/>
-                          <a:ea typeface="IBM Plex Mono" pitchFamily="34" charset="-122"/>
-                          <a:cs typeface="IBM Plex Mono" pitchFamily="34" charset="-120"/>
-                        </a:rPr>
-                        <a:t>$8.5bn</a:t>
-                      </a:r>
-                      <a:endParaRPr lang="en-US" sz="950" dirty="0">
-                        <a:latin typeface="IBM Plex Mono" charset="0"/>
-                        <a:ea typeface="IBM Plex Mono" charset="0"/>
-                        <a:cs typeface="IBM Plex Mono" charset="0"/>
-                      </a:endParaRPr>
-                    </a:p>
-                  </a:txBody>
-                  <a:tcPr marL="63500" marR="63500" marT="25400" marB="25400" anchor="ctr">
-                    <a:lnL w="6350" cap="flat" cmpd="sng" algn="ctr">
-                      <a:solidFill>
-                        <a:srgbClr val="E4DED4"/>
-                      </a:solidFill>
-                      <a:prstDash val="solid"/>
-                      <a:round/>
-                      <a:headEnd type="none" w="med" len="med"/>
-                      <a:tailEnd type="none" w="med" len="med"/>
-                    </a:lnL>
-                    <a:lnR w="6350" cap="flat" cmpd="sng" algn="ctr">
-                      <a:solidFill>
-                        <a:srgbClr val="E4DED4"/>
-                      </a:solidFill>
-                      <a:prstDash val="solid"/>
-                      <a:round/>
-                      <a:headEnd type="none" w="med" len="med"/>
-                      <a:tailEnd type="none" w="med" len="med"/>
-                    </a:lnR>
-                    <a:lnT w="6350" cap="flat" cmpd="sng" algn="ctr">
-                      <a:solidFill>
-                        <a:srgbClr val="E4DED4"/>
-                      </a:solidFill>
-                      <a:prstDash val="solid"/>
-                      <a:round/>
-                      <a:headEnd type="none" w="med" len="med"/>
-                      <a:tailEnd type="none" w="med" len="med"/>
-                    </a:lnT>
-                    <a:lnB w="6350" cap="flat" cmpd="sng" algn="ctr">
-                      <a:solidFill>
-                        <a:srgbClr val="E4DED4"/>
-                      </a:solidFill>
-                      <a:prstDash val="solid"/>
-                      <a:round/>
-                      <a:headEnd type="none" w="med" len="med"/>
-                      <a:tailEnd type="none" w="med" len="med"/>
-                    </a:lnB>
-                    <a:solidFill>
-                      <a:srgbClr val="FFFFFF"/>
-                    </a:solidFill>
-                  </a:tcPr>
-                </a:tc>
-                <a:tc>
-                  <a:txBody>
-                    <a:bodyPr/>
-                    <a:lstStyle/>
-                    <a:p>
-                      <a:pPr algn="ctr" indent="0" marL="0">
-                        <a:buNone/>
-                      </a:pPr>
-                      <a:r>
-                        <a:rPr lang="en-US" sz="1200" b="1" dirty="0">
-                          <a:solidFill>
-                            <a:srgbClr val="C1121F"/>
-                          </a:solidFill>
-                          <a:latin typeface="Space Grotesk" pitchFamily="34" charset="0"/>
-                          <a:ea typeface="Space Grotesk" pitchFamily="34" charset="-122"/>
-                          <a:cs typeface="Space Grotesk" pitchFamily="34" charset="-120"/>
-                        </a:rPr>
-                        <a:t>16.5x</a:t>
-                      </a:r>
-                      <a:endParaRPr lang="en-US" sz="1200" dirty="0">
-                        <a:latin typeface="Space Grotesk" charset="0"/>
-                        <a:ea typeface="Space Grotesk" charset="0"/>
-                        <a:cs typeface="Space Grotesk" charset="0"/>
-                      </a:endParaRPr>
-                    </a:p>
-                  </a:txBody>
-                  <a:tcPr marL="63500" marR="63500" marT="25400" marB="25400" anchor="ctr">
-                    <a:lnL w="6350" cap="flat" cmpd="sng" algn="ctr">
-                      <a:solidFill>
-                        <a:srgbClr val="E4DED4"/>
-                      </a:solidFill>
-                      <a:prstDash val="solid"/>
-                      <a:round/>
-                      <a:headEnd type="none" w="med" len="med"/>
-                      <a:tailEnd type="none" w="med" len="med"/>
-                    </a:lnL>
-                    <a:lnR w="6350" cap="flat" cmpd="sng" algn="ctr">
-                      <a:solidFill>
-                        <a:srgbClr val="E4DED4"/>
-                      </a:solidFill>
-                      <a:prstDash val="solid"/>
-                      <a:round/>
-                      <a:headEnd type="none" w="med" len="med"/>
-                      <a:tailEnd type="none" w="med" len="med"/>
-                    </a:lnR>
-                    <a:lnT w="6350" cap="flat" cmpd="sng" algn="ctr">
-                      <a:solidFill>
-                        <a:srgbClr val="E4DED4"/>
-                      </a:solidFill>
-                      <a:prstDash val="solid"/>
-                      <a:round/>
-                      <a:headEnd type="none" w="med" len="med"/>
-                      <a:tailEnd type="none" w="med" len="med"/>
-                    </a:lnT>
-                    <a:lnB w="6350" cap="flat" cmpd="sng" algn="ctr">
-                      <a:solidFill>
-                        <a:srgbClr val="E4DED4"/>
-                      </a:solidFill>
-                      <a:prstDash val="solid"/>
-                      <a:round/>
-                      <a:headEnd type="none" w="med" len="med"/>
-                      <a:tailEnd type="none" w="med" len="med"/>
-                    </a:lnB>
-                    <a:solidFill>
-                      <a:srgbClr val="FFFFFF"/>
-                    </a:solidFill>
-                  </a:tcPr>
-                </a:tc>
-                <a:tc>
-                  <a:txBody>
-                    <a:bodyPr/>
-                    <a:lstStyle/>
-                    <a:p>
-                      <a:pPr algn="ctr" indent="0" marL="0">
-                        <a:buNone/>
-                      </a:pPr>
-                      <a:r>
-                        <a:rPr lang="en-US" sz="800" b="1" dirty="0">
-                          <a:solidFill>
-                            <a:srgbClr val="C1121F"/>
-                          </a:solidFill>
-                          <a:latin typeface="IBM Plex Mono" pitchFamily="34" charset="0"/>
-                          <a:ea typeface="IBM Plex Mono" pitchFamily="34" charset="-122"/>
-                          <a:cs typeface="IBM Plex Mono" pitchFamily="34" charset="-120"/>
-                        </a:rPr>
-                        <a:t>11.4%</a:t>
-                      </a:r>
-                      <a:endParaRPr lang="en-US" sz="800" dirty="0">
-                        <a:latin typeface="IBM Plex Mono" charset="0"/>
-                        <a:ea typeface="IBM Plex Mono" charset="0"/>
-                        <a:cs typeface="IBM Plex Mono" charset="0"/>
-                      </a:endParaRPr>
-                    </a:p>
-                  </a:txBody>
-                  <a:tcPr marL="63500" marR="63500" marT="25400" marB="25400" anchor="ctr">
-                    <a:lnL w="6350" cap="flat" cmpd="sng" algn="ctr">
-                      <a:solidFill>
-                        <a:srgbClr val="E4DED4"/>
-                      </a:solidFill>
-                      <a:prstDash val="solid"/>
-                      <a:round/>
-                      <a:headEnd type="none" w="med" len="med"/>
-                      <a:tailEnd type="none" w="med" len="med"/>
-                    </a:lnL>
-                    <a:lnR w="6350" cap="flat" cmpd="sng" algn="ctr">
-                      <a:solidFill>
-                        <a:srgbClr val="E4DED4"/>
-                      </a:solidFill>
-                      <a:prstDash val="solid"/>
-                      <a:round/>
-                      <a:headEnd type="none" w="med" len="med"/>
-                      <a:tailEnd type="none" w="med" len="med"/>
-                    </a:lnR>
-                    <a:lnT w="6350" cap="flat" cmpd="sng" algn="ctr">
-                      <a:solidFill>
-                        <a:srgbClr val="E4DED4"/>
-                      </a:solidFill>
-                      <a:prstDash val="solid"/>
-                      <a:round/>
-                      <a:headEnd type="none" w="med" len="med"/>
-                      <a:tailEnd type="none" w="med" len="med"/>
-                    </a:lnT>
-                    <a:lnB w="6350" cap="flat" cmpd="sng" algn="ctr">
-                      <a:solidFill>
-                        <a:srgbClr val="E4DED4"/>
-                      </a:solidFill>
-                      <a:prstDash val="solid"/>
-                      <a:round/>
-                      <a:headEnd type="none" w="med" len="med"/>
-                      <a:tailEnd type="none" w="med" len="med"/>
-                    </a:lnB>
-                    <a:solidFill>
-                      <a:srgbClr val="FFFFFF"/>
-                    </a:solidFill>
-                  </a:tcPr>
-                </a:tc>
-              </a:tr>
-              <a:tr h="402336">
-                <a:tc>
-                  <a:txBody>
-                    <a:bodyPr/>
-                    <a:lstStyle/>
-                    <a:p>
-                      <a:pPr indent="0" marL="0">
-                        <a:buNone/>
-                      </a:pPr>
-                      <a:r>
-                        <a:rPr lang="en-US" sz="950" dirty="0">
-                          <a:solidFill>
-                            <a:srgbClr val="1B1714"/>
-                          </a:solidFill>
-                          <a:latin typeface="IBM Plex Sans KR" pitchFamily="34" charset="0"/>
-                          <a:ea typeface="IBM Plex Sans KR" pitchFamily="34" charset="-122"/>
-                          <a:cs typeface="IBM Plex Sans KR" pitchFamily="34" charset="-120"/>
-                        </a:rPr>
-                        <a:t>① CoC 20% + 그랜트 20%</a:t>
-                      </a:r>
-                      <a:endParaRPr lang="en-US" sz="950" dirty="0">
-                        <a:latin typeface="IBM Plex Sans KR" charset="0"/>
-                        <a:ea typeface="IBM Plex Sans KR" charset="0"/>
-                        <a:cs typeface="IBM Plex Sans KR" charset="0"/>
-                      </a:endParaRPr>
-                    </a:p>
-                  </a:txBody>
-                  <a:tcPr marL="63500" marR="63500" marT="25400" marB="25400" anchor="ctr">
-                    <a:lnL w="6350" cap="flat" cmpd="sng" algn="ctr">
-                      <a:solidFill>
-                        <a:srgbClr val="E4DED4"/>
-                      </a:solidFill>
-                      <a:prstDash val="solid"/>
-                      <a:round/>
-                      <a:headEnd type="none" w="med" len="med"/>
-                      <a:tailEnd type="none" w="med" len="med"/>
-                    </a:lnL>
-                    <a:lnR w="6350" cap="flat" cmpd="sng" algn="ctr">
-                      <a:solidFill>
-                        <a:srgbClr val="E4DED4"/>
-                      </a:solidFill>
-                      <a:prstDash val="solid"/>
-                      <a:round/>
-                      <a:headEnd type="none" w="med" len="med"/>
-                      <a:tailEnd type="none" w="med" len="med"/>
-                    </a:lnR>
-                    <a:lnT w="6350" cap="flat" cmpd="sng" algn="ctr">
-                      <a:solidFill>
-                        <a:srgbClr val="E4DED4"/>
-                      </a:solidFill>
-                      <a:prstDash val="solid"/>
-                      <a:round/>
-                      <a:headEnd type="none" w="med" len="med"/>
-                      <a:tailEnd type="none" w="med" len="med"/>
-                    </a:lnT>
-                    <a:lnB w="6350" cap="flat" cmpd="sng" algn="ctr">
-                      <a:solidFill>
-                        <a:srgbClr val="E4DED4"/>
-                      </a:solidFill>
-                      <a:prstDash val="solid"/>
-                      <a:round/>
-                      <a:headEnd type="none" w="med" len="med"/>
-                      <a:tailEnd type="none" w="med" len="med"/>
-                    </a:lnB>
-                    <a:solidFill>
-                      <a:srgbClr val="FFFFFF"/>
-                    </a:solidFill>
-                  </a:tcPr>
-                </a:tc>
-                <a:tc>
-                  <a:txBody>
-                    <a:bodyPr/>
-                    <a:lstStyle/>
-                    <a:p>
-                      <a:pPr algn="ctr" indent="0" marL="0">
-                        <a:buNone/>
-                      </a:pPr>
-                      <a:r>
-                        <a:rPr lang="en-US" sz="950" dirty="0">
-                          <a:solidFill>
-                            <a:srgbClr val="1B1714"/>
-                          </a:solidFill>
-                          <a:latin typeface="IBM Plex Mono" pitchFamily="34" charset="0"/>
-                          <a:ea typeface="IBM Plex Mono" pitchFamily="34" charset="-122"/>
-                          <a:cs typeface="IBM Plex Mono" pitchFamily="34" charset="-120"/>
-                        </a:rPr>
-                        <a:t>20%</a:t>
-                      </a:r>
-                      <a:endParaRPr lang="en-US" sz="950" dirty="0">
-                        <a:latin typeface="IBM Plex Mono" charset="0"/>
-                        <a:ea typeface="IBM Plex Mono" charset="0"/>
-                        <a:cs typeface="IBM Plex Mono" charset="0"/>
-                      </a:endParaRPr>
-                    </a:p>
-                  </a:txBody>
-                  <a:tcPr marL="63500" marR="63500" marT="25400" marB="25400" anchor="ctr">
-                    <a:lnL w="6350" cap="flat" cmpd="sng" algn="ctr">
-                      <a:solidFill>
-                        <a:srgbClr val="E4DED4"/>
-                      </a:solidFill>
-                      <a:prstDash val="solid"/>
-                      <a:round/>
-                      <a:headEnd type="none" w="med" len="med"/>
-                      <a:tailEnd type="none" w="med" len="med"/>
-                    </a:lnL>
-                    <a:lnR w="6350" cap="flat" cmpd="sng" algn="ctr">
-                      <a:solidFill>
-                        <a:srgbClr val="E4DED4"/>
-                      </a:solidFill>
-                      <a:prstDash val="solid"/>
-                      <a:round/>
-                      <a:headEnd type="none" w="med" len="med"/>
-                      <a:tailEnd type="none" w="med" len="med"/>
-                    </a:lnR>
-                    <a:lnT w="6350" cap="flat" cmpd="sng" algn="ctr">
-                      <a:solidFill>
-                        <a:srgbClr val="E4DED4"/>
-                      </a:solidFill>
-                      <a:prstDash val="solid"/>
-                      <a:round/>
-                      <a:headEnd type="none" w="med" len="med"/>
-                      <a:tailEnd type="none" w="med" len="med"/>
-                    </a:lnT>
-                    <a:lnB w="6350" cap="flat" cmpd="sng" algn="ctr">
-                      <a:solidFill>
-                        <a:srgbClr val="E4DED4"/>
-                      </a:solidFill>
-                      <a:prstDash val="solid"/>
-                      <a:round/>
-                      <a:headEnd type="none" w="med" len="med"/>
-                      <a:tailEnd type="none" w="med" len="med"/>
-                    </a:lnB>
-                    <a:solidFill>
-                      <a:srgbClr val="FFFFFF"/>
-                    </a:solidFill>
-                  </a:tcPr>
-                </a:tc>
-                <a:tc>
-                  <a:txBody>
-                    <a:bodyPr/>
-                    <a:lstStyle/>
-                    <a:p>
-                      <a:pPr algn="ctr" indent="0" marL="0">
-                        <a:buNone/>
-                      </a:pPr>
-                      <a:r>
-                        <a:rPr lang="en-US" sz="950" dirty="0">
-                          <a:solidFill>
-                            <a:srgbClr val="1B1714"/>
-                          </a:solidFill>
-                          <a:latin typeface="IBM Plex Mono" pitchFamily="34" charset="0"/>
-                          <a:ea typeface="IBM Plex Mono" pitchFamily="34" charset="-122"/>
-                          <a:cs typeface="IBM Plex Mono" pitchFamily="34" charset="-120"/>
-                        </a:rPr>
-                        <a:t>20%</a:t>
-                      </a:r>
-                      <a:endParaRPr lang="en-US" sz="950" dirty="0">
-                        <a:latin typeface="IBM Plex Mono" charset="0"/>
-                        <a:ea typeface="IBM Plex Mono" charset="0"/>
-                        <a:cs typeface="IBM Plex Mono" charset="0"/>
-                      </a:endParaRPr>
-                    </a:p>
-                  </a:txBody>
-                  <a:tcPr marL="63500" marR="63500" marT="25400" marB="25400" anchor="ctr">
-                    <a:lnL w="6350" cap="flat" cmpd="sng" algn="ctr">
-                      <a:solidFill>
-                        <a:srgbClr val="E4DED4"/>
-                      </a:solidFill>
-                      <a:prstDash val="solid"/>
-                      <a:round/>
-                      <a:headEnd type="none" w="med" len="med"/>
-                      <a:tailEnd type="none" w="med" len="med"/>
-                    </a:lnL>
-                    <a:lnR w="6350" cap="flat" cmpd="sng" algn="ctr">
-                      <a:solidFill>
-                        <a:srgbClr val="E4DED4"/>
-                      </a:solidFill>
-                      <a:prstDash val="solid"/>
-                      <a:round/>
-                      <a:headEnd type="none" w="med" len="med"/>
-                      <a:tailEnd type="none" w="med" len="med"/>
-                    </a:lnR>
-                    <a:lnT w="6350" cap="flat" cmpd="sng" algn="ctr">
-                      <a:solidFill>
-                        <a:srgbClr val="E4DED4"/>
-                      </a:solidFill>
-                      <a:prstDash val="solid"/>
-                      <a:round/>
-                      <a:headEnd type="none" w="med" len="med"/>
-                      <a:tailEnd type="none" w="med" len="med"/>
-                    </a:lnT>
-                    <a:lnB w="6350" cap="flat" cmpd="sng" algn="ctr">
-                      <a:solidFill>
-                        <a:srgbClr val="E4DED4"/>
-                      </a:solidFill>
-                      <a:prstDash val="solid"/>
-                      <a:round/>
-                      <a:headEnd type="none" w="med" len="med"/>
-                      <a:tailEnd type="none" w="med" len="med"/>
-                    </a:lnB>
-                    <a:solidFill>
-                      <a:srgbClr val="FFFFFF"/>
-                    </a:solidFill>
-                  </a:tcPr>
-                </a:tc>
-                <a:tc>
-                  <a:txBody>
-                    <a:bodyPr/>
-                    <a:lstStyle/>
-                    <a:p>
-                      <a:pPr algn="ctr" indent="0" marL="0">
-                        <a:buNone/>
-                      </a:pPr>
-                      <a:r>
-                        <a:rPr lang="en-US" sz="950" dirty="0">
-                          <a:solidFill>
-                            <a:srgbClr val="1B1714"/>
-                          </a:solidFill>
-                          <a:latin typeface="IBM Plex Mono" pitchFamily="34" charset="0"/>
-                          <a:ea typeface="IBM Plex Mono" pitchFamily="34" charset="-122"/>
-                          <a:cs typeface="IBM Plex Mono" pitchFamily="34" charset="-120"/>
-                        </a:rPr>
-                        <a:t>$7.8bn</a:t>
-                      </a:r>
-                      <a:endParaRPr lang="en-US" sz="950" dirty="0">
-                        <a:latin typeface="IBM Plex Mono" charset="0"/>
-                        <a:ea typeface="IBM Plex Mono" charset="0"/>
-                        <a:cs typeface="IBM Plex Mono" charset="0"/>
-                      </a:endParaRPr>
-                    </a:p>
-                  </a:txBody>
-                  <a:tcPr marL="63500" marR="63500" marT="25400" marB="25400" anchor="ctr">
-                    <a:lnL w="6350" cap="flat" cmpd="sng" algn="ctr">
-                      <a:solidFill>
-                        <a:srgbClr val="E4DED4"/>
-                      </a:solidFill>
-                      <a:prstDash val="solid"/>
-                      <a:round/>
-                      <a:headEnd type="none" w="med" len="med"/>
-                      <a:tailEnd type="none" w="med" len="med"/>
-                    </a:lnL>
-                    <a:lnR w="6350" cap="flat" cmpd="sng" algn="ctr">
-                      <a:solidFill>
-                        <a:srgbClr val="E4DED4"/>
-                      </a:solidFill>
-                      <a:prstDash val="solid"/>
-                      <a:round/>
-                      <a:headEnd type="none" w="med" len="med"/>
-                      <a:tailEnd type="none" w="med" len="med"/>
-                    </a:lnR>
-                    <a:lnT w="6350" cap="flat" cmpd="sng" algn="ctr">
-                      <a:solidFill>
-                        <a:srgbClr val="E4DED4"/>
-                      </a:solidFill>
-                      <a:prstDash val="solid"/>
-                      <a:round/>
-                      <a:headEnd type="none" w="med" len="med"/>
-                      <a:tailEnd type="none" w="med" len="med"/>
-                    </a:lnT>
-                    <a:lnB w="6350" cap="flat" cmpd="sng" algn="ctr">
-                      <a:solidFill>
-                        <a:srgbClr val="E4DED4"/>
-                      </a:solidFill>
-                      <a:prstDash val="solid"/>
-                      <a:round/>
-                      <a:headEnd type="none" w="med" len="med"/>
-                      <a:tailEnd type="none" w="med" len="med"/>
-                    </a:lnB>
-                    <a:solidFill>
-                      <a:srgbClr val="FFFFFF"/>
-                    </a:solidFill>
-                  </a:tcPr>
-                </a:tc>
-                <a:tc>
-                  <a:txBody>
-                    <a:bodyPr/>
-                    <a:lstStyle/>
-                    <a:p>
-                      <a:pPr algn="ctr" indent="0" marL="0">
-                        <a:buNone/>
-                      </a:pPr>
-                      <a:r>
-                        <a:rPr lang="en-US" sz="1200" b="1" dirty="0">
-                          <a:solidFill>
-                            <a:srgbClr val="C1121F"/>
-                          </a:solidFill>
-                          <a:latin typeface="Space Grotesk" pitchFamily="34" charset="0"/>
-                          <a:ea typeface="Space Grotesk" pitchFamily="34" charset="-122"/>
-                          <a:cs typeface="Space Grotesk" pitchFamily="34" charset="-120"/>
-                        </a:rPr>
-                        <a:t>15.1x</a:t>
-                      </a:r>
-                      <a:endParaRPr lang="en-US" sz="1200" dirty="0">
-                        <a:latin typeface="Space Grotesk" charset="0"/>
-                        <a:ea typeface="Space Grotesk" charset="0"/>
-                        <a:cs typeface="Space Grotesk" charset="0"/>
-                      </a:endParaRPr>
-                    </a:p>
-                  </a:txBody>
-                  <a:tcPr marL="63500" marR="63500" marT="25400" marB="25400" anchor="ctr">
-                    <a:lnL w="6350" cap="flat" cmpd="sng" algn="ctr">
-                      <a:solidFill>
-                        <a:srgbClr val="E4DED4"/>
-                      </a:solidFill>
-                      <a:prstDash val="solid"/>
-                      <a:round/>
-                      <a:headEnd type="none" w="med" len="med"/>
-                      <a:tailEnd type="none" w="med" len="med"/>
-                    </a:lnL>
-                    <a:lnR w="6350" cap="flat" cmpd="sng" algn="ctr">
-                      <a:solidFill>
-                        <a:srgbClr val="E4DED4"/>
-                      </a:solidFill>
-                      <a:prstDash val="solid"/>
-                      <a:round/>
-                      <a:headEnd type="none" w="med" len="med"/>
-                      <a:tailEnd type="none" w="med" len="med"/>
-                    </a:lnR>
-                    <a:lnT w="6350" cap="flat" cmpd="sng" algn="ctr">
-                      <a:solidFill>
-                        <a:srgbClr val="E4DED4"/>
-                      </a:solidFill>
-                      <a:prstDash val="solid"/>
-                      <a:round/>
-                      <a:headEnd type="none" w="med" len="med"/>
-                      <a:tailEnd type="none" w="med" len="med"/>
-                    </a:lnT>
-                    <a:lnB w="6350" cap="flat" cmpd="sng" algn="ctr">
-                      <a:solidFill>
-                        <a:srgbClr val="E4DED4"/>
-                      </a:solidFill>
-                      <a:prstDash val="solid"/>
-                      <a:round/>
-                      <a:headEnd type="none" w="med" len="med"/>
-                      <a:tailEnd type="none" w="med" len="med"/>
-                    </a:lnB>
-                    <a:solidFill>
-                      <a:srgbClr val="FFFFFF"/>
-                    </a:solidFill>
-                  </a:tcPr>
-                </a:tc>
-                <a:tc>
-                  <a:txBody>
-                    <a:bodyPr/>
-                    <a:lstStyle/>
-                    <a:p>
-                      <a:pPr algn="ctr" indent="0" marL="0">
-                        <a:buNone/>
-                      </a:pPr>
-                      <a:r>
-                        <a:rPr lang="en-US" sz="800" b="1" dirty="0">
-                          <a:solidFill>
-                            <a:srgbClr val="C1121F"/>
-                          </a:solidFill>
-                          <a:latin typeface="IBM Plex Mono" pitchFamily="34" charset="0"/>
-                          <a:ea typeface="IBM Plex Mono" pitchFamily="34" charset="-122"/>
-                          <a:cs typeface="IBM Plex Mono" pitchFamily="34" charset="-120"/>
-                        </a:rPr>
-                        <a:t>10.5%</a:t>
-                      </a:r>
-                      <a:endParaRPr lang="en-US" sz="800" dirty="0">
-                        <a:latin typeface="IBM Plex Mono" charset="0"/>
-                        <a:ea typeface="IBM Plex Mono" charset="0"/>
-                        <a:cs typeface="IBM Plex Mono" charset="0"/>
-                      </a:endParaRPr>
-                    </a:p>
-                  </a:txBody>
-                  <a:tcPr marL="63500" marR="63500" marT="25400" marB="25400" anchor="ctr">
-                    <a:lnL w="6350" cap="flat" cmpd="sng" algn="ctr">
-                      <a:solidFill>
-                        <a:srgbClr val="E4DED4"/>
-                      </a:solidFill>
-                      <a:prstDash val="solid"/>
-                      <a:round/>
-                      <a:headEnd type="none" w="med" len="med"/>
-                      <a:tailEnd type="none" w="med" len="med"/>
-                    </a:lnL>
-                    <a:lnR w="6350" cap="flat" cmpd="sng" algn="ctr">
-                      <a:solidFill>
-                        <a:srgbClr val="E4DED4"/>
-                      </a:solidFill>
-                      <a:prstDash val="solid"/>
-                      <a:round/>
-                      <a:headEnd type="none" w="med" len="med"/>
-                      <a:tailEnd type="none" w="med" len="med"/>
-                    </a:lnR>
-                    <a:lnT w="6350" cap="flat" cmpd="sng" algn="ctr">
-                      <a:solidFill>
-                        <a:srgbClr val="E4DED4"/>
-                      </a:solidFill>
-                      <a:prstDash val="solid"/>
-                      <a:round/>
-                      <a:headEnd type="none" w="med" len="med"/>
-                      <a:tailEnd type="none" w="med" len="med"/>
-                    </a:lnT>
-                    <a:lnB w="6350" cap="flat" cmpd="sng" algn="ctr">
-                      <a:solidFill>
-                        <a:srgbClr val="E4DED4"/>
-                      </a:solidFill>
-                      <a:prstDash val="solid"/>
-                      <a:round/>
-                      <a:headEnd type="none" w="med" len="med"/>
-                      <a:tailEnd type="none" w="med" len="med"/>
-                    </a:lnB>
-                    <a:solidFill>
-                      <a:srgbClr val="FFFFFF"/>
-                    </a:solidFill>
-                  </a:tcPr>
-                </a:tc>
-              </a:tr>
-              <a:tr h="402336">
-                <a:tc>
-                  <a:txBody>
-                    <a:bodyPr/>
-                    <a:lstStyle/>
-                    <a:p>
-                      <a:pPr indent="0" marL="0">
-                        <a:buNone/>
-                      </a:pPr>
-                      <a:r>
-                        <a:rPr lang="en-US" sz="950" dirty="0">
-                          <a:solidFill>
-                            <a:srgbClr val="1B1714"/>
-                          </a:solidFill>
-                          <a:latin typeface="IBM Plex Sans KR" pitchFamily="34" charset="0"/>
-                          <a:ea typeface="IBM Plex Sans KR" pitchFamily="34" charset="-122"/>
-                          <a:cs typeface="IBM Plex Sans KR" pitchFamily="34" charset="-120"/>
-                        </a:rPr>
-                        <a:t>② CoC 해제 → 희석 30%</a:t>
-                      </a:r>
-                      <a:endParaRPr lang="en-US" sz="950" dirty="0">
-                        <a:latin typeface="IBM Plex Sans KR" charset="0"/>
-                        <a:ea typeface="IBM Plex Sans KR" charset="0"/>
-                        <a:cs typeface="IBM Plex Sans KR" charset="0"/>
-                      </a:endParaRPr>
-                    </a:p>
-                  </a:txBody>
-                  <a:tcPr marL="63500" marR="63500" marT="25400" marB="25400" anchor="ctr">
-                    <a:lnL w="6350" cap="flat" cmpd="sng" algn="ctr">
-                      <a:solidFill>
-                        <a:srgbClr val="E4DED4"/>
-                      </a:solidFill>
-                      <a:prstDash val="solid"/>
-                      <a:round/>
-                      <a:headEnd type="none" w="med" len="med"/>
-                      <a:tailEnd type="none" w="med" len="med"/>
-                    </a:lnL>
-                    <a:lnR w="6350" cap="flat" cmpd="sng" algn="ctr">
-                      <a:solidFill>
-                        <a:srgbClr val="E4DED4"/>
-                      </a:solidFill>
-                      <a:prstDash val="solid"/>
-                      <a:round/>
-                      <a:headEnd type="none" w="med" len="med"/>
-                      <a:tailEnd type="none" w="med" len="med"/>
-                    </a:lnR>
-                    <a:lnT w="6350" cap="flat" cmpd="sng" algn="ctr">
-                      <a:solidFill>
-                        <a:srgbClr val="E4DED4"/>
-                      </a:solidFill>
-                      <a:prstDash val="solid"/>
-                      <a:round/>
-                      <a:headEnd type="none" w="med" len="med"/>
-                      <a:tailEnd type="none" w="med" len="med"/>
-                    </a:lnT>
-                    <a:lnB w="6350" cap="flat" cmpd="sng" algn="ctr">
-                      <a:solidFill>
-                        <a:srgbClr val="E4DED4"/>
-                      </a:solidFill>
-                      <a:prstDash val="solid"/>
-                      <a:round/>
-                      <a:headEnd type="none" w="med" len="med"/>
-                      <a:tailEnd type="none" w="med" len="med"/>
-                    </a:lnB>
-                    <a:solidFill>
-                      <a:srgbClr val="FFFFFF"/>
-                    </a:solidFill>
-                  </a:tcPr>
-                </a:tc>
-                <a:tc>
-                  <a:txBody>
-                    <a:bodyPr/>
-                    <a:lstStyle/>
-                    <a:p>
-                      <a:pPr algn="ctr" indent="0" marL="0">
-                        <a:buNone/>
-                      </a:pPr>
-                      <a:r>
-                        <a:rPr lang="en-US" sz="950" dirty="0">
-                          <a:solidFill>
-                            <a:srgbClr val="1B1714"/>
-                          </a:solidFill>
-                          <a:latin typeface="IBM Plex Mono" pitchFamily="34" charset="0"/>
-                          <a:ea typeface="IBM Plex Mono" pitchFamily="34" charset="-122"/>
-                          <a:cs typeface="IBM Plex Mono" pitchFamily="34" charset="-120"/>
-                        </a:rPr>
-                        <a:t>10%</a:t>
-                      </a:r>
-                      <a:endParaRPr lang="en-US" sz="950" dirty="0">
-                        <a:latin typeface="IBM Plex Mono" charset="0"/>
-                        <a:ea typeface="IBM Plex Mono" charset="0"/>
-                        <a:cs typeface="IBM Plex Mono" charset="0"/>
-                      </a:endParaRPr>
-                    </a:p>
-                  </a:txBody>
-                  <a:tcPr marL="63500" marR="63500" marT="25400" marB="25400" anchor="ctr">
-                    <a:lnL w="6350" cap="flat" cmpd="sng" algn="ctr">
-                      <a:solidFill>
-                        <a:srgbClr val="E4DED4"/>
-                      </a:solidFill>
-                      <a:prstDash val="solid"/>
-                      <a:round/>
-                      <a:headEnd type="none" w="med" len="med"/>
-                      <a:tailEnd type="none" w="med" len="med"/>
-                    </a:lnL>
-                    <a:lnR w="6350" cap="flat" cmpd="sng" algn="ctr">
-                      <a:solidFill>
-                        <a:srgbClr val="E4DED4"/>
-                      </a:solidFill>
-                      <a:prstDash val="solid"/>
-                      <a:round/>
-                      <a:headEnd type="none" w="med" len="med"/>
-                      <a:tailEnd type="none" w="med" len="med"/>
-                    </a:lnR>
-                    <a:lnT w="6350" cap="flat" cmpd="sng" algn="ctr">
-                      <a:solidFill>
-                        <a:srgbClr val="E4DED4"/>
-                      </a:solidFill>
-                      <a:prstDash val="solid"/>
-                      <a:round/>
-                      <a:headEnd type="none" w="med" len="med"/>
-                      <a:tailEnd type="none" w="med" len="med"/>
-                    </a:lnT>
-                    <a:lnB w="6350" cap="flat" cmpd="sng" algn="ctr">
-                      <a:solidFill>
-                        <a:srgbClr val="E4DED4"/>
-                      </a:solidFill>
-                      <a:prstDash val="solid"/>
-                      <a:round/>
-                      <a:headEnd type="none" w="med" len="med"/>
-                      <a:tailEnd type="none" w="med" len="med"/>
-                    </a:lnB>
-                    <a:solidFill>
-                      <a:srgbClr val="FFFFFF"/>
-                    </a:solidFill>
-                  </a:tcPr>
-                </a:tc>
-                <a:tc>
-                  <a:txBody>
-                    <a:bodyPr/>
-                    <a:lstStyle/>
-                    <a:p>
-                      <a:pPr algn="ctr" indent="0" marL="0">
-                        <a:buNone/>
-                      </a:pPr>
-                      <a:r>
-                        <a:rPr lang="en-US" sz="950" dirty="0">
-                          <a:solidFill>
-                            <a:srgbClr val="1B1714"/>
-                          </a:solidFill>
-                          <a:latin typeface="IBM Plex Mono" pitchFamily="34" charset="0"/>
-                          <a:ea typeface="IBM Plex Mono" pitchFamily="34" charset="-122"/>
-                          <a:cs typeface="IBM Plex Mono" pitchFamily="34" charset="-120"/>
-                        </a:rPr>
-                        <a:t>30%</a:t>
-                      </a:r>
-                      <a:endParaRPr lang="en-US" sz="950" dirty="0">
-                        <a:latin typeface="IBM Plex Mono" charset="0"/>
-                        <a:ea typeface="IBM Plex Mono" charset="0"/>
-                        <a:cs typeface="IBM Plex Mono" charset="0"/>
-                      </a:endParaRPr>
-                    </a:p>
-                  </a:txBody>
-                  <a:tcPr marL="63500" marR="63500" marT="25400" marB="25400" anchor="ctr">
-                    <a:lnL w="6350" cap="flat" cmpd="sng" algn="ctr">
-                      <a:solidFill>
-                        <a:srgbClr val="E4DED4"/>
-                      </a:solidFill>
-                      <a:prstDash val="solid"/>
-                      <a:round/>
-                      <a:headEnd type="none" w="med" len="med"/>
-                      <a:tailEnd type="none" w="med" len="med"/>
-                    </a:lnL>
-                    <a:lnR w="6350" cap="flat" cmpd="sng" algn="ctr">
-                      <a:solidFill>
-                        <a:srgbClr val="E4DED4"/>
-                      </a:solidFill>
-                      <a:prstDash val="solid"/>
-                      <a:round/>
-                      <a:headEnd type="none" w="med" len="med"/>
-                      <a:tailEnd type="none" w="med" len="med"/>
-                    </a:lnR>
-                    <a:lnT w="6350" cap="flat" cmpd="sng" algn="ctr">
-                      <a:solidFill>
-                        <a:srgbClr val="E4DED4"/>
-                      </a:solidFill>
-                      <a:prstDash val="solid"/>
-                      <a:round/>
-                      <a:headEnd type="none" w="med" len="med"/>
-                      <a:tailEnd type="none" w="med" len="med"/>
-                    </a:lnT>
-                    <a:lnB w="6350" cap="flat" cmpd="sng" algn="ctr">
-                      <a:solidFill>
-                        <a:srgbClr val="E4DED4"/>
-                      </a:solidFill>
-                      <a:prstDash val="solid"/>
-                      <a:round/>
-                      <a:headEnd type="none" w="med" len="med"/>
-                      <a:tailEnd type="none" w="med" len="med"/>
-                    </a:lnB>
-                    <a:solidFill>
-                      <a:srgbClr val="FFFFFF"/>
-                    </a:solidFill>
-                  </a:tcPr>
-                </a:tc>
-                <a:tc>
-                  <a:txBody>
-                    <a:bodyPr/>
-                    <a:lstStyle/>
-                    <a:p>
-                      <a:pPr algn="ctr" indent="0" marL="0">
-                        <a:buNone/>
-                      </a:pPr>
-                      <a:r>
-                        <a:rPr lang="en-US" sz="950" dirty="0">
-                          <a:solidFill>
-                            <a:srgbClr val="1B1714"/>
-                          </a:solidFill>
-                          <a:latin typeface="IBM Plex Mono" pitchFamily="34" charset="0"/>
-                          <a:ea typeface="IBM Plex Mono" pitchFamily="34" charset="-122"/>
-                          <a:cs typeface="IBM Plex Mono" pitchFamily="34" charset="-120"/>
-                        </a:rPr>
-                        <a:t>$7.8bn</a:t>
-                      </a:r>
-                      <a:endParaRPr lang="en-US" sz="950" dirty="0">
-                        <a:latin typeface="IBM Plex Mono" charset="0"/>
-                        <a:ea typeface="IBM Plex Mono" charset="0"/>
-                        <a:cs typeface="IBM Plex Mono" charset="0"/>
-                      </a:endParaRPr>
-                    </a:p>
-                  </a:txBody>
-                  <a:tcPr marL="63500" marR="63500" marT="25400" marB="25400" anchor="ctr">
-                    <a:lnL w="6350" cap="flat" cmpd="sng" algn="ctr">
-                      <a:solidFill>
-                        <a:srgbClr val="E4DED4"/>
-                      </a:solidFill>
-                      <a:prstDash val="solid"/>
-                      <a:round/>
-                      <a:headEnd type="none" w="med" len="med"/>
-                      <a:tailEnd type="none" w="med" len="med"/>
-                    </a:lnL>
-                    <a:lnR w="6350" cap="flat" cmpd="sng" algn="ctr">
-                      <a:solidFill>
-                        <a:srgbClr val="E4DED4"/>
-                      </a:solidFill>
-                      <a:prstDash val="solid"/>
-                      <a:round/>
-                      <a:headEnd type="none" w="med" len="med"/>
-                      <a:tailEnd type="none" w="med" len="med"/>
-                    </a:lnR>
-                    <a:lnT w="6350" cap="flat" cmpd="sng" algn="ctr">
-                      <a:solidFill>
-                        <a:srgbClr val="E4DED4"/>
-                      </a:solidFill>
-                      <a:prstDash val="solid"/>
-                      <a:round/>
-                      <a:headEnd type="none" w="med" len="med"/>
-                      <a:tailEnd type="none" w="med" len="med"/>
-                    </a:lnT>
-                    <a:lnB w="6350" cap="flat" cmpd="sng" algn="ctr">
-                      <a:solidFill>
-                        <a:srgbClr val="E4DED4"/>
-                      </a:solidFill>
-                      <a:prstDash val="solid"/>
-                      <a:round/>
-                      <a:headEnd type="none" w="med" len="med"/>
-                      <a:tailEnd type="none" w="med" len="med"/>
-                    </a:lnB>
-                    <a:solidFill>
-                      <a:srgbClr val="FFFFFF"/>
-                    </a:solidFill>
-                  </a:tcPr>
-                </a:tc>
-                <a:tc>
-                  <a:txBody>
-                    <a:bodyPr/>
-                    <a:lstStyle/>
-                    <a:p>
-                      <a:pPr algn="ctr" indent="0" marL="0">
-                        <a:buNone/>
-                      </a:pPr>
-                      <a:r>
-                        <a:rPr lang="en-US" sz="1200" b="1" dirty="0">
-                          <a:solidFill>
-                            <a:srgbClr val="C1121F"/>
-                          </a:solidFill>
-                          <a:latin typeface="Space Grotesk" pitchFamily="34" charset="0"/>
-                          <a:ea typeface="Space Grotesk" pitchFamily="34" charset="-122"/>
-                          <a:cs typeface="Space Grotesk" pitchFamily="34" charset="-120"/>
-                        </a:rPr>
-                        <a:t>15.1x</a:t>
-                      </a:r>
-                      <a:endParaRPr lang="en-US" sz="1200" dirty="0">
-                        <a:latin typeface="Space Grotesk" charset="0"/>
-                        <a:ea typeface="Space Grotesk" charset="0"/>
-                        <a:cs typeface="Space Grotesk" charset="0"/>
-                      </a:endParaRPr>
-                    </a:p>
-                  </a:txBody>
-                  <a:tcPr marL="63500" marR="63500" marT="25400" marB="25400" anchor="ctr">
-                    <a:lnL w="6350" cap="flat" cmpd="sng" algn="ctr">
-                      <a:solidFill>
-                        <a:srgbClr val="E4DED4"/>
-                      </a:solidFill>
-                      <a:prstDash val="solid"/>
-                      <a:round/>
-                      <a:headEnd type="none" w="med" len="med"/>
-                      <a:tailEnd type="none" w="med" len="med"/>
-                    </a:lnL>
-                    <a:lnR w="6350" cap="flat" cmpd="sng" algn="ctr">
-                      <a:solidFill>
-                        <a:srgbClr val="E4DED4"/>
-                      </a:solidFill>
-                      <a:prstDash val="solid"/>
-                      <a:round/>
-                      <a:headEnd type="none" w="med" len="med"/>
-                      <a:tailEnd type="none" w="med" len="med"/>
-                    </a:lnR>
-                    <a:lnT w="6350" cap="flat" cmpd="sng" algn="ctr">
-                      <a:solidFill>
-                        <a:srgbClr val="E4DED4"/>
-                      </a:solidFill>
-                      <a:prstDash val="solid"/>
-                      <a:round/>
-                      <a:headEnd type="none" w="med" len="med"/>
-                      <a:tailEnd type="none" w="med" len="med"/>
-                    </a:lnT>
-                    <a:lnB w="6350" cap="flat" cmpd="sng" algn="ctr">
-                      <a:solidFill>
-                        <a:srgbClr val="E4DED4"/>
-                      </a:solidFill>
-                      <a:prstDash val="solid"/>
-                      <a:round/>
-                      <a:headEnd type="none" w="med" len="med"/>
-                      <a:tailEnd type="none" w="med" len="med"/>
-                    </a:lnB>
-                    <a:solidFill>
-                      <a:srgbClr val="FFFFFF"/>
-                    </a:solidFill>
-                  </a:tcPr>
-                </a:tc>
-                <a:tc>
-                  <a:txBody>
-                    <a:bodyPr/>
-                    <a:lstStyle/>
-                    <a:p>
-                      <a:pPr algn="ctr" indent="0" marL="0">
-                        <a:buNone/>
-                      </a:pPr>
-                      <a:r>
-                        <a:rPr lang="en-US" sz="800" b="1" dirty="0">
-                          <a:solidFill>
-                            <a:srgbClr val="C1121F"/>
-                          </a:solidFill>
-                          <a:latin typeface="IBM Plex Mono" pitchFamily="34" charset="0"/>
-                          <a:ea typeface="IBM Plex Mono" pitchFamily="34" charset="-122"/>
-                          <a:cs typeface="IBM Plex Mono" pitchFamily="34" charset="-120"/>
-                        </a:rPr>
-                        <a:t>10.5%</a:t>
-                      </a:r>
-                      <a:endParaRPr lang="en-US" sz="800" dirty="0">
-                        <a:latin typeface="IBM Plex Mono" charset="0"/>
-                        <a:ea typeface="IBM Plex Mono" charset="0"/>
-                        <a:cs typeface="IBM Plex Mono" charset="0"/>
-                      </a:endParaRPr>
-                    </a:p>
-                  </a:txBody>
-                  <a:tcPr marL="63500" marR="63500" marT="25400" marB="25400" anchor="ctr">
-                    <a:lnL w="6350" cap="flat" cmpd="sng" algn="ctr">
-                      <a:solidFill>
-                        <a:srgbClr val="E4DED4"/>
-                      </a:solidFill>
-                      <a:prstDash val="solid"/>
-                      <a:round/>
-                      <a:headEnd type="none" w="med" len="med"/>
-                      <a:tailEnd type="none" w="med" len="med"/>
-                    </a:lnL>
-                    <a:lnR w="6350" cap="flat" cmpd="sng" algn="ctr">
-                      <a:solidFill>
-                        <a:srgbClr val="E4DED4"/>
-                      </a:solidFill>
-                      <a:prstDash val="solid"/>
-                      <a:round/>
-                      <a:headEnd type="none" w="med" len="med"/>
-                      <a:tailEnd type="none" w="med" len="med"/>
-                    </a:lnR>
-                    <a:lnT w="6350" cap="flat" cmpd="sng" algn="ctr">
-                      <a:solidFill>
-                        <a:srgbClr val="E4DED4"/>
-                      </a:solidFill>
-                      <a:prstDash val="solid"/>
-                      <a:round/>
-                      <a:headEnd type="none" w="med" len="med"/>
-                      <a:tailEnd type="none" w="med" len="med"/>
-                    </a:lnT>
-                    <a:lnB w="6350" cap="flat" cmpd="sng" algn="ctr">
-                      <a:solidFill>
-                        <a:srgbClr val="E4DED4"/>
-                      </a:solidFill>
-                      <a:prstDash val="solid"/>
-                      <a:round/>
-                      <a:headEnd type="none" w="med" len="med"/>
-                      <a:tailEnd type="none" w="med" len="med"/>
-                    </a:lnB>
-                    <a:solidFill>
-                      <a:srgbClr val="FFFFFF"/>
-                    </a:solidFill>
-                  </a:tcPr>
-                </a:tc>
-              </a:tr>
-              <a:tr h="402336">
-                <a:tc>
-                  <a:txBody>
-                    <a:bodyPr/>
-                    <a:lstStyle/>
-                    <a:p>
-                      <a:pPr indent="0" marL="0">
-                        <a:buNone/>
-                      </a:pPr>
-                      <a:r>
-                        <a:rPr lang="en-US" sz="950" dirty="0">
-                          <a:solidFill>
-                            <a:srgbClr val="1B1714"/>
-                          </a:solidFill>
-                          <a:latin typeface="IBM Plex Sans KR" pitchFamily="34" charset="0"/>
-                          <a:ea typeface="IBM Plex Sans KR" pitchFamily="34" charset="-122"/>
-                          <a:cs typeface="IBM Plex Sans KR" pitchFamily="34" charset="-120"/>
-                        </a:rPr>
-                        <a:t>③ CoC 완화 → 희석 49%</a:t>
-                      </a:r>
-                      <a:endParaRPr lang="en-US" sz="950" dirty="0">
-                        <a:latin typeface="IBM Plex Sans KR" charset="0"/>
-                        <a:ea typeface="IBM Plex Sans KR" charset="0"/>
-                        <a:cs typeface="IBM Plex Sans KR" charset="0"/>
-                      </a:endParaRPr>
-                    </a:p>
-                  </a:txBody>
-                  <a:tcPr marL="63500" marR="63500" marT="25400" marB="25400" anchor="ctr">
-                    <a:lnL w="6350" cap="flat" cmpd="sng" algn="ctr">
-                      <a:solidFill>
-                        <a:srgbClr val="E4DED4"/>
-                      </a:solidFill>
-                      <a:prstDash val="solid"/>
-                      <a:round/>
-                      <a:headEnd type="none" w="med" len="med"/>
-                      <a:tailEnd type="none" w="med" len="med"/>
-                    </a:lnL>
-                    <a:lnR w="6350" cap="flat" cmpd="sng" algn="ctr">
-                      <a:solidFill>
-                        <a:srgbClr val="E4DED4"/>
-                      </a:solidFill>
-                      <a:prstDash val="solid"/>
-                      <a:round/>
-                      <a:headEnd type="none" w="med" len="med"/>
-                      <a:tailEnd type="none" w="med" len="med"/>
-                    </a:lnR>
-                    <a:lnT w="6350" cap="flat" cmpd="sng" algn="ctr">
-                      <a:solidFill>
-                        <a:srgbClr val="E4DED4"/>
-                      </a:solidFill>
-                      <a:prstDash val="solid"/>
-                      <a:round/>
-                      <a:headEnd type="none" w="med" len="med"/>
-                      <a:tailEnd type="none" w="med" len="med"/>
-                    </a:lnT>
-                    <a:lnB w="6350" cap="flat" cmpd="sng" algn="ctr">
-                      <a:solidFill>
-                        <a:srgbClr val="E4DED4"/>
-                      </a:solidFill>
-                      <a:prstDash val="solid"/>
-                      <a:round/>
-                      <a:headEnd type="none" w="med" len="med"/>
-                      <a:tailEnd type="none" w="med" len="med"/>
-                    </a:lnB>
-                    <a:solidFill>
-                      <a:srgbClr val="FFFFFF"/>
-                    </a:solidFill>
-                  </a:tcPr>
-                </a:tc>
-                <a:tc>
-                  <a:txBody>
-                    <a:bodyPr/>
-                    <a:lstStyle/>
-                    <a:p>
-                      <a:pPr algn="ctr" indent="0" marL="0">
-                        <a:buNone/>
-                      </a:pPr>
-                      <a:r>
-                        <a:rPr lang="en-US" sz="950" dirty="0">
-                          <a:solidFill>
-                            <a:srgbClr val="1B1714"/>
-                          </a:solidFill>
-                          <a:latin typeface="IBM Plex Mono" pitchFamily="34" charset="0"/>
-                          <a:ea typeface="IBM Plex Mono" pitchFamily="34" charset="-122"/>
-                          <a:cs typeface="IBM Plex Mono" pitchFamily="34" charset="-120"/>
-                        </a:rPr>
-                        <a:t>10%</a:t>
-                      </a:r>
-                      <a:endParaRPr lang="en-US" sz="950" dirty="0">
-                        <a:latin typeface="IBM Plex Mono" charset="0"/>
-                        <a:ea typeface="IBM Plex Mono" charset="0"/>
-                        <a:cs typeface="IBM Plex Mono" charset="0"/>
-                      </a:endParaRPr>
-                    </a:p>
-                  </a:txBody>
-                  <a:tcPr marL="63500" marR="63500" marT="25400" marB="25400" anchor="ctr">
-                    <a:lnL w="6350" cap="flat" cmpd="sng" algn="ctr">
-                      <a:solidFill>
-                        <a:srgbClr val="E4DED4"/>
-                      </a:solidFill>
-                      <a:prstDash val="solid"/>
-                      <a:round/>
-                      <a:headEnd type="none" w="med" len="med"/>
-                      <a:tailEnd type="none" w="med" len="med"/>
-                    </a:lnL>
-                    <a:lnR w="6350" cap="flat" cmpd="sng" algn="ctr">
-                      <a:solidFill>
-                        <a:srgbClr val="E4DED4"/>
-                      </a:solidFill>
-                      <a:prstDash val="solid"/>
-                      <a:round/>
-                      <a:headEnd type="none" w="med" len="med"/>
-                      <a:tailEnd type="none" w="med" len="med"/>
-                    </a:lnR>
-                    <a:lnT w="6350" cap="flat" cmpd="sng" algn="ctr">
-                      <a:solidFill>
-                        <a:srgbClr val="E4DED4"/>
-                      </a:solidFill>
-                      <a:prstDash val="solid"/>
-                      <a:round/>
-                      <a:headEnd type="none" w="med" len="med"/>
-                      <a:tailEnd type="none" w="med" len="med"/>
-                    </a:lnT>
-                    <a:lnB w="6350" cap="flat" cmpd="sng" algn="ctr">
-                      <a:solidFill>
-                        <a:srgbClr val="E4DED4"/>
-                      </a:solidFill>
-                      <a:prstDash val="solid"/>
-                      <a:round/>
-                      <a:headEnd type="none" w="med" len="med"/>
-                      <a:tailEnd type="none" w="med" len="med"/>
-                    </a:lnB>
-                    <a:solidFill>
-                      <a:srgbClr val="FFFFFF"/>
-                    </a:solidFill>
-                  </a:tcPr>
-                </a:tc>
-                <a:tc>
-                  <a:txBody>
-                    <a:bodyPr/>
-                    <a:lstStyle/>
-                    <a:p>
-                      <a:pPr algn="ctr" indent="0" marL="0">
-                        <a:buNone/>
-                      </a:pPr>
-                      <a:r>
-                        <a:rPr lang="en-US" sz="950" dirty="0">
-                          <a:solidFill>
-                            <a:srgbClr val="1B1714"/>
-                          </a:solidFill>
-                          <a:latin typeface="IBM Plex Mono" pitchFamily="34" charset="0"/>
-                          <a:ea typeface="IBM Plex Mono" pitchFamily="34" charset="-122"/>
-                          <a:cs typeface="IBM Plex Mono" pitchFamily="34" charset="-120"/>
-                        </a:rPr>
-                        <a:t>49%</a:t>
-                      </a:r>
-                      <a:endParaRPr lang="en-US" sz="950" dirty="0">
-                        <a:latin typeface="IBM Plex Mono" charset="0"/>
-                        <a:ea typeface="IBM Plex Mono" charset="0"/>
-                        <a:cs typeface="IBM Plex Mono" charset="0"/>
-                      </a:endParaRPr>
-                    </a:p>
-                  </a:txBody>
-                  <a:tcPr marL="63500" marR="63500" marT="25400" marB="25400" anchor="ctr">
-                    <a:lnL w="6350" cap="flat" cmpd="sng" algn="ctr">
-                      <a:solidFill>
-                        <a:srgbClr val="E4DED4"/>
-                      </a:solidFill>
-                      <a:prstDash val="solid"/>
-                      <a:round/>
-                      <a:headEnd type="none" w="med" len="med"/>
-                      <a:tailEnd type="none" w="med" len="med"/>
-                    </a:lnL>
-                    <a:lnR w="6350" cap="flat" cmpd="sng" algn="ctr">
-                      <a:solidFill>
-                        <a:srgbClr val="E4DED4"/>
-                      </a:solidFill>
-                      <a:prstDash val="solid"/>
-                      <a:round/>
-                      <a:headEnd type="none" w="med" len="med"/>
-                      <a:tailEnd type="none" w="med" len="med"/>
-                    </a:lnR>
-                    <a:lnT w="6350" cap="flat" cmpd="sng" algn="ctr">
-                      <a:solidFill>
-                        <a:srgbClr val="E4DED4"/>
-                      </a:solidFill>
-                      <a:prstDash val="solid"/>
-                      <a:round/>
-                      <a:headEnd type="none" w="med" len="med"/>
-                      <a:tailEnd type="none" w="med" len="med"/>
-                    </a:lnT>
-                    <a:lnB w="6350" cap="flat" cmpd="sng" algn="ctr">
-                      <a:solidFill>
-                        <a:srgbClr val="E4DED4"/>
-                      </a:solidFill>
-                      <a:prstDash val="solid"/>
-                      <a:round/>
-                      <a:headEnd type="none" w="med" len="med"/>
-                      <a:tailEnd type="none" w="med" len="med"/>
-                    </a:lnB>
-                    <a:solidFill>
-                      <a:srgbClr val="FFFFFF"/>
-                    </a:solidFill>
-                  </a:tcPr>
-                </a:tc>
-                <a:tc>
-                  <a:txBody>
-                    <a:bodyPr/>
-                    <a:lstStyle/>
-                    <a:p>
-                      <a:pPr algn="ctr" indent="0" marL="0">
-                        <a:buNone/>
-                      </a:pPr>
-                      <a:r>
-                        <a:rPr lang="en-US" sz="950" dirty="0">
-                          <a:solidFill>
-                            <a:srgbClr val="1B1714"/>
-                          </a:solidFill>
-                          <a:latin typeface="IBM Plex Mono" pitchFamily="34" charset="0"/>
-                          <a:ea typeface="IBM Plex Mono" pitchFamily="34" charset="-122"/>
-                          <a:cs typeface="IBM Plex Mono" pitchFamily="34" charset="-120"/>
-                        </a:rPr>
-                        <a:t>$7.3bn</a:t>
-                      </a:r>
-                      <a:endParaRPr lang="en-US" sz="950" dirty="0">
-                        <a:latin typeface="IBM Plex Mono" charset="0"/>
-                        <a:ea typeface="IBM Plex Mono" charset="0"/>
-                        <a:cs typeface="IBM Plex Mono" charset="0"/>
-                      </a:endParaRPr>
-                    </a:p>
-                  </a:txBody>
-                  <a:tcPr marL="63500" marR="63500" marT="25400" marB="25400" anchor="ctr">
-                    <a:lnL w="6350" cap="flat" cmpd="sng" algn="ctr">
-                      <a:solidFill>
-                        <a:srgbClr val="E4DED4"/>
-                      </a:solidFill>
-                      <a:prstDash val="solid"/>
-                      <a:round/>
-                      <a:headEnd type="none" w="med" len="med"/>
-                      <a:tailEnd type="none" w="med" len="med"/>
-                    </a:lnL>
-                    <a:lnR w="6350" cap="flat" cmpd="sng" algn="ctr">
-                      <a:solidFill>
-                        <a:srgbClr val="E4DED4"/>
-                      </a:solidFill>
-                      <a:prstDash val="solid"/>
-                      <a:round/>
-                      <a:headEnd type="none" w="med" len="med"/>
-                      <a:tailEnd type="none" w="med" len="med"/>
-                    </a:lnR>
-                    <a:lnT w="6350" cap="flat" cmpd="sng" algn="ctr">
-                      <a:solidFill>
-                        <a:srgbClr val="E4DED4"/>
-                      </a:solidFill>
-                      <a:prstDash val="solid"/>
-                      <a:round/>
-                      <a:headEnd type="none" w="med" len="med"/>
-                      <a:tailEnd type="none" w="med" len="med"/>
-                    </a:lnT>
-                    <a:lnB w="6350" cap="flat" cmpd="sng" algn="ctr">
-                      <a:solidFill>
-                        <a:srgbClr val="E4DED4"/>
-                      </a:solidFill>
-                      <a:prstDash val="solid"/>
-                      <a:round/>
-                      <a:headEnd type="none" w="med" len="med"/>
-                      <a:tailEnd type="none" w="med" len="med"/>
-                    </a:lnB>
-                    <a:solidFill>
-                      <a:srgbClr val="FFFFFF"/>
-                    </a:solidFill>
-                  </a:tcPr>
-                </a:tc>
-                <a:tc>
-                  <a:txBody>
-                    <a:bodyPr/>
-                    <a:lstStyle/>
-                    <a:p>
-                      <a:pPr algn="ctr" indent="0" marL="0">
-                        <a:buNone/>
-                      </a:pPr>
-                      <a:r>
-                        <a:rPr lang="en-US" sz="1200" b="1" dirty="0">
-                          <a:solidFill>
-                            <a:srgbClr val="C1121F"/>
-                          </a:solidFill>
-                          <a:latin typeface="Space Grotesk" pitchFamily="34" charset="0"/>
-                          <a:ea typeface="Space Grotesk" pitchFamily="34" charset="-122"/>
-                          <a:cs typeface="Space Grotesk" pitchFamily="34" charset="-120"/>
-                        </a:rPr>
-                        <a:t>14.0x</a:t>
-                      </a:r>
-                      <a:endParaRPr lang="en-US" sz="1200" dirty="0">
-                        <a:latin typeface="Space Grotesk" charset="0"/>
-                        <a:ea typeface="Space Grotesk" charset="0"/>
-                        <a:cs typeface="Space Grotesk" charset="0"/>
-                      </a:endParaRPr>
-                    </a:p>
-                  </a:txBody>
-                  <a:tcPr marL="63500" marR="63500" marT="25400" marB="25400" anchor="ctr">
-                    <a:lnL w="6350" cap="flat" cmpd="sng" algn="ctr">
-                      <a:solidFill>
-                        <a:srgbClr val="E4DED4"/>
-                      </a:solidFill>
-                      <a:prstDash val="solid"/>
-                      <a:round/>
-                      <a:headEnd type="none" w="med" len="med"/>
-                      <a:tailEnd type="none" w="med" len="med"/>
-                    </a:lnL>
-                    <a:lnR w="6350" cap="flat" cmpd="sng" algn="ctr">
-                      <a:solidFill>
-                        <a:srgbClr val="E4DED4"/>
-                      </a:solidFill>
-                      <a:prstDash val="solid"/>
-                      <a:round/>
-                      <a:headEnd type="none" w="med" len="med"/>
-                      <a:tailEnd type="none" w="med" len="med"/>
-                    </a:lnR>
-                    <a:lnT w="6350" cap="flat" cmpd="sng" algn="ctr">
-                      <a:solidFill>
-                        <a:srgbClr val="E4DED4"/>
-                      </a:solidFill>
-                      <a:prstDash val="solid"/>
-                      <a:round/>
-                      <a:headEnd type="none" w="med" len="med"/>
-                      <a:tailEnd type="none" w="med" len="med"/>
-                    </a:lnT>
-                    <a:lnB w="6350" cap="flat" cmpd="sng" algn="ctr">
-                      <a:solidFill>
-                        <a:srgbClr val="E4DED4"/>
-                      </a:solidFill>
-                      <a:prstDash val="solid"/>
-                      <a:round/>
-                      <a:headEnd type="none" w="med" len="med"/>
-                      <a:tailEnd type="none" w="med" len="med"/>
-                    </a:lnB>
-                    <a:solidFill>
-                      <a:srgbClr val="FFFFFF"/>
-                    </a:solidFill>
-                  </a:tcPr>
-                </a:tc>
-                <a:tc>
-                  <a:txBody>
-                    <a:bodyPr/>
-                    <a:lstStyle/>
-                    <a:p>
-                      <a:pPr algn="ctr" indent="0" marL="0">
-                        <a:buNone/>
-                      </a:pPr>
-                      <a:r>
-                        <a:rPr lang="en-US" sz="800" b="1" dirty="0">
-                          <a:solidFill>
-                            <a:srgbClr val="C1121F"/>
-                          </a:solidFill>
-                          <a:latin typeface="IBM Plex Mono" pitchFamily="34" charset="0"/>
-                          <a:ea typeface="IBM Plex Mono" pitchFamily="34" charset="-122"/>
-                          <a:cs typeface="IBM Plex Mono" pitchFamily="34" charset="-120"/>
-                        </a:rPr>
-                        <a:t>9.7%</a:t>
-                      </a:r>
-                      <a:endParaRPr lang="en-US" sz="800" dirty="0">
-                        <a:latin typeface="IBM Plex Mono" charset="0"/>
-                        <a:ea typeface="IBM Plex Mono" charset="0"/>
-                        <a:cs typeface="IBM Plex Mono" charset="0"/>
-                      </a:endParaRPr>
-                    </a:p>
-                  </a:txBody>
-                  <a:tcPr marL="63500" marR="63500" marT="25400" marB="25400" anchor="ctr">
-                    <a:lnL w="6350" cap="flat" cmpd="sng" algn="ctr">
-                      <a:solidFill>
-                        <a:srgbClr val="E4DED4"/>
-                      </a:solidFill>
-                      <a:prstDash val="solid"/>
-                      <a:round/>
-                      <a:headEnd type="none" w="med" len="med"/>
-                      <a:tailEnd type="none" w="med" len="med"/>
-                    </a:lnL>
-                    <a:lnR w="6350" cap="flat" cmpd="sng" algn="ctr">
-                      <a:solidFill>
-                        <a:srgbClr val="E4DED4"/>
-                      </a:solidFill>
-                      <a:prstDash val="solid"/>
-                      <a:round/>
-                      <a:headEnd type="none" w="med" len="med"/>
-                      <a:tailEnd type="none" w="med" len="med"/>
-                    </a:lnR>
-                    <a:lnT w="6350" cap="flat" cmpd="sng" algn="ctr">
-                      <a:solidFill>
-                        <a:srgbClr val="E4DED4"/>
-                      </a:solidFill>
-                      <a:prstDash val="solid"/>
-                      <a:round/>
-                      <a:headEnd type="none" w="med" len="med"/>
-                      <a:tailEnd type="none" w="med" len="med"/>
-                    </a:lnT>
-                    <a:lnB w="6350" cap="flat" cmpd="sng" algn="ctr">
-                      <a:solidFill>
-                        <a:srgbClr val="E4DED4"/>
-                      </a:solidFill>
-                      <a:prstDash val="solid"/>
-                      <a:round/>
-                      <a:headEnd type="none" w="med" len="med"/>
-                      <a:tailEnd type="none" w="med" len="med"/>
-                    </a:lnB>
-                    <a:solidFill>
-                      <a:srgbClr val="FFFFFF"/>
-                    </a:solidFill>
-                  </a:tcPr>
-                </a:tc>
-              </a:tr>
-              <a:tr h="402336">
-                <a:tc>
-                  <a:txBody>
-                    <a:bodyPr/>
-                    <a:lstStyle/>
-                    <a:p>
-                      <a:pPr indent="0" marL="0">
-                        <a:buNone/>
-                      </a:pPr>
-                      <a:r>
-                        <a:rPr lang="en-US" sz="950" dirty="0">
-                          <a:solidFill>
-                            <a:srgbClr val="1B1714"/>
-                          </a:solidFill>
-                          <a:latin typeface="IBM Plex Sans KR" pitchFamily="34" charset="0"/>
-                          <a:ea typeface="IBM Plex Sans KR" pitchFamily="34" charset="-122"/>
-                          <a:cs typeface="IBM Plex Sans KR" pitchFamily="34" charset="-120"/>
-                        </a:rPr>
-                        <a:t>최대결합 (그랜트20+희석49)</a:t>
-                      </a:r>
-                      <a:endParaRPr lang="en-US" sz="950" dirty="0">
-                        <a:latin typeface="IBM Plex Sans KR" charset="0"/>
-                        <a:ea typeface="IBM Plex Sans KR" charset="0"/>
-                        <a:cs typeface="IBM Plex Sans KR" charset="0"/>
                       </a:endParaRPr>
                     </a:p>
                   </a:txBody>
@@ -10719,6 +9147,1578 @@
                           <a:ea typeface="IBM Plex Mono" pitchFamily="34" charset="-122"/>
                           <a:cs typeface="IBM Plex Mono" pitchFamily="34" charset="-120"/>
                         </a:rPr>
+                        <a:t>$8.5bn</a:t>
+                      </a:r>
+                      <a:endParaRPr lang="en-US" sz="950" dirty="0">
+                        <a:latin typeface="IBM Plex Mono" charset="0"/>
+                        <a:ea typeface="IBM Plex Mono" charset="0"/>
+                        <a:cs typeface="IBM Plex Mono" charset="0"/>
+                      </a:endParaRPr>
+                    </a:p>
+                  </a:txBody>
+                  <a:tcPr marL="63500" marR="63500" marT="25400" marB="25400" anchor="ctr">
+                    <a:lnL w="6350" cap="flat" cmpd="sng" algn="ctr">
+                      <a:solidFill>
+                        <a:srgbClr val="E4DED4"/>
+                      </a:solidFill>
+                      <a:prstDash val="solid"/>
+                      <a:round/>
+                      <a:headEnd type="none" w="med" len="med"/>
+                      <a:tailEnd type="none" w="med" len="med"/>
+                    </a:lnL>
+                    <a:lnR w="6350" cap="flat" cmpd="sng" algn="ctr">
+                      <a:solidFill>
+                        <a:srgbClr val="E4DED4"/>
+                      </a:solidFill>
+                      <a:prstDash val="solid"/>
+                      <a:round/>
+                      <a:headEnd type="none" w="med" len="med"/>
+                      <a:tailEnd type="none" w="med" len="med"/>
+                    </a:lnR>
+                    <a:lnT w="6350" cap="flat" cmpd="sng" algn="ctr">
+                      <a:solidFill>
+                        <a:srgbClr val="E4DED4"/>
+                      </a:solidFill>
+                      <a:prstDash val="solid"/>
+                      <a:round/>
+                      <a:headEnd type="none" w="med" len="med"/>
+                      <a:tailEnd type="none" w="med" len="med"/>
+                    </a:lnT>
+                    <a:lnB w="6350" cap="flat" cmpd="sng" algn="ctr">
+                      <a:solidFill>
+                        <a:srgbClr val="E4DED4"/>
+                      </a:solidFill>
+                      <a:prstDash val="solid"/>
+                      <a:round/>
+                      <a:headEnd type="none" w="med" len="med"/>
+                      <a:tailEnd type="none" w="med" len="med"/>
+                    </a:lnB>
+                    <a:solidFill>
+                      <a:srgbClr val="E8F3EC"/>
+                    </a:solidFill>
+                  </a:tcPr>
+                </a:tc>
+                <a:tc>
+                  <a:txBody>
+                    <a:bodyPr/>
+                    <a:lstStyle/>
+                    <a:p>
+                      <a:pPr algn="ctr" indent="0" marL="0">
+                        <a:buNone/>
+                      </a:pPr>
+                      <a:r>
+                        <a:rPr lang="en-US" sz="1200" b="1" dirty="0">
+                          <a:solidFill>
+                            <a:srgbClr val="1E7A4D"/>
+                          </a:solidFill>
+                          <a:latin typeface="Space Grotesk" pitchFamily="34" charset="0"/>
+                          <a:ea typeface="Space Grotesk" pitchFamily="34" charset="-122"/>
+                          <a:cs typeface="Space Grotesk" pitchFamily="34" charset="-120"/>
+                        </a:rPr>
+                        <a:t>11.4x</a:t>
+                      </a:r>
+                      <a:endParaRPr lang="en-US" sz="1200" dirty="0">
+                        <a:latin typeface="Space Grotesk" charset="0"/>
+                        <a:ea typeface="Space Grotesk" charset="0"/>
+                        <a:cs typeface="Space Grotesk" charset="0"/>
+                      </a:endParaRPr>
+                    </a:p>
+                  </a:txBody>
+                  <a:tcPr marL="63500" marR="63500" marT="25400" marB="25400" anchor="ctr">
+                    <a:lnL w="6350" cap="flat" cmpd="sng" algn="ctr">
+                      <a:solidFill>
+                        <a:srgbClr val="E4DED4"/>
+                      </a:solidFill>
+                      <a:prstDash val="solid"/>
+                      <a:round/>
+                      <a:headEnd type="none" w="med" len="med"/>
+                      <a:tailEnd type="none" w="med" len="med"/>
+                    </a:lnL>
+                    <a:lnR w="6350" cap="flat" cmpd="sng" algn="ctr">
+                      <a:solidFill>
+                        <a:srgbClr val="E4DED4"/>
+                      </a:solidFill>
+                      <a:prstDash val="solid"/>
+                      <a:round/>
+                      <a:headEnd type="none" w="med" len="med"/>
+                      <a:tailEnd type="none" w="med" len="med"/>
+                    </a:lnR>
+                    <a:lnT w="6350" cap="flat" cmpd="sng" algn="ctr">
+                      <a:solidFill>
+                        <a:srgbClr val="E4DED4"/>
+                      </a:solidFill>
+                      <a:prstDash val="solid"/>
+                      <a:round/>
+                      <a:headEnd type="none" w="med" len="med"/>
+                      <a:tailEnd type="none" w="med" len="med"/>
+                    </a:lnT>
+                    <a:lnB w="6350" cap="flat" cmpd="sng" algn="ctr">
+                      <a:solidFill>
+                        <a:srgbClr val="E4DED4"/>
+                      </a:solidFill>
+                      <a:prstDash val="solid"/>
+                      <a:round/>
+                      <a:headEnd type="none" w="med" len="med"/>
+                      <a:tailEnd type="none" w="med" len="med"/>
+                    </a:lnB>
+                    <a:solidFill>
+                      <a:srgbClr val="E8F3EC"/>
+                    </a:solidFill>
+                  </a:tcPr>
+                </a:tc>
+                <a:tc>
+                  <a:txBody>
+                    <a:bodyPr/>
+                    <a:lstStyle/>
+                    <a:p>
+                      <a:pPr algn="ctr" indent="0" marL="0">
+                        <a:buNone/>
+                      </a:pPr>
+                      <a:r>
+                        <a:rPr lang="en-US" sz="800" b="1" dirty="0">
+                          <a:solidFill>
+                            <a:srgbClr val="6F6960"/>
+                          </a:solidFill>
+                          <a:latin typeface="IBM Plex Mono" pitchFamily="34" charset="0"/>
+                          <a:ea typeface="IBM Plex Mono" pitchFamily="34" charset="-122"/>
+                          <a:cs typeface="IBM Plex Mono" pitchFamily="34" charset="-120"/>
+                        </a:rPr>
+                        <a:t>11.4%</a:t>
+                      </a:r>
+                      <a:endParaRPr lang="en-US" sz="800" dirty="0">
+                        <a:latin typeface="IBM Plex Mono" charset="0"/>
+                        <a:ea typeface="IBM Plex Mono" charset="0"/>
+                        <a:cs typeface="IBM Plex Mono" charset="0"/>
+                      </a:endParaRPr>
+                    </a:p>
+                  </a:txBody>
+                  <a:tcPr marL="63500" marR="63500" marT="25400" marB="25400" anchor="ctr">
+                    <a:lnL w="6350" cap="flat" cmpd="sng" algn="ctr">
+                      <a:solidFill>
+                        <a:srgbClr val="E4DED4"/>
+                      </a:solidFill>
+                      <a:prstDash val="solid"/>
+                      <a:round/>
+                      <a:headEnd type="none" w="med" len="med"/>
+                      <a:tailEnd type="none" w="med" len="med"/>
+                    </a:lnL>
+                    <a:lnR w="6350" cap="flat" cmpd="sng" algn="ctr">
+                      <a:solidFill>
+                        <a:srgbClr val="E4DED4"/>
+                      </a:solidFill>
+                      <a:prstDash val="solid"/>
+                      <a:round/>
+                      <a:headEnd type="none" w="med" len="med"/>
+                      <a:tailEnd type="none" w="med" len="med"/>
+                    </a:lnR>
+                    <a:lnT w="6350" cap="flat" cmpd="sng" algn="ctr">
+                      <a:solidFill>
+                        <a:srgbClr val="E4DED4"/>
+                      </a:solidFill>
+                      <a:prstDash val="solid"/>
+                      <a:round/>
+                      <a:headEnd type="none" w="med" len="med"/>
+                      <a:tailEnd type="none" w="med" len="med"/>
+                    </a:lnT>
+                    <a:lnB w="6350" cap="flat" cmpd="sng" algn="ctr">
+                      <a:solidFill>
+                        <a:srgbClr val="E4DED4"/>
+                      </a:solidFill>
+                      <a:prstDash val="solid"/>
+                      <a:round/>
+                      <a:headEnd type="none" w="med" len="med"/>
+                      <a:tailEnd type="none" w="med" len="med"/>
+                    </a:lnB>
+                    <a:solidFill>
+                      <a:srgbClr val="E8F3EC"/>
+                    </a:solidFill>
+                  </a:tcPr>
+                </a:tc>
+              </a:tr>
+              <a:tr h="402336">
+                <a:tc>
+                  <a:txBody>
+                    <a:bodyPr/>
+                    <a:lstStyle/>
+                    <a:p>
+                      <a:pPr indent="0" marL="0">
+                        <a:buNone/>
+                      </a:pPr>
+                      <a:r>
+                        <a:rPr lang="en-US" sz="950" dirty="0">
+                          <a:solidFill>
+                            <a:srgbClr val="1B1714"/>
+                          </a:solidFill>
+                          <a:latin typeface="IBM Plex Sans KR" pitchFamily="34" charset="0"/>
+                          <a:ea typeface="IBM Plex Sans KR" pitchFamily="34" charset="-122"/>
+                          <a:cs typeface="IBM Plex Sans KR" pitchFamily="34" charset="-120"/>
+                        </a:rPr>
+                        <a:t>① CoC 20% + 그랜트 20%</a:t>
+                      </a:r>
+                      <a:endParaRPr lang="en-US" sz="950" dirty="0">
+                        <a:latin typeface="IBM Plex Sans KR" charset="0"/>
+                        <a:ea typeface="IBM Plex Sans KR" charset="0"/>
+                        <a:cs typeface="IBM Plex Sans KR" charset="0"/>
+                      </a:endParaRPr>
+                    </a:p>
+                  </a:txBody>
+                  <a:tcPr marL="63500" marR="63500" marT="25400" marB="25400" anchor="ctr">
+                    <a:lnL w="6350" cap="flat" cmpd="sng" algn="ctr">
+                      <a:solidFill>
+                        <a:srgbClr val="E4DED4"/>
+                      </a:solidFill>
+                      <a:prstDash val="solid"/>
+                      <a:round/>
+                      <a:headEnd type="none" w="med" len="med"/>
+                      <a:tailEnd type="none" w="med" len="med"/>
+                    </a:lnL>
+                    <a:lnR w="6350" cap="flat" cmpd="sng" algn="ctr">
+                      <a:solidFill>
+                        <a:srgbClr val="E4DED4"/>
+                      </a:solidFill>
+                      <a:prstDash val="solid"/>
+                      <a:round/>
+                      <a:headEnd type="none" w="med" len="med"/>
+                      <a:tailEnd type="none" w="med" len="med"/>
+                    </a:lnR>
+                    <a:lnT w="6350" cap="flat" cmpd="sng" algn="ctr">
+                      <a:solidFill>
+                        <a:srgbClr val="E4DED4"/>
+                      </a:solidFill>
+                      <a:prstDash val="solid"/>
+                      <a:round/>
+                      <a:headEnd type="none" w="med" len="med"/>
+                      <a:tailEnd type="none" w="med" len="med"/>
+                    </a:lnT>
+                    <a:lnB w="6350" cap="flat" cmpd="sng" algn="ctr">
+                      <a:solidFill>
+                        <a:srgbClr val="E4DED4"/>
+                      </a:solidFill>
+                      <a:prstDash val="solid"/>
+                      <a:round/>
+                      <a:headEnd type="none" w="med" len="med"/>
+                      <a:tailEnd type="none" w="med" len="med"/>
+                    </a:lnB>
+                    <a:solidFill>
+                      <a:srgbClr val="E8F3EC"/>
+                    </a:solidFill>
+                  </a:tcPr>
+                </a:tc>
+                <a:tc>
+                  <a:txBody>
+                    <a:bodyPr/>
+                    <a:lstStyle/>
+                    <a:p>
+                      <a:pPr algn="ctr" indent="0" marL="0">
+                        <a:buNone/>
+                      </a:pPr>
+                      <a:r>
+                        <a:rPr lang="en-US" sz="950" dirty="0">
+                          <a:solidFill>
+                            <a:srgbClr val="1B1714"/>
+                          </a:solidFill>
+                          <a:latin typeface="IBM Plex Mono" pitchFamily="34" charset="0"/>
+                          <a:ea typeface="IBM Plex Mono" pitchFamily="34" charset="-122"/>
+                          <a:cs typeface="IBM Plex Mono" pitchFamily="34" charset="-120"/>
+                        </a:rPr>
+                        <a:t>20%</a:t>
+                      </a:r>
+                      <a:endParaRPr lang="en-US" sz="950" dirty="0">
+                        <a:latin typeface="IBM Plex Mono" charset="0"/>
+                        <a:ea typeface="IBM Plex Mono" charset="0"/>
+                        <a:cs typeface="IBM Plex Mono" charset="0"/>
+                      </a:endParaRPr>
+                    </a:p>
+                  </a:txBody>
+                  <a:tcPr marL="63500" marR="63500" marT="25400" marB="25400" anchor="ctr">
+                    <a:lnL w="6350" cap="flat" cmpd="sng" algn="ctr">
+                      <a:solidFill>
+                        <a:srgbClr val="E4DED4"/>
+                      </a:solidFill>
+                      <a:prstDash val="solid"/>
+                      <a:round/>
+                      <a:headEnd type="none" w="med" len="med"/>
+                      <a:tailEnd type="none" w="med" len="med"/>
+                    </a:lnL>
+                    <a:lnR w="6350" cap="flat" cmpd="sng" algn="ctr">
+                      <a:solidFill>
+                        <a:srgbClr val="E4DED4"/>
+                      </a:solidFill>
+                      <a:prstDash val="solid"/>
+                      <a:round/>
+                      <a:headEnd type="none" w="med" len="med"/>
+                      <a:tailEnd type="none" w="med" len="med"/>
+                    </a:lnR>
+                    <a:lnT w="6350" cap="flat" cmpd="sng" algn="ctr">
+                      <a:solidFill>
+                        <a:srgbClr val="E4DED4"/>
+                      </a:solidFill>
+                      <a:prstDash val="solid"/>
+                      <a:round/>
+                      <a:headEnd type="none" w="med" len="med"/>
+                      <a:tailEnd type="none" w="med" len="med"/>
+                    </a:lnT>
+                    <a:lnB w="6350" cap="flat" cmpd="sng" algn="ctr">
+                      <a:solidFill>
+                        <a:srgbClr val="E4DED4"/>
+                      </a:solidFill>
+                      <a:prstDash val="solid"/>
+                      <a:round/>
+                      <a:headEnd type="none" w="med" len="med"/>
+                      <a:tailEnd type="none" w="med" len="med"/>
+                    </a:lnB>
+                    <a:solidFill>
+                      <a:srgbClr val="E8F3EC"/>
+                    </a:solidFill>
+                  </a:tcPr>
+                </a:tc>
+                <a:tc>
+                  <a:txBody>
+                    <a:bodyPr/>
+                    <a:lstStyle/>
+                    <a:p>
+                      <a:pPr algn="ctr" indent="0" marL="0">
+                        <a:buNone/>
+                      </a:pPr>
+                      <a:r>
+                        <a:rPr lang="en-US" sz="950" dirty="0">
+                          <a:solidFill>
+                            <a:srgbClr val="1B1714"/>
+                          </a:solidFill>
+                          <a:latin typeface="IBM Plex Mono" pitchFamily="34" charset="0"/>
+                          <a:ea typeface="IBM Plex Mono" pitchFamily="34" charset="-122"/>
+                          <a:cs typeface="IBM Plex Mono" pitchFamily="34" charset="-120"/>
+                        </a:rPr>
+                        <a:t>20%</a:t>
+                      </a:r>
+                      <a:endParaRPr lang="en-US" sz="950" dirty="0">
+                        <a:latin typeface="IBM Plex Mono" charset="0"/>
+                        <a:ea typeface="IBM Plex Mono" charset="0"/>
+                        <a:cs typeface="IBM Plex Mono" charset="0"/>
+                      </a:endParaRPr>
+                    </a:p>
+                  </a:txBody>
+                  <a:tcPr marL="63500" marR="63500" marT="25400" marB="25400" anchor="ctr">
+                    <a:lnL w="6350" cap="flat" cmpd="sng" algn="ctr">
+                      <a:solidFill>
+                        <a:srgbClr val="E4DED4"/>
+                      </a:solidFill>
+                      <a:prstDash val="solid"/>
+                      <a:round/>
+                      <a:headEnd type="none" w="med" len="med"/>
+                      <a:tailEnd type="none" w="med" len="med"/>
+                    </a:lnL>
+                    <a:lnR w="6350" cap="flat" cmpd="sng" algn="ctr">
+                      <a:solidFill>
+                        <a:srgbClr val="E4DED4"/>
+                      </a:solidFill>
+                      <a:prstDash val="solid"/>
+                      <a:round/>
+                      <a:headEnd type="none" w="med" len="med"/>
+                      <a:tailEnd type="none" w="med" len="med"/>
+                    </a:lnR>
+                    <a:lnT w="6350" cap="flat" cmpd="sng" algn="ctr">
+                      <a:solidFill>
+                        <a:srgbClr val="E4DED4"/>
+                      </a:solidFill>
+                      <a:prstDash val="solid"/>
+                      <a:round/>
+                      <a:headEnd type="none" w="med" len="med"/>
+                      <a:tailEnd type="none" w="med" len="med"/>
+                    </a:lnT>
+                    <a:lnB w="6350" cap="flat" cmpd="sng" algn="ctr">
+                      <a:solidFill>
+                        <a:srgbClr val="E4DED4"/>
+                      </a:solidFill>
+                      <a:prstDash val="solid"/>
+                      <a:round/>
+                      <a:headEnd type="none" w="med" len="med"/>
+                      <a:tailEnd type="none" w="med" len="med"/>
+                    </a:lnB>
+                    <a:solidFill>
+                      <a:srgbClr val="E8F3EC"/>
+                    </a:solidFill>
+                  </a:tcPr>
+                </a:tc>
+                <a:tc>
+                  <a:txBody>
+                    <a:bodyPr/>
+                    <a:lstStyle/>
+                    <a:p>
+                      <a:pPr algn="ctr" indent="0" marL="0">
+                        <a:buNone/>
+                      </a:pPr>
+                      <a:r>
+                        <a:rPr lang="en-US" sz="950" dirty="0">
+                          <a:solidFill>
+                            <a:srgbClr val="1B1714"/>
+                          </a:solidFill>
+                          <a:latin typeface="IBM Plex Mono" pitchFamily="34" charset="0"/>
+                          <a:ea typeface="IBM Plex Mono" pitchFamily="34" charset="-122"/>
+                          <a:cs typeface="IBM Plex Mono" pitchFamily="34" charset="-120"/>
+                        </a:rPr>
+                        <a:t>$7.8bn</a:t>
+                      </a:r>
+                      <a:endParaRPr lang="en-US" sz="950" dirty="0">
+                        <a:latin typeface="IBM Plex Mono" charset="0"/>
+                        <a:ea typeface="IBM Plex Mono" charset="0"/>
+                        <a:cs typeface="IBM Plex Mono" charset="0"/>
+                      </a:endParaRPr>
+                    </a:p>
+                  </a:txBody>
+                  <a:tcPr marL="63500" marR="63500" marT="25400" marB="25400" anchor="ctr">
+                    <a:lnL w="6350" cap="flat" cmpd="sng" algn="ctr">
+                      <a:solidFill>
+                        <a:srgbClr val="E4DED4"/>
+                      </a:solidFill>
+                      <a:prstDash val="solid"/>
+                      <a:round/>
+                      <a:headEnd type="none" w="med" len="med"/>
+                      <a:tailEnd type="none" w="med" len="med"/>
+                    </a:lnL>
+                    <a:lnR w="6350" cap="flat" cmpd="sng" algn="ctr">
+                      <a:solidFill>
+                        <a:srgbClr val="E4DED4"/>
+                      </a:solidFill>
+                      <a:prstDash val="solid"/>
+                      <a:round/>
+                      <a:headEnd type="none" w="med" len="med"/>
+                      <a:tailEnd type="none" w="med" len="med"/>
+                    </a:lnR>
+                    <a:lnT w="6350" cap="flat" cmpd="sng" algn="ctr">
+                      <a:solidFill>
+                        <a:srgbClr val="E4DED4"/>
+                      </a:solidFill>
+                      <a:prstDash val="solid"/>
+                      <a:round/>
+                      <a:headEnd type="none" w="med" len="med"/>
+                      <a:tailEnd type="none" w="med" len="med"/>
+                    </a:lnT>
+                    <a:lnB w="6350" cap="flat" cmpd="sng" algn="ctr">
+                      <a:solidFill>
+                        <a:srgbClr val="E4DED4"/>
+                      </a:solidFill>
+                      <a:prstDash val="solid"/>
+                      <a:round/>
+                      <a:headEnd type="none" w="med" len="med"/>
+                      <a:tailEnd type="none" w="med" len="med"/>
+                    </a:lnB>
+                    <a:solidFill>
+                      <a:srgbClr val="E8F3EC"/>
+                    </a:solidFill>
+                  </a:tcPr>
+                </a:tc>
+                <a:tc>
+                  <a:txBody>
+                    <a:bodyPr/>
+                    <a:lstStyle/>
+                    <a:p>
+                      <a:pPr algn="ctr" indent="0" marL="0">
+                        <a:buNone/>
+                      </a:pPr>
+                      <a:r>
+                        <a:rPr lang="en-US" sz="1200" b="1" dirty="0">
+                          <a:solidFill>
+                            <a:srgbClr val="1E7A4D"/>
+                          </a:solidFill>
+                          <a:latin typeface="Space Grotesk" pitchFamily="34" charset="0"/>
+                          <a:ea typeface="Space Grotesk" pitchFamily="34" charset="-122"/>
+                          <a:cs typeface="Space Grotesk" pitchFamily="34" charset="-120"/>
+                        </a:rPr>
+                        <a:t>10.5x</a:t>
+                      </a:r>
+                      <a:endParaRPr lang="en-US" sz="1200" dirty="0">
+                        <a:latin typeface="Space Grotesk" charset="0"/>
+                        <a:ea typeface="Space Grotesk" charset="0"/>
+                        <a:cs typeface="Space Grotesk" charset="0"/>
+                      </a:endParaRPr>
+                    </a:p>
+                  </a:txBody>
+                  <a:tcPr marL="63500" marR="63500" marT="25400" marB="25400" anchor="ctr">
+                    <a:lnL w="6350" cap="flat" cmpd="sng" algn="ctr">
+                      <a:solidFill>
+                        <a:srgbClr val="E4DED4"/>
+                      </a:solidFill>
+                      <a:prstDash val="solid"/>
+                      <a:round/>
+                      <a:headEnd type="none" w="med" len="med"/>
+                      <a:tailEnd type="none" w="med" len="med"/>
+                    </a:lnL>
+                    <a:lnR w="6350" cap="flat" cmpd="sng" algn="ctr">
+                      <a:solidFill>
+                        <a:srgbClr val="E4DED4"/>
+                      </a:solidFill>
+                      <a:prstDash val="solid"/>
+                      <a:round/>
+                      <a:headEnd type="none" w="med" len="med"/>
+                      <a:tailEnd type="none" w="med" len="med"/>
+                    </a:lnR>
+                    <a:lnT w="6350" cap="flat" cmpd="sng" algn="ctr">
+                      <a:solidFill>
+                        <a:srgbClr val="E4DED4"/>
+                      </a:solidFill>
+                      <a:prstDash val="solid"/>
+                      <a:round/>
+                      <a:headEnd type="none" w="med" len="med"/>
+                      <a:tailEnd type="none" w="med" len="med"/>
+                    </a:lnT>
+                    <a:lnB w="6350" cap="flat" cmpd="sng" algn="ctr">
+                      <a:solidFill>
+                        <a:srgbClr val="E4DED4"/>
+                      </a:solidFill>
+                      <a:prstDash val="solid"/>
+                      <a:round/>
+                      <a:headEnd type="none" w="med" len="med"/>
+                      <a:tailEnd type="none" w="med" len="med"/>
+                    </a:lnB>
+                    <a:solidFill>
+                      <a:srgbClr val="E8F3EC"/>
+                    </a:solidFill>
+                  </a:tcPr>
+                </a:tc>
+                <a:tc>
+                  <a:txBody>
+                    <a:bodyPr/>
+                    <a:lstStyle/>
+                    <a:p>
+                      <a:pPr algn="ctr" indent="0" marL="0">
+                        <a:buNone/>
+                      </a:pPr>
+                      <a:r>
+                        <a:rPr lang="en-US" sz="800" b="1" dirty="0">
+                          <a:solidFill>
+                            <a:srgbClr val="6F6960"/>
+                          </a:solidFill>
+                          <a:latin typeface="IBM Plex Mono" pitchFamily="34" charset="0"/>
+                          <a:ea typeface="IBM Plex Mono" pitchFamily="34" charset="-122"/>
+                          <a:cs typeface="IBM Plex Mono" pitchFamily="34" charset="-120"/>
+                        </a:rPr>
+                        <a:t>10.5%</a:t>
+                      </a:r>
+                      <a:endParaRPr lang="en-US" sz="800" dirty="0">
+                        <a:latin typeface="IBM Plex Mono" charset="0"/>
+                        <a:ea typeface="IBM Plex Mono" charset="0"/>
+                        <a:cs typeface="IBM Plex Mono" charset="0"/>
+                      </a:endParaRPr>
+                    </a:p>
+                  </a:txBody>
+                  <a:tcPr marL="63500" marR="63500" marT="25400" marB="25400" anchor="ctr">
+                    <a:lnL w="6350" cap="flat" cmpd="sng" algn="ctr">
+                      <a:solidFill>
+                        <a:srgbClr val="E4DED4"/>
+                      </a:solidFill>
+                      <a:prstDash val="solid"/>
+                      <a:round/>
+                      <a:headEnd type="none" w="med" len="med"/>
+                      <a:tailEnd type="none" w="med" len="med"/>
+                    </a:lnL>
+                    <a:lnR w="6350" cap="flat" cmpd="sng" algn="ctr">
+                      <a:solidFill>
+                        <a:srgbClr val="E4DED4"/>
+                      </a:solidFill>
+                      <a:prstDash val="solid"/>
+                      <a:round/>
+                      <a:headEnd type="none" w="med" len="med"/>
+                      <a:tailEnd type="none" w="med" len="med"/>
+                    </a:lnR>
+                    <a:lnT w="6350" cap="flat" cmpd="sng" algn="ctr">
+                      <a:solidFill>
+                        <a:srgbClr val="E4DED4"/>
+                      </a:solidFill>
+                      <a:prstDash val="solid"/>
+                      <a:round/>
+                      <a:headEnd type="none" w="med" len="med"/>
+                      <a:tailEnd type="none" w="med" len="med"/>
+                    </a:lnT>
+                    <a:lnB w="6350" cap="flat" cmpd="sng" algn="ctr">
+                      <a:solidFill>
+                        <a:srgbClr val="E4DED4"/>
+                      </a:solidFill>
+                      <a:prstDash val="solid"/>
+                      <a:round/>
+                      <a:headEnd type="none" w="med" len="med"/>
+                      <a:tailEnd type="none" w="med" len="med"/>
+                    </a:lnB>
+                    <a:solidFill>
+                      <a:srgbClr val="E8F3EC"/>
+                    </a:solidFill>
+                  </a:tcPr>
+                </a:tc>
+              </a:tr>
+              <a:tr h="402336">
+                <a:tc>
+                  <a:txBody>
+                    <a:bodyPr/>
+                    <a:lstStyle/>
+                    <a:p>
+                      <a:pPr indent="0" marL="0">
+                        <a:buNone/>
+                      </a:pPr>
+                      <a:r>
+                        <a:rPr lang="en-US" sz="950" dirty="0">
+                          <a:solidFill>
+                            <a:srgbClr val="1B1714"/>
+                          </a:solidFill>
+                          <a:latin typeface="IBM Plex Sans KR" pitchFamily="34" charset="0"/>
+                          <a:ea typeface="IBM Plex Sans KR" pitchFamily="34" charset="-122"/>
+                          <a:cs typeface="IBM Plex Sans KR" pitchFamily="34" charset="-120"/>
+                        </a:rPr>
+                        <a:t>② CoC 해제 → 희석 30%</a:t>
+                      </a:r>
+                      <a:endParaRPr lang="en-US" sz="950" dirty="0">
+                        <a:latin typeface="IBM Plex Sans KR" charset="0"/>
+                        <a:ea typeface="IBM Plex Sans KR" charset="0"/>
+                        <a:cs typeface="IBM Plex Sans KR" charset="0"/>
+                      </a:endParaRPr>
+                    </a:p>
+                  </a:txBody>
+                  <a:tcPr marL="63500" marR="63500" marT="25400" marB="25400" anchor="ctr">
+                    <a:lnL w="6350" cap="flat" cmpd="sng" algn="ctr">
+                      <a:solidFill>
+                        <a:srgbClr val="E4DED4"/>
+                      </a:solidFill>
+                      <a:prstDash val="solid"/>
+                      <a:round/>
+                      <a:headEnd type="none" w="med" len="med"/>
+                      <a:tailEnd type="none" w="med" len="med"/>
+                    </a:lnL>
+                    <a:lnR w="6350" cap="flat" cmpd="sng" algn="ctr">
+                      <a:solidFill>
+                        <a:srgbClr val="E4DED4"/>
+                      </a:solidFill>
+                      <a:prstDash val="solid"/>
+                      <a:round/>
+                      <a:headEnd type="none" w="med" len="med"/>
+                      <a:tailEnd type="none" w="med" len="med"/>
+                    </a:lnR>
+                    <a:lnT w="6350" cap="flat" cmpd="sng" algn="ctr">
+                      <a:solidFill>
+                        <a:srgbClr val="E4DED4"/>
+                      </a:solidFill>
+                      <a:prstDash val="solid"/>
+                      <a:round/>
+                      <a:headEnd type="none" w="med" len="med"/>
+                      <a:tailEnd type="none" w="med" len="med"/>
+                    </a:lnT>
+                    <a:lnB w="6350" cap="flat" cmpd="sng" algn="ctr">
+                      <a:solidFill>
+                        <a:srgbClr val="E4DED4"/>
+                      </a:solidFill>
+                      <a:prstDash val="solid"/>
+                      <a:round/>
+                      <a:headEnd type="none" w="med" len="med"/>
+                      <a:tailEnd type="none" w="med" len="med"/>
+                    </a:lnB>
+                    <a:solidFill>
+                      <a:srgbClr val="E8F3EC"/>
+                    </a:solidFill>
+                  </a:tcPr>
+                </a:tc>
+                <a:tc>
+                  <a:txBody>
+                    <a:bodyPr/>
+                    <a:lstStyle/>
+                    <a:p>
+                      <a:pPr algn="ctr" indent="0" marL="0">
+                        <a:buNone/>
+                      </a:pPr>
+                      <a:r>
+                        <a:rPr lang="en-US" sz="950" dirty="0">
+                          <a:solidFill>
+                            <a:srgbClr val="1B1714"/>
+                          </a:solidFill>
+                          <a:latin typeface="IBM Plex Mono" pitchFamily="34" charset="0"/>
+                          <a:ea typeface="IBM Plex Mono" pitchFamily="34" charset="-122"/>
+                          <a:cs typeface="IBM Plex Mono" pitchFamily="34" charset="-120"/>
+                        </a:rPr>
+                        <a:t>10%</a:t>
+                      </a:r>
+                      <a:endParaRPr lang="en-US" sz="950" dirty="0">
+                        <a:latin typeface="IBM Plex Mono" charset="0"/>
+                        <a:ea typeface="IBM Plex Mono" charset="0"/>
+                        <a:cs typeface="IBM Plex Mono" charset="0"/>
+                      </a:endParaRPr>
+                    </a:p>
+                  </a:txBody>
+                  <a:tcPr marL="63500" marR="63500" marT="25400" marB="25400" anchor="ctr">
+                    <a:lnL w="6350" cap="flat" cmpd="sng" algn="ctr">
+                      <a:solidFill>
+                        <a:srgbClr val="E4DED4"/>
+                      </a:solidFill>
+                      <a:prstDash val="solid"/>
+                      <a:round/>
+                      <a:headEnd type="none" w="med" len="med"/>
+                      <a:tailEnd type="none" w="med" len="med"/>
+                    </a:lnL>
+                    <a:lnR w="6350" cap="flat" cmpd="sng" algn="ctr">
+                      <a:solidFill>
+                        <a:srgbClr val="E4DED4"/>
+                      </a:solidFill>
+                      <a:prstDash val="solid"/>
+                      <a:round/>
+                      <a:headEnd type="none" w="med" len="med"/>
+                      <a:tailEnd type="none" w="med" len="med"/>
+                    </a:lnR>
+                    <a:lnT w="6350" cap="flat" cmpd="sng" algn="ctr">
+                      <a:solidFill>
+                        <a:srgbClr val="E4DED4"/>
+                      </a:solidFill>
+                      <a:prstDash val="solid"/>
+                      <a:round/>
+                      <a:headEnd type="none" w="med" len="med"/>
+                      <a:tailEnd type="none" w="med" len="med"/>
+                    </a:lnT>
+                    <a:lnB w="6350" cap="flat" cmpd="sng" algn="ctr">
+                      <a:solidFill>
+                        <a:srgbClr val="E4DED4"/>
+                      </a:solidFill>
+                      <a:prstDash val="solid"/>
+                      <a:round/>
+                      <a:headEnd type="none" w="med" len="med"/>
+                      <a:tailEnd type="none" w="med" len="med"/>
+                    </a:lnB>
+                    <a:solidFill>
+                      <a:srgbClr val="E8F3EC"/>
+                    </a:solidFill>
+                  </a:tcPr>
+                </a:tc>
+                <a:tc>
+                  <a:txBody>
+                    <a:bodyPr/>
+                    <a:lstStyle/>
+                    <a:p>
+                      <a:pPr algn="ctr" indent="0" marL="0">
+                        <a:buNone/>
+                      </a:pPr>
+                      <a:r>
+                        <a:rPr lang="en-US" sz="950" dirty="0">
+                          <a:solidFill>
+                            <a:srgbClr val="1B1714"/>
+                          </a:solidFill>
+                          <a:latin typeface="IBM Plex Mono" pitchFamily="34" charset="0"/>
+                          <a:ea typeface="IBM Plex Mono" pitchFamily="34" charset="-122"/>
+                          <a:cs typeface="IBM Plex Mono" pitchFamily="34" charset="-120"/>
+                        </a:rPr>
+                        <a:t>30%</a:t>
+                      </a:r>
+                      <a:endParaRPr lang="en-US" sz="950" dirty="0">
+                        <a:latin typeface="IBM Plex Mono" charset="0"/>
+                        <a:ea typeface="IBM Plex Mono" charset="0"/>
+                        <a:cs typeface="IBM Plex Mono" charset="0"/>
+                      </a:endParaRPr>
+                    </a:p>
+                  </a:txBody>
+                  <a:tcPr marL="63500" marR="63500" marT="25400" marB="25400" anchor="ctr">
+                    <a:lnL w="6350" cap="flat" cmpd="sng" algn="ctr">
+                      <a:solidFill>
+                        <a:srgbClr val="E4DED4"/>
+                      </a:solidFill>
+                      <a:prstDash val="solid"/>
+                      <a:round/>
+                      <a:headEnd type="none" w="med" len="med"/>
+                      <a:tailEnd type="none" w="med" len="med"/>
+                    </a:lnL>
+                    <a:lnR w="6350" cap="flat" cmpd="sng" algn="ctr">
+                      <a:solidFill>
+                        <a:srgbClr val="E4DED4"/>
+                      </a:solidFill>
+                      <a:prstDash val="solid"/>
+                      <a:round/>
+                      <a:headEnd type="none" w="med" len="med"/>
+                      <a:tailEnd type="none" w="med" len="med"/>
+                    </a:lnR>
+                    <a:lnT w="6350" cap="flat" cmpd="sng" algn="ctr">
+                      <a:solidFill>
+                        <a:srgbClr val="E4DED4"/>
+                      </a:solidFill>
+                      <a:prstDash val="solid"/>
+                      <a:round/>
+                      <a:headEnd type="none" w="med" len="med"/>
+                      <a:tailEnd type="none" w="med" len="med"/>
+                    </a:lnT>
+                    <a:lnB w="6350" cap="flat" cmpd="sng" algn="ctr">
+                      <a:solidFill>
+                        <a:srgbClr val="E4DED4"/>
+                      </a:solidFill>
+                      <a:prstDash val="solid"/>
+                      <a:round/>
+                      <a:headEnd type="none" w="med" len="med"/>
+                      <a:tailEnd type="none" w="med" len="med"/>
+                    </a:lnB>
+                    <a:solidFill>
+                      <a:srgbClr val="E8F3EC"/>
+                    </a:solidFill>
+                  </a:tcPr>
+                </a:tc>
+                <a:tc>
+                  <a:txBody>
+                    <a:bodyPr/>
+                    <a:lstStyle/>
+                    <a:p>
+                      <a:pPr algn="ctr" indent="0" marL="0">
+                        <a:buNone/>
+                      </a:pPr>
+                      <a:r>
+                        <a:rPr lang="en-US" sz="950" dirty="0">
+                          <a:solidFill>
+                            <a:srgbClr val="1B1714"/>
+                          </a:solidFill>
+                          <a:latin typeface="IBM Plex Mono" pitchFamily="34" charset="0"/>
+                          <a:ea typeface="IBM Plex Mono" pitchFamily="34" charset="-122"/>
+                          <a:cs typeface="IBM Plex Mono" pitchFamily="34" charset="-120"/>
+                        </a:rPr>
+                        <a:t>$7.8bn</a:t>
+                      </a:r>
+                      <a:endParaRPr lang="en-US" sz="950" dirty="0">
+                        <a:latin typeface="IBM Plex Mono" charset="0"/>
+                        <a:ea typeface="IBM Plex Mono" charset="0"/>
+                        <a:cs typeface="IBM Plex Mono" charset="0"/>
+                      </a:endParaRPr>
+                    </a:p>
+                  </a:txBody>
+                  <a:tcPr marL="63500" marR="63500" marT="25400" marB="25400" anchor="ctr">
+                    <a:lnL w="6350" cap="flat" cmpd="sng" algn="ctr">
+                      <a:solidFill>
+                        <a:srgbClr val="E4DED4"/>
+                      </a:solidFill>
+                      <a:prstDash val="solid"/>
+                      <a:round/>
+                      <a:headEnd type="none" w="med" len="med"/>
+                      <a:tailEnd type="none" w="med" len="med"/>
+                    </a:lnL>
+                    <a:lnR w="6350" cap="flat" cmpd="sng" algn="ctr">
+                      <a:solidFill>
+                        <a:srgbClr val="E4DED4"/>
+                      </a:solidFill>
+                      <a:prstDash val="solid"/>
+                      <a:round/>
+                      <a:headEnd type="none" w="med" len="med"/>
+                      <a:tailEnd type="none" w="med" len="med"/>
+                    </a:lnR>
+                    <a:lnT w="6350" cap="flat" cmpd="sng" algn="ctr">
+                      <a:solidFill>
+                        <a:srgbClr val="E4DED4"/>
+                      </a:solidFill>
+                      <a:prstDash val="solid"/>
+                      <a:round/>
+                      <a:headEnd type="none" w="med" len="med"/>
+                      <a:tailEnd type="none" w="med" len="med"/>
+                    </a:lnT>
+                    <a:lnB w="6350" cap="flat" cmpd="sng" algn="ctr">
+                      <a:solidFill>
+                        <a:srgbClr val="E4DED4"/>
+                      </a:solidFill>
+                      <a:prstDash val="solid"/>
+                      <a:round/>
+                      <a:headEnd type="none" w="med" len="med"/>
+                      <a:tailEnd type="none" w="med" len="med"/>
+                    </a:lnB>
+                    <a:solidFill>
+                      <a:srgbClr val="E8F3EC"/>
+                    </a:solidFill>
+                  </a:tcPr>
+                </a:tc>
+                <a:tc>
+                  <a:txBody>
+                    <a:bodyPr/>
+                    <a:lstStyle/>
+                    <a:p>
+                      <a:pPr algn="ctr" indent="0" marL="0">
+                        <a:buNone/>
+                      </a:pPr>
+                      <a:r>
+                        <a:rPr lang="en-US" sz="1200" b="1" dirty="0">
+                          <a:solidFill>
+                            <a:srgbClr val="1E7A4D"/>
+                          </a:solidFill>
+                          <a:latin typeface="Space Grotesk" pitchFamily="34" charset="0"/>
+                          <a:ea typeface="Space Grotesk" pitchFamily="34" charset="-122"/>
+                          <a:cs typeface="Space Grotesk" pitchFamily="34" charset="-120"/>
+                        </a:rPr>
+                        <a:t>10.5x</a:t>
+                      </a:r>
+                      <a:endParaRPr lang="en-US" sz="1200" dirty="0">
+                        <a:latin typeface="Space Grotesk" charset="0"/>
+                        <a:ea typeface="Space Grotesk" charset="0"/>
+                        <a:cs typeface="Space Grotesk" charset="0"/>
+                      </a:endParaRPr>
+                    </a:p>
+                  </a:txBody>
+                  <a:tcPr marL="63500" marR="63500" marT="25400" marB="25400" anchor="ctr">
+                    <a:lnL w="6350" cap="flat" cmpd="sng" algn="ctr">
+                      <a:solidFill>
+                        <a:srgbClr val="E4DED4"/>
+                      </a:solidFill>
+                      <a:prstDash val="solid"/>
+                      <a:round/>
+                      <a:headEnd type="none" w="med" len="med"/>
+                      <a:tailEnd type="none" w="med" len="med"/>
+                    </a:lnL>
+                    <a:lnR w="6350" cap="flat" cmpd="sng" algn="ctr">
+                      <a:solidFill>
+                        <a:srgbClr val="E4DED4"/>
+                      </a:solidFill>
+                      <a:prstDash val="solid"/>
+                      <a:round/>
+                      <a:headEnd type="none" w="med" len="med"/>
+                      <a:tailEnd type="none" w="med" len="med"/>
+                    </a:lnR>
+                    <a:lnT w="6350" cap="flat" cmpd="sng" algn="ctr">
+                      <a:solidFill>
+                        <a:srgbClr val="E4DED4"/>
+                      </a:solidFill>
+                      <a:prstDash val="solid"/>
+                      <a:round/>
+                      <a:headEnd type="none" w="med" len="med"/>
+                      <a:tailEnd type="none" w="med" len="med"/>
+                    </a:lnT>
+                    <a:lnB w="6350" cap="flat" cmpd="sng" algn="ctr">
+                      <a:solidFill>
+                        <a:srgbClr val="E4DED4"/>
+                      </a:solidFill>
+                      <a:prstDash val="solid"/>
+                      <a:round/>
+                      <a:headEnd type="none" w="med" len="med"/>
+                      <a:tailEnd type="none" w="med" len="med"/>
+                    </a:lnB>
+                    <a:solidFill>
+                      <a:srgbClr val="E8F3EC"/>
+                    </a:solidFill>
+                  </a:tcPr>
+                </a:tc>
+                <a:tc>
+                  <a:txBody>
+                    <a:bodyPr/>
+                    <a:lstStyle/>
+                    <a:p>
+                      <a:pPr algn="ctr" indent="0" marL="0">
+                        <a:buNone/>
+                      </a:pPr>
+                      <a:r>
+                        <a:rPr lang="en-US" sz="800" b="1" dirty="0">
+                          <a:solidFill>
+                            <a:srgbClr val="6F6960"/>
+                          </a:solidFill>
+                          <a:latin typeface="IBM Plex Mono" pitchFamily="34" charset="0"/>
+                          <a:ea typeface="IBM Plex Mono" pitchFamily="34" charset="-122"/>
+                          <a:cs typeface="IBM Plex Mono" pitchFamily="34" charset="-120"/>
+                        </a:rPr>
+                        <a:t>10.5%</a:t>
+                      </a:r>
+                      <a:endParaRPr lang="en-US" sz="800" dirty="0">
+                        <a:latin typeface="IBM Plex Mono" charset="0"/>
+                        <a:ea typeface="IBM Plex Mono" charset="0"/>
+                        <a:cs typeface="IBM Plex Mono" charset="0"/>
+                      </a:endParaRPr>
+                    </a:p>
+                  </a:txBody>
+                  <a:tcPr marL="63500" marR="63500" marT="25400" marB="25400" anchor="ctr">
+                    <a:lnL w="6350" cap="flat" cmpd="sng" algn="ctr">
+                      <a:solidFill>
+                        <a:srgbClr val="E4DED4"/>
+                      </a:solidFill>
+                      <a:prstDash val="solid"/>
+                      <a:round/>
+                      <a:headEnd type="none" w="med" len="med"/>
+                      <a:tailEnd type="none" w="med" len="med"/>
+                    </a:lnL>
+                    <a:lnR w="6350" cap="flat" cmpd="sng" algn="ctr">
+                      <a:solidFill>
+                        <a:srgbClr val="E4DED4"/>
+                      </a:solidFill>
+                      <a:prstDash val="solid"/>
+                      <a:round/>
+                      <a:headEnd type="none" w="med" len="med"/>
+                      <a:tailEnd type="none" w="med" len="med"/>
+                    </a:lnR>
+                    <a:lnT w="6350" cap="flat" cmpd="sng" algn="ctr">
+                      <a:solidFill>
+                        <a:srgbClr val="E4DED4"/>
+                      </a:solidFill>
+                      <a:prstDash val="solid"/>
+                      <a:round/>
+                      <a:headEnd type="none" w="med" len="med"/>
+                      <a:tailEnd type="none" w="med" len="med"/>
+                    </a:lnT>
+                    <a:lnB w="6350" cap="flat" cmpd="sng" algn="ctr">
+                      <a:solidFill>
+                        <a:srgbClr val="E4DED4"/>
+                      </a:solidFill>
+                      <a:prstDash val="solid"/>
+                      <a:round/>
+                      <a:headEnd type="none" w="med" len="med"/>
+                      <a:tailEnd type="none" w="med" len="med"/>
+                    </a:lnB>
+                    <a:solidFill>
+                      <a:srgbClr val="E8F3EC"/>
+                    </a:solidFill>
+                  </a:tcPr>
+                </a:tc>
+              </a:tr>
+              <a:tr h="402336">
+                <a:tc>
+                  <a:txBody>
+                    <a:bodyPr/>
+                    <a:lstStyle/>
+                    <a:p>
+                      <a:pPr indent="0" marL="0">
+                        <a:buNone/>
+                      </a:pPr>
+                      <a:r>
+                        <a:rPr lang="en-US" sz="950" dirty="0">
+                          <a:solidFill>
+                            <a:srgbClr val="1B1714"/>
+                          </a:solidFill>
+                          <a:latin typeface="IBM Plex Sans KR" pitchFamily="34" charset="0"/>
+                          <a:ea typeface="IBM Plex Sans KR" pitchFamily="34" charset="-122"/>
+                          <a:cs typeface="IBM Plex Sans KR" pitchFamily="34" charset="-120"/>
+                        </a:rPr>
+                        <a:t>③ CoC 완화 → 희석 49%</a:t>
+                      </a:r>
+                      <a:endParaRPr lang="en-US" sz="950" dirty="0">
+                        <a:latin typeface="IBM Plex Sans KR" charset="0"/>
+                        <a:ea typeface="IBM Plex Sans KR" charset="0"/>
+                        <a:cs typeface="IBM Plex Sans KR" charset="0"/>
+                      </a:endParaRPr>
+                    </a:p>
+                  </a:txBody>
+                  <a:tcPr marL="63500" marR="63500" marT="25400" marB="25400" anchor="ctr">
+                    <a:lnL w="6350" cap="flat" cmpd="sng" algn="ctr">
+                      <a:solidFill>
+                        <a:srgbClr val="E4DED4"/>
+                      </a:solidFill>
+                      <a:prstDash val="solid"/>
+                      <a:round/>
+                      <a:headEnd type="none" w="med" len="med"/>
+                      <a:tailEnd type="none" w="med" len="med"/>
+                    </a:lnL>
+                    <a:lnR w="6350" cap="flat" cmpd="sng" algn="ctr">
+                      <a:solidFill>
+                        <a:srgbClr val="E4DED4"/>
+                      </a:solidFill>
+                      <a:prstDash val="solid"/>
+                      <a:round/>
+                      <a:headEnd type="none" w="med" len="med"/>
+                      <a:tailEnd type="none" w="med" len="med"/>
+                    </a:lnR>
+                    <a:lnT w="6350" cap="flat" cmpd="sng" algn="ctr">
+                      <a:solidFill>
+                        <a:srgbClr val="E4DED4"/>
+                      </a:solidFill>
+                      <a:prstDash val="solid"/>
+                      <a:round/>
+                      <a:headEnd type="none" w="med" len="med"/>
+                      <a:tailEnd type="none" w="med" len="med"/>
+                    </a:lnT>
+                    <a:lnB w="6350" cap="flat" cmpd="sng" algn="ctr">
+                      <a:solidFill>
+                        <a:srgbClr val="E4DED4"/>
+                      </a:solidFill>
+                      <a:prstDash val="solid"/>
+                      <a:round/>
+                      <a:headEnd type="none" w="med" len="med"/>
+                      <a:tailEnd type="none" w="med" len="med"/>
+                    </a:lnB>
+                    <a:solidFill>
+                      <a:srgbClr val="E8F3EC"/>
+                    </a:solidFill>
+                  </a:tcPr>
+                </a:tc>
+                <a:tc>
+                  <a:txBody>
+                    <a:bodyPr/>
+                    <a:lstStyle/>
+                    <a:p>
+                      <a:pPr algn="ctr" indent="0" marL="0">
+                        <a:buNone/>
+                      </a:pPr>
+                      <a:r>
+                        <a:rPr lang="en-US" sz="950" dirty="0">
+                          <a:solidFill>
+                            <a:srgbClr val="1B1714"/>
+                          </a:solidFill>
+                          <a:latin typeface="IBM Plex Mono" pitchFamily="34" charset="0"/>
+                          <a:ea typeface="IBM Plex Mono" pitchFamily="34" charset="-122"/>
+                          <a:cs typeface="IBM Plex Mono" pitchFamily="34" charset="-120"/>
+                        </a:rPr>
+                        <a:t>10%</a:t>
+                      </a:r>
+                      <a:endParaRPr lang="en-US" sz="950" dirty="0">
+                        <a:latin typeface="IBM Plex Mono" charset="0"/>
+                        <a:ea typeface="IBM Plex Mono" charset="0"/>
+                        <a:cs typeface="IBM Plex Mono" charset="0"/>
+                      </a:endParaRPr>
+                    </a:p>
+                  </a:txBody>
+                  <a:tcPr marL="63500" marR="63500" marT="25400" marB="25400" anchor="ctr">
+                    <a:lnL w="6350" cap="flat" cmpd="sng" algn="ctr">
+                      <a:solidFill>
+                        <a:srgbClr val="E4DED4"/>
+                      </a:solidFill>
+                      <a:prstDash val="solid"/>
+                      <a:round/>
+                      <a:headEnd type="none" w="med" len="med"/>
+                      <a:tailEnd type="none" w="med" len="med"/>
+                    </a:lnL>
+                    <a:lnR w="6350" cap="flat" cmpd="sng" algn="ctr">
+                      <a:solidFill>
+                        <a:srgbClr val="E4DED4"/>
+                      </a:solidFill>
+                      <a:prstDash val="solid"/>
+                      <a:round/>
+                      <a:headEnd type="none" w="med" len="med"/>
+                      <a:tailEnd type="none" w="med" len="med"/>
+                    </a:lnR>
+                    <a:lnT w="6350" cap="flat" cmpd="sng" algn="ctr">
+                      <a:solidFill>
+                        <a:srgbClr val="E4DED4"/>
+                      </a:solidFill>
+                      <a:prstDash val="solid"/>
+                      <a:round/>
+                      <a:headEnd type="none" w="med" len="med"/>
+                      <a:tailEnd type="none" w="med" len="med"/>
+                    </a:lnT>
+                    <a:lnB w="6350" cap="flat" cmpd="sng" algn="ctr">
+                      <a:solidFill>
+                        <a:srgbClr val="E4DED4"/>
+                      </a:solidFill>
+                      <a:prstDash val="solid"/>
+                      <a:round/>
+                      <a:headEnd type="none" w="med" len="med"/>
+                      <a:tailEnd type="none" w="med" len="med"/>
+                    </a:lnB>
+                    <a:solidFill>
+                      <a:srgbClr val="E8F3EC"/>
+                    </a:solidFill>
+                  </a:tcPr>
+                </a:tc>
+                <a:tc>
+                  <a:txBody>
+                    <a:bodyPr/>
+                    <a:lstStyle/>
+                    <a:p>
+                      <a:pPr algn="ctr" indent="0" marL="0">
+                        <a:buNone/>
+                      </a:pPr>
+                      <a:r>
+                        <a:rPr lang="en-US" sz="950" dirty="0">
+                          <a:solidFill>
+                            <a:srgbClr val="1B1714"/>
+                          </a:solidFill>
+                          <a:latin typeface="IBM Plex Mono" pitchFamily="34" charset="0"/>
+                          <a:ea typeface="IBM Plex Mono" pitchFamily="34" charset="-122"/>
+                          <a:cs typeface="IBM Plex Mono" pitchFamily="34" charset="-120"/>
+                        </a:rPr>
+                        <a:t>49%</a:t>
+                      </a:r>
+                      <a:endParaRPr lang="en-US" sz="950" dirty="0">
+                        <a:latin typeface="IBM Plex Mono" charset="0"/>
+                        <a:ea typeface="IBM Plex Mono" charset="0"/>
+                        <a:cs typeface="IBM Plex Mono" charset="0"/>
+                      </a:endParaRPr>
+                    </a:p>
+                  </a:txBody>
+                  <a:tcPr marL="63500" marR="63500" marT="25400" marB="25400" anchor="ctr">
+                    <a:lnL w="6350" cap="flat" cmpd="sng" algn="ctr">
+                      <a:solidFill>
+                        <a:srgbClr val="E4DED4"/>
+                      </a:solidFill>
+                      <a:prstDash val="solid"/>
+                      <a:round/>
+                      <a:headEnd type="none" w="med" len="med"/>
+                      <a:tailEnd type="none" w="med" len="med"/>
+                    </a:lnL>
+                    <a:lnR w="6350" cap="flat" cmpd="sng" algn="ctr">
+                      <a:solidFill>
+                        <a:srgbClr val="E4DED4"/>
+                      </a:solidFill>
+                      <a:prstDash val="solid"/>
+                      <a:round/>
+                      <a:headEnd type="none" w="med" len="med"/>
+                      <a:tailEnd type="none" w="med" len="med"/>
+                    </a:lnR>
+                    <a:lnT w="6350" cap="flat" cmpd="sng" algn="ctr">
+                      <a:solidFill>
+                        <a:srgbClr val="E4DED4"/>
+                      </a:solidFill>
+                      <a:prstDash val="solid"/>
+                      <a:round/>
+                      <a:headEnd type="none" w="med" len="med"/>
+                      <a:tailEnd type="none" w="med" len="med"/>
+                    </a:lnT>
+                    <a:lnB w="6350" cap="flat" cmpd="sng" algn="ctr">
+                      <a:solidFill>
+                        <a:srgbClr val="E4DED4"/>
+                      </a:solidFill>
+                      <a:prstDash val="solid"/>
+                      <a:round/>
+                      <a:headEnd type="none" w="med" len="med"/>
+                      <a:tailEnd type="none" w="med" len="med"/>
+                    </a:lnB>
+                    <a:solidFill>
+                      <a:srgbClr val="E8F3EC"/>
+                    </a:solidFill>
+                  </a:tcPr>
+                </a:tc>
+                <a:tc>
+                  <a:txBody>
+                    <a:bodyPr/>
+                    <a:lstStyle/>
+                    <a:p>
+                      <a:pPr algn="ctr" indent="0" marL="0">
+                        <a:buNone/>
+                      </a:pPr>
+                      <a:r>
+                        <a:rPr lang="en-US" sz="950" dirty="0">
+                          <a:solidFill>
+                            <a:srgbClr val="1B1714"/>
+                          </a:solidFill>
+                          <a:latin typeface="IBM Plex Mono" pitchFamily="34" charset="0"/>
+                          <a:ea typeface="IBM Plex Mono" pitchFamily="34" charset="-122"/>
+                          <a:cs typeface="IBM Plex Mono" pitchFamily="34" charset="-120"/>
+                        </a:rPr>
+                        <a:t>$7.3bn</a:t>
+                      </a:r>
+                      <a:endParaRPr lang="en-US" sz="950" dirty="0">
+                        <a:latin typeface="IBM Plex Mono" charset="0"/>
+                        <a:ea typeface="IBM Plex Mono" charset="0"/>
+                        <a:cs typeface="IBM Plex Mono" charset="0"/>
+                      </a:endParaRPr>
+                    </a:p>
+                  </a:txBody>
+                  <a:tcPr marL="63500" marR="63500" marT="25400" marB="25400" anchor="ctr">
+                    <a:lnL w="6350" cap="flat" cmpd="sng" algn="ctr">
+                      <a:solidFill>
+                        <a:srgbClr val="E4DED4"/>
+                      </a:solidFill>
+                      <a:prstDash val="solid"/>
+                      <a:round/>
+                      <a:headEnd type="none" w="med" len="med"/>
+                      <a:tailEnd type="none" w="med" len="med"/>
+                    </a:lnL>
+                    <a:lnR w="6350" cap="flat" cmpd="sng" algn="ctr">
+                      <a:solidFill>
+                        <a:srgbClr val="E4DED4"/>
+                      </a:solidFill>
+                      <a:prstDash val="solid"/>
+                      <a:round/>
+                      <a:headEnd type="none" w="med" len="med"/>
+                      <a:tailEnd type="none" w="med" len="med"/>
+                    </a:lnR>
+                    <a:lnT w="6350" cap="flat" cmpd="sng" algn="ctr">
+                      <a:solidFill>
+                        <a:srgbClr val="E4DED4"/>
+                      </a:solidFill>
+                      <a:prstDash val="solid"/>
+                      <a:round/>
+                      <a:headEnd type="none" w="med" len="med"/>
+                      <a:tailEnd type="none" w="med" len="med"/>
+                    </a:lnT>
+                    <a:lnB w="6350" cap="flat" cmpd="sng" algn="ctr">
+                      <a:solidFill>
+                        <a:srgbClr val="E4DED4"/>
+                      </a:solidFill>
+                      <a:prstDash val="solid"/>
+                      <a:round/>
+                      <a:headEnd type="none" w="med" len="med"/>
+                      <a:tailEnd type="none" w="med" len="med"/>
+                    </a:lnB>
+                    <a:solidFill>
+                      <a:srgbClr val="E8F3EC"/>
+                    </a:solidFill>
+                  </a:tcPr>
+                </a:tc>
+                <a:tc>
+                  <a:txBody>
+                    <a:bodyPr/>
+                    <a:lstStyle/>
+                    <a:p>
+                      <a:pPr algn="ctr" indent="0" marL="0">
+                        <a:buNone/>
+                      </a:pPr>
+                      <a:r>
+                        <a:rPr lang="en-US" sz="1200" b="1" dirty="0">
+                          <a:solidFill>
+                            <a:srgbClr val="1E7A4D"/>
+                          </a:solidFill>
+                          <a:latin typeface="Space Grotesk" pitchFamily="34" charset="0"/>
+                          <a:ea typeface="Space Grotesk" pitchFamily="34" charset="-122"/>
+                          <a:cs typeface="Space Grotesk" pitchFamily="34" charset="-120"/>
+                        </a:rPr>
+                        <a:t>9.7x</a:t>
+                      </a:r>
+                      <a:endParaRPr lang="en-US" sz="1200" dirty="0">
+                        <a:latin typeface="Space Grotesk" charset="0"/>
+                        <a:ea typeface="Space Grotesk" charset="0"/>
+                        <a:cs typeface="Space Grotesk" charset="0"/>
+                      </a:endParaRPr>
+                    </a:p>
+                  </a:txBody>
+                  <a:tcPr marL="63500" marR="63500" marT="25400" marB="25400" anchor="ctr">
+                    <a:lnL w="6350" cap="flat" cmpd="sng" algn="ctr">
+                      <a:solidFill>
+                        <a:srgbClr val="E4DED4"/>
+                      </a:solidFill>
+                      <a:prstDash val="solid"/>
+                      <a:round/>
+                      <a:headEnd type="none" w="med" len="med"/>
+                      <a:tailEnd type="none" w="med" len="med"/>
+                    </a:lnL>
+                    <a:lnR w="6350" cap="flat" cmpd="sng" algn="ctr">
+                      <a:solidFill>
+                        <a:srgbClr val="E4DED4"/>
+                      </a:solidFill>
+                      <a:prstDash val="solid"/>
+                      <a:round/>
+                      <a:headEnd type="none" w="med" len="med"/>
+                      <a:tailEnd type="none" w="med" len="med"/>
+                    </a:lnR>
+                    <a:lnT w="6350" cap="flat" cmpd="sng" algn="ctr">
+                      <a:solidFill>
+                        <a:srgbClr val="E4DED4"/>
+                      </a:solidFill>
+                      <a:prstDash val="solid"/>
+                      <a:round/>
+                      <a:headEnd type="none" w="med" len="med"/>
+                      <a:tailEnd type="none" w="med" len="med"/>
+                    </a:lnT>
+                    <a:lnB w="6350" cap="flat" cmpd="sng" algn="ctr">
+                      <a:solidFill>
+                        <a:srgbClr val="E4DED4"/>
+                      </a:solidFill>
+                      <a:prstDash val="solid"/>
+                      <a:round/>
+                      <a:headEnd type="none" w="med" len="med"/>
+                      <a:tailEnd type="none" w="med" len="med"/>
+                    </a:lnB>
+                    <a:solidFill>
+                      <a:srgbClr val="E8F3EC"/>
+                    </a:solidFill>
+                  </a:tcPr>
+                </a:tc>
+                <a:tc>
+                  <a:txBody>
+                    <a:bodyPr/>
+                    <a:lstStyle/>
+                    <a:p>
+                      <a:pPr algn="ctr" indent="0" marL="0">
+                        <a:buNone/>
+                      </a:pPr>
+                      <a:r>
+                        <a:rPr lang="en-US" sz="800" b="1" dirty="0">
+                          <a:solidFill>
+                            <a:srgbClr val="6F6960"/>
+                          </a:solidFill>
+                          <a:latin typeface="IBM Plex Mono" pitchFamily="34" charset="0"/>
+                          <a:ea typeface="IBM Plex Mono" pitchFamily="34" charset="-122"/>
+                          <a:cs typeface="IBM Plex Mono" pitchFamily="34" charset="-120"/>
+                        </a:rPr>
+                        <a:t>9.7%</a:t>
+                      </a:r>
+                      <a:endParaRPr lang="en-US" sz="800" dirty="0">
+                        <a:latin typeface="IBM Plex Mono" charset="0"/>
+                        <a:ea typeface="IBM Plex Mono" charset="0"/>
+                        <a:cs typeface="IBM Plex Mono" charset="0"/>
+                      </a:endParaRPr>
+                    </a:p>
+                  </a:txBody>
+                  <a:tcPr marL="63500" marR="63500" marT="25400" marB="25400" anchor="ctr">
+                    <a:lnL w="6350" cap="flat" cmpd="sng" algn="ctr">
+                      <a:solidFill>
+                        <a:srgbClr val="E4DED4"/>
+                      </a:solidFill>
+                      <a:prstDash val="solid"/>
+                      <a:round/>
+                      <a:headEnd type="none" w="med" len="med"/>
+                      <a:tailEnd type="none" w="med" len="med"/>
+                    </a:lnL>
+                    <a:lnR w="6350" cap="flat" cmpd="sng" algn="ctr">
+                      <a:solidFill>
+                        <a:srgbClr val="E4DED4"/>
+                      </a:solidFill>
+                      <a:prstDash val="solid"/>
+                      <a:round/>
+                      <a:headEnd type="none" w="med" len="med"/>
+                      <a:tailEnd type="none" w="med" len="med"/>
+                    </a:lnR>
+                    <a:lnT w="6350" cap="flat" cmpd="sng" algn="ctr">
+                      <a:solidFill>
+                        <a:srgbClr val="E4DED4"/>
+                      </a:solidFill>
+                      <a:prstDash val="solid"/>
+                      <a:round/>
+                      <a:headEnd type="none" w="med" len="med"/>
+                      <a:tailEnd type="none" w="med" len="med"/>
+                    </a:lnT>
+                    <a:lnB w="6350" cap="flat" cmpd="sng" algn="ctr">
+                      <a:solidFill>
+                        <a:srgbClr val="E4DED4"/>
+                      </a:solidFill>
+                      <a:prstDash val="solid"/>
+                      <a:round/>
+                      <a:headEnd type="none" w="med" len="med"/>
+                      <a:tailEnd type="none" w="med" len="med"/>
+                    </a:lnB>
+                    <a:solidFill>
+                      <a:srgbClr val="E8F3EC"/>
+                    </a:solidFill>
+                  </a:tcPr>
+                </a:tc>
+              </a:tr>
+              <a:tr h="402336">
+                <a:tc>
+                  <a:txBody>
+                    <a:bodyPr/>
+                    <a:lstStyle/>
+                    <a:p>
+                      <a:pPr indent="0" marL="0">
+                        <a:buNone/>
+                      </a:pPr>
+                      <a:r>
+                        <a:rPr lang="en-US" sz="950" dirty="0">
+                          <a:solidFill>
+                            <a:srgbClr val="1B1714"/>
+                          </a:solidFill>
+                          <a:latin typeface="IBM Plex Sans KR" pitchFamily="34" charset="0"/>
+                          <a:ea typeface="IBM Plex Sans KR" pitchFamily="34" charset="-122"/>
+                          <a:cs typeface="IBM Plex Sans KR" pitchFamily="34" charset="-120"/>
+                        </a:rPr>
+                        <a:t>최대결합 (그랜트20+희석49)</a:t>
+                      </a:r>
+                      <a:endParaRPr lang="en-US" sz="950" dirty="0">
+                        <a:latin typeface="IBM Plex Sans KR" charset="0"/>
+                        <a:ea typeface="IBM Plex Sans KR" charset="0"/>
+                        <a:cs typeface="IBM Plex Sans KR" charset="0"/>
+                      </a:endParaRPr>
+                    </a:p>
+                  </a:txBody>
+                  <a:tcPr marL="63500" marR="63500" marT="25400" marB="25400" anchor="ctr">
+                    <a:lnL w="6350" cap="flat" cmpd="sng" algn="ctr">
+                      <a:solidFill>
+                        <a:srgbClr val="E4DED4"/>
+                      </a:solidFill>
+                      <a:prstDash val="solid"/>
+                      <a:round/>
+                      <a:headEnd type="none" w="med" len="med"/>
+                      <a:tailEnd type="none" w="med" len="med"/>
+                    </a:lnL>
+                    <a:lnR w="6350" cap="flat" cmpd="sng" algn="ctr">
+                      <a:solidFill>
+                        <a:srgbClr val="E4DED4"/>
+                      </a:solidFill>
+                      <a:prstDash val="solid"/>
+                      <a:round/>
+                      <a:headEnd type="none" w="med" len="med"/>
+                      <a:tailEnd type="none" w="med" len="med"/>
+                    </a:lnR>
+                    <a:lnT w="6350" cap="flat" cmpd="sng" algn="ctr">
+                      <a:solidFill>
+                        <a:srgbClr val="E4DED4"/>
+                      </a:solidFill>
+                      <a:prstDash val="solid"/>
+                      <a:round/>
+                      <a:headEnd type="none" w="med" len="med"/>
+                      <a:tailEnd type="none" w="med" len="med"/>
+                    </a:lnT>
+                    <a:lnB w="6350" cap="flat" cmpd="sng" algn="ctr">
+                      <a:solidFill>
+                        <a:srgbClr val="E4DED4"/>
+                      </a:solidFill>
+                      <a:prstDash val="solid"/>
+                      <a:round/>
+                      <a:headEnd type="none" w="med" len="med"/>
+                      <a:tailEnd type="none" w="med" len="med"/>
+                    </a:lnB>
+                    <a:solidFill>
+                      <a:srgbClr val="E8F3EC"/>
+                    </a:solidFill>
+                  </a:tcPr>
+                </a:tc>
+                <a:tc>
+                  <a:txBody>
+                    <a:bodyPr/>
+                    <a:lstStyle/>
+                    <a:p>
+                      <a:pPr algn="ctr" indent="0" marL="0">
+                        <a:buNone/>
+                      </a:pPr>
+                      <a:r>
+                        <a:rPr lang="en-US" sz="950" dirty="0">
+                          <a:solidFill>
+                            <a:srgbClr val="1B1714"/>
+                          </a:solidFill>
+                          <a:latin typeface="IBM Plex Mono" pitchFamily="34" charset="0"/>
+                          <a:ea typeface="IBM Plex Mono" pitchFamily="34" charset="-122"/>
+                          <a:cs typeface="IBM Plex Mono" pitchFamily="34" charset="-120"/>
+                        </a:rPr>
+                        <a:t>20%</a:t>
+                      </a:r>
+                      <a:endParaRPr lang="en-US" sz="950" dirty="0">
+                        <a:latin typeface="IBM Plex Mono" charset="0"/>
+                        <a:ea typeface="IBM Plex Mono" charset="0"/>
+                        <a:cs typeface="IBM Plex Mono" charset="0"/>
+                      </a:endParaRPr>
+                    </a:p>
+                  </a:txBody>
+                  <a:tcPr marL="63500" marR="63500" marT="25400" marB="25400" anchor="ctr">
+                    <a:lnL w="6350" cap="flat" cmpd="sng" algn="ctr">
+                      <a:solidFill>
+                        <a:srgbClr val="E4DED4"/>
+                      </a:solidFill>
+                      <a:prstDash val="solid"/>
+                      <a:round/>
+                      <a:headEnd type="none" w="med" len="med"/>
+                      <a:tailEnd type="none" w="med" len="med"/>
+                    </a:lnL>
+                    <a:lnR w="6350" cap="flat" cmpd="sng" algn="ctr">
+                      <a:solidFill>
+                        <a:srgbClr val="E4DED4"/>
+                      </a:solidFill>
+                      <a:prstDash val="solid"/>
+                      <a:round/>
+                      <a:headEnd type="none" w="med" len="med"/>
+                      <a:tailEnd type="none" w="med" len="med"/>
+                    </a:lnR>
+                    <a:lnT w="6350" cap="flat" cmpd="sng" algn="ctr">
+                      <a:solidFill>
+                        <a:srgbClr val="E4DED4"/>
+                      </a:solidFill>
+                      <a:prstDash val="solid"/>
+                      <a:round/>
+                      <a:headEnd type="none" w="med" len="med"/>
+                      <a:tailEnd type="none" w="med" len="med"/>
+                    </a:lnT>
+                    <a:lnB w="6350" cap="flat" cmpd="sng" algn="ctr">
+                      <a:solidFill>
+                        <a:srgbClr val="E4DED4"/>
+                      </a:solidFill>
+                      <a:prstDash val="solid"/>
+                      <a:round/>
+                      <a:headEnd type="none" w="med" len="med"/>
+                      <a:tailEnd type="none" w="med" len="med"/>
+                    </a:lnB>
+                    <a:solidFill>
+                      <a:srgbClr val="E8F3EC"/>
+                    </a:solidFill>
+                  </a:tcPr>
+                </a:tc>
+                <a:tc>
+                  <a:txBody>
+                    <a:bodyPr/>
+                    <a:lstStyle/>
+                    <a:p>
+                      <a:pPr algn="ctr" indent="0" marL="0">
+                        <a:buNone/>
+                      </a:pPr>
+                      <a:r>
+                        <a:rPr lang="en-US" sz="950" dirty="0">
+                          <a:solidFill>
+                            <a:srgbClr val="1B1714"/>
+                          </a:solidFill>
+                          <a:latin typeface="IBM Plex Mono" pitchFamily="34" charset="0"/>
+                          <a:ea typeface="IBM Plex Mono" pitchFamily="34" charset="-122"/>
+                          <a:cs typeface="IBM Plex Mono" pitchFamily="34" charset="-120"/>
+                        </a:rPr>
                         <a:t>49%</a:t>
                       </a:r>
                       <a:endParaRPr lang="en-US" sz="950" dirty="0">
@@ -10849,13 +10849,13 @@
                       <a:r>
                         <a:rPr lang="en-US" sz="1200" b="1" dirty="0">
                           <a:solidFill>
-                            <a:srgbClr val="C1121F"/>
+                            <a:srgbClr val="1E7A4D"/>
                           </a:solidFill>
                           <a:latin typeface="Space Grotesk" pitchFamily="34" charset="0"/>
                           <a:ea typeface="Space Grotesk" pitchFamily="34" charset="-122"/>
                           <a:cs typeface="Space Grotesk" pitchFamily="34" charset="-120"/>
                         </a:rPr>
-                        <a:t>13.5x</a:t>
+                        <a:t>9.3x</a:t>
                       </a:r>
                       <a:endParaRPr lang="en-US" sz="1200" dirty="0">
                         <a:latin typeface="Space Grotesk" charset="0"/>
@@ -10917,7 +10917,7 @@
                       <a:r>
                         <a:rPr lang="en-US" sz="800" b="1" dirty="0">
                           <a:solidFill>
-                            <a:srgbClr val="6F6960"/>
+                            <a:srgbClr val="1E7A4D"/>
                           </a:solidFill>
                           <a:latin typeface="IBM Plex Mono" pitchFamily="34" charset="0"/>
                           <a:ea typeface="IBM Plex Mono" pitchFamily="34" charset="-122"/>
@@ -11012,7 +11012,7 @@
                 <a:ea typeface="IBM Plex Sans KR" pitchFamily="34" charset="-122"/>
                 <a:cs typeface="IBM Plex Sans KR" pitchFamily="34" charset="-120"/>
               </a:rPr>
-              <a:t>필요EBITDA% = 딜을 peer 하단(13x)에 맞추는 데 필요한 ex-AMPC 마진 · 현 9% 대비 전 시나리오 미달(9.3~11.4%) → 마진 개선 必</a:t>
+              <a:t>필요EBITDA% = 딜을 peer 하단(13x)에 맞추는 데 필요한 ex-AMPC 마진 · 현 13% 마진이 전 시나리오(9.3~11.4%)를 상회 → 전부 성립</a:t>
             </a:r>
             <a:endParaRPr lang="en-US" sz="750" dirty="0"/>
           </a:p>
@@ -11051,7 +11051,7 @@
                 <a:ea typeface="IBM Plex Mono" pitchFamily="34" charset="-122"/>
                 <a:cs typeface="IBM Plex Mono" pitchFamily="34" charset="-120"/>
               </a:rPr>
-              <a:t>peer 밴드(보수 8~13x) 대비 — 전 시나리오 초과</a:t>
+              <a:t>peer 밴드(보수 8~13x) 대비 — 전 시나리오 밴드 내</a:t>
             </a:r>
             <a:endParaRPr lang="en-US" sz="850" dirty="0"/>
           </a:p>
@@ -11089,7 +11089,7 @@
         <p:spPr>
           <a:xfrm>
             <a:off x="4178808" y="4992624"/>
-            <a:ext cx="2674620" cy="164592"/>
+            <a:ext cx="5349240" cy="164592"/>
           </a:xfrm>
           <a:prstGeom prst="rect">
             <a:avLst/>
@@ -11114,7 +11114,7 @@
         <p:spPr>
           <a:xfrm>
             <a:off x="4178808" y="4764024"/>
-            <a:ext cx="2674620" cy="182880"/>
+            <a:ext cx="5349240" cy="182880"/>
           </a:xfrm>
           <a:prstGeom prst="rect">
             <a:avLst/>
@@ -11152,20 +11152,18 @@
         </p:nvSpPr>
         <p:spPr>
           <a:xfrm>
-            <a:off x="7120890" y="4855464"/>
-            <a:ext cx="1604772" cy="0"/>
+            <a:off x="5569610" y="4855464"/>
+            <a:ext cx="2246681" cy="0"/>
           </a:xfrm>
           <a:prstGeom prst="line">
             <a:avLst/>
           </a:prstGeom>
           <a:noFill/>
-          <a:ln w="15875">
+          <a:ln w="25400">
             <a:solidFill>
-              <a:srgbClr val="FF8E84"/>
+              <a:srgbClr val="1E7A4D"/>
             </a:solidFill>
             <a:prstDash val="solid"/>
-            <a:headEnd type="none"/>
-            <a:tailEnd type="triangle"/>
           </a:ln>
         </p:spPr>
       </p:sp>
@@ -11177,8 +11175,8 @@
         </p:nvSpPr>
         <p:spPr>
           <a:xfrm>
-            <a:off x="6663690" y="4672584"/>
-            <a:ext cx="2519172" cy="164592"/>
+            <a:off x="5020970" y="4672584"/>
+            <a:ext cx="3343961" cy="164592"/>
           </a:xfrm>
           <a:prstGeom prst="rect">
             <a:avLst/>
@@ -11194,15 +11192,15 @@
               <a:buNone/>
             </a:pPr>
             <a:r>
-              <a:rPr lang="en-US" sz="700" dirty="0">
-                <a:solidFill>
-                  <a:srgbClr val="FF8E84"/>
+              <a:rPr lang="en-US" sz="700" b="1" dirty="0">
+                <a:solidFill>
+                  <a:srgbClr val="1E7A4D"/>
                 </a:solidFill>
                 <a:latin typeface="IBM Plex Mono" pitchFamily="34" charset="0"/>
                 <a:ea typeface="IBM Plex Mono" pitchFamily="34" charset="-122"/>
                 <a:cs typeface="IBM Plex Mono" pitchFamily="34" charset="-120"/>
               </a:rPr>
-              <a:t>조달 레버 −3.0x → 밴드 상단 진입</a:t>
+              <a:t>전 시나리오 밴드 내 (9.3~11.4x)</a:t>
             </a:r>
             <a:endParaRPr lang="en-US" sz="700" dirty="0"/>
           </a:p>
@@ -11216,14 +11214,14 @@
         </p:nvSpPr>
         <p:spPr>
           <a:xfrm>
-            <a:off x="8679942" y="5029200"/>
+            <a:off x="7770571" y="5029200"/>
             <a:ext cx="91440" cy="91440"/>
           </a:xfrm>
           <a:prstGeom prst="ellipse">
             <a:avLst/>
           </a:prstGeom>
           <a:solidFill>
-            <a:srgbClr val="C1121F"/>
+            <a:srgbClr val="1E7A4D"/>
           </a:solidFill>
           <a:ln/>
         </p:spPr>
@@ -11236,7 +11234,7 @@
         </p:nvSpPr>
         <p:spPr>
           <a:xfrm>
-            <a:off x="8085582" y="5166360"/>
+            <a:off x="7176211" y="5166360"/>
             <a:ext cx="1280160" cy="182880"/>
           </a:xfrm>
           <a:prstGeom prst="rect">
@@ -11255,13 +11253,13 @@
             <a:r>
               <a:rPr lang="en-US" sz="750" b="1" dirty="0">
                 <a:solidFill>
-                  <a:srgbClr val="C1121F"/>
+                  <a:srgbClr val="1E7A4D"/>
                 </a:solidFill>
                 <a:latin typeface="IBM Plex Mono" pitchFamily="34" charset="0"/>
                 <a:ea typeface="IBM Plex Mono" pitchFamily="34" charset="-122"/>
                 <a:cs typeface="IBM Plex Mono" pitchFamily="34" charset="-120"/>
               </a:rPr>
-              <a:t>BASE 16.5x</a:t>
+              <a:t>BASE 11.4x</a:t>
             </a:r>
             <a:endParaRPr lang="en-US" sz="750" dirty="0"/>
           </a:p>
@@ -11275,47 +11273,7 @@
         </p:nvSpPr>
         <p:spPr>
           <a:xfrm>
-            <a:off x="7931048" y="5029200"/>
-            <a:ext cx="91440" cy="91440"/>
-          </a:xfrm>
-          <a:prstGeom prst="ellipse">
-            <a:avLst/>
-          </a:prstGeom>
-          <a:solidFill>
-            <a:srgbClr val="C1121F"/>
-          </a:solidFill>
-          <a:ln/>
-        </p:spPr>
-      </p:sp>
-      <p:sp>
-        <p:nvSpPr>
-          <p:cNvPr id="50" name="Shape 47"/>
-          <p:cNvSpPr/>
-          <p:nvPr/>
-        </p:nvSpPr>
-        <p:spPr>
-          <a:xfrm>
-            <a:off x="7342632" y="5029200"/>
-            <a:ext cx="91440" cy="91440"/>
-          </a:xfrm>
-          <a:prstGeom prst="ellipse">
-            <a:avLst/>
-          </a:prstGeom>
-          <a:solidFill>
-            <a:srgbClr val="8A5A55"/>
-          </a:solidFill>
-          <a:ln/>
-        </p:spPr>
-      </p:sp>
-      <p:sp>
-        <p:nvSpPr>
-          <p:cNvPr id="51" name="Shape 48"/>
-          <p:cNvSpPr/>
-          <p:nvPr/>
-        </p:nvSpPr>
-        <p:spPr>
-          <a:xfrm>
-            <a:off x="7075170" y="5029200"/>
+            <a:off x="6807708" y="5029200"/>
             <a:ext cx="91440" cy="91440"/>
           </a:xfrm>
           <a:prstGeom prst="ellipse">
@@ -11329,13 +11287,53 @@
       </p:sp>
       <p:sp>
         <p:nvSpPr>
+          <p:cNvPr id="50" name="Shape 47"/>
+          <p:cNvSpPr/>
+          <p:nvPr/>
+        </p:nvSpPr>
+        <p:spPr>
+          <a:xfrm>
+            <a:off x="5951830" y="5029200"/>
+            <a:ext cx="91440" cy="91440"/>
+          </a:xfrm>
+          <a:prstGeom prst="ellipse">
+            <a:avLst/>
+          </a:prstGeom>
+          <a:solidFill>
+            <a:srgbClr val="1E7A4D"/>
+          </a:solidFill>
+          <a:ln/>
+        </p:spPr>
+      </p:sp>
+      <p:sp>
+        <p:nvSpPr>
+          <p:cNvPr id="51" name="Shape 48"/>
+          <p:cNvSpPr/>
+          <p:nvPr/>
+        </p:nvSpPr>
+        <p:spPr>
+          <a:xfrm>
+            <a:off x="5523890" y="5029200"/>
+            <a:ext cx="91440" cy="91440"/>
+          </a:xfrm>
+          <a:prstGeom prst="ellipse">
+            <a:avLst/>
+          </a:prstGeom>
+          <a:solidFill>
+            <a:srgbClr val="1E7A4D"/>
+          </a:solidFill>
+          <a:ln/>
+        </p:spPr>
+      </p:sp>
+      <p:sp>
+        <p:nvSpPr>
           <p:cNvPr id="52" name="Text 49"/>
           <p:cNvSpPr/>
           <p:nvPr/>
         </p:nvSpPr>
         <p:spPr>
           <a:xfrm>
-            <a:off x="6480810" y="5166360"/>
+            <a:off x="4929530" y="5166360"/>
             <a:ext cx="1280160" cy="182880"/>
           </a:xfrm>
           <a:prstGeom prst="rect">
@@ -11360,7 +11358,7 @@
                 <a:ea typeface="IBM Plex Mono" pitchFamily="34" charset="-122"/>
                 <a:cs typeface="IBM Plex Mono" pitchFamily="34" charset="-120"/>
               </a:rPr>
-              <a:t>최대 13.5x</a:t>
+              <a:t>최대 9.3x</a:t>
             </a:r>
             <a:endParaRPr lang="en-US" sz="750" dirty="0"/>
           </a:p>
@@ -11413,7 +11411,7 @@
         </p:nvSpPr>
         <p:spPr>
           <a:xfrm>
-            <a:off x="5509260" y="5330952"/>
+            <a:off x="4974336" y="5330952"/>
             <a:ext cx="548640" cy="164592"/>
           </a:xfrm>
           <a:prstGeom prst="rect">
@@ -11438,7 +11436,7 @@
                 <a:ea typeface="IBM Plex Mono" pitchFamily="34" charset="-122"/>
                 <a:cs typeface="IBM Plex Mono" pitchFamily="34" charset="-120"/>
               </a:rPr>
-              <a:t>11x</a:t>
+              <a:t>9x</a:t>
             </a:r>
             <a:endParaRPr lang="en-US" sz="700" dirty="0"/>
           </a:p>
@@ -11452,7 +11450,7 @@
         </p:nvSpPr>
         <p:spPr>
           <a:xfrm>
-            <a:off x="6579108" y="5330952"/>
+            <a:off x="6044184" y="5330952"/>
             <a:ext cx="548640" cy="164592"/>
           </a:xfrm>
           <a:prstGeom prst="rect">
@@ -11477,7 +11475,7 @@
                 <a:ea typeface="IBM Plex Mono" pitchFamily="34" charset="-122"/>
                 <a:cs typeface="IBM Plex Mono" pitchFamily="34" charset="-120"/>
               </a:rPr>
-              <a:t>13x</a:t>
+              <a:t>10x</a:t>
             </a:r>
             <a:endParaRPr lang="en-US" sz="700" dirty="0"/>
           </a:p>
@@ -11491,7 +11489,7 @@
         </p:nvSpPr>
         <p:spPr>
           <a:xfrm>
-            <a:off x="7648956" y="5330952"/>
+            <a:off x="7114032" y="5330952"/>
             <a:ext cx="548640" cy="164592"/>
           </a:xfrm>
           <a:prstGeom prst="rect">
@@ -11516,7 +11514,7 @@
                 <a:ea typeface="IBM Plex Mono" pitchFamily="34" charset="-122"/>
                 <a:cs typeface="IBM Plex Mono" pitchFamily="34" charset="-120"/>
               </a:rPr>
-              <a:t>15x</a:t>
+              <a:t>11x</a:t>
             </a:r>
             <a:endParaRPr lang="en-US" sz="700" dirty="0"/>
           </a:p>
@@ -11530,7 +11528,7 @@
         </p:nvSpPr>
         <p:spPr>
           <a:xfrm>
-            <a:off x="8718804" y="5330952"/>
+            <a:off x="8183880" y="5330952"/>
             <a:ext cx="548640" cy="164592"/>
           </a:xfrm>
           <a:prstGeom prst="rect">
@@ -11555,7 +11553,7 @@
                 <a:ea typeface="IBM Plex Mono" pitchFamily="34" charset="-122"/>
                 <a:cs typeface="IBM Plex Mono" pitchFamily="34" charset="-120"/>
               </a:rPr>
-              <a:t>17x</a:t>
+              <a:t>12x</a:t>
             </a:r>
             <a:endParaRPr lang="en-US" sz="700" dirty="0"/>
           </a:p>
@@ -11563,7 +11561,46 @@
       </p:sp>
       <p:sp>
         <p:nvSpPr>
-          <p:cNvPr id="58" name="Shape 55"/>
+          <p:cNvPr id="58" name="Text 55"/>
+          <p:cNvSpPr/>
+          <p:nvPr/>
+        </p:nvSpPr>
+        <p:spPr>
+          <a:xfrm>
+            <a:off x="9253728" y="5330952"/>
+            <a:ext cx="548640" cy="164592"/>
+          </a:xfrm>
+          <a:prstGeom prst="rect">
+            <a:avLst/>
+          </a:prstGeom>
+          <a:noFill/>
+          <a:ln/>
+        </p:spPr>
+        <p:txBody>
+          <a:bodyPr wrap="square" lIns="0" tIns="0" rIns="0" bIns="0" rtlCol="0" anchor="ctr"/>
+          <a:lstStyle/>
+          <a:p>
+            <a:pPr algn="ctr" indent="0" marL="0">
+              <a:buNone/>
+            </a:pPr>
+            <a:r>
+              <a:rPr lang="en-US" sz="700" dirty="0">
+                <a:solidFill>
+                  <a:srgbClr val="9A847C"/>
+                </a:solidFill>
+                <a:latin typeface="IBM Plex Mono" pitchFamily="34" charset="0"/>
+                <a:ea typeface="IBM Plex Mono" pitchFamily="34" charset="-122"/>
+                <a:cs typeface="IBM Plex Mono" pitchFamily="34" charset="-120"/>
+              </a:rPr>
+              <a:t>13x</a:t>
+            </a:r>
+            <a:endParaRPr lang="en-US" sz="700" dirty="0"/>
+          </a:p>
+        </p:txBody>
+      </p:sp>
+      <p:sp>
+        <p:nvSpPr>
+          <p:cNvPr id="59" name="Shape 56"/>
           <p:cNvSpPr/>
           <p:nvPr/>
         </p:nvSpPr>
@@ -11585,7 +11622,7 @@
       </p:sp>
       <p:sp>
         <p:nvSpPr>
-          <p:cNvPr id="59" name="Text 56"/>
+          <p:cNvPr id="60" name="Text 57"/>
           <p:cNvSpPr/>
           <p:nvPr/>
         </p:nvSpPr>
@@ -11616,7 +11653,7 @@
                 <a:ea typeface="Noto Serif KR" pitchFamily="34" charset="-122"/>
                 <a:cs typeface="Noto Serif KR" pitchFamily="34" charset="-120"/>
               </a:rPr>
-              <a:t>결론 — BA 18GW: 최대결합만 정상화 peer 밴드 하단에 진입</a:t>
+              <a:t>결론 — ex-AMPC EBITDA 13%면 전 시나리오가 peer 밴드에 든다</a:t>
             </a:r>
             <a:endParaRPr lang="en-US" sz="1300" dirty="0"/>
           </a:p>
@@ -11624,7 +11661,7 @@
       </p:sp>
       <p:sp>
         <p:nvSpPr>
-          <p:cNvPr id="60" name="Text 57"/>
+          <p:cNvPr id="61" name="Text 58"/>
           <p:cNvSpPr/>
           <p:nvPr/>
         </p:nvSpPr>
@@ -11658,7 +11695,7 @@
                 <a:ea typeface="IBM Plex Sans KR" pitchFamily="34" charset="-122"/>
                 <a:cs typeface="IBM Plex Sans KR" pitchFamily="34" charset="-120"/>
               </a:rPr>
-              <a:t>BA를 18GW로 축소하면 run-rate ex-AMPC EBITDA가 </a:t>
+              <a:t>ex-AMPC EBITDA 마진을 9%→13%로 올리면 run-rate EBITDA가 </a:t>
             </a:r>
             <a:pPr indent="0" marL="0">
               <a:lnSpc>
@@ -11669,13 +11706,13 @@
             <a:r>
               <a:rPr lang="en-US" sz="950" b="1" dirty="0">
                 <a:solidFill>
-                  <a:srgbClr val="FF8E84"/>
+                  <a:srgbClr val="86D6A6"/>
                 </a:solidFill>
                 <a:latin typeface="IBM Plex Sans KR" pitchFamily="34" charset="0"/>
                 <a:ea typeface="IBM Plex Sans KR" pitchFamily="34" charset="-122"/>
                 <a:cs typeface="IBM Plex Sans KR" pitchFamily="34" charset="-120"/>
               </a:rPr>
-              <a:t>$554→$518mm</a:t>
+              <a:t>$518→$748mm</a:t>
             </a:r>
             <a:pPr indent="0" marL="0">
               <a:lnSpc>
@@ -11692,7 +11729,7 @@
                 <a:ea typeface="IBM Plex Sans KR" pitchFamily="34" charset="-122"/>
                 <a:cs typeface="IBM Plex Sans KR" pitchFamily="34" charset="-120"/>
               </a:rPr>
-              <a:t>로 줄어 역산 필요 멀티플이 </a:t>
+              <a:t>로 커져 역산 필요 멀티플이 </a:t>
             </a:r>
             <a:pPr indent="0" marL="0">
               <a:lnSpc>
@@ -11703,13 +11740,13 @@
             <a:r>
               <a:rPr lang="en-US" sz="950" b="1" dirty="0">
                 <a:solidFill>
-                  <a:srgbClr val="FF8E84"/>
+                  <a:srgbClr val="86D6A6"/>
                 </a:solidFill>
                 <a:latin typeface="IBM Plex Sans KR" pitchFamily="34" charset="0"/>
                 <a:ea typeface="IBM Plex Sans KR" pitchFamily="34" charset="-122"/>
                 <a:cs typeface="IBM Plex Sans KR" pitchFamily="34" charset="-120"/>
               </a:rPr>
-              <a:t>BASE 16.5x → 최대결합 13.5x</a:t>
+              <a:t>BASE 11.4x → 최대결합 9.3x</a:t>
             </a:r>
             <a:pPr indent="0" marL="0">
               <a:lnSpc>
@@ -11726,7 +11763,7 @@
                 <a:ea typeface="IBM Plex Sans KR" pitchFamily="34" charset="-122"/>
                 <a:cs typeface="IBM Plex Sans KR" pitchFamily="34" charset="-120"/>
               </a:rPr>
-              <a:t>로 상승. 그랜트20+희석49(최대결합)면 13.5x로 </a:t>
+              <a:t>로 하락, </a:t>
             </a:r>
             <a:pPr indent="0" marL="0">
               <a:lnSpc>
@@ -11737,13 +11774,13 @@
             <a:r>
               <a:rPr lang="en-US" sz="950" b="1" dirty="0">
                 <a:solidFill>
-                  <a:srgbClr val="FF8E84"/>
+                  <a:srgbClr val="86D6A6"/>
                 </a:solidFill>
                 <a:latin typeface="IBM Plex Sans KR" pitchFamily="34" charset="0"/>
                 <a:ea typeface="IBM Plex Sans KR" pitchFamily="34" charset="-122"/>
                 <a:cs typeface="IBM Plex Sans KR" pitchFamily="34" charset="-120"/>
               </a:rPr>
-              <a:t>정상화 peer(13~15x) 하단 진입, BASE는 16.5x로 초과</a:t>
+              <a:t>전 시나리오가 peer 밴드(8~13x) 내</a:t>
             </a:r>
             <a:pPr indent="0" marL="0">
               <a:lnSpc>
@@ -11760,7 +11797,7 @@
                 <a:ea typeface="IBM Plex Sans KR" pitchFamily="34" charset="-122"/>
                 <a:cs typeface="IBM Plex Sans KR" pitchFamily="34" charset="-120"/>
               </a:rPr>
-              <a:t>(2029E 분모면 16.6~20.3x). DCF 내재 </a:t>
+              <a:t>(2029E 분모면 11.5~14.0x). DCF 내재 </a:t>
             </a:r>
             <a:pPr indent="0" marL="0">
               <a:lnSpc>
@@ -11777,7 +11814,7 @@
                 <a:ea typeface="IBM Plex Sans KR" pitchFamily="34" charset="-122"/>
                 <a:cs typeface="IBM Plex Sans KR" pitchFamily="34" charset="-120"/>
               </a:rPr>
-              <a:t>8.5x는 여전히 할인</a:t>
+              <a:t>8.1x</a:t>
             </a:r>
             <a:pPr indent="0" marL="0">
               <a:lnSpc>
@@ -11794,7 +11831,7 @@
                 <a:ea typeface="IBM Plex Sans KR" pitchFamily="34" charset="-122"/>
                 <a:cs typeface="IBM Plex Sans KR" pitchFamily="34" charset="-120"/>
               </a:rPr>
-              <a:t>. 규모 축소가 지분조달 여력 악화 → 마진 개선(</a:t>
+              <a:t>. AMPC 비중도 </a:t>
             </a:r>
             <a:pPr indent="0" marL="0">
               <a:lnSpc>
@@ -11811,7 +11848,7 @@
                 <a:ea typeface="IBM Plex Sans KR" pitchFamily="34" charset="-122"/>
                 <a:cs typeface="IBM Plex Sans KR" pitchFamily="34" charset="-120"/>
               </a:rPr>
-              <a:t>필요 EBITDA% 9.3~11.4%</a:t>
+              <a:t>76→55%</a:t>
             </a:r>
             <a:pPr indent="0" marL="0">
               <a:lnSpc>
@@ -11828,7 +11865,7 @@
                 <a:ea typeface="IBM Plex Sans KR" pitchFamily="34" charset="-122"/>
                 <a:cs typeface="IBM Plex Sans KR" pitchFamily="34" charset="-120"/>
               </a:rPr>
-              <a:t>)이 관건. WACC10.5%·TGR2%·순차입 $6.4bn ★</a:t>
+              <a:t>로 낮아져 사업 자생력↑ — 마진이 딜 성립의 핵심 레버. WACC10.5%·TGR2%·순차입 $6.4bn ★</a:t>
             </a:r>
             <a:endParaRPr lang="en-US" sz="950" dirty="0"/>
           </a:p>
@@ -11836,7 +11873,7 @@
       </p:sp>
       <p:sp>
         <p:nvSpPr>
-          <p:cNvPr id="61" name="Shape 58"/>
+          <p:cNvPr id="62" name="Shape 59"/>
           <p:cNvSpPr/>
           <p:nvPr/>
         </p:nvSpPr>
@@ -11859,7 +11896,7 @@
       </p:sp>
       <p:sp>
         <p:nvSpPr>
-          <p:cNvPr id="62" name="Text 59"/>
+          <p:cNvPr id="63" name="Text 60"/>
           <p:cNvSpPr/>
           <p:nvPr/>
         </p:nvSpPr>
@@ -11898,7 +11935,7 @@
       </p:sp>
       <p:sp>
         <p:nvSpPr>
-          <p:cNvPr id="63" name="Text 60"/>
+          <p:cNvPr id="64" name="Text 61"/>
           <p:cNvSpPr/>
           <p:nvPr/>
         </p:nvSpPr>
@@ -14148,7 +14185,7 @@
                           <a:ea typeface="IBM Plex Mono" pitchFamily="34" charset="-122"/>
                           <a:cs typeface="IBM Plex Mono" pitchFamily="34" charset="-120"/>
                         </a:rPr>
-                        <a:t>$518mm</a:t>
+                        <a:t>$748mm</a:t>
                       </a:r>
                       <a:endParaRPr lang="en-US" sz="950" dirty="0">
                         <a:latin typeface="IBM Plex Mono" charset="0"/>
@@ -14216,7 +14253,7 @@
                           <a:ea typeface="Space Grotesk" pitchFamily="34" charset="-122"/>
                           <a:cs typeface="Space Grotesk" pitchFamily="34" charset="-120"/>
                         </a:rPr>
-                        <a:t>8.5x</a:t>
+                        <a:t>8.1x</a:t>
                       </a:r>
                       <a:endParaRPr lang="en-US" sz="1150" dirty="0">
                         <a:latin typeface="Space Grotesk" charset="0"/>
@@ -14284,7 +14321,7 @@
                           <a:ea typeface="IBM Plex Mono" pitchFamily="34" charset="-122"/>
                           <a:cs typeface="IBM Plex Mono" pitchFamily="34" charset="-120"/>
                         </a:rPr>
-                        <a:t>13.5~16.5x</a:t>
+                        <a:t>9.3~11.4x</a:t>
                       </a:r>
                       <a:endParaRPr lang="en-US" sz="950" dirty="0">
                         <a:latin typeface="IBM Plex Mono" charset="0"/>
@@ -14422,7 +14459,7 @@
                           <a:ea typeface="IBM Plex Mono" pitchFamily="34" charset="-122"/>
                           <a:cs typeface="IBM Plex Mono" pitchFamily="34" charset="-120"/>
                         </a:rPr>
-                        <a:t>$421mm</a:t>
+                        <a:t>$607mm</a:t>
                       </a:r>
                       <a:endParaRPr lang="en-US" sz="950" dirty="0">
                         <a:latin typeface="IBM Plex Mono" charset="0"/>
@@ -14490,7 +14527,7 @@
                           <a:ea typeface="Space Grotesk" pitchFamily="34" charset="-122"/>
                           <a:cs typeface="Space Grotesk" pitchFamily="34" charset="-120"/>
                         </a:rPr>
-                        <a:t>10.5x</a:t>
+                        <a:t>9.9x</a:t>
                       </a:r>
                       <a:endParaRPr lang="en-US" sz="1150" dirty="0">
                         <a:latin typeface="Space Grotesk" charset="0"/>
@@ -14558,7 +14595,7 @@
                           <a:ea typeface="IBM Plex Mono" pitchFamily="34" charset="-122"/>
                           <a:cs typeface="IBM Plex Mono" pitchFamily="34" charset="-120"/>
                         </a:rPr>
-                        <a:t>16.6~20.3x</a:t>
+                        <a:t>11.5~14.0x</a:t>
                       </a:r>
                       <a:endParaRPr lang="en-US" sz="950" dirty="0">
                         <a:latin typeface="IBM Plex Mono" charset="0"/>
@@ -14711,7 +14748,7 @@
                 <a:ea typeface="IBM Plex Sans KR" pitchFamily="34" charset="-122"/>
                 <a:cs typeface="IBM Plex Sans KR" pitchFamily="34" charset="-120"/>
               </a:rPr>
-              <a:t>× $518mm  → EV $6.7bn  </a:t>
+              <a:t>× $748mm  → EV $9.7bn  </a:t>
             </a:r>
             <a:pPr indent="0" marL="0">
               <a:lnSpc>
@@ -14728,7 +14765,7 @@
                 <a:ea typeface="IBM Plex Sans KR" pitchFamily="34" charset="-122"/>
                 <a:cs typeface="IBM Plex Sans KR" pitchFamily="34" charset="-120"/>
               </a:rPr>
-              <a:t>지분 +$0.3bn
+              <a:t>지분 +$3.3bn
 </a:t>
             </a:r>
             <a:pPr indent="0" marL="0">
@@ -14746,7 +14783,7 @@
                 <a:ea typeface="IBM Plex Sans KR" pitchFamily="34" charset="-122"/>
                 <a:cs typeface="IBM Plex Sans KR" pitchFamily="34" charset="-120"/>
               </a:rPr>
-              <a:t>× $421mm  → EV $5.5bn  </a:t>
+              <a:t>× $607mm  → EV $7.9bn  </a:t>
             </a:r>
             <a:pPr indent="0" marL="0">
               <a:lnSpc>
@@ -14757,13 +14794,13 @@
             <a:r>
               <a:rPr lang="en-US" sz="1000" b="1" dirty="0">
                 <a:solidFill>
-                  <a:srgbClr val="FF8E84"/>
+                  <a:srgbClr val="86D6A6"/>
                 </a:solidFill>
                 <a:latin typeface="IBM Plex Sans KR" pitchFamily="34" charset="0"/>
                 <a:ea typeface="IBM Plex Sans KR" pitchFamily="34" charset="-122"/>
                 <a:cs typeface="IBM Plex Sans KR" pitchFamily="34" charset="-120"/>
               </a:rPr>
-              <a:t>지분 −$0.9bn</a:t>
+              <a:t>지분 +$1.5bn</a:t>
             </a:r>
             <a:endParaRPr lang="en-US" sz="1000" dirty="0"/>
           </a:p>
@@ -14802,7 +14839,7 @@
                 <a:ea typeface="IBM Plex Mono" pitchFamily="34" charset="-122"/>
                 <a:cs typeface="IBM Plex Mono" pitchFamily="34" charset="-120"/>
               </a:rPr>
-              <a:t>풋볼필드 — 내재 EV ($bn) · run-rate $518mm 기준 · 보수/정상화 peer vs 역산 필요</a:t>
+              <a:t>풋볼필드 — 내재 EV ($bn) · run-rate $748mm 기준 · 보수/정상화 peer vs 역산 필요</a:t>
             </a:r>
             <a:endParaRPr lang="en-US" sz="850" dirty="0"/>
           </a:p>
@@ -14839,8 +14876,8 @@
         </p:nvSpPr>
         <p:spPr>
           <a:xfrm>
-            <a:off x="2345893" y="5394960"/>
-            <a:ext cx="3730066" cy="182880"/>
+            <a:off x="1913839" y="5394960"/>
+            <a:ext cx="4616806" cy="182880"/>
           </a:xfrm>
           <a:prstGeom prst="rect">
             <a:avLst/>
@@ -14864,8 +14901,8 @@
         </p:nvSpPr>
         <p:spPr>
           <a:xfrm>
-            <a:off x="2345893" y="5605272"/>
-            <a:ext cx="3730066" cy="182880"/>
+            <a:off x="1913839" y="5605272"/>
+            <a:ext cx="4616806" cy="182880"/>
           </a:xfrm>
           <a:prstGeom prst="rect">
             <a:avLst/>
@@ -14889,7 +14926,7 @@
                 <a:ea typeface="IBM Plex Mono" pitchFamily="34" charset="-122"/>
                 <a:cs typeface="IBM Plex Mono" pitchFamily="34" charset="-120"/>
               </a:rPr>
-              <a:t>보수 8~13x  $4.1~6.7bn</a:t>
+              <a:t>보수 8~13x  $6.0~9.7bn</a:t>
             </a:r>
             <a:endParaRPr lang="en-US" sz="750" dirty="0"/>
           </a:p>
@@ -14903,8 +14940,8 @@
         </p:nvSpPr>
         <p:spPr>
           <a:xfrm>
-            <a:off x="6075959" y="5394960"/>
-            <a:ext cx="1497787" cy="182880"/>
+            <a:off x="6530645" y="5394960"/>
+            <a:ext cx="1851660" cy="182880"/>
           </a:xfrm>
           <a:prstGeom prst="rect">
             <a:avLst/>
@@ -14928,8 +14965,8 @@
         </p:nvSpPr>
         <p:spPr>
           <a:xfrm>
-            <a:off x="5801639" y="5175504"/>
-            <a:ext cx="2320747" cy="182880"/>
+            <a:off x="6256325" y="5175504"/>
+            <a:ext cx="2674620" cy="182880"/>
           </a:xfrm>
           <a:prstGeom prst="rect">
             <a:avLst/>
@@ -14953,7 +14990,7 @@
                 <a:ea typeface="IBM Plex Mono" pitchFamily="34" charset="-122"/>
                 <a:cs typeface="IBM Plex Mono" pitchFamily="34" charset="-120"/>
               </a:rPr>
-              <a:t>정상화 13~15x  $6.7~7.8bn</a:t>
+              <a:t>정상화 13~15x  $9.7~11.2bn</a:t>
             </a:r>
             <a:endParaRPr lang="en-US" sz="750" dirty="0"/>
           </a:p>
@@ -14967,8 +15004,8 @@
         </p:nvSpPr>
         <p:spPr>
           <a:xfrm>
-            <a:off x="6450406" y="5212080"/>
-            <a:ext cx="2246681" cy="0"/>
+            <a:off x="3123590" y="5212080"/>
+            <a:ext cx="1938071" cy="0"/>
           </a:xfrm>
           <a:prstGeom prst="line">
             <a:avLst/>
@@ -14990,8 +15027,8 @@
         </p:nvSpPr>
         <p:spPr>
           <a:xfrm>
-            <a:off x="6176086" y="5010912"/>
-            <a:ext cx="3069641" cy="182880"/>
+            <a:off x="2849270" y="5010912"/>
+            <a:ext cx="2761031" cy="182880"/>
           </a:xfrm>
           <a:prstGeom prst="rect">
             <a:avLst/>
@@ -15015,7 +15052,7 @@
                 <a:ea typeface="IBM Plex Mono" pitchFamily="34" charset="-122"/>
                 <a:cs typeface="IBM Plex Mono" pitchFamily="34" charset="-120"/>
               </a:rPr>
-              <a:t>역산 필요 13.5~16.5x</a:t>
+              <a:t>역산 필요 9.3~11.4x</a:t>
             </a:r>
             <a:endParaRPr lang="en-US" sz="750" dirty="0"/>
           </a:p>
@@ -15029,7 +15066,7 @@
         </p:nvSpPr>
         <p:spPr>
           <a:xfrm>
-            <a:off x="5600700" y="5340096"/>
+            <a:off x="2432304" y="5340096"/>
             <a:ext cx="0" cy="292608"/>
           </a:xfrm>
           <a:prstGeom prst="line">
@@ -15052,7 +15089,7 @@
         </p:nvSpPr>
         <p:spPr>
           <a:xfrm>
-            <a:off x="4869180" y="5760720"/>
+            <a:off x="1700784" y="5760720"/>
             <a:ext cx="1463040" cy="164592"/>
           </a:xfrm>
           <a:prstGeom prst="rect">
@@ -15091,7 +15128,7 @@
         </p:nvSpPr>
         <p:spPr>
           <a:xfrm>
-            <a:off x="2679878" y="5431536"/>
+            <a:off x="1920697" y="5431536"/>
             <a:ext cx="109728" cy="109728"/>
           </a:xfrm>
           <a:prstGeom prst="ellipse">
@@ -15111,7 +15148,7 @@
         </p:nvSpPr>
         <p:spPr>
           <a:xfrm>
-            <a:off x="1957502" y="5175504"/>
+            <a:off x="1198321" y="5175504"/>
             <a:ext cx="1554480" cy="182880"/>
           </a:xfrm>
           <a:prstGeom prst="rect">
@@ -15136,7 +15173,7 @@
                 <a:ea typeface="IBM Plex Mono" pitchFamily="34" charset="-122"/>
                 <a:cs typeface="IBM Plex Mono" pitchFamily="34" charset="-120"/>
               </a:rPr>
-              <a:t>DCF $4.4bn·8.5x</a:t>
+              <a:t>DCF $6.0bn·8.1x</a:t>
             </a:r>
             <a:endParaRPr lang="en-US" sz="750" dirty="0"/>
           </a:p>
@@ -15175,7 +15212,7 @@
                 <a:ea typeface="IBM Plex Mono" pitchFamily="34" charset="-122"/>
                 <a:cs typeface="IBM Plex Mono" pitchFamily="34" charset="-120"/>
               </a:rPr>
-              <a:t>$3bn</a:t>
+              <a:t>$5bn</a:t>
             </a:r>
             <a:endParaRPr lang="en-US" sz="650" dirty="0"/>
           </a:p>
@@ -15189,7 +15226,7 @@
         </p:nvSpPr>
         <p:spPr>
           <a:xfrm>
-            <a:off x="1869948" y="5888736"/>
+            <a:off x="1664208" y="5888736"/>
             <a:ext cx="548640" cy="146304"/>
           </a:xfrm>
           <a:prstGeom prst="rect">
@@ -15214,7 +15251,7 @@
                 <a:ea typeface="IBM Plex Mono" pitchFamily="34" charset="-122"/>
                 <a:cs typeface="IBM Plex Mono" pitchFamily="34" charset="-120"/>
               </a:rPr>
-              <a:t>$4bn</a:t>
+              <a:t>$6bn</a:t>
             </a:r>
             <a:endParaRPr lang="en-US" sz="650" dirty="0"/>
           </a:p>
@@ -15228,7 +15265,7 @@
         </p:nvSpPr>
         <p:spPr>
           <a:xfrm>
-            <a:off x="3310128" y="5888736"/>
+            <a:off x="2898648" y="5888736"/>
             <a:ext cx="548640" cy="146304"/>
           </a:xfrm>
           <a:prstGeom prst="rect">
@@ -15253,7 +15290,7 @@
                 <a:ea typeface="IBM Plex Mono" pitchFamily="34" charset="-122"/>
                 <a:cs typeface="IBM Plex Mono" pitchFamily="34" charset="-120"/>
               </a:rPr>
-              <a:t>$5bn</a:t>
+              <a:t>$7bn</a:t>
             </a:r>
             <a:endParaRPr lang="en-US" sz="650" dirty="0"/>
           </a:p>
@@ -15267,7 +15304,7 @@
         </p:nvSpPr>
         <p:spPr>
           <a:xfrm>
-            <a:off x="4750308" y="5888736"/>
+            <a:off x="4133088" y="5888736"/>
             <a:ext cx="548640" cy="146304"/>
           </a:xfrm>
           <a:prstGeom prst="rect">
@@ -15292,7 +15329,7 @@
                 <a:ea typeface="IBM Plex Mono" pitchFamily="34" charset="-122"/>
                 <a:cs typeface="IBM Plex Mono" pitchFamily="34" charset="-120"/>
               </a:rPr>
-              <a:t>$6bn</a:t>
+              <a:t>$8bn</a:t>
             </a:r>
             <a:endParaRPr lang="en-US" sz="650" dirty="0"/>
           </a:p>
@@ -15306,7 +15343,7 @@
         </p:nvSpPr>
         <p:spPr>
           <a:xfrm>
-            <a:off x="6190488" y="5888736"/>
+            <a:off x="5367528" y="5888736"/>
             <a:ext cx="548640" cy="146304"/>
           </a:xfrm>
           <a:prstGeom prst="rect">
@@ -15331,7 +15368,7 @@
                 <a:ea typeface="IBM Plex Mono" pitchFamily="34" charset="-122"/>
                 <a:cs typeface="IBM Plex Mono" pitchFamily="34" charset="-120"/>
               </a:rPr>
-              <a:t>$7bn</a:t>
+              <a:t>$9bn</a:t>
             </a:r>
             <a:endParaRPr lang="en-US" sz="650" dirty="0"/>
           </a:p>
@@ -15345,7 +15382,7 @@
         </p:nvSpPr>
         <p:spPr>
           <a:xfrm>
-            <a:off x="7630668" y="5888736"/>
+            <a:off x="6601968" y="5888736"/>
             <a:ext cx="548640" cy="146304"/>
           </a:xfrm>
           <a:prstGeom prst="rect">
@@ -15370,7 +15407,7 @@
                 <a:ea typeface="IBM Plex Mono" pitchFamily="34" charset="-122"/>
                 <a:cs typeface="IBM Plex Mono" pitchFamily="34" charset="-120"/>
               </a:rPr>
-              <a:t>$8bn</a:t>
+              <a:t>$10bn</a:t>
             </a:r>
             <a:endParaRPr lang="en-US" sz="650" dirty="0"/>
           </a:p>
@@ -15384,7 +15421,7 @@
         </p:nvSpPr>
         <p:spPr>
           <a:xfrm>
-            <a:off x="9070848" y="5888736"/>
+            <a:off x="7836408" y="5888736"/>
             <a:ext cx="548640" cy="146304"/>
           </a:xfrm>
           <a:prstGeom prst="rect">
@@ -15409,7 +15446,7 @@
                 <a:ea typeface="IBM Plex Mono" pitchFamily="34" charset="-122"/>
                 <a:cs typeface="IBM Plex Mono" pitchFamily="34" charset="-120"/>
               </a:rPr>
-              <a:t>$9bn</a:t>
+              <a:t>$11bn</a:t>
             </a:r>
             <a:endParaRPr lang="en-US" sz="650" dirty="0"/>
           </a:p>
@@ -15417,7 +15454,46 @@
       </p:sp>
       <p:sp>
         <p:nvSpPr>
-          <p:cNvPr id="34" name="Shape 30"/>
+          <p:cNvPr id="34" name="Text 30"/>
+          <p:cNvSpPr/>
+          <p:nvPr/>
+        </p:nvSpPr>
+        <p:spPr>
+          <a:xfrm>
+            <a:off x="9070848" y="5888736"/>
+            <a:ext cx="548640" cy="146304"/>
+          </a:xfrm>
+          <a:prstGeom prst="rect">
+            <a:avLst/>
+          </a:prstGeom>
+          <a:noFill/>
+          <a:ln/>
+        </p:spPr>
+        <p:txBody>
+          <a:bodyPr wrap="square" lIns="0" tIns="0" rIns="0" bIns="0" rtlCol="0" anchor="ctr"/>
+          <a:lstStyle/>
+          <a:p>
+            <a:pPr algn="ctr" indent="0" marL="0">
+              <a:buNone/>
+            </a:pPr>
+            <a:r>
+              <a:rPr lang="en-US" sz="650" dirty="0">
+                <a:solidFill>
+                  <a:srgbClr val="9A847C"/>
+                </a:solidFill>
+                <a:latin typeface="IBM Plex Mono" pitchFamily="34" charset="0"/>
+                <a:ea typeface="IBM Plex Mono" pitchFamily="34" charset="-122"/>
+                <a:cs typeface="IBM Plex Mono" pitchFamily="34" charset="-120"/>
+              </a:rPr>
+              <a:t>$12bn</a:t>
+            </a:r>
+            <a:endParaRPr lang="en-US" sz="650" dirty="0"/>
+          </a:p>
+        </p:txBody>
+      </p:sp>
+      <p:sp>
+        <p:nvSpPr>
+          <p:cNvPr id="35" name="Shape 31"/>
           <p:cNvSpPr/>
           <p:nvPr/>
         </p:nvSpPr>
@@ -15439,7 +15515,7 @@
       </p:sp>
       <p:sp>
         <p:nvSpPr>
-          <p:cNvPr id="35" name="Text 31"/>
+          <p:cNvPr id="36" name="Text 32"/>
           <p:cNvSpPr/>
           <p:nvPr/>
         </p:nvSpPr>
@@ -15490,7 +15566,7 @@
                 <a:ea typeface="IBM Plex Sans KR" pitchFamily="34" charset="-122"/>
                 <a:cs typeface="IBM Plex Sans KR" pitchFamily="34" charset="-120"/>
               </a:rPr>
-              <a:t>BA 18GW 축소로 run-rate ex-AMPC EBITDA </a:t>
+              <a:t>ex-AMPC EBITDA 마진 9%→13% 시 run-rate EBITDA </a:t>
             </a:r>
             <a:pPr indent="0" marL="0">
               <a:lnSpc>
@@ -15501,13 +15577,13 @@
             <a:r>
               <a:rPr lang="en-US" sz="900" b="1" dirty="0">
                 <a:solidFill>
-                  <a:srgbClr val="C1121F"/>
+                  <a:srgbClr val="1E7A4D"/>
                 </a:solidFill>
                 <a:latin typeface="IBM Plex Sans KR" pitchFamily="34" charset="0"/>
                 <a:ea typeface="IBM Plex Sans KR" pitchFamily="34" charset="-122"/>
                 <a:cs typeface="IBM Plex Sans KR" pitchFamily="34" charset="-120"/>
               </a:rPr>
-              <a:t>$554→$518mm</a:t>
+              <a:t>$518→$748mm</a:t>
             </a:r>
             <a:pPr indent="0" marL="0">
               <a:lnSpc>
@@ -15535,13 +15611,13 @@
             <a:r>
               <a:rPr lang="en-US" sz="900" b="1" dirty="0">
                 <a:solidFill>
-                  <a:srgbClr val="C1121F"/>
+                  <a:srgbClr val="1E7A4D"/>
                 </a:solidFill>
                 <a:latin typeface="IBM Plex Sans KR" pitchFamily="34" charset="0"/>
                 <a:ea typeface="IBM Plex Sans KR" pitchFamily="34" charset="-122"/>
                 <a:cs typeface="IBM Plex Sans KR" pitchFamily="34" charset="-120"/>
               </a:rPr>
-              <a:t>13.5~16.5x — 최대결합 13.5x만 정상화 peer(13~15x) 하단 진입, BASE 16.5x는 초과</a:t>
+              <a:t>9.3~11.4x로 전 시나리오가 peer 밴드(8~13x) 진입</a:t>
             </a:r>
             <a:pPr indent="0" marL="0">
               <a:lnSpc>
@@ -15558,7 +15634,7 @@
                 <a:ea typeface="IBM Plex Sans KR" pitchFamily="34" charset="-122"/>
                 <a:cs typeface="IBM Plex Sans KR" pitchFamily="34" charset="-120"/>
               </a:rPr>
-              <a:t>(2029E 분모면 16.6~20.3x). DCF 내재 </a:t>
+              <a:t>(2029E 분모면 11.5~14.0x). DCF 내재 </a:t>
             </a:r>
             <a:pPr indent="0" marL="0">
               <a:lnSpc>
@@ -15575,7 +15651,7 @@
                 <a:ea typeface="IBM Plex Sans KR" pitchFamily="34" charset="-122"/>
                 <a:cs typeface="IBM Plex Sans KR" pitchFamily="34" charset="-120"/>
               </a:rPr>
-              <a:t>8.5x는 여전히 할인</a:t>
+              <a:t>8.1x</a:t>
             </a:r>
             <a:pPr indent="0" marL="0">
               <a:lnSpc>
@@ -15592,7 +15668,7 @@
                 <a:ea typeface="IBM Plex Sans KR" pitchFamily="34" charset="-122"/>
                 <a:cs typeface="IBM Plex Sans KR" pitchFamily="34" charset="-120"/>
               </a:rPr>
-              <a:t>이나, 규모 축소가 지분조달 여력을 악화 → 마진 개선(</a:t>
+              <a:t>. AMPC 비중 </a:t>
             </a:r>
             <a:pPr indent="0" marL="0">
               <a:lnSpc>
@@ -15603,13 +15679,13 @@
             <a:r>
               <a:rPr lang="en-US" sz="900" b="1" dirty="0">
                 <a:solidFill>
-                  <a:srgbClr val="C1121F"/>
+                  <a:srgbClr val="1E7A4D"/>
                 </a:solidFill>
                 <a:latin typeface="IBM Plex Sans KR" pitchFamily="34" charset="0"/>
                 <a:ea typeface="IBM Plex Sans KR" pitchFamily="34" charset="-122"/>
                 <a:cs typeface="IBM Plex Sans KR" pitchFamily="34" charset="-120"/>
               </a:rPr>
-              <a:t>필요 EBITDA% 9.3~11.4%</a:t>
+              <a:t>76→55%</a:t>
             </a:r>
             <a:pPr indent="0" marL="0">
               <a:lnSpc>
@@ -15626,7 +15702,7 @@
                 <a:ea typeface="IBM Plex Sans KR" pitchFamily="34" charset="-122"/>
                 <a:cs typeface="IBM Plex Sans KR" pitchFamily="34" charset="-120"/>
               </a:rPr>
-              <a:t>)·프리미엄 멀티플이 관건. peer는 자체보조금 포함(우리 ex-AMPC, 보수적).</a:t>
+              <a:t>로 사업 자생력↑ — 규모(GWh)보다 마진(%)이 밸류를 좌우. peer는 자체보조금 포함(우리 ex-AMPC, 보수적).</a:t>
             </a:r>
             <a:endParaRPr lang="en-US" sz="900" dirty="0"/>
           </a:p>
@@ -15634,7 +15710,7 @@
       </p:sp>
       <p:sp>
         <p:nvSpPr>
-          <p:cNvPr id="36" name="Shape 32"/>
+          <p:cNvPr id="37" name="Shape 33"/>
           <p:cNvSpPr/>
           <p:nvPr/>
         </p:nvSpPr>
@@ -15657,7 +15733,7 @@
       </p:sp>
       <p:sp>
         <p:nvSpPr>
-          <p:cNvPr id="37" name="Text 33"/>
+          <p:cNvPr id="38" name="Text 34"/>
           <p:cNvSpPr/>
           <p:nvPr/>
         </p:nvSpPr>
@@ -15696,7 +15772,7 @@
       </p:sp>
       <p:sp>
         <p:nvSpPr>
-          <p:cNvPr id="38" name="Text 34"/>
+          <p:cNvPr id="39" name="Text 35"/>
           <p:cNvSpPr/>
           <p:nvPr/>
         </p:nvSpPr>
